--- a/ground-vehicle/docs/courses/beginner-ps3/l3_controller_programming.pptx
+++ b/ground-vehicle/docs/courses/beginner-ps3/l3_controller_programming.pptx
@@ -3150,267 +3150,9 @@
           </a:p>
         </p:txBody>
       </p:sp>
-      <p:sp>
-        <p:nvSpPr>
-          <p:cNvPr id="3" name="TextBox 2"/>
-          <p:cNvSpPr txBox="1"/>
-          <p:nvPr/>
-        </p:nvSpPr>
-        <p:spPr>
-          <a:xfrm>
-            <a:off x="502920" y="1051560"/>
-            <a:ext cx="6492240" cy="365760"/>
-          </a:xfrm>
-          <a:prstGeom prst="rect">
-            <a:avLst/>
-          </a:prstGeom>
-          <a:noFill/>
-        </p:spPr>
-        <p:txBody>
-          <a:bodyPr wrap="square" lIns="0" tIns="0" rIns="0" bIns="0">
-            <a:spAutoFit/>
-          </a:bodyPr>
-          <a:lstStyle/>
-          <a:p>
-            <a:pPr algn="l">
-              <a:lnSpc>
-                <a:spcPct val="100000"/>
-              </a:lnSpc>
-              <a:spcAft>
-                <a:spcPts val="0"/>
-              </a:spcAft>
-              <a:defRPr sz="1600" b="1">
-                <a:solidFill>
-                  <a:srgbClr val="0E7C86"/>
-                </a:solidFill>
-                <a:latin typeface="Calibri"/>
-              </a:defRPr>
-            </a:pPr>
-            <a:r>
-              <a:rPr sz="1600" b="1">
-                <a:solidFill>
-                  <a:srgbClr val="0E7C86"/>
-                </a:solidFill>
-                <a:latin typeface="Calibri"/>
-              </a:rPr>
-              <a:t>LESSON 3</a:t>
-            </a:r>
-          </a:p>
-        </p:txBody>
-      </p:sp>
-      <p:sp>
-        <p:nvSpPr>
-          <p:cNvPr id="4" name="TextBox 3"/>
-          <p:cNvSpPr txBox="1"/>
-          <p:nvPr/>
-        </p:nvSpPr>
-        <p:spPr>
-          <a:xfrm>
-            <a:off x="502920" y="1481328"/>
-            <a:ext cx="6492240" cy="1554480"/>
-          </a:xfrm>
-          <a:prstGeom prst="rect">
-            <a:avLst/>
-          </a:prstGeom>
-          <a:noFill/>
-        </p:spPr>
-        <p:txBody>
-          <a:bodyPr wrap="square" lIns="0" tIns="0" rIns="0" bIns="0">
-            <a:spAutoFit/>
-          </a:bodyPr>
-          <a:lstStyle/>
-          <a:p>
-            <a:pPr algn="l">
-              <a:lnSpc>
-                <a:spcPct val="95000"/>
-              </a:lnSpc>
-              <a:spcAft>
-                <a:spcPts val="0"/>
-              </a:spcAft>
-              <a:defRPr sz="4000" b="1">
-                <a:solidFill>
-                  <a:srgbClr val="1F3A5F"/>
-                </a:solidFill>
-                <a:latin typeface="Calibri"/>
-              </a:defRPr>
-            </a:pPr>
-            <a:r>
-              <a:rPr sz="4000" b="1">
-                <a:solidFill>
-                  <a:srgbClr val="1F3A5F"/>
-                </a:solidFill>
-                <a:latin typeface="Calibri"/>
-              </a:rPr>
-              <a:t>Controller Programming</a:t>
-            </a:r>
-          </a:p>
-        </p:txBody>
-      </p:sp>
-      <p:sp>
-        <p:nvSpPr>
-          <p:cNvPr id="5" name="TextBox 4"/>
-          <p:cNvSpPr txBox="1"/>
-          <p:nvPr/>
-        </p:nvSpPr>
-        <p:spPr>
-          <a:xfrm>
-            <a:off x="502920" y="3154680"/>
-            <a:ext cx="6492240" cy="960120"/>
-          </a:xfrm>
-          <a:prstGeom prst="rect">
-            <a:avLst/>
-          </a:prstGeom>
-          <a:noFill/>
-        </p:spPr>
-        <p:txBody>
-          <a:bodyPr wrap="square" lIns="0" tIns="0" rIns="0" bIns="0">
-            <a:spAutoFit/>
-          </a:bodyPr>
-          <a:lstStyle/>
-          <a:p>
-            <a:pPr algn="l">
-              <a:lnSpc>
-                <a:spcPct val="100000"/>
-              </a:lnSpc>
-              <a:spcAft>
-                <a:spcPts val="0"/>
-              </a:spcAft>
-              <a:defRPr sz="1700" b="0">
-                <a:solidFill>
-                  <a:srgbClr val="222222"/>
-                </a:solidFill>
-                <a:latin typeface="Calibri"/>
-              </a:defRPr>
-            </a:pPr>
-            <a:r>
-              <a:rPr sz="1700" b="0">
-                <a:solidFill>
-                  <a:srgbClr val="222222"/>
-                </a:solidFill>
-                <a:latin typeface="Calibri"/>
-              </a:rPr>
-              <a:t>Bluetooth, thumbsticks, deadzones, and turning a number from your thumb into a speed for four wheels.</a:t>
-            </a:r>
-          </a:p>
-        </p:txBody>
-      </p:sp>
-      <p:sp>
-        <p:nvSpPr>
-          <p:cNvPr id="6" name="TextBox 5"/>
-          <p:cNvSpPr txBox="1"/>
-          <p:nvPr/>
-        </p:nvSpPr>
-        <p:spPr>
-          <a:xfrm>
-            <a:off x="502920" y="4224528"/>
-            <a:ext cx="6492240" cy="1371600"/>
-          </a:xfrm>
-          <a:prstGeom prst="rect">
-            <a:avLst/>
-          </a:prstGeom>
-          <a:noFill/>
-        </p:spPr>
-        <p:txBody>
-          <a:bodyPr wrap="square" lIns="0" tIns="0" rIns="0" bIns="0">
-            <a:spAutoFit/>
-          </a:bodyPr>
-          <a:lstStyle/>
-          <a:p>
-            <a:pPr algn="l">
-              <a:lnSpc>
-                <a:spcPct val="100000"/>
-              </a:lnSpc>
-              <a:spcAft>
-                <a:spcPts val="200"/>
-              </a:spcAft>
-              <a:defRPr sz="1300" b="0">
-                <a:solidFill>
-                  <a:srgbClr val="666666"/>
-                </a:solidFill>
-                <a:latin typeface="Calibri"/>
-              </a:defRPr>
-            </a:pPr>
-            <a:r>
-              <a:rPr sz="1300" b="0">
-                <a:solidFill>
-                  <a:srgbClr val="666666"/>
-                </a:solidFill>
-                <a:latin typeface="Calibri"/>
-              </a:rPr>
-              <a:t>Porpoise Robotics  -  porpoiserobotics.org</a:t>
-            </a:r>
-          </a:p>
-          <a:p>
-            <a:pPr algn="l">
-              <a:lnSpc>
-                <a:spcPct val="100000"/>
-              </a:lnSpc>
-              <a:spcAft>
-                <a:spcPts val="200"/>
-              </a:spcAft>
-              <a:defRPr sz="1300" b="0">
-                <a:solidFill>
-                  <a:srgbClr val="666666"/>
-                </a:solidFill>
-                <a:latin typeface="Calibri"/>
-              </a:defRPr>
-            </a:pPr>
-            <a:r>
-              <a:rPr sz="1300" b="0">
-                <a:solidFill>
-                  <a:srgbClr val="666666"/>
-                </a:solidFill>
-                <a:latin typeface="Calibri"/>
-              </a:rPr>
-              <a:t>Kevin P. Bowen, President  -  kbowen6@icloud.com</a:t>
-            </a:r>
-          </a:p>
-          <a:p>
-            <a:pPr algn="l">
-              <a:lnSpc>
-                <a:spcPct val="100000"/>
-              </a:lnSpc>
-              <a:spcAft>
-                <a:spcPts val="200"/>
-              </a:spcAft>
-              <a:defRPr sz="1300" b="0">
-                <a:solidFill>
-                  <a:srgbClr val="666666"/>
-                </a:solidFill>
-                <a:latin typeface="Calibri"/>
-              </a:defRPr>
-            </a:pPr>
-          </a:p>
-          <a:p>
-            <a:pPr algn="l">
-              <a:lnSpc>
-                <a:spcPct val="100000"/>
-              </a:lnSpc>
-              <a:spcAft>
-                <a:spcPts val="200"/>
-              </a:spcAft>
-              <a:defRPr sz="1300" b="0">
-                <a:solidFill>
-                  <a:srgbClr val="666666"/>
-                </a:solidFill>
-                <a:latin typeface="Calibri"/>
-              </a:defRPr>
-            </a:pPr>
-            <a:r>
-              <a:rPr sz="1300" b="0">
-                <a:solidFill>
-                  <a:srgbClr val="666666"/>
-                </a:solidFill>
-                <a:latin typeface="Calibri"/>
-              </a:rPr>
-              <a:t>Three hours.  Bring the PS3 controller paired to your vehicle.</a:t>
-            </a:r>
-          </a:p>
-        </p:txBody>
-      </p:sp>
       <p:pic>
         <p:nvPicPr>
-          <p:cNvPr id="7" name="Picture 6" descr="vehicle-with-ps3-controller.jpg"/>
+          <p:cNvPr id="3" name="Picture 2" descr="porpoise-logo.png"/>
           <p:cNvPicPr>
             <a:picLocks noChangeAspect="1"/>
           </p:cNvPicPr>
@@ -3424,8 +3166,8 @@
         </p:blipFill>
         <p:spPr>
           <a:xfrm>
-            <a:off x="7223760" y="1371600"/>
-            <a:ext cx="4480560" cy="3360420"/>
+            <a:off x="10922762" y="457200"/>
+            <a:ext cx="766013" cy="777240"/>
           </a:xfrm>
           <a:prstGeom prst="rect">
             <a:avLst/>
@@ -3434,7 +3176,289 @@
       </p:pic>
       <p:sp>
         <p:nvSpPr>
-          <p:cNvPr id="8" name="TextBox 7"/>
+          <p:cNvPr id="4" name="TextBox 3"/>
+          <p:cNvSpPr txBox="1"/>
+          <p:nvPr/>
+        </p:nvSpPr>
+        <p:spPr>
+          <a:xfrm>
+            <a:off x="502920" y="1051560"/>
+            <a:ext cx="6492240" cy="365760"/>
+          </a:xfrm>
+          <a:prstGeom prst="rect">
+            <a:avLst/>
+          </a:prstGeom>
+          <a:noFill/>
+        </p:spPr>
+        <p:txBody>
+          <a:bodyPr wrap="square" lIns="0" tIns="0" rIns="0" bIns="0">
+            <a:spAutoFit/>
+          </a:bodyPr>
+          <a:lstStyle/>
+          <a:p>
+            <a:pPr algn="l">
+              <a:lnSpc>
+                <a:spcPct val="100000"/>
+              </a:lnSpc>
+              <a:spcAft>
+                <a:spcPts val="0"/>
+              </a:spcAft>
+              <a:defRPr sz="1600" b="1">
+                <a:solidFill>
+                  <a:srgbClr val="0E7C86"/>
+                </a:solidFill>
+                <a:latin typeface="Calibri"/>
+              </a:defRPr>
+            </a:pPr>
+            <a:r>
+              <a:rPr sz="1600" b="1">
+                <a:solidFill>
+                  <a:srgbClr val="0E7C86"/>
+                </a:solidFill>
+                <a:latin typeface="Calibri"/>
+              </a:rPr>
+              <a:t>LESSON 3</a:t>
+            </a:r>
+          </a:p>
+        </p:txBody>
+      </p:sp>
+      <p:sp>
+        <p:nvSpPr>
+          <p:cNvPr id="5" name="TextBox 4"/>
+          <p:cNvSpPr txBox="1"/>
+          <p:nvPr/>
+        </p:nvSpPr>
+        <p:spPr>
+          <a:xfrm>
+            <a:off x="502920" y="1481328"/>
+            <a:ext cx="6492240" cy="1554480"/>
+          </a:xfrm>
+          <a:prstGeom prst="rect">
+            <a:avLst/>
+          </a:prstGeom>
+          <a:noFill/>
+        </p:spPr>
+        <p:txBody>
+          <a:bodyPr wrap="square" lIns="0" tIns="0" rIns="0" bIns="0">
+            <a:spAutoFit/>
+          </a:bodyPr>
+          <a:lstStyle/>
+          <a:p>
+            <a:pPr algn="l">
+              <a:lnSpc>
+                <a:spcPct val="95000"/>
+              </a:lnSpc>
+              <a:spcAft>
+                <a:spcPts val="0"/>
+              </a:spcAft>
+              <a:defRPr sz="4000" b="1">
+                <a:solidFill>
+                  <a:srgbClr val="1F3A5F"/>
+                </a:solidFill>
+                <a:latin typeface="Calibri"/>
+              </a:defRPr>
+            </a:pPr>
+            <a:r>
+              <a:rPr sz="4000" b="1">
+                <a:solidFill>
+                  <a:srgbClr val="1F3A5F"/>
+                </a:solidFill>
+                <a:latin typeface="Calibri"/>
+              </a:rPr>
+              <a:t>Controller Programming</a:t>
+            </a:r>
+          </a:p>
+        </p:txBody>
+      </p:sp>
+      <p:sp>
+        <p:nvSpPr>
+          <p:cNvPr id="6" name="TextBox 5"/>
+          <p:cNvSpPr txBox="1"/>
+          <p:nvPr/>
+        </p:nvSpPr>
+        <p:spPr>
+          <a:xfrm>
+            <a:off x="502920" y="3154680"/>
+            <a:ext cx="6492240" cy="960120"/>
+          </a:xfrm>
+          <a:prstGeom prst="rect">
+            <a:avLst/>
+          </a:prstGeom>
+          <a:noFill/>
+        </p:spPr>
+        <p:txBody>
+          <a:bodyPr wrap="square" lIns="0" tIns="0" rIns="0" bIns="0">
+            <a:spAutoFit/>
+          </a:bodyPr>
+          <a:lstStyle/>
+          <a:p>
+            <a:pPr algn="l">
+              <a:lnSpc>
+                <a:spcPct val="100000"/>
+              </a:lnSpc>
+              <a:spcAft>
+                <a:spcPts val="0"/>
+              </a:spcAft>
+              <a:defRPr sz="1700" b="0">
+                <a:solidFill>
+                  <a:srgbClr val="222222"/>
+                </a:solidFill>
+                <a:latin typeface="Calibri"/>
+              </a:defRPr>
+            </a:pPr>
+            <a:r>
+              <a:rPr sz="1700" b="0">
+                <a:solidFill>
+                  <a:srgbClr val="222222"/>
+                </a:solidFill>
+                <a:latin typeface="Calibri"/>
+              </a:rPr>
+              <a:t>Bluetooth, thumbsticks, deadzones, and turning a number from your thumb into a speed for four wheels.</a:t>
+            </a:r>
+          </a:p>
+        </p:txBody>
+      </p:sp>
+      <p:sp>
+        <p:nvSpPr>
+          <p:cNvPr id="7" name="TextBox 6"/>
+          <p:cNvSpPr txBox="1"/>
+          <p:nvPr/>
+        </p:nvSpPr>
+        <p:spPr>
+          <a:xfrm>
+            <a:off x="502920" y="4224528"/>
+            <a:ext cx="6492240" cy="1371600"/>
+          </a:xfrm>
+          <a:prstGeom prst="rect">
+            <a:avLst/>
+          </a:prstGeom>
+          <a:noFill/>
+        </p:spPr>
+        <p:txBody>
+          <a:bodyPr wrap="square" lIns="0" tIns="0" rIns="0" bIns="0">
+            <a:spAutoFit/>
+          </a:bodyPr>
+          <a:lstStyle/>
+          <a:p>
+            <a:pPr algn="l">
+              <a:lnSpc>
+                <a:spcPct val="100000"/>
+              </a:lnSpc>
+              <a:spcAft>
+                <a:spcPts val="200"/>
+              </a:spcAft>
+              <a:defRPr sz="1300" b="0">
+                <a:solidFill>
+                  <a:srgbClr val="666666"/>
+                </a:solidFill>
+                <a:latin typeface="Calibri"/>
+              </a:defRPr>
+            </a:pPr>
+            <a:r>
+              <a:rPr sz="1300" b="0">
+                <a:solidFill>
+                  <a:srgbClr val="666666"/>
+                </a:solidFill>
+                <a:latin typeface="Calibri"/>
+              </a:rPr>
+              <a:t>Porpoise Robotics  -  porpoiserobotics.org</a:t>
+            </a:r>
+          </a:p>
+          <a:p>
+            <a:pPr algn="l">
+              <a:lnSpc>
+                <a:spcPct val="100000"/>
+              </a:lnSpc>
+              <a:spcAft>
+                <a:spcPts val="200"/>
+              </a:spcAft>
+              <a:defRPr sz="1300" b="0">
+                <a:solidFill>
+                  <a:srgbClr val="666666"/>
+                </a:solidFill>
+                <a:latin typeface="Calibri"/>
+              </a:defRPr>
+            </a:pPr>
+            <a:r>
+              <a:rPr sz="1300" b="0">
+                <a:solidFill>
+                  <a:srgbClr val="666666"/>
+                </a:solidFill>
+                <a:latin typeface="Calibri"/>
+              </a:rPr>
+              <a:t>Kevin P. Bowen, President  -  kbowen6@icloud.com</a:t>
+            </a:r>
+          </a:p>
+          <a:p>
+            <a:pPr algn="l">
+              <a:lnSpc>
+                <a:spcPct val="100000"/>
+              </a:lnSpc>
+              <a:spcAft>
+                <a:spcPts val="200"/>
+              </a:spcAft>
+              <a:defRPr sz="1300" b="0">
+                <a:solidFill>
+                  <a:srgbClr val="666666"/>
+                </a:solidFill>
+                <a:latin typeface="Calibri"/>
+              </a:defRPr>
+            </a:pPr>
+          </a:p>
+          <a:p>
+            <a:pPr algn="l">
+              <a:lnSpc>
+                <a:spcPct val="100000"/>
+              </a:lnSpc>
+              <a:spcAft>
+                <a:spcPts val="200"/>
+              </a:spcAft>
+              <a:defRPr sz="1300" b="0">
+                <a:solidFill>
+                  <a:srgbClr val="666666"/>
+                </a:solidFill>
+                <a:latin typeface="Calibri"/>
+              </a:defRPr>
+            </a:pPr>
+            <a:r>
+              <a:rPr sz="1300" b="0">
+                <a:solidFill>
+                  <a:srgbClr val="666666"/>
+                </a:solidFill>
+                <a:latin typeface="Calibri"/>
+              </a:rPr>
+              <a:t>Three hours.  Bring the PS3 controller paired to your vehicle.</a:t>
+            </a:r>
+          </a:p>
+        </p:txBody>
+      </p:sp>
+      <p:pic>
+        <p:nvPicPr>
+          <p:cNvPr id="8" name="Picture 7" descr="vehicle-with-ps3-controller.jpg"/>
+          <p:cNvPicPr>
+            <a:picLocks noChangeAspect="1"/>
+          </p:cNvPicPr>
+          <p:nvPr/>
+        </p:nvPicPr>
+        <p:blipFill>
+          <a:blip r:embed="rId3"/>
+          <a:stretch>
+            <a:fillRect/>
+          </a:stretch>
+        </p:blipFill>
+        <p:spPr>
+          <a:xfrm>
+            <a:off x="7223760" y="1371600"/>
+            <a:ext cx="4480560" cy="3360420"/>
+          </a:xfrm>
+          <a:prstGeom prst="rect">
+            <a:avLst/>
+          </a:prstGeom>
+        </p:spPr>
+      </p:pic>
+      <p:sp>
+        <p:nvSpPr>
+          <p:cNvPr id="9" name="TextBox 8"/>
           <p:cNvSpPr txBox="1"/>
           <p:nvPr/>
         </p:nvSpPr>

--- a/ground-vehicle/docs/courses/beginner-ps3/l3_controller_programming.pptx
+++ b/ground-vehicle/docs/courses/beginner-ps3/l3_controller_programming.pptx
@@ -5373,7 +5373,7 @@
       </p:sp>
       <p:sp>
         <p:nvSpPr>
-          <p:cNvPr id="7" name="Rounded Rectangle 6"/>
+          <p:cNvPr id="7" name="CODE_PANEL"/>
           <p:cNvSpPr/>
           <p:nvPr/>
         </p:nvSpPr>
@@ -7207,7 +7207,7 @@
       </p:sp>
       <p:sp>
         <p:nvSpPr>
-          <p:cNvPr id="7" name="Rounded Rectangle 6"/>
+          <p:cNvPr id="7" name="CODE_PANEL"/>
           <p:cNvSpPr/>
           <p:nvPr/>
         </p:nvSpPr>
@@ -7531,7 +7531,7 @@
                 </a:solidFill>
                 <a:latin typeface="Consolas"/>
               </a:rPr>
-              <a:t>  int leftSpeed  = constrain(forward + turn, -255, 255);</a:t>
+              <a:t>  int leftSpeed  = constrain(forward + turn, -MOTOR_MAX, MOTOR_MAX);</a:t>
             </a:r>
           </a:p>
           <a:p>
@@ -7553,7 +7553,7 @@
                 </a:solidFill>
                 <a:latin typeface="Consolas"/>
               </a:rPr>
-              <a:t>  int rightSpeed = constrain(forward - turn, -255, 255);</a:t>
+              <a:t>  int rightSpeed = constrain(forward - turn, -MOTOR_MAX, MOTOR_MAX);</a:t>
             </a:r>
           </a:p>
           <a:p>

--- a/ground-vehicle/docs/courses/beginner-ps3/l3_controller_programming.pptx
+++ b/ground-vehicle/docs/courses/beginner-ps3/l3_controller_programming.pptx
@@ -6,37 +6,37 @@
   </p:sldMasterIdLst>
   <p:sldIdLst>
     <p:sldId id="256" r:id="rId7"/>
-    <p:sldId id="257" r:id="rId8"/>
-    <p:sldId id="258" r:id="rId9"/>
-    <p:sldId id="259" r:id="rId10"/>
-    <p:sldId id="260" r:id="rId11"/>
-    <p:sldId id="261" r:id="rId12"/>
-    <p:sldId id="262" r:id="rId13"/>
-    <p:sldId id="263" r:id="rId14"/>
-    <p:sldId id="264" r:id="rId15"/>
-    <p:sldId id="265" r:id="rId16"/>
-    <p:sldId id="266" r:id="rId17"/>
-    <p:sldId id="267" r:id="rId18"/>
-    <p:sldId id="268" r:id="rId19"/>
-    <p:sldId id="269" r:id="rId20"/>
-    <p:sldId id="270" r:id="rId21"/>
-    <p:sldId id="271" r:id="rId22"/>
-    <p:sldId id="272" r:id="rId23"/>
-    <p:sldId id="273" r:id="rId24"/>
-    <p:sldId id="274" r:id="rId25"/>
-    <p:sldId id="275" r:id="rId26"/>
-    <p:sldId id="276" r:id="rId27"/>
-    <p:sldId id="277" r:id="rId28"/>
-    <p:sldId id="278" r:id="rId29"/>
-    <p:sldId id="279" r:id="rId30"/>
-    <p:sldId id="280" r:id="rId31"/>
-    <p:sldId id="281" r:id="rId32"/>
-    <p:sldId id="282" r:id="rId33"/>
-    <p:sldId id="283" r:id="rId34"/>
-    <p:sldId id="284" r:id="rId35"/>
-    <p:sldId id="285" r:id="rId36"/>
-    <p:sldId id="286" r:id="rId37"/>
-    <p:sldId id="287" r:id="rId38"/>
+    <p:sldId id="257" r:id="rId9"/>
+    <p:sldId id="258" r:id="rId10"/>
+    <p:sldId id="259" r:id="rId11"/>
+    <p:sldId id="260" r:id="rId12"/>
+    <p:sldId id="261" r:id="rId13"/>
+    <p:sldId id="262" r:id="rId14"/>
+    <p:sldId id="263" r:id="rId15"/>
+    <p:sldId id="264" r:id="rId16"/>
+    <p:sldId id="265" r:id="rId17"/>
+    <p:sldId id="266" r:id="rId18"/>
+    <p:sldId id="267" r:id="rId19"/>
+    <p:sldId id="268" r:id="rId20"/>
+    <p:sldId id="269" r:id="rId21"/>
+    <p:sldId id="270" r:id="rId22"/>
+    <p:sldId id="271" r:id="rId23"/>
+    <p:sldId id="272" r:id="rId24"/>
+    <p:sldId id="273" r:id="rId25"/>
+    <p:sldId id="274" r:id="rId26"/>
+    <p:sldId id="275" r:id="rId27"/>
+    <p:sldId id="276" r:id="rId28"/>
+    <p:sldId id="277" r:id="rId29"/>
+    <p:sldId id="278" r:id="rId30"/>
+    <p:sldId id="279" r:id="rId31"/>
+    <p:sldId id="280" r:id="rId32"/>
+    <p:sldId id="281" r:id="rId33"/>
+    <p:sldId id="282" r:id="rId34"/>
+    <p:sldId id="283" r:id="rId35"/>
+    <p:sldId id="284" r:id="rId36"/>
+    <p:sldId id="285" r:id="rId37"/>
+    <p:sldId id="286" r:id="rId38"/>
+    <p:sldId id="287" r:id="rId39"/>
   </p:sldIdLst>
   <p:sldSz cx="12191695" cy="6858000" type="screen4x3"/>
   <p:notesSz cx="6858000" cy="9144000"/>
@@ -136,6 +136,3332 @@
     </a:lvl9pPr>
   </p:defaultTextStyle>
 </p:presentation>
+</file>
+
+<file path=ppt/notesMasters/notesMaster1.xml><?xml version="1.0" encoding="utf-8"?>
+<p:notesMaster xmlns:a="http://schemas.openxmlformats.org/drawingml/2006/main" xmlns:p="http://schemas.openxmlformats.org/presentationml/2006/main" xmlns:r="http://schemas.openxmlformats.org/officeDocument/2006/relationships">
+  <p:cSld>
+    <p:bg>
+      <p:bgRef idx="1001">
+        <a:schemeClr val="bg1"/>
+      </p:bgRef>
+    </p:bg>
+    <p:spTree>
+      <p:nvGrpSpPr>
+        <p:cNvPr id="1" name=""/>
+        <p:cNvGrpSpPr/>
+        <p:nvPr/>
+      </p:nvGrpSpPr>
+      <p:grpSpPr>
+        <a:xfrm>
+          <a:off x="0" y="0"/>
+          <a:ext cx="0" cy="0"/>
+          <a:chOff x="0" y="0"/>
+          <a:chExt cx="0" cy="0"/>
+        </a:xfrm>
+      </p:grpSpPr>
+      <p:sp>
+        <p:nvSpPr>
+          <p:cNvPr id="2" name="Header Placeholder 1"/>
+          <p:cNvSpPr>
+            <a:spLocks noGrp="1"/>
+          </p:cNvSpPr>
+          <p:nvPr>
+            <p:ph type="hdr" sz="quarter"/>
+          </p:nvPr>
+        </p:nvSpPr>
+        <p:spPr>
+          <a:xfrm>
+            <a:off x="0" y="0"/>
+            <a:ext cx="2971800" cy="457200"/>
+          </a:xfrm>
+          <a:prstGeom prst="rect">
+            <a:avLst/>
+          </a:prstGeom>
+        </p:spPr>
+        <p:txBody>
+          <a:bodyPr vert="horz" lIns="91440" tIns="45720" rIns="91440" bIns="45720" rtlCol="0"/>
+          <a:lstStyle>
+            <a:lvl1pPr algn="l">
+              <a:defRPr sz="1200"/>
+            </a:lvl1pPr>
+          </a:lstStyle>
+          <a:p>
+            <a:endParaRPr lang="en-US"/>
+          </a:p>
+        </p:txBody>
+      </p:sp>
+      <p:sp>
+        <p:nvSpPr>
+          <p:cNvPr id="3" name="Date Placeholder 2"/>
+          <p:cNvSpPr>
+            <a:spLocks noGrp="1"/>
+          </p:cNvSpPr>
+          <p:nvPr>
+            <p:ph type="dt" idx="1"/>
+          </p:nvPr>
+        </p:nvSpPr>
+        <p:spPr>
+          <a:xfrm>
+            <a:off x="3884613" y="0"/>
+            <a:ext cx="2971800" cy="457200"/>
+          </a:xfrm>
+          <a:prstGeom prst="rect">
+            <a:avLst/>
+          </a:prstGeom>
+        </p:spPr>
+        <p:txBody>
+          <a:bodyPr vert="horz" lIns="91440" tIns="45720" rIns="91440" bIns="45720" rtlCol="0"/>
+          <a:lstStyle>
+            <a:lvl1pPr algn="r">
+              <a:defRPr sz="1200"/>
+            </a:lvl1pPr>
+          </a:lstStyle>
+          <a:p>
+            <a:fld id="{0F89C1C7-3DCD-1040-A9CF-14679D8B5DDD}" type="datetimeFigureOut">
+              <a:rPr lang="en-US" smtClean="0"/>
+              <a:t>10/17/16</a:t>
+            </a:fld>
+            <a:endParaRPr lang="en-US"/>
+          </a:p>
+        </p:txBody>
+      </p:sp>
+      <p:sp>
+        <p:nvSpPr>
+          <p:cNvPr id="4" name="Slide Image Placeholder 3"/>
+          <p:cNvSpPr>
+            <a:spLocks noGrp="1" noRot="1" noChangeAspect="1"/>
+          </p:cNvSpPr>
+          <p:nvPr>
+            <p:ph type="sldImg" idx="2"/>
+          </p:nvPr>
+        </p:nvSpPr>
+        <p:spPr>
+          <a:xfrm>
+            <a:off x="1143000" y="685800"/>
+            <a:ext cx="4572000" cy="3429000"/>
+          </a:xfrm>
+          <a:prstGeom prst="rect">
+            <a:avLst/>
+          </a:prstGeom>
+          <a:noFill/>
+          <a:ln w="12700">
+            <a:solidFill>
+              <a:prstClr val="black"/>
+            </a:solidFill>
+          </a:ln>
+        </p:spPr>
+        <p:txBody>
+          <a:bodyPr vert="horz" lIns="91440" tIns="45720" rIns="91440" bIns="45720" rtlCol="0" anchor="ctr"/>
+          <a:lstStyle/>
+          <a:p>
+            <a:endParaRPr lang="en-US"/>
+          </a:p>
+        </p:txBody>
+      </p:sp>
+      <p:sp>
+        <p:nvSpPr>
+          <p:cNvPr id="5" name="Notes Placeholder 4"/>
+          <p:cNvSpPr>
+            <a:spLocks noGrp="1"/>
+          </p:cNvSpPr>
+          <p:nvPr>
+            <p:ph type="body" sz="quarter" idx="3"/>
+          </p:nvPr>
+        </p:nvSpPr>
+        <p:spPr>
+          <a:xfrm>
+            <a:off x="685800" y="4343400"/>
+            <a:ext cx="5486400" cy="4114800"/>
+          </a:xfrm>
+          <a:prstGeom prst="rect">
+            <a:avLst/>
+          </a:prstGeom>
+        </p:spPr>
+        <p:txBody>
+          <a:bodyPr vert="horz" lIns="91440" tIns="45720" rIns="91440" bIns="45720" rtlCol="0"/>
+          <a:lstStyle/>
+          <a:p>
+            <a:pPr lvl="0"/>
+            <a:r>
+              <a:rPr lang="en-US" smtClean="0"/>
+              <a:t>Click to edit Master text styles</a:t>
+            </a:r>
+          </a:p>
+          <a:p>
+            <a:pPr lvl="1"/>
+            <a:r>
+              <a:rPr lang="en-US" smtClean="0"/>
+              <a:t>Second level</a:t>
+            </a:r>
+          </a:p>
+          <a:p>
+            <a:pPr lvl="2"/>
+            <a:r>
+              <a:rPr lang="en-US" smtClean="0"/>
+              <a:t>Third level</a:t>
+            </a:r>
+          </a:p>
+          <a:p>
+            <a:pPr lvl="3"/>
+            <a:r>
+              <a:rPr lang="en-US" smtClean="0"/>
+              <a:t>Fourth level</a:t>
+            </a:r>
+          </a:p>
+          <a:p>
+            <a:pPr lvl="4"/>
+            <a:r>
+              <a:rPr lang="en-US" smtClean="0"/>
+              <a:t>Fifth level</a:t>
+            </a:r>
+            <a:endParaRPr lang="en-US"/>
+          </a:p>
+        </p:txBody>
+      </p:sp>
+      <p:sp>
+        <p:nvSpPr>
+          <p:cNvPr id="6" name="Footer Placeholder 5"/>
+          <p:cNvSpPr>
+            <a:spLocks noGrp="1"/>
+          </p:cNvSpPr>
+          <p:nvPr>
+            <p:ph type="ftr" sz="quarter" idx="4"/>
+          </p:nvPr>
+        </p:nvSpPr>
+        <p:spPr>
+          <a:xfrm>
+            <a:off x="0" y="8685213"/>
+            <a:ext cx="2971800" cy="457200"/>
+          </a:xfrm>
+          <a:prstGeom prst="rect">
+            <a:avLst/>
+          </a:prstGeom>
+        </p:spPr>
+        <p:txBody>
+          <a:bodyPr vert="horz" lIns="91440" tIns="45720" rIns="91440" bIns="45720" rtlCol="0" anchor="b"/>
+          <a:lstStyle>
+            <a:lvl1pPr algn="l">
+              <a:defRPr sz="1200"/>
+            </a:lvl1pPr>
+          </a:lstStyle>
+          <a:p>
+            <a:endParaRPr lang="en-US"/>
+          </a:p>
+        </p:txBody>
+      </p:sp>
+      <p:sp>
+        <p:nvSpPr>
+          <p:cNvPr id="7" name="Slide Number Placeholder 6"/>
+          <p:cNvSpPr>
+            <a:spLocks noGrp="1"/>
+          </p:cNvSpPr>
+          <p:nvPr>
+            <p:ph type="sldNum" sz="quarter" idx="5"/>
+          </p:nvPr>
+        </p:nvSpPr>
+        <p:spPr>
+          <a:xfrm>
+            <a:off x="3884613" y="8685213"/>
+            <a:ext cx="2971800" cy="457200"/>
+          </a:xfrm>
+          <a:prstGeom prst="rect">
+            <a:avLst/>
+          </a:prstGeom>
+        </p:spPr>
+        <p:txBody>
+          <a:bodyPr vert="horz" lIns="91440" tIns="45720" rIns="91440" bIns="45720" rtlCol="0" anchor="b"/>
+          <a:lstStyle>
+            <a:lvl1pPr algn="r">
+              <a:defRPr sz="1200"/>
+            </a:lvl1pPr>
+          </a:lstStyle>
+          <a:p>
+            <a:fld id="{BB5E49A5-4136-284D-997B-48E1D791AD67}" type="slidenum">
+              <a:rPr lang="en-US" smtClean="0"/>
+              <a:t>‹#›</a:t>
+            </a:fld>
+            <a:endParaRPr lang="en-US"/>
+          </a:p>
+        </p:txBody>
+      </p:sp>
+    </p:spTree>
+    <p:extLst>
+      <p:ext uri="{BB962C8B-B14F-4D97-AF65-F5344CB8AC3E}">
+        <p14:creationId xmlns:p14="http://schemas.microsoft.com/office/powerpoint/2010/main" val="2623252185"/>
+      </p:ext>
+    </p:extLst>
+  </p:cSld>
+  <p:clrMap bg1="lt1" tx1="dk1" bg2="lt2" tx2="dk2" accent1="accent1" accent2="accent2" accent3="accent3" accent4="accent4" accent5="accent5" accent6="accent6" hlink="hlink" folHlink="folHlink"/>
+  <p:notesStyle>
+    <a:lvl1pPr marL="0" algn="l" defTabSz="457200" rtl="0" eaLnBrk="1" latinLnBrk="0" hangingPunct="1">
+      <a:defRPr sz="1200" kern="1200">
+        <a:solidFill>
+          <a:schemeClr val="tx1"/>
+        </a:solidFill>
+        <a:latin typeface="+mn-lt"/>
+        <a:ea typeface="+mn-ea"/>
+        <a:cs typeface="+mn-cs"/>
+      </a:defRPr>
+    </a:lvl1pPr>
+    <a:lvl2pPr marL="457200" algn="l" defTabSz="457200" rtl="0" eaLnBrk="1" latinLnBrk="0" hangingPunct="1">
+      <a:defRPr sz="1200" kern="1200">
+        <a:solidFill>
+          <a:schemeClr val="tx1"/>
+        </a:solidFill>
+        <a:latin typeface="+mn-lt"/>
+        <a:ea typeface="+mn-ea"/>
+        <a:cs typeface="+mn-cs"/>
+      </a:defRPr>
+    </a:lvl2pPr>
+    <a:lvl3pPr marL="914400" algn="l" defTabSz="457200" rtl="0" eaLnBrk="1" latinLnBrk="0" hangingPunct="1">
+      <a:defRPr sz="1200" kern="1200">
+        <a:solidFill>
+          <a:schemeClr val="tx1"/>
+        </a:solidFill>
+        <a:latin typeface="+mn-lt"/>
+        <a:ea typeface="+mn-ea"/>
+        <a:cs typeface="+mn-cs"/>
+      </a:defRPr>
+    </a:lvl3pPr>
+    <a:lvl4pPr marL="1371600" algn="l" defTabSz="457200" rtl="0" eaLnBrk="1" latinLnBrk="0" hangingPunct="1">
+      <a:defRPr sz="1200" kern="1200">
+        <a:solidFill>
+          <a:schemeClr val="tx1"/>
+        </a:solidFill>
+        <a:latin typeface="+mn-lt"/>
+        <a:ea typeface="+mn-ea"/>
+        <a:cs typeface="+mn-cs"/>
+      </a:defRPr>
+    </a:lvl4pPr>
+    <a:lvl5pPr marL="1828800" algn="l" defTabSz="457200" rtl="0" eaLnBrk="1" latinLnBrk="0" hangingPunct="1">
+      <a:defRPr sz="1200" kern="1200">
+        <a:solidFill>
+          <a:schemeClr val="tx1"/>
+        </a:solidFill>
+        <a:latin typeface="+mn-lt"/>
+        <a:ea typeface="+mn-ea"/>
+        <a:cs typeface="+mn-cs"/>
+      </a:defRPr>
+    </a:lvl5pPr>
+    <a:lvl6pPr marL="2286000" algn="l" defTabSz="457200" rtl="0" eaLnBrk="1" latinLnBrk="0" hangingPunct="1">
+      <a:defRPr sz="1200" kern="1200">
+        <a:solidFill>
+          <a:schemeClr val="tx1"/>
+        </a:solidFill>
+        <a:latin typeface="+mn-lt"/>
+        <a:ea typeface="+mn-ea"/>
+        <a:cs typeface="+mn-cs"/>
+      </a:defRPr>
+    </a:lvl6pPr>
+    <a:lvl7pPr marL="2743200" algn="l" defTabSz="457200" rtl="0" eaLnBrk="1" latinLnBrk="0" hangingPunct="1">
+      <a:defRPr sz="1200" kern="1200">
+        <a:solidFill>
+          <a:schemeClr val="tx1"/>
+        </a:solidFill>
+        <a:latin typeface="+mn-lt"/>
+        <a:ea typeface="+mn-ea"/>
+        <a:cs typeface="+mn-cs"/>
+      </a:defRPr>
+    </a:lvl7pPr>
+    <a:lvl8pPr marL="3200400" algn="l" defTabSz="457200" rtl="0" eaLnBrk="1" latinLnBrk="0" hangingPunct="1">
+      <a:defRPr sz="1200" kern="1200">
+        <a:solidFill>
+          <a:schemeClr val="tx1"/>
+        </a:solidFill>
+        <a:latin typeface="+mn-lt"/>
+        <a:ea typeface="+mn-ea"/>
+        <a:cs typeface="+mn-cs"/>
+      </a:defRPr>
+    </a:lvl8pPr>
+    <a:lvl9pPr marL="3657600" algn="l" defTabSz="457200" rtl="0" eaLnBrk="1" latinLnBrk="0" hangingPunct="1">
+      <a:defRPr sz="1200" kern="1200">
+        <a:solidFill>
+          <a:schemeClr val="tx1"/>
+        </a:solidFill>
+        <a:latin typeface="+mn-lt"/>
+        <a:ea typeface="+mn-ea"/>
+        <a:cs typeface="+mn-cs"/>
+      </a:defRPr>
+    </a:lvl9pPr>
+  </p:notesStyle>
+</p:notesMaster>
+</file>
+
+<file path=ppt/notesSlides/notesSlide1.xml><?xml version="1.0" encoding="utf-8"?>
+<p:notes xmlns:a="http://schemas.openxmlformats.org/drawingml/2006/main" xmlns:p="http://schemas.openxmlformats.org/presentationml/2006/main" xmlns:r="http://schemas.openxmlformats.org/officeDocument/2006/relationships">
+  <p:cSld>
+    <p:spTree>
+      <p:nvGrpSpPr>
+        <p:cNvPr id="1" name=""/>
+        <p:cNvGrpSpPr/>
+        <p:nvPr/>
+      </p:nvGrpSpPr>
+      <p:grpSpPr>
+        <a:xfrm>
+          <a:off x="0" y="0"/>
+          <a:ext cx="0" cy="0"/>
+          <a:chOff x="0" y="0"/>
+          <a:chExt cx="0" cy="0"/>
+        </a:xfrm>
+      </p:grpSpPr>
+      <p:sp>
+        <p:nvSpPr>
+          <p:cNvPr id="2" name="Slide Image Placeholder 1"/>
+          <p:cNvSpPr>
+            <a:spLocks noGrp="1"/>
+          </p:cNvSpPr>
+          <p:nvPr>
+            <p:ph type="sldImg" idx="2"/>
+          </p:nvPr>
+        </p:nvSpPr>
+        <p:spPr/>
+      </p:sp>
+      <p:sp>
+        <p:nvSpPr>
+          <p:cNvPr id="3" name="Notes Placeholder 2"/>
+          <p:cNvSpPr>
+            <a:spLocks noGrp="1"/>
+          </p:cNvSpPr>
+          <p:nvPr>
+            <p:ph type="body" idx="3" sz="quarter"/>
+          </p:nvPr>
+        </p:nvSpPr>
+        <p:spPr/>
+        <p:txBody>
+          <a:bodyPr/>
+          <a:lstStyle/>
+          <a:p>
+            <a:r>
+              <a:rPr sz="1200">
+                <a:latin typeface="Calibri"/>
+              </a:rPr>
+              <a:t>Controllers charged and paired before the class starts. A flat pad costs you twenty minutes you do not have.</a:t>
+            </a:r>
+          </a:p>
+          <a:p>
+            <a:r>
+              <a:rPr sz="1200">
+                <a:latin typeface="Calibri"/>
+              </a:rPr>
+              <a:t>Today is the lesson they came for. Say so, then make them earn it - everything before the last hour is print-only.</a:t>
+            </a:r>
+          </a:p>
+        </p:txBody>
+      </p:sp>
+      <p:sp>
+        <p:nvSpPr>
+          <p:cNvPr id="4" name="Slide Number Placeholder 3"/>
+          <p:cNvSpPr>
+            <a:spLocks noGrp="1"/>
+          </p:cNvSpPr>
+          <p:nvPr>
+            <p:ph type="sldNum" idx="5" sz="quarter"/>
+          </p:nvPr>
+        </p:nvSpPr>
+        <p:spPr/>
+      </p:sp>
+    </p:spTree>
+  </p:cSld>
+  <p:clrMapOvr>
+    <a:masterClrMapping/>
+  </p:clrMapOvr>
+</p:notes>
+</file>
+
+<file path=ppt/notesSlides/notesSlide10.xml><?xml version="1.0" encoding="utf-8"?>
+<p:notes xmlns:a="http://schemas.openxmlformats.org/drawingml/2006/main" xmlns:p="http://schemas.openxmlformats.org/presentationml/2006/main" xmlns:r="http://schemas.openxmlformats.org/officeDocument/2006/relationships">
+  <p:cSld>
+    <p:spTree>
+      <p:nvGrpSpPr>
+        <p:cNvPr id="1" name=""/>
+        <p:cNvGrpSpPr/>
+        <p:nvPr/>
+      </p:nvGrpSpPr>
+      <p:grpSpPr>
+        <a:xfrm>
+          <a:off x="0" y="0"/>
+          <a:ext cx="0" cy="0"/>
+          <a:chOff x="0" y="0"/>
+          <a:chExt cx="0" cy="0"/>
+        </a:xfrm>
+      </p:grpSpPr>
+      <p:sp>
+        <p:nvSpPr>
+          <p:cNvPr id="2" name="Slide Image Placeholder 1"/>
+          <p:cNvSpPr>
+            <a:spLocks noGrp="1"/>
+          </p:cNvSpPr>
+          <p:nvPr>
+            <p:ph type="sldImg" idx="2"/>
+          </p:nvPr>
+        </p:nvSpPr>
+        <p:spPr/>
+      </p:sp>
+      <p:sp>
+        <p:nvSpPr>
+          <p:cNvPr id="3" name="Notes Placeholder 2"/>
+          <p:cNvSpPr>
+            <a:spLocks noGrp="1"/>
+          </p:cNvSpPr>
+          <p:nvPr>
+            <p:ph type="body" idx="3" sz="quarter"/>
+          </p:nvPr>
+        </p:nvSpPr>
+        <p:spPr/>
+        <p:txBody>
+          <a:bodyPr/>
+          <a:lstStyle/>
+          <a:p>
+            <a:r>
+              <a:rPr sz="1200">
+                <a:latin typeface="Calibri"/>
+              </a:rPr>
+              <a:t>Digital and analog is a distinction they will use for the rest of their lives. Two minutes, properly.</a:t>
+            </a:r>
+          </a:p>
+          <a:p>
+            <a:r>
+              <a:rPr sz="1200">
+                <a:latin typeface="Calibri"/>
+              </a:rPr>
+              <a:t>The warning panel is the one to read out. Push a stick up and the number goes negative - it catches everybody, and it is why there is a minus sign in the driving code.</a:t>
+            </a:r>
+          </a:p>
+          <a:p>
+            <a:r>
+              <a:rPr sz="1200">
+                <a:latin typeface="Calibri"/>
+              </a:rPr>
+              <a:t>Have a controller in your hand and press the things as you name them.</a:t>
+            </a:r>
+          </a:p>
+        </p:txBody>
+      </p:sp>
+      <p:sp>
+        <p:nvSpPr>
+          <p:cNvPr id="4" name="Slide Number Placeholder 3"/>
+          <p:cNvSpPr>
+            <a:spLocks noGrp="1"/>
+          </p:cNvSpPr>
+          <p:nvPr>
+            <p:ph type="sldNum" idx="5" sz="quarter"/>
+          </p:nvPr>
+        </p:nvSpPr>
+        <p:spPr/>
+      </p:sp>
+    </p:spTree>
+  </p:cSld>
+  <p:clrMapOvr>
+    <a:masterClrMapping/>
+  </p:clrMapOvr>
+</p:notes>
+</file>
+
+<file path=ppt/notesSlides/notesSlide11.xml><?xml version="1.0" encoding="utf-8"?>
+<p:notes xmlns:a="http://schemas.openxmlformats.org/drawingml/2006/main" xmlns:p="http://schemas.openxmlformats.org/presentationml/2006/main" xmlns:r="http://schemas.openxmlformats.org/officeDocument/2006/relationships">
+  <p:cSld>
+    <p:spTree>
+      <p:nvGrpSpPr>
+        <p:cNvPr id="1" name=""/>
+        <p:cNvGrpSpPr/>
+        <p:nvPr/>
+      </p:nvGrpSpPr>
+      <p:grpSpPr>
+        <a:xfrm>
+          <a:off x="0" y="0"/>
+          <a:ext cx="0" cy="0"/>
+          <a:chOff x="0" y="0"/>
+          <a:chExt cx="0" cy="0"/>
+        </a:xfrm>
+      </p:grpSpPr>
+      <p:sp>
+        <p:nvSpPr>
+          <p:cNvPr id="2" name="Slide Image Placeholder 1"/>
+          <p:cNvSpPr>
+            <a:spLocks noGrp="1"/>
+          </p:cNvSpPr>
+          <p:nvPr>
+            <p:ph type="sldImg" idx="2"/>
+          </p:nvPr>
+        </p:nvSpPr>
+        <p:spPr/>
+      </p:sp>
+      <p:sp>
+        <p:nvSpPr>
+          <p:cNvPr id="3" name="Notes Placeholder 2"/>
+          <p:cNvSpPr>
+            <a:spLocks noGrp="1"/>
+          </p:cNvSpPr>
+          <p:nvPr>
+            <p:ph type="body" idx="3" sz="quarter"/>
+          </p:nvPr>
+        </p:nvSpPr>
+        <p:spPr/>
+        <p:txBody>
+          <a:bodyPr/>
+          <a:lstStyle/>
+          <a:p>
+            <a:r>
+              <a:rPr sz="1200">
+                <a:latin typeface="Calibri"/>
+              </a:rPr>
+              <a:t>Six degrees of freedom is genuinely useful vocabulary and it costs three minutes.</a:t>
+            </a:r>
+          </a:p>
+          <a:p>
+            <a:r>
+              <a:rPr sz="1200">
+                <a:latin typeface="Calibri"/>
+              </a:rPr>
+              <a:t>Demonstrate with your hand: three slides, three twists.</a:t>
+            </a:r>
+          </a:p>
+          <a:p>
+            <a:r>
+              <a:rPr sz="1200">
+                <a:latin typeface="Calibri"/>
+              </a:rPr>
+              <a:t>A rover on a flat floor really only has surge and yaw. That is why one stick is enough here and why a submersible pilot needs two.</a:t>
+            </a:r>
+          </a:p>
+          <a:p>
+            <a:r>
+              <a:rPr sz="1200">
+                <a:latin typeface="Calibri"/>
+              </a:rPr>
+              <a:t>The Sixaxis palindrome is a cheap laugh and it makes the name stick.</a:t>
+            </a:r>
+          </a:p>
+        </p:txBody>
+      </p:sp>
+      <p:sp>
+        <p:nvSpPr>
+          <p:cNvPr id="4" name="Slide Number Placeholder 3"/>
+          <p:cNvSpPr>
+            <a:spLocks noGrp="1"/>
+          </p:cNvSpPr>
+          <p:nvPr>
+            <p:ph type="sldNum" idx="5" sz="quarter"/>
+          </p:nvPr>
+        </p:nvSpPr>
+        <p:spPr/>
+      </p:sp>
+    </p:spTree>
+  </p:cSld>
+  <p:clrMapOvr>
+    <a:masterClrMapping/>
+  </p:clrMapOvr>
+</p:notes>
+</file>
+
+<file path=ppt/notesSlides/notesSlide12.xml><?xml version="1.0" encoding="utf-8"?>
+<p:notes xmlns:a="http://schemas.openxmlformats.org/drawingml/2006/main" xmlns:p="http://schemas.openxmlformats.org/presentationml/2006/main" xmlns:r="http://schemas.openxmlformats.org/officeDocument/2006/relationships">
+  <p:cSld>
+    <p:spTree>
+      <p:nvGrpSpPr>
+        <p:cNvPr id="1" name=""/>
+        <p:cNvGrpSpPr/>
+        <p:nvPr/>
+      </p:nvGrpSpPr>
+      <p:grpSpPr>
+        <a:xfrm>
+          <a:off x="0" y="0"/>
+          <a:ext cx="0" cy="0"/>
+          <a:chOff x="0" y="0"/>
+          <a:chExt cx="0" cy="0"/>
+        </a:xfrm>
+      </p:grpSpPr>
+      <p:sp>
+        <p:nvSpPr>
+          <p:cNvPr id="2" name="Slide Image Placeholder 1"/>
+          <p:cNvSpPr>
+            <a:spLocks noGrp="1"/>
+          </p:cNvSpPr>
+          <p:nvPr>
+            <p:ph type="sldImg" idx="2"/>
+          </p:nvPr>
+        </p:nvSpPr>
+        <p:spPr/>
+      </p:sp>
+      <p:sp>
+        <p:nvSpPr>
+          <p:cNvPr id="3" name="Notes Placeholder 2"/>
+          <p:cNvSpPr>
+            <a:spLocks noGrp="1"/>
+          </p:cNvSpPr>
+          <p:nvPr>
+            <p:ph type="body" idx="3" sz="quarter"/>
+          </p:nvPr>
+        </p:nvSpPr>
+        <p:spPr/>
+        <p:txBody>
+          <a:bodyPr/>
+          <a:lstStyle/>
+          <a:p>
+            <a:r>
+              <a:rPr sz="1200">
+                <a:latin typeface="Calibri"/>
+              </a:rPr>
+              <a:t>(Continued from the previous slide - the same notes apply.)</a:t>
+            </a:r>
+          </a:p>
+          <a:p/>
+          <a:p>
+            <a:r>
+              <a:rPr sz="1200">
+                <a:latin typeface="Calibri"/>
+              </a:rPr>
+              <a:t>Six degrees of freedom is genuinely useful vocabulary and it costs three minutes.</a:t>
+            </a:r>
+          </a:p>
+          <a:p>
+            <a:r>
+              <a:rPr sz="1200">
+                <a:latin typeface="Calibri"/>
+              </a:rPr>
+              <a:t>Demonstrate with your hand: three slides, three twists.</a:t>
+            </a:r>
+          </a:p>
+          <a:p>
+            <a:r>
+              <a:rPr sz="1200">
+                <a:latin typeface="Calibri"/>
+              </a:rPr>
+              <a:t>A rover on a flat floor really only has surge and yaw. That is why one stick is enough here and why a submersible pilot needs two.</a:t>
+            </a:r>
+          </a:p>
+          <a:p>
+            <a:r>
+              <a:rPr sz="1200">
+                <a:latin typeface="Calibri"/>
+              </a:rPr>
+              <a:t>The Sixaxis palindrome is a cheap laugh and it makes the name stick.</a:t>
+            </a:r>
+          </a:p>
+        </p:txBody>
+      </p:sp>
+      <p:sp>
+        <p:nvSpPr>
+          <p:cNvPr id="4" name="Slide Number Placeholder 3"/>
+          <p:cNvSpPr>
+            <a:spLocks noGrp="1"/>
+          </p:cNvSpPr>
+          <p:nvPr>
+            <p:ph type="sldNum" idx="5" sz="quarter"/>
+          </p:nvPr>
+        </p:nvSpPr>
+        <p:spPr/>
+      </p:sp>
+    </p:spTree>
+  </p:cSld>
+  <p:clrMapOvr>
+    <a:masterClrMapping/>
+  </p:clrMapOvr>
+</p:notes>
+</file>
+
+<file path=ppt/notesSlides/notesSlide13.xml><?xml version="1.0" encoding="utf-8"?>
+<p:notes xmlns:a="http://schemas.openxmlformats.org/drawingml/2006/main" xmlns:p="http://schemas.openxmlformats.org/presentationml/2006/main" xmlns:r="http://schemas.openxmlformats.org/officeDocument/2006/relationships">
+  <p:cSld>
+    <p:spTree>
+      <p:nvGrpSpPr>
+        <p:cNvPr id="1" name=""/>
+        <p:cNvGrpSpPr/>
+        <p:nvPr/>
+      </p:nvGrpSpPr>
+      <p:grpSpPr>
+        <a:xfrm>
+          <a:off x="0" y="0"/>
+          <a:ext cx="0" cy="0"/>
+          <a:chOff x="0" y="0"/>
+          <a:chExt cx="0" cy="0"/>
+        </a:xfrm>
+      </p:grpSpPr>
+      <p:sp>
+        <p:nvSpPr>
+          <p:cNvPr id="2" name="Slide Image Placeholder 1"/>
+          <p:cNvSpPr>
+            <a:spLocks noGrp="1"/>
+          </p:cNvSpPr>
+          <p:nvPr>
+            <p:ph type="sldImg" idx="2"/>
+          </p:nvPr>
+        </p:nvSpPr>
+        <p:spPr/>
+      </p:sp>
+      <p:sp>
+        <p:nvSpPr>
+          <p:cNvPr id="3" name="Notes Placeholder 2"/>
+          <p:cNvSpPr>
+            <a:spLocks noGrp="1"/>
+          </p:cNvSpPr>
+          <p:nvPr>
+            <p:ph type="body" idx="3" sz="quarter"/>
+          </p:nvPr>
+        </p:nvSpPr>
+        <p:spPr/>
+        <p:txBody>
+          <a:bodyPr/>
+          <a:lstStyle/>
+          <a:p>
+            <a:r>
+              <a:rPr sz="1200">
+                <a:latin typeface="Calibri"/>
+              </a:rPr>
+              <a:t>Six ways a rigid body can move. Three slides, three twists, and nothing else.</a:t>
+            </a:r>
+          </a:p>
+          <a:p>
+            <a:r>
+              <a:rPr sz="1200">
+                <a:latin typeface="Calibri"/>
+              </a:rPr>
+              <a:t>Demonstrate with your hand held flat before you show the diagram. Slide it forward, sideways, up. Then tip it, nose it down, spin it.</a:t>
+            </a:r>
+          </a:p>
+          <a:p>
+            <a:r>
+              <a:rPr sz="1200">
+                <a:latin typeface="Calibri"/>
+              </a:rPr>
+              <a:t>The two boxed in teal are the two a rover on a flat floor can actually control. That is why one stick with two axes is enough here.</a:t>
+            </a:r>
+          </a:p>
+          <a:p>
+            <a:r>
+              <a:rPr sz="1200">
+                <a:latin typeface="Calibri"/>
+              </a:rPr>
+              <a:t>A submersible or an aircraft controls all six, which is why an ROV pilot needs two sticks and far more practice.</a:t>
+            </a:r>
+          </a:p>
+          <a:p>
+            <a:r>
+              <a:rPr sz="1200">
+                <a:latin typeface="Calibri"/>
+              </a:rPr>
+              <a:t>Sway is the interesting one to ask about. A rover cannot slide sideways - it has to yaw and then surge. Ask them why.</a:t>
+            </a:r>
+          </a:p>
+        </p:txBody>
+      </p:sp>
+      <p:sp>
+        <p:nvSpPr>
+          <p:cNvPr id="4" name="Slide Number Placeholder 3"/>
+          <p:cNvSpPr>
+            <a:spLocks noGrp="1"/>
+          </p:cNvSpPr>
+          <p:nvPr>
+            <p:ph type="sldNum" idx="5" sz="quarter"/>
+          </p:nvPr>
+        </p:nvSpPr>
+        <p:spPr/>
+      </p:sp>
+    </p:spTree>
+  </p:cSld>
+  <p:clrMapOvr>
+    <a:masterClrMapping/>
+  </p:clrMapOvr>
+</p:notes>
+</file>
+
+<file path=ppt/notesSlides/notesSlide14.xml><?xml version="1.0" encoding="utf-8"?>
+<p:notes xmlns:a="http://schemas.openxmlformats.org/drawingml/2006/main" xmlns:p="http://schemas.openxmlformats.org/presentationml/2006/main" xmlns:r="http://schemas.openxmlformats.org/officeDocument/2006/relationships">
+  <p:cSld>
+    <p:spTree>
+      <p:nvGrpSpPr>
+        <p:cNvPr id="1" name=""/>
+        <p:cNvGrpSpPr/>
+        <p:nvPr/>
+      </p:nvGrpSpPr>
+      <p:grpSpPr>
+        <a:xfrm>
+          <a:off x="0" y="0"/>
+          <a:ext cx="0" cy="0"/>
+          <a:chOff x="0" y="0"/>
+          <a:chExt cx="0" cy="0"/>
+        </a:xfrm>
+      </p:grpSpPr>
+      <p:sp>
+        <p:nvSpPr>
+          <p:cNvPr id="2" name="Slide Image Placeholder 1"/>
+          <p:cNvSpPr>
+            <a:spLocks noGrp="1"/>
+          </p:cNvSpPr>
+          <p:nvPr>
+            <p:ph type="sldImg" idx="2"/>
+          </p:nvPr>
+        </p:nvSpPr>
+        <p:spPr/>
+      </p:sp>
+      <p:sp>
+        <p:nvSpPr>
+          <p:cNvPr id="3" name="Notes Placeholder 2"/>
+          <p:cNvSpPr>
+            <a:spLocks noGrp="1"/>
+          </p:cNvSpPr>
+          <p:nvPr>
+            <p:ph type="body" idx="3" sz="quarter"/>
+          </p:nvPr>
+        </p:nvSpPr>
+        <p:spPr/>
+        <p:txBody>
+          <a:bodyPr/>
+          <a:lstStyle/>
+          <a:p>
+            <a:r>
+              <a:rPr sz="1200">
+                <a:latin typeface="Calibri"/>
+              </a:rPr>
+              <a:t>Twenty seconds. First of three.</a:t>
+            </a:r>
+          </a:p>
+        </p:txBody>
+      </p:sp>
+      <p:sp>
+        <p:nvSpPr>
+          <p:cNvPr id="4" name="Slide Number Placeholder 3"/>
+          <p:cNvSpPr>
+            <a:spLocks noGrp="1"/>
+          </p:cNvSpPr>
+          <p:nvPr>
+            <p:ph type="sldNum" idx="5" sz="quarter"/>
+          </p:nvPr>
+        </p:nvSpPr>
+        <p:spPr/>
+      </p:sp>
+    </p:spTree>
+  </p:cSld>
+  <p:clrMapOvr>
+    <a:masterClrMapping/>
+  </p:clrMapOvr>
+</p:notes>
+</file>
+
+<file path=ppt/notesSlides/notesSlide15.xml><?xml version="1.0" encoding="utf-8"?>
+<p:notes xmlns:a="http://schemas.openxmlformats.org/drawingml/2006/main" xmlns:p="http://schemas.openxmlformats.org/presentationml/2006/main" xmlns:r="http://schemas.openxmlformats.org/officeDocument/2006/relationships">
+  <p:cSld>
+    <p:spTree>
+      <p:nvGrpSpPr>
+        <p:cNvPr id="1" name=""/>
+        <p:cNvGrpSpPr/>
+        <p:nvPr/>
+      </p:nvGrpSpPr>
+      <p:grpSpPr>
+        <a:xfrm>
+          <a:off x="0" y="0"/>
+          <a:ext cx="0" cy="0"/>
+          <a:chOff x="0" y="0"/>
+          <a:chExt cx="0" cy="0"/>
+        </a:xfrm>
+      </p:grpSpPr>
+      <p:sp>
+        <p:nvSpPr>
+          <p:cNvPr id="2" name="Slide Image Placeholder 1"/>
+          <p:cNvSpPr>
+            <a:spLocks noGrp="1"/>
+          </p:cNvSpPr>
+          <p:nvPr>
+            <p:ph type="sldImg" idx="2"/>
+          </p:nvPr>
+        </p:nvSpPr>
+        <p:spPr/>
+      </p:sp>
+      <p:sp>
+        <p:nvSpPr>
+          <p:cNvPr id="3" name="Notes Placeholder 2"/>
+          <p:cNvSpPr>
+            <a:spLocks noGrp="1"/>
+          </p:cNvSpPr>
+          <p:nvPr>
+            <p:ph type="body" idx="3" sz="quarter"/>
+          </p:nvPr>
+        </p:nvSpPr>
+        <p:spPr/>
+        <p:txBody>
+          <a:bodyPr/>
+          <a:lstStyle/>
+          <a:p>
+            <a:r>
+              <a:rPr sz="1200">
+                <a:latin typeface="Calibri"/>
+              </a:rPr>
+              <a:t>This is a reading exercise, not a driving one. Nothing moves.</a:t>
+            </a:r>
+          </a:p>
+          <a:p>
+            <a:r>
+              <a:rPr sz="1200">
+                <a:latin typeface="Calibri"/>
+              </a:rPr>
+              <a:t>Step 5 is the one that sets up the whole deadzone section: hands off, and watch the number refuse to sit at zero.</a:t>
+            </a:r>
+          </a:p>
+          <a:p>
+            <a:r>
+              <a:rPr sz="1200">
+                <a:latin typeface="Calibri"/>
+              </a:rPr>
+              <a:t>On the Switch track, step 7 gives them the MY_CONTROLLER line they need for the rest of the day. Make sure it is written down or pasted immediately - it is easy to lose.</a:t>
+            </a:r>
+          </a:p>
+          <a:p>
+            <a:r>
+              <a:rPr sz="1200">
+                <a:latin typeface="Calibri"/>
+              </a:rPr>
+              <a:t>Walk round with a list of button names. Somebody will find a button that prints nothing, and that is usually a third-party pad rather than a fault.</a:t>
+            </a:r>
+          </a:p>
+        </p:txBody>
+      </p:sp>
+      <p:sp>
+        <p:nvSpPr>
+          <p:cNvPr id="4" name="Slide Number Placeholder 3"/>
+          <p:cNvSpPr>
+            <a:spLocks noGrp="1"/>
+          </p:cNvSpPr>
+          <p:nvPr>
+            <p:ph type="sldNum" idx="5" sz="quarter"/>
+          </p:nvPr>
+        </p:nvSpPr>
+        <p:spPr/>
+      </p:sp>
+    </p:spTree>
+  </p:cSld>
+  <p:clrMapOvr>
+    <a:masterClrMapping/>
+  </p:clrMapOvr>
+</p:notes>
+</file>
+
+<file path=ppt/notesSlides/notesSlide16.xml><?xml version="1.0" encoding="utf-8"?>
+<p:notes xmlns:a="http://schemas.openxmlformats.org/drawingml/2006/main" xmlns:p="http://schemas.openxmlformats.org/presentationml/2006/main" xmlns:r="http://schemas.openxmlformats.org/officeDocument/2006/relationships">
+  <p:cSld>
+    <p:spTree>
+      <p:nvGrpSpPr>
+        <p:cNvPr id="1" name=""/>
+        <p:cNvGrpSpPr/>
+        <p:nvPr/>
+      </p:nvGrpSpPr>
+      <p:grpSpPr>
+        <a:xfrm>
+          <a:off x="0" y="0"/>
+          <a:ext cx="0" cy="0"/>
+          <a:chOff x="0" y="0"/>
+          <a:chExt cx="0" cy="0"/>
+        </a:xfrm>
+      </p:grpSpPr>
+      <p:sp>
+        <p:nvSpPr>
+          <p:cNvPr id="2" name="Slide Image Placeholder 1"/>
+          <p:cNvSpPr>
+            <a:spLocks noGrp="1"/>
+          </p:cNvSpPr>
+          <p:nvPr>
+            <p:ph type="sldImg" idx="2"/>
+          </p:nvPr>
+        </p:nvSpPr>
+        <p:spPr/>
+      </p:sp>
+      <p:sp>
+        <p:nvSpPr>
+          <p:cNvPr id="3" name="Notes Placeholder 2"/>
+          <p:cNvSpPr>
+            <a:spLocks noGrp="1"/>
+          </p:cNvSpPr>
+          <p:nvPr>
+            <p:ph type="body" idx="3" sz="quarter"/>
+          </p:nvPr>
+        </p:nvSpPr>
+        <p:spPr/>
+        <p:txBody>
+          <a:bodyPr/>
+          <a:lstStyle/>
+          <a:p>
+            <a:r>
+              <a:rPr sz="1200">
+                <a:latin typeface="Calibri"/>
+              </a:rPr>
+              <a:t>(Continued from the previous slide - the same notes apply.)</a:t>
+            </a:r>
+          </a:p>
+          <a:p/>
+          <a:p>
+            <a:r>
+              <a:rPr sz="1200">
+                <a:latin typeface="Calibri"/>
+              </a:rPr>
+              <a:t>This is a reading exercise, not a driving one. Nothing moves.</a:t>
+            </a:r>
+          </a:p>
+          <a:p>
+            <a:r>
+              <a:rPr sz="1200">
+                <a:latin typeface="Calibri"/>
+              </a:rPr>
+              <a:t>Step 5 is the one that sets up the whole deadzone section: hands off, and watch the number refuse to sit at zero.</a:t>
+            </a:r>
+          </a:p>
+          <a:p>
+            <a:r>
+              <a:rPr sz="1200">
+                <a:latin typeface="Calibri"/>
+              </a:rPr>
+              <a:t>On the Switch track, step 7 gives them the MY_CONTROLLER line they need for the rest of the day. Make sure it is written down or pasted immediately - it is easy to lose.</a:t>
+            </a:r>
+          </a:p>
+          <a:p>
+            <a:r>
+              <a:rPr sz="1200">
+                <a:latin typeface="Calibri"/>
+              </a:rPr>
+              <a:t>Walk round with a list of button names. Somebody will find a button that prints nothing, and that is usually a third-party pad rather than a fault.</a:t>
+            </a:r>
+          </a:p>
+        </p:txBody>
+      </p:sp>
+      <p:sp>
+        <p:nvSpPr>
+          <p:cNvPr id="4" name="Slide Number Placeholder 3"/>
+          <p:cNvSpPr>
+            <a:spLocks noGrp="1"/>
+          </p:cNvSpPr>
+          <p:nvPr>
+            <p:ph type="sldNum" idx="5" sz="quarter"/>
+          </p:nvPr>
+        </p:nvSpPr>
+        <p:spPr/>
+      </p:sp>
+    </p:spTree>
+  </p:cSld>
+  <p:clrMapOvr>
+    <a:masterClrMapping/>
+  </p:clrMapOvr>
+</p:notes>
+</file>
+
+<file path=ppt/notesSlides/notesSlide17.xml><?xml version="1.0" encoding="utf-8"?>
+<p:notes xmlns:a="http://schemas.openxmlformats.org/drawingml/2006/main" xmlns:p="http://schemas.openxmlformats.org/presentationml/2006/main" xmlns:r="http://schemas.openxmlformats.org/officeDocument/2006/relationships">
+  <p:cSld>
+    <p:spTree>
+      <p:nvGrpSpPr>
+        <p:cNvPr id="1" name=""/>
+        <p:cNvGrpSpPr/>
+        <p:nvPr/>
+      </p:nvGrpSpPr>
+      <p:grpSpPr>
+        <a:xfrm>
+          <a:off x="0" y="0"/>
+          <a:ext cx="0" cy="0"/>
+          <a:chOff x="0" y="0"/>
+          <a:chExt cx="0" cy="0"/>
+        </a:xfrm>
+      </p:grpSpPr>
+      <p:sp>
+        <p:nvSpPr>
+          <p:cNvPr id="2" name="Slide Image Placeholder 1"/>
+          <p:cNvSpPr>
+            <a:spLocks noGrp="1"/>
+          </p:cNvSpPr>
+          <p:nvPr>
+            <p:ph type="sldImg" idx="2"/>
+          </p:nvPr>
+        </p:nvSpPr>
+        <p:spPr/>
+      </p:sp>
+      <p:sp>
+        <p:nvSpPr>
+          <p:cNvPr id="3" name="Notes Placeholder 2"/>
+          <p:cNvSpPr>
+            <a:spLocks noGrp="1"/>
+          </p:cNvSpPr>
+          <p:nvPr>
+            <p:ph type="body" idx="3" sz="quarter"/>
+          </p:nvPr>
+        </p:nvSpPr>
+        <p:spPr/>
+        <p:txBody>
+          <a:bodyPr/>
+          <a:lstStyle/>
+          <a:p>
+            <a:r>
+              <a:rPr sz="1200">
+                <a:latin typeface="Calibri"/>
+              </a:rPr>
+              <a:t>They measured the drift ten minutes ago. Ask for numbers before you explain anything.</a:t>
+            </a:r>
+          </a:p>
+          <a:p>
+            <a:r>
+              <a:rPr sz="1200">
+                <a:latin typeface="Calibri"/>
+              </a:rPr>
+              <a:t>Paint the picture: twenty vehicles creeping across a classroom floor with nobody touching a controller.</a:t>
+            </a:r>
+          </a:p>
+          <a:p>
+            <a:r>
+              <a:rPr sz="1200">
+                <a:latin typeface="Calibri"/>
+              </a:rPr>
+              <a:t>The deadzone value and percentage on this slide are read out of the sketch at build time, so they match the file they are about to edit.</a:t>
+            </a:r>
+          </a:p>
+          <a:p>
+            <a:r>
+              <a:rPr sz="1200">
+                <a:latin typeface="Calibri"/>
+              </a:rPr>
+              <a:t>The trade-off is the point: too small and it creeps, too big and you waste the stick. They will feel both in the next activity.</a:t>
+            </a:r>
+          </a:p>
+        </p:txBody>
+      </p:sp>
+      <p:sp>
+        <p:nvSpPr>
+          <p:cNvPr id="4" name="Slide Number Placeholder 3"/>
+          <p:cNvSpPr>
+            <a:spLocks noGrp="1"/>
+          </p:cNvSpPr>
+          <p:nvPr>
+            <p:ph type="sldNum" idx="5" sz="quarter"/>
+          </p:nvPr>
+        </p:nvSpPr>
+        <p:spPr/>
+      </p:sp>
+    </p:spTree>
+  </p:cSld>
+  <p:clrMapOvr>
+    <a:masterClrMapping/>
+  </p:clrMapOvr>
+</p:notes>
+</file>
+
+<file path=ppt/notesSlides/notesSlide18.xml><?xml version="1.0" encoding="utf-8"?>
+<p:notes xmlns:a="http://schemas.openxmlformats.org/drawingml/2006/main" xmlns:p="http://schemas.openxmlformats.org/presentationml/2006/main" xmlns:r="http://schemas.openxmlformats.org/officeDocument/2006/relationships">
+  <p:cSld>
+    <p:spTree>
+      <p:nvGrpSpPr>
+        <p:cNvPr id="1" name=""/>
+        <p:cNvGrpSpPr/>
+        <p:nvPr/>
+      </p:nvGrpSpPr>
+      <p:grpSpPr>
+        <a:xfrm>
+          <a:off x="0" y="0"/>
+          <a:ext cx="0" cy="0"/>
+          <a:chOff x="0" y="0"/>
+          <a:chExt cx="0" cy="0"/>
+        </a:xfrm>
+      </p:grpSpPr>
+      <p:sp>
+        <p:nvSpPr>
+          <p:cNvPr id="2" name="Slide Image Placeholder 1"/>
+          <p:cNvSpPr>
+            <a:spLocks noGrp="1"/>
+          </p:cNvSpPr>
+          <p:nvPr>
+            <p:ph type="sldImg" idx="2"/>
+          </p:nvPr>
+        </p:nvSpPr>
+        <p:spPr/>
+      </p:sp>
+      <p:sp>
+        <p:nvSpPr>
+          <p:cNvPr id="3" name="Notes Placeholder 2"/>
+          <p:cNvSpPr>
+            <a:spLocks noGrp="1"/>
+          </p:cNvSpPr>
+          <p:nvPr>
+            <p:ph type="body" idx="3" sz="quarter"/>
+          </p:nvPr>
+        </p:nvSpPr>
+        <p:spPr/>
+        <p:txBody>
+          <a:bodyPr/>
+          <a:lstStyle/>
+          <a:p>
+            <a:r>
+              <a:rPr sz="1200">
+                <a:latin typeface="Calibri"/>
+              </a:rPr>
+              <a:t>(Continued from the previous slide - the same notes apply.)</a:t>
+            </a:r>
+          </a:p>
+          <a:p/>
+          <a:p>
+            <a:r>
+              <a:rPr sz="1200">
+                <a:latin typeface="Calibri"/>
+              </a:rPr>
+              <a:t>They measured the drift ten minutes ago. Ask for numbers before you explain anything.</a:t>
+            </a:r>
+          </a:p>
+          <a:p>
+            <a:r>
+              <a:rPr sz="1200">
+                <a:latin typeface="Calibri"/>
+              </a:rPr>
+              <a:t>Paint the picture: twenty vehicles creeping across a classroom floor with nobody touching a controller.</a:t>
+            </a:r>
+          </a:p>
+          <a:p>
+            <a:r>
+              <a:rPr sz="1200">
+                <a:latin typeface="Calibri"/>
+              </a:rPr>
+              <a:t>The deadzone value and percentage on this slide are read out of the sketch at build time, so they match the file they are about to edit.</a:t>
+            </a:r>
+          </a:p>
+          <a:p>
+            <a:r>
+              <a:rPr sz="1200">
+                <a:latin typeface="Calibri"/>
+              </a:rPr>
+              <a:t>The trade-off is the point: too small and it creeps, too big and you waste the stick. They will feel both in the next activity.</a:t>
+            </a:r>
+          </a:p>
+        </p:txBody>
+      </p:sp>
+      <p:sp>
+        <p:nvSpPr>
+          <p:cNvPr id="4" name="Slide Number Placeholder 3"/>
+          <p:cNvSpPr>
+            <a:spLocks noGrp="1"/>
+          </p:cNvSpPr>
+          <p:nvPr>
+            <p:ph type="sldNum" idx="5" sz="quarter"/>
+          </p:nvPr>
+        </p:nvSpPr>
+        <p:spPr/>
+      </p:sp>
+    </p:spTree>
+  </p:cSld>
+  <p:clrMapOvr>
+    <a:masterClrMapping/>
+  </p:clrMapOvr>
+</p:notes>
+</file>
+
+<file path=ppt/notesSlides/notesSlide19.xml><?xml version="1.0" encoding="utf-8"?>
+<p:notes xmlns:a="http://schemas.openxmlformats.org/drawingml/2006/main" xmlns:p="http://schemas.openxmlformats.org/presentationml/2006/main" xmlns:r="http://schemas.openxmlformats.org/officeDocument/2006/relationships">
+  <p:cSld>
+    <p:spTree>
+      <p:nvGrpSpPr>
+        <p:cNvPr id="1" name=""/>
+        <p:cNvGrpSpPr/>
+        <p:nvPr/>
+      </p:nvGrpSpPr>
+      <p:grpSpPr>
+        <a:xfrm>
+          <a:off x="0" y="0"/>
+          <a:ext cx="0" cy="0"/>
+          <a:chOff x="0" y="0"/>
+          <a:chExt cx="0" cy="0"/>
+        </a:xfrm>
+      </p:grpSpPr>
+      <p:sp>
+        <p:nvSpPr>
+          <p:cNvPr id="2" name="Slide Image Placeholder 1"/>
+          <p:cNvSpPr>
+            <a:spLocks noGrp="1"/>
+          </p:cNvSpPr>
+          <p:nvPr>
+            <p:ph type="sldImg" idx="2"/>
+          </p:nvPr>
+        </p:nvSpPr>
+        <p:spPr/>
+      </p:sp>
+      <p:sp>
+        <p:nvSpPr>
+          <p:cNvPr id="3" name="Notes Placeholder 2"/>
+          <p:cNvSpPr>
+            <a:spLocks noGrp="1"/>
+          </p:cNvSpPr>
+          <p:nvPr>
+            <p:ph type="body" idx="3" sz="quarter"/>
+          </p:nvPr>
+        </p:nvSpPr>
+        <p:spPr/>
+        <p:txBody>
+          <a:bodyPr/>
+          <a:lstStyle/>
+          <a:p>
+            <a:r>
+              <a:rPr sz="1200">
+                <a:latin typeface="Calibri"/>
+              </a:rPr>
+              <a:t>The two numbers that matter are the deadzone and the top of the stick range. Everything else on the slide follows from those.</a:t>
+            </a:r>
+          </a:p>
+          <a:p>
+            <a:r>
+              <a:rPr sz="1200">
+                <a:latin typeface="Calibri"/>
+              </a:rPr>
+              <a:t>Ask why the line does not start at zero. The answer - a stick at rest is never exactly centred - is worth getting from the room rather than telling them.</a:t>
+            </a:r>
+          </a:p>
+          <a:p>
+            <a:r>
+              <a:rPr sz="1200">
+                <a:latin typeface="Calibri"/>
+              </a:rPr>
+              <a:t>The jump at the deadzone edge is deliberate: below the minimum duty the motor buzzes instead of turning, so the map skips straight past it.</a:t>
+            </a:r>
+          </a:p>
+          <a:p>
+            <a:r>
+              <a:rPr sz="1200">
+                <a:latin typeface="Calibri"/>
+              </a:rPr>
+              <a:t>Come back to this diagram when somebody's vehicle creeps on its own.</a:t>
+            </a:r>
+          </a:p>
+        </p:txBody>
+      </p:sp>
+      <p:sp>
+        <p:nvSpPr>
+          <p:cNvPr id="4" name="Slide Number Placeholder 3"/>
+          <p:cNvSpPr>
+            <a:spLocks noGrp="1"/>
+          </p:cNvSpPr>
+          <p:nvPr>
+            <p:ph type="sldNum" idx="5" sz="quarter"/>
+          </p:nvPr>
+        </p:nvSpPr>
+        <p:spPr/>
+      </p:sp>
+    </p:spTree>
+  </p:cSld>
+  <p:clrMapOvr>
+    <a:masterClrMapping/>
+  </p:clrMapOvr>
+</p:notes>
+</file>
+
+<file path=ppt/notesSlides/notesSlide2.xml><?xml version="1.0" encoding="utf-8"?>
+<p:notes xmlns:a="http://schemas.openxmlformats.org/drawingml/2006/main" xmlns:p="http://schemas.openxmlformats.org/presentationml/2006/main" xmlns:r="http://schemas.openxmlformats.org/officeDocument/2006/relationships">
+  <p:cSld>
+    <p:spTree>
+      <p:nvGrpSpPr>
+        <p:cNvPr id="1" name=""/>
+        <p:cNvGrpSpPr/>
+        <p:nvPr/>
+      </p:nvGrpSpPr>
+      <p:grpSpPr>
+        <a:xfrm>
+          <a:off x="0" y="0"/>
+          <a:ext cx="0" cy="0"/>
+          <a:chOff x="0" y="0"/>
+          <a:chExt cx="0" cy="0"/>
+        </a:xfrm>
+      </p:grpSpPr>
+      <p:sp>
+        <p:nvSpPr>
+          <p:cNvPr id="2" name="Slide Image Placeholder 1"/>
+          <p:cNvSpPr>
+            <a:spLocks noGrp="1"/>
+          </p:cNvSpPr>
+          <p:nvPr>
+            <p:ph type="sldImg" idx="2"/>
+          </p:nvPr>
+        </p:nvSpPr>
+        <p:spPr/>
+      </p:sp>
+      <p:sp>
+        <p:nvSpPr>
+          <p:cNvPr id="3" name="Notes Placeholder 2"/>
+          <p:cNvSpPr>
+            <a:spLocks noGrp="1"/>
+          </p:cNvSpPr>
+          <p:nvPr>
+            <p:ph type="body" idx="3" sz="quarter"/>
+          </p:nvPr>
+        </p:nvSpPr>
+        <p:spPr/>
+        <p:txBody>
+          <a:bodyPr/>
+          <a:lstStyle/>
+          <a:p>
+            <a:r>
+              <a:rPr sz="1200">
+                <a:latin typeface="Calibri"/>
+              </a:rPr>
+              <a:t>Objective six, the failsafe, is the one that matters beyond this course. Flag it now and come back to it at the end.</a:t>
+            </a:r>
+          </a:p>
+        </p:txBody>
+      </p:sp>
+      <p:sp>
+        <p:nvSpPr>
+          <p:cNvPr id="4" name="Slide Number Placeholder 3"/>
+          <p:cNvSpPr>
+            <a:spLocks noGrp="1"/>
+          </p:cNvSpPr>
+          <p:nvPr>
+            <p:ph type="sldNum" idx="5" sz="quarter"/>
+          </p:nvPr>
+        </p:nvSpPr>
+        <p:spPr/>
+      </p:sp>
+    </p:spTree>
+  </p:cSld>
+  <p:clrMapOvr>
+    <a:masterClrMapping/>
+  </p:clrMapOvr>
+</p:notes>
+</file>
+
+<file path=ppt/notesSlides/notesSlide20.xml><?xml version="1.0" encoding="utf-8"?>
+<p:notes xmlns:a="http://schemas.openxmlformats.org/drawingml/2006/main" xmlns:p="http://schemas.openxmlformats.org/presentationml/2006/main" xmlns:r="http://schemas.openxmlformats.org/officeDocument/2006/relationships">
+  <p:cSld>
+    <p:spTree>
+      <p:nvGrpSpPr>
+        <p:cNvPr id="1" name=""/>
+        <p:cNvGrpSpPr/>
+        <p:nvPr/>
+      </p:nvGrpSpPr>
+      <p:grpSpPr>
+        <a:xfrm>
+          <a:off x="0" y="0"/>
+          <a:ext cx="0" cy="0"/>
+          <a:chOff x="0" y="0"/>
+          <a:chExt cx="0" cy="0"/>
+        </a:xfrm>
+      </p:grpSpPr>
+      <p:sp>
+        <p:nvSpPr>
+          <p:cNvPr id="2" name="Slide Image Placeholder 1"/>
+          <p:cNvSpPr>
+            <a:spLocks noGrp="1"/>
+          </p:cNvSpPr>
+          <p:nvPr>
+            <p:ph type="sldImg" idx="2"/>
+          </p:nvPr>
+        </p:nvSpPr>
+        <p:spPr/>
+      </p:sp>
+      <p:sp>
+        <p:nvSpPr>
+          <p:cNvPr id="3" name="Notes Placeholder 2"/>
+          <p:cNvSpPr>
+            <a:spLocks noGrp="1"/>
+          </p:cNvSpPr>
+          <p:nvPr>
+            <p:ph type="body" idx="3" sz="quarter"/>
+          </p:nvPr>
+        </p:nvSpPr>
+        <p:spPr/>
+        <p:txBody>
+          <a:bodyPr/>
+          <a:lstStyle/>
+          <a:p>
+            <a:r>
+              <a:rPr sz="1200">
+                <a:latin typeface="Calibri"/>
+              </a:rPr>
+              <a:t>map() is just proportion. Say that first, then show the three worked examples.</a:t>
+            </a:r>
+          </a:p>
+          <a:p>
+            <a:r>
+              <a:rPr sz="1200">
+                <a:latin typeface="Calibri"/>
+              </a:rPr>
+              <a:t>The important subtlety is on the last line: the low end is the DEADZONE, not zero. Without that, the leftover travel could never reach full speed.</a:t>
+            </a:r>
+          </a:p>
+          <a:p>
+            <a:r>
+              <a:rPr sz="1200">
+                <a:latin typeface="Calibri"/>
+              </a:rPr>
+              <a:t>map() does not clamp. Feed it something outside the range and you get something outside the range - which is exactly why constrain() exists.</a:t>
+            </a:r>
+          </a:p>
+          <a:p>
+            <a:r>
+              <a:rPr sz="1200">
+                <a:latin typeface="Calibri"/>
+              </a:rPr>
+              <a:t>Get them to work out one example on paper before the activity.</a:t>
+            </a:r>
+          </a:p>
+        </p:txBody>
+      </p:sp>
+      <p:sp>
+        <p:nvSpPr>
+          <p:cNvPr id="4" name="Slide Number Placeholder 3"/>
+          <p:cNvSpPr>
+            <a:spLocks noGrp="1"/>
+          </p:cNvSpPr>
+          <p:nvPr>
+            <p:ph type="sldNum" idx="5" sz="quarter"/>
+          </p:nvPr>
+        </p:nvSpPr>
+        <p:spPr/>
+      </p:sp>
+    </p:spTree>
+  </p:cSld>
+  <p:clrMapOvr>
+    <a:masterClrMapping/>
+  </p:clrMapOvr>
+</p:notes>
+</file>
+
+<file path=ppt/notesSlides/notesSlide21.xml><?xml version="1.0" encoding="utf-8"?>
+<p:notes xmlns:a="http://schemas.openxmlformats.org/drawingml/2006/main" xmlns:p="http://schemas.openxmlformats.org/presentationml/2006/main" xmlns:r="http://schemas.openxmlformats.org/officeDocument/2006/relationships">
+  <p:cSld>
+    <p:spTree>
+      <p:nvGrpSpPr>
+        <p:cNvPr id="1" name=""/>
+        <p:cNvGrpSpPr/>
+        <p:nvPr/>
+      </p:nvGrpSpPr>
+      <p:grpSpPr>
+        <a:xfrm>
+          <a:off x="0" y="0"/>
+          <a:ext cx="0" cy="0"/>
+          <a:chOff x="0" y="0"/>
+          <a:chExt cx="0" cy="0"/>
+        </a:xfrm>
+      </p:grpSpPr>
+      <p:sp>
+        <p:nvSpPr>
+          <p:cNvPr id="2" name="Slide Image Placeholder 1"/>
+          <p:cNvSpPr>
+            <a:spLocks noGrp="1"/>
+          </p:cNvSpPr>
+          <p:nvPr>
+            <p:ph type="sldImg" idx="2"/>
+          </p:nvPr>
+        </p:nvSpPr>
+        <p:spPr/>
+      </p:sp>
+      <p:sp>
+        <p:nvSpPr>
+          <p:cNvPr id="3" name="Notes Placeholder 2"/>
+          <p:cNvSpPr>
+            <a:spLocks noGrp="1"/>
+          </p:cNvSpPr>
+          <p:nvPr>
+            <p:ph type="body" idx="3" sz="quarter"/>
+          </p:nvPr>
+        </p:nvSpPr>
+        <p:spPr/>
+        <p:txBody>
+          <a:bodyPr/>
+          <a:lstStyle/>
+          <a:p>
+            <a:r>
+              <a:rPr sz="1200">
+                <a:latin typeface="Calibri"/>
+              </a:rPr>
+              <a:t>Twenty seconds. Two of three.</a:t>
+            </a:r>
+          </a:p>
+        </p:txBody>
+      </p:sp>
+      <p:sp>
+        <p:nvSpPr>
+          <p:cNvPr id="4" name="Slide Number Placeholder 3"/>
+          <p:cNvSpPr>
+            <a:spLocks noGrp="1"/>
+          </p:cNvSpPr>
+          <p:nvPr>
+            <p:ph type="sldNum" idx="5" sz="quarter"/>
+          </p:nvPr>
+        </p:nvSpPr>
+        <p:spPr/>
+      </p:sp>
+    </p:spTree>
+  </p:cSld>
+  <p:clrMapOvr>
+    <a:masterClrMapping/>
+  </p:clrMapOvr>
+</p:notes>
+</file>
+
+<file path=ppt/notesSlides/notesSlide22.xml><?xml version="1.0" encoding="utf-8"?>
+<p:notes xmlns:a="http://schemas.openxmlformats.org/drawingml/2006/main" xmlns:p="http://schemas.openxmlformats.org/presentationml/2006/main" xmlns:r="http://schemas.openxmlformats.org/officeDocument/2006/relationships">
+  <p:cSld>
+    <p:spTree>
+      <p:nvGrpSpPr>
+        <p:cNvPr id="1" name=""/>
+        <p:cNvGrpSpPr/>
+        <p:nvPr/>
+      </p:nvGrpSpPr>
+      <p:grpSpPr>
+        <a:xfrm>
+          <a:off x="0" y="0"/>
+          <a:ext cx="0" cy="0"/>
+          <a:chOff x="0" y="0"/>
+          <a:chExt cx="0" cy="0"/>
+        </a:xfrm>
+      </p:grpSpPr>
+      <p:sp>
+        <p:nvSpPr>
+          <p:cNvPr id="2" name="Slide Image Placeholder 1"/>
+          <p:cNvSpPr>
+            <a:spLocks noGrp="1"/>
+          </p:cNvSpPr>
+          <p:nvPr>
+            <p:ph type="sldImg" idx="2"/>
+          </p:nvPr>
+        </p:nvSpPr>
+        <p:spPr/>
+      </p:sp>
+      <p:sp>
+        <p:nvSpPr>
+          <p:cNvPr id="3" name="Notes Placeholder 2"/>
+          <p:cNvSpPr>
+            <a:spLocks noGrp="1"/>
+          </p:cNvSpPr>
+          <p:nvPr>
+            <p:ph type="body" idx="3" sz="quarter"/>
+          </p:nvPr>
+        </p:nvSpPr>
+        <p:spPr/>
+        <p:txBody>
+          <a:bodyPr/>
+          <a:lstStyle/>
+          <a:p>
+            <a:r>
+              <a:rPr sz="1200">
+                <a:latin typeface="Calibri"/>
+              </a:rPr>
+              <a:t>Print only. Nothing moves, so nobody needs a block.</a:t>
+            </a:r>
+          </a:p>
+          <a:p>
+            <a:r>
+              <a:rPr sz="1200">
+                <a:latin typeface="Calibri"/>
+              </a:rPr>
+              <a:t>Step 3 is the demonstration of the whole idea: deadzone at zero, hands off, and the numbers will not sit still.</a:t>
+            </a:r>
+          </a:p>
+          <a:p>
+            <a:r>
+              <a:rPr sz="1200">
+                <a:latin typeface="Calibri"/>
+              </a:rPr>
+              <a:t>Step 4 makes the opposite mistake on purpose. Ask them how much of the stick is left.</a:t>
+            </a:r>
+          </a:p>
+          <a:p>
+            <a:r>
+              <a:rPr sz="1200">
+                <a:latin typeface="Calibri"/>
+              </a:rPr>
+              <a:t>Step 5 previews MOTOR_MIN, which they met in Lesson 2. The jump the instant they leave the deadzone is what a raised minimum feels like.</a:t>
+            </a:r>
+          </a:p>
+        </p:txBody>
+      </p:sp>
+      <p:sp>
+        <p:nvSpPr>
+          <p:cNvPr id="4" name="Slide Number Placeholder 3"/>
+          <p:cNvSpPr>
+            <a:spLocks noGrp="1"/>
+          </p:cNvSpPr>
+          <p:nvPr>
+            <p:ph type="sldNum" idx="5" sz="quarter"/>
+          </p:nvPr>
+        </p:nvSpPr>
+        <p:spPr/>
+      </p:sp>
+    </p:spTree>
+  </p:cSld>
+  <p:clrMapOvr>
+    <a:masterClrMapping/>
+  </p:clrMapOvr>
+</p:notes>
+</file>
+
+<file path=ppt/notesSlides/notesSlide23.xml><?xml version="1.0" encoding="utf-8"?>
+<p:notes xmlns:a="http://schemas.openxmlformats.org/drawingml/2006/main" xmlns:p="http://schemas.openxmlformats.org/presentationml/2006/main" xmlns:r="http://schemas.openxmlformats.org/officeDocument/2006/relationships">
+  <p:cSld>
+    <p:spTree>
+      <p:nvGrpSpPr>
+        <p:cNvPr id="1" name=""/>
+        <p:cNvGrpSpPr/>
+        <p:nvPr/>
+      </p:nvGrpSpPr>
+      <p:grpSpPr>
+        <a:xfrm>
+          <a:off x="0" y="0"/>
+          <a:ext cx="0" cy="0"/>
+          <a:chOff x="0" y="0"/>
+          <a:chExt cx="0" cy="0"/>
+        </a:xfrm>
+      </p:grpSpPr>
+      <p:sp>
+        <p:nvSpPr>
+          <p:cNvPr id="2" name="Slide Image Placeholder 1"/>
+          <p:cNvSpPr>
+            <a:spLocks noGrp="1"/>
+          </p:cNvSpPr>
+          <p:nvPr>
+            <p:ph type="sldImg" idx="2"/>
+          </p:nvPr>
+        </p:nvSpPr>
+        <p:spPr/>
+      </p:sp>
+      <p:sp>
+        <p:nvSpPr>
+          <p:cNvPr id="3" name="Notes Placeholder 2"/>
+          <p:cNvSpPr>
+            <a:spLocks noGrp="1"/>
+          </p:cNvSpPr>
+          <p:nvPr>
+            <p:ph type="body" idx="3" sz="quarter"/>
+          </p:nvPr>
+        </p:nvSpPr>
+        <p:spPr/>
+        <p:txBody>
+          <a:bodyPr/>
+          <a:lstStyle/>
+          <a:p>
+            <a:r>
+              <a:rPr sz="1200">
+                <a:latin typeface="Calibri"/>
+              </a:rPr>
+              <a:t>Two lines of arithmetic. Write them on the board and work an example with the room before you show the slide.</a:t>
+            </a:r>
+          </a:p>
+          <a:p>
+            <a:r>
+              <a:rPr sz="1200">
+                <a:latin typeface="Calibri"/>
+              </a:rPr>
+              <a:t>The half-power steering choice is a design decision, not a limitation. Explain the reasoning: full-power steering spins faster than anybody can correct for.</a:t>
+            </a:r>
+          </a:p>
+          <a:p>
+            <a:r>
+              <a:rPr sz="1200">
+                <a:latin typeface="Calibri"/>
+              </a:rPr>
+              <a:t>constrain() is what catches forward 200 plus turn 60. Ask what would happen without it - the number wraps past what the motor can take and the vehicle turns the wrong way.</a:t>
+            </a:r>
+          </a:p>
+        </p:txBody>
+      </p:sp>
+      <p:sp>
+        <p:nvSpPr>
+          <p:cNvPr id="4" name="Slide Number Placeholder 3"/>
+          <p:cNvSpPr>
+            <a:spLocks noGrp="1"/>
+          </p:cNvSpPr>
+          <p:nvPr>
+            <p:ph type="sldNum" idx="5" sz="quarter"/>
+          </p:nvPr>
+        </p:nvSpPr>
+        <p:spPr/>
+      </p:sp>
+    </p:spTree>
+  </p:cSld>
+  <p:clrMapOvr>
+    <a:masterClrMapping/>
+  </p:clrMapOvr>
+</p:notes>
+</file>
+
+<file path=ppt/notesSlides/notesSlide24.xml><?xml version="1.0" encoding="utf-8"?>
+<p:notes xmlns:a="http://schemas.openxmlformats.org/drawingml/2006/main" xmlns:p="http://schemas.openxmlformats.org/presentationml/2006/main" xmlns:r="http://schemas.openxmlformats.org/officeDocument/2006/relationships">
+  <p:cSld>
+    <p:spTree>
+      <p:nvGrpSpPr>
+        <p:cNvPr id="1" name=""/>
+        <p:cNvGrpSpPr/>
+        <p:nvPr/>
+      </p:nvGrpSpPr>
+      <p:grpSpPr>
+        <a:xfrm>
+          <a:off x="0" y="0"/>
+          <a:ext cx="0" cy="0"/>
+          <a:chOff x="0" y="0"/>
+          <a:chExt cx="0" cy="0"/>
+        </a:xfrm>
+      </p:grpSpPr>
+      <p:sp>
+        <p:nvSpPr>
+          <p:cNvPr id="2" name="Slide Image Placeholder 1"/>
+          <p:cNvSpPr>
+            <a:spLocks noGrp="1"/>
+          </p:cNvSpPr>
+          <p:nvPr>
+            <p:ph type="sldImg" idx="2"/>
+          </p:nvPr>
+        </p:nvSpPr>
+        <p:spPr/>
+      </p:sp>
+      <p:sp>
+        <p:nvSpPr>
+          <p:cNvPr id="3" name="Notes Placeholder 2"/>
+          <p:cNvSpPr>
+            <a:spLocks noGrp="1"/>
+          </p:cNvSpPr>
+          <p:nvPr>
+            <p:ph type="body" idx="3" sz="quarter"/>
+          </p:nvPr>
+        </p:nvSpPr>
+        <p:spPr/>
+        <p:txBody>
+          <a:bodyPr/>
+          <a:lstStyle/>
+          <a:p>
+            <a:r>
+              <a:rPr sz="1200">
+                <a:latin typeface="Calibri"/>
+              </a:rPr>
+              <a:t>(Continued from the previous slide - the same notes apply.)</a:t>
+            </a:r>
+          </a:p>
+          <a:p/>
+          <a:p>
+            <a:r>
+              <a:rPr sz="1200">
+                <a:latin typeface="Calibri"/>
+              </a:rPr>
+              <a:t>Two lines of arithmetic. Write them on the board and work an example with the room before you show the slide.</a:t>
+            </a:r>
+          </a:p>
+          <a:p>
+            <a:r>
+              <a:rPr sz="1200">
+                <a:latin typeface="Calibri"/>
+              </a:rPr>
+              <a:t>The half-power steering choice is a design decision, not a limitation. Explain the reasoning: full-power steering spins faster than anybody can correct for.</a:t>
+            </a:r>
+          </a:p>
+          <a:p>
+            <a:r>
+              <a:rPr sz="1200">
+                <a:latin typeface="Calibri"/>
+              </a:rPr>
+              <a:t>constrain() is what catches forward 200 plus turn 60. Ask what would happen without it - the number wraps past what the motor can take and the vehicle turns the wrong way.</a:t>
+            </a:r>
+          </a:p>
+        </p:txBody>
+      </p:sp>
+      <p:sp>
+        <p:nvSpPr>
+          <p:cNvPr id="4" name="Slide Number Placeholder 3"/>
+          <p:cNvSpPr>
+            <a:spLocks noGrp="1"/>
+          </p:cNvSpPr>
+          <p:nvPr>
+            <p:ph type="sldNum" idx="5" sz="quarter"/>
+          </p:nvPr>
+        </p:nvSpPr>
+        <p:spPr/>
+      </p:sp>
+    </p:spTree>
+  </p:cSld>
+  <p:clrMapOvr>
+    <a:masterClrMapping/>
+  </p:clrMapOvr>
+</p:notes>
+</file>
+
+<file path=ppt/notesSlides/notesSlide25.xml><?xml version="1.0" encoding="utf-8"?>
+<p:notes xmlns:a="http://schemas.openxmlformats.org/drawingml/2006/main" xmlns:p="http://schemas.openxmlformats.org/presentationml/2006/main" xmlns:r="http://schemas.openxmlformats.org/officeDocument/2006/relationships">
+  <p:cSld>
+    <p:spTree>
+      <p:nvGrpSpPr>
+        <p:cNvPr id="1" name=""/>
+        <p:cNvGrpSpPr/>
+        <p:nvPr/>
+      </p:nvGrpSpPr>
+      <p:grpSpPr>
+        <a:xfrm>
+          <a:off x="0" y="0"/>
+          <a:ext cx="0" cy="0"/>
+          <a:chOff x="0" y="0"/>
+          <a:chExt cx="0" cy="0"/>
+        </a:xfrm>
+      </p:grpSpPr>
+      <p:sp>
+        <p:nvSpPr>
+          <p:cNvPr id="2" name="Slide Image Placeholder 1"/>
+          <p:cNvSpPr>
+            <a:spLocks noGrp="1"/>
+          </p:cNvSpPr>
+          <p:nvPr>
+            <p:ph type="sldImg" idx="2"/>
+          </p:nvPr>
+        </p:nvSpPr>
+        <p:spPr/>
+      </p:sp>
+      <p:sp>
+        <p:nvSpPr>
+          <p:cNvPr id="3" name="Notes Placeholder 2"/>
+          <p:cNvSpPr>
+            <a:spLocks noGrp="1"/>
+          </p:cNvSpPr>
+          <p:nvPr>
+            <p:ph type="body" idx="3" sz="quarter"/>
+          </p:nvPr>
+        </p:nvSpPr>
+        <p:spPr/>
+        <p:txBody>
+          <a:bodyPr/>
+          <a:lstStyle/>
+          <a:p>
+            <a:r>
+              <a:rPr sz="1200">
+                <a:latin typeface="Calibri"/>
+              </a:rPr>
+              <a:t>Read the first four lines twice. That is the failsafe, and it is the most important thing in the file.</a:t>
+            </a:r>
+          </a:p>
+          <a:p>
+            <a:r>
+              <a:rPr sz="1200">
+                <a:latin typeface="Calibri"/>
+              </a:rPr>
+              <a:t>The minus sign in front of leftStickY is the up-is-negative fix from earlier. Point back at it.</a:t>
+            </a:r>
+          </a:p>
+          <a:p>
+            <a:r>
+              <a:rPr sz="1200">
+                <a:latin typeface="Calibri"/>
+              </a:rPr>
+              <a:t>Ask which line sets speed and which sets steering, then which one limits steering to half.</a:t>
+            </a:r>
+          </a:p>
+          <a:p>
+            <a:r>
+              <a:rPr sz="1200">
+                <a:latin typeface="Calibri"/>
+              </a:rPr>
+              <a:t>This is the first program in the course they could plausibly have written themselves. Say so.</a:t>
+            </a:r>
+          </a:p>
+        </p:txBody>
+      </p:sp>
+      <p:sp>
+        <p:nvSpPr>
+          <p:cNvPr id="4" name="Slide Number Placeholder 3"/>
+          <p:cNvSpPr>
+            <a:spLocks noGrp="1"/>
+          </p:cNvSpPr>
+          <p:nvPr>
+            <p:ph type="sldNum" idx="5" sz="quarter"/>
+          </p:nvPr>
+        </p:nvSpPr>
+        <p:spPr/>
+      </p:sp>
+    </p:spTree>
+  </p:cSld>
+  <p:clrMapOvr>
+    <a:masterClrMapping/>
+  </p:clrMapOvr>
+</p:notes>
+</file>
+
+<file path=ppt/notesSlides/notesSlide26.xml><?xml version="1.0" encoding="utf-8"?>
+<p:notes xmlns:a="http://schemas.openxmlformats.org/drawingml/2006/main" xmlns:p="http://schemas.openxmlformats.org/presentationml/2006/main" xmlns:r="http://schemas.openxmlformats.org/officeDocument/2006/relationships">
+  <p:cSld>
+    <p:spTree>
+      <p:nvGrpSpPr>
+        <p:cNvPr id="1" name=""/>
+        <p:cNvGrpSpPr/>
+        <p:nvPr/>
+      </p:nvGrpSpPr>
+      <p:grpSpPr>
+        <a:xfrm>
+          <a:off x="0" y="0"/>
+          <a:ext cx="0" cy="0"/>
+          <a:chOff x="0" y="0"/>
+          <a:chExt cx="0" cy="0"/>
+        </a:xfrm>
+      </p:grpSpPr>
+      <p:sp>
+        <p:nvSpPr>
+          <p:cNvPr id="2" name="Slide Image Placeholder 1"/>
+          <p:cNvSpPr>
+            <a:spLocks noGrp="1"/>
+          </p:cNvSpPr>
+          <p:nvPr>
+            <p:ph type="sldImg" idx="2"/>
+          </p:nvPr>
+        </p:nvSpPr>
+        <p:spPr/>
+      </p:sp>
+      <p:sp>
+        <p:nvSpPr>
+          <p:cNvPr id="3" name="Notes Placeholder 2"/>
+          <p:cNvSpPr>
+            <a:spLocks noGrp="1"/>
+          </p:cNvSpPr>
+          <p:nvPr>
+            <p:ph type="body" idx="3" sz="quarter"/>
+          </p:nvPr>
+        </p:nvSpPr>
+        <p:spPr/>
+        <p:txBody>
+          <a:bodyPr/>
+          <a:lstStyle/>
+          <a:p>
+            <a:r>
+              <a:rPr sz="1200">
+                <a:latin typeface="Calibri"/>
+              </a:rPr>
+              <a:t>Twenty seconds, then clear the floor.</a:t>
+            </a:r>
+          </a:p>
+        </p:txBody>
+      </p:sp>
+      <p:sp>
+        <p:nvSpPr>
+          <p:cNvPr id="4" name="Slide Number Placeholder 3"/>
+          <p:cNvSpPr>
+            <a:spLocks noGrp="1"/>
+          </p:cNvSpPr>
+          <p:nvPr>
+            <p:ph type="sldNum" idx="5" sz="quarter"/>
+          </p:nvPr>
+        </p:nvSpPr>
+        <p:spPr/>
+      </p:sp>
+    </p:spTree>
+  </p:cSld>
+  <p:clrMapOvr>
+    <a:masterClrMapping/>
+  </p:clrMapOvr>
+</p:notes>
+</file>
+
+<file path=ppt/notesSlides/notesSlide27.xml><?xml version="1.0" encoding="utf-8"?>
+<p:notes xmlns:a="http://schemas.openxmlformats.org/drawingml/2006/main" xmlns:p="http://schemas.openxmlformats.org/presentationml/2006/main" xmlns:r="http://schemas.openxmlformats.org/officeDocument/2006/relationships">
+  <p:cSld>
+    <p:spTree>
+      <p:nvGrpSpPr>
+        <p:cNvPr id="1" name=""/>
+        <p:cNvGrpSpPr/>
+        <p:nvPr/>
+      </p:nvGrpSpPr>
+      <p:grpSpPr>
+        <a:xfrm>
+          <a:off x="0" y="0"/>
+          <a:ext cx="0" cy="0"/>
+          <a:chOff x="0" y="0"/>
+          <a:chExt cx="0" cy="0"/>
+        </a:xfrm>
+      </p:grpSpPr>
+      <p:sp>
+        <p:nvSpPr>
+          <p:cNvPr id="2" name="Slide Image Placeholder 1"/>
+          <p:cNvSpPr>
+            <a:spLocks noGrp="1"/>
+          </p:cNvSpPr>
+          <p:nvPr>
+            <p:ph type="sldImg" idx="2"/>
+          </p:nvPr>
+        </p:nvSpPr>
+        <p:spPr/>
+      </p:sp>
+      <p:sp>
+        <p:nvSpPr>
+          <p:cNvPr id="3" name="Notes Placeholder 2"/>
+          <p:cNvSpPr>
+            <a:spLocks noGrp="1"/>
+          </p:cNvSpPr>
+          <p:nvPr>
+            <p:ph type="body" idx="3" sz="quarter"/>
+          </p:nvPr>
+        </p:nvSpPr>
+        <p:spPr/>
+        <p:txBody>
+          <a:bodyPr/>
+          <a:lstStyle/>
+          <a:p>
+            <a:r>
+              <a:rPr sz="1200">
+                <a:latin typeface="Calibri"/>
+              </a:rPr>
+              <a:t>Step 1 is not optional. Wheels off the ground, check up is forward and right is right, every single upload.</a:t>
+            </a:r>
+          </a:p>
+          <a:p>
+            <a:r>
+              <a:rPr sz="1200">
+                <a:latin typeface="Calibri"/>
+              </a:rPr>
+              <a:t>Step 3 is the failsafe demonstration. Have them do it deliberately, somewhere safe, and watch the vehicle stop dead.</a:t>
+            </a:r>
+          </a:p>
+          <a:p>
+            <a:r>
+              <a:rPr sz="1200">
+                <a:latin typeface="Calibri"/>
+              </a:rPr>
+              <a:t>Steps 5 and 6 are deliberate breakages. Swapped signs give you a vehicle that steers backwards; dropping the turn term entirely gives you something that can only go straight or spin.</a:t>
+            </a:r>
+          </a:p>
+          <a:p>
+            <a:r>
+              <a:rPr sz="1200">
+                <a:latin typeface="Calibri"/>
+              </a:rPr>
+              <a:t>Give this the full thirty minutes. It is the payoff for three lessons of groundwork.</a:t>
+            </a:r>
+          </a:p>
+        </p:txBody>
+      </p:sp>
+      <p:sp>
+        <p:nvSpPr>
+          <p:cNvPr id="4" name="Slide Number Placeholder 3"/>
+          <p:cNvSpPr>
+            <a:spLocks noGrp="1"/>
+          </p:cNvSpPr>
+          <p:nvPr>
+            <p:ph type="sldNum" idx="5" sz="quarter"/>
+          </p:nvPr>
+        </p:nvSpPr>
+        <p:spPr/>
+      </p:sp>
+    </p:spTree>
+  </p:cSld>
+  <p:clrMapOvr>
+    <a:masterClrMapping/>
+  </p:clrMapOvr>
+</p:notes>
+</file>
+
+<file path=ppt/notesSlides/notesSlide28.xml><?xml version="1.0" encoding="utf-8"?>
+<p:notes xmlns:a="http://schemas.openxmlformats.org/drawingml/2006/main" xmlns:p="http://schemas.openxmlformats.org/presentationml/2006/main" xmlns:r="http://schemas.openxmlformats.org/officeDocument/2006/relationships">
+  <p:cSld>
+    <p:spTree>
+      <p:nvGrpSpPr>
+        <p:cNvPr id="1" name=""/>
+        <p:cNvGrpSpPr/>
+        <p:nvPr/>
+      </p:nvGrpSpPr>
+      <p:grpSpPr>
+        <a:xfrm>
+          <a:off x="0" y="0"/>
+          <a:ext cx="0" cy="0"/>
+          <a:chOff x="0" y="0"/>
+          <a:chExt cx="0" cy="0"/>
+        </a:xfrm>
+      </p:grpSpPr>
+      <p:sp>
+        <p:nvSpPr>
+          <p:cNvPr id="2" name="Slide Image Placeholder 1"/>
+          <p:cNvSpPr>
+            <a:spLocks noGrp="1"/>
+          </p:cNvSpPr>
+          <p:nvPr>
+            <p:ph type="sldImg" idx="2"/>
+          </p:nvPr>
+        </p:nvSpPr>
+        <p:spPr/>
+      </p:sp>
+      <p:sp>
+        <p:nvSpPr>
+          <p:cNvPr id="3" name="Notes Placeholder 2"/>
+          <p:cNvSpPr>
+            <a:spLocks noGrp="1"/>
+          </p:cNvSpPr>
+          <p:nvPr>
+            <p:ph type="body" idx="3" sz="quarter"/>
+          </p:nvPr>
+        </p:nvSpPr>
+        <p:spPr/>
+        <p:txBody>
+          <a:bodyPr/>
+          <a:lstStyle/>
+          <a:p>
+            <a:r>
+              <a:rPr sz="1200">
+                <a:latin typeface="Calibri"/>
+              </a:rPr>
+              <a:t>(Continued from the previous slide - the same notes apply.)</a:t>
+            </a:r>
+          </a:p>
+          <a:p/>
+          <a:p>
+            <a:r>
+              <a:rPr sz="1200">
+                <a:latin typeface="Calibri"/>
+              </a:rPr>
+              <a:t>Step 1 is not optional. Wheels off the ground, check up is forward and right is right, every single upload.</a:t>
+            </a:r>
+          </a:p>
+          <a:p>
+            <a:r>
+              <a:rPr sz="1200">
+                <a:latin typeface="Calibri"/>
+              </a:rPr>
+              <a:t>Step 3 is the failsafe demonstration. Have them do it deliberately, somewhere safe, and watch the vehicle stop dead.</a:t>
+            </a:r>
+          </a:p>
+          <a:p>
+            <a:r>
+              <a:rPr sz="1200">
+                <a:latin typeface="Calibri"/>
+              </a:rPr>
+              <a:t>Steps 5 and 6 are deliberate breakages. Swapped signs give you a vehicle that steers backwards; dropping the turn term entirely gives you something that can only go straight or spin.</a:t>
+            </a:r>
+          </a:p>
+          <a:p>
+            <a:r>
+              <a:rPr sz="1200">
+                <a:latin typeface="Calibri"/>
+              </a:rPr>
+              <a:t>Give this the full thirty minutes. It is the payoff for three lessons of groundwork.</a:t>
+            </a:r>
+          </a:p>
+        </p:txBody>
+      </p:sp>
+      <p:sp>
+        <p:nvSpPr>
+          <p:cNvPr id="4" name="Slide Number Placeholder 3"/>
+          <p:cNvSpPr>
+            <a:spLocks noGrp="1"/>
+          </p:cNvSpPr>
+          <p:nvPr>
+            <p:ph type="sldNum" idx="5" sz="quarter"/>
+          </p:nvPr>
+        </p:nvSpPr>
+        <p:spPr/>
+      </p:sp>
+    </p:spTree>
+  </p:cSld>
+  <p:clrMapOvr>
+    <a:masterClrMapping/>
+  </p:clrMapOvr>
+</p:notes>
+</file>
+
+<file path=ppt/notesSlides/notesSlide29.xml><?xml version="1.0" encoding="utf-8"?>
+<p:notes xmlns:a="http://schemas.openxmlformats.org/drawingml/2006/main" xmlns:p="http://schemas.openxmlformats.org/presentationml/2006/main" xmlns:r="http://schemas.openxmlformats.org/officeDocument/2006/relationships">
+  <p:cSld>
+    <p:spTree>
+      <p:nvGrpSpPr>
+        <p:cNvPr id="1" name=""/>
+        <p:cNvGrpSpPr/>
+        <p:nvPr/>
+      </p:nvGrpSpPr>
+      <p:grpSpPr>
+        <a:xfrm>
+          <a:off x="0" y="0"/>
+          <a:ext cx="0" cy="0"/>
+          <a:chOff x="0" y="0"/>
+          <a:chExt cx="0" cy="0"/>
+        </a:xfrm>
+      </p:grpSpPr>
+      <p:sp>
+        <p:nvSpPr>
+          <p:cNvPr id="2" name="Slide Image Placeholder 1"/>
+          <p:cNvSpPr>
+            <a:spLocks noGrp="1"/>
+          </p:cNvSpPr>
+          <p:nvPr>
+            <p:ph type="sldImg" idx="2"/>
+          </p:nvPr>
+        </p:nvSpPr>
+        <p:spPr/>
+      </p:sp>
+      <p:sp>
+        <p:nvSpPr>
+          <p:cNvPr id="3" name="Notes Placeholder 2"/>
+          <p:cNvSpPr>
+            <a:spLocks noGrp="1"/>
+          </p:cNvSpPr>
+          <p:nvPr>
+            <p:ph type="body" idx="3" sz="quarter"/>
+          </p:nvPr>
+        </p:nvSpPr>
+        <p:spPr/>
+        <p:txBody>
+          <a:bodyPr/>
+          <a:lstStyle/>
+          <a:p>
+            <a:r>
+              <a:rPr sz="1200">
+                <a:latin typeface="Calibri"/>
+              </a:rPr>
+              <a:t>Slow down. This is the most transferable idea in the whole course.</a:t>
+            </a:r>
+          </a:p>
+          <a:p>
+            <a:r>
+              <a:rPr sz="1200">
+                <a:latin typeface="Calibri"/>
+              </a:rPr>
+              <a:t>The only safe behaviour is to stop. Not to carry on with the last command, and not to be clever.</a:t>
+            </a:r>
+          </a:p>
+          <a:p>
+            <a:r>
+              <a:rPr sz="1200">
+                <a:latin typeface="Calibri"/>
+              </a:rPr>
+              <a:t>Go round the examples: a drone hovers or returns home, a submersible surfaces, a ground vehicle stops. Ask why each is right for that vehicle.</a:t>
+            </a:r>
+          </a:p>
+          <a:p>
+            <a:r>
+              <a:rPr sz="1200">
+                <a:latin typeface="Calibri"/>
+              </a:rPr>
+              <a:t>End with the question on the slide and let it sit: on anything you ever build, what happens when the operator disappears?</a:t>
+            </a:r>
+          </a:p>
+        </p:txBody>
+      </p:sp>
+      <p:sp>
+        <p:nvSpPr>
+          <p:cNvPr id="4" name="Slide Number Placeholder 3"/>
+          <p:cNvSpPr>
+            <a:spLocks noGrp="1"/>
+          </p:cNvSpPr>
+          <p:nvPr>
+            <p:ph type="sldNum" idx="5" sz="quarter"/>
+          </p:nvPr>
+        </p:nvSpPr>
+        <p:spPr/>
+      </p:sp>
+    </p:spTree>
+  </p:cSld>
+  <p:clrMapOvr>
+    <a:masterClrMapping/>
+  </p:clrMapOvr>
+</p:notes>
+</file>
+
+<file path=ppt/notesSlides/notesSlide3.xml><?xml version="1.0" encoding="utf-8"?>
+<p:notes xmlns:a="http://schemas.openxmlformats.org/drawingml/2006/main" xmlns:p="http://schemas.openxmlformats.org/presentationml/2006/main" xmlns:r="http://schemas.openxmlformats.org/officeDocument/2006/relationships">
+  <p:cSld>
+    <p:spTree>
+      <p:nvGrpSpPr>
+        <p:cNvPr id="1" name=""/>
+        <p:cNvGrpSpPr/>
+        <p:nvPr/>
+      </p:nvGrpSpPr>
+      <p:grpSpPr>
+        <a:xfrm>
+          <a:off x="0" y="0"/>
+          <a:ext cx="0" cy="0"/>
+          <a:chOff x="0" y="0"/>
+          <a:chExt cx="0" cy="0"/>
+        </a:xfrm>
+      </p:grpSpPr>
+      <p:sp>
+        <p:nvSpPr>
+          <p:cNvPr id="2" name="Slide Image Placeholder 1"/>
+          <p:cNvSpPr>
+            <a:spLocks noGrp="1"/>
+          </p:cNvSpPr>
+          <p:nvPr>
+            <p:ph type="sldImg" idx="2"/>
+          </p:nvPr>
+        </p:nvSpPr>
+        <p:spPr/>
+      </p:sp>
+      <p:sp>
+        <p:nvSpPr>
+          <p:cNvPr id="3" name="Notes Placeholder 2"/>
+          <p:cNvSpPr>
+            <a:spLocks noGrp="1"/>
+          </p:cNvSpPr>
+          <p:nvPr>
+            <p:ph type="body" idx="3" sz="quarter"/>
+          </p:nvPr>
+        </p:nvSpPr>
+        <p:spPr/>
+        <p:txBody>
+          <a:bodyPr/>
+          <a:lstStyle/>
+          <a:p>
+            <a:r>
+              <a:rPr sz="1200">
+                <a:latin typeface="Calibri"/>
+              </a:rPr>
+              <a:t>Sixty seconds, then straight on.</a:t>
+            </a:r>
+          </a:p>
+          <a:p>
+            <a:r>
+              <a:rPr sz="1200">
+                <a:latin typeface="Calibri"/>
+              </a:rPr>
+              <a:t>The note is the discipline for the day: see the numbers first, drive second. It stops a room full of vehicles bolting during the first upload.</a:t>
+            </a:r>
+          </a:p>
+        </p:txBody>
+      </p:sp>
+      <p:sp>
+        <p:nvSpPr>
+          <p:cNvPr id="4" name="Slide Number Placeholder 3"/>
+          <p:cNvSpPr>
+            <a:spLocks noGrp="1"/>
+          </p:cNvSpPr>
+          <p:nvPr>
+            <p:ph type="sldNum" idx="5" sz="quarter"/>
+          </p:nvPr>
+        </p:nvSpPr>
+        <p:spPr/>
+      </p:sp>
+    </p:spTree>
+  </p:cSld>
+  <p:clrMapOvr>
+    <a:masterClrMapping/>
+  </p:clrMapOvr>
+</p:notes>
+</file>
+
+<file path=ppt/notesSlides/notesSlide30.xml><?xml version="1.0" encoding="utf-8"?>
+<p:notes xmlns:a="http://schemas.openxmlformats.org/drawingml/2006/main" xmlns:p="http://schemas.openxmlformats.org/presentationml/2006/main" xmlns:r="http://schemas.openxmlformats.org/officeDocument/2006/relationships">
+  <p:cSld>
+    <p:spTree>
+      <p:nvGrpSpPr>
+        <p:cNvPr id="1" name=""/>
+        <p:cNvGrpSpPr/>
+        <p:nvPr/>
+      </p:nvGrpSpPr>
+      <p:grpSpPr>
+        <a:xfrm>
+          <a:off x="0" y="0"/>
+          <a:ext cx="0" cy="0"/>
+          <a:chOff x="0" y="0"/>
+          <a:chExt cx="0" cy="0"/>
+        </a:xfrm>
+      </p:grpSpPr>
+      <p:sp>
+        <p:nvSpPr>
+          <p:cNvPr id="2" name="Slide Image Placeholder 1"/>
+          <p:cNvSpPr>
+            <a:spLocks noGrp="1"/>
+          </p:cNvSpPr>
+          <p:nvPr>
+            <p:ph type="sldImg" idx="2"/>
+          </p:nvPr>
+        </p:nvSpPr>
+        <p:spPr/>
+      </p:sp>
+      <p:sp>
+        <p:nvSpPr>
+          <p:cNvPr id="3" name="Notes Placeholder 2"/>
+          <p:cNvSpPr>
+            <a:spLocks noGrp="1"/>
+          </p:cNvSpPr>
+          <p:nvPr>
+            <p:ph type="body" idx="3" sz="quarter"/>
+          </p:nvPr>
+        </p:nvSpPr>
+        <p:spPr/>
+        <p:txBody>
+          <a:bodyPr/>
+          <a:lstStyle/>
+          <a:p>
+            <a:r>
+              <a:rPr sz="1200">
+                <a:latin typeface="Calibri"/>
+              </a:rPr>
+              <a:t>(Continued from the previous slide - the same notes apply.)</a:t>
+            </a:r>
+          </a:p>
+          <a:p/>
+          <a:p>
+            <a:r>
+              <a:rPr sz="1200">
+                <a:latin typeface="Calibri"/>
+              </a:rPr>
+              <a:t>Slow down. This is the most transferable idea in the whole course.</a:t>
+            </a:r>
+          </a:p>
+          <a:p>
+            <a:r>
+              <a:rPr sz="1200">
+                <a:latin typeface="Calibri"/>
+              </a:rPr>
+              <a:t>The only safe behaviour is to stop. Not to carry on with the last command, and not to be clever.</a:t>
+            </a:r>
+          </a:p>
+          <a:p>
+            <a:r>
+              <a:rPr sz="1200">
+                <a:latin typeface="Calibri"/>
+              </a:rPr>
+              <a:t>Go round the examples: a drone hovers or returns home, a submersible surfaces, a ground vehicle stops. Ask why each is right for that vehicle.</a:t>
+            </a:r>
+          </a:p>
+          <a:p>
+            <a:r>
+              <a:rPr sz="1200">
+                <a:latin typeface="Calibri"/>
+              </a:rPr>
+              <a:t>End with the question on the slide and let it sit: on anything you ever build, what happens when the operator disappears?</a:t>
+            </a:r>
+          </a:p>
+        </p:txBody>
+      </p:sp>
+      <p:sp>
+        <p:nvSpPr>
+          <p:cNvPr id="4" name="Slide Number Placeholder 3"/>
+          <p:cNvSpPr>
+            <a:spLocks noGrp="1"/>
+          </p:cNvSpPr>
+          <p:nvPr>
+            <p:ph type="sldNum" idx="5" sz="quarter"/>
+          </p:nvPr>
+        </p:nvSpPr>
+        <p:spPr/>
+      </p:sp>
+    </p:spTree>
+  </p:cSld>
+  <p:clrMapOvr>
+    <a:masterClrMapping/>
+  </p:clrMapOvr>
+</p:notes>
+</file>
+
+<file path=ppt/notesSlides/notesSlide31.xml><?xml version="1.0" encoding="utf-8"?>
+<p:notes xmlns:a="http://schemas.openxmlformats.org/drawingml/2006/main" xmlns:p="http://schemas.openxmlformats.org/presentationml/2006/main" xmlns:r="http://schemas.openxmlformats.org/officeDocument/2006/relationships">
+  <p:cSld>
+    <p:spTree>
+      <p:nvGrpSpPr>
+        <p:cNvPr id="1" name=""/>
+        <p:cNvGrpSpPr/>
+        <p:nvPr/>
+      </p:nvGrpSpPr>
+      <p:grpSpPr>
+        <a:xfrm>
+          <a:off x="0" y="0"/>
+          <a:ext cx="0" cy="0"/>
+          <a:chOff x="0" y="0"/>
+          <a:chExt cx="0" cy="0"/>
+        </a:xfrm>
+      </p:grpSpPr>
+      <p:sp>
+        <p:nvSpPr>
+          <p:cNvPr id="2" name="Slide Image Placeholder 1"/>
+          <p:cNvSpPr>
+            <a:spLocks noGrp="1"/>
+          </p:cNvSpPr>
+          <p:nvPr>
+            <p:ph type="sldImg" idx="2"/>
+          </p:nvPr>
+        </p:nvSpPr>
+        <p:spPr/>
+      </p:sp>
+      <p:sp>
+        <p:nvSpPr>
+          <p:cNvPr id="3" name="Notes Placeholder 2"/>
+          <p:cNvSpPr>
+            <a:spLocks noGrp="1"/>
+          </p:cNvSpPr>
+          <p:nvPr>
+            <p:ph type="body" idx="3" sz="quarter"/>
+          </p:nvPr>
+        </p:nvSpPr>
+        <p:spPr/>
+        <p:txBody>
+          <a:bodyPr/>
+          <a:lstStyle/>
+          <a:p>
+            <a:r>
+              <a:rPr sz="1200">
+                <a:latin typeface="Calibri"/>
+              </a:rPr>
+              <a:t>Do not read this table out. Point at it and tell them to use it during the activity.</a:t>
+            </a:r>
+          </a:p>
+          <a:p>
+            <a:r>
+              <a:rPr sz="1200">
+                <a:latin typeface="Calibri"/>
+              </a:rPr>
+              <a:t>Worth printing and taping to the wall for the rest of the course.</a:t>
+            </a:r>
+          </a:p>
+          <a:p>
+            <a:r>
+              <a:rPr sz="1200">
+                <a:latin typeface="Calibri"/>
+              </a:rPr>
+              <a:t>Row three - somebody else's vehicle moving - is the funny one and the one that will actually happen.</a:t>
+            </a:r>
+          </a:p>
+        </p:txBody>
+      </p:sp>
+      <p:sp>
+        <p:nvSpPr>
+          <p:cNvPr id="4" name="Slide Number Placeholder 3"/>
+          <p:cNvSpPr>
+            <a:spLocks noGrp="1"/>
+          </p:cNvSpPr>
+          <p:nvPr>
+            <p:ph type="sldNum" idx="5" sz="quarter"/>
+          </p:nvPr>
+        </p:nvSpPr>
+        <p:spPr/>
+      </p:sp>
+    </p:spTree>
+  </p:cSld>
+  <p:clrMapOvr>
+    <a:masterClrMapping/>
+  </p:clrMapOvr>
+</p:notes>
+</file>
+
+<file path=ppt/notesSlides/notesSlide32.xml><?xml version="1.0" encoding="utf-8"?>
+<p:notes xmlns:a="http://schemas.openxmlformats.org/drawingml/2006/main" xmlns:p="http://schemas.openxmlformats.org/presentationml/2006/main" xmlns:r="http://schemas.openxmlformats.org/officeDocument/2006/relationships">
+  <p:cSld>
+    <p:spTree>
+      <p:nvGrpSpPr>
+        <p:cNvPr id="1" name=""/>
+        <p:cNvGrpSpPr/>
+        <p:nvPr/>
+      </p:nvGrpSpPr>
+      <p:grpSpPr>
+        <a:xfrm>
+          <a:off x="0" y="0"/>
+          <a:ext cx="0" cy="0"/>
+          <a:chOff x="0" y="0"/>
+          <a:chExt cx="0" cy="0"/>
+        </a:xfrm>
+      </p:grpSpPr>
+      <p:sp>
+        <p:nvSpPr>
+          <p:cNvPr id="2" name="Slide Image Placeholder 1"/>
+          <p:cNvSpPr>
+            <a:spLocks noGrp="1"/>
+          </p:cNvSpPr>
+          <p:nvPr>
+            <p:ph type="sldImg" idx="2"/>
+          </p:nvPr>
+        </p:nvSpPr>
+        <p:spPr/>
+      </p:sp>
+      <p:sp>
+        <p:nvSpPr>
+          <p:cNvPr id="3" name="Notes Placeholder 2"/>
+          <p:cNvSpPr>
+            <a:spLocks noGrp="1"/>
+          </p:cNvSpPr>
+          <p:nvPr>
+            <p:ph type="body" idx="3" sz="quarter"/>
+          </p:nvPr>
+        </p:nvSpPr>
+        <p:spPr/>
+        <p:txBody>
+          <a:bodyPr/>
+          <a:lstStyle/>
+          <a:p>
+            <a:r>
+              <a:rPr sz="1200">
+                <a:latin typeface="Calibri"/>
+              </a:rPr>
+              <a:t>Conversation, not a test.</a:t>
+            </a:r>
+          </a:p>
+          <a:p>
+            <a:r>
+              <a:rPr sz="1200">
+                <a:latin typeface="Calibri"/>
+              </a:rPr>
+              <a:t>Answers, in order: an address is the device's phone number and duplicates mean one pad drives two vehicles; the number is negative, hence the minus sign; a deadzone stops phantom creep, zero means it creeps and too big wastes the stick; map() is proportion.</a:t>
+            </a:r>
+          </a:p>
+          <a:p>
+            <a:r>
+              <a:rPr sz="1200">
+                <a:latin typeface="Calibri"/>
+              </a:rPr>
+              <a:t>For question 5: left gets 280 and right gets 80 before constrain, then 255 and 80 after.</a:t>
+            </a:r>
+          </a:p>
+          <a:p>
+            <a:r>
+              <a:rPr sz="1200">
+                <a:latin typeface="Calibri"/>
+              </a:rPr>
+              <a:t>For question 6: full-power steering is faster than a person can correct for.</a:t>
+            </a:r>
+          </a:p>
+          <a:p>
+            <a:r>
+              <a:rPr sz="1200">
+                <a:latin typeface="Calibri"/>
+              </a:rPr>
+              <a:t>Question 7 should be written out, not said. Check a few notebooks.</a:t>
+            </a:r>
+          </a:p>
+        </p:txBody>
+      </p:sp>
+      <p:sp>
+        <p:nvSpPr>
+          <p:cNvPr id="4" name="Slide Number Placeholder 3"/>
+          <p:cNvSpPr>
+            <a:spLocks noGrp="1"/>
+          </p:cNvSpPr>
+          <p:nvPr>
+            <p:ph type="sldNum" idx="5" sz="quarter"/>
+          </p:nvPr>
+        </p:nvSpPr>
+        <p:spPr/>
+      </p:sp>
+    </p:spTree>
+  </p:cSld>
+  <p:clrMapOvr>
+    <a:masterClrMapping/>
+  </p:clrMapOvr>
+</p:notes>
+</file>
+
+<file path=ppt/notesSlides/notesSlide4.xml><?xml version="1.0" encoding="utf-8"?>
+<p:notes xmlns:a="http://schemas.openxmlformats.org/drawingml/2006/main" xmlns:p="http://schemas.openxmlformats.org/presentationml/2006/main" xmlns:r="http://schemas.openxmlformats.org/officeDocument/2006/relationships">
+  <p:cSld>
+    <p:spTree>
+      <p:nvGrpSpPr>
+        <p:cNvPr id="1" name=""/>
+        <p:cNvGrpSpPr/>
+        <p:nvPr/>
+      </p:nvGrpSpPr>
+      <p:grpSpPr>
+        <a:xfrm>
+          <a:off x="0" y="0"/>
+          <a:ext cx="0" cy="0"/>
+          <a:chOff x="0" y="0"/>
+          <a:chExt cx="0" cy="0"/>
+        </a:xfrm>
+      </p:grpSpPr>
+      <p:sp>
+        <p:nvSpPr>
+          <p:cNvPr id="2" name="Slide Image Placeholder 1"/>
+          <p:cNvSpPr>
+            <a:spLocks noGrp="1"/>
+          </p:cNvSpPr>
+          <p:nvPr>
+            <p:ph type="sldImg" idx="2"/>
+          </p:nvPr>
+        </p:nvSpPr>
+        <p:spPr/>
+      </p:sp>
+      <p:sp>
+        <p:nvSpPr>
+          <p:cNvPr id="3" name="Notes Placeholder 2"/>
+          <p:cNvSpPr>
+            <a:spLocks noGrp="1"/>
+          </p:cNvSpPr>
+          <p:nvPr>
+            <p:ph type="body" idx="3" sz="quarter"/>
+          </p:nvPr>
+        </p:nvSpPr>
+        <p:spPr/>
+        <p:txBody>
+          <a:bodyPr/>
+          <a:lstStyle/>
+          <a:p>
+            <a:r>
+              <a:rPr sz="1200">
+                <a:latin typeface="Calibri"/>
+              </a:rPr>
+              <a:t>Point out that the vehicle does not move until 2:35. Manage the disappointment early rather than fighting it all lesson.</a:t>
+            </a:r>
+          </a:p>
+        </p:txBody>
+      </p:sp>
+      <p:sp>
+        <p:nvSpPr>
+          <p:cNvPr id="4" name="Slide Number Placeholder 3"/>
+          <p:cNvSpPr>
+            <a:spLocks noGrp="1"/>
+          </p:cNvSpPr>
+          <p:nvPr>
+            <p:ph type="sldNum" idx="5" sz="quarter"/>
+          </p:nvPr>
+        </p:nvSpPr>
+        <p:spPr/>
+      </p:sp>
+    </p:spTree>
+  </p:cSld>
+  <p:clrMapOvr>
+    <a:masterClrMapping/>
+  </p:clrMapOvr>
+</p:notes>
+</file>
+
+<file path=ppt/notesSlides/notesSlide5.xml><?xml version="1.0" encoding="utf-8"?>
+<p:notes xmlns:a="http://schemas.openxmlformats.org/drawingml/2006/main" xmlns:p="http://schemas.openxmlformats.org/presentationml/2006/main" xmlns:r="http://schemas.openxmlformats.org/officeDocument/2006/relationships">
+  <p:cSld>
+    <p:spTree>
+      <p:nvGrpSpPr>
+        <p:cNvPr id="1" name=""/>
+        <p:cNvGrpSpPr/>
+        <p:nvPr/>
+      </p:nvGrpSpPr>
+      <p:grpSpPr>
+        <a:xfrm>
+          <a:off x="0" y="0"/>
+          <a:ext cx="0" cy="0"/>
+          <a:chOff x="0" y="0"/>
+          <a:chExt cx="0" cy="0"/>
+        </a:xfrm>
+      </p:grpSpPr>
+      <p:sp>
+        <p:nvSpPr>
+          <p:cNvPr id="2" name="Slide Image Placeholder 1"/>
+          <p:cNvSpPr>
+            <a:spLocks noGrp="1"/>
+          </p:cNvSpPr>
+          <p:nvPr>
+            <p:ph type="sldImg" idx="2"/>
+          </p:nvPr>
+        </p:nvSpPr>
+        <p:spPr/>
+      </p:sp>
+      <p:sp>
+        <p:nvSpPr>
+          <p:cNvPr id="3" name="Notes Placeholder 2"/>
+          <p:cNvSpPr>
+            <a:spLocks noGrp="1"/>
+          </p:cNvSpPr>
+          <p:nvPr>
+            <p:ph type="body" idx="3" sz="quarter"/>
+          </p:nvPr>
+        </p:nvSpPr>
+        <p:spPr/>
+        <p:txBody>
+          <a:bodyPr/>
+          <a:lstStyle/>
+          <a:p>
+            <a:r>
+              <a:rPr sz="1200">
+                <a:latin typeface="Calibri"/>
+              </a:rPr>
+              <a:t>Keep the radio theory to two minutes. The one thing that must land is that every device has an address, and an address is like a phone number.</a:t>
+            </a:r>
+          </a:p>
+          <a:p>
+            <a:r>
+              <a:rPr sz="1200">
+                <a:latin typeface="Calibri"/>
+              </a:rPr>
+              <a:t>The channel-hopping detail answers the question they are about to ask: why twenty vehicles in one room actually works.</a:t>
+            </a:r>
+          </a:p>
+          <a:p>
+            <a:r>
+              <a:rPr sz="1200">
+                <a:latin typeface="Calibri"/>
+              </a:rPr>
+              <a:t>The 85% storage note is worth mentioning. It explains why a Bluetooth sketch takes so long to upload and why some boards run out of room.</a:t>
+            </a:r>
+          </a:p>
+        </p:txBody>
+      </p:sp>
+      <p:sp>
+        <p:nvSpPr>
+          <p:cNvPr id="4" name="Slide Number Placeholder 3"/>
+          <p:cNvSpPr>
+            <a:spLocks noGrp="1"/>
+          </p:cNvSpPr>
+          <p:nvPr>
+            <p:ph type="sldNum" idx="5" sz="quarter"/>
+          </p:nvPr>
+        </p:nvSpPr>
+        <p:spPr/>
+      </p:sp>
+    </p:spTree>
+  </p:cSld>
+  <p:clrMapOvr>
+    <a:masterClrMapping/>
+  </p:clrMapOvr>
+</p:notes>
+</file>
+
+<file path=ppt/notesSlides/notesSlide6.xml><?xml version="1.0" encoding="utf-8"?>
+<p:notes xmlns:a="http://schemas.openxmlformats.org/drawingml/2006/main" xmlns:p="http://schemas.openxmlformats.org/presentationml/2006/main" xmlns:r="http://schemas.openxmlformats.org/officeDocument/2006/relationships">
+  <p:cSld>
+    <p:spTree>
+      <p:nvGrpSpPr>
+        <p:cNvPr id="1" name=""/>
+        <p:cNvGrpSpPr/>
+        <p:nvPr/>
+      </p:nvGrpSpPr>
+      <p:grpSpPr>
+        <a:xfrm>
+          <a:off x="0" y="0"/>
+          <a:ext cx="0" cy="0"/>
+          <a:chOff x="0" y="0"/>
+          <a:chExt cx="0" cy="0"/>
+        </a:xfrm>
+      </p:grpSpPr>
+      <p:sp>
+        <p:nvSpPr>
+          <p:cNvPr id="2" name="Slide Image Placeholder 1"/>
+          <p:cNvSpPr>
+            <a:spLocks noGrp="1"/>
+          </p:cNvSpPr>
+          <p:nvPr>
+            <p:ph type="sldImg" idx="2"/>
+          </p:nvPr>
+        </p:nvSpPr>
+        <p:spPr/>
+      </p:sp>
+      <p:sp>
+        <p:nvSpPr>
+          <p:cNvPr id="3" name="Notes Placeholder 2"/>
+          <p:cNvSpPr>
+            <a:spLocks noGrp="1"/>
+          </p:cNvSpPr>
+          <p:nvPr>
+            <p:ph type="body" idx="3" sz="quarter"/>
+          </p:nvPr>
+        </p:nvSpPr>
+        <p:spPr/>
+        <p:txBody>
+          <a:bodyPr/>
+          <a:lstStyle/>
+          <a:p>
+            <a:r>
+              <a:rPr sz="1200">
+                <a:latin typeface="Calibri"/>
+              </a:rPr>
+              <a:t>(Continued from the previous slide - the same notes apply.)</a:t>
+            </a:r>
+          </a:p>
+          <a:p/>
+          <a:p>
+            <a:r>
+              <a:rPr sz="1200">
+                <a:latin typeface="Calibri"/>
+              </a:rPr>
+              <a:t>Keep the radio theory to two minutes. The one thing that must land is that every device has an address, and an address is like a phone number.</a:t>
+            </a:r>
+          </a:p>
+          <a:p>
+            <a:r>
+              <a:rPr sz="1200">
+                <a:latin typeface="Calibri"/>
+              </a:rPr>
+              <a:t>The channel-hopping detail answers the question they are about to ask: why twenty vehicles in one room actually works.</a:t>
+            </a:r>
+          </a:p>
+          <a:p>
+            <a:r>
+              <a:rPr sz="1200">
+                <a:latin typeface="Calibri"/>
+              </a:rPr>
+              <a:t>The 85% storage note is worth mentioning. It explains why a Bluetooth sketch takes so long to upload and why some boards run out of room.</a:t>
+            </a:r>
+          </a:p>
+        </p:txBody>
+      </p:sp>
+      <p:sp>
+        <p:nvSpPr>
+          <p:cNvPr id="4" name="Slide Number Placeholder 3"/>
+          <p:cNvSpPr>
+            <a:spLocks noGrp="1"/>
+          </p:cNvSpPr>
+          <p:nvPr>
+            <p:ph type="sldNum" idx="5" sz="quarter"/>
+          </p:nvPr>
+        </p:nvSpPr>
+        <p:spPr/>
+      </p:sp>
+    </p:spTree>
+  </p:cSld>
+  <p:clrMapOvr>
+    <a:masterClrMapping/>
+  </p:clrMapOvr>
+</p:notes>
+</file>
+
+<file path=ppt/notesSlides/notesSlide7.xml><?xml version="1.0" encoding="utf-8"?>
+<p:notes xmlns:a="http://schemas.openxmlformats.org/drawingml/2006/main" xmlns:p="http://schemas.openxmlformats.org/presentationml/2006/main" xmlns:r="http://schemas.openxmlformats.org/officeDocument/2006/relationships">
+  <p:cSld>
+    <p:spTree>
+      <p:nvGrpSpPr>
+        <p:cNvPr id="1" name=""/>
+        <p:cNvGrpSpPr/>
+        <p:nvPr/>
+      </p:nvGrpSpPr>
+      <p:grpSpPr>
+        <a:xfrm>
+          <a:off x="0" y="0"/>
+          <a:ext cx="0" cy="0"/>
+          <a:chOff x="0" y="0"/>
+          <a:chExt cx="0" cy="0"/>
+        </a:xfrm>
+      </p:grpSpPr>
+      <p:sp>
+        <p:nvSpPr>
+          <p:cNvPr id="2" name="Slide Image Placeholder 1"/>
+          <p:cNvSpPr>
+            <a:spLocks noGrp="1"/>
+          </p:cNvSpPr>
+          <p:nvPr>
+            <p:ph type="sldImg" idx="2"/>
+          </p:nvPr>
+        </p:nvSpPr>
+        <p:spPr/>
+      </p:sp>
+      <p:sp>
+        <p:nvSpPr>
+          <p:cNvPr id="3" name="Notes Placeholder 2"/>
+          <p:cNvSpPr>
+            <a:spLocks noGrp="1"/>
+          </p:cNvSpPr>
+          <p:nvPr>
+            <p:ph type="body" idx="3" sz="quarter"/>
+          </p:nvPr>
+        </p:nvSpPr>
+        <p:spPr/>
+        <p:txBody>
+          <a:bodyPr/>
+          <a:lstStyle/>
+          <a:p>
+            <a:r>
+              <a:rPr sz="1200">
+                <a:latin typeface="Calibri"/>
+              </a:rPr>
+              <a:t>The PS3 pairing story is genuinely odd, so say the odd part plainly: the controller is told which vehicle to talk to, not the other way round.</a:t>
+            </a:r>
+          </a:p>
+          <a:p>
+            <a:r>
+              <a:rPr sz="1200">
+                <a:latin typeface="Calibri"/>
+              </a:rPr>
+              <a:t>SixaxisPairTool needs a Windows PC and a USB cable. If you have one machine for the room, do this as a queue during the break.</a:t>
+            </a:r>
+          </a:p>
+          <a:p>
+            <a:r>
+              <a:rPr sz="1200">
+                <a:latin typeface="Calibri"/>
+              </a:rPr>
+              <a:t>The address goes in TWO places and they must match: the controller, and PS3_MAC_ADDRESS in the sketch.</a:t>
+            </a:r>
+          </a:p>
+          <a:p>
+            <a:r>
+              <a:rPr sz="1200">
+                <a:latin typeface="Calibri"/>
+              </a:rPr>
+              <a:t>Stickers on both the vehicle and the pad. Every term somebody loses a morning to two vehicles sharing an address.</a:t>
+            </a:r>
+          </a:p>
+        </p:txBody>
+      </p:sp>
+      <p:sp>
+        <p:nvSpPr>
+          <p:cNvPr id="4" name="Slide Number Placeholder 3"/>
+          <p:cNvSpPr>
+            <a:spLocks noGrp="1"/>
+          </p:cNvSpPr>
+          <p:nvPr>
+            <p:ph type="sldNum" idx="5" sz="quarter"/>
+          </p:nvPr>
+        </p:nvSpPr>
+        <p:spPr/>
+      </p:sp>
+    </p:spTree>
+  </p:cSld>
+  <p:clrMapOvr>
+    <a:masterClrMapping/>
+  </p:clrMapOvr>
+</p:notes>
+</file>
+
+<file path=ppt/notesSlides/notesSlide8.xml><?xml version="1.0" encoding="utf-8"?>
+<p:notes xmlns:a="http://schemas.openxmlformats.org/drawingml/2006/main" xmlns:p="http://schemas.openxmlformats.org/presentationml/2006/main" xmlns:r="http://schemas.openxmlformats.org/officeDocument/2006/relationships">
+  <p:cSld>
+    <p:spTree>
+      <p:nvGrpSpPr>
+        <p:cNvPr id="1" name=""/>
+        <p:cNvGrpSpPr/>
+        <p:nvPr/>
+      </p:nvGrpSpPr>
+      <p:grpSpPr>
+        <a:xfrm>
+          <a:off x="0" y="0"/>
+          <a:ext cx="0" cy="0"/>
+          <a:chOff x="0" y="0"/>
+          <a:chExt cx="0" cy="0"/>
+        </a:xfrm>
+      </p:grpSpPr>
+      <p:sp>
+        <p:nvSpPr>
+          <p:cNvPr id="2" name="Slide Image Placeholder 1"/>
+          <p:cNvSpPr>
+            <a:spLocks noGrp="1"/>
+          </p:cNvSpPr>
+          <p:nvPr>
+            <p:ph type="sldImg" idx="2"/>
+          </p:nvPr>
+        </p:nvSpPr>
+        <p:spPr/>
+      </p:sp>
+      <p:sp>
+        <p:nvSpPr>
+          <p:cNvPr id="3" name="Notes Placeholder 2"/>
+          <p:cNvSpPr>
+            <a:spLocks noGrp="1"/>
+          </p:cNvSpPr>
+          <p:nvPr>
+            <p:ph type="body" idx="3" sz="quarter"/>
+          </p:nvPr>
+        </p:nvSpPr>
+        <p:spPr/>
+        <p:txBody>
+          <a:bodyPr/>
+          <a:lstStyle/>
+          <a:p>
+            <a:r>
+              <a:rPr sz="1200">
+                <a:latin typeface="Calibri"/>
+              </a:rPr>
+              <a:t>(Continued from the previous slide - the same notes apply.)</a:t>
+            </a:r>
+          </a:p>
+          <a:p/>
+          <a:p>
+            <a:r>
+              <a:rPr sz="1200">
+                <a:latin typeface="Calibri"/>
+              </a:rPr>
+              <a:t>The PS3 pairing story is genuinely odd, so say the odd part plainly: the controller is told which vehicle to talk to, not the other way round.</a:t>
+            </a:r>
+          </a:p>
+          <a:p>
+            <a:r>
+              <a:rPr sz="1200">
+                <a:latin typeface="Calibri"/>
+              </a:rPr>
+              <a:t>SixaxisPairTool needs a Windows PC and a USB cable. If you have one machine for the room, do this as a queue during the break.</a:t>
+            </a:r>
+          </a:p>
+          <a:p>
+            <a:r>
+              <a:rPr sz="1200">
+                <a:latin typeface="Calibri"/>
+              </a:rPr>
+              <a:t>The address goes in TWO places and they must match: the controller, and PS3_MAC_ADDRESS in the sketch.</a:t>
+            </a:r>
+          </a:p>
+          <a:p>
+            <a:r>
+              <a:rPr sz="1200">
+                <a:latin typeface="Calibri"/>
+              </a:rPr>
+              <a:t>Stickers on both the vehicle and the pad. Every term somebody loses a morning to two vehicles sharing an address.</a:t>
+            </a:r>
+          </a:p>
+        </p:txBody>
+      </p:sp>
+      <p:sp>
+        <p:nvSpPr>
+          <p:cNvPr id="4" name="Slide Number Placeholder 3"/>
+          <p:cNvSpPr>
+            <a:spLocks noGrp="1"/>
+          </p:cNvSpPr>
+          <p:nvPr>
+            <p:ph type="sldNum" idx="5" sz="quarter"/>
+          </p:nvPr>
+        </p:nvSpPr>
+        <p:spPr/>
+      </p:sp>
+    </p:spTree>
+  </p:cSld>
+  <p:clrMapOvr>
+    <a:masterClrMapping/>
+  </p:clrMapOvr>
+</p:notes>
+</file>
+
+<file path=ppt/notesSlides/notesSlide9.xml><?xml version="1.0" encoding="utf-8"?>
+<p:notes xmlns:a="http://schemas.openxmlformats.org/drawingml/2006/main" xmlns:p="http://schemas.openxmlformats.org/presentationml/2006/main" xmlns:r="http://schemas.openxmlformats.org/officeDocument/2006/relationships">
+  <p:cSld>
+    <p:spTree>
+      <p:nvGrpSpPr>
+        <p:cNvPr id="1" name=""/>
+        <p:cNvGrpSpPr/>
+        <p:nvPr/>
+      </p:nvGrpSpPr>
+      <p:grpSpPr>
+        <a:xfrm>
+          <a:off x="0" y="0"/>
+          <a:ext cx="0" cy="0"/>
+          <a:chOff x="0" y="0"/>
+          <a:chExt cx="0" cy="0"/>
+        </a:xfrm>
+      </p:grpSpPr>
+      <p:sp>
+        <p:nvSpPr>
+          <p:cNvPr id="2" name="Slide Image Placeholder 1"/>
+          <p:cNvSpPr>
+            <a:spLocks noGrp="1"/>
+          </p:cNvSpPr>
+          <p:nvPr>
+            <p:ph type="sldImg" idx="2"/>
+          </p:nvPr>
+        </p:nvSpPr>
+        <p:spPr/>
+      </p:sp>
+      <p:sp>
+        <p:nvSpPr>
+          <p:cNvPr id="3" name="Notes Placeholder 2"/>
+          <p:cNvSpPr>
+            <a:spLocks noGrp="1"/>
+          </p:cNvSpPr>
+          <p:nvPr>
+            <p:ph type="body" idx="3" sz="quarter"/>
+          </p:nvPr>
+        </p:nvSpPr>
+        <p:spPr/>
+        <p:txBody>
+          <a:bodyPr/>
+          <a:lstStyle/>
+          <a:p>
+            <a:r>
+              <a:rPr sz="1200">
+                <a:latin typeface="Calibri"/>
+              </a:rPr>
+              <a:t>Hold a real controller up alongside the picture and name the parts.</a:t>
+            </a:r>
+          </a:p>
+          <a:p>
+            <a:r>
+              <a:rPr sz="1200">
+                <a:latin typeface="Calibri"/>
+              </a:rPr>
+              <a:t>Tell them they are about to press every single one of these and see what the program calls it.</a:t>
+            </a:r>
+          </a:p>
+        </p:txBody>
+      </p:sp>
+      <p:sp>
+        <p:nvSpPr>
+          <p:cNvPr id="4" name="Slide Number Placeholder 3"/>
+          <p:cNvSpPr>
+            <a:spLocks noGrp="1"/>
+          </p:cNvSpPr>
+          <p:nvPr>
+            <p:ph type="sldNum" idx="5" sz="quarter"/>
+          </p:nvPr>
+        </p:nvSpPr>
+        <p:spPr/>
+      </p:sp>
+    </p:spTree>
+  </p:cSld>
+  <p:clrMapOvr>
+    <a:masterClrMapping/>
+  </p:clrMapOvr>
+</p:notes>
 </file>
 
 <file path=ppt/slideLayouts/slideLayout1.xml><?xml version="1.0" encoding="utf-8"?>
@@ -3602,7 +6928,7 @@
         </p:blipFill>
         <p:spPr>
           <a:xfrm>
-            <a:off x="7223760" y="1371600"/>
+            <a:off x="7223760" y="2023110"/>
             <a:ext cx="4480560" cy="3360420"/>
           </a:xfrm>
           <a:prstGeom prst="rect">
@@ -4743,72 +8069,6 @@
               <a:t>Up and down  -  heave</a:t>
             </a:r>
           </a:p>
-          <a:p>
-            <a:pPr algn="l">
-              <a:lnSpc>
-                <a:spcPct val="100000"/>
-              </a:lnSpc>
-              <a:spcAft>
-                <a:spcPts val="900"/>
-              </a:spcAft>
-              <a:defRPr sz="1800" b="0">
-                <a:solidFill>
-                  <a:srgbClr val="222222"/>
-                </a:solidFill>
-                <a:latin typeface="Calibri"/>
-              </a:defRPr>
-            </a:pPr>
-          </a:p>
-          <a:p>
-            <a:pPr algn="l">
-              <a:lnSpc>
-                <a:spcPct val="100000"/>
-              </a:lnSpc>
-              <a:spcAft>
-                <a:spcPts val="900"/>
-              </a:spcAft>
-              <a:defRPr sz="1800" b="0">
-                <a:solidFill>
-                  <a:srgbClr val="222222"/>
-                </a:solidFill>
-                <a:latin typeface="Calibri"/>
-              </a:defRPr>
-            </a:pPr>
-            <a:r>
-              <a:rPr sz="1800" b="0">
-                <a:solidFill>
-                  <a:srgbClr val="222222"/>
-                </a:solidFill>
-                <a:latin typeface="Calibri"/>
-              </a:rPr>
-              <a:t>ROTATION</a:t>
-            </a:r>
-          </a:p>
-          <a:p>
-            <a:pPr lvl="1" algn="l">
-              <a:lnSpc>
-                <a:spcPct val="100000"/>
-              </a:lnSpc>
-              <a:spcAft>
-                <a:spcPts val="900"/>
-              </a:spcAft>
-              <a:defRPr sz="1800" b="0">
-                <a:solidFill>
-                  <a:srgbClr val="222222"/>
-                </a:solidFill>
-                <a:latin typeface="Calibri"/>
-              </a:defRPr>
-            </a:pPr>
-            <a:r>
-              <a:rPr sz="1800" b="0">
-                <a:solidFill>
-                  <a:srgbClr val="222222"/>
-                </a:solidFill>
-                <a:latin typeface="Calibri"/>
-              </a:rPr>
-              <a:t>Roll  -  tipping left or right about the fore-aft axis</a:t>
-            </a:r>
-          </a:p>
         </p:txBody>
       </p:sp>
     </p:spTree>
@@ -5024,7 +8284,7 @@
         <p:spPr>
           <a:xfrm>
             <a:off x="502920" y="1188720"/>
-            <a:ext cx="11185855" cy="5074920"/>
+            <a:ext cx="11185855" cy="4023360"/>
           </a:xfrm>
           <a:prstGeom prst="rect">
             <a:avLst/>
@@ -5037,6 +8297,31 @@
           </a:bodyPr>
           <a:lstStyle/>
           <a:p>
+            <a:pPr algn="l">
+              <a:lnSpc>
+                <a:spcPct val="100000"/>
+              </a:lnSpc>
+              <a:spcAft>
+                <a:spcPts val="900"/>
+              </a:spcAft>
+              <a:defRPr sz="1800" b="0">
+                <a:solidFill>
+                  <a:srgbClr val="222222"/>
+                </a:solidFill>
+                <a:latin typeface="Calibri"/>
+              </a:defRPr>
+            </a:pPr>
+            <a:r>
+              <a:rPr sz="1800" b="0">
+                <a:solidFill>
+                  <a:srgbClr val="222222"/>
+                </a:solidFill>
+                <a:latin typeface="Calibri"/>
+              </a:rPr>
+              <a:t>ROTATION</a:t>
+            </a:r>
+          </a:p>
+          <a:p>
             <a:pPr lvl="1" algn="l">
               <a:lnSpc>
                 <a:spcPct val="100000"/>
@@ -5058,6 +8343,31 @@
                 </a:solidFill>
                 <a:latin typeface="Calibri"/>
               </a:rPr>
+              <a:t>Roll  -  tipping left or right about the fore-aft axis</a:t>
+            </a:r>
+          </a:p>
+          <a:p>
+            <a:pPr lvl="1" algn="l">
+              <a:lnSpc>
+                <a:spcPct val="100000"/>
+              </a:lnSpc>
+              <a:spcAft>
+                <a:spcPts val="900"/>
+              </a:spcAft>
+              <a:defRPr sz="1800" b="0">
+                <a:solidFill>
+                  <a:srgbClr val="222222"/>
+                </a:solidFill>
+                <a:latin typeface="Calibri"/>
+              </a:defRPr>
+            </a:pPr>
+            <a:r>
+              <a:rPr sz="1800" b="0">
+                <a:solidFill>
+                  <a:srgbClr val="222222"/>
+                </a:solidFill>
+                <a:latin typeface="Calibri"/>
+              </a:rPr>
               <a:t>Pitch  -  nose up or nose down</a:t>
             </a:r>
           </a:p>
@@ -5084,6 +8394,113 @@
                 <a:latin typeface="Calibri"/>
               </a:rPr>
               <a:t>Yaw  -  turning left or right, which is your steering</a:t>
+            </a:r>
+          </a:p>
+          <a:p>
+            <a:pPr algn="l">
+              <a:lnSpc>
+                <a:spcPct val="100000"/>
+              </a:lnSpc>
+              <a:spcAft>
+                <a:spcPts val="900"/>
+              </a:spcAft>
+              <a:defRPr sz="1800" b="0">
+                <a:solidFill>
+                  <a:srgbClr val="222222"/>
+                </a:solidFill>
+                <a:latin typeface="Calibri"/>
+              </a:defRPr>
+            </a:pPr>
+          </a:p>
+          <a:p>
+            <a:pPr algn="l">
+              <a:lnSpc>
+                <a:spcPct val="100000"/>
+              </a:lnSpc>
+              <a:spcAft>
+                <a:spcPts val="900"/>
+              </a:spcAft>
+              <a:defRPr sz="1800" b="0">
+                <a:solidFill>
+                  <a:srgbClr val="222222"/>
+                </a:solidFill>
+                <a:latin typeface="Calibri"/>
+              </a:defRPr>
+            </a:pPr>
+            <a:r>
+              <a:rPr sz="1800" b="0">
+                <a:solidFill>
+                  <a:srgbClr val="222222"/>
+                </a:solidFill>
+                <a:latin typeface="Calibri"/>
+              </a:rPr>
+              <a:t>A ground vehicle on a flat floor really only controls surge and yaw. A submersible or an aircraft controls all six, which is why they need far more from the operator.</a:t>
+            </a:r>
+          </a:p>
+        </p:txBody>
+      </p:sp>
+      <p:sp>
+        <p:nvSpPr>
+          <p:cNvPr id="7" name="Rounded Rectangle 6"/>
+          <p:cNvSpPr/>
+          <p:nvPr/>
+        </p:nvSpPr>
+        <p:spPr>
+          <a:xfrm>
+            <a:off x="502920" y="5303520"/>
+            <a:ext cx="11185855" cy="960120"/>
+          </a:xfrm>
+          <a:prstGeom prst="roundRect">
+            <a:avLst>
+              <a:gd name="adj" fmla="val 4000"/>
+            </a:avLst>
+          </a:prstGeom>
+          <a:solidFill>
+            <a:srgbClr val="EEF3F8"/>
+          </a:solidFill>
+          <a:ln w="12700">
+            <a:solidFill>
+              <a:srgbClr val="0E7C86"/>
+            </a:solidFill>
+          </a:ln>
+          <a:effectLst/>
+        </p:spPr>
+        <p:style>
+          <a:lnRef idx="1">
+            <a:schemeClr val="accent1"/>
+          </a:lnRef>
+          <a:fillRef idx="3">
+            <a:schemeClr val="accent1"/>
+          </a:fillRef>
+          <a:effectRef idx="2">
+            <a:schemeClr val="accent1"/>
+          </a:effectRef>
+          <a:fontRef idx="minor">
+            <a:schemeClr val="lt1"/>
+          </a:fontRef>
+        </p:style>
+        <p:txBody>
+          <a:bodyPr rtlCol="0" anchor="ctr" wrap="square" lIns="164592" rIns="164592" tIns="73152" bIns="73152"/>
+          <a:lstStyle/>
+          <a:p>
+            <a:pPr algn="l"/>
+            <a:r>
+              <a:rPr sz="1300" b="1">
+                <a:solidFill>
+                  <a:srgbClr val="0E7C86"/>
+                </a:solidFill>
+                <a:latin typeface="Calibri"/>
+              </a:rPr>
+              <a:t>KEY POINT   </a:t>
+            </a:r>
+            <a:r>
+              <a:rPr sz="1500">
+                <a:solidFill>
+                  <a:srgbClr val="222222"/>
+                </a:solidFill>
+                <a:latin typeface="Calibri"/>
+              </a:rPr>
+              <a:t>The PS3 controller was originally called the Sixaxis because it could sense all six. Spelled backwards, Sixaxis is still Sixaxis.</a:t>
             </a:r>
           </a:p>
         </p:txBody>
@@ -5147,7 +8564,7 @@
                 </a:solidFill>
                 <a:latin typeface="Calibri"/>
               </a:rPr>
-              <a:t>Six degrees of freedom  (continued)</a:t>
+              <a:t>Six degrees of freedom, and the two your rover has</a:t>
             </a:r>
           </a:p>
         </p:txBody>
@@ -5300,8 +8717,8 @@
         </p:nvSpPr>
         <p:spPr>
           <a:xfrm>
-            <a:off x="502920" y="1188720"/>
-            <a:ext cx="11185855" cy="4023360"/>
+            <a:off x="502920" y="1463040"/>
+            <a:ext cx="5394960" cy="367792"/>
           </a:xfrm>
           <a:prstGeom prst="rect">
             <a:avLst/>
@@ -5319,7 +8736,173 @@
                 <a:spcPct val="100000"/>
               </a:lnSpc>
               <a:spcAft>
-                <a:spcPts val="900"/>
+                <a:spcPts val="0"/>
+              </a:spcAft>
+              <a:defRPr sz="1800" b="1">
+                <a:solidFill>
+                  <a:srgbClr val="0E7C86"/>
+                </a:solidFill>
+                <a:latin typeface="Calibri"/>
+              </a:defRPr>
+            </a:pPr>
+            <a:r>
+              <a:rPr sz="1800" b="1">
+                <a:solidFill>
+                  <a:srgbClr val="0E7C86"/>
+                </a:solidFill>
+                <a:latin typeface="Calibri"/>
+              </a:rPr>
+              <a:t>TRANSLATION  -  sliding along an axis</a:t>
+            </a:r>
+          </a:p>
+        </p:txBody>
+      </p:sp>
+      <p:sp>
+        <p:nvSpPr>
+          <p:cNvPr id="7" name="TextBox 6"/>
+          <p:cNvSpPr txBox="1"/>
+          <p:nvPr/>
+        </p:nvSpPr>
+        <p:spPr>
+          <a:xfrm>
+            <a:off x="6400800" y="1463040"/>
+            <a:ext cx="5394960" cy="367792"/>
+          </a:xfrm>
+          <a:prstGeom prst="rect">
+            <a:avLst/>
+          </a:prstGeom>
+          <a:noFill/>
+        </p:spPr>
+        <p:txBody>
+          <a:bodyPr wrap="square" lIns="0" tIns="0" rIns="0" bIns="0">
+            <a:spAutoFit/>
+          </a:bodyPr>
+          <a:lstStyle/>
+          <a:p>
+            <a:pPr algn="l">
+              <a:lnSpc>
+                <a:spcPct val="100000"/>
+              </a:lnSpc>
+              <a:spcAft>
+                <a:spcPts val="0"/>
+              </a:spcAft>
+              <a:defRPr sz="1800" b="1">
+                <a:solidFill>
+                  <a:srgbClr val="0E7C86"/>
+                </a:solidFill>
+                <a:latin typeface="Calibri"/>
+              </a:defRPr>
+            </a:pPr>
+            <a:r>
+              <a:rPr sz="1800" b="1">
+                <a:solidFill>
+                  <a:srgbClr val="0E7C86"/>
+                </a:solidFill>
+                <a:latin typeface="Calibri"/>
+              </a:rPr>
+              <a:t>ROTATION  -  turning about an axis</a:t>
+            </a:r>
+          </a:p>
+        </p:txBody>
+      </p:sp>
+      <p:sp>
+        <p:nvSpPr>
+          <p:cNvPr id="8" name="Rounded Rectangle 7"/>
+          <p:cNvSpPr/>
+          <p:nvPr/>
+        </p:nvSpPr>
+        <p:spPr>
+          <a:xfrm>
+            <a:off x="502920" y="1883664"/>
+            <a:ext cx="1417320" cy="713232"/>
+          </a:xfrm>
+          <a:prstGeom prst="roundRect">
+            <a:avLst>
+              <a:gd name="adj" fmla="val 12000"/>
+            </a:avLst>
+          </a:prstGeom>
+          <a:solidFill>
+            <a:srgbClr val="D6ECEE"/>
+          </a:solidFill>
+          <a:ln w="25400">
+            <a:solidFill>
+              <a:srgbClr val="0E7C86"/>
+            </a:solidFill>
+          </a:ln>
+          <a:effectLst/>
+        </p:spPr>
+        <p:style>
+          <a:lnRef idx="1">
+            <a:schemeClr val="accent1"/>
+          </a:lnRef>
+          <a:fillRef idx="3">
+            <a:schemeClr val="accent1"/>
+          </a:fillRef>
+          <a:effectRef idx="2">
+            <a:schemeClr val="accent1"/>
+          </a:effectRef>
+          <a:fontRef idx="minor">
+            <a:schemeClr val="lt1"/>
+          </a:fontRef>
+        </p:style>
+        <p:txBody>
+          <a:bodyPr rtlCol="0" anchor="ctr" wrap="square" lIns="45720" rIns="45720" tIns="18288" bIns="18288"/>
+          <a:lstStyle/>
+          <a:p>
+            <a:pPr algn="ctr">
+              <a:lnSpc>
+                <a:spcPct val="100000"/>
+              </a:lnSpc>
+              <a:spcAft>
+                <a:spcPts val="0"/>
+              </a:spcAft>
+              <a:defRPr sz="1800" b="1">
+                <a:solidFill>
+                  <a:srgbClr val="1F3A5F"/>
+                </a:solidFill>
+                <a:latin typeface="Calibri"/>
+              </a:defRPr>
+            </a:pPr>
+            <a:r>
+              <a:rPr sz="1800" b="1">
+                <a:solidFill>
+                  <a:srgbClr val="1F3A5F"/>
+                </a:solidFill>
+                <a:latin typeface="Calibri"/>
+              </a:rPr>
+              <a:t>SURGE</a:t>
+            </a:r>
+          </a:p>
+        </p:txBody>
+      </p:sp>
+      <p:sp>
+        <p:nvSpPr>
+          <p:cNvPr id="9" name="TextBox 8"/>
+          <p:cNvSpPr txBox="1"/>
+          <p:nvPr/>
+        </p:nvSpPr>
+        <p:spPr>
+          <a:xfrm>
+            <a:off x="2057400" y="1920240"/>
+            <a:ext cx="2331720" cy="329184"/>
+          </a:xfrm>
+          <a:prstGeom prst="rect">
+            <a:avLst/>
+          </a:prstGeom>
+          <a:noFill/>
+        </p:spPr>
+        <p:txBody>
+          <a:bodyPr wrap="square" lIns="0" tIns="0" rIns="0" bIns="0">
+            <a:spAutoFit/>
+          </a:bodyPr>
+          <a:lstStyle/>
+          <a:p>
+            <a:pPr algn="l">
+              <a:lnSpc>
+                <a:spcPct val="100000"/>
+              </a:lnSpc>
+              <a:spcAft>
+                <a:spcPts val="0"/>
               </a:spcAft>
               <a:defRPr sz="1800" b="0">
                 <a:solidFill>
@@ -5328,18 +8911,50 @@
                 <a:latin typeface="Calibri"/>
               </a:defRPr>
             </a:pPr>
-          </a:p>
-          <a:p>
-            <a:pPr algn="l">
-              <a:lnSpc>
-                <a:spcPct val="100000"/>
-              </a:lnSpc>
-              <a:spcAft>
-                <a:spcPts val="900"/>
+            <a:r>
+              <a:rPr sz="1800" b="0">
+                <a:solidFill>
+                  <a:srgbClr val="222222"/>
+                </a:solidFill>
+                <a:latin typeface="Calibri"/>
+              </a:rPr>
+              <a:t>forward and back</a:t>
+            </a:r>
+          </a:p>
+        </p:txBody>
+      </p:sp>
+      <p:sp>
+        <p:nvSpPr>
+          <p:cNvPr id="10" name="TextBox 9"/>
+          <p:cNvSpPr txBox="1"/>
+          <p:nvPr/>
+        </p:nvSpPr>
+        <p:spPr>
+          <a:xfrm>
+            <a:off x="4480559" y="1975104"/>
+            <a:ext cx="1371600" cy="367792"/>
+          </a:xfrm>
+          <a:prstGeom prst="rect">
+            <a:avLst/>
+          </a:prstGeom>
+          <a:noFill/>
+        </p:spPr>
+        <p:txBody>
+          <a:bodyPr wrap="square" lIns="0" tIns="0" rIns="0" bIns="0">
+            <a:spAutoFit/>
+          </a:bodyPr>
+          <a:lstStyle/>
+          <a:p>
+            <a:pPr algn="l">
+              <a:lnSpc>
+                <a:spcPct val="100000"/>
+              </a:lnSpc>
+              <a:spcAft>
+                <a:spcPts val="0"/>
               </a:spcAft>
               <a:defRPr sz="1800" b="0">
                 <a:solidFill>
-                  <a:srgbClr val="222222"/>
+                  <a:srgbClr val="666666"/>
                 </a:solidFill>
                 <a:latin typeface="Calibri"/>
               </a:defRPr>
@@ -5347,18 +8962,1084 @@
             <a:r>
               <a:rPr sz="1800" b="0">
                 <a:solidFill>
-                  <a:srgbClr val="222222"/>
-                </a:solidFill>
-                <a:latin typeface="Calibri"/>
-              </a:rPr>
-              <a:t>A ground vehicle on a flat floor really only controls surge and yaw. A submersible or an aircraft controls all six, which is why they need far more from the operator.</a:t>
-            </a:r>
-          </a:p>
-        </p:txBody>
-      </p:sp>
-      <p:sp>
-        <p:nvSpPr>
-          <p:cNvPr id="7" name="Rounded Rectangle 6"/>
+                  <a:srgbClr val="666666"/>
+                </a:solidFill>
+                <a:latin typeface="Calibri"/>
+              </a:rPr>
+              <a:t>X axis</a:t>
+            </a:r>
+          </a:p>
+        </p:txBody>
+      </p:sp>
+      <p:sp>
+        <p:nvSpPr>
+          <p:cNvPr id="11" name="TextBox 10"/>
+          <p:cNvSpPr txBox="1"/>
+          <p:nvPr/>
+        </p:nvSpPr>
+        <p:spPr>
+          <a:xfrm>
+            <a:off x="2057400" y="2267712"/>
+            <a:ext cx="3749039" cy="310896"/>
+          </a:xfrm>
+          <a:prstGeom prst="rect">
+            <a:avLst/>
+          </a:prstGeom>
+          <a:noFill/>
+        </p:spPr>
+        <p:txBody>
+          <a:bodyPr wrap="square" lIns="0" tIns="0" rIns="0" bIns="0">
+            <a:spAutoFit/>
+          </a:bodyPr>
+          <a:lstStyle/>
+          <a:p>
+            <a:pPr algn="l">
+              <a:lnSpc>
+                <a:spcPct val="100000"/>
+              </a:lnSpc>
+              <a:spcAft>
+                <a:spcPts val="0"/>
+              </a:spcAft>
+              <a:defRPr sz="1800" b="1">
+                <a:solidFill>
+                  <a:srgbClr val="0E7C86"/>
+                </a:solidFill>
+                <a:latin typeface="Calibri"/>
+              </a:defRPr>
+            </a:pPr>
+            <a:r>
+              <a:rPr sz="1800" b="1">
+                <a:solidFill>
+                  <a:srgbClr val="0E7C86"/>
+                </a:solidFill>
+                <a:latin typeface="Calibri"/>
+              </a:rPr>
+              <a:t>your rover controls this one</a:t>
+            </a:r>
+          </a:p>
+        </p:txBody>
+      </p:sp>
+      <p:sp>
+        <p:nvSpPr>
+          <p:cNvPr id="12" name="Rounded Rectangle 11"/>
+          <p:cNvSpPr/>
+          <p:nvPr/>
+        </p:nvSpPr>
+        <p:spPr>
+          <a:xfrm>
+            <a:off x="502920" y="2724912"/>
+            <a:ext cx="1417320" cy="713232"/>
+          </a:xfrm>
+          <a:prstGeom prst="roundRect">
+            <a:avLst>
+              <a:gd name="adj" fmla="val 12000"/>
+            </a:avLst>
+          </a:prstGeom>
+          <a:solidFill>
+            <a:srgbClr val="FFFFFF"/>
+          </a:solidFill>
+          <a:ln w="12700">
+            <a:solidFill>
+              <a:srgbClr val="C8D2DE"/>
+            </a:solidFill>
+          </a:ln>
+          <a:effectLst/>
+        </p:spPr>
+        <p:style>
+          <a:lnRef idx="1">
+            <a:schemeClr val="accent1"/>
+          </a:lnRef>
+          <a:fillRef idx="3">
+            <a:schemeClr val="accent1"/>
+          </a:fillRef>
+          <a:effectRef idx="2">
+            <a:schemeClr val="accent1"/>
+          </a:effectRef>
+          <a:fontRef idx="minor">
+            <a:schemeClr val="lt1"/>
+          </a:fontRef>
+        </p:style>
+        <p:txBody>
+          <a:bodyPr rtlCol="0" anchor="ctr" wrap="square" lIns="45720" rIns="45720" tIns="18288" bIns="18288"/>
+          <a:lstStyle/>
+          <a:p>
+            <a:pPr algn="ctr">
+              <a:lnSpc>
+                <a:spcPct val="100000"/>
+              </a:lnSpc>
+              <a:spcAft>
+                <a:spcPts val="0"/>
+              </a:spcAft>
+              <a:defRPr sz="1800" b="1">
+                <a:solidFill>
+                  <a:srgbClr val="1F3A5F"/>
+                </a:solidFill>
+                <a:latin typeface="Calibri"/>
+              </a:defRPr>
+            </a:pPr>
+            <a:r>
+              <a:rPr sz="1800" b="1">
+                <a:solidFill>
+                  <a:srgbClr val="1F3A5F"/>
+                </a:solidFill>
+                <a:latin typeface="Calibri"/>
+              </a:rPr>
+              <a:t>SWAY</a:t>
+            </a:r>
+          </a:p>
+        </p:txBody>
+      </p:sp>
+      <p:sp>
+        <p:nvSpPr>
+          <p:cNvPr id="13" name="TextBox 12"/>
+          <p:cNvSpPr txBox="1"/>
+          <p:nvPr/>
+        </p:nvSpPr>
+        <p:spPr>
+          <a:xfrm>
+            <a:off x="2057400" y="2761488"/>
+            <a:ext cx="2331720" cy="329184"/>
+          </a:xfrm>
+          <a:prstGeom prst="rect">
+            <a:avLst/>
+          </a:prstGeom>
+          <a:noFill/>
+        </p:spPr>
+        <p:txBody>
+          <a:bodyPr wrap="square" lIns="0" tIns="0" rIns="0" bIns="0">
+            <a:spAutoFit/>
+          </a:bodyPr>
+          <a:lstStyle/>
+          <a:p>
+            <a:pPr algn="l">
+              <a:lnSpc>
+                <a:spcPct val="100000"/>
+              </a:lnSpc>
+              <a:spcAft>
+                <a:spcPts val="0"/>
+              </a:spcAft>
+              <a:defRPr sz="1800" b="0">
+                <a:solidFill>
+                  <a:srgbClr val="222222"/>
+                </a:solidFill>
+                <a:latin typeface="Calibri"/>
+              </a:defRPr>
+            </a:pPr>
+            <a:r>
+              <a:rPr sz="1800" b="0">
+                <a:solidFill>
+                  <a:srgbClr val="222222"/>
+                </a:solidFill>
+                <a:latin typeface="Calibri"/>
+              </a:rPr>
+              <a:t>left and right</a:t>
+            </a:r>
+          </a:p>
+        </p:txBody>
+      </p:sp>
+      <p:sp>
+        <p:nvSpPr>
+          <p:cNvPr id="14" name="TextBox 13"/>
+          <p:cNvSpPr txBox="1"/>
+          <p:nvPr/>
+        </p:nvSpPr>
+        <p:spPr>
+          <a:xfrm>
+            <a:off x="4480559" y="2816352"/>
+            <a:ext cx="1371600" cy="367792"/>
+          </a:xfrm>
+          <a:prstGeom prst="rect">
+            <a:avLst/>
+          </a:prstGeom>
+          <a:noFill/>
+        </p:spPr>
+        <p:txBody>
+          <a:bodyPr wrap="square" lIns="0" tIns="0" rIns="0" bIns="0">
+            <a:spAutoFit/>
+          </a:bodyPr>
+          <a:lstStyle/>
+          <a:p>
+            <a:pPr algn="l">
+              <a:lnSpc>
+                <a:spcPct val="100000"/>
+              </a:lnSpc>
+              <a:spcAft>
+                <a:spcPts val="0"/>
+              </a:spcAft>
+              <a:defRPr sz="1800" b="0">
+                <a:solidFill>
+                  <a:srgbClr val="666666"/>
+                </a:solidFill>
+                <a:latin typeface="Calibri"/>
+              </a:defRPr>
+            </a:pPr>
+            <a:r>
+              <a:rPr sz="1800" b="0">
+                <a:solidFill>
+                  <a:srgbClr val="666666"/>
+                </a:solidFill>
+                <a:latin typeface="Calibri"/>
+              </a:rPr>
+              <a:t>Y axis</a:t>
+            </a:r>
+          </a:p>
+        </p:txBody>
+      </p:sp>
+      <p:sp>
+        <p:nvSpPr>
+          <p:cNvPr id="15" name="Rounded Rectangle 14"/>
+          <p:cNvSpPr/>
+          <p:nvPr/>
+        </p:nvSpPr>
+        <p:spPr>
+          <a:xfrm>
+            <a:off x="502920" y="3566160"/>
+            <a:ext cx="1417320" cy="713232"/>
+          </a:xfrm>
+          <a:prstGeom prst="roundRect">
+            <a:avLst>
+              <a:gd name="adj" fmla="val 12000"/>
+            </a:avLst>
+          </a:prstGeom>
+          <a:solidFill>
+            <a:srgbClr val="FFFFFF"/>
+          </a:solidFill>
+          <a:ln w="12700">
+            <a:solidFill>
+              <a:srgbClr val="C8D2DE"/>
+            </a:solidFill>
+          </a:ln>
+          <a:effectLst/>
+        </p:spPr>
+        <p:style>
+          <a:lnRef idx="1">
+            <a:schemeClr val="accent1"/>
+          </a:lnRef>
+          <a:fillRef idx="3">
+            <a:schemeClr val="accent1"/>
+          </a:fillRef>
+          <a:effectRef idx="2">
+            <a:schemeClr val="accent1"/>
+          </a:effectRef>
+          <a:fontRef idx="minor">
+            <a:schemeClr val="lt1"/>
+          </a:fontRef>
+        </p:style>
+        <p:txBody>
+          <a:bodyPr rtlCol="0" anchor="ctr" wrap="square" lIns="45720" rIns="45720" tIns="18288" bIns="18288"/>
+          <a:lstStyle/>
+          <a:p>
+            <a:pPr algn="ctr">
+              <a:lnSpc>
+                <a:spcPct val="100000"/>
+              </a:lnSpc>
+              <a:spcAft>
+                <a:spcPts val="0"/>
+              </a:spcAft>
+              <a:defRPr sz="1800" b="1">
+                <a:solidFill>
+                  <a:srgbClr val="1F3A5F"/>
+                </a:solidFill>
+                <a:latin typeface="Calibri"/>
+              </a:defRPr>
+            </a:pPr>
+            <a:r>
+              <a:rPr sz="1800" b="1">
+                <a:solidFill>
+                  <a:srgbClr val="1F3A5F"/>
+                </a:solidFill>
+                <a:latin typeface="Calibri"/>
+              </a:rPr>
+              <a:t>HEAVE</a:t>
+            </a:r>
+          </a:p>
+        </p:txBody>
+      </p:sp>
+      <p:sp>
+        <p:nvSpPr>
+          <p:cNvPr id="16" name="TextBox 15"/>
+          <p:cNvSpPr txBox="1"/>
+          <p:nvPr/>
+        </p:nvSpPr>
+        <p:spPr>
+          <a:xfrm>
+            <a:off x="2057400" y="3602736"/>
+            <a:ext cx="2331720" cy="329184"/>
+          </a:xfrm>
+          <a:prstGeom prst="rect">
+            <a:avLst/>
+          </a:prstGeom>
+          <a:noFill/>
+        </p:spPr>
+        <p:txBody>
+          <a:bodyPr wrap="square" lIns="0" tIns="0" rIns="0" bIns="0">
+            <a:spAutoFit/>
+          </a:bodyPr>
+          <a:lstStyle/>
+          <a:p>
+            <a:pPr algn="l">
+              <a:lnSpc>
+                <a:spcPct val="100000"/>
+              </a:lnSpc>
+              <a:spcAft>
+                <a:spcPts val="0"/>
+              </a:spcAft>
+              <a:defRPr sz="1800" b="0">
+                <a:solidFill>
+                  <a:srgbClr val="222222"/>
+                </a:solidFill>
+                <a:latin typeface="Calibri"/>
+              </a:defRPr>
+            </a:pPr>
+            <a:r>
+              <a:rPr sz="1800" b="0">
+                <a:solidFill>
+                  <a:srgbClr val="222222"/>
+                </a:solidFill>
+                <a:latin typeface="Calibri"/>
+              </a:rPr>
+              <a:t>up and down</a:t>
+            </a:r>
+          </a:p>
+        </p:txBody>
+      </p:sp>
+      <p:sp>
+        <p:nvSpPr>
+          <p:cNvPr id="17" name="TextBox 16"/>
+          <p:cNvSpPr txBox="1"/>
+          <p:nvPr/>
+        </p:nvSpPr>
+        <p:spPr>
+          <a:xfrm>
+            <a:off x="4480559" y="3657600"/>
+            <a:ext cx="1371600" cy="367792"/>
+          </a:xfrm>
+          <a:prstGeom prst="rect">
+            <a:avLst/>
+          </a:prstGeom>
+          <a:noFill/>
+        </p:spPr>
+        <p:txBody>
+          <a:bodyPr wrap="square" lIns="0" tIns="0" rIns="0" bIns="0">
+            <a:spAutoFit/>
+          </a:bodyPr>
+          <a:lstStyle/>
+          <a:p>
+            <a:pPr algn="l">
+              <a:lnSpc>
+                <a:spcPct val="100000"/>
+              </a:lnSpc>
+              <a:spcAft>
+                <a:spcPts val="0"/>
+              </a:spcAft>
+              <a:defRPr sz="1800" b="0">
+                <a:solidFill>
+                  <a:srgbClr val="666666"/>
+                </a:solidFill>
+                <a:latin typeface="Calibri"/>
+              </a:defRPr>
+            </a:pPr>
+            <a:r>
+              <a:rPr sz="1800" b="0">
+                <a:solidFill>
+                  <a:srgbClr val="666666"/>
+                </a:solidFill>
+                <a:latin typeface="Calibri"/>
+              </a:rPr>
+              <a:t>Z axis</a:t>
+            </a:r>
+          </a:p>
+        </p:txBody>
+      </p:sp>
+      <p:sp>
+        <p:nvSpPr>
+          <p:cNvPr id="18" name="Rounded Rectangle 17"/>
+          <p:cNvSpPr/>
+          <p:nvPr/>
+        </p:nvSpPr>
+        <p:spPr>
+          <a:xfrm>
+            <a:off x="6400800" y="1883664"/>
+            <a:ext cx="1417320" cy="713232"/>
+          </a:xfrm>
+          <a:prstGeom prst="roundRect">
+            <a:avLst>
+              <a:gd name="adj" fmla="val 12000"/>
+            </a:avLst>
+          </a:prstGeom>
+          <a:solidFill>
+            <a:srgbClr val="FFFFFF"/>
+          </a:solidFill>
+          <a:ln w="12700">
+            <a:solidFill>
+              <a:srgbClr val="C8D2DE"/>
+            </a:solidFill>
+          </a:ln>
+          <a:effectLst/>
+        </p:spPr>
+        <p:style>
+          <a:lnRef idx="1">
+            <a:schemeClr val="accent1"/>
+          </a:lnRef>
+          <a:fillRef idx="3">
+            <a:schemeClr val="accent1"/>
+          </a:fillRef>
+          <a:effectRef idx="2">
+            <a:schemeClr val="accent1"/>
+          </a:effectRef>
+          <a:fontRef idx="minor">
+            <a:schemeClr val="lt1"/>
+          </a:fontRef>
+        </p:style>
+        <p:txBody>
+          <a:bodyPr rtlCol="0" anchor="ctr" wrap="square" lIns="45720" rIns="45720" tIns="18288" bIns="18288"/>
+          <a:lstStyle/>
+          <a:p>
+            <a:pPr algn="ctr">
+              <a:lnSpc>
+                <a:spcPct val="100000"/>
+              </a:lnSpc>
+              <a:spcAft>
+                <a:spcPts val="0"/>
+              </a:spcAft>
+              <a:defRPr sz="1800" b="1">
+                <a:solidFill>
+                  <a:srgbClr val="1F3A5F"/>
+                </a:solidFill>
+                <a:latin typeface="Calibri"/>
+              </a:defRPr>
+            </a:pPr>
+            <a:r>
+              <a:rPr sz="1800" b="1">
+                <a:solidFill>
+                  <a:srgbClr val="1F3A5F"/>
+                </a:solidFill>
+                <a:latin typeface="Calibri"/>
+              </a:rPr>
+              <a:t>ROLL</a:t>
+            </a:r>
+          </a:p>
+        </p:txBody>
+      </p:sp>
+      <p:sp>
+        <p:nvSpPr>
+          <p:cNvPr id="19" name="TextBox 18"/>
+          <p:cNvSpPr txBox="1"/>
+          <p:nvPr/>
+        </p:nvSpPr>
+        <p:spPr>
+          <a:xfrm>
+            <a:off x="7955280" y="1920240"/>
+            <a:ext cx="2331720" cy="329184"/>
+          </a:xfrm>
+          <a:prstGeom prst="rect">
+            <a:avLst/>
+          </a:prstGeom>
+          <a:noFill/>
+        </p:spPr>
+        <p:txBody>
+          <a:bodyPr wrap="square" lIns="0" tIns="0" rIns="0" bIns="0">
+            <a:spAutoFit/>
+          </a:bodyPr>
+          <a:lstStyle/>
+          <a:p>
+            <a:pPr algn="l">
+              <a:lnSpc>
+                <a:spcPct val="100000"/>
+              </a:lnSpc>
+              <a:spcAft>
+                <a:spcPts val="0"/>
+              </a:spcAft>
+              <a:defRPr sz="1800" b="0">
+                <a:solidFill>
+                  <a:srgbClr val="222222"/>
+                </a:solidFill>
+                <a:latin typeface="Calibri"/>
+              </a:defRPr>
+            </a:pPr>
+            <a:r>
+              <a:rPr sz="1800" b="0">
+                <a:solidFill>
+                  <a:srgbClr val="222222"/>
+                </a:solidFill>
+                <a:latin typeface="Calibri"/>
+              </a:rPr>
+              <a:t>tipping left or right</a:t>
+            </a:r>
+          </a:p>
+        </p:txBody>
+      </p:sp>
+      <p:sp>
+        <p:nvSpPr>
+          <p:cNvPr id="20" name="TextBox 19"/>
+          <p:cNvSpPr txBox="1"/>
+          <p:nvPr/>
+        </p:nvSpPr>
+        <p:spPr>
+          <a:xfrm>
+            <a:off x="10378439" y="1975104"/>
+            <a:ext cx="1371600" cy="367792"/>
+          </a:xfrm>
+          <a:prstGeom prst="rect">
+            <a:avLst/>
+          </a:prstGeom>
+          <a:noFill/>
+        </p:spPr>
+        <p:txBody>
+          <a:bodyPr wrap="square" lIns="0" tIns="0" rIns="0" bIns="0">
+            <a:spAutoFit/>
+          </a:bodyPr>
+          <a:lstStyle/>
+          <a:p>
+            <a:pPr algn="l">
+              <a:lnSpc>
+                <a:spcPct val="100000"/>
+              </a:lnSpc>
+              <a:spcAft>
+                <a:spcPts val="0"/>
+              </a:spcAft>
+              <a:defRPr sz="1800" b="0">
+                <a:solidFill>
+                  <a:srgbClr val="666666"/>
+                </a:solidFill>
+                <a:latin typeface="Calibri"/>
+              </a:defRPr>
+            </a:pPr>
+            <a:r>
+              <a:rPr sz="1800" b="0">
+                <a:solidFill>
+                  <a:srgbClr val="666666"/>
+                </a:solidFill>
+                <a:latin typeface="Calibri"/>
+              </a:rPr>
+              <a:t>about X</a:t>
+            </a:r>
+          </a:p>
+        </p:txBody>
+      </p:sp>
+      <p:sp>
+        <p:nvSpPr>
+          <p:cNvPr id="21" name="Rounded Rectangle 20"/>
+          <p:cNvSpPr/>
+          <p:nvPr/>
+        </p:nvSpPr>
+        <p:spPr>
+          <a:xfrm>
+            <a:off x="6400800" y="2724912"/>
+            <a:ext cx="1417320" cy="713232"/>
+          </a:xfrm>
+          <a:prstGeom prst="roundRect">
+            <a:avLst>
+              <a:gd name="adj" fmla="val 12000"/>
+            </a:avLst>
+          </a:prstGeom>
+          <a:solidFill>
+            <a:srgbClr val="FFFFFF"/>
+          </a:solidFill>
+          <a:ln w="12700">
+            <a:solidFill>
+              <a:srgbClr val="C8D2DE"/>
+            </a:solidFill>
+          </a:ln>
+          <a:effectLst/>
+        </p:spPr>
+        <p:style>
+          <a:lnRef idx="1">
+            <a:schemeClr val="accent1"/>
+          </a:lnRef>
+          <a:fillRef idx="3">
+            <a:schemeClr val="accent1"/>
+          </a:fillRef>
+          <a:effectRef idx="2">
+            <a:schemeClr val="accent1"/>
+          </a:effectRef>
+          <a:fontRef idx="minor">
+            <a:schemeClr val="lt1"/>
+          </a:fontRef>
+        </p:style>
+        <p:txBody>
+          <a:bodyPr rtlCol="0" anchor="ctr" wrap="square" lIns="45720" rIns="45720" tIns="18288" bIns="18288"/>
+          <a:lstStyle/>
+          <a:p>
+            <a:pPr algn="ctr">
+              <a:lnSpc>
+                <a:spcPct val="100000"/>
+              </a:lnSpc>
+              <a:spcAft>
+                <a:spcPts val="0"/>
+              </a:spcAft>
+              <a:defRPr sz="1800" b="1">
+                <a:solidFill>
+                  <a:srgbClr val="1F3A5F"/>
+                </a:solidFill>
+                <a:latin typeface="Calibri"/>
+              </a:defRPr>
+            </a:pPr>
+            <a:r>
+              <a:rPr sz="1800" b="1">
+                <a:solidFill>
+                  <a:srgbClr val="1F3A5F"/>
+                </a:solidFill>
+                <a:latin typeface="Calibri"/>
+              </a:rPr>
+              <a:t>PITCH</a:t>
+            </a:r>
+          </a:p>
+        </p:txBody>
+      </p:sp>
+      <p:sp>
+        <p:nvSpPr>
+          <p:cNvPr id="22" name="TextBox 21"/>
+          <p:cNvSpPr txBox="1"/>
+          <p:nvPr/>
+        </p:nvSpPr>
+        <p:spPr>
+          <a:xfrm>
+            <a:off x="7955280" y="2761488"/>
+            <a:ext cx="2331720" cy="329184"/>
+          </a:xfrm>
+          <a:prstGeom prst="rect">
+            <a:avLst/>
+          </a:prstGeom>
+          <a:noFill/>
+        </p:spPr>
+        <p:txBody>
+          <a:bodyPr wrap="square" lIns="0" tIns="0" rIns="0" bIns="0">
+            <a:spAutoFit/>
+          </a:bodyPr>
+          <a:lstStyle/>
+          <a:p>
+            <a:pPr algn="l">
+              <a:lnSpc>
+                <a:spcPct val="100000"/>
+              </a:lnSpc>
+              <a:spcAft>
+                <a:spcPts val="0"/>
+              </a:spcAft>
+              <a:defRPr sz="1800" b="0">
+                <a:solidFill>
+                  <a:srgbClr val="222222"/>
+                </a:solidFill>
+                <a:latin typeface="Calibri"/>
+              </a:defRPr>
+            </a:pPr>
+            <a:r>
+              <a:rPr sz="1800" b="0">
+                <a:solidFill>
+                  <a:srgbClr val="222222"/>
+                </a:solidFill>
+                <a:latin typeface="Calibri"/>
+              </a:rPr>
+              <a:t>nose up or nose down</a:t>
+            </a:r>
+          </a:p>
+        </p:txBody>
+      </p:sp>
+      <p:sp>
+        <p:nvSpPr>
+          <p:cNvPr id="23" name="TextBox 22"/>
+          <p:cNvSpPr txBox="1"/>
+          <p:nvPr/>
+        </p:nvSpPr>
+        <p:spPr>
+          <a:xfrm>
+            <a:off x="10378439" y="2816352"/>
+            <a:ext cx="1371600" cy="367792"/>
+          </a:xfrm>
+          <a:prstGeom prst="rect">
+            <a:avLst/>
+          </a:prstGeom>
+          <a:noFill/>
+        </p:spPr>
+        <p:txBody>
+          <a:bodyPr wrap="square" lIns="0" tIns="0" rIns="0" bIns="0">
+            <a:spAutoFit/>
+          </a:bodyPr>
+          <a:lstStyle/>
+          <a:p>
+            <a:pPr algn="l">
+              <a:lnSpc>
+                <a:spcPct val="100000"/>
+              </a:lnSpc>
+              <a:spcAft>
+                <a:spcPts val="0"/>
+              </a:spcAft>
+              <a:defRPr sz="1800" b="0">
+                <a:solidFill>
+                  <a:srgbClr val="666666"/>
+                </a:solidFill>
+                <a:latin typeface="Calibri"/>
+              </a:defRPr>
+            </a:pPr>
+            <a:r>
+              <a:rPr sz="1800" b="0">
+                <a:solidFill>
+                  <a:srgbClr val="666666"/>
+                </a:solidFill>
+                <a:latin typeface="Calibri"/>
+              </a:rPr>
+              <a:t>about Y</a:t>
+            </a:r>
+          </a:p>
+        </p:txBody>
+      </p:sp>
+      <p:sp>
+        <p:nvSpPr>
+          <p:cNvPr id="24" name="Rounded Rectangle 23"/>
+          <p:cNvSpPr/>
+          <p:nvPr/>
+        </p:nvSpPr>
+        <p:spPr>
+          <a:xfrm>
+            <a:off x="6400800" y="3566160"/>
+            <a:ext cx="1417320" cy="713232"/>
+          </a:xfrm>
+          <a:prstGeom prst="roundRect">
+            <a:avLst>
+              <a:gd name="adj" fmla="val 12000"/>
+            </a:avLst>
+          </a:prstGeom>
+          <a:solidFill>
+            <a:srgbClr val="D6ECEE"/>
+          </a:solidFill>
+          <a:ln w="25400">
+            <a:solidFill>
+              <a:srgbClr val="0E7C86"/>
+            </a:solidFill>
+          </a:ln>
+          <a:effectLst/>
+        </p:spPr>
+        <p:style>
+          <a:lnRef idx="1">
+            <a:schemeClr val="accent1"/>
+          </a:lnRef>
+          <a:fillRef idx="3">
+            <a:schemeClr val="accent1"/>
+          </a:fillRef>
+          <a:effectRef idx="2">
+            <a:schemeClr val="accent1"/>
+          </a:effectRef>
+          <a:fontRef idx="minor">
+            <a:schemeClr val="lt1"/>
+          </a:fontRef>
+        </p:style>
+        <p:txBody>
+          <a:bodyPr rtlCol="0" anchor="ctr" wrap="square" lIns="45720" rIns="45720" tIns="18288" bIns="18288"/>
+          <a:lstStyle/>
+          <a:p>
+            <a:pPr algn="ctr">
+              <a:lnSpc>
+                <a:spcPct val="100000"/>
+              </a:lnSpc>
+              <a:spcAft>
+                <a:spcPts val="0"/>
+              </a:spcAft>
+              <a:defRPr sz="1800" b="1">
+                <a:solidFill>
+                  <a:srgbClr val="1F3A5F"/>
+                </a:solidFill>
+                <a:latin typeface="Calibri"/>
+              </a:defRPr>
+            </a:pPr>
+            <a:r>
+              <a:rPr sz="1800" b="1">
+                <a:solidFill>
+                  <a:srgbClr val="1F3A5F"/>
+                </a:solidFill>
+                <a:latin typeface="Calibri"/>
+              </a:rPr>
+              <a:t>YAW</a:t>
+            </a:r>
+          </a:p>
+        </p:txBody>
+      </p:sp>
+      <p:sp>
+        <p:nvSpPr>
+          <p:cNvPr id="25" name="TextBox 24"/>
+          <p:cNvSpPr txBox="1"/>
+          <p:nvPr/>
+        </p:nvSpPr>
+        <p:spPr>
+          <a:xfrm>
+            <a:off x="7955280" y="3602736"/>
+            <a:ext cx="2331720" cy="329184"/>
+          </a:xfrm>
+          <a:prstGeom prst="rect">
+            <a:avLst/>
+          </a:prstGeom>
+          <a:noFill/>
+        </p:spPr>
+        <p:txBody>
+          <a:bodyPr wrap="square" lIns="0" tIns="0" rIns="0" bIns="0">
+            <a:spAutoFit/>
+          </a:bodyPr>
+          <a:lstStyle/>
+          <a:p>
+            <a:pPr algn="l">
+              <a:lnSpc>
+                <a:spcPct val="100000"/>
+              </a:lnSpc>
+              <a:spcAft>
+                <a:spcPts val="0"/>
+              </a:spcAft>
+              <a:defRPr sz="1800" b="0">
+                <a:solidFill>
+                  <a:srgbClr val="222222"/>
+                </a:solidFill>
+                <a:latin typeface="Calibri"/>
+              </a:defRPr>
+            </a:pPr>
+            <a:r>
+              <a:rPr sz="1800" b="0">
+                <a:solidFill>
+                  <a:srgbClr val="222222"/>
+                </a:solidFill>
+                <a:latin typeface="Calibri"/>
+              </a:rPr>
+              <a:t>turning left or right</a:t>
+            </a:r>
+          </a:p>
+        </p:txBody>
+      </p:sp>
+      <p:sp>
+        <p:nvSpPr>
+          <p:cNvPr id="26" name="TextBox 25"/>
+          <p:cNvSpPr txBox="1"/>
+          <p:nvPr/>
+        </p:nvSpPr>
+        <p:spPr>
+          <a:xfrm>
+            <a:off x="10378439" y="3657600"/>
+            <a:ext cx="1371600" cy="367792"/>
+          </a:xfrm>
+          <a:prstGeom prst="rect">
+            <a:avLst/>
+          </a:prstGeom>
+          <a:noFill/>
+        </p:spPr>
+        <p:txBody>
+          <a:bodyPr wrap="square" lIns="0" tIns="0" rIns="0" bIns="0">
+            <a:spAutoFit/>
+          </a:bodyPr>
+          <a:lstStyle/>
+          <a:p>
+            <a:pPr algn="l">
+              <a:lnSpc>
+                <a:spcPct val="100000"/>
+              </a:lnSpc>
+              <a:spcAft>
+                <a:spcPts val="0"/>
+              </a:spcAft>
+              <a:defRPr sz="1800" b="0">
+                <a:solidFill>
+                  <a:srgbClr val="666666"/>
+                </a:solidFill>
+                <a:latin typeface="Calibri"/>
+              </a:defRPr>
+            </a:pPr>
+            <a:r>
+              <a:rPr sz="1800" b="0">
+                <a:solidFill>
+                  <a:srgbClr val="666666"/>
+                </a:solidFill>
+                <a:latin typeface="Calibri"/>
+              </a:rPr>
+              <a:t>about Z</a:t>
+            </a:r>
+          </a:p>
+        </p:txBody>
+      </p:sp>
+      <p:sp>
+        <p:nvSpPr>
+          <p:cNvPr id="27" name="TextBox 26"/>
+          <p:cNvSpPr txBox="1"/>
+          <p:nvPr/>
+        </p:nvSpPr>
+        <p:spPr>
+          <a:xfrm>
+            <a:off x="7955280" y="3950208"/>
+            <a:ext cx="3749039" cy="310896"/>
+          </a:xfrm>
+          <a:prstGeom prst="rect">
+            <a:avLst/>
+          </a:prstGeom>
+          <a:noFill/>
+        </p:spPr>
+        <p:txBody>
+          <a:bodyPr wrap="square" lIns="0" tIns="0" rIns="0" bIns="0">
+            <a:spAutoFit/>
+          </a:bodyPr>
+          <a:lstStyle/>
+          <a:p>
+            <a:pPr algn="l">
+              <a:lnSpc>
+                <a:spcPct val="100000"/>
+              </a:lnSpc>
+              <a:spcAft>
+                <a:spcPts val="0"/>
+              </a:spcAft>
+              <a:defRPr sz="1800" b="1">
+                <a:solidFill>
+                  <a:srgbClr val="0E7C86"/>
+                </a:solidFill>
+                <a:latin typeface="Calibri"/>
+              </a:defRPr>
+            </a:pPr>
+            <a:r>
+              <a:rPr sz="1800" b="1">
+                <a:solidFill>
+                  <a:srgbClr val="0E7C86"/>
+                </a:solidFill>
+                <a:latin typeface="Calibri"/>
+              </a:rPr>
+              <a:t>your rover controls this one</a:t>
+            </a:r>
+          </a:p>
+        </p:txBody>
+      </p:sp>
+      <p:sp>
+        <p:nvSpPr>
+          <p:cNvPr id="28" name="Rounded Rectangle 27"/>
+          <p:cNvSpPr/>
+          <p:nvPr/>
+        </p:nvSpPr>
+        <p:spPr>
+          <a:xfrm>
+            <a:off x="502920" y="4498848"/>
+            <a:ext cx="5394960" cy="530352"/>
+          </a:xfrm>
+          <a:prstGeom prst="roundRect">
+            <a:avLst>
+              <a:gd name="adj" fmla="val 12000"/>
+            </a:avLst>
+          </a:prstGeom>
+          <a:solidFill>
+            <a:srgbClr val="EEF3F8"/>
+          </a:solidFill>
+          <a:ln w="15875">
+            <a:solidFill>
+              <a:srgbClr val="0E7C86"/>
+            </a:solidFill>
+          </a:ln>
+          <a:effectLst/>
+        </p:spPr>
+        <p:style>
+          <a:lnRef idx="1">
+            <a:schemeClr val="accent1"/>
+          </a:lnRef>
+          <a:fillRef idx="3">
+            <a:schemeClr val="accent1"/>
+          </a:fillRef>
+          <a:effectRef idx="2">
+            <a:schemeClr val="accent1"/>
+          </a:effectRef>
+          <a:fontRef idx="minor">
+            <a:schemeClr val="lt1"/>
+          </a:fontRef>
+        </p:style>
+        <p:txBody>
+          <a:bodyPr rtlCol="0" anchor="ctr" wrap="square" lIns="45720" rIns="45720" tIns="18288" bIns="18288"/>
+          <a:lstStyle/>
+          <a:p>
+            <a:pPr algn="ctr">
+              <a:lnSpc>
+                <a:spcPct val="100000"/>
+              </a:lnSpc>
+              <a:spcAft>
+                <a:spcPts val="0"/>
+              </a:spcAft>
+              <a:defRPr sz="1800" b="1">
+                <a:solidFill>
+                  <a:srgbClr val="1F3A5F"/>
+                </a:solidFill>
+                <a:latin typeface="Calibri"/>
+              </a:defRPr>
+            </a:pPr>
+            <a:r>
+              <a:rPr sz="1800" b="1">
+                <a:solidFill>
+                  <a:srgbClr val="1F3A5F"/>
+                </a:solidFill>
+                <a:latin typeface="Calibri"/>
+              </a:rPr>
+              <a:t>LEFT STICK on the PS3 controller  -&gt;  surge and yaw</a:t>
+            </a:r>
+          </a:p>
+        </p:txBody>
+      </p:sp>
+      <p:sp>
+        <p:nvSpPr>
+          <p:cNvPr id="29" name="Rounded Rectangle 28"/>
+          <p:cNvSpPr/>
+          <p:nvPr/>
+        </p:nvSpPr>
+        <p:spPr>
+          <a:xfrm>
+            <a:off x="6400800" y="4498848"/>
+            <a:ext cx="5394960" cy="530352"/>
+          </a:xfrm>
+          <a:prstGeom prst="roundRect">
+            <a:avLst>
+              <a:gd name="adj" fmla="val 12000"/>
+            </a:avLst>
+          </a:prstGeom>
+          <a:solidFill>
+            <a:srgbClr val="EEF3F8"/>
+          </a:solidFill>
+          <a:ln w="15875">
+            <a:solidFill>
+              <a:srgbClr val="0E7C86"/>
+            </a:solidFill>
+          </a:ln>
+          <a:effectLst/>
+        </p:spPr>
+        <p:style>
+          <a:lnRef idx="1">
+            <a:schemeClr val="accent1"/>
+          </a:lnRef>
+          <a:fillRef idx="3">
+            <a:schemeClr val="accent1"/>
+          </a:fillRef>
+          <a:effectRef idx="2">
+            <a:schemeClr val="accent1"/>
+          </a:effectRef>
+          <a:fontRef idx="minor">
+            <a:schemeClr val="lt1"/>
+          </a:fontRef>
+        </p:style>
+        <p:txBody>
+          <a:bodyPr rtlCol="0" anchor="ctr" wrap="square" lIns="45720" rIns="45720" tIns="18288" bIns="18288"/>
+          <a:lstStyle/>
+          <a:p>
+            <a:pPr algn="ctr">
+              <a:lnSpc>
+                <a:spcPct val="100000"/>
+              </a:lnSpc>
+              <a:spcAft>
+                <a:spcPts val="0"/>
+              </a:spcAft>
+              <a:defRPr sz="1800" b="1">
+                <a:solidFill>
+                  <a:srgbClr val="1F3A5F"/>
+                </a:solidFill>
+                <a:latin typeface="Calibri"/>
+              </a:defRPr>
+            </a:pPr>
+            <a:r>
+              <a:rPr sz="1800" b="1">
+                <a:solidFill>
+                  <a:srgbClr val="1F3A5F"/>
+                </a:solidFill>
+                <a:latin typeface="Calibri"/>
+              </a:rPr>
+              <a:t>RIGHT STICK  -&gt;  the four servos</a:t>
+            </a:r>
+          </a:p>
+        </p:txBody>
+      </p:sp>
+      <p:sp>
+        <p:nvSpPr>
+          <p:cNvPr id="30" name="Rounded Rectangle 29"/>
           <p:cNvSpPr/>
           <p:nvPr/>
         </p:nvSpPr>
@@ -5417,7 +10098,7 @@
                 </a:solidFill>
                 <a:latin typeface="Calibri"/>
               </a:rPr>
-              <a:t>The PS3 controller was originally called the Sixaxis because it could sense all six. Spelled backwards, Sixaxis is still Sixaxis.</a:t>
+              <a:t>A rover controls two of the six, so one stick drives it and the other is free to aim servos. A submersible controls all six, and an ROV pilot needs both sticks to fly it.</a:t>
             </a:r>
           </a:p>
         </p:txBody>
@@ -6400,56 +11081,6 @@
               <a:t>4.  Push the left stick fully UP. Positive or negative?</a:t>
             </a:r>
           </a:p>
-          <a:p>
-            <a:pPr algn="l">
-              <a:lnSpc>
-                <a:spcPct val="100000"/>
-              </a:lnSpc>
-              <a:spcAft>
-                <a:spcPts val="400"/>
-              </a:spcAft>
-              <a:defRPr sz="1800" b="0">
-                <a:solidFill>
-                  <a:srgbClr val="222222"/>
-                </a:solidFill>
-                <a:latin typeface="Calibri"/>
-              </a:defRPr>
-            </a:pPr>
-            <a:r>
-              <a:rPr sz="1800" b="0">
-                <a:solidFill>
-                  <a:srgbClr val="222222"/>
-                </a:solidFill>
-                <a:latin typeface="Calibri"/>
-              </a:rPr>
-              <a:t>5.  Let go of the sticks and DO NOT touch the controller. Does it print exactly 0, or does it drift?</a:t>
-            </a:r>
-          </a:p>
-          <a:p>
-            <a:pPr algn="l">
-              <a:lnSpc>
-                <a:spcPct val="100000"/>
-              </a:lnSpc>
-              <a:spcAft>
-                <a:spcPts val="400"/>
-              </a:spcAft>
-              <a:defRPr sz="1800" b="0">
-                <a:solidFill>
-                  <a:srgbClr val="222222"/>
-                </a:solidFill>
-                <a:latin typeface="Calibri"/>
-              </a:defRPr>
-            </a:pPr>
-            <a:r>
-              <a:rPr sz="1800" b="0">
-                <a:solidFill>
-                  <a:srgbClr val="222222"/>
-                </a:solidFill>
-                <a:latin typeface="Calibri"/>
-              </a:rPr>
-              <a:t>6.  Push a stick diagonally. Watch x and y move together.</a:t>
-            </a:r>
-          </a:p>
         </p:txBody>
       </p:sp>
       <p:sp>
@@ -6980,6 +11611,56 @@
                 </a:solidFill>
                 <a:latin typeface="Calibri"/>
               </a:rPr>
+              <a:t>5.  Let go of the sticks and DO NOT touch the controller. Does it print exactly 0, or does it drift?</a:t>
+            </a:r>
+          </a:p>
+          <a:p>
+            <a:pPr algn="l">
+              <a:lnSpc>
+                <a:spcPct val="100000"/>
+              </a:lnSpc>
+              <a:spcAft>
+                <a:spcPts val="400"/>
+              </a:spcAft>
+              <a:defRPr sz="1800" b="0">
+                <a:solidFill>
+                  <a:srgbClr val="222222"/>
+                </a:solidFill>
+                <a:latin typeface="Calibri"/>
+              </a:defRPr>
+            </a:pPr>
+            <a:r>
+              <a:rPr sz="1800" b="0">
+                <a:solidFill>
+                  <a:srgbClr val="222222"/>
+                </a:solidFill>
+                <a:latin typeface="Calibri"/>
+              </a:rPr>
+              <a:t>6.  Push a stick diagonally. Watch x and y move together.</a:t>
+            </a:r>
+          </a:p>
+          <a:p>
+            <a:pPr algn="l">
+              <a:lnSpc>
+                <a:spcPct val="100000"/>
+              </a:lnSpc>
+              <a:spcAft>
+                <a:spcPts val="400"/>
+              </a:spcAft>
+              <a:defRPr sz="1800" b="0">
+                <a:solidFill>
+                  <a:srgbClr val="222222"/>
+                </a:solidFill>
+                <a:latin typeface="Calibri"/>
+              </a:defRPr>
+            </a:pPr>
+            <a:r>
+              <a:rPr sz="1800" b="0">
+                <a:solidFill>
+                  <a:srgbClr val="222222"/>
+                </a:solidFill>
+                <a:latin typeface="Calibri"/>
+              </a:rPr>
               <a:t>7.  Squeeze L2 slowly. It is not just on or off - watch the number.</a:t>
             </a:r>
           </a:p>
@@ -7349,72 +12030,6 @@
               <a:t>If we fed that straight to the motors, the vehicle would creep across the room on its own while the controller sat on the desk. In a classroom with twenty vehicles, that is not a minor annoyance.</a:t>
             </a:r>
           </a:p>
-          <a:p>
-            <a:pPr algn="l">
-              <a:lnSpc>
-                <a:spcPct val="100000"/>
-              </a:lnSpc>
-              <a:spcAft>
-                <a:spcPts val="900"/>
-              </a:spcAft>
-              <a:defRPr sz="1800" b="0">
-                <a:solidFill>
-                  <a:srgbClr val="222222"/>
-                </a:solidFill>
-                <a:latin typeface="Calibri"/>
-              </a:defRPr>
-            </a:pPr>
-          </a:p>
-          <a:p>
-            <a:pPr algn="l">
-              <a:lnSpc>
-                <a:spcPct val="100000"/>
-              </a:lnSpc>
-              <a:spcAft>
-                <a:spcPts val="900"/>
-              </a:spcAft>
-              <a:defRPr sz="1800" b="0">
-                <a:solidFill>
-                  <a:srgbClr val="222222"/>
-                </a:solidFill>
-                <a:latin typeface="Calibri"/>
-              </a:defRPr>
-            </a:pPr>
-            <a:r>
-              <a:rPr sz="1800" b="0">
-                <a:solidFill>
-                  <a:srgbClr val="222222"/>
-                </a:solidFill>
-                <a:latin typeface="Calibri"/>
-              </a:rPr>
-              <a:t>The answer is a DEADZONE: any reading smaller than a threshold is treated as a firm, deliberate zero.</a:t>
-            </a:r>
-          </a:p>
-          <a:p>
-            <a:pPr algn="l">
-              <a:lnSpc>
-                <a:spcPct val="100000"/>
-              </a:lnSpc>
-              <a:spcAft>
-                <a:spcPts val="900"/>
-              </a:spcAft>
-              <a:defRPr sz="1800" b="0">
-                <a:solidFill>
-                  <a:srgbClr val="222222"/>
-                </a:solidFill>
-                <a:latin typeface="Calibri"/>
-              </a:defRPr>
-            </a:pPr>
-            <a:r>
-              <a:rPr sz="1800" b="0">
-                <a:solidFill>
-                  <a:srgbClr val="222222"/>
-                </a:solidFill>
-                <a:latin typeface="Calibri"/>
-              </a:rPr>
-              <a:t>On this track the deadzone is 20, which is about 16% of the stick travel.</a:t>
-            </a:r>
-          </a:p>
         </p:txBody>
       </p:sp>
     </p:spTree>
@@ -7642,6 +12257,88 @@
             <a:spAutoFit/>
           </a:bodyPr>
           <a:lstStyle/>
+          <a:p>
+            <a:pPr algn="l">
+              <a:lnSpc>
+                <a:spcPct val="100000"/>
+              </a:lnSpc>
+              <a:spcAft>
+                <a:spcPts val="900"/>
+              </a:spcAft>
+              <a:defRPr sz="1800" b="0">
+                <a:solidFill>
+                  <a:srgbClr val="222222"/>
+                </a:solidFill>
+                <a:latin typeface="Calibri"/>
+              </a:defRPr>
+            </a:pPr>
+          </a:p>
+          <a:p>
+            <a:pPr algn="l">
+              <a:lnSpc>
+                <a:spcPct val="100000"/>
+              </a:lnSpc>
+              <a:spcAft>
+                <a:spcPts val="900"/>
+              </a:spcAft>
+              <a:defRPr sz="1800" b="0">
+                <a:solidFill>
+                  <a:srgbClr val="222222"/>
+                </a:solidFill>
+                <a:latin typeface="Calibri"/>
+              </a:defRPr>
+            </a:pPr>
+            <a:r>
+              <a:rPr sz="1800" b="0">
+                <a:solidFill>
+                  <a:srgbClr val="222222"/>
+                </a:solidFill>
+                <a:latin typeface="Calibri"/>
+              </a:rPr>
+              <a:t>The answer is a DEADZONE: any reading smaller than a threshold is treated as a firm, deliberate zero.</a:t>
+            </a:r>
+          </a:p>
+          <a:p>
+            <a:pPr algn="l">
+              <a:lnSpc>
+                <a:spcPct val="100000"/>
+              </a:lnSpc>
+              <a:spcAft>
+                <a:spcPts val="900"/>
+              </a:spcAft>
+              <a:defRPr sz="1800" b="0">
+                <a:solidFill>
+                  <a:srgbClr val="222222"/>
+                </a:solidFill>
+                <a:latin typeface="Calibri"/>
+              </a:defRPr>
+            </a:pPr>
+            <a:r>
+              <a:rPr sz="1800" b="0">
+                <a:solidFill>
+                  <a:srgbClr val="222222"/>
+                </a:solidFill>
+                <a:latin typeface="Calibri"/>
+              </a:rPr>
+              <a:t>On this track the deadzone is 20, which is about 16% of the stick travel.</a:t>
+            </a:r>
+          </a:p>
+          <a:p>
+            <a:pPr algn="l">
+              <a:lnSpc>
+                <a:spcPct val="100000"/>
+              </a:lnSpc>
+              <a:spcAft>
+                <a:spcPts val="900"/>
+              </a:spcAft>
+              <a:defRPr sz="1800" b="0">
+                <a:solidFill>
+                  <a:srgbClr val="222222"/>
+                </a:solidFill>
+                <a:latin typeface="Calibri"/>
+              </a:defRPr>
+            </a:pPr>
+          </a:p>
           <a:p>
             <a:pPr algn="l">
               <a:lnSpc>
@@ -11614,47 +16311,6 @@
               <a:t>Why? Because at full power a small nudge sideways spins the vehicle faster than anybody can correct for. Half-power steering makes it controllable without making it slow.</a:t>
             </a:r>
           </a:p>
-          <a:p>
-            <a:pPr algn="l">
-              <a:lnSpc>
-                <a:spcPct val="100000"/>
-              </a:lnSpc>
-              <a:spcAft>
-                <a:spcPts val="900"/>
-              </a:spcAft>
-              <a:defRPr sz="1800" b="0">
-                <a:solidFill>
-                  <a:srgbClr val="222222"/>
-                </a:solidFill>
-                <a:latin typeface="Calibri"/>
-              </a:defRPr>
-            </a:pPr>
-          </a:p>
-          <a:p>
-            <a:pPr algn="l">
-              <a:lnSpc>
-                <a:spcPct val="100000"/>
-              </a:lnSpc>
-              <a:spcAft>
-                <a:spcPts val="900"/>
-              </a:spcAft>
-              <a:defRPr sz="1800" b="0">
-                <a:solidFill>
-                  <a:srgbClr val="222222"/>
-                </a:solidFill>
-                <a:latin typeface="Calibri"/>
-              </a:defRPr>
-            </a:pPr>
-            <a:r>
-              <a:rPr sz="1800" b="0">
-                <a:solidFill>
-                  <a:srgbClr val="222222"/>
-                </a:solidFill>
-                <a:latin typeface="Calibri"/>
-              </a:rPr>
-              <a:t>The full program lets you switch between the two with L3 (click the left stick in). Sharp mode is for spinning on the spot deliberately; normal mode is for actually getting somewhere.</a:t>
-            </a:r>
-          </a:p>
         </p:txBody>
       </p:sp>
     </p:spTree>
@@ -11897,6 +16553,63 @@
                 <a:latin typeface="Calibri"/>
               </a:defRPr>
             </a:pPr>
+          </a:p>
+          <a:p>
+            <a:pPr algn="l">
+              <a:lnSpc>
+                <a:spcPct val="100000"/>
+              </a:lnSpc>
+              <a:spcAft>
+                <a:spcPts val="900"/>
+              </a:spcAft>
+              <a:defRPr sz="1800" b="0">
+                <a:solidFill>
+                  <a:srgbClr val="222222"/>
+                </a:solidFill>
+                <a:latin typeface="Calibri"/>
+              </a:defRPr>
+            </a:pPr>
+            <a:r>
+              <a:rPr sz="1800" b="0">
+                <a:solidFill>
+                  <a:srgbClr val="222222"/>
+                </a:solidFill>
+                <a:latin typeface="Calibri"/>
+              </a:rPr>
+              <a:t>The full program lets you switch between the two with L3 (click the left stick in). Sharp mode is for spinning on the spot deliberately; normal mode is for actually getting somewhere.</a:t>
+            </a:r>
+          </a:p>
+          <a:p>
+            <a:pPr algn="l">
+              <a:lnSpc>
+                <a:spcPct val="100000"/>
+              </a:lnSpc>
+              <a:spcAft>
+                <a:spcPts val="900"/>
+              </a:spcAft>
+              <a:defRPr sz="1800" b="0">
+                <a:solidFill>
+                  <a:srgbClr val="222222"/>
+                </a:solidFill>
+                <a:latin typeface="Calibri"/>
+              </a:defRPr>
+            </a:pPr>
+          </a:p>
+          <a:p>
+            <a:pPr algn="l">
+              <a:lnSpc>
+                <a:spcPct val="100000"/>
+              </a:lnSpc>
+              <a:spcAft>
+                <a:spcPts val="900"/>
+              </a:spcAft>
+              <a:defRPr sz="1800" b="0">
+                <a:solidFill>
+                  <a:srgbClr val="222222"/>
+                </a:solidFill>
+                <a:latin typeface="Calibri"/>
+              </a:defRPr>
+            </a:pPr>
             <a:r>
               <a:rPr sz="1800" b="0">
                 <a:solidFill>
@@ -13752,31 +18465,6 @@
               <a:t>3.  While driving, switch the controller off. What happens?</a:t>
             </a:r>
           </a:p>
-          <a:p>
-            <a:pPr algn="l">
-              <a:lnSpc>
-                <a:spcPct val="100000"/>
-              </a:lnSpc>
-              <a:spcAft>
-                <a:spcPts val="400"/>
-              </a:spcAft>
-              <a:defRPr sz="1800" b="0">
-                <a:solidFill>
-                  <a:srgbClr val="222222"/>
-                </a:solidFill>
-                <a:latin typeface="Calibri"/>
-              </a:defRPr>
-            </a:pPr>
-            <a:r>
-              <a:rPr sz="1800" b="0">
-                <a:solidFill>
-                  <a:srgbClr val="222222"/>
-                </a:solidFill>
-                <a:latin typeface="Calibri"/>
-              </a:rPr>
-              <a:t>4.  Set turnMax to MOTOR_MAX and drive again. Which is easier?</a:t>
-            </a:r>
-          </a:p>
         </p:txBody>
       </p:sp>
       <p:sp>
@@ -14282,6 +18970,31 @@
                 </a:solidFill>
                 <a:latin typeface="Calibri"/>
               </a:rPr>
+              <a:t>4.  Set turnMax to MOTOR_MAX and drive again. Which is easier?</a:t>
+            </a:r>
+          </a:p>
+          <a:p>
+            <a:pPr algn="l">
+              <a:lnSpc>
+                <a:spcPct val="100000"/>
+              </a:lnSpc>
+              <a:spcAft>
+                <a:spcPts val="400"/>
+              </a:spcAft>
+              <a:defRPr sz="1800" b="0">
+                <a:solidFill>
+                  <a:srgbClr val="222222"/>
+                </a:solidFill>
+                <a:latin typeface="Calibri"/>
+              </a:defRPr>
+            </a:pPr>
+            <a:r>
+              <a:rPr sz="1800" b="0">
+                <a:solidFill>
+                  <a:srgbClr val="222222"/>
+                </a:solidFill>
+                <a:latin typeface="Calibri"/>
+              </a:rPr>
               <a:t>5.  Swap the + and the - in the mixing lines and drive. What is wrong now?</a:t>
             </a:r>
           </a:p>
@@ -15371,6 +20084,22 @@
             <a:spAutoFit/>
           </a:bodyPr>
           <a:lstStyle/>
+          <a:p>
+            <a:pPr algn="l">
+              <a:lnSpc>
+                <a:spcPct val="100000"/>
+              </a:lnSpc>
+              <a:spcAft>
+                <a:spcPts val="900"/>
+              </a:spcAft>
+              <a:defRPr sz="1800" b="0">
+                <a:solidFill>
+                  <a:srgbClr val="222222"/>
+                </a:solidFill>
+                <a:latin typeface="Calibri"/>
+              </a:defRPr>
+            </a:pPr>
+          </a:p>
           <a:p>
             <a:pPr algn="l">
               <a:lnSpc>
@@ -17746,47 +22475,6 @@
               <a:t>Range is tens of metres, and it goes down sharply if somebody stands between the pad and the vehicle.</a:t>
             </a:r>
           </a:p>
-          <a:p>
-            <a:pPr algn="l">
-              <a:lnSpc>
-                <a:spcPct val="100000"/>
-              </a:lnSpc>
-              <a:spcAft>
-                <a:spcPts val="900"/>
-              </a:spcAft>
-              <a:defRPr sz="1800" b="0">
-                <a:solidFill>
-                  <a:srgbClr val="222222"/>
-                </a:solidFill>
-                <a:latin typeface="Calibri"/>
-              </a:defRPr>
-            </a:pPr>
-          </a:p>
-          <a:p>
-            <a:pPr algn="l">
-              <a:lnSpc>
-                <a:spcPct val="100000"/>
-              </a:lnSpc>
-              <a:spcAft>
-                <a:spcPts val="900"/>
-              </a:spcAft>
-              <a:defRPr sz="1800" b="0">
-                <a:solidFill>
-                  <a:srgbClr val="222222"/>
-                </a:solidFill>
-                <a:latin typeface="Calibri"/>
-              </a:defRPr>
-            </a:pPr>
-            <a:r>
-              <a:rPr sz="1800" b="0">
-                <a:solidFill>
-                  <a:srgbClr val="222222"/>
-                </a:solidFill>
-                <a:latin typeface="Calibri"/>
-              </a:rPr>
-              <a:t>Every Bluetooth device has an ADDRESS - six bytes, written as six pairs of hexadecimal digits, like 02:02:03:04:05:08. It is the equivalent of a phone number.</a:t>
-            </a:r>
-          </a:p>
         </p:txBody>
       </p:sp>
     </p:spTree>
@@ -18052,6 +22740,47 @@
                 </a:solidFill>
                 <a:latin typeface="Calibri"/>
               </a:rPr>
+              <a:t>Every Bluetooth device has an ADDRESS - six bytes, written as six pairs of hexadecimal digits, like 02:02:03:04:05:08. It is the equivalent of a phone number.</a:t>
+            </a:r>
+          </a:p>
+          <a:p>
+            <a:pPr algn="l">
+              <a:lnSpc>
+                <a:spcPct val="100000"/>
+              </a:lnSpc>
+              <a:spcAft>
+                <a:spcPts val="900"/>
+              </a:spcAft>
+              <a:defRPr sz="1800" b="0">
+                <a:solidFill>
+                  <a:srgbClr val="222222"/>
+                </a:solidFill>
+                <a:latin typeface="Calibri"/>
+              </a:defRPr>
+            </a:pPr>
+          </a:p>
+          <a:p>
+            <a:pPr algn="l">
+              <a:lnSpc>
+                <a:spcPct val="100000"/>
+              </a:lnSpc>
+              <a:spcAft>
+                <a:spcPts val="900"/>
+              </a:spcAft>
+              <a:defRPr sz="1800" b="0">
+                <a:solidFill>
+                  <a:srgbClr val="222222"/>
+                </a:solidFill>
+                <a:latin typeface="Calibri"/>
+              </a:defRPr>
+            </a:pPr>
+            <a:r>
+              <a:rPr sz="1800" b="0">
+                <a:solidFill>
+                  <a:srgbClr val="222222"/>
+                </a:solidFill>
+                <a:latin typeface="Calibri"/>
+              </a:rPr>
               <a:t>The ESP32 has Bluetooth built into the chip. That is a large part of why we use it.</a:t>
             </a:r>
           </a:p>
@@ -19200,8 +23929,8 @@
         </p:blipFill>
         <p:spPr>
           <a:xfrm>
-            <a:off x="3637501" y="2267712"/>
-            <a:ext cx="4916692" cy="3264408"/>
+            <a:off x="3637502" y="2267712"/>
+            <a:ext cx="4916691" cy="3264408"/>
           </a:xfrm>
           <a:prstGeom prst="rect">
             <a:avLst/>
@@ -19582,4 +24311,324 @@
   </a:objectDefaults>
   <a:extraClrSchemeLst/>
 </a:theme>
+</file>
+
+<file path=ppt/theme/theme2.xml><?xml version="1.0" encoding="utf-8"?>
+<a:theme xmlns:a="http://schemas.openxmlformats.org/drawingml/2006/main" name="Office Theme">
+  <a:themeElements>
+    <a:clrScheme name="Office">
+      <a:dk1>
+        <a:sysClr val="windowText" lastClr="000000"/>
+      </a:dk1>
+      <a:lt1>
+        <a:sysClr val="window" lastClr="FFFFFF"/>
+      </a:lt1>
+      <a:dk2>
+        <a:srgbClr val="1F497D"/>
+      </a:dk2>
+      <a:lt2>
+        <a:srgbClr val="EEECE1"/>
+      </a:lt2>
+      <a:accent1>
+        <a:srgbClr val="4F81BD"/>
+      </a:accent1>
+      <a:accent2>
+        <a:srgbClr val="C0504D"/>
+      </a:accent2>
+      <a:accent3>
+        <a:srgbClr val="9BBB59"/>
+      </a:accent3>
+      <a:accent4>
+        <a:srgbClr val="8064A2"/>
+      </a:accent4>
+      <a:accent5>
+        <a:srgbClr val="4BACC6"/>
+      </a:accent5>
+      <a:accent6>
+        <a:srgbClr val="F79646"/>
+      </a:accent6>
+      <a:hlink>
+        <a:srgbClr val="0000FF"/>
+      </a:hlink>
+      <a:folHlink>
+        <a:srgbClr val="800080"/>
+      </a:folHlink>
+    </a:clrScheme>
+    <a:fontScheme name="Office">
+      <a:majorFont>
+        <a:latin typeface="Calibri"/>
+        <a:ea typeface=""/>
+        <a:cs typeface=""/>
+        <a:font script="Jpan" typeface="ＭＳ Ｐゴシック"/>
+        <a:font script="Hang" typeface="맑은 고딕"/>
+        <a:font script="Hans" typeface="宋体"/>
+        <a:font script="Hant" typeface="新細明體"/>
+        <a:font script="Arab" typeface="Times New Roman"/>
+        <a:font script="Hebr" typeface="Times New Roman"/>
+        <a:font script="Thai" typeface="Angsana New"/>
+        <a:font script="Ethi" typeface="Nyala"/>
+        <a:font script="Beng" typeface="Vrinda"/>
+        <a:font script="Gujr" typeface="Shruti"/>
+        <a:font script="Khmr" typeface="MoolBoran"/>
+        <a:font script="Knda" typeface="Tunga"/>
+        <a:font script="Guru" typeface="Raavi"/>
+        <a:font script="Cans" typeface="Euphemia"/>
+        <a:font script="Cher" typeface="Plantagenet Cherokee"/>
+        <a:font script="Yiii" typeface="Microsoft Yi Baiti"/>
+        <a:font script="Tibt" typeface="Microsoft Himalaya"/>
+        <a:font script="Thaa" typeface="MV Boli"/>
+        <a:font script="Deva" typeface="Mangal"/>
+        <a:font script="Telu" typeface="Gautami"/>
+        <a:font script="Taml" typeface="Latha"/>
+        <a:font script="Syrc" typeface="Estrangelo Edessa"/>
+        <a:font script="Orya" typeface="Kalinga"/>
+        <a:font script="Mlym" typeface="Kartika"/>
+        <a:font script="Laoo" typeface="DokChampa"/>
+        <a:font script="Sinh" typeface="Iskoola Pota"/>
+        <a:font script="Mong" typeface="Mongolian Baiti"/>
+        <a:font script="Viet" typeface="Times New Roman"/>
+        <a:font script="Uigh" typeface="Microsoft Uighur"/>
+        <a:font script="Geor" typeface="Sylfaen"/>
+      </a:majorFont>
+      <a:minorFont>
+        <a:latin typeface="Calibri"/>
+        <a:ea typeface=""/>
+        <a:cs typeface=""/>
+        <a:font script="Jpan" typeface="ＭＳ Ｐゴシック"/>
+        <a:font script="Hang" typeface="맑은 고딕"/>
+        <a:font script="Hans" typeface="宋体"/>
+        <a:font script="Hant" typeface="新細明體"/>
+        <a:font script="Arab" typeface="Arial"/>
+        <a:font script="Hebr" typeface="Arial"/>
+        <a:font script="Thai" typeface="Cordia New"/>
+        <a:font script="Ethi" typeface="Nyala"/>
+        <a:font script="Beng" typeface="Vrinda"/>
+        <a:font script="Gujr" typeface="Shruti"/>
+        <a:font script="Khmr" typeface="DaunPenh"/>
+        <a:font script="Knda" typeface="Tunga"/>
+        <a:font script="Guru" typeface="Raavi"/>
+        <a:font script="Cans" typeface="Euphemia"/>
+        <a:font script="Cher" typeface="Plantagenet Cherokee"/>
+        <a:font script="Yiii" typeface="Microsoft Yi Baiti"/>
+        <a:font script="Tibt" typeface="Microsoft Himalaya"/>
+        <a:font script="Thaa" typeface="MV Boli"/>
+        <a:font script="Deva" typeface="Mangal"/>
+        <a:font script="Telu" typeface="Gautami"/>
+        <a:font script="Taml" typeface="Latha"/>
+        <a:font script="Syrc" typeface="Estrangelo Edessa"/>
+        <a:font script="Orya" typeface="Kalinga"/>
+        <a:font script="Mlym" typeface="Kartika"/>
+        <a:font script="Laoo" typeface="DokChampa"/>
+        <a:font script="Sinh" typeface="Iskoola Pota"/>
+        <a:font script="Mong" typeface="Mongolian Baiti"/>
+        <a:font script="Viet" typeface="Arial"/>
+        <a:font script="Uigh" typeface="Microsoft Uighur"/>
+        <a:font script="Geor" typeface="Sylfaen"/>
+      </a:minorFont>
+    </a:fontScheme>
+    <a:fmtScheme name="Office">
+      <a:fillStyleLst>
+        <a:solidFill>
+          <a:schemeClr val="phClr"/>
+        </a:solidFill>
+        <a:gradFill rotWithShape="1">
+          <a:gsLst>
+            <a:gs pos="0">
+              <a:schemeClr val="phClr">
+                <a:tint val="50000"/>
+                <a:satMod val="300000"/>
+              </a:schemeClr>
+            </a:gs>
+            <a:gs pos="35000">
+              <a:schemeClr val="phClr">
+                <a:tint val="37000"/>
+                <a:satMod val="300000"/>
+              </a:schemeClr>
+            </a:gs>
+            <a:gs pos="100000">
+              <a:schemeClr val="phClr">
+                <a:tint val="15000"/>
+                <a:satMod val="350000"/>
+              </a:schemeClr>
+            </a:gs>
+          </a:gsLst>
+          <a:lin ang="16200000" scaled="1"/>
+        </a:gradFill>
+        <a:gradFill rotWithShape="1">
+          <a:gsLst>
+            <a:gs pos="0">
+              <a:schemeClr val="phClr">
+                <a:tint val="100000"/>
+                <a:shade val="100000"/>
+                <a:satMod val="130000"/>
+              </a:schemeClr>
+            </a:gs>
+            <a:gs pos="100000">
+              <a:schemeClr val="phClr">
+                <a:tint val="50000"/>
+                <a:shade val="100000"/>
+                <a:satMod val="350000"/>
+              </a:schemeClr>
+            </a:gs>
+          </a:gsLst>
+          <a:lin ang="16200000" scaled="0"/>
+        </a:gradFill>
+      </a:fillStyleLst>
+      <a:lnStyleLst>
+        <a:ln w="9525" cap="flat" cmpd="sng" algn="ctr">
+          <a:solidFill>
+            <a:schemeClr val="phClr">
+              <a:shade val="95000"/>
+              <a:satMod val="105000"/>
+            </a:schemeClr>
+          </a:solidFill>
+          <a:prstDash val="solid"/>
+        </a:ln>
+        <a:ln w="25400" cap="flat" cmpd="sng" algn="ctr">
+          <a:solidFill>
+            <a:schemeClr val="phClr"/>
+          </a:solidFill>
+          <a:prstDash val="solid"/>
+        </a:ln>
+        <a:ln w="38100" cap="flat" cmpd="sng" algn="ctr">
+          <a:solidFill>
+            <a:schemeClr val="phClr"/>
+          </a:solidFill>
+          <a:prstDash val="solid"/>
+        </a:ln>
+      </a:lnStyleLst>
+      <a:effectStyleLst>
+        <a:effectStyle>
+          <a:effectLst>
+            <a:outerShdw blurRad="40000" dist="20000" dir="5400000" rotWithShape="0">
+              <a:srgbClr val="000000">
+                <a:alpha val="38000"/>
+              </a:srgbClr>
+            </a:outerShdw>
+          </a:effectLst>
+        </a:effectStyle>
+        <a:effectStyle>
+          <a:effectLst>
+            <a:outerShdw blurRad="40000" dist="23000" dir="5400000" rotWithShape="0">
+              <a:srgbClr val="000000">
+                <a:alpha val="35000"/>
+              </a:srgbClr>
+            </a:outerShdw>
+          </a:effectLst>
+        </a:effectStyle>
+        <a:effectStyle>
+          <a:effectLst>
+            <a:outerShdw blurRad="40000" dist="23000" dir="5400000" rotWithShape="0">
+              <a:srgbClr val="000000">
+                <a:alpha val="35000"/>
+              </a:srgbClr>
+            </a:outerShdw>
+          </a:effectLst>
+          <a:scene3d>
+            <a:camera prst="orthographicFront">
+              <a:rot lat="0" lon="0" rev="0"/>
+            </a:camera>
+            <a:lightRig rig="threePt" dir="t">
+              <a:rot lat="0" lon="0" rev="1200000"/>
+            </a:lightRig>
+          </a:scene3d>
+          <a:sp3d>
+            <a:bevelT w="63500" h="25400"/>
+          </a:sp3d>
+        </a:effectStyle>
+      </a:effectStyleLst>
+      <a:bgFillStyleLst>
+        <a:solidFill>
+          <a:schemeClr val="phClr"/>
+        </a:solidFill>
+        <a:gradFill rotWithShape="1">
+          <a:gsLst>
+            <a:gs pos="0">
+              <a:schemeClr val="phClr">
+                <a:tint val="40000"/>
+                <a:satMod val="350000"/>
+              </a:schemeClr>
+            </a:gs>
+            <a:gs pos="40000">
+              <a:schemeClr val="phClr">
+                <a:tint val="45000"/>
+                <a:shade val="99000"/>
+                <a:satMod val="350000"/>
+              </a:schemeClr>
+            </a:gs>
+            <a:gs pos="100000">
+              <a:schemeClr val="phClr">
+                <a:shade val="20000"/>
+                <a:satMod val="255000"/>
+              </a:schemeClr>
+            </a:gs>
+          </a:gsLst>
+          <a:path path="circle">
+            <a:fillToRect l="50000" t="-80000" r="50000" b="180000"/>
+          </a:path>
+        </a:gradFill>
+        <a:gradFill rotWithShape="1">
+          <a:gsLst>
+            <a:gs pos="0">
+              <a:schemeClr val="phClr">
+                <a:tint val="80000"/>
+                <a:satMod val="300000"/>
+              </a:schemeClr>
+            </a:gs>
+            <a:gs pos="100000">
+              <a:schemeClr val="phClr">
+                <a:shade val="30000"/>
+                <a:satMod val="200000"/>
+              </a:schemeClr>
+            </a:gs>
+          </a:gsLst>
+          <a:path path="circle">
+            <a:fillToRect l="50000" t="50000" r="50000" b="50000"/>
+          </a:path>
+        </a:gradFill>
+      </a:bgFillStyleLst>
+    </a:fmtScheme>
+  </a:themeElements>
+  <a:objectDefaults>
+    <a:spDef>
+      <a:spPr/>
+      <a:bodyPr/>
+      <a:lstStyle/>
+      <a:style>
+        <a:lnRef idx="1">
+          <a:schemeClr val="accent1"/>
+        </a:lnRef>
+        <a:fillRef idx="3">
+          <a:schemeClr val="accent1"/>
+        </a:fillRef>
+        <a:effectRef idx="2">
+          <a:schemeClr val="accent1"/>
+        </a:effectRef>
+        <a:fontRef idx="minor">
+          <a:schemeClr val="lt1"/>
+        </a:fontRef>
+      </a:style>
+    </a:spDef>
+    <a:lnDef>
+      <a:spPr/>
+      <a:bodyPr/>
+      <a:lstStyle/>
+      <a:style>
+        <a:lnRef idx="2">
+          <a:schemeClr val="accent1"/>
+        </a:lnRef>
+        <a:fillRef idx="0">
+          <a:schemeClr val="accent1"/>
+        </a:fillRef>
+        <a:effectRef idx="1">
+          <a:schemeClr val="accent1"/>
+        </a:effectRef>
+        <a:fontRef idx="minor">
+          <a:schemeClr val="tx1"/>
+        </a:fontRef>
+      </a:style>
+    </a:lnDef>
+  </a:objectDefaults>
+  <a:extraClrSchemeLst/>
+</a:theme>
 </file>
--- a/ground-vehicle/docs/courses/beginner-ps3/l3_controller_programming.pptx
+++ b/ground-vehicle/docs/courses/beginner-ps3/l3_controller_programming.pptx
@@ -1088,7 +1088,7 @@
               <a:rPr sz="1200">
                 <a:latin typeface="Calibri"/>
               </a:rPr>
-              <a:t>Ask why the line does not start at zero. The answer - a stick at rest is never exactly centred - is worth getting from the room rather than telling them.</a:t>
+              <a:t>Ask why the line does not start at zero. The answer - a stick at rest is never exactly centerd - is worth getting from the room rather than telling them.</a:t>
             </a:r>
           </a:p>
           <a:p>
@@ -1987,7 +1987,7 @@
               <a:rPr sz="1200">
                 <a:latin typeface="Calibri"/>
               </a:rPr>
-              <a:t>The only safe behaviour is to stop. Not to carry on with the last command, and not to be clever.</a:t>
+              <a:t>The only safe behavior is to stop. Not to carry on with the last command, and not to be clever.</a:t>
             </a:r>
           </a:p>
           <a:p>
@@ -10146,7 +10146,7 @@
                 </a:solidFill>
                 <a:latin typeface="Calibri"/>
               </a:rPr>
-              <a:t>You just measured it. Yours probably reads a few counts either side of centre when nobody is touching it.</a:t>
+              <a:t>You just measured it. Yours probably reads a few counts either side of center when nobody is touching it.</a:t>
             </a:r>
           </a:p>
           <a:p>
@@ -13117,7 +13117,7 @@
                 </a:solidFill>
                 <a:latin typeface="Calibri"/>
               </a:rPr>
-              <a:t>2.  Push the stick VERY slowly from centre to full forward. Watch both columns. Where does the speed stop being 0?</a:t>
+              <a:t>2.  Push the stick VERY slowly from center to full forward. Watch both columns. Where does the speed stop being 0?</a:t>
             </a:r>
           </a:p>
           <a:p>
@@ -17085,7 +17085,7 @@
                 </a:solidFill>
                 <a:latin typeface="Calibri"/>
               </a:rPr>
-              <a:t>The only safe behaviour is to STOP. Not carry on with the last command, and not do something clever.</a:t>
+              <a:t>The only safe behavior is to STOP. Not carry on with the last command, and not do something clever.</a:t>
             </a:r>
           </a:p>
           <a:p>
@@ -17891,7 +17891,7 @@
                           </a:solidFill>
                           <a:latin typeface="Calibri"/>
                         </a:rPr>
-                        <a:t>It creeps with the stick centred</a:t>
+                        <a:t>It creeps with the stick centerd</a:t>
                       </a:r>
                     </a:p>
                   </a:txBody>
@@ -18265,7 +18265,7 @@
                 </a:solidFill>
                 <a:latin typeface="Calibri"/>
               </a:rPr>
-              <a:t>Next lesson: the 32 LEDs, and what colour actually is.</a:t>
+              <a:t>Next lesson: the 32 LEDs, and what color actually is.</a:t>
             </a:r>
           </a:p>
         </p:txBody>
@@ -19958,7 +19958,7 @@
                 </a:solidFill>
                 <a:latin typeface="Calibri"/>
               </a:rPr>
-              <a:t>Range is tens of metres, and it goes down sharply if somebody stands between the pad and the vehicle.</a:t>
+              <a:t>Range is tens of meters, and it goes down sharply if somebody stands between the pad and the vehicle.</a:t>
             </a:r>
           </a:p>
         </p:txBody>

--- a/ground-vehicle/docs/courses/beginner-ps3/l3_controller_programming.pptx
+++ b/ground-vehicle/docs/courses/beginner-ps3/l3_controller_programming.pptx
@@ -9420,7 +9420,7 @@
         <p:spPr>
           <a:xfrm>
             <a:off x="502920" y="1901952"/>
-            <a:ext cx="5387187" cy="4361688"/>
+            <a:ext cx="6249137" cy="4361688"/>
           </a:xfrm>
           <a:prstGeom prst="rect">
             <a:avLst/>
@@ -9438,17 +9438,17 @@
                 <a:spcPct val="100000"/>
               </a:lnSpc>
               <a:spcAft>
-                <a:spcPts val="400"/>
-              </a:spcAft>
-              <a:defRPr sz="1800" b="0">
-                <a:solidFill>
-                  <a:srgbClr val="222222"/>
-                </a:solidFill>
-                <a:latin typeface="Calibri"/>
-              </a:defRPr>
-            </a:pPr>
-            <a:r>
-              <a:rPr sz="1800" b="0">
+                <a:spcPts val="800"/>
+              </a:spcAft>
+              <a:defRPr sz="1900" b="0">
+                <a:solidFill>
+                  <a:srgbClr val="222222"/>
+                </a:solidFill>
+                <a:latin typeface="Calibri"/>
+              </a:defRPr>
+            </a:pPr>
+            <a:r>
+              <a:rPr sz="1900" b="0">
                 <a:solidFill>
                   <a:srgbClr val="222222"/>
                 </a:solidFill>
@@ -9463,17 +9463,17 @@
                 <a:spcPct val="100000"/>
               </a:lnSpc>
               <a:spcAft>
-                <a:spcPts val="400"/>
-              </a:spcAft>
-              <a:defRPr sz="1800" b="0">
-                <a:solidFill>
-                  <a:srgbClr val="222222"/>
-                </a:solidFill>
-                <a:latin typeface="Calibri"/>
-              </a:defRPr>
-            </a:pPr>
-            <a:r>
-              <a:rPr sz="1800" b="0">
+                <a:spcPts val="800"/>
+              </a:spcAft>
+              <a:defRPr sz="1900" b="0">
+                <a:solidFill>
+                  <a:srgbClr val="222222"/>
+                </a:solidFill>
+                <a:latin typeface="Calibri"/>
+              </a:defRPr>
+            </a:pPr>
+            <a:r>
+              <a:rPr sz="1900" b="0">
                 <a:solidFill>
                   <a:srgbClr val="222222"/>
                 </a:solidFill>
@@ -9488,17 +9488,17 @@
                 <a:spcPct val="100000"/>
               </a:lnSpc>
               <a:spcAft>
-                <a:spcPts val="400"/>
-              </a:spcAft>
-              <a:defRPr sz="1800" b="0">
-                <a:solidFill>
-                  <a:srgbClr val="222222"/>
-                </a:solidFill>
-                <a:latin typeface="Calibri"/>
-              </a:defRPr>
-            </a:pPr>
-            <a:r>
-              <a:rPr sz="1800" b="0">
+                <a:spcPts val="800"/>
+              </a:spcAft>
+              <a:defRPr sz="1900" b="0">
+                <a:solidFill>
+                  <a:srgbClr val="222222"/>
+                </a:solidFill>
+                <a:latin typeface="Calibri"/>
+              </a:defRPr>
+            </a:pPr>
+            <a:r>
+              <a:rPr sz="1900" b="0">
                 <a:solidFill>
                   <a:srgbClr val="222222"/>
                 </a:solidFill>
@@ -9513,17 +9513,17 @@
                 <a:spcPct val="100000"/>
               </a:lnSpc>
               <a:spcAft>
-                <a:spcPts val="400"/>
-              </a:spcAft>
-              <a:defRPr sz="1800" b="0">
-                <a:solidFill>
-                  <a:srgbClr val="222222"/>
-                </a:solidFill>
-                <a:latin typeface="Calibri"/>
-              </a:defRPr>
-            </a:pPr>
-            <a:r>
-              <a:rPr sz="1800" b="0">
+                <a:spcPts val="800"/>
+              </a:spcAft>
+              <a:defRPr sz="1900" b="0">
+                <a:solidFill>
+                  <a:srgbClr val="222222"/>
+                </a:solidFill>
+                <a:latin typeface="Calibri"/>
+              </a:defRPr>
+            </a:pPr>
+            <a:r>
+              <a:rPr sz="1900" b="0">
                 <a:solidFill>
                   <a:srgbClr val="222222"/>
                 </a:solidFill>
@@ -9538,17 +9538,17 @@
                 <a:spcPct val="100000"/>
               </a:lnSpc>
               <a:spcAft>
-                <a:spcPts val="400"/>
-              </a:spcAft>
-              <a:defRPr sz="1800" b="0">
-                <a:solidFill>
-                  <a:srgbClr val="222222"/>
-                </a:solidFill>
-                <a:latin typeface="Calibri"/>
-              </a:defRPr>
-            </a:pPr>
-            <a:r>
-              <a:rPr sz="1800" b="0">
+                <a:spcPts val="800"/>
+              </a:spcAft>
+              <a:defRPr sz="1900" b="0">
+                <a:solidFill>
+                  <a:srgbClr val="222222"/>
+                </a:solidFill>
+                <a:latin typeface="Calibri"/>
+              </a:defRPr>
+            </a:pPr>
+            <a:r>
+              <a:rPr sz="1900" b="0">
                 <a:solidFill>
                   <a:srgbClr val="222222"/>
                 </a:solidFill>
@@ -9563,17 +9563,17 @@
                 <a:spcPct val="100000"/>
               </a:lnSpc>
               <a:spcAft>
-                <a:spcPts val="400"/>
-              </a:spcAft>
-              <a:defRPr sz="1800" b="0">
-                <a:solidFill>
-                  <a:srgbClr val="222222"/>
-                </a:solidFill>
-                <a:latin typeface="Calibri"/>
-              </a:defRPr>
-            </a:pPr>
-            <a:r>
-              <a:rPr sz="1800" b="0">
+                <a:spcPts val="800"/>
+              </a:spcAft>
+              <a:defRPr sz="1900" b="0">
+                <a:solidFill>
+                  <a:srgbClr val="222222"/>
+                </a:solidFill>
+                <a:latin typeface="Calibri"/>
+              </a:defRPr>
+            </a:pPr>
+            <a:r>
+              <a:rPr sz="1900" b="0">
                 <a:solidFill>
                   <a:srgbClr val="222222"/>
                 </a:solidFill>
@@ -9588,17 +9588,17 @@
                 <a:spcPct val="100000"/>
               </a:lnSpc>
               <a:spcAft>
-                <a:spcPts val="400"/>
-              </a:spcAft>
-              <a:defRPr sz="1800" b="0">
-                <a:solidFill>
-                  <a:srgbClr val="222222"/>
-                </a:solidFill>
-                <a:latin typeface="Calibri"/>
-              </a:defRPr>
-            </a:pPr>
-            <a:r>
-              <a:rPr sz="1800" b="0">
+                <a:spcPts val="800"/>
+              </a:spcAft>
+              <a:defRPr sz="1900" b="0">
+                <a:solidFill>
+                  <a:srgbClr val="222222"/>
+                </a:solidFill>
+                <a:latin typeface="Calibri"/>
+              </a:defRPr>
+            </a:pPr>
+            <a:r>
+              <a:rPr sz="1900" b="0">
                 <a:solidFill>
                   <a:srgbClr val="222222"/>
                 </a:solidFill>
@@ -9617,8 +9617,8 @@
         </p:nvSpPr>
         <p:spPr>
           <a:xfrm>
-            <a:off x="6301587" y="1901952"/>
-            <a:ext cx="5387187" cy="365760"/>
+            <a:off x="7163537" y="1901952"/>
+            <a:ext cx="4525238" cy="365760"/>
           </a:xfrm>
           <a:prstGeom prst="rect">
             <a:avLst/>
@@ -9665,8 +9665,8 @@
         </p:nvSpPr>
         <p:spPr>
           <a:xfrm>
-            <a:off x="6301587" y="2304288"/>
-            <a:ext cx="5387187" cy="1778508"/>
+            <a:off x="7163537" y="2304288"/>
+            <a:ext cx="4525238" cy="1360833"/>
           </a:xfrm>
           <a:prstGeom prst="rect">
             <a:avLst/>
@@ -9684,17 +9684,17 @@
                 <a:spcPct val="100000"/>
               </a:lnSpc>
               <a:spcAft>
-                <a:spcPts val="600"/>
-              </a:spcAft>
-              <a:defRPr sz="3000" b="0">
-                <a:solidFill>
-                  <a:srgbClr val="222222"/>
-                </a:solidFill>
-                <a:latin typeface="Calibri"/>
-              </a:defRPr>
-            </a:pPr>
-            <a:r>
-              <a:rPr sz="3000" b="0">
+                <a:spcPts val="300"/>
+              </a:spcAft>
+              <a:defRPr sz="2600" b="0">
+                <a:solidFill>
+                  <a:srgbClr val="222222"/>
+                </a:solidFill>
+                <a:latin typeface="Calibri"/>
+              </a:defRPr>
+            </a:pPr>
+            <a:r>
+              <a:rPr sz="2600" b="0">
                 <a:solidFill>
                   <a:srgbClr val="222222"/>
                 </a:solidFill>
@@ -9713,8 +9713,8 @@
         </p:nvSpPr>
         <p:spPr>
           <a:xfrm>
-            <a:off x="6301587" y="4119372"/>
-            <a:ext cx="5387187" cy="365760"/>
+            <a:off x="7163537" y="3738273"/>
+            <a:ext cx="4525238" cy="365760"/>
           </a:xfrm>
           <a:prstGeom prst="rect">
             <a:avLst/>
@@ -9761,8 +9761,8 @@
         </p:nvSpPr>
         <p:spPr>
           <a:xfrm>
-            <a:off x="6301587" y="4521708"/>
-            <a:ext cx="5387187" cy="1778508"/>
+            <a:off x="7163537" y="4140609"/>
+            <a:ext cx="4525238" cy="2123030"/>
           </a:xfrm>
           <a:prstGeom prst="rect">
             <a:avLst/>
@@ -9782,15 +9782,15 @@
               <a:spcAft>
                 <a:spcPts val="300"/>
               </a:spcAft>
-              <a:defRPr sz="2600" b="0">
-                <a:solidFill>
-                  <a:srgbClr val="222222"/>
-                </a:solidFill>
-                <a:latin typeface="Calibri"/>
-              </a:defRPr>
-            </a:pPr>
-            <a:r>
-              <a:rPr sz="2600" b="0">
+              <a:defRPr sz="2500" b="0">
+                <a:solidFill>
+                  <a:srgbClr val="222222"/>
+                </a:solidFill>
+                <a:latin typeface="Calibri"/>
+              </a:defRPr>
+            </a:pPr>
+            <a:r>
+              <a:rPr sz="2500" b="0">
                 <a:solidFill>
                   <a:srgbClr val="222222"/>
                 </a:solidFill>
@@ -9807,15 +9807,15 @@
               <a:spcAft>
                 <a:spcPts val="300"/>
               </a:spcAft>
-              <a:defRPr sz="2600" b="0">
-                <a:solidFill>
-                  <a:srgbClr val="222222"/>
-                </a:solidFill>
-                <a:latin typeface="Calibri"/>
-              </a:defRPr>
-            </a:pPr>
-            <a:r>
-              <a:rPr sz="2600" b="0">
+              <a:defRPr sz="2500" b="0">
+                <a:solidFill>
+                  <a:srgbClr val="222222"/>
+                </a:solidFill>
+                <a:latin typeface="Calibri"/>
+              </a:defRPr>
+            </a:pPr>
+            <a:r>
+              <a:rPr sz="2500" b="0">
                 <a:solidFill>
                   <a:srgbClr val="222222"/>
                 </a:solidFill>
@@ -13058,7 +13058,7 @@
         <p:spPr>
           <a:xfrm>
             <a:off x="502920" y="1901952"/>
-            <a:ext cx="5387187" cy="4361688"/>
+            <a:ext cx="6249137" cy="4361688"/>
           </a:xfrm>
           <a:prstGeom prst="rect">
             <a:avLst/>
@@ -13078,15 +13078,15 @@
               <a:spcAft>
                 <a:spcPts val="800"/>
               </a:spcAft>
-              <a:defRPr sz="1800" b="0">
-                <a:solidFill>
-                  <a:srgbClr val="222222"/>
-                </a:solidFill>
-                <a:latin typeface="Calibri"/>
-              </a:defRPr>
-            </a:pPr>
-            <a:r>
-              <a:rPr sz="1800" b="0">
+              <a:defRPr sz="1900" b="0">
+                <a:solidFill>
+                  <a:srgbClr val="222222"/>
+                </a:solidFill>
+                <a:latin typeface="Calibri"/>
+              </a:defRPr>
+            </a:pPr>
+            <a:r>
+              <a:rPr sz="1900" b="0">
                 <a:solidFill>
                   <a:srgbClr val="222222"/>
                 </a:solidFill>
@@ -13103,15 +13103,15 @@
               <a:spcAft>
                 <a:spcPts val="800"/>
               </a:spcAft>
-              <a:defRPr sz="1800" b="0">
-                <a:solidFill>
-                  <a:srgbClr val="222222"/>
-                </a:solidFill>
-                <a:latin typeface="Calibri"/>
-              </a:defRPr>
-            </a:pPr>
-            <a:r>
-              <a:rPr sz="1800" b="0">
+              <a:defRPr sz="1900" b="0">
+                <a:solidFill>
+                  <a:srgbClr val="222222"/>
+                </a:solidFill>
+                <a:latin typeface="Calibri"/>
+              </a:defRPr>
+            </a:pPr>
+            <a:r>
+              <a:rPr sz="1900" b="0">
                 <a:solidFill>
                   <a:srgbClr val="222222"/>
                 </a:solidFill>
@@ -13128,15 +13128,15 @@
               <a:spcAft>
                 <a:spcPts val="800"/>
               </a:spcAft>
-              <a:defRPr sz="1800" b="0">
-                <a:solidFill>
-                  <a:srgbClr val="222222"/>
-                </a:solidFill>
-                <a:latin typeface="Calibri"/>
-              </a:defRPr>
-            </a:pPr>
-            <a:r>
-              <a:rPr sz="1800" b="0">
+              <a:defRPr sz="1900" b="0">
+                <a:solidFill>
+                  <a:srgbClr val="222222"/>
+                </a:solidFill>
+                <a:latin typeface="Calibri"/>
+              </a:defRPr>
+            </a:pPr>
+            <a:r>
+              <a:rPr sz="1900" b="0">
                 <a:solidFill>
                   <a:srgbClr val="222222"/>
                 </a:solidFill>
@@ -13153,15 +13153,15 @@
               <a:spcAft>
                 <a:spcPts val="800"/>
               </a:spcAft>
-              <a:defRPr sz="1800" b="0">
-                <a:solidFill>
-                  <a:srgbClr val="222222"/>
-                </a:solidFill>
-                <a:latin typeface="Calibri"/>
-              </a:defRPr>
-            </a:pPr>
-            <a:r>
-              <a:rPr sz="1800" b="0">
+              <a:defRPr sz="1900" b="0">
+                <a:solidFill>
+                  <a:srgbClr val="222222"/>
+                </a:solidFill>
+                <a:latin typeface="Calibri"/>
+              </a:defRPr>
+            </a:pPr>
+            <a:r>
+              <a:rPr sz="1900" b="0">
                 <a:solidFill>
                   <a:srgbClr val="222222"/>
                 </a:solidFill>
@@ -13178,15 +13178,15 @@
               <a:spcAft>
                 <a:spcPts val="800"/>
               </a:spcAft>
-              <a:defRPr sz="1800" b="0">
-                <a:solidFill>
-                  <a:srgbClr val="222222"/>
-                </a:solidFill>
-                <a:latin typeface="Calibri"/>
-              </a:defRPr>
-            </a:pPr>
-            <a:r>
-              <a:rPr sz="1800" b="0">
+              <a:defRPr sz="1900" b="0">
+                <a:solidFill>
+                  <a:srgbClr val="222222"/>
+                </a:solidFill>
+                <a:latin typeface="Calibri"/>
+              </a:defRPr>
+            </a:pPr>
+            <a:r>
+              <a:rPr sz="1900" b="0">
                 <a:solidFill>
                   <a:srgbClr val="222222"/>
                 </a:solidFill>
@@ -13205,8 +13205,8 @@
         </p:nvSpPr>
         <p:spPr>
           <a:xfrm>
-            <a:off x="6301587" y="1901952"/>
-            <a:ext cx="5387187" cy="365760"/>
+            <a:off x="7163537" y="1901952"/>
+            <a:ext cx="4525238" cy="365760"/>
           </a:xfrm>
           <a:prstGeom prst="rect">
             <a:avLst/>
@@ -13253,8 +13253,8 @@
         </p:nvSpPr>
         <p:spPr>
           <a:xfrm>
-            <a:off x="6301587" y="2304288"/>
-            <a:ext cx="5387187" cy="1778508"/>
+            <a:off x="7163537" y="2304288"/>
+            <a:ext cx="4525238" cy="1292958"/>
           </a:xfrm>
           <a:prstGeom prst="rect">
             <a:avLst/>
@@ -13272,17 +13272,17 @@
                 <a:spcPct val="100000"/>
               </a:lnSpc>
               <a:spcAft>
-                <a:spcPts val="600"/>
-              </a:spcAft>
-              <a:defRPr sz="3000" b="0">
-                <a:solidFill>
-                  <a:srgbClr val="222222"/>
-                </a:solidFill>
-                <a:latin typeface="Calibri"/>
-              </a:defRPr>
-            </a:pPr>
-            <a:r>
-              <a:rPr sz="3000" b="0">
+                <a:spcPts val="300"/>
+              </a:spcAft>
+              <a:defRPr sz="2500" b="0">
+                <a:solidFill>
+                  <a:srgbClr val="222222"/>
+                </a:solidFill>
+                <a:latin typeface="Calibri"/>
+              </a:defRPr>
+            </a:pPr>
+            <a:r>
+              <a:rPr sz="2500" b="0">
                 <a:solidFill>
                   <a:srgbClr val="222222"/>
                 </a:solidFill>
@@ -13301,8 +13301,8 @@
         </p:nvSpPr>
         <p:spPr>
           <a:xfrm>
-            <a:off x="6301587" y="4119372"/>
-            <a:ext cx="5387187" cy="365760"/>
+            <a:off x="7163537" y="3670398"/>
+            <a:ext cx="4525238" cy="365760"/>
           </a:xfrm>
           <a:prstGeom prst="rect">
             <a:avLst/>
@@ -13349,8 +13349,8 @@
         </p:nvSpPr>
         <p:spPr>
           <a:xfrm>
-            <a:off x="6301587" y="4521708"/>
-            <a:ext cx="5387187" cy="1778508"/>
+            <a:off x="7163537" y="4072734"/>
+            <a:ext cx="4525238" cy="2190905"/>
           </a:xfrm>
           <a:prstGeom prst="rect">
             <a:avLst/>
@@ -13370,15 +13370,15 @@
               <a:spcAft>
                 <a:spcPts val="300"/>
               </a:spcAft>
-              <a:defRPr sz="2000" b="0">
-                <a:solidFill>
-                  <a:srgbClr val="222222"/>
-                </a:solidFill>
-                <a:latin typeface="Calibri"/>
-              </a:defRPr>
-            </a:pPr>
-            <a:r>
-              <a:rPr sz="2000" b="0">
+              <a:defRPr sz="2300" b="0">
+                <a:solidFill>
+                  <a:srgbClr val="222222"/>
+                </a:solidFill>
+                <a:latin typeface="Calibri"/>
+              </a:defRPr>
+            </a:pPr>
+            <a:r>
+              <a:rPr sz="2300" b="0">
                 <a:solidFill>
                   <a:srgbClr val="222222"/>
                 </a:solidFill>
@@ -13395,15 +13395,15 @@
               <a:spcAft>
                 <a:spcPts val="300"/>
               </a:spcAft>
-              <a:defRPr sz="2000" b="0">
-                <a:solidFill>
-                  <a:srgbClr val="222222"/>
-                </a:solidFill>
-                <a:latin typeface="Calibri"/>
-              </a:defRPr>
-            </a:pPr>
-            <a:r>
-              <a:rPr sz="2000" b="0">
+              <a:defRPr sz="2300" b="0">
+                <a:solidFill>
+                  <a:srgbClr val="222222"/>
+                </a:solidFill>
+                <a:latin typeface="Calibri"/>
+              </a:defRPr>
+            </a:pPr>
+            <a:r>
+              <a:rPr sz="2300" b="0">
                 <a:solidFill>
                   <a:srgbClr val="222222"/>
                 </a:solidFill>
@@ -16084,7 +16084,7 @@
         <p:spPr>
           <a:xfrm>
             <a:off x="502920" y="1901952"/>
-            <a:ext cx="5387187" cy="4361688"/>
+            <a:ext cx="6249137" cy="4361688"/>
           </a:xfrm>
           <a:prstGeom prst="rect">
             <a:avLst/>
@@ -16181,8 +16181,8 @@
         </p:nvSpPr>
         <p:spPr>
           <a:xfrm>
-            <a:off x="6301587" y="1901952"/>
-            <a:ext cx="5387187" cy="365760"/>
+            <a:off x="7163537" y="1901952"/>
+            <a:ext cx="4525238" cy="365760"/>
           </a:xfrm>
           <a:prstGeom prst="rect">
             <a:avLst/>
@@ -16229,8 +16229,8 @@
         </p:nvSpPr>
         <p:spPr>
           <a:xfrm>
-            <a:off x="6301587" y="2304288"/>
-            <a:ext cx="5387187" cy="1778508"/>
+            <a:off x="7163537" y="2304288"/>
+            <a:ext cx="4525238" cy="975649"/>
           </a:xfrm>
           <a:prstGeom prst="rect">
             <a:avLst/>
@@ -16248,17 +16248,17 @@
                 <a:spcPct val="100000"/>
               </a:lnSpc>
               <a:spcAft>
-                <a:spcPts val="600"/>
-              </a:spcAft>
-              <a:defRPr sz="3000" b="0">
-                <a:solidFill>
-                  <a:srgbClr val="222222"/>
-                </a:solidFill>
-                <a:latin typeface="Calibri"/>
-              </a:defRPr>
-            </a:pPr>
-            <a:r>
-              <a:rPr sz="3000" b="0">
+                <a:spcPts val="300"/>
+              </a:spcAft>
+              <a:defRPr sz="2700" b="0">
+                <a:solidFill>
+                  <a:srgbClr val="222222"/>
+                </a:solidFill>
+                <a:latin typeface="Calibri"/>
+              </a:defRPr>
+            </a:pPr>
+            <a:r>
+              <a:rPr sz="2700" b="0">
                 <a:solidFill>
                   <a:srgbClr val="222222"/>
                 </a:solidFill>
@@ -16277,8 +16277,8 @@
         </p:nvSpPr>
         <p:spPr>
           <a:xfrm>
-            <a:off x="6301587" y="4119372"/>
-            <a:ext cx="5387187" cy="365760"/>
+            <a:off x="7163537" y="3353089"/>
+            <a:ext cx="4525238" cy="365760"/>
           </a:xfrm>
           <a:prstGeom prst="rect">
             <a:avLst/>
@@ -16325,8 +16325,8 @@
         </p:nvSpPr>
         <p:spPr>
           <a:xfrm>
-            <a:off x="6301587" y="4521708"/>
-            <a:ext cx="5387187" cy="1778508"/>
+            <a:off x="7163537" y="3755425"/>
+            <a:ext cx="4525238" cy="2508214"/>
           </a:xfrm>
           <a:prstGeom prst="rect">
             <a:avLst/>
@@ -16346,15 +16346,15 @@
               <a:spcAft>
                 <a:spcPts val="600"/>
               </a:spcAft>
-              <a:defRPr sz="2900" b="0">
-                <a:solidFill>
-                  <a:srgbClr val="222222"/>
-                </a:solidFill>
-                <a:latin typeface="Calibri"/>
-              </a:defRPr>
-            </a:pPr>
-            <a:r>
-              <a:rPr sz="2900" b="0">
+              <a:defRPr sz="3000" b="0">
+                <a:solidFill>
+                  <a:srgbClr val="222222"/>
+                </a:solidFill>
+                <a:latin typeface="Calibri"/>
+              </a:defRPr>
+            </a:pPr>
+            <a:r>
+              <a:rPr sz="3000" b="0">
                 <a:solidFill>
                   <a:srgbClr val="222222"/>
                 </a:solidFill>
@@ -16642,7 +16642,7 @@
         <p:spPr>
           <a:xfrm>
             <a:off x="502920" y="1901952"/>
-            <a:ext cx="11185855" cy="3172968"/>
+            <a:ext cx="11185855" cy="3273552"/>
           </a:xfrm>
           <a:prstGeom prst="rect">
             <a:avLst/>
@@ -18699,17 +18699,17 @@
                 <a:spcPct val="100000"/>
               </a:lnSpc>
               <a:spcAft>
-                <a:spcPts val="900"/>
-              </a:spcAft>
-              <a:defRPr sz="3000" b="0">
-                <a:solidFill>
-                  <a:srgbClr val="222222"/>
-                </a:solidFill>
-                <a:latin typeface="Calibri"/>
-              </a:defRPr>
-            </a:pPr>
-            <a:r>
-              <a:rPr sz="3000" b="0">
+                <a:spcPts val="600"/>
+              </a:spcAft>
+              <a:defRPr sz="2700" b="0">
+                <a:solidFill>
+                  <a:srgbClr val="222222"/>
+                </a:solidFill>
+                <a:latin typeface="Calibri"/>
+              </a:defRPr>
+            </a:pPr>
+            <a:r>
+              <a:rPr sz="2700" b="0">
                 <a:solidFill>
                   <a:srgbClr val="222222"/>
                 </a:solidFill>
@@ -18724,42 +18724,42 @@
                 <a:spcPct val="100000"/>
               </a:lnSpc>
               <a:spcAft>
-                <a:spcPts val="900"/>
-              </a:spcAft>
-              <a:defRPr sz="3000" b="0">
-                <a:solidFill>
-                  <a:srgbClr val="222222"/>
-                </a:solidFill>
-                <a:latin typeface="Calibri"/>
-              </a:defRPr>
-            </a:pPr>
-            <a:r>
-              <a:rPr sz="3000" b="0">
-                <a:solidFill>
-                  <a:srgbClr val="222222"/>
-                </a:solidFill>
-                <a:latin typeface="Calibri"/>
-              </a:rPr>
-              <a:t>You measured your own vehicle's minimum turning speed.</a:t>
-            </a:r>
-          </a:p>
-          <a:p>
-            <a:pPr algn="l">
-              <a:lnSpc>
-                <a:spcPct val="100000"/>
-              </a:lnSpc>
-              <a:spcAft>
-                <a:spcPts val="900"/>
-              </a:spcAft>
-              <a:defRPr sz="3000" b="0">
-                <a:solidFill>
-                  <a:srgbClr val="222222"/>
-                </a:solidFill>
-                <a:latin typeface="Calibri"/>
-              </a:defRPr>
-            </a:pPr>
-            <a:r>
-              <a:rPr sz="3000" b="0">
+                <a:spcPts val="600"/>
+              </a:spcAft>
+              <a:defRPr sz="2700" b="0">
+                <a:solidFill>
+                  <a:srgbClr val="222222"/>
+                </a:solidFill>
+                <a:latin typeface="Calibri"/>
+              </a:defRPr>
+            </a:pPr>
+            <a:r>
+              <a:rPr sz="2700" b="0">
+                <a:solidFill>
+                  <a:srgbClr val="222222"/>
+                </a:solidFill>
+                <a:latin typeface="Calibri"/>
+              </a:rPr>
+              <a:t>You watched duty and speed change together on the Serial Monitor.</a:t>
+            </a:r>
+          </a:p>
+          <a:p>
+            <a:pPr algn="l">
+              <a:lnSpc>
+                <a:spcPct val="100000"/>
+              </a:lnSpc>
+              <a:spcAft>
+                <a:spcPts val="600"/>
+              </a:spcAft>
+              <a:defRPr sz="2700" b="0">
+                <a:solidFill>
+                  <a:srgbClr val="222222"/>
+                </a:solidFill>
+                <a:latin typeface="Calibri"/>
+              </a:defRPr>
+            </a:pPr>
+            <a:r>
+              <a:rPr sz="2700" b="0">
                 <a:solidFill>
                   <a:srgbClr val="222222"/>
                 </a:solidFill>
@@ -18774,33 +18774,33 @@
                 <a:spcPct val="100000"/>
               </a:lnSpc>
               <a:spcAft>
-                <a:spcPts val="900"/>
-              </a:spcAft>
-              <a:defRPr sz="3000" b="0">
-                <a:solidFill>
-                  <a:srgbClr val="222222"/>
-                </a:solidFill>
-                <a:latin typeface="Calibri"/>
-              </a:defRPr>
-            </a:pPr>
-          </a:p>
-          <a:p>
-            <a:pPr algn="l">
-              <a:lnSpc>
-                <a:spcPct val="100000"/>
-              </a:lnSpc>
-              <a:spcAft>
-                <a:spcPts val="900"/>
-              </a:spcAft>
-              <a:defRPr sz="3000" b="0">
-                <a:solidFill>
-                  <a:srgbClr val="222222"/>
-                </a:solidFill>
-                <a:latin typeface="Calibri"/>
-              </a:defRPr>
-            </a:pPr>
-            <a:r>
-              <a:rPr sz="3000" b="0">
+                <a:spcPts val="600"/>
+              </a:spcAft>
+              <a:defRPr sz="2700" b="0">
+                <a:solidFill>
+                  <a:srgbClr val="222222"/>
+                </a:solidFill>
+                <a:latin typeface="Calibri"/>
+              </a:defRPr>
+            </a:pPr>
+          </a:p>
+          <a:p>
+            <a:pPr algn="l">
+              <a:lnSpc>
+                <a:spcPct val="100000"/>
+              </a:lnSpc>
+              <a:spcAft>
+                <a:spcPts val="600"/>
+              </a:spcAft>
+              <a:defRPr sz="2700" b="0">
+                <a:solidFill>
+                  <a:srgbClr val="222222"/>
+                </a:solidFill>
+                <a:latin typeface="Calibri"/>
+              </a:defRPr>
+            </a:pPr>
+            <a:r>
+              <a:rPr sz="2700" b="0">
                 <a:solidFill>
                   <a:srgbClr val="222222"/>
                 </a:solidFill>

--- a/ground-vehicle/docs/courses/beginner-ps3/l3_controller_programming.pptx
+++ b/ground-vehicle/docs/courses/beginner-ps3/l3_controller_programming.pptx
@@ -30,7 +30,6 @@
     <p:sldId id="278" r:id="rId30"/>
     <p:sldId id="279" r:id="rId31"/>
     <p:sldId id="280" r:id="rId32"/>
-    <p:sldId id="281" r:id="rId33"/>
   </p:sldIdLst>
   <p:sldSz cx="12191695" cy="6858000" type="screen4x3"/>
   <p:notesSz cx="6858000" cy="9144000"/>
@@ -1792,7 +1791,23 @@
               <a:rPr sz="1200">
                 <a:latin typeface="Calibri"/>
               </a:rPr>
-              <a:t>Steps 5 and 6 are deliberate breakages. Swapped signs give you a vehicle that steers backwards; dropping the turn term entirely gives you something that can only go straight or spin.</a:t>
+              <a:t>Steps 5 and 6 are deliberate breakages, and the line numbers on the slide are read out of the sketch when the deck is built, so they are right for the track in front of you.</a:t>
+            </a:r>
+          </a:p>
+          <a:p>
+            <a:r>
+              <a:rPr sz="1200">
+                <a:latin typeface="Calibri"/>
+              </a:rPr>
+              <a:t>Swapped signs give a vehicle that steers backwards. Dropping the turn term from the right side only gives something that swings wide one way and barely turns the other - the left wheels still get forward + turn while the right ones get forward alone.</a:t>
+            </a:r>
+          </a:p>
+          <a:p>
+            <a:r>
+              <a:rPr sz="1200">
+                <a:latin typeface="Calibri"/>
+              </a:rPr>
+              <a:t>Make them put both back before they leave.</a:t>
             </a:r>
           </a:p>
           <a:p>
@@ -1873,16 +1888,15 @@
               <a:rPr sz="1200">
                 <a:latin typeface="Calibri"/>
               </a:rPr>
-              <a:t>(Continued from the previous slide - the same notes apply.)</a:t>
-            </a:r>
-          </a:p>
-          <a:p/>
+              <a:t>Slow down. This is the most transferable idea in the whole course.</a:t>
+            </a:r>
+          </a:p>
           <a:p>
             <a:r>
               <a:rPr sz="1200">
                 <a:latin typeface="Calibri"/>
               </a:rPr>
-              <a:t>Step 1 is not optional. Wheels off the ground, check up is forward and right is right, every single upload.</a:t>
+              <a:t>The only safe behavior is to stop. Not to carry on with the last command, and not to be clever.</a:t>
             </a:r>
           </a:p>
           <a:p>
@@ -1890,7 +1904,7 @@
               <a:rPr sz="1200">
                 <a:latin typeface="Calibri"/>
               </a:rPr>
-              <a:t>Step 3 is the failsafe demonstration. Have them do it deliberately, somewhere safe, and watch the vehicle stop dead.</a:t>
+              <a:t>Go round the examples: a drone hovers or returns home, a submersible surfaces, a ground vehicle stops. Ask why each is right for that vehicle.</a:t>
             </a:r>
           </a:p>
           <a:p>
@@ -1898,15 +1912,7 @@
               <a:rPr sz="1200">
                 <a:latin typeface="Calibri"/>
               </a:rPr>
-              <a:t>Steps 5 and 6 are deliberate breakages. Swapped signs give you a vehicle that steers backwards; dropping the turn term entirely gives you something that can only go straight or spin.</a:t>
-            </a:r>
-          </a:p>
-          <a:p>
-            <a:r>
-              <a:rPr sz="1200">
-                <a:latin typeface="Calibri"/>
-              </a:rPr>
-              <a:t>Give this the full thirty minutes. It is the payoff for three lessons of groundwork.</a:t>
+              <a:t>End with the question on the slide and let it sit: on anything you ever build, what happens when the operator disappears?</a:t>
             </a:r>
           </a:p>
         </p:txBody>
@@ -1979,7 +1985,7 @@
               <a:rPr sz="1200">
                 <a:latin typeface="Calibri"/>
               </a:rPr>
-              <a:t>Slow down. This is the most transferable idea in the whole course.</a:t>
+              <a:t>Do not read this table out. Point at it and tell them to use it during the activity.</a:t>
             </a:r>
           </a:p>
           <a:p>
@@ -1987,7 +1993,7 @@
               <a:rPr sz="1200">
                 <a:latin typeface="Calibri"/>
               </a:rPr>
-              <a:t>The only safe behavior is to stop. Not to carry on with the last command, and not to be clever.</a:t>
+              <a:t>Worth printing and taping to the wall for the rest of the course.</a:t>
             </a:r>
           </a:p>
           <a:p>
@@ -1995,15 +2001,7 @@
               <a:rPr sz="1200">
                 <a:latin typeface="Calibri"/>
               </a:rPr>
-              <a:t>Go round the examples: a drone hovers or returns home, a submersible surfaces, a ground vehicle stops. Ask why each is right for that vehicle.</a:t>
-            </a:r>
-          </a:p>
-          <a:p>
-            <a:r>
-              <a:rPr sz="1200">
-                <a:latin typeface="Calibri"/>
-              </a:rPr>
-              <a:t>End with the question on the slide and let it sit: on anything you ever build, what happens when the operator disappears?</a:t>
+              <a:t>Row three - somebody else's vehicle moving - is the funny one and the one that will actually happen.</a:t>
             </a:r>
           </a:p>
         </p:txBody>
@@ -2076,95 +2074,6 @@
               <a:rPr sz="1200">
                 <a:latin typeface="Calibri"/>
               </a:rPr>
-              <a:t>Do not read this table out. Point at it and tell them to use it during the activity.</a:t>
-            </a:r>
-          </a:p>
-          <a:p>
-            <a:r>
-              <a:rPr sz="1200">
-                <a:latin typeface="Calibri"/>
-              </a:rPr>
-              <a:t>Worth printing and taping to the wall for the rest of the course.</a:t>
-            </a:r>
-          </a:p>
-          <a:p>
-            <a:r>
-              <a:rPr sz="1200">
-                <a:latin typeface="Calibri"/>
-              </a:rPr>
-              <a:t>Row three - somebody else's vehicle moving - is the funny one and the one that will actually happen.</a:t>
-            </a:r>
-          </a:p>
-        </p:txBody>
-      </p:sp>
-      <p:sp>
-        <p:nvSpPr>
-          <p:cNvPr id="4" name="Slide Number Placeholder 3"/>
-          <p:cNvSpPr>
-            <a:spLocks noGrp="1"/>
-          </p:cNvSpPr>
-          <p:nvPr>
-            <p:ph type="sldNum" idx="5" sz="quarter"/>
-          </p:nvPr>
-        </p:nvSpPr>
-        <p:spPr/>
-      </p:sp>
-    </p:spTree>
-  </p:cSld>
-  <p:clrMapOvr>
-    <a:masterClrMapping/>
-  </p:clrMapOvr>
-</p:notes>
-</file>
-
-<file path=ppt/notesSlides/notesSlide26.xml><?xml version="1.0" encoding="utf-8"?>
-<p:notes xmlns:a="http://schemas.openxmlformats.org/drawingml/2006/main" xmlns:p="http://schemas.openxmlformats.org/presentationml/2006/main" xmlns:r="http://schemas.openxmlformats.org/officeDocument/2006/relationships">
-  <p:cSld>
-    <p:spTree>
-      <p:nvGrpSpPr>
-        <p:cNvPr id="1" name=""/>
-        <p:cNvGrpSpPr/>
-        <p:nvPr/>
-      </p:nvGrpSpPr>
-      <p:grpSpPr>
-        <a:xfrm>
-          <a:off x="0" y="0"/>
-          <a:ext cx="0" cy="0"/>
-          <a:chOff x="0" y="0"/>
-          <a:chExt cx="0" cy="0"/>
-        </a:xfrm>
-      </p:grpSpPr>
-      <p:sp>
-        <p:nvSpPr>
-          <p:cNvPr id="2" name="Slide Image Placeholder 1"/>
-          <p:cNvSpPr>
-            <a:spLocks noGrp="1"/>
-          </p:cNvSpPr>
-          <p:nvPr>
-            <p:ph type="sldImg" idx="2"/>
-          </p:nvPr>
-        </p:nvSpPr>
-        <p:spPr/>
-      </p:sp>
-      <p:sp>
-        <p:nvSpPr>
-          <p:cNvPr id="3" name="Notes Placeholder 2"/>
-          <p:cNvSpPr>
-            <a:spLocks noGrp="1"/>
-          </p:cNvSpPr>
-          <p:nvPr>
-            <p:ph type="body" idx="3" sz="quarter"/>
-          </p:nvPr>
-        </p:nvSpPr>
-        <p:spPr/>
-        <p:txBody>
-          <a:bodyPr/>
-          <a:lstStyle/>
-          <a:p>
-            <a:r>
-              <a:rPr sz="1200">
-                <a:latin typeface="Calibri"/>
-              </a:rPr>
               <a:t>Conversation, not a test.</a:t>
             </a:r>
           </a:p>
@@ -2513,7 +2422,7 @@
               <a:rPr sz="1200">
                 <a:latin typeface="Calibri"/>
               </a:rPr>
-              <a:t>The PS3 pairing story is genuinely odd, so say the odd part plainly: the controller is told which vehicle to talk to, not the other way round.</a:t>
+              <a:t>Kevin's instruction, 2026-09-05: we program and label the controllers, so do not make students worry about how. Tell them what the sticker means and move on.</a:t>
             </a:r>
           </a:p>
           <a:p>
@@ -2521,7 +2430,7 @@
               <a:rPr sz="1200">
                 <a:latin typeface="Calibri"/>
               </a:rPr>
-              <a:t>SixaxisPairTool needs a Windows PC and a USB cable. If you have one machine for the room, do this as a queue during the break.</a:t>
+              <a:t>Say the odd part plainly all the same: on a PS3 pad it is the CONTROLLER that is told which vehicle to talk to, not the vehicle that chooses a controller.</a:t>
             </a:r>
           </a:p>
           <a:p>
@@ -2529,7 +2438,7 @@
               <a:rPr sz="1200">
                 <a:latin typeface="Calibri"/>
               </a:rPr>
-              <a:t>The address goes in TWO places and they must match: the controller, and PS3_MAC_ADDRESS in the sketch.</a:t>
+              <a:t>FOR YOU, NOT FOR THE SLIDE - how the labelling is done. Plug the pad into a Windows PC over USB, open SixaxisPairTool, type the address in and click Update, then put the same address into PS3_MAC_ADDRESS in the sketch. The scheme is 02:02:03:04:05:NN, where NN is the vehicle number.</a:t>
             </a:r>
           </a:p>
           <a:p>
@@ -2537,7 +2446,15 @@
               <a:rPr sz="1200">
                 <a:latin typeface="Calibri"/>
               </a:rPr>
-              <a:t>Stickers on both the vehicle and the pad. Every term somebody loses a morning to two vehicles sharing an address.</a:t>
+              <a:t>Also for you: the first pair of digits must be EVEN. An odd one silently fails to connect, which is a very confusing way to spend an afternoon.</a:t>
+            </a:r>
+          </a:p>
+          <a:p>
+            <a:r>
+              <a:rPr sz="1200">
+                <a:latin typeface="Calibri"/>
+              </a:rPr>
+              <a:t>Check the stickers around the room now, before anybody uploads. Every term somebody loses a morning to a pad that was picked up off the wrong table.</a:t>
             </a:r>
           </a:p>
         </p:txBody>
@@ -2610,16 +2527,15 @@
               <a:rPr sz="1200">
                 <a:latin typeface="Calibri"/>
               </a:rPr>
-              <a:t>(Continued from the previous slide - the same notes apply.)</a:t>
-            </a:r>
-          </a:p>
-          <a:p/>
+              <a:t>This is a reference page and it is deliberately nothing but the picture. Leave it up while they work.</a:t>
+            </a:r>
+          </a:p>
           <a:p>
             <a:r>
               <a:rPr sz="1200">
                 <a:latin typeface="Calibri"/>
               </a:rPr>
-              <a:t>The PS3 pairing story is genuinely odd, so say the odd part plainly: the controller is told which vehicle to talk to, not the other way round.</a:t>
+              <a:t>Hold a real controller alongside it and name the parts. Two analog sticks, a D-pad, four face buttons, four shoulder buttons, two triggers, and three in the middle.</a:t>
             </a:r>
           </a:p>
           <a:p>
@@ -2627,7 +2543,7 @@
               <a:rPr sz="1200">
                 <a:latin typeface="Calibri"/>
               </a:rPr>
-              <a:t>SixaxisPairTool needs a Windows PC and a USB cable. If you have one machine for the room, do this as a queue during the break.</a:t>
+              <a:t>Every one of those has a name in the program, and they are about to press all of them and see what each is called.</a:t>
             </a:r>
           </a:p>
           <a:p>
@@ -2635,15 +2551,7 @@
               <a:rPr sz="1200">
                 <a:latin typeface="Calibri"/>
               </a:rPr>
-              <a:t>The address goes in TWO places and they must match: the controller, and PS3_MAC_ADDRESS in the sketch.</a:t>
-            </a:r>
-          </a:p>
-          <a:p>
-            <a:r>
-              <a:rPr sz="1200">
-                <a:latin typeface="Calibri"/>
-              </a:rPr>
-              <a:t>Stickers on both the vehicle and the pad. Every term somebody loses a morning to two vehicles sharing an address.</a:t>
+              <a:t>Tell them to photograph this slide. They will want it again in Lessons 4 and 5.</a:t>
             </a:r>
           </a:p>
         </p:txBody>
@@ -2716,7 +2624,7 @@
               <a:rPr sz="1200">
                 <a:latin typeface="Calibri"/>
               </a:rPr>
-              <a:t>Hold a real controller up alongside the picture and name the parts.</a:t>
+              <a:t>Read one row left to right and the whole thing is obvious: two pins, a driver chip, a motor.</a:t>
             </a:r>
           </a:p>
           <a:p>
@@ -2724,7 +2632,31 @@
               <a:rPr sz="1200">
                 <a:latin typeface="Calibri"/>
               </a:rPr>
-              <a:t>Tell them they are about to press every single one of these and see what the program calls it.</a:t>
+              <a:t>The driver is the part worth naming. The ESP32 pin can supply about 20 milliamps at 3.3 volts. A motor wants amps at battery voltage. The DRV8871 is what stands between them.</a:t>
+            </a:r>
+          </a:p>
+          <a:p>
+            <a:r>
+              <a:rPr sz="1200">
+                <a:latin typeface="Calibri"/>
+              </a:rPr>
+              <a:t>Two pins per motor, not one. Which of the two you drive is what decides the direction - that is the H-bridge from Lesson 2.</a:t>
+            </a:r>
+          </a:p>
+          <a:p>
+            <a:r>
+              <a:rPr sz="1200">
+                <a:latin typeface="Calibri"/>
+              </a:rPr>
+              <a:t>Point out that the pin numbers on this slide are read out of the sketch when the deck is built, so if they look at the file they will find the same ones.</a:t>
+            </a:r>
+          </a:p>
+          <a:p>
+            <a:r>
+              <a:rPr sz="1200">
+                <a:latin typeface="Calibri"/>
+              </a:rPr>
+              <a:t>Worth pausing on the fact that all four rows are identical. Four motors is not four times the thinking - it is the same thinking, four times.</a:t>
             </a:r>
           </a:p>
         </p:txBody>
@@ -2798,6 +2730,30 @@
                 <a:latin typeface="Calibri"/>
               </a:rPr>
               <a:t>Digital and analog is a distinction they will use for the rest of their lives. Two minutes, properly.</a:t>
+            </a:r>
+          </a:p>
+          <a:p>
+            <a:r>
+              <a:rPr sz="1200">
+                <a:latin typeface="Calibri"/>
+              </a:rPr>
+              <a:t>Kevin caught this in the 2026-09-05 review: the PS3 triggers are ANALOG, not digital. So are the shoulder buttons and the face buttons - a Sixaxis reports pressure on all of them. Almost every program reads them as digital anyway, which is why it is easy to get wrong.</a:t>
+            </a:r>
+          </a:p>
+          <a:p>
+            <a:r>
+              <a:rPr sz="1200">
+                <a:latin typeface="Calibri"/>
+              </a:rPr>
+              <a:t>A hard press on a trigger reads differently from a light one. You can still read any of them as a plain yes or no, and mostly we do, which is why it is easy to get wrong.</a:t>
+            </a:r>
+          </a:p>
+          <a:p>
+            <a:r>
+              <a:rPr sz="1200">
+                <a:latin typeface="Calibri"/>
+              </a:rPr>
+              <a:t>If you have five spare minutes, have them squeeze a trigger slowly in l3a_controller_check and watch the number climb.</a:t>
             </a:r>
           </a:p>
           <a:p>
@@ -16084,7 +16040,7 @@
         <p:spPr>
           <a:xfrm>
             <a:off x="502920" y="1901952"/>
-            <a:ext cx="6249137" cy="4361688"/>
+            <a:ext cx="6249137" cy="3273552"/>
           </a:xfrm>
           <a:prstGeom prst="rect">
             <a:avLst/>
@@ -16143,7 +16099,7 @@
                 </a:solidFill>
                 <a:latin typeface="Calibri"/>
               </a:rPr>
-              <a:t>2.  Now put it on the floor in a clear space and drive.</a:t>
+              <a:t>2.  Put it on the floor in a clear space and drive.</a:t>
             </a:r>
           </a:p>
           <a:p>
@@ -16168,7 +16124,82 @@
                 </a:solidFill>
                 <a:latin typeface="Calibri"/>
               </a:rPr>
-              <a:t>3.  While driving, switch the controller off. What happens?</a:t>
+              <a:t>3.  While driving, switch the pad off. What happens?</a:t>
+            </a:r>
+          </a:p>
+          <a:p>
+            <a:pPr algn="l">
+              <a:lnSpc>
+                <a:spcPct val="100000"/>
+              </a:lnSpc>
+              <a:spcAft>
+                <a:spcPts val="800"/>
+              </a:spcAft>
+              <a:defRPr sz="1800" b="0">
+                <a:solidFill>
+                  <a:srgbClr val="222222"/>
+                </a:solidFill>
+                <a:latin typeface="Calibri"/>
+              </a:defRPr>
+            </a:pPr>
+            <a:r>
+              <a:rPr sz="1800" b="0">
+                <a:solidFill>
+                  <a:srgbClr val="222222"/>
+                </a:solidFill>
+                <a:latin typeface="Calibri"/>
+              </a:rPr>
+              <a:t>4.  Set turnMax to MOTOR_MAX. Which is easier to aim?</a:t>
+            </a:r>
+          </a:p>
+          <a:p>
+            <a:pPr algn="l">
+              <a:lnSpc>
+                <a:spcPct val="100000"/>
+              </a:lnSpc>
+              <a:spcAft>
+                <a:spcPts val="800"/>
+              </a:spcAft>
+              <a:defRPr sz="1800" b="0">
+                <a:solidFill>
+                  <a:srgbClr val="222222"/>
+                </a:solidFill>
+                <a:latin typeface="Calibri"/>
+              </a:defRPr>
+            </a:pPr>
+            <a:r>
+              <a:rPr sz="1800" b="0">
+                <a:solidFill>
+                  <a:srgbClr val="222222"/>
+                </a:solidFill>
+                <a:latin typeface="Calibri"/>
+              </a:rPr>
+              <a:t>5.  Lines 150 and 151: swap the + and the - and drive. What is wrong now?</a:t>
+            </a:r>
+          </a:p>
+          <a:p>
+            <a:pPr algn="l">
+              <a:lnSpc>
+                <a:spcPct val="100000"/>
+              </a:lnSpc>
+              <a:spcAft>
+                <a:spcPts val="800"/>
+              </a:spcAft>
+              <a:defRPr sz="1800" b="0">
+                <a:solidFill>
+                  <a:srgbClr val="222222"/>
+                </a:solidFill>
+                <a:latin typeface="Calibri"/>
+              </a:defRPr>
+            </a:pPr>
+            <a:r>
+              <a:rPr sz="1800" b="0">
+                <a:solidFill>
+                  <a:srgbClr val="222222"/>
+                </a:solidFill>
+                <a:latin typeface="Calibri"/>
+              </a:rPr>
+              <a:t>6.  Line 151: make it  rightSpeed = forward;  with no turn term. Why is that worse steering?</a:t>
             </a:r>
           </a:p>
         </p:txBody>
@@ -16230,7 +16261,7 @@
         <p:spPr>
           <a:xfrm>
             <a:off x="7163537" y="2304288"/>
-            <a:ext cx="4525238" cy="975649"/>
+            <a:ext cx="4525238" cy="670919"/>
           </a:xfrm>
           <a:prstGeom prst="rect">
             <a:avLst/>
@@ -16250,15 +16281,15 @@
               <a:spcAft>
                 <a:spcPts val="300"/>
               </a:spcAft>
-              <a:defRPr sz="2700" b="0">
-                <a:solidFill>
-                  <a:srgbClr val="222222"/>
-                </a:solidFill>
-                <a:latin typeface="Calibri"/>
-              </a:defRPr>
-            </a:pPr>
-            <a:r>
-              <a:rPr sz="2700" b="0">
+              <a:defRPr sz="1800" b="0">
+                <a:solidFill>
+                  <a:srgbClr val="222222"/>
+                </a:solidFill>
+                <a:latin typeface="Calibri"/>
+              </a:defRPr>
+            </a:pPr>
+            <a:r>
+              <a:rPr sz="1800" b="0">
                 <a:solidFill>
                   <a:srgbClr val="222222"/>
                 </a:solidFill>
@@ -16277,7 +16308,7 @@
         </p:nvSpPr>
         <p:spPr>
           <a:xfrm>
-            <a:off x="7163537" y="3353089"/>
+            <a:off x="7163537" y="3048359"/>
             <a:ext cx="4525238" cy="365760"/>
           </a:xfrm>
           <a:prstGeom prst="rect">
@@ -16325,8 +16356,8 @@
         </p:nvSpPr>
         <p:spPr>
           <a:xfrm>
-            <a:off x="7163537" y="3755425"/>
-            <a:ext cx="4525238" cy="2508214"/>
+            <a:off x="7163537" y="3450695"/>
+            <a:ext cx="4525238" cy="1724808"/>
           </a:xfrm>
           <a:prstGeom prst="rect">
             <a:avLst/>
@@ -16344,23 +16375,89 @@
                 <a:spcPct val="100000"/>
               </a:lnSpc>
               <a:spcAft>
-                <a:spcPts val="600"/>
-              </a:spcAft>
-              <a:defRPr sz="3000" b="0">
-                <a:solidFill>
-                  <a:srgbClr val="222222"/>
-                </a:solidFill>
-                <a:latin typeface="Calibri"/>
-              </a:defRPr>
-            </a:pPr>
-            <a:r>
-              <a:rPr sz="3000" b="0">
+                <a:spcPts val="300"/>
+              </a:spcAft>
+              <a:defRPr sz="2500" b="0">
+                <a:solidFill>
+                  <a:srgbClr val="222222"/>
+                </a:solidFill>
+                <a:latin typeface="Calibri"/>
+              </a:defRPr>
+            </a:pPr>
+            <a:r>
+              <a:rPr sz="2500" b="0">
                 <a:solidFill>
                   <a:srgbClr val="222222"/>
                 </a:solidFill>
                 <a:latin typeface="Calibri"/>
               </a:rPr>
               <a:t>What happened when the controller switched off, and which four lines made that happen?</a:t>
+            </a:r>
+          </a:p>
+        </p:txBody>
+      </p:sp>
+      <p:sp>
+        <p:nvSpPr>
+          <p:cNvPr id="12" name="Rounded Rectangle 11"/>
+          <p:cNvSpPr/>
+          <p:nvPr/>
+        </p:nvSpPr>
+        <p:spPr>
+          <a:xfrm>
+            <a:off x="502920" y="5303520"/>
+            <a:ext cx="11185855" cy="960120"/>
+          </a:xfrm>
+          <a:prstGeom prst="roundRect">
+            <a:avLst>
+              <a:gd name="adj" fmla="val 4000"/>
+            </a:avLst>
+          </a:prstGeom>
+          <a:solidFill>
+            <a:srgbClr val="FBECEC"/>
+          </a:solidFill>
+          <a:ln w="12700">
+            <a:solidFill>
+              <a:srgbClr val="A32A2A"/>
+            </a:solidFill>
+          </a:ln>
+          <a:effectLst/>
+        </p:spPr>
+        <p:style>
+          <a:lnRef idx="1">
+            <a:schemeClr val="accent1"/>
+          </a:lnRef>
+          <a:fillRef idx="3">
+            <a:schemeClr val="accent1"/>
+          </a:fillRef>
+          <a:effectRef idx="2">
+            <a:schemeClr val="accent1"/>
+          </a:effectRef>
+          <a:fontRef idx="minor">
+            <a:schemeClr val="lt1"/>
+          </a:fontRef>
+        </p:style>
+        <p:txBody>
+          <a:bodyPr rtlCol="0" anchor="ctr" wrap="square" lIns="164592" rIns="164592" tIns="73152" bIns="73152"/>
+          <a:lstStyle/>
+          <a:p>
+            <a:pPr algn="l"/>
+            <a:r>
+              <a:rPr sz="1300" b="1">
+                <a:solidFill>
+                  <a:srgbClr val="A32A2A"/>
+                </a:solidFill>
+                <a:latin typeface="Calibri"/>
+              </a:rPr>
+              <a:t>SAFETY   </a:t>
+            </a:r>
+            <a:r>
+              <a:rPr sz="1500">
+                <a:solidFill>
+                  <a:srgbClr val="222222"/>
+                </a:solidFill>
+                <a:latin typeface="Calibri"/>
+              </a:rPr>
+              <a:t>Check the controls with the wheels off the ground first. Every time you upload a change.</a:t>
             </a:r>
           </a:p>
         </p:txBody>
@@ -16424,7 +16521,7 @@
                 </a:solidFill>
                 <a:latin typeface="Calibri"/>
               </a:rPr>
-              <a:t>Do it now  -  drive it  (continued)</a:t>
+              <a:t>Failsafe: what a robot does when it stops hearing you</a:t>
             </a:r>
           </a:p>
         </p:txBody>
@@ -16571,78 +16668,14 @@
       </p:sp>
       <p:sp>
         <p:nvSpPr>
-          <p:cNvPr id="6" name="Rounded Rectangle 5"/>
-          <p:cNvSpPr/>
-          <p:nvPr/>
-        </p:nvSpPr>
-        <p:spPr>
-          <a:xfrm>
-            <a:off x="502920" y="1188720"/>
-            <a:ext cx="11185855" cy="530352"/>
-          </a:xfrm>
-          <a:prstGeom prst="roundRect">
-            <a:avLst>
-              <a:gd name="adj" fmla="val 4000"/>
-            </a:avLst>
-          </a:prstGeom>
-          <a:solidFill>
-            <a:srgbClr val="0E7C86"/>
-          </a:solidFill>
-          <a:ln>
-            <a:noFill/>
-          </a:ln>
-          <a:effectLst/>
-        </p:spPr>
-        <p:style>
-          <a:lnRef idx="1">
-            <a:schemeClr val="accent1"/>
-          </a:lnRef>
-          <a:fillRef idx="3">
-            <a:schemeClr val="accent1"/>
-          </a:fillRef>
-          <a:effectRef idx="2">
-            <a:schemeClr val="accent1"/>
-          </a:effectRef>
-          <a:fontRef idx="minor">
-            <a:schemeClr val="lt1"/>
-          </a:fontRef>
-        </p:style>
-        <p:txBody>
-          <a:bodyPr rtlCol="0" anchor="ctr" wrap="square" lIns="182880"/>
-          <a:lstStyle/>
-          <a:p>
-            <a:pPr algn="l"/>
-            <a:r>
-              <a:rPr sz="1300" b="1">
-                <a:solidFill>
-                  <a:srgbClr val="FFFFFF"/>
-                </a:solidFill>
-                <a:latin typeface="Calibri"/>
-              </a:rPr>
-              <a:t>UPLOAD AND RUN:   </a:t>
-            </a:r>
-            <a:r>
-              <a:rPr sz="1500" b="1">
-                <a:solidFill>
-                  <a:srgbClr val="FFFFFF"/>
-                </a:solidFill>
-                <a:latin typeface="Consolas"/>
-              </a:rPr>
-              <a:t>l3c_tank_drive</a:t>
-            </a:r>
-          </a:p>
-        </p:txBody>
-      </p:sp>
-      <p:sp>
-        <p:nvSpPr>
-          <p:cNvPr id="7" name="TextBox 6"/>
+          <p:cNvPr id="6" name="TextBox 5"/>
           <p:cNvSpPr txBox="1"/>
           <p:nvPr/>
         </p:nvSpPr>
         <p:spPr>
           <a:xfrm>
-            <a:off x="502920" y="1901952"/>
-            <a:ext cx="11185855" cy="3273552"/>
+            <a:off x="502920" y="1188720"/>
+            <a:ext cx="5364327" cy="3986784"/>
           </a:xfrm>
           <a:prstGeom prst="rect">
             <a:avLst/>
@@ -16660,73 +16693,219 @@
                 <a:spcPct val="100000"/>
               </a:lnSpc>
               <a:spcAft>
-                <a:spcPts val="800"/>
-              </a:spcAft>
-              <a:defRPr sz="1800" b="0">
-                <a:solidFill>
-                  <a:srgbClr val="222222"/>
-                </a:solidFill>
-                <a:latin typeface="Calibri"/>
-              </a:defRPr>
-            </a:pPr>
-            <a:r>
-              <a:rPr sz="1800" b="0">
-                <a:solidFill>
-                  <a:srgbClr val="222222"/>
-                </a:solidFill>
-                <a:latin typeface="Calibri"/>
-              </a:rPr>
-              <a:t>4.  Set turnMax to MOTOR_MAX and drive again. Which is easier?</a:t>
-            </a:r>
-          </a:p>
-          <a:p>
-            <a:pPr algn="l">
-              <a:lnSpc>
-                <a:spcPct val="100000"/>
-              </a:lnSpc>
-              <a:spcAft>
-                <a:spcPts val="800"/>
-              </a:spcAft>
-              <a:defRPr sz="1800" b="0">
-                <a:solidFill>
-                  <a:srgbClr val="222222"/>
-                </a:solidFill>
-                <a:latin typeface="Calibri"/>
-              </a:defRPr>
-            </a:pPr>
-            <a:r>
-              <a:rPr sz="1800" b="0">
-                <a:solidFill>
-                  <a:srgbClr val="222222"/>
-                </a:solidFill>
-                <a:latin typeface="Calibri"/>
-              </a:rPr>
-              <a:t>5.  Swap the + and the - in the mixing lines and drive. What is wrong now?</a:t>
-            </a:r>
-          </a:p>
-          <a:p>
-            <a:pPr algn="l">
-              <a:lnSpc>
-                <a:spcPct val="100000"/>
-              </a:lnSpc>
-              <a:spcAft>
-                <a:spcPts val="800"/>
-              </a:spcAft>
-              <a:defRPr sz="1800" b="0">
-                <a:solidFill>
-                  <a:srgbClr val="222222"/>
-                </a:solidFill>
-                <a:latin typeface="Calibri"/>
-              </a:defRPr>
-            </a:pPr>
-            <a:r>
-              <a:rPr sz="1800" b="0">
-                <a:solidFill>
-                  <a:srgbClr val="222222"/>
-                </a:solidFill>
-                <a:latin typeface="Calibri"/>
-              </a:rPr>
-              <a:t>6.  Try  right = forward  with no turn term at all. Why is that a worse way to steer?</a:t>
+                <a:spcPts val="900"/>
+              </a:spcAft>
+              <a:defRPr sz="2000" b="0">
+                <a:solidFill>
+                  <a:srgbClr val="222222"/>
+                </a:solidFill>
+                <a:latin typeface="Calibri"/>
+              </a:defRPr>
+            </a:pPr>
+            <a:r>
+              <a:rPr sz="2000" b="0">
+                <a:solidFill>
+                  <a:srgbClr val="222222"/>
+                </a:solidFill>
+                <a:latin typeface="Calibri"/>
+              </a:rPr>
+              <a:t>A radio link is not reliable. Batteries go flat, people walk between the pad and the vehicle, controllers get switched off.</a:t>
+            </a:r>
+          </a:p>
+          <a:p>
+            <a:pPr algn="l">
+              <a:lnSpc>
+                <a:spcPct val="100000"/>
+              </a:lnSpc>
+              <a:spcAft>
+                <a:spcPts val="900"/>
+              </a:spcAft>
+              <a:defRPr sz="2000" b="0">
+                <a:solidFill>
+                  <a:srgbClr val="222222"/>
+                </a:solidFill>
+                <a:latin typeface="Calibri"/>
+              </a:defRPr>
+            </a:pPr>
+          </a:p>
+          <a:p>
+            <a:pPr algn="l">
+              <a:lnSpc>
+                <a:spcPct val="100000"/>
+              </a:lnSpc>
+              <a:spcAft>
+                <a:spcPts val="900"/>
+              </a:spcAft>
+              <a:defRPr sz="2000" b="0">
+                <a:solidFill>
+                  <a:srgbClr val="222222"/>
+                </a:solidFill>
+                <a:latin typeface="Calibri"/>
+              </a:defRPr>
+            </a:pPr>
+            <a:r>
+              <a:rPr sz="2000" b="0">
+                <a:solidFill>
+                  <a:srgbClr val="222222"/>
+                </a:solidFill>
+                <a:latin typeface="Calibri"/>
+              </a:rPr>
+              <a:t>The only safe behavior is to STOP. Not carry on with the last command, and not do something clever.</a:t>
+            </a:r>
+          </a:p>
+          <a:p>
+            <a:pPr algn="l">
+              <a:lnSpc>
+                <a:spcPct val="100000"/>
+              </a:lnSpc>
+              <a:spcAft>
+                <a:spcPts val="900"/>
+              </a:spcAft>
+              <a:defRPr sz="2000" b="0">
+                <a:solidFill>
+                  <a:srgbClr val="222222"/>
+                </a:solidFill>
+                <a:latin typeface="Calibri"/>
+              </a:defRPr>
+            </a:pPr>
+          </a:p>
+          <a:p>
+            <a:pPr algn="l">
+              <a:lnSpc>
+                <a:spcPct val="100000"/>
+              </a:lnSpc>
+              <a:spcAft>
+                <a:spcPts val="900"/>
+              </a:spcAft>
+              <a:defRPr sz="2000" b="0">
+                <a:solidFill>
+                  <a:srgbClr val="222222"/>
+                </a:solidFill>
+                <a:latin typeface="Calibri"/>
+              </a:defRPr>
+            </a:pPr>
+            <a:r>
+              <a:rPr sz="2000" b="0">
+                <a:solidFill>
+                  <a:srgbClr val="222222"/>
+                </a:solidFill>
+                <a:latin typeface="Calibri"/>
+              </a:rPr>
+              <a:t>Three lines at the top of loop() do it:</a:t>
+            </a:r>
+          </a:p>
+          <a:p>
+            <a:pPr lvl="1" algn="l">
+              <a:lnSpc>
+                <a:spcPct val="100000"/>
+              </a:lnSpc>
+              <a:spcAft>
+                <a:spcPts val="900"/>
+              </a:spcAft>
+              <a:defRPr sz="2000" b="0">
+                <a:solidFill>
+                  <a:srgbClr val="222222"/>
+                </a:solidFill>
+                <a:latin typeface="Calibri"/>
+              </a:defRPr>
+            </a:pPr>
+            <a:r>
+              <a:rPr sz="2000" b="0">
+                <a:solidFill>
+                  <a:srgbClr val="222222"/>
+                </a:solidFill>
+                <a:latin typeface="Calibri"/>
+              </a:rPr>
+              <a:t>if (!connected) { drive(0, 0); return; }</a:t>
+            </a:r>
+          </a:p>
+        </p:txBody>
+      </p:sp>
+      <p:sp>
+        <p:nvSpPr>
+          <p:cNvPr id="7" name="TextBox 6"/>
+          <p:cNvSpPr txBox="1"/>
+          <p:nvPr/>
+        </p:nvSpPr>
+        <p:spPr>
+          <a:xfrm>
+            <a:off x="6324447" y="1188720"/>
+            <a:ext cx="5364327" cy="3986784"/>
+          </a:xfrm>
+          <a:prstGeom prst="rect">
+            <a:avLst/>
+          </a:prstGeom>
+          <a:noFill/>
+        </p:spPr>
+        <p:txBody>
+          <a:bodyPr wrap="square" lIns="0" tIns="0" rIns="0" bIns="0">
+            <a:spAutoFit/>
+          </a:bodyPr>
+          <a:lstStyle/>
+          <a:p>
+            <a:pPr algn="l">
+              <a:lnSpc>
+                <a:spcPct val="100000"/>
+              </a:lnSpc>
+              <a:spcAft>
+                <a:spcPts val="900"/>
+              </a:spcAft>
+              <a:defRPr sz="2000" b="0">
+                <a:solidFill>
+                  <a:srgbClr val="222222"/>
+                </a:solidFill>
+                <a:latin typeface="Calibri"/>
+              </a:defRPr>
+            </a:pPr>
+            <a:r>
+              <a:rPr sz="2000" b="0">
+                <a:solidFill>
+                  <a:srgbClr val="222222"/>
+                </a:solidFill>
+                <a:latin typeface="Calibri"/>
+              </a:rPr>
+              <a:t>This is not a Pathfinder detail. Every unmanned vehicle has a failsafe, and what it should do when the link drops is a real engineering decision. A drone hovers, or returns home. A submersible surfaces. A ground vehicle stops.</a:t>
+            </a:r>
+          </a:p>
+          <a:p>
+            <a:pPr algn="l">
+              <a:lnSpc>
+                <a:spcPct val="100000"/>
+              </a:lnSpc>
+              <a:spcAft>
+                <a:spcPts val="900"/>
+              </a:spcAft>
+              <a:defRPr sz="2000" b="0">
+                <a:solidFill>
+                  <a:srgbClr val="222222"/>
+                </a:solidFill>
+                <a:latin typeface="Calibri"/>
+              </a:defRPr>
+            </a:pPr>
+          </a:p>
+          <a:p>
+            <a:pPr algn="l">
+              <a:lnSpc>
+                <a:spcPct val="100000"/>
+              </a:lnSpc>
+              <a:spcAft>
+                <a:spcPts val="900"/>
+              </a:spcAft>
+              <a:defRPr sz="2000" b="0">
+                <a:solidFill>
+                  <a:srgbClr val="222222"/>
+                </a:solidFill>
+                <a:latin typeface="Calibri"/>
+              </a:defRPr>
+            </a:pPr>
+            <a:r>
+              <a:rPr sz="2000" b="0">
+                <a:solidFill>
+                  <a:srgbClr val="222222"/>
+                </a:solidFill>
+                <a:latin typeface="Calibri"/>
+              </a:rPr>
+              <a:t>Ask yourself, on any system you build: what happens when the operator disappears?</a:t>
             </a:r>
           </a:p>
         </p:txBody>
@@ -16792,7 +16971,7 @@
                 </a:solidFill>
                 <a:latin typeface="Calibri"/>
               </a:rPr>
-              <a:t>Check the controls with the wheels off the ground first. Every time you upload a change.</a:t>
+              <a:t>If you take one habit away from this course, take this one.</a:t>
             </a:r>
           </a:p>
         </p:txBody>
@@ -16856,7 +17035,7 @@
                 </a:solidFill>
                 <a:latin typeface="Calibri"/>
               </a:rPr>
-              <a:t>Failsafe: what a robot does when it stops hearing you</a:t>
+              <a:t>When it will not connect</a:t>
             </a:r>
           </a:p>
         </p:txBody>
@@ -16997,520 +17176,6 @@
                 <a:latin typeface="Calibri"/>
               </a:rPr>
               <a:t>23</a:t>
-            </a:r>
-          </a:p>
-        </p:txBody>
-      </p:sp>
-      <p:sp>
-        <p:nvSpPr>
-          <p:cNvPr id="6" name="TextBox 5"/>
-          <p:cNvSpPr txBox="1"/>
-          <p:nvPr/>
-        </p:nvSpPr>
-        <p:spPr>
-          <a:xfrm>
-            <a:off x="502920" y="1188720"/>
-            <a:ext cx="5364327" cy="3986784"/>
-          </a:xfrm>
-          <a:prstGeom prst="rect">
-            <a:avLst/>
-          </a:prstGeom>
-          <a:noFill/>
-        </p:spPr>
-        <p:txBody>
-          <a:bodyPr wrap="square" lIns="0" tIns="0" rIns="0" bIns="0">
-            <a:spAutoFit/>
-          </a:bodyPr>
-          <a:lstStyle/>
-          <a:p>
-            <a:pPr algn="l">
-              <a:lnSpc>
-                <a:spcPct val="100000"/>
-              </a:lnSpc>
-              <a:spcAft>
-                <a:spcPts val="900"/>
-              </a:spcAft>
-              <a:defRPr sz="2000" b="0">
-                <a:solidFill>
-                  <a:srgbClr val="222222"/>
-                </a:solidFill>
-                <a:latin typeface="Calibri"/>
-              </a:defRPr>
-            </a:pPr>
-            <a:r>
-              <a:rPr sz="2000" b="0">
-                <a:solidFill>
-                  <a:srgbClr val="222222"/>
-                </a:solidFill>
-                <a:latin typeface="Calibri"/>
-              </a:rPr>
-              <a:t>A radio link is not reliable. Batteries go flat, people walk between the pad and the vehicle, controllers get switched off.</a:t>
-            </a:r>
-          </a:p>
-          <a:p>
-            <a:pPr algn="l">
-              <a:lnSpc>
-                <a:spcPct val="100000"/>
-              </a:lnSpc>
-              <a:spcAft>
-                <a:spcPts val="900"/>
-              </a:spcAft>
-              <a:defRPr sz="2000" b="0">
-                <a:solidFill>
-                  <a:srgbClr val="222222"/>
-                </a:solidFill>
-                <a:latin typeface="Calibri"/>
-              </a:defRPr>
-            </a:pPr>
-          </a:p>
-          <a:p>
-            <a:pPr algn="l">
-              <a:lnSpc>
-                <a:spcPct val="100000"/>
-              </a:lnSpc>
-              <a:spcAft>
-                <a:spcPts val="900"/>
-              </a:spcAft>
-              <a:defRPr sz="2000" b="0">
-                <a:solidFill>
-                  <a:srgbClr val="222222"/>
-                </a:solidFill>
-                <a:latin typeface="Calibri"/>
-              </a:defRPr>
-            </a:pPr>
-            <a:r>
-              <a:rPr sz="2000" b="0">
-                <a:solidFill>
-                  <a:srgbClr val="222222"/>
-                </a:solidFill>
-                <a:latin typeface="Calibri"/>
-              </a:rPr>
-              <a:t>The only safe behavior is to STOP. Not carry on with the last command, and not do something clever.</a:t>
-            </a:r>
-          </a:p>
-          <a:p>
-            <a:pPr algn="l">
-              <a:lnSpc>
-                <a:spcPct val="100000"/>
-              </a:lnSpc>
-              <a:spcAft>
-                <a:spcPts val="900"/>
-              </a:spcAft>
-              <a:defRPr sz="2000" b="0">
-                <a:solidFill>
-                  <a:srgbClr val="222222"/>
-                </a:solidFill>
-                <a:latin typeface="Calibri"/>
-              </a:defRPr>
-            </a:pPr>
-          </a:p>
-          <a:p>
-            <a:pPr algn="l">
-              <a:lnSpc>
-                <a:spcPct val="100000"/>
-              </a:lnSpc>
-              <a:spcAft>
-                <a:spcPts val="900"/>
-              </a:spcAft>
-              <a:defRPr sz="2000" b="0">
-                <a:solidFill>
-                  <a:srgbClr val="222222"/>
-                </a:solidFill>
-                <a:latin typeface="Calibri"/>
-              </a:defRPr>
-            </a:pPr>
-            <a:r>
-              <a:rPr sz="2000" b="0">
-                <a:solidFill>
-                  <a:srgbClr val="222222"/>
-                </a:solidFill>
-                <a:latin typeface="Calibri"/>
-              </a:rPr>
-              <a:t>Three lines at the top of loop() do it:</a:t>
-            </a:r>
-          </a:p>
-          <a:p>
-            <a:pPr lvl="1" algn="l">
-              <a:lnSpc>
-                <a:spcPct val="100000"/>
-              </a:lnSpc>
-              <a:spcAft>
-                <a:spcPts val="900"/>
-              </a:spcAft>
-              <a:defRPr sz="2000" b="0">
-                <a:solidFill>
-                  <a:srgbClr val="222222"/>
-                </a:solidFill>
-                <a:latin typeface="Calibri"/>
-              </a:defRPr>
-            </a:pPr>
-            <a:r>
-              <a:rPr sz="2000" b="0">
-                <a:solidFill>
-                  <a:srgbClr val="222222"/>
-                </a:solidFill>
-                <a:latin typeface="Calibri"/>
-              </a:rPr>
-              <a:t>if (!connected) { drive(0, 0); return; }</a:t>
-            </a:r>
-          </a:p>
-        </p:txBody>
-      </p:sp>
-      <p:sp>
-        <p:nvSpPr>
-          <p:cNvPr id="7" name="TextBox 6"/>
-          <p:cNvSpPr txBox="1"/>
-          <p:nvPr/>
-        </p:nvSpPr>
-        <p:spPr>
-          <a:xfrm>
-            <a:off x="6324447" y="1188720"/>
-            <a:ext cx="5364327" cy="3986784"/>
-          </a:xfrm>
-          <a:prstGeom prst="rect">
-            <a:avLst/>
-          </a:prstGeom>
-          <a:noFill/>
-        </p:spPr>
-        <p:txBody>
-          <a:bodyPr wrap="square" lIns="0" tIns="0" rIns="0" bIns="0">
-            <a:spAutoFit/>
-          </a:bodyPr>
-          <a:lstStyle/>
-          <a:p>
-            <a:pPr algn="l">
-              <a:lnSpc>
-                <a:spcPct val="100000"/>
-              </a:lnSpc>
-              <a:spcAft>
-                <a:spcPts val="900"/>
-              </a:spcAft>
-              <a:defRPr sz="2000" b="0">
-                <a:solidFill>
-                  <a:srgbClr val="222222"/>
-                </a:solidFill>
-                <a:latin typeface="Calibri"/>
-              </a:defRPr>
-            </a:pPr>
-            <a:r>
-              <a:rPr sz="2000" b="0">
-                <a:solidFill>
-                  <a:srgbClr val="222222"/>
-                </a:solidFill>
-                <a:latin typeface="Calibri"/>
-              </a:rPr>
-              <a:t>This is not a Pathfinder detail. Every unmanned vehicle has a failsafe, and what it should do when the link drops is a real engineering decision. A drone hovers, or returns home. A submersible surfaces. A ground vehicle stops.</a:t>
-            </a:r>
-          </a:p>
-          <a:p>
-            <a:pPr algn="l">
-              <a:lnSpc>
-                <a:spcPct val="100000"/>
-              </a:lnSpc>
-              <a:spcAft>
-                <a:spcPts val="900"/>
-              </a:spcAft>
-              <a:defRPr sz="2000" b="0">
-                <a:solidFill>
-                  <a:srgbClr val="222222"/>
-                </a:solidFill>
-                <a:latin typeface="Calibri"/>
-              </a:defRPr>
-            </a:pPr>
-          </a:p>
-          <a:p>
-            <a:pPr algn="l">
-              <a:lnSpc>
-                <a:spcPct val="100000"/>
-              </a:lnSpc>
-              <a:spcAft>
-                <a:spcPts val="900"/>
-              </a:spcAft>
-              <a:defRPr sz="2000" b="0">
-                <a:solidFill>
-                  <a:srgbClr val="222222"/>
-                </a:solidFill>
-                <a:latin typeface="Calibri"/>
-              </a:defRPr>
-            </a:pPr>
-            <a:r>
-              <a:rPr sz="2000" b="0">
-                <a:solidFill>
-                  <a:srgbClr val="222222"/>
-                </a:solidFill>
-                <a:latin typeface="Calibri"/>
-              </a:rPr>
-              <a:t>Ask yourself, on any system you build: what happens when the operator disappears?</a:t>
-            </a:r>
-          </a:p>
-        </p:txBody>
-      </p:sp>
-      <p:sp>
-        <p:nvSpPr>
-          <p:cNvPr id="8" name="Rounded Rectangle 7"/>
-          <p:cNvSpPr/>
-          <p:nvPr/>
-        </p:nvSpPr>
-        <p:spPr>
-          <a:xfrm>
-            <a:off x="502920" y="5303520"/>
-            <a:ext cx="11185855" cy="960120"/>
-          </a:xfrm>
-          <a:prstGeom prst="roundRect">
-            <a:avLst>
-              <a:gd name="adj" fmla="val 4000"/>
-            </a:avLst>
-          </a:prstGeom>
-          <a:solidFill>
-            <a:srgbClr val="FBECEC"/>
-          </a:solidFill>
-          <a:ln w="12700">
-            <a:solidFill>
-              <a:srgbClr val="A32A2A"/>
-            </a:solidFill>
-          </a:ln>
-          <a:effectLst/>
-        </p:spPr>
-        <p:style>
-          <a:lnRef idx="1">
-            <a:schemeClr val="accent1"/>
-          </a:lnRef>
-          <a:fillRef idx="3">
-            <a:schemeClr val="accent1"/>
-          </a:fillRef>
-          <a:effectRef idx="2">
-            <a:schemeClr val="accent1"/>
-          </a:effectRef>
-          <a:fontRef idx="minor">
-            <a:schemeClr val="lt1"/>
-          </a:fontRef>
-        </p:style>
-        <p:txBody>
-          <a:bodyPr rtlCol="0" anchor="ctr" wrap="square" lIns="164592" rIns="164592" tIns="73152" bIns="73152"/>
-          <a:lstStyle/>
-          <a:p>
-            <a:pPr algn="l"/>
-            <a:r>
-              <a:rPr sz="1300" b="1">
-                <a:solidFill>
-                  <a:srgbClr val="A32A2A"/>
-                </a:solidFill>
-                <a:latin typeface="Calibri"/>
-              </a:rPr>
-              <a:t>SAFETY   </a:t>
-            </a:r>
-            <a:r>
-              <a:rPr sz="1500">
-                <a:solidFill>
-                  <a:srgbClr val="222222"/>
-                </a:solidFill>
-                <a:latin typeface="Calibri"/>
-              </a:rPr>
-              <a:t>If you take one habit away from this course, take this one.</a:t>
-            </a:r>
-          </a:p>
-        </p:txBody>
-      </p:sp>
-    </p:spTree>
-  </p:cSld>
-  <p:clrMapOvr>
-    <a:masterClrMapping/>
-  </p:clrMapOvr>
-</p:sld>
-</file>
-
-<file path=ppt/slides/slide25.xml><?xml version="1.0" encoding="utf-8"?>
-<p:sld xmlns:a="http://schemas.openxmlformats.org/drawingml/2006/main" xmlns:p="http://schemas.openxmlformats.org/presentationml/2006/main" xmlns:r="http://schemas.openxmlformats.org/officeDocument/2006/relationships">
-  <p:cSld>
-    <p:spTree>
-      <p:nvGrpSpPr>
-        <p:cNvPr id="1" name=""/>
-        <p:cNvGrpSpPr/>
-        <p:nvPr/>
-      </p:nvGrpSpPr>
-      <p:grpSpPr/>
-      <p:sp>
-        <p:nvSpPr>
-          <p:cNvPr id="2" name="Title 1"/>
-          <p:cNvSpPr>
-            <a:spLocks noGrp="1"/>
-          </p:cNvSpPr>
-          <p:nvPr>
-            <p:ph type="title"/>
-          </p:nvPr>
-        </p:nvSpPr>
-        <p:spPr>
-          <a:xfrm>
-            <a:off x="502920" y="274320"/>
-            <a:ext cx="11185855" cy="777240"/>
-          </a:xfrm>
-        </p:spPr>
-        <p:txBody>
-          <a:bodyPr wrap="square" anchor="b"/>
-          <a:lstStyle/>
-          <a:p>
-            <a:pPr algn="l">
-              <a:lnSpc>
-                <a:spcPct val="100000"/>
-              </a:lnSpc>
-              <a:spcAft>
-                <a:spcPts val="0"/>
-              </a:spcAft>
-              <a:defRPr sz="2800" b="1">
-                <a:solidFill>
-                  <a:srgbClr val="1F3A5F"/>
-                </a:solidFill>
-                <a:latin typeface="Calibri"/>
-              </a:defRPr>
-            </a:pPr>
-            <a:r>
-              <a:rPr sz="2800" b="1">
-                <a:solidFill>
-                  <a:srgbClr val="1F3A5F"/>
-                </a:solidFill>
-                <a:latin typeface="Calibri"/>
-              </a:rPr>
-              <a:t>When it will not connect</a:t>
-            </a:r>
-          </a:p>
-        </p:txBody>
-      </p:sp>
-      <p:sp>
-        <p:nvSpPr>
-          <p:cNvPr id="3" name="Rectangle 2"/>
-          <p:cNvSpPr/>
-          <p:nvPr/>
-        </p:nvSpPr>
-        <p:spPr>
-          <a:xfrm>
-            <a:off x="502920" y="1097280"/>
-            <a:ext cx="11185855" cy="19050"/>
-          </a:xfrm>
-          <a:prstGeom prst="rect">
-            <a:avLst/>
-          </a:prstGeom>
-          <a:solidFill>
-            <a:srgbClr val="C8D2DE"/>
-          </a:solidFill>
-          <a:ln>
-            <a:noFill/>
-          </a:ln>
-          <a:effectLst/>
-        </p:spPr>
-        <p:style>
-          <a:lnRef idx="1">
-            <a:schemeClr val="accent1"/>
-          </a:lnRef>
-          <a:fillRef idx="3">
-            <a:schemeClr val="accent1"/>
-          </a:fillRef>
-          <a:effectRef idx="2">
-            <a:schemeClr val="accent1"/>
-          </a:effectRef>
-          <a:fontRef idx="minor">
-            <a:schemeClr val="lt1"/>
-          </a:fontRef>
-        </p:style>
-        <p:txBody>
-          <a:bodyPr rtlCol="0" anchor="ctr"/>
-          <a:lstStyle/>
-          <a:p>
-            <a:pPr algn="ctr"/>
-          </a:p>
-        </p:txBody>
-      </p:sp>
-      <p:sp>
-        <p:nvSpPr>
-          <p:cNvPr id="4" name="TextBox 3"/>
-          <p:cNvSpPr txBox="1"/>
-          <p:nvPr/>
-        </p:nvSpPr>
-        <p:spPr>
-          <a:xfrm>
-            <a:off x="502920" y="6382512"/>
-            <a:ext cx="10545775" cy="274320"/>
-          </a:xfrm>
-          <a:prstGeom prst="rect">
-            <a:avLst/>
-          </a:prstGeom>
-          <a:noFill/>
-        </p:spPr>
-        <p:txBody>
-          <a:bodyPr wrap="square" lIns="0" tIns="0">
-            <a:spAutoFit/>
-          </a:bodyPr>
-          <a:lstStyle/>
-          <a:p>
-            <a:pPr algn="l">
-              <a:lnSpc>
-                <a:spcPct val="100000"/>
-              </a:lnSpc>
-              <a:spcAft>
-                <a:spcPts val="0"/>
-              </a:spcAft>
-              <a:defRPr sz="1000" b="0">
-                <a:solidFill>
-                  <a:srgbClr val="666666"/>
-                </a:solidFill>
-                <a:latin typeface="Calibri"/>
-              </a:defRPr>
-            </a:pPr>
-            <a:r>
-              <a:rPr sz="1000" b="0">
-                <a:solidFill>
-                  <a:srgbClr val="666666"/>
-                </a:solidFill>
-                <a:latin typeface="Calibri"/>
-              </a:rPr>
-              <a:t>Pathfinder Beginner - PS3  |  Lesson 3</a:t>
-            </a:r>
-          </a:p>
-        </p:txBody>
-      </p:sp>
-      <p:sp>
-        <p:nvSpPr>
-          <p:cNvPr id="5" name="TextBox 4"/>
-          <p:cNvSpPr txBox="1"/>
-          <p:nvPr/>
-        </p:nvSpPr>
-        <p:spPr>
-          <a:xfrm>
-            <a:off x="11231575" y="6382512"/>
-            <a:ext cx="457200" cy="274320"/>
-          </a:xfrm>
-          <a:prstGeom prst="rect">
-            <a:avLst/>
-          </a:prstGeom>
-          <a:noFill/>
-        </p:spPr>
-        <p:txBody>
-          <a:bodyPr wrap="square" lIns="0" tIns="0">
-            <a:spAutoFit/>
-          </a:bodyPr>
-          <a:lstStyle/>
-          <a:p>
-            <a:pPr algn="r">
-              <a:lnSpc>
-                <a:spcPct val="100000"/>
-              </a:lnSpc>
-              <a:spcAft>
-                <a:spcPts val="0"/>
-              </a:spcAft>
-              <a:defRPr sz="1000" b="0">
-                <a:solidFill>
-                  <a:srgbClr val="666666"/>
-                </a:solidFill>
-                <a:latin typeface="Calibri"/>
-              </a:defRPr>
-            </a:pPr>
-            <a:r>
-              <a:rPr sz="1000" b="0">
-                <a:solidFill>
-                  <a:srgbClr val="666666"/>
-                </a:solidFill>
-                <a:latin typeface="Calibri"/>
-              </a:rPr>
-              <a:t>24</a:t>
             </a:r>
           </a:p>
         </p:txBody>
@@ -18026,7 +17691,7 @@
 </p:sld>
 </file>
 
-<file path=ppt/slides/slide26.xml><?xml version="1.0" encoding="utf-8"?>
+<file path=ppt/slides/slide25.xml><?xml version="1.0" encoding="utf-8"?>
 <p:sld xmlns:a="http://schemas.openxmlformats.org/drawingml/2006/main" xmlns:p="http://schemas.openxmlformats.org/presentationml/2006/main" xmlns:r="http://schemas.openxmlformats.org/officeDocument/2006/relationships">
   <p:cSld>
     <p:spTree>
@@ -18217,7 +17882,7 @@
                 </a:solidFill>
                 <a:latin typeface="Calibri"/>
               </a:rPr>
-              <a:t>25</a:t>
+              <a:t>24</a:t>
             </a:r>
           </a:p>
         </p:txBody>
@@ -20177,7 +19842,7 @@
                 </a:solidFill>
                 <a:latin typeface="Calibri"/>
               </a:rPr>
-              <a:t>One vehicle, one controller  -  the PS3 way</a:t>
+              <a:t>One vehicle, one controller  -  read the sticker</a:t>
             </a:r>
           </a:p>
         </p:txBody>
@@ -20331,7 +19996,7 @@
         <p:spPr>
           <a:xfrm>
             <a:off x="502920" y="1188720"/>
-            <a:ext cx="11185855" cy="5074920"/>
+            <a:ext cx="11185855" cy="3986784"/>
           </a:xfrm>
           <a:prstGeom prst="rect">
             <a:avLst/>
@@ -20351,21 +20016,21 @@
               <a:spcAft>
                 <a:spcPts val="600"/>
               </a:spcAft>
-              <a:defRPr sz="2300" b="0">
-                <a:solidFill>
-                  <a:srgbClr val="222222"/>
-                </a:solidFill>
-                <a:latin typeface="Calibri"/>
-              </a:defRPr>
-            </a:pPr>
-            <a:r>
-              <a:rPr sz="2300" b="0">
-                <a:solidFill>
-                  <a:srgbClr val="222222"/>
-                </a:solidFill>
-                <a:latin typeface="Calibri"/>
-              </a:rPr>
-              <a:t>A PS3 controller has no discovery mode. It only ever talks to ONE address, and that address has to be written into the controller over a USB cable.</a:t>
+              <a:defRPr sz="1900" b="0">
+                <a:solidFill>
+                  <a:srgbClr val="222222"/>
+                </a:solidFill>
+                <a:latin typeface="Calibri"/>
+              </a:defRPr>
+            </a:pPr>
+            <a:r>
+              <a:rPr sz="1900" b="0">
+                <a:solidFill>
+                  <a:srgbClr val="222222"/>
+                </a:solidFill>
+                <a:latin typeface="Calibri"/>
+              </a:rPr>
+              <a:t>A PS3 controller has no discovery mode. It talks to ONE vehicle and no other, and that is decided before you get it - we program and label every pad and every vehicle before the lesson.</a:t>
             </a:r>
           </a:p>
           <a:p>
@@ -20376,7 +20041,7 @@
               <a:spcAft>
                 <a:spcPts val="600"/>
               </a:spcAft>
-              <a:defRPr sz="2300" b="0">
+              <a:defRPr sz="1900" b="0">
                 <a:solidFill>
                   <a:srgbClr val="222222"/>
                 </a:solidFill>
@@ -20392,62 +20057,71 @@
               <a:spcAft>
                 <a:spcPts val="600"/>
               </a:spcAft>
-              <a:defRPr sz="2300" b="0">
-                <a:solidFill>
-                  <a:srgbClr val="222222"/>
-                </a:solidFill>
-                <a:latin typeface="Calibri"/>
-              </a:defRPr>
-            </a:pPr>
-            <a:r>
-              <a:rPr sz="2300" b="0">
-                <a:solidFill>
-                  <a:srgbClr val="222222"/>
-                </a:solidFill>
-                <a:latin typeface="Calibri"/>
-              </a:rPr>
-              <a:t>So on this track, the CONTROLLER is told which Bluetooth address to talk to.</a:t>
-            </a:r>
-          </a:p>
-          <a:p>
-            <a:pPr algn="l">
+              <a:defRPr sz="1900" b="0">
+                <a:solidFill>
+                  <a:srgbClr val="222222"/>
+                </a:solidFill>
+                <a:latin typeface="Calibri"/>
+              </a:defRPr>
+            </a:pPr>
+            <a:r>
+              <a:rPr sz="1900" b="0">
+                <a:solidFill>
+                  <a:srgbClr val="222222"/>
+                </a:solidFill>
+                <a:latin typeface="Calibri"/>
+              </a:rPr>
+              <a:t>So all you have to do is match the stickers.</a:t>
+            </a:r>
+          </a:p>
+          <a:p>
+            <a:pPr lvl="1" algn="l">
               <a:lnSpc>
                 <a:spcPct val="100000"/>
               </a:lnSpc>
               <a:spcAft>
                 <a:spcPts val="600"/>
               </a:spcAft>
-              <a:defRPr sz="2300" b="0">
-                <a:solidFill>
-                  <a:srgbClr val="222222"/>
-                </a:solidFill>
-                <a:latin typeface="Calibri"/>
-              </a:defRPr>
-            </a:pPr>
-          </a:p>
-          <a:p>
-            <a:pPr algn="l">
+              <a:defRPr sz="1900" b="0">
+                <a:solidFill>
+                  <a:srgbClr val="222222"/>
+                </a:solidFill>
+                <a:latin typeface="Calibri"/>
+              </a:defRPr>
+            </a:pPr>
+            <a:r>
+              <a:rPr sz="1900" b="0">
+                <a:solidFill>
+                  <a:srgbClr val="222222"/>
+                </a:solidFill>
+                <a:latin typeface="Calibri"/>
+              </a:rPr>
+              <a:t>The sticker on the pad and the sticker on the vehicle carry the same number.</a:t>
+            </a:r>
+          </a:p>
+          <a:p>
+            <a:pPr lvl="1" algn="l">
               <a:lnSpc>
                 <a:spcPct val="100000"/>
               </a:lnSpc>
               <a:spcAft>
                 <a:spcPts val="600"/>
               </a:spcAft>
-              <a:defRPr sz="2300" b="0">
-                <a:solidFill>
-                  <a:srgbClr val="222222"/>
-                </a:solidFill>
-                <a:latin typeface="Calibri"/>
-              </a:defRPr>
-            </a:pPr>
-            <a:r>
-              <a:rPr sz="2300" b="0">
-                <a:solidFill>
-                  <a:srgbClr val="222222"/>
-                </a:solidFill>
-                <a:latin typeface="Calibri"/>
-              </a:rPr>
-              <a:t>The tool is SixaxisPairTool, on a Windows PC, over a USB cable.</a:t>
+              <a:defRPr sz="1900" b="0">
+                <a:solidFill>
+                  <a:srgbClr val="222222"/>
+                </a:solidFill>
+                <a:latin typeface="Calibri"/>
+              </a:defRPr>
+            </a:pPr>
+            <a:r>
+              <a:rPr sz="1900" b="0">
+                <a:solidFill>
+                  <a:srgbClr val="222222"/>
+                </a:solidFill>
+                <a:latin typeface="Calibri"/>
+              </a:rPr>
+              <a:t>Same number, they work together. Different numbers, nothing happens at all.</a:t>
             </a:r>
           </a:p>
           <a:p>
@@ -20458,96 +20132,128 @@
               <a:spcAft>
                 <a:spcPts val="600"/>
               </a:spcAft>
-              <a:defRPr sz="2300" b="0">
-                <a:solidFill>
-                  <a:srgbClr val="222222"/>
-                </a:solidFill>
-                <a:latin typeface="Calibri"/>
-              </a:defRPr>
-            </a:pPr>
-            <a:r>
-              <a:rPr sz="2300" b="0">
-                <a:solidFill>
-                  <a:srgbClr val="222222"/>
-                </a:solidFill>
-                <a:latin typeface="Calibri"/>
-              </a:rPr>
-              <a:t>1.  Plug the controller into a Windows PC with a USB cable.</a:t>
-            </a:r>
-          </a:p>
-          <a:p>
-            <a:pPr lvl="1" algn="l">
+              <a:defRPr sz="1900" b="0">
+                <a:solidFill>
+                  <a:srgbClr val="222222"/>
+                </a:solidFill>
+                <a:latin typeface="Calibri"/>
+              </a:defRPr>
+            </a:pPr>
+            <a:r>
+              <a:rPr sz="1900" b="0">
+                <a:solidFill>
+                  <a:srgbClr val="222222"/>
+                </a:solidFill>
+                <a:latin typeface="Calibri"/>
+              </a:rPr>
+              <a:t>If your pad will not connect, check the stickers before you check anything else.</a:t>
+            </a:r>
+          </a:p>
+          <a:p>
+            <a:pPr algn="l">
               <a:lnSpc>
                 <a:spcPct val="100000"/>
               </a:lnSpc>
               <a:spcAft>
                 <a:spcPts val="600"/>
               </a:spcAft>
-              <a:defRPr sz="2300" b="0">
-                <a:solidFill>
-                  <a:srgbClr val="222222"/>
-                </a:solidFill>
-                <a:latin typeface="Calibri"/>
-              </a:defRPr>
-            </a:pPr>
-            <a:r>
-              <a:rPr sz="2300" b="0">
-                <a:solidFill>
-                  <a:srgbClr val="222222"/>
-                </a:solidFill>
-                <a:latin typeface="Calibri"/>
-              </a:rPr>
-              <a:t>2.  Open SixaxisPairTool. It shows the current master address.</a:t>
-            </a:r>
-          </a:p>
-          <a:p>
-            <a:pPr lvl="1" algn="l">
+              <a:defRPr sz="1900" b="0">
+                <a:solidFill>
+                  <a:srgbClr val="222222"/>
+                </a:solidFill>
+                <a:latin typeface="Calibri"/>
+              </a:defRPr>
+            </a:pPr>
+          </a:p>
+          <a:p>
+            <a:pPr algn="l">
               <a:lnSpc>
                 <a:spcPct val="100000"/>
               </a:lnSpc>
               <a:spcAft>
                 <a:spcPts val="600"/>
               </a:spcAft>
-              <a:defRPr sz="2300" b="0">
-                <a:solidFill>
-                  <a:srgbClr val="222222"/>
-                </a:solidFill>
-                <a:latin typeface="Calibri"/>
-              </a:defRPr>
-            </a:pPr>
-            <a:r>
-              <a:rPr sz="2300" b="0">
-                <a:solidFill>
-                  <a:srgbClr val="222222"/>
-                </a:solidFill>
-                <a:latin typeface="Calibri"/>
-              </a:rPr>
-              <a:t>3.  Type in the address you want and click Update.</a:t>
-            </a:r>
-          </a:p>
-          <a:p>
-            <a:pPr lvl="1" algn="l">
-              <a:lnSpc>
-                <a:spcPct val="100000"/>
-              </a:lnSpc>
-              <a:spcAft>
-                <a:spcPts val="600"/>
-              </a:spcAft>
-              <a:defRPr sz="2300" b="0">
-                <a:solidFill>
-                  <a:srgbClr val="222222"/>
-                </a:solidFill>
-                <a:latin typeface="Calibri"/>
-              </a:defRPr>
-            </a:pPr>
-            <a:r>
-              <a:rPr sz="2300" b="0">
-                <a:solidFill>
-                  <a:srgbClr val="222222"/>
-                </a:solidFill>
-                <a:latin typeface="Calibri"/>
-              </a:rPr>
-              <a:t>4.  Put that same address into PS3_MAC_ADDRESS in the sketch.</a:t>
+              <a:defRPr sz="1900" b="0">
+                <a:solidFill>
+                  <a:srgbClr val="222222"/>
+                </a:solidFill>
+                <a:latin typeface="Calibri"/>
+              </a:defRPr>
+            </a:pPr>
+            <a:r>
+              <a:rPr sz="1900" b="0">
+                <a:solidFill>
+                  <a:srgbClr val="222222"/>
+                </a:solidFill>
+                <a:latin typeface="Calibri"/>
+              </a:rPr>
+              <a:t>The number is really a Bluetooth address written into both the pad and the sketch. You do not have to set it, but it is worth knowing that is what the sticker stands for.</a:t>
+            </a:r>
+          </a:p>
+        </p:txBody>
+      </p:sp>
+      <p:sp>
+        <p:nvSpPr>
+          <p:cNvPr id="7" name="Rounded Rectangle 6"/>
+          <p:cNvSpPr/>
+          <p:nvPr/>
+        </p:nvSpPr>
+        <p:spPr>
+          <a:xfrm>
+            <a:off x="502920" y="5303520"/>
+            <a:ext cx="11185855" cy="960120"/>
+          </a:xfrm>
+          <a:prstGeom prst="roundRect">
+            <a:avLst>
+              <a:gd name="adj" fmla="val 4000"/>
+            </a:avLst>
+          </a:prstGeom>
+          <a:solidFill>
+            <a:srgbClr val="FDF3E3"/>
+          </a:solidFill>
+          <a:ln w="12700">
+            <a:solidFill>
+              <a:srgbClr val="B46A0F"/>
+            </a:solidFill>
+          </a:ln>
+          <a:effectLst/>
+        </p:spPr>
+        <p:style>
+          <a:lnRef idx="1">
+            <a:schemeClr val="accent1"/>
+          </a:lnRef>
+          <a:fillRef idx="3">
+            <a:schemeClr val="accent1"/>
+          </a:fillRef>
+          <a:effectRef idx="2">
+            <a:schemeClr val="accent1"/>
+          </a:effectRef>
+          <a:fontRef idx="minor">
+            <a:schemeClr val="lt1"/>
+          </a:fontRef>
+        </p:style>
+        <p:txBody>
+          <a:bodyPr rtlCol="0" anchor="ctr" wrap="square" lIns="164592" rIns="164592" tIns="73152" bIns="73152"/>
+          <a:lstStyle/>
+          <a:p>
+            <a:pPr algn="l"/>
+            <a:r>
+              <a:rPr sz="1300" b="1">
+                <a:solidFill>
+                  <a:srgbClr val="B46A0F"/>
+                </a:solidFill>
+                <a:latin typeface="Calibri"/>
+              </a:rPr>
+              <a:t>WATCH OUT   </a:t>
+            </a:r>
+            <a:r>
+              <a:rPr sz="1500">
+                <a:solidFill>
+                  <a:srgbClr val="222222"/>
+                </a:solidFill>
+                <a:latin typeface="Calibri"/>
+              </a:rPr>
+              <a:t>Do not swap pads between vehicles. A pad only ever drives the vehicle with the same number on it.</a:t>
             </a:r>
           </a:p>
         </p:txBody>
@@ -20611,7 +20317,7 @@
                 </a:solidFill>
                 <a:latin typeface="Calibri"/>
               </a:rPr>
-              <a:t>One vehicle, one controller  -  the PS3 way  (continued)</a:t>
+              <a:t>The PS3 controller  -  every name you will need</a:t>
             </a:r>
           </a:p>
         </p:txBody>
@@ -20756,177 +20462,30 @@
           </a:p>
         </p:txBody>
       </p:sp>
-      <p:sp>
-        <p:nvSpPr>
-          <p:cNvPr id="6" name="TextBox 5"/>
-          <p:cNvSpPr txBox="1"/>
+      <p:pic>
+        <p:nvPicPr>
+          <p:cNvPr id="6" name="Picture 5" descr="ps3-button-map.png"/>
+          <p:cNvPicPr>
+            <a:picLocks noChangeAspect="1"/>
+          </p:cNvPicPr>
           <p:nvPr/>
-        </p:nvSpPr>
-        <p:spPr>
-          <a:xfrm>
-            <a:off x="502920" y="1188720"/>
-            <a:ext cx="11185855" cy="3986784"/>
+        </p:nvPicPr>
+        <p:blipFill>
+          <a:blip r:embed="rId2"/>
+          <a:stretch>
+            <a:fillRect/>
+          </a:stretch>
+        </p:blipFill>
+        <p:spPr>
+          <a:xfrm>
+            <a:off x="2274049" y="1188720"/>
+            <a:ext cx="7643596" cy="5074920"/>
           </a:xfrm>
           <a:prstGeom prst="rect">
             <a:avLst/>
           </a:prstGeom>
-          <a:noFill/>
-        </p:spPr>
-        <p:txBody>
-          <a:bodyPr wrap="square" lIns="0" tIns="0" rIns="0" bIns="0">
-            <a:spAutoFit/>
-          </a:bodyPr>
-          <a:lstStyle/>
-          <a:p>
-            <a:pPr algn="l">
-              <a:lnSpc>
-                <a:spcPct val="100000"/>
-              </a:lnSpc>
-              <a:spcAft>
-                <a:spcPts val="900"/>
-              </a:spcAft>
-              <a:defRPr sz="2900" b="0">
-                <a:solidFill>
-                  <a:srgbClr val="222222"/>
-                </a:solidFill>
-                <a:latin typeface="Calibri"/>
-              </a:defRPr>
-            </a:pPr>
-          </a:p>
-          <a:p>
-            <a:pPr algn="l">
-              <a:lnSpc>
-                <a:spcPct val="100000"/>
-              </a:lnSpc>
-              <a:spcAft>
-                <a:spcPts val="900"/>
-              </a:spcAft>
-              <a:defRPr sz="2900" b="0">
-                <a:solidFill>
-                  <a:srgbClr val="222222"/>
-                </a:solidFill>
-                <a:latin typeface="Calibri"/>
-              </a:defRPr>
-            </a:pPr>
-            <a:r>
-              <a:rPr sz="2900" b="0">
-                <a:solidFill>
-                  <a:srgbClr val="222222"/>
-                </a:solidFill>
-                <a:latin typeface="Calibri"/>
-              </a:rPr>
-              <a:t>Give every vehicle in the room a different one. If two vehicles share an address, one controller drives both of them.</a:t>
-            </a:r>
-          </a:p>
-          <a:p>
-            <a:pPr algn="l">
-              <a:lnSpc>
-                <a:spcPct val="100000"/>
-              </a:lnSpc>
-              <a:spcAft>
-                <a:spcPts val="900"/>
-              </a:spcAft>
-              <a:defRPr sz="2900" b="0">
-                <a:solidFill>
-                  <a:srgbClr val="222222"/>
-                </a:solidFill>
-                <a:latin typeface="Calibri"/>
-              </a:defRPr>
-            </a:pPr>
-          </a:p>
-          <a:p>
-            <a:pPr algn="l">
-              <a:lnSpc>
-                <a:spcPct val="100000"/>
-              </a:lnSpc>
-              <a:spcAft>
-                <a:spcPts val="900"/>
-              </a:spcAft>
-              <a:defRPr sz="2900" b="0">
-                <a:solidFill>
-                  <a:srgbClr val="222222"/>
-                </a:solidFill>
-                <a:latin typeface="Calibri"/>
-              </a:defRPr>
-            </a:pPr>
-            <a:r>
-              <a:rPr sz="2900" b="0">
-                <a:solidFill>
-                  <a:srgbClr val="222222"/>
-                </a:solidFill>
-                <a:latin typeface="Calibri"/>
-              </a:rPr>
-              <a:t>Suggested scheme:  02:02:03:04:05:NN, where NN is the vehicle number. Write it on a sticker on the vehicle AND the controller.</a:t>
-            </a:r>
-          </a:p>
-        </p:txBody>
-      </p:sp>
-      <p:sp>
-        <p:nvSpPr>
-          <p:cNvPr id="7" name="Rounded Rectangle 6"/>
-          <p:cNvSpPr/>
-          <p:nvPr/>
-        </p:nvSpPr>
-        <p:spPr>
-          <a:xfrm>
-            <a:off x="502920" y="5303520"/>
-            <a:ext cx="11185855" cy="960120"/>
-          </a:xfrm>
-          <a:prstGeom prst="roundRect">
-            <a:avLst>
-              <a:gd name="adj" fmla="val 4000"/>
-            </a:avLst>
-          </a:prstGeom>
-          <a:solidFill>
-            <a:srgbClr val="FDF3E3"/>
-          </a:solidFill>
-          <a:ln w="12700">
-            <a:solidFill>
-              <a:srgbClr val="B46A0F"/>
-            </a:solidFill>
-          </a:ln>
-          <a:effectLst/>
-        </p:spPr>
-        <p:style>
-          <a:lnRef idx="1">
-            <a:schemeClr val="accent1"/>
-          </a:lnRef>
-          <a:fillRef idx="3">
-            <a:schemeClr val="accent1"/>
-          </a:fillRef>
-          <a:effectRef idx="2">
-            <a:schemeClr val="accent1"/>
-          </a:effectRef>
-          <a:fontRef idx="minor">
-            <a:schemeClr val="lt1"/>
-          </a:fontRef>
-        </p:style>
-        <p:txBody>
-          <a:bodyPr rtlCol="0" anchor="ctr" wrap="square" lIns="164592" rIns="164592" tIns="73152" bIns="73152"/>
-          <a:lstStyle/>
-          <a:p>
-            <a:pPr algn="l"/>
-            <a:r>
-              <a:rPr sz="1300" b="1">
-                <a:solidFill>
-                  <a:srgbClr val="B46A0F"/>
-                </a:solidFill>
-                <a:latin typeface="Calibri"/>
-              </a:rPr>
-              <a:t>WATCH OUT   </a:t>
-            </a:r>
-            <a:r>
-              <a:rPr sz="1500">
-                <a:solidFill>
-                  <a:srgbClr val="222222"/>
-                </a:solidFill>
-                <a:latin typeface="Calibri"/>
-              </a:rPr>
-              <a:t>The first pair of digits must be an EVEN number. An odd one silently fails to connect, which is a very confusing way to spend an afternoon.</a:t>
-            </a:r>
-          </a:p>
-        </p:txBody>
-      </p:sp>
+        </p:spPr>
+      </p:pic>
     </p:spTree>
   </p:cSld>
   <p:clrMapOvr>
@@ -20986,7 +20545,7 @@
                 </a:solidFill>
                 <a:latin typeface="Calibri"/>
               </a:rPr>
-              <a:t>The PS3 controller</a:t>
+              <a:t>How the ESP32 controls the motors</a:t>
             </a:r>
           </a:p>
         </p:txBody>
@@ -21139,8 +20698,8 @@
         </p:nvSpPr>
         <p:spPr>
           <a:xfrm>
-            <a:off x="502920" y="1188720"/>
-            <a:ext cx="11185855" cy="1005840"/>
+            <a:off x="502920" y="1261872"/>
+            <a:ext cx="3017520" cy="367792"/>
           </a:xfrm>
           <a:prstGeom prst="rect">
             <a:avLst/>
@@ -21153,66 +20712,42 @@
           </a:bodyPr>
           <a:lstStyle/>
           <a:p>
-            <a:pPr algn="l">
-              <a:lnSpc>
-                <a:spcPct val="100000"/>
-              </a:lnSpc>
-              <a:spcAft>
-                <a:spcPts val="200"/>
-              </a:spcAft>
-              <a:defRPr sz="1800" b="0">
-                <a:solidFill>
-                  <a:srgbClr val="222222"/>
-                </a:solidFill>
-                <a:latin typeface="Calibri"/>
-              </a:defRPr>
-            </a:pPr>
-            <a:r>
-              <a:rPr sz="1800" b="0">
-                <a:solidFill>
-                  <a:srgbClr val="222222"/>
-                </a:solidFill>
-                <a:latin typeface="Calibri"/>
-              </a:rPr>
-              <a:t>Every one of those has a name in the program. Today you will press all of them and see what each is called.</a:t>
-            </a:r>
-          </a:p>
-        </p:txBody>
-      </p:sp>
-      <p:pic>
-        <p:nvPicPr>
-          <p:cNvPr id="7" name="Picture 6" descr="ps3-button-map.png"/>
-          <p:cNvPicPr>
-            <a:picLocks noChangeAspect="1"/>
-          </p:cNvPicPr>
-          <p:nvPr/>
-        </p:nvPicPr>
-        <p:blipFill>
-          <a:blip r:embed="rId2"/>
-          <a:stretch>
-            <a:fillRect/>
-          </a:stretch>
-        </p:blipFill>
-        <p:spPr>
-          <a:xfrm>
-            <a:off x="3637502" y="2267712"/>
-            <a:ext cx="4916691" cy="3264408"/>
-          </a:xfrm>
-          <a:prstGeom prst="rect">
-            <a:avLst/>
-          </a:prstGeom>
-        </p:spPr>
-      </p:pic>
-      <p:sp>
-        <p:nvSpPr>
-          <p:cNvPr id="8" name="TextBox 7"/>
+            <a:pPr algn="ctr">
+              <a:lnSpc>
+                <a:spcPct val="100000"/>
+              </a:lnSpc>
+              <a:spcAft>
+                <a:spcPts val="0"/>
+              </a:spcAft>
+              <a:defRPr sz="1800" b="1">
+                <a:solidFill>
+                  <a:srgbClr val="0E7C86"/>
+                </a:solidFill>
+                <a:latin typeface="Calibri"/>
+              </a:defRPr>
+            </a:pPr>
+            <a:r>
+              <a:rPr sz="1800" b="1">
+                <a:solidFill>
+                  <a:srgbClr val="0E7C86"/>
+                </a:solidFill>
+                <a:latin typeface="Calibri"/>
+              </a:rPr>
+              <a:t>YOUR PROGRAM</a:t>
+            </a:r>
+          </a:p>
+        </p:txBody>
+      </p:sp>
+      <p:sp>
+        <p:nvSpPr>
+          <p:cNvPr id="7" name="TextBox 6"/>
           <p:cNvSpPr txBox="1"/>
           <p:nvPr/>
         </p:nvSpPr>
         <p:spPr>
           <a:xfrm>
-            <a:off x="502920" y="5586984"/>
-            <a:ext cx="11185855" cy="676656"/>
+            <a:off x="4343400" y="1261872"/>
+            <a:ext cx="2834640" cy="367792"/>
           </a:xfrm>
           <a:prstGeom prst="rect">
             <a:avLst/>
@@ -21230,9 +20765,57 @@
                 <a:spcPct val="100000"/>
               </a:lnSpc>
               <a:spcAft>
-                <a:spcPts val="200"/>
-              </a:spcAft>
-              <a:defRPr sz="1800" b="0">
+                <a:spcPts val="0"/>
+              </a:spcAft>
+              <a:defRPr sz="1800" b="1">
+                <a:solidFill>
+                  <a:srgbClr val="B46A0F"/>
+                </a:solidFill>
+                <a:latin typeface="Calibri"/>
+              </a:defRPr>
+            </a:pPr>
+            <a:r>
+              <a:rPr sz="1800" b="1">
+                <a:solidFill>
+                  <a:srgbClr val="B46A0F"/>
+                </a:solidFill>
+                <a:latin typeface="Calibri"/>
+              </a:rPr>
+              <a:t>H-BRIDGE DRIVER</a:t>
+            </a:r>
+          </a:p>
+        </p:txBody>
+      </p:sp>
+      <p:sp>
+        <p:nvSpPr>
+          <p:cNvPr id="8" name="TextBox 7"/>
+          <p:cNvSpPr txBox="1"/>
+          <p:nvPr/>
+        </p:nvSpPr>
+        <p:spPr>
+          <a:xfrm>
+            <a:off x="8000999" y="1261872"/>
+            <a:ext cx="3685032" cy="367792"/>
+          </a:xfrm>
+          <a:prstGeom prst="rect">
+            <a:avLst/>
+          </a:prstGeom>
+          <a:noFill/>
+        </p:spPr>
+        <p:txBody>
+          <a:bodyPr wrap="square" lIns="0" tIns="0" rIns="0" bIns="0">
+            <a:spAutoFit/>
+          </a:bodyPr>
+          <a:lstStyle/>
+          <a:p>
+            <a:pPr algn="ctr">
+              <a:lnSpc>
+                <a:spcPct val="100000"/>
+              </a:lnSpc>
+              <a:spcAft>
+                <a:spcPts val="0"/>
+              </a:spcAft>
+              <a:defRPr sz="1800" b="1">
                 <a:solidFill>
                   <a:srgbClr val="666666"/>
                 </a:solidFill>
@@ -21240,13 +20823,1215 @@
               </a:defRPr>
             </a:pPr>
             <a:r>
-              <a:rPr sz="1800" b="0">
+              <a:rPr sz="1800" b="1">
                 <a:solidFill>
                   <a:srgbClr val="666666"/>
                 </a:solidFill>
                 <a:latin typeface="Calibri"/>
               </a:rPr>
-              <a:t>Two analog sticks, a D-pad, four face buttons, four shoulder buttons and triggers, and three in the middle</a:t>
+              <a:t>MOTOR</a:t>
+            </a:r>
+          </a:p>
+        </p:txBody>
+      </p:sp>
+      <p:sp>
+        <p:nvSpPr>
+          <p:cNvPr id="9" name="Rounded Rectangle 8"/>
+          <p:cNvSpPr/>
+          <p:nvPr/>
+        </p:nvSpPr>
+        <p:spPr>
+          <a:xfrm>
+            <a:off x="502920" y="1828800"/>
+            <a:ext cx="3017520" cy="576072"/>
+          </a:xfrm>
+          <a:prstGeom prst="roundRect">
+            <a:avLst>
+              <a:gd name="adj" fmla="val 12000"/>
+            </a:avLst>
+          </a:prstGeom>
+          <a:solidFill>
+            <a:srgbClr val="D6ECEE"/>
+          </a:solidFill>
+          <a:ln w="15875">
+            <a:solidFill>
+              <a:srgbClr val="0E7C86"/>
+            </a:solidFill>
+          </a:ln>
+          <a:effectLst/>
+        </p:spPr>
+        <p:style>
+          <a:lnRef idx="1">
+            <a:schemeClr val="accent1"/>
+          </a:lnRef>
+          <a:fillRef idx="3">
+            <a:schemeClr val="accent1"/>
+          </a:fillRef>
+          <a:effectRef idx="2">
+            <a:schemeClr val="accent1"/>
+          </a:effectRef>
+          <a:fontRef idx="minor">
+            <a:schemeClr val="lt1"/>
+          </a:fontRef>
+        </p:style>
+        <p:txBody>
+          <a:bodyPr rtlCol="0" anchor="ctr" wrap="square" lIns="45720" rIns="45720" tIns="18288" bIns="18288"/>
+          <a:lstStyle/>
+          <a:p>
+            <a:pPr algn="ctr">
+              <a:lnSpc>
+                <a:spcPct val="100000"/>
+              </a:lnSpc>
+              <a:spcAft>
+                <a:spcPts val="0"/>
+              </a:spcAft>
+              <a:defRPr sz="1800" b="1">
+                <a:solidFill>
+                  <a:srgbClr val="1F3A5F"/>
+                </a:solidFill>
+                <a:latin typeface="Calibri"/>
+              </a:defRPr>
+            </a:pPr>
+            <a:r>
+              <a:rPr sz="1800" b="1">
+                <a:solidFill>
+                  <a:srgbClr val="1F3A5F"/>
+                </a:solidFill>
+                <a:latin typeface="Calibri"/>
+              </a:rPr>
+              <a:t>ledcWrite  -&gt;  GPIO 12 / 13</a:t>
+            </a:r>
+          </a:p>
+        </p:txBody>
+      </p:sp>
+      <p:cxnSp>
+        <p:nvCxnSpPr>
+          <p:cNvPr id="10" name="Connector 9"/>
+          <p:cNvCxnSpPr/>
+          <p:nvPr/>
+        </p:nvCxnSpPr>
+        <p:spPr>
+          <a:xfrm>
+            <a:off x="3611880" y="2116836"/>
+            <a:ext cx="640080" cy="0"/>
+          </a:xfrm>
+          <a:prstGeom prst="line">
+            <a:avLst/>
+          </a:prstGeom>
+          <a:ln w="22225">
+            <a:solidFill>
+              <a:srgbClr val="1F3A5F"/>
+            </a:solidFill>
+            <a:headEnd/>
+            <a:tailEnd type="triangle" w="med" len="med"/>
+          </a:ln>
+        </p:spPr>
+        <p:style>
+          <a:lnRef idx="2">
+            <a:schemeClr val="accent1"/>
+          </a:lnRef>
+          <a:fillRef idx="0">
+            <a:schemeClr val="accent1"/>
+          </a:fillRef>
+          <a:effectRef idx="1">
+            <a:schemeClr val="accent1"/>
+          </a:effectRef>
+          <a:fontRef idx="minor">
+            <a:schemeClr val="tx1"/>
+          </a:fontRef>
+        </p:style>
+      </p:cxnSp>
+      <p:sp>
+        <p:nvSpPr>
+          <p:cNvPr id="11" name="Rounded Rectangle 10"/>
+          <p:cNvSpPr/>
+          <p:nvPr/>
+        </p:nvSpPr>
+        <p:spPr>
+          <a:xfrm>
+            <a:off x="4343400" y="1828800"/>
+            <a:ext cx="2834640" cy="576072"/>
+          </a:xfrm>
+          <a:prstGeom prst="roundRect">
+            <a:avLst>
+              <a:gd name="adj" fmla="val 12000"/>
+            </a:avLst>
+          </a:prstGeom>
+          <a:solidFill>
+            <a:srgbClr val="FAE6C8"/>
+          </a:solidFill>
+          <a:ln w="15875">
+            <a:solidFill>
+              <a:srgbClr val="B46A0F"/>
+            </a:solidFill>
+          </a:ln>
+          <a:effectLst/>
+        </p:spPr>
+        <p:style>
+          <a:lnRef idx="1">
+            <a:schemeClr val="accent1"/>
+          </a:lnRef>
+          <a:fillRef idx="3">
+            <a:schemeClr val="accent1"/>
+          </a:fillRef>
+          <a:effectRef idx="2">
+            <a:schemeClr val="accent1"/>
+          </a:effectRef>
+          <a:fontRef idx="minor">
+            <a:schemeClr val="lt1"/>
+          </a:fontRef>
+        </p:style>
+        <p:txBody>
+          <a:bodyPr rtlCol="0" anchor="ctr" wrap="square" lIns="45720" rIns="45720" tIns="18288" bIns="18288"/>
+          <a:lstStyle/>
+          <a:p>
+            <a:pPr algn="ctr">
+              <a:lnSpc>
+                <a:spcPct val="100000"/>
+              </a:lnSpc>
+              <a:spcAft>
+                <a:spcPts val="0"/>
+              </a:spcAft>
+              <a:defRPr sz="1800" b="1">
+                <a:solidFill>
+                  <a:srgbClr val="1F3A5F"/>
+                </a:solidFill>
+                <a:latin typeface="Calibri"/>
+              </a:defRPr>
+            </a:pPr>
+            <a:r>
+              <a:rPr sz="1800" b="1">
+                <a:solidFill>
+                  <a:srgbClr val="1F3A5F"/>
+                </a:solidFill>
+                <a:latin typeface="Calibri"/>
+              </a:rPr>
+              <a:t>DRV8871</a:t>
+            </a:r>
+          </a:p>
+        </p:txBody>
+      </p:sp>
+      <p:cxnSp>
+        <p:nvCxnSpPr>
+          <p:cNvPr id="12" name="Connector 11"/>
+          <p:cNvCxnSpPr/>
+          <p:nvPr/>
+        </p:nvCxnSpPr>
+        <p:spPr>
+          <a:xfrm>
+            <a:off x="7269480" y="2116836"/>
+            <a:ext cx="640079" cy="0"/>
+          </a:xfrm>
+          <a:prstGeom prst="line">
+            <a:avLst/>
+          </a:prstGeom>
+          <a:ln w="22225">
+            <a:solidFill>
+              <a:srgbClr val="B46A0F"/>
+            </a:solidFill>
+            <a:headEnd/>
+            <a:tailEnd type="triangle" w="med" len="med"/>
+          </a:ln>
+        </p:spPr>
+        <p:style>
+          <a:lnRef idx="2">
+            <a:schemeClr val="accent1"/>
+          </a:lnRef>
+          <a:fillRef idx="0">
+            <a:schemeClr val="accent1"/>
+          </a:fillRef>
+          <a:effectRef idx="1">
+            <a:schemeClr val="accent1"/>
+          </a:effectRef>
+          <a:fontRef idx="minor">
+            <a:schemeClr val="tx1"/>
+          </a:fontRef>
+        </p:style>
+      </p:cxnSp>
+      <p:sp>
+        <p:nvSpPr>
+          <p:cNvPr id="13" name="Rounded Rectangle 12"/>
+          <p:cNvSpPr/>
+          <p:nvPr/>
+        </p:nvSpPr>
+        <p:spPr>
+          <a:xfrm>
+            <a:off x="8000999" y="1828800"/>
+            <a:ext cx="3685032" cy="576072"/>
+          </a:xfrm>
+          <a:prstGeom prst="roundRect">
+            <a:avLst>
+              <a:gd name="adj" fmla="val 12000"/>
+            </a:avLst>
+          </a:prstGeom>
+          <a:solidFill>
+            <a:srgbClr val="E8ECF0"/>
+          </a:solidFill>
+          <a:ln w="15875">
+            <a:solidFill>
+              <a:srgbClr val="666666"/>
+            </a:solidFill>
+          </a:ln>
+          <a:effectLst/>
+        </p:spPr>
+        <p:style>
+          <a:lnRef idx="1">
+            <a:schemeClr val="accent1"/>
+          </a:lnRef>
+          <a:fillRef idx="3">
+            <a:schemeClr val="accent1"/>
+          </a:fillRef>
+          <a:effectRef idx="2">
+            <a:schemeClr val="accent1"/>
+          </a:effectRef>
+          <a:fontRef idx="minor">
+            <a:schemeClr val="lt1"/>
+          </a:fontRef>
+        </p:style>
+        <p:txBody>
+          <a:bodyPr rtlCol="0" anchor="ctr" wrap="square" lIns="45720" rIns="45720" tIns="18288" bIns="18288"/>
+          <a:lstStyle/>
+          <a:p>
+            <a:pPr algn="ctr">
+              <a:lnSpc>
+                <a:spcPct val="100000"/>
+              </a:lnSpc>
+              <a:spcAft>
+                <a:spcPts val="0"/>
+              </a:spcAft>
+              <a:defRPr sz="1800" b="1">
+                <a:solidFill>
+                  <a:srgbClr val="1F3A5F"/>
+                </a:solidFill>
+                <a:latin typeface="Calibri"/>
+              </a:defRPr>
+            </a:pPr>
+            <a:r>
+              <a:rPr sz="1800" b="1">
+                <a:solidFill>
+                  <a:srgbClr val="1F3A5F"/>
+                </a:solidFill>
+                <a:latin typeface="Calibri"/>
+              </a:rPr>
+              <a:t>Front left wheel</a:t>
+            </a:r>
+          </a:p>
+        </p:txBody>
+      </p:sp>
+      <p:sp>
+        <p:nvSpPr>
+          <p:cNvPr id="14" name="Rounded Rectangle 13"/>
+          <p:cNvSpPr/>
+          <p:nvPr/>
+        </p:nvSpPr>
+        <p:spPr>
+          <a:xfrm>
+            <a:off x="502920" y="2628900"/>
+            <a:ext cx="3017520" cy="576072"/>
+          </a:xfrm>
+          <a:prstGeom prst="roundRect">
+            <a:avLst>
+              <a:gd name="adj" fmla="val 12000"/>
+            </a:avLst>
+          </a:prstGeom>
+          <a:solidFill>
+            <a:srgbClr val="D6ECEE"/>
+          </a:solidFill>
+          <a:ln w="15875">
+            <a:solidFill>
+              <a:srgbClr val="0E7C86"/>
+            </a:solidFill>
+          </a:ln>
+          <a:effectLst/>
+        </p:spPr>
+        <p:style>
+          <a:lnRef idx="1">
+            <a:schemeClr val="accent1"/>
+          </a:lnRef>
+          <a:fillRef idx="3">
+            <a:schemeClr val="accent1"/>
+          </a:fillRef>
+          <a:effectRef idx="2">
+            <a:schemeClr val="accent1"/>
+          </a:effectRef>
+          <a:fontRef idx="minor">
+            <a:schemeClr val="lt1"/>
+          </a:fontRef>
+        </p:style>
+        <p:txBody>
+          <a:bodyPr rtlCol="0" anchor="ctr" wrap="square" lIns="45720" rIns="45720" tIns="18288" bIns="18288"/>
+          <a:lstStyle/>
+          <a:p>
+            <a:pPr algn="ctr">
+              <a:lnSpc>
+                <a:spcPct val="100000"/>
+              </a:lnSpc>
+              <a:spcAft>
+                <a:spcPts val="0"/>
+              </a:spcAft>
+              <a:defRPr sz="1800" b="1">
+                <a:solidFill>
+                  <a:srgbClr val="1F3A5F"/>
+                </a:solidFill>
+                <a:latin typeface="Calibri"/>
+              </a:defRPr>
+            </a:pPr>
+            <a:r>
+              <a:rPr sz="1800" b="1">
+                <a:solidFill>
+                  <a:srgbClr val="1F3A5F"/>
+                </a:solidFill>
+                <a:latin typeface="Calibri"/>
+              </a:rPr>
+              <a:t>ledcWrite  -&gt;  GPIO 18 / 19</a:t>
+            </a:r>
+          </a:p>
+        </p:txBody>
+      </p:sp>
+      <p:cxnSp>
+        <p:nvCxnSpPr>
+          <p:cNvPr id="15" name="Connector 14"/>
+          <p:cNvCxnSpPr/>
+          <p:nvPr/>
+        </p:nvCxnSpPr>
+        <p:spPr>
+          <a:xfrm>
+            <a:off x="3611880" y="2916936"/>
+            <a:ext cx="640080" cy="0"/>
+          </a:xfrm>
+          <a:prstGeom prst="line">
+            <a:avLst/>
+          </a:prstGeom>
+          <a:ln w="22225">
+            <a:solidFill>
+              <a:srgbClr val="1F3A5F"/>
+            </a:solidFill>
+            <a:headEnd/>
+            <a:tailEnd type="triangle" w="med" len="med"/>
+          </a:ln>
+        </p:spPr>
+        <p:style>
+          <a:lnRef idx="2">
+            <a:schemeClr val="accent1"/>
+          </a:lnRef>
+          <a:fillRef idx="0">
+            <a:schemeClr val="accent1"/>
+          </a:fillRef>
+          <a:effectRef idx="1">
+            <a:schemeClr val="accent1"/>
+          </a:effectRef>
+          <a:fontRef idx="minor">
+            <a:schemeClr val="tx1"/>
+          </a:fontRef>
+        </p:style>
+      </p:cxnSp>
+      <p:sp>
+        <p:nvSpPr>
+          <p:cNvPr id="16" name="Rounded Rectangle 15"/>
+          <p:cNvSpPr/>
+          <p:nvPr/>
+        </p:nvSpPr>
+        <p:spPr>
+          <a:xfrm>
+            <a:off x="4343400" y="2628900"/>
+            <a:ext cx="2834640" cy="576072"/>
+          </a:xfrm>
+          <a:prstGeom prst="roundRect">
+            <a:avLst>
+              <a:gd name="adj" fmla="val 12000"/>
+            </a:avLst>
+          </a:prstGeom>
+          <a:solidFill>
+            <a:srgbClr val="FAE6C8"/>
+          </a:solidFill>
+          <a:ln w="15875">
+            <a:solidFill>
+              <a:srgbClr val="B46A0F"/>
+            </a:solidFill>
+          </a:ln>
+          <a:effectLst/>
+        </p:spPr>
+        <p:style>
+          <a:lnRef idx="1">
+            <a:schemeClr val="accent1"/>
+          </a:lnRef>
+          <a:fillRef idx="3">
+            <a:schemeClr val="accent1"/>
+          </a:fillRef>
+          <a:effectRef idx="2">
+            <a:schemeClr val="accent1"/>
+          </a:effectRef>
+          <a:fontRef idx="minor">
+            <a:schemeClr val="lt1"/>
+          </a:fontRef>
+        </p:style>
+        <p:txBody>
+          <a:bodyPr rtlCol="0" anchor="ctr" wrap="square" lIns="45720" rIns="45720" tIns="18288" bIns="18288"/>
+          <a:lstStyle/>
+          <a:p>
+            <a:pPr algn="ctr">
+              <a:lnSpc>
+                <a:spcPct val="100000"/>
+              </a:lnSpc>
+              <a:spcAft>
+                <a:spcPts val="0"/>
+              </a:spcAft>
+              <a:defRPr sz="1800" b="1">
+                <a:solidFill>
+                  <a:srgbClr val="1F3A5F"/>
+                </a:solidFill>
+                <a:latin typeface="Calibri"/>
+              </a:defRPr>
+            </a:pPr>
+            <a:r>
+              <a:rPr sz="1800" b="1">
+                <a:solidFill>
+                  <a:srgbClr val="1F3A5F"/>
+                </a:solidFill>
+                <a:latin typeface="Calibri"/>
+              </a:rPr>
+              <a:t>DRV8871</a:t>
+            </a:r>
+          </a:p>
+        </p:txBody>
+      </p:sp>
+      <p:cxnSp>
+        <p:nvCxnSpPr>
+          <p:cNvPr id="17" name="Connector 16"/>
+          <p:cNvCxnSpPr/>
+          <p:nvPr/>
+        </p:nvCxnSpPr>
+        <p:spPr>
+          <a:xfrm>
+            <a:off x="7269480" y="2916936"/>
+            <a:ext cx="640079" cy="0"/>
+          </a:xfrm>
+          <a:prstGeom prst="line">
+            <a:avLst/>
+          </a:prstGeom>
+          <a:ln w="22225">
+            <a:solidFill>
+              <a:srgbClr val="B46A0F"/>
+            </a:solidFill>
+            <a:headEnd/>
+            <a:tailEnd type="triangle" w="med" len="med"/>
+          </a:ln>
+        </p:spPr>
+        <p:style>
+          <a:lnRef idx="2">
+            <a:schemeClr val="accent1"/>
+          </a:lnRef>
+          <a:fillRef idx="0">
+            <a:schemeClr val="accent1"/>
+          </a:fillRef>
+          <a:effectRef idx="1">
+            <a:schemeClr val="accent1"/>
+          </a:effectRef>
+          <a:fontRef idx="minor">
+            <a:schemeClr val="tx1"/>
+          </a:fontRef>
+        </p:style>
+      </p:cxnSp>
+      <p:sp>
+        <p:nvSpPr>
+          <p:cNvPr id="18" name="Rounded Rectangle 17"/>
+          <p:cNvSpPr/>
+          <p:nvPr/>
+        </p:nvSpPr>
+        <p:spPr>
+          <a:xfrm>
+            <a:off x="8000999" y="2628900"/>
+            <a:ext cx="3685032" cy="576072"/>
+          </a:xfrm>
+          <a:prstGeom prst="roundRect">
+            <a:avLst>
+              <a:gd name="adj" fmla="val 12000"/>
+            </a:avLst>
+          </a:prstGeom>
+          <a:solidFill>
+            <a:srgbClr val="E8ECF0"/>
+          </a:solidFill>
+          <a:ln w="15875">
+            <a:solidFill>
+              <a:srgbClr val="666666"/>
+            </a:solidFill>
+          </a:ln>
+          <a:effectLst/>
+        </p:spPr>
+        <p:style>
+          <a:lnRef idx="1">
+            <a:schemeClr val="accent1"/>
+          </a:lnRef>
+          <a:fillRef idx="3">
+            <a:schemeClr val="accent1"/>
+          </a:fillRef>
+          <a:effectRef idx="2">
+            <a:schemeClr val="accent1"/>
+          </a:effectRef>
+          <a:fontRef idx="minor">
+            <a:schemeClr val="lt1"/>
+          </a:fontRef>
+        </p:style>
+        <p:txBody>
+          <a:bodyPr rtlCol="0" anchor="ctr" wrap="square" lIns="45720" rIns="45720" tIns="18288" bIns="18288"/>
+          <a:lstStyle/>
+          <a:p>
+            <a:pPr algn="ctr">
+              <a:lnSpc>
+                <a:spcPct val="100000"/>
+              </a:lnSpc>
+              <a:spcAft>
+                <a:spcPts val="0"/>
+              </a:spcAft>
+              <a:defRPr sz="1800" b="1">
+                <a:solidFill>
+                  <a:srgbClr val="1F3A5F"/>
+                </a:solidFill>
+                <a:latin typeface="Calibri"/>
+              </a:defRPr>
+            </a:pPr>
+            <a:r>
+              <a:rPr sz="1800" b="1">
+                <a:solidFill>
+                  <a:srgbClr val="1F3A5F"/>
+                </a:solidFill>
+                <a:latin typeface="Calibri"/>
+              </a:rPr>
+              <a:t>Rear left wheel</a:t>
+            </a:r>
+          </a:p>
+        </p:txBody>
+      </p:sp>
+      <p:sp>
+        <p:nvSpPr>
+          <p:cNvPr id="19" name="Rounded Rectangle 18"/>
+          <p:cNvSpPr/>
+          <p:nvPr/>
+        </p:nvSpPr>
+        <p:spPr>
+          <a:xfrm>
+            <a:off x="502920" y="3429000"/>
+            <a:ext cx="3017520" cy="576072"/>
+          </a:xfrm>
+          <a:prstGeom prst="roundRect">
+            <a:avLst>
+              <a:gd name="adj" fmla="val 12000"/>
+            </a:avLst>
+          </a:prstGeom>
+          <a:solidFill>
+            <a:srgbClr val="D6ECEE"/>
+          </a:solidFill>
+          <a:ln w="15875">
+            <a:solidFill>
+              <a:srgbClr val="0E7C86"/>
+            </a:solidFill>
+          </a:ln>
+          <a:effectLst/>
+        </p:spPr>
+        <p:style>
+          <a:lnRef idx="1">
+            <a:schemeClr val="accent1"/>
+          </a:lnRef>
+          <a:fillRef idx="3">
+            <a:schemeClr val="accent1"/>
+          </a:fillRef>
+          <a:effectRef idx="2">
+            <a:schemeClr val="accent1"/>
+          </a:effectRef>
+          <a:fontRef idx="minor">
+            <a:schemeClr val="lt1"/>
+          </a:fontRef>
+        </p:style>
+        <p:txBody>
+          <a:bodyPr rtlCol="0" anchor="ctr" wrap="square" lIns="45720" rIns="45720" tIns="18288" bIns="18288"/>
+          <a:lstStyle/>
+          <a:p>
+            <a:pPr algn="ctr">
+              <a:lnSpc>
+                <a:spcPct val="100000"/>
+              </a:lnSpc>
+              <a:spcAft>
+                <a:spcPts val="0"/>
+              </a:spcAft>
+              <a:defRPr sz="1800" b="1">
+                <a:solidFill>
+                  <a:srgbClr val="1F3A5F"/>
+                </a:solidFill>
+                <a:latin typeface="Calibri"/>
+              </a:defRPr>
+            </a:pPr>
+            <a:r>
+              <a:rPr sz="1800" b="1">
+                <a:solidFill>
+                  <a:srgbClr val="1F3A5F"/>
+                </a:solidFill>
+                <a:latin typeface="Calibri"/>
+              </a:rPr>
+              <a:t>ledcWrite  -&gt;  GPIO 22 / 23</a:t>
+            </a:r>
+          </a:p>
+        </p:txBody>
+      </p:sp>
+      <p:cxnSp>
+        <p:nvCxnSpPr>
+          <p:cNvPr id="20" name="Connector 19"/>
+          <p:cNvCxnSpPr/>
+          <p:nvPr/>
+        </p:nvCxnSpPr>
+        <p:spPr>
+          <a:xfrm>
+            <a:off x="3611880" y="3717036"/>
+            <a:ext cx="640080" cy="0"/>
+          </a:xfrm>
+          <a:prstGeom prst="line">
+            <a:avLst/>
+          </a:prstGeom>
+          <a:ln w="22225">
+            <a:solidFill>
+              <a:srgbClr val="1F3A5F"/>
+            </a:solidFill>
+            <a:headEnd/>
+            <a:tailEnd type="triangle" w="med" len="med"/>
+          </a:ln>
+        </p:spPr>
+        <p:style>
+          <a:lnRef idx="2">
+            <a:schemeClr val="accent1"/>
+          </a:lnRef>
+          <a:fillRef idx="0">
+            <a:schemeClr val="accent1"/>
+          </a:fillRef>
+          <a:effectRef idx="1">
+            <a:schemeClr val="accent1"/>
+          </a:effectRef>
+          <a:fontRef idx="minor">
+            <a:schemeClr val="tx1"/>
+          </a:fontRef>
+        </p:style>
+      </p:cxnSp>
+      <p:sp>
+        <p:nvSpPr>
+          <p:cNvPr id="21" name="Rounded Rectangle 20"/>
+          <p:cNvSpPr/>
+          <p:nvPr/>
+        </p:nvSpPr>
+        <p:spPr>
+          <a:xfrm>
+            <a:off x="4343400" y="3429000"/>
+            <a:ext cx="2834640" cy="576072"/>
+          </a:xfrm>
+          <a:prstGeom prst="roundRect">
+            <a:avLst>
+              <a:gd name="adj" fmla="val 12000"/>
+            </a:avLst>
+          </a:prstGeom>
+          <a:solidFill>
+            <a:srgbClr val="FAE6C8"/>
+          </a:solidFill>
+          <a:ln w="15875">
+            <a:solidFill>
+              <a:srgbClr val="B46A0F"/>
+            </a:solidFill>
+          </a:ln>
+          <a:effectLst/>
+        </p:spPr>
+        <p:style>
+          <a:lnRef idx="1">
+            <a:schemeClr val="accent1"/>
+          </a:lnRef>
+          <a:fillRef idx="3">
+            <a:schemeClr val="accent1"/>
+          </a:fillRef>
+          <a:effectRef idx="2">
+            <a:schemeClr val="accent1"/>
+          </a:effectRef>
+          <a:fontRef idx="minor">
+            <a:schemeClr val="lt1"/>
+          </a:fontRef>
+        </p:style>
+        <p:txBody>
+          <a:bodyPr rtlCol="0" anchor="ctr" wrap="square" lIns="45720" rIns="45720" tIns="18288" bIns="18288"/>
+          <a:lstStyle/>
+          <a:p>
+            <a:pPr algn="ctr">
+              <a:lnSpc>
+                <a:spcPct val="100000"/>
+              </a:lnSpc>
+              <a:spcAft>
+                <a:spcPts val="0"/>
+              </a:spcAft>
+              <a:defRPr sz="1800" b="1">
+                <a:solidFill>
+                  <a:srgbClr val="1F3A5F"/>
+                </a:solidFill>
+                <a:latin typeface="Calibri"/>
+              </a:defRPr>
+            </a:pPr>
+            <a:r>
+              <a:rPr sz="1800" b="1">
+                <a:solidFill>
+                  <a:srgbClr val="1F3A5F"/>
+                </a:solidFill>
+                <a:latin typeface="Calibri"/>
+              </a:rPr>
+              <a:t>DRV8871</a:t>
+            </a:r>
+          </a:p>
+        </p:txBody>
+      </p:sp>
+      <p:cxnSp>
+        <p:nvCxnSpPr>
+          <p:cNvPr id="22" name="Connector 21"/>
+          <p:cNvCxnSpPr/>
+          <p:nvPr/>
+        </p:nvCxnSpPr>
+        <p:spPr>
+          <a:xfrm>
+            <a:off x="7269480" y="3717036"/>
+            <a:ext cx="640079" cy="0"/>
+          </a:xfrm>
+          <a:prstGeom prst="line">
+            <a:avLst/>
+          </a:prstGeom>
+          <a:ln w="22225">
+            <a:solidFill>
+              <a:srgbClr val="B46A0F"/>
+            </a:solidFill>
+            <a:headEnd/>
+            <a:tailEnd type="triangle" w="med" len="med"/>
+          </a:ln>
+        </p:spPr>
+        <p:style>
+          <a:lnRef idx="2">
+            <a:schemeClr val="accent1"/>
+          </a:lnRef>
+          <a:fillRef idx="0">
+            <a:schemeClr val="accent1"/>
+          </a:fillRef>
+          <a:effectRef idx="1">
+            <a:schemeClr val="accent1"/>
+          </a:effectRef>
+          <a:fontRef idx="minor">
+            <a:schemeClr val="tx1"/>
+          </a:fontRef>
+        </p:style>
+      </p:cxnSp>
+      <p:sp>
+        <p:nvSpPr>
+          <p:cNvPr id="23" name="Rounded Rectangle 22"/>
+          <p:cNvSpPr/>
+          <p:nvPr/>
+        </p:nvSpPr>
+        <p:spPr>
+          <a:xfrm>
+            <a:off x="8000999" y="3429000"/>
+            <a:ext cx="3685032" cy="576072"/>
+          </a:xfrm>
+          <a:prstGeom prst="roundRect">
+            <a:avLst>
+              <a:gd name="adj" fmla="val 12000"/>
+            </a:avLst>
+          </a:prstGeom>
+          <a:solidFill>
+            <a:srgbClr val="E8ECF0"/>
+          </a:solidFill>
+          <a:ln w="15875">
+            <a:solidFill>
+              <a:srgbClr val="666666"/>
+            </a:solidFill>
+          </a:ln>
+          <a:effectLst/>
+        </p:spPr>
+        <p:style>
+          <a:lnRef idx="1">
+            <a:schemeClr val="accent1"/>
+          </a:lnRef>
+          <a:fillRef idx="3">
+            <a:schemeClr val="accent1"/>
+          </a:fillRef>
+          <a:effectRef idx="2">
+            <a:schemeClr val="accent1"/>
+          </a:effectRef>
+          <a:fontRef idx="minor">
+            <a:schemeClr val="lt1"/>
+          </a:fontRef>
+        </p:style>
+        <p:txBody>
+          <a:bodyPr rtlCol="0" anchor="ctr" wrap="square" lIns="45720" rIns="45720" tIns="18288" bIns="18288"/>
+          <a:lstStyle/>
+          <a:p>
+            <a:pPr algn="ctr">
+              <a:lnSpc>
+                <a:spcPct val="100000"/>
+              </a:lnSpc>
+              <a:spcAft>
+                <a:spcPts val="0"/>
+              </a:spcAft>
+              <a:defRPr sz="1800" b="1">
+                <a:solidFill>
+                  <a:srgbClr val="1F3A5F"/>
+                </a:solidFill>
+                <a:latin typeface="Calibri"/>
+              </a:defRPr>
+            </a:pPr>
+            <a:r>
+              <a:rPr sz="1800" b="1">
+                <a:solidFill>
+                  <a:srgbClr val="1F3A5F"/>
+                </a:solidFill>
+                <a:latin typeface="Calibri"/>
+              </a:rPr>
+              <a:t>Front right wheel</a:t>
+            </a:r>
+          </a:p>
+        </p:txBody>
+      </p:sp>
+      <p:sp>
+        <p:nvSpPr>
+          <p:cNvPr id="24" name="Rounded Rectangle 23"/>
+          <p:cNvSpPr/>
+          <p:nvPr/>
+        </p:nvSpPr>
+        <p:spPr>
+          <a:xfrm>
+            <a:off x="502920" y="4229100"/>
+            <a:ext cx="3017520" cy="576072"/>
+          </a:xfrm>
+          <a:prstGeom prst="roundRect">
+            <a:avLst>
+              <a:gd name="adj" fmla="val 12000"/>
+            </a:avLst>
+          </a:prstGeom>
+          <a:solidFill>
+            <a:srgbClr val="D6ECEE"/>
+          </a:solidFill>
+          <a:ln w="15875">
+            <a:solidFill>
+              <a:srgbClr val="0E7C86"/>
+            </a:solidFill>
+          </a:ln>
+          <a:effectLst/>
+        </p:spPr>
+        <p:style>
+          <a:lnRef idx="1">
+            <a:schemeClr val="accent1"/>
+          </a:lnRef>
+          <a:fillRef idx="3">
+            <a:schemeClr val="accent1"/>
+          </a:fillRef>
+          <a:effectRef idx="2">
+            <a:schemeClr val="accent1"/>
+          </a:effectRef>
+          <a:fontRef idx="minor">
+            <a:schemeClr val="lt1"/>
+          </a:fontRef>
+        </p:style>
+        <p:txBody>
+          <a:bodyPr rtlCol="0" anchor="ctr" wrap="square" lIns="45720" rIns="45720" tIns="18288" bIns="18288"/>
+          <a:lstStyle/>
+          <a:p>
+            <a:pPr algn="ctr">
+              <a:lnSpc>
+                <a:spcPct val="100000"/>
+              </a:lnSpc>
+              <a:spcAft>
+                <a:spcPts val="0"/>
+              </a:spcAft>
+              <a:defRPr sz="1800" b="1">
+                <a:solidFill>
+                  <a:srgbClr val="1F3A5F"/>
+                </a:solidFill>
+                <a:latin typeface="Calibri"/>
+              </a:defRPr>
+            </a:pPr>
+            <a:r>
+              <a:rPr sz="1800" b="1">
+                <a:solidFill>
+                  <a:srgbClr val="1F3A5F"/>
+                </a:solidFill>
+                <a:latin typeface="Calibri"/>
+              </a:rPr>
+              <a:t>ledcWrite  -&gt;  GPIO 16 / 17</a:t>
+            </a:r>
+          </a:p>
+        </p:txBody>
+      </p:sp>
+      <p:cxnSp>
+        <p:nvCxnSpPr>
+          <p:cNvPr id="25" name="Connector 24"/>
+          <p:cNvCxnSpPr/>
+          <p:nvPr/>
+        </p:nvCxnSpPr>
+        <p:spPr>
+          <a:xfrm>
+            <a:off x="3611880" y="4517136"/>
+            <a:ext cx="640080" cy="0"/>
+          </a:xfrm>
+          <a:prstGeom prst="line">
+            <a:avLst/>
+          </a:prstGeom>
+          <a:ln w="22225">
+            <a:solidFill>
+              <a:srgbClr val="1F3A5F"/>
+            </a:solidFill>
+            <a:headEnd/>
+            <a:tailEnd type="triangle" w="med" len="med"/>
+          </a:ln>
+        </p:spPr>
+        <p:style>
+          <a:lnRef idx="2">
+            <a:schemeClr val="accent1"/>
+          </a:lnRef>
+          <a:fillRef idx="0">
+            <a:schemeClr val="accent1"/>
+          </a:fillRef>
+          <a:effectRef idx="1">
+            <a:schemeClr val="accent1"/>
+          </a:effectRef>
+          <a:fontRef idx="minor">
+            <a:schemeClr val="tx1"/>
+          </a:fontRef>
+        </p:style>
+      </p:cxnSp>
+      <p:sp>
+        <p:nvSpPr>
+          <p:cNvPr id="26" name="Rounded Rectangle 25"/>
+          <p:cNvSpPr/>
+          <p:nvPr/>
+        </p:nvSpPr>
+        <p:spPr>
+          <a:xfrm>
+            <a:off x="4343400" y="4229100"/>
+            <a:ext cx="2834640" cy="576072"/>
+          </a:xfrm>
+          <a:prstGeom prst="roundRect">
+            <a:avLst>
+              <a:gd name="adj" fmla="val 12000"/>
+            </a:avLst>
+          </a:prstGeom>
+          <a:solidFill>
+            <a:srgbClr val="FAE6C8"/>
+          </a:solidFill>
+          <a:ln w="15875">
+            <a:solidFill>
+              <a:srgbClr val="B46A0F"/>
+            </a:solidFill>
+          </a:ln>
+          <a:effectLst/>
+        </p:spPr>
+        <p:style>
+          <a:lnRef idx="1">
+            <a:schemeClr val="accent1"/>
+          </a:lnRef>
+          <a:fillRef idx="3">
+            <a:schemeClr val="accent1"/>
+          </a:fillRef>
+          <a:effectRef idx="2">
+            <a:schemeClr val="accent1"/>
+          </a:effectRef>
+          <a:fontRef idx="minor">
+            <a:schemeClr val="lt1"/>
+          </a:fontRef>
+        </p:style>
+        <p:txBody>
+          <a:bodyPr rtlCol="0" anchor="ctr" wrap="square" lIns="45720" rIns="45720" tIns="18288" bIns="18288"/>
+          <a:lstStyle/>
+          <a:p>
+            <a:pPr algn="ctr">
+              <a:lnSpc>
+                <a:spcPct val="100000"/>
+              </a:lnSpc>
+              <a:spcAft>
+                <a:spcPts val="0"/>
+              </a:spcAft>
+              <a:defRPr sz="1800" b="1">
+                <a:solidFill>
+                  <a:srgbClr val="1F3A5F"/>
+                </a:solidFill>
+                <a:latin typeface="Calibri"/>
+              </a:defRPr>
+            </a:pPr>
+            <a:r>
+              <a:rPr sz="1800" b="1">
+                <a:solidFill>
+                  <a:srgbClr val="1F3A5F"/>
+                </a:solidFill>
+                <a:latin typeface="Calibri"/>
+              </a:rPr>
+              <a:t>DRV8871</a:t>
+            </a:r>
+          </a:p>
+        </p:txBody>
+      </p:sp>
+      <p:cxnSp>
+        <p:nvCxnSpPr>
+          <p:cNvPr id="27" name="Connector 26"/>
+          <p:cNvCxnSpPr/>
+          <p:nvPr/>
+        </p:nvCxnSpPr>
+        <p:spPr>
+          <a:xfrm>
+            <a:off x="7269480" y="4517136"/>
+            <a:ext cx="640079" cy="0"/>
+          </a:xfrm>
+          <a:prstGeom prst="line">
+            <a:avLst/>
+          </a:prstGeom>
+          <a:ln w="22225">
+            <a:solidFill>
+              <a:srgbClr val="B46A0F"/>
+            </a:solidFill>
+            <a:headEnd/>
+            <a:tailEnd type="triangle" w="med" len="med"/>
+          </a:ln>
+        </p:spPr>
+        <p:style>
+          <a:lnRef idx="2">
+            <a:schemeClr val="accent1"/>
+          </a:lnRef>
+          <a:fillRef idx="0">
+            <a:schemeClr val="accent1"/>
+          </a:fillRef>
+          <a:effectRef idx="1">
+            <a:schemeClr val="accent1"/>
+          </a:effectRef>
+          <a:fontRef idx="minor">
+            <a:schemeClr val="tx1"/>
+          </a:fontRef>
+        </p:style>
+      </p:cxnSp>
+      <p:sp>
+        <p:nvSpPr>
+          <p:cNvPr id="28" name="Rounded Rectangle 27"/>
+          <p:cNvSpPr/>
+          <p:nvPr/>
+        </p:nvSpPr>
+        <p:spPr>
+          <a:xfrm>
+            <a:off x="8000999" y="4229100"/>
+            <a:ext cx="3685032" cy="576072"/>
+          </a:xfrm>
+          <a:prstGeom prst="roundRect">
+            <a:avLst>
+              <a:gd name="adj" fmla="val 12000"/>
+            </a:avLst>
+          </a:prstGeom>
+          <a:solidFill>
+            <a:srgbClr val="E8ECF0"/>
+          </a:solidFill>
+          <a:ln w="15875">
+            <a:solidFill>
+              <a:srgbClr val="666666"/>
+            </a:solidFill>
+          </a:ln>
+          <a:effectLst/>
+        </p:spPr>
+        <p:style>
+          <a:lnRef idx="1">
+            <a:schemeClr val="accent1"/>
+          </a:lnRef>
+          <a:fillRef idx="3">
+            <a:schemeClr val="accent1"/>
+          </a:fillRef>
+          <a:effectRef idx="2">
+            <a:schemeClr val="accent1"/>
+          </a:effectRef>
+          <a:fontRef idx="minor">
+            <a:schemeClr val="lt1"/>
+          </a:fontRef>
+        </p:style>
+        <p:txBody>
+          <a:bodyPr rtlCol="0" anchor="ctr" wrap="square" lIns="45720" rIns="45720" tIns="18288" bIns="18288"/>
+          <a:lstStyle/>
+          <a:p>
+            <a:pPr algn="ctr">
+              <a:lnSpc>
+                <a:spcPct val="100000"/>
+              </a:lnSpc>
+              <a:spcAft>
+                <a:spcPts val="0"/>
+              </a:spcAft>
+              <a:defRPr sz="1800" b="1">
+                <a:solidFill>
+                  <a:srgbClr val="1F3A5F"/>
+                </a:solidFill>
+                <a:latin typeface="Calibri"/>
+              </a:defRPr>
+            </a:pPr>
+            <a:r>
+              <a:rPr sz="1800" b="1">
+                <a:solidFill>
+                  <a:srgbClr val="1F3A5F"/>
+                </a:solidFill>
+                <a:latin typeface="Calibri"/>
+              </a:rPr>
+              <a:t>Rear right wheel</a:t>
+            </a:r>
+          </a:p>
+        </p:txBody>
+      </p:sp>
+      <p:sp>
+        <p:nvSpPr>
+          <p:cNvPr id="29" name="Rounded Rectangle 28"/>
+          <p:cNvSpPr/>
+          <p:nvPr/>
+        </p:nvSpPr>
+        <p:spPr>
+          <a:xfrm>
+            <a:off x="502920" y="5303520"/>
+            <a:ext cx="11185855" cy="960120"/>
+          </a:xfrm>
+          <a:prstGeom prst="roundRect">
+            <a:avLst>
+              <a:gd name="adj" fmla="val 4000"/>
+            </a:avLst>
+          </a:prstGeom>
+          <a:solidFill>
+            <a:srgbClr val="EEF3F8"/>
+          </a:solidFill>
+          <a:ln w="12700">
+            <a:solidFill>
+              <a:srgbClr val="0E7C86"/>
+            </a:solidFill>
+          </a:ln>
+          <a:effectLst/>
+        </p:spPr>
+        <p:style>
+          <a:lnRef idx="1">
+            <a:schemeClr val="accent1"/>
+          </a:lnRef>
+          <a:fillRef idx="3">
+            <a:schemeClr val="accent1"/>
+          </a:fillRef>
+          <a:effectRef idx="2">
+            <a:schemeClr val="accent1"/>
+          </a:effectRef>
+          <a:fontRef idx="minor">
+            <a:schemeClr val="lt1"/>
+          </a:fontRef>
+        </p:style>
+        <p:txBody>
+          <a:bodyPr rtlCol="0" anchor="ctr" wrap="square" lIns="164592" rIns="164592" tIns="73152" bIns="73152"/>
+          <a:lstStyle/>
+          <a:p>
+            <a:pPr algn="l"/>
+            <a:r>
+              <a:rPr sz="1300" b="1">
+                <a:solidFill>
+                  <a:srgbClr val="0E7C86"/>
+                </a:solidFill>
+                <a:latin typeface="Calibri"/>
+              </a:rPr>
+              <a:t>KEY POINT   </a:t>
+            </a:r>
+            <a:r>
+              <a:rPr sz="1500">
+                <a:solidFill>
+                  <a:srgbClr val="222222"/>
+                </a:solidFill>
+                <a:latin typeface="Calibri"/>
+              </a:rPr>
+              <a:t>TWO pins per motor, and the driver is what makes it possible. An ESP32 pin gives you 3.3 volts and about 20 milliamps; a motor wants battery voltage and amps. The DRV8871 takes the small signal and switches the big one.</a:t>
             </a:r>
           </a:p>
         </p:txBody>
@@ -21498,7 +22283,7 @@
                 </a:solidFill>
                 <a:latin typeface="Calibri"/>
               </a:rPr>
-              <a:t>Digital: buttons</a:t>
+              <a:t>Digital: pressed or not</a:t>
             </a:r>
           </a:p>
         </p:txBody>
@@ -21546,7 +22331,7 @@
                 </a:solidFill>
                 <a:latin typeface="Calibri"/>
               </a:rPr>
-              <a:t>A button is either pressed or it is not. true or false.</a:t>
+              <a:t>A digital reading is true or false, with nothing in between.</a:t>
             </a:r>
           </a:p>
           <a:p>
@@ -21571,7 +22356,7 @@
                 </a:solidFill>
                 <a:latin typeface="Calibri"/>
               </a:rPr>
-              <a:t>Face buttons, D-pad, shoulders, triggers, and clicking the sticks in.</a:t>
+              <a:t>The D-pad, Select, Start and the PS button, and clicking either stick in.</a:t>
             </a:r>
           </a:p>
           <a:p>
@@ -21598,22 +22383,6 @@
               </a:rPr>
               <a:t>Good for: on/off, mode changes, one-shot actions.</a:t>
             </a:r>
-          </a:p>
-          <a:p>
-            <a:pPr algn="l">
-              <a:lnSpc>
-                <a:spcPct val="100000"/>
-              </a:lnSpc>
-              <a:spcAft>
-                <a:spcPts val="800"/>
-              </a:spcAft>
-              <a:defRPr sz="1900" b="0">
-                <a:solidFill>
-                  <a:srgbClr val="222222"/>
-                </a:solidFill>
-                <a:latin typeface="Calibri"/>
-              </a:defRPr>
-            </a:pPr>
           </a:p>
           <a:p>
             <a:pPr algn="l">
@@ -21710,7 +22479,7 @@
                 </a:solidFill>
                 <a:latin typeface="Calibri"/>
               </a:rPr>
-              <a:t>Analog: thumbsticks</a:t>
+              <a:t>Analog: how far</a:t>
             </a:r>
           </a:p>
         </p:txBody>
@@ -21758,7 +22527,7 @@
                 </a:solidFill>
                 <a:latin typeface="Calibri"/>
               </a:rPr>
-              <a:t>A stick reports HOW FAR it is pushed, on two axes.</a:t>
+              <a:t>An analog reading says HOW FAR, not just whether.</a:t>
             </a:r>
           </a:p>
           <a:p>
@@ -21783,7 +22552,7 @@
                 </a:solidFill>
                 <a:latin typeface="Calibri"/>
               </a:rPr>
-              <a:t>On this track each axis reads -128 to +127.</a:t>
+              <a:t>Both thumbsticks, on two axes each, reading -128 to +127.</a:t>
             </a:r>
           </a:p>
           <a:p>
@@ -21808,48 +22577,32 @@
                 </a:solidFill>
                 <a:latin typeface="Calibri"/>
               </a:rPr>
+              <a:t>On a PS3 pad the TRIGGERS are analog too, and so are the shoulder and face buttons.</a:t>
+            </a:r>
+          </a:p>
+          <a:p>
+            <a:pPr algn="l">
+              <a:lnSpc>
+                <a:spcPct val="100000"/>
+              </a:lnSpc>
+              <a:spcAft>
+                <a:spcPts val="800"/>
+              </a:spcAft>
+              <a:defRPr sz="1900" b="0">
+                <a:solidFill>
+                  <a:srgbClr val="222222"/>
+                </a:solidFill>
+                <a:latin typeface="Calibri"/>
+              </a:defRPr>
+            </a:pPr>
+            <a:r>
+              <a:rPr sz="1900" b="0">
+                <a:solidFill>
+                  <a:srgbClr val="222222"/>
+                </a:solidFill>
+                <a:latin typeface="Calibri"/>
+              </a:rPr>
               <a:t>Good for: speed, steering, aiming a servo.</a:t>
-            </a:r>
-          </a:p>
-          <a:p>
-            <a:pPr algn="l">
-              <a:lnSpc>
-                <a:spcPct val="100000"/>
-              </a:lnSpc>
-              <a:spcAft>
-                <a:spcPts val="800"/>
-              </a:spcAft>
-              <a:defRPr sz="1900" b="0">
-                <a:solidFill>
-                  <a:srgbClr val="222222"/>
-                </a:solidFill>
-                <a:latin typeface="Calibri"/>
-              </a:defRPr>
-            </a:pPr>
-          </a:p>
-          <a:p>
-            <a:pPr algn="l">
-              <a:lnSpc>
-                <a:spcPct val="100000"/>
-              </a:lnSpc>
-              <a:spcAft>
-                <a:spcPts val="800"/>
-              </a:spcAft>
-              <a:defRPr sz="1900" b="0">
-                <a:solidFill>
-                  <a:srgbClr val="222222"/>
-                </a:solidFill>
-                <a:latin typeface="Calibri"/>
-              </a:defRPr>
-            </a:pPr>
-            <a:r>
-              <a:rPr sz="1900" b="0">
-                <a:solidFill>
-                  <a:srgbClr val="222222"/>
-                </a:solidFill>
-                <a:latin typeface="Calibri"/>
-              </a:rPr>
-              <a:t>On this track:</a:t>
             </a:r>
           </a:p>
           <a:p>

--- a/ground-vehicle/docs/courses/beginner-ps3/l3_controller_programming.pptx
+++ b/ground-vehicle/docs/courses/beginner-ps3/l3_controller_programming.pptx
@@ -6066,6 +6066,22 @@
               <a:spcAft>
                 <a:spcPts val="100"/>
               </a:spcAft>
+              <a:defRPr sz="600" b="0">
+                <a:solidFill>
+                  <a:srgbClr val="666666"/>
+                </a:solidFill>
+                <a:latin typeface="Calibri"/>
+              </a:defRPr>
+            </a:pPr>
+          </a:p>
+          <a:p>
+            <a:pPr algn="l">
+              <a:lnSpc>
+                <a:spcPct val="100000"/>
+              </a:lnSpc>
+              <a:spcAft>
+                <a:spcPts val="100"/>
+              </a:spcAft>
               <a:defRPr sz="1200" b="0">
                 <a:solidFill>
                   <a:srgbClr val="666666"/>
@@ -6073,6 +6089,15 @@
                 <a:latin typeface="Calibri"/>
               </a:defRPr>
             </a:pPr>
+            <a:r>
+              <a:rPr sz="1200" b="0">
+                <a:solidFill>
+                  <a:srgbClr val="666666"/>
+                </a:solidFill>
+                <a:latin typeface="Calibri"/>
+              </a:rPr>
+              <a:t>Kevin Bowen, President  -  kbowen6@icloud.com</a:t>
+            </a:r>
           </a:p>
           <a:p>
             <a:pPr algn="l">
@@ -6096,7 +6121,7 @@
                 </a:solidFill>
                 <a:latin typeface="Calibri"/>
               </a:rPr>
-              <a:t>Kevin Bowen, President  -  kbowen6@icloud.com</a:t>
+              <a:t>Malcom Graham, VP Education      Louis Parker, VP Technology</a:t>
             </a:r>
           </a:p>
           <a:p>
@@ -6121,7 +6146,7 @@
                 </a:solidFill>
                 <a:latin typeface="Calibri"/>
               </a:rPr>
-              <a:t>Malcom Graham, VP Education      Louis Parker, VP Technology</a:t>
+              <a:t>Valen Farre, System Engineer      Gary Howland, Animation</a:t>
             </a:r>
           </a:p>
           <a:p>
@@ -6146,7 +6171,7 @@
                 </a:solidFill>
                 <a:latin typeface="Calibri"/>
               </a:rPr>
-              <a:t>Valen Farre, System Engineer      Gary Howland, Animation</a:t>
+              <a:t>Eddie Revollo, Artificial Intelligence</a:t>
             </a:r>
           </a:p>
           <a:p>
@@ -6171,7 +6196,7 @@
                 </a:solidFill>
                 <a:latin typeface="Calibri"/>
               </a:rPr>
-              <a:t>Eddie Revollo, Artificial Intelligence</a:t>
+              <a:t>Interns: Oscar Canazales, Krishnansh Vemulapalli, Soham Gangal, Erik Olsen</a:t>
             </a:r>
           </a:p>
           <a:p>
@@ -6182,32 +6207,7 @@
               <a:spcAft>
                 <a:spcPts val="100"/>
               </a:spcAft>
-              <a:defRPr sz="1200" b="0">
-                <a:solidFill>
-                  <a:srgbClr val="666666"/>
-                </a:solidFill>
-                <a:latin typeface="Calibri"/>
-              </a:defRPr>
-            </a:pPr>
-            <a:r>
-              <a:rPr sz="1200" b="0">
-                <a:solidFill>
-                  <a:srgbClr val="666666"/>
-                </a:solidFill>
-                <a:latin typeface="Calibri"/>
-              </a:rPr>
-              <a:t>Interns: Oscar Canazales, Krishnansh Vemulapalli, Soham Gangal, Erik Olsen</a:t>
-            </a:r>
-          </a:p>
-          <a:p>
-            <a:pPr algn="l">
-              <a:lnSpc>
-                <a:spcPct val="100000"/>
-              </a:lnSpc>
-              <a:spcAft>
-                <a:spcPts val="100"/>
-              </a:spcAft>
-              <a:defRPr sz="1200" b="0">
+              <a:defRPr sz="600" b="0">
                 <a:solidFill>
                   <a:srgbClr val="666666"/>
                 </a:solidFill>
@@ -6572,7 +6572,7 @@
               <a:spcAft>
                 <a:spcPts val="900"/>
               </a:spcAft>
-              <a:defRPr sz="2000" b="0">
+              <a:defRPr sz="1000" b="0">
                 <a:solidFill>
                   <a:srgbClr val="222222"/>
                 </a:solidFill>
@@ -6711,15 +6711,15 @@
               <a:spcAft>
                 <a:spcPts val="900"/>
               </a:spcAft>
-              <a:defRPr sz="1800" b="0">
-                <a:solidFill>
-                  <a:srgbClr val="222222"/>
-                </a:solidFill>
-                <a:latin typeface="Calibri"/>
-              </a:defRPr>
-            </a:pPr>
-            <a:r>
-              <a:rPr sz="1800" b="0">
+              <a:defRPr sz="1900" b="0">
+                <a:solidFill>
+                  <a:srgbClr val="222222"/>
+                </a:solidFill>
+                <a:latin typeface="Calibri"/>
+              </a:defRPr>
+            </a:pPr>
+            <a:r>
+              <a:rPr sz="1900" b="0">
                 <a:solidFill>
                   <a:srgbClr val="222222"/>
                 </a:solidFill>
@@ -6736,15 +6736,15 @@
               <a:spcAft>
                 <a:spcPts val="900"/>
               </a:spcAft>
-              <a:defRPr sz="1800" b="0">
-                <a:solidFill>
-                  <a:srgbClr val="222222"/>
-                </a:solidFill>
-                <a:latin typeface="Calibri"/>
-              </a:defRPr>
-            </a:pPr>
-            <a:r>
-              <a:rPr sz="1800" b="0">
+              <a:defRPr sz="1900" b="0">
+                <a:solidFill>
+                  <a:srgbClr val="222222"/>
+                </a:solidFill>
+                <a:latin typeface="Calibri"/>
+              </a:defRPr>
+            </a:pPr>
+            <a:r>
+              <a:rPr sz="1900" b="0">
                 <a:solidFill>
                   <a:srgbClr val="222222"/>
                 </a:solidFill>
@@ -6761,15 +6761,15 @@
               <a:spcAft>
                 <a:spcPts val="900"/>
               </a:spcAft>
-              <a:defRPr sz="1800" b="0">
-                <a:solidFill>
-                  <a:srgbClr val="222222"/>
-                </a:solidFill>
-                <a:latin typeface="Calibri"/>
-              </a:defRPr>
-            </a:pPr>
-            <a:r>
-              <a:rPr sz="1800" b="0">
+              <a:defRPr sz="1900" b="0">
+                <a:solidFill>
+                  <a:srgbClr val="222222"/>
+                </a:solidFill>
+                <a:latin typeface="Calibri"/>
+              </a:defRPr>
+            </a:pPr>
+            <a:r>
+              <a:rPr sz="1900" b="0">
                 <a:solidFill>
                   <a:srgbClr val="222222"/>
                 </a:solidFill>
@@ -6786,15 +6786,15 @@
               <a:spcAft>
                 <a:spcPts val="900"/>
               </a:spcAft>
-              <a:defRPr sz="1800" b="0">
-                <a:solidFill>
-                  <a:srgbClr val="222222"/>
-                </a:solidFill>
-                <a:latin typeface="Calibri"/>
-              </a:defRPr>
-            </a:pPr>
-            <a:r>
-              <a:rPr sz="1800" b="0">
+              <a:defRPr sz="1900" b="0">
+                <a:solidFill>
+                  <a:srgbClr val="222222"/>
+                </a:solidFill>
+                <a:latin typeface="Calibri"/>
+              </a:defRPr>
+            </a:pPr>
+            <a:r>
+              <a:rPr sz="1900" b="0">
                 <a:solidFill>
                   <a:srgbClr val="222222"/>
                 </a:solidFill>
@@ -6811,7 +6811,7 @@
               <a:spcAft>
                 <a:spcPts val="900"/>
               </a:spcAft>
-              <a:defRPr sz="1800" b="0">
+              <a:defRPr sz="950" b="0">
                 <a:solidFill>
                   <a:srgbClr val="222222"/>
                 </a:solidFill>
@@ -6827,15 +6827,15 @@
               <a:spcAft>
                 <a:spcPts val="900"/>
               </a:spcAft>
-              <a:defRPr sz="1800" b="0">
-                <a:solidFill>
-                  <a:srgbClr val="222222"/>
-                </a:solidFill>
-                <a:latin typeface="Calibri"/>
-              </a:defRPr>
-            </a:pPr>
-            <a:r>
-              <a:rPr sz="1800" b="0">
+              <a:defRPr sz="1900" b="0">
+                <a:solidFill>
+                  <a:srgbClr val="222222"/>
+                </a:solidFill>
+                <a:latin typeface="Calibri"/>
+              </a:defRPr>
+            </a:pPr>
+            <a:r>
+              <a:rPr sz="1900" b="0">
                 <a:solidFill>
                   <a:srgbClr val="222222"/>
                 </a:solidFill>
@@ -10063,15 +10063,15 @@
               <a:spcAft>
                 <a:spcPts val="600"/>
               </a:spcAft>
-              <a:defRPr sz="1800" b="0">
-                <a:solidFill>
-                  <a:srgbClr val="222222"/>
-                </a:solidFill>
-                <a:latin typeface="Calibri"/>
-              </a:defRPr>
-            </a:pPr>
-            <a:r>
-              <a:rPr sz="1800" b="0">
+              <a:defRPr sz="1900" b="0">
+                <a:solidFill>
+                  <a:srgbClr val="222222"/>
+                </a:solidFill>
+                <a:latin typeface="Calibri"/>
+              </a:defRPr>
+            </a:pPr>
+            <a:r>
+              <a:rPr sz="1900" b="0">
                 <a:solidFill>
                   <a:srgbClr val="222222"/>
                 </a:solidFill>
@@ -10088,15 +10088,15 @@
               <a:spcAft>
                 <a:spcPts val="600"/>
               </a:spcAft>
-              <a:defRPr sz="1800" b="0">
-                <a:solidFill>
-                  <a:srgbClr val="222222"/>
-                </a:solidFill>
-                <a:latin typeface="Calibri"/>
-              </a:defRPr>
-            </a:pPr>
-            <a:r>
-              <a:rPr sz="1800" b="0">
+              <a:defRPr sz="1900" b="0">
+                <a:solidFill>
+                  <a:srgbClr val="222222"/>
+                </a:solidFill>
+                <a:latin typeface="Calibri"/>
+              </a:defRPr>
+            </a:pPr>
+            <a:r>
+              <a:rPr sz="1900" b="0">
                 <a:solidFill>
                   <a:srgbClr val="222222"/>
                 </a:solidFill>
@@ -10113,7 +10113,7 @@
               <a:spcAft>
                 <a:spcPts val="600"/>
               </a:spcAft>
-              <a:defRPr sz="1800" b="0">
+              <a:defRPr sz="950" b="0">
                 <a:solidFill>
                   <a:srgbClr val="222222"/>
                 </a:solidFill>
@@ -10129,15 +10129,15 @@
               <a:spcAft>
                 <a:spcPts val="600"/>
               </a:spcAft>
-              <a:defRPr sz="1800" b="0">
-                <a:solidFill>
-                  <a:srgbClr val="222222"/>
-                </a:solidFill>
-                <a:latin typeface="Calibri"/>
-              </a:defRPr>
-            </a:pPr>
-            <a:r>
-              <a:rPr sz="1800" b="0">
+              <a:defRPr sz="1900" b="0">
+                <a:solidFill>
+                  <a:srgbClr val="222222"/>
+                </a:solidFill>
+                <a:latin typeface="Calibri"/>
+              </a:defRPr>
+            </a:pPr>
+            <a:r>
+              <a:rPr sz="1900" b="0">
                 <a:solidFill>
                   <a:srgbClr val="222222"/>
                 </a:solidFill>
@@ -10154,7 +10154,7 @@
               <a:spcAft>
                 <a:spcPts val="600"/>
               </a:spcAft>
-              <a:defRPr sz="1800" b="0">
+              <a:defRPr sz="950" b="0">
                 <a:solidFill>
                   <a:srgbClr val="222222"/>
                 </a:solidFill>
@@ -10170,15 +10170,15 @@
               <a:spcAft>
                 <a:spcPts val="600"/>
               </a:spcAft>
-              <a:defRPr sz="1800" b="0">
-                <a:solidFill>
-                  <a:srgbClr val="222222"/>
-                </a:solidFill>
-                <a:latin typeface="Calibri"/>
-              </a:defRPr>
-            </a:pPr>
-            <a:r>
-              <a:rPr sz="1800" b="0">
+              <a:defRPr sz="1900" b="0">
+                <a:solidFill>
+                  <a:srgbClr val="222222"/>
+                </a:solidFill>
+                <a:latin typeface="Calibri"/>
+              </a:defRPr>
+            </a:pPr>
+            <a:r>
+              <a:rPr sz="1900" b="0">
                 <a:solidFill>
                   <a:srgbClr val="222222"/>
                 </a:solidFill>
@@ -10195,15 +10195,15 @@
               <a:spcAft>
                 <a:spcPts val="600"/>
               </a:spcAft>
-              <a:defRPr sz="1800" b="0">
-                <a:solidFill>
-                  <a:srgbClr val="222222"/>
-                </a:solidFill>
-                <a:latin typeface="Calibri"/>
-              </a:defRPr>
-            </a:pPr>
-            <a:r>
-              <a:rPr sz="1800" b="0">
+              <a:defRPr sz="1900" b="0">
+                <a:solidFill>
+                  <a:srgbClr val="222222"/>
+                </a:solidFill>
+                <a:latin typeface="Calibri"/>
+              </a:defRPr>
+            </a:pPr>
+            <a:r>
+              <a:rPr sz="1900" b="0">
                 <a:solidFill>
                   <a:srgbClr val="222222"/>
                 </a:solidFill>
@@ -10220,7 +10220,7 @@
               <a:spcAft>
                 <a:spcPts val="600"/>
               </a:spcAft>
-              <a:defRPr sz="1800" b="0">
+              <a:defRPr sz="950" b="0">
                 <a:solidFill>
                   <a:srgbClr val="222222"/>
                 </a:solidFill>
@@ -10236,15 +10236,15 @@
               <a:spcAft>
                 <a:spcPts val="600"/>
               </a:spcAft>
-              <a:defRPr sz="1800" b="0">
-                <a:solidFill>
-                  <a:srgbClr val="222222"/>
-                </a:solidFill>
-                <a:latin typeface="Calibri"/>
-              </a:defRPr>
-            </a:pPr>
-            <a:r>
-              <a:rPr sz="1800" b="0">
+              <a:defRPr sz="1900" b="0">
+                <a:solidFill>
+                  <a:srgbClr val="222222"/>
+                </a:solidFill>
+                <a:latin typeface="Calibri"/>
+              </a:defRPr>
+            </a:pPr>
+            <a:r>
+              <a:rPr sz="1900" b="0">
                 <a:solidFill>
                   <a:srgbClr val="222222"/>
                 </a:solidFill>
@@ -11098,6 +11098,22 @@
               <a:spcAft>
                 <a:spcPts val="0"/>
               </a:spcAft>
+              <a:defRPr sz="700" b="0">
+                <a:solidFill>
+                  <a:srgbClr val="222222"/>
+                </a:solidFill>
+                <a:latin typeface="Consolas"/>
+              </a:defRPr>
+            </a:pPr>
+          </a:p>
+          <a:p>
+            <a:pPr algn="l">
+              <a:lnSpc>
+                <a:spcPct val="100000"/>
+              </a:lnSpc>
+              <a:spcAft>
+                <a:spcPts val="0"/>
+              </a:spcAft>
               <a:defRPr sz="1400" b="0">
                 <a:solidFill>
                   <a:srgbClr val="222222"/>
@@ -11105,6 +11121,15 @@
                 <a:latin typeface="Consolas"/>
               </a:defRPr>
             </a:pPr>
+            <a:r>
+              <a:rPr sz="1400" b="0">
+                <a:solidFill>
+                  <a:srgbClr val="222222"/>
+                </a:solidFill>
+                <a:latin typeface="Consolas"/>
+              </a:rPr>
+              <a:t>size = map(abs(v),</a:t>
+            </a:r>
           </a:p>
           <a:p>
             <a:pPr algn="l">
@@ -11128,7 +11153,7 @@
                 </a:solidFill>
                 <a:latin typeface="Consolas"/>
               </a:rPr>
-              <a:t>size = map(abs(v),</a:t>
+              <a:t>           DEADZONE, 127,</a:t>
             </a:r>
           </a:p>
           <a:p>
@@ -11153,7 +11178,7 @@
                 </a:solidFill>
                 <a:latin typeface="Consolas"/>
               </a:rPr>
-              <a:t>           DEADZONE, 127,</a:t>
+              <a:t>           MOTOR_MIN, maxSpeed);</a:t>
             </a:r>
           </a:p>
           <a:p>
@@ -11164,32 +11189,7 @@
               <a:spcAft>
                 <a:spcPts val="0"/>
               </a:spcAft>
-              <a:defRPr sz="1400" b="0">
-                <a:solidFill>
-                  <a:srgbClr val="222222"/>
-                </a:solidFill>
-                <a:latin typeface="Consolas"/>
-              </a:defRPr>
-            </a:pPr>
-            <a:r>
-              <a:rPr sz="1400" b="0">
-                <a:solidFill>
-                  <a:srgbClr val="222222"/>
-                </a:solidFill>
-                <a:latin typeface="Consolas"/>
-              </a:rPr>
-              <a:t>           MOTOR_MIN, maxSpeed);</a:t>
-            </a:r>
-          </a:p>
-          <a:p>
-            <a:pPr algn="l">
-              <a:lnSpc>
-                <a:spcPct val="100000"/>
-              </a:lnSpc>
-              <a:spcAft>
-                <a:spcPts val="0"/>
-              </a:spcAft>
-              <a:defRPr sz="1400" b="0">
+              <a:defRPr sz="700" b="0">
                 <a:solidFill>
                   <a:srgbClr val="222222"/>
                 </a:solidFill>
@@ -13651,15 +13651,15 @@
               <a:spcAft>
                 <a:spcPts val="600"/>
               </a:spcAft>
-              <a:defRPr sz="1800" b="0">
-                <a:solidFill>
-                  <a:srgbClr val="222222"/>
-                </a:solidFill>
-                <a:latin typeface="Calibri"/>
-              </a:defRPr>
-            </a:pPr>
-            <a:r>
-              <a:rPr sz="1800" b="0">
+              <a:defRPr sz="1900" b="0">
+                <a:solidFill>
+                  <a:srgbClr val="222222"/>
+                </a:solidFill>
+                <a:latin typeface="Calibri"/>
+              </a:defRPr>
+            </a:pPr>
+            <a:r>
+              <a:rPr sz="1900" b="0">
                 <a:solidFill>
                   <a:srgbClr val="222222"/>
                 </a:solidFill>
@@ -13676,7 +13676,7 @@
               <a:spcAft>
                 <a:spcPts val="600"/>
               </a:spcAft>
-              <a:defRPr sz="1800" b="0">
+              <a:defRPr sz="950" b="0">
                 <a:solidFill>
                   <a:srgbClr val="222222"/>
                 </a:solidFill>
@@ -13692,15 +13692,15 @@
               <a:spcAft>
                 <a:spcPts val="600"/>
               </a:spcAft>
-              <a:defRPr sz="1800" b="0">
-                <a:solidFill>
-                  <a:srgbClr val="222222"/>
-                </a:solidFill>
-                <a:latin typeface="Calibri"/>
-              </a:defRPr>
-            </a:pPr>
-            <a:r>
-              <a:rPr sz="1800" b="0">
+              <a:defRPr sz="1900" b="0">
+                <a:solidFill>
+                  <a:srgbClr val="222222"/>
+                </a:solidFill>
+                <a:latin typeface="Calibri"/>
+              </a:defRPr>
+            </a:pPr>
+            <a:r>
+              <a:rPr sz="1900" b="0">
                 <a:solidFill>
                   <a:srgbClr val="222222"/>
                 </a:solidFill>
@@ -13717,15 +13717,15 @@
               <a:spcAft>
                 <a:spcPts val="600"/>
               </a:spcAft>
-              <a:defRPr sz="1800" b="0">
-                <a:solidFill>
-                  <a:srgbClr val="222222"/>
-                </a:solidFill>
-                <a:latin typeface="Calibri"/>
-              </a:defRPr>
-            </a:pPr>
-            <a:r>
-              <a:rPr sz="1800" b="0">
+              <a:defRPr sz="1900" b="0">
+                <a:solidFill>
+                  <a:srgbClr val="222222"/>
+                </a:solidFill>
+                <a:latin typeface="Calibri"/>
+              </a:defRPr>
+            </a:pPr>
+            <a:r>
+              <a:rPr sz="1900" b="0">
                 <a:solidFill>
                   <a:srgbClr val="222222"/>
                 </a:solidFill>
@@ -13742,7 +13742,7 @@
               <a:spcAft>
                 <a:spcPts val="600"/>
               </a:spcAft>
-              <a:defRPr sz="1800" b="0">
+              <a:defRPr sz="950" b="0">
                 <a:solidFill>
                   <a:srgbClr val="222222"/>
                 </a:solidFill>
@@ -13758,15 +13758,15 @@
               <a:spcAft>
                 <a:spcPts val="600"/>
               </a:spcAft>
-              <a:defRPr sz="1800" b="0">
-                <a:solidFill>
-                  <a:srgbClr val="222222"/>
-                </a:solidFill>
-                <a:latin typeface="Calibri"/>
-              </a:defRPr>
-            </a:pPr>
-            <a:r>
-              <a:rPr sz="1800" b="0">
+              <a:defRPr sz="1900" b="0">
+                <a:solidFill>
+                  <a:srgbClr val="222222"/>
+                </a:solidFill>
+                <a:latin typeface="Calibri"/>
+              </a:defRPr>
+            </a:pPr>
+            <a:r>
+              <a:rPr sz="1900" b="0">
                 <a:solidFill>
                   <a:srgbClr val="222222"/>
                 </a:solidFill>
@@ -13783,7 +13783,7 @@
               <a:spcAft>
                 <a:spcPts val="600"/>
               </a:spcAft>
-              <a:defRPr sz="1800" b="0">
+              <a:defRPr sz="950" b="0">
                 <a:solidFill>
                   <a:srgbClr val="222222"/>
                 </a:solidFill>
@@ -13799,15 +13799,15 @@
               <a:spcAft>
                 <a:spcPts val="600"/>
               </a:spcAft>
-              <a:defRPr sz="1800" b="0">
-                <a:solidFill>
-                  <a:srgbClr val="222222"/>
-                </a:solidFill>
-                <a:latin typeface="Calibri"/>
-              </a:defRPr>
-            </a:pPr>
-            <a:r>
-              <a:rPr sz="1800" b="0">
+              <a:defRPr sz="1900" b="0">
+                <a:solidFill>
+                  <a:srgbClr val="222222"/>
+                </a:solidFill>
+                <a:latin typeface="Calibri"/>
+              </a:defRPr>
+            </a:pPr>
+            <a:r>
+              <a:rPr sz="1900" b="0">
                 <a:solidFill>
                   <a:srgbClr val="222222"/>
                 </a:solidFill>
@@ -13824,7 +13824,7 @@
               <a:spcAft>
                 <a:spcPts val="600"/>
               </a:spcAft>
-              <a:defRPr sz="1800" b="0">
+              <a:defRPr sz="950" b="0">
                 <a:solidFill>
                   <a:srgbClr val="222222"/>
                 </a:solidFill>
@@ -13840,15 +13840,15 @@
               <a:spcAft>
                 <a:spcPts val="600"/>
               </a:spcAft>
-              <a:defRPr sz="1800" b="0">
-                <a:solidFill>
-                  <a:srgbClr val="222222"/>
-                </a:solidFill>
-                <a:latin typeface="Calibri"/>
-              </a:defRPr>
-            </a:pPr>
-            <a:r>
-              <a:rPr sz="1800" b="0">
+              <a:defRPr sz="1900" b="0">
+                <a:solidFill>
+                  <a:srgbClr val="222222"/>
+                </a:solidFill>
+                <a:latin typeface="Calibri"/>
+              </a:defRPr>
+            </a:pPr>
+            <a:r>
+              <a:rPr sz="1900" b="0">
                 <a:solidFill>
                   <a:srgbClr val="222222"/>
                 </a:solidFill>
@@ -16720,6 +16720,22 @@
               <a:spcAft>
                 <a:spcPts val="900"/>
               </a:spcAft>
+              <a:defRPr sz="1000" b="0">
+                <a:solidFill>
+                  <a:srgbClr val="222222"/>
+                </a:solidFill>
+                <a:latin typeface="Calibri"/>
+              </a:defRPr>
+            </a:pPr>
+          </a:p>
+          <a:p>
+            <a:pPr algn="l">
+              <a:lnSpc>
+                <a:spcPct val="100000"/>
+              </a:lnSpc>
+              <a:spcAft>
+                <a:spcPts val="900"/>
+              </a:spcAft>
               <a:defRPr sz="2000" b="0">
                 <a:solidFill>
                   <a:srgbClr val="222222"/>
@@ -16727,6 +16743,15 @@
                 <a:latin typeface="Calibri"/>
               </a:defRPr>
             </a:pPr>
+            <a:r>
+              <a:rPr sz="2000" b="0">
+                <a:solidFill>
+                  <a:srgbClr val="222222"/>
+                </a:solidFill>
+                <a:latin typeface="Calibri"/>
+              </a:rPr>
+              <a:t>The only safe behavior is to STOP. Not carry on with the last command, and not do something clever.</a:t>
+            </a:r>
           </a:p>
           <a:p>
             <a:pPr algn="l">
@@ -16736,32 +16761,7 @@
               <a:spcAft>
                 <a:spcPts val="900"/>
               </a:spcAft>
-              <a:defRPr sz="2000" b="0">
-                <a:solidFill>
-                  <a:srgbClr val="222222"/>
-                </a:solidFill>
-                <a:latin typeface="Calibri"/>
-              </a:defRPr>
-            </a:pPr>
-            <a:r>
-              <a:rPr sz="2000" b="0">
-                <a:solidFill>
-                  <a:srgbClr val="222222"/>
-                </a:solidFill>
-                <a:latin typeface="Calibri"/>
-              </a:rPr>
-              <a:t>The only safe behavior is to STOP. Not carry on with the last command, and not do something clever.</a:t>
-            </a:r>
-          </a:p>
-          <a:p>
-            <a:pPr algn="l">
-              <a:lnSpc>
-                <a:spcPct val="100000"/>
-              </a:lnSpc>
-              <a:spcAft>
-                <a:spcPts val="900"/>
-              </a:spcAft>
-              <a:defRPr sz="2000" b="0">
+              <a:defRPr sz="1000" b="0">
                 <a:solidFill>
                   <a:srgbClr val="222222"/>
                 </a:solidFill>
@@ -16875,7 +16875,7 @@
               <a:spcAft>
                 <a:spcPts val="900"/>
               </a:spcAft>
-              <a:defRPr sz="2000" b="0">
+              <a:defRPr sz="1000" b="0">
                 <a:solidFill>
                   <a:srgbClr val="222222"/>
                 </a:solidFill>
@@ -18364,17 +18364,17 @@
                 <a:spcPct val="100000"/>
               </a:lnSpc>
               <a:spcAft>
-                <a:spcPts val="600"/>
-              </a:spcAft>
-              <a:defRPr sz="2700" b="0">
-                <a:solidFill>
-                  <a:srgbClr val="222222"/>
-                </a:solidFill>
-                <a:latin typeface="Calibri"/>
-              </a:defRPr>
-            </a:pPr>
-            <a:r>
-              <a:rPr sz="2700" b="0">
+                <a:spcPts val="900"/>
+              </a:spcAft>
+              <a:defRPr sz="2800" b="0">
+                <a:solidFill>
+                  <a:srgbClr val="222222"/>
+                </a:solidFill>
+                <a:latin typeface="Calibri"/>
+              </a:defRPr>
+            </a:pPr>
+            <a:r>
+              <a:rPr sz="2800" b="0">
                 <a:solidFill>
                   <a:srgbClr val="222222"/>
                 </a:solidFill>
@@ -18389,17 +18389,17 @@
                 <a:spcPct val="100000"/>
               </a:lnSpc>
               <a:spcAft>
-                <a:spcPts val="600"/>
-              </a:spcAft>
-              <a:defRPr sz="2700" b="0">
-                <a:solidFill>
-                  <a:srgbClr val="222222"/>
-                </a:solidFill>
-                <a:latin typeface="Calibri"/>
-              </a:defRPr>
-            </a:pPr>
-            <a:r>
-              <a:rPr sz="2700" b="0">
+                <a:spcPts val="900"/>
+              </a:spcAft>
+              <a:defRPr sz="2800" b="0">
+                <a:solidFill>
+                  <a:srgbClr val="222222"/>
+                </a:solidFill>
+                <a:latin typeface="Calibri"/>
+              </a:defRPr>
+            </a:pPr>
+            <a:r>
+              <a:rPr sz="2800" b="0">
                 <a:solidFill>
                   <a:srgbClr val="222222"/>
                 </a:solidFill>
@@ -18414,17 +18414,17 @@
                 <a:spcPct val="100000"/>
               </a:lnSpc>
               <a:spcAft>
-                <a:spcPts val="600"/>
-              </a:spcAft>
-              <a:defRPr sz="2700" b="0">
-                <a:solidFill>
-                  <a:srgbClr val="222222"/>
-                </a:solidFill>
-                <a:latin typeface="Calibri"/>
-              </a:defRPr>
-            </a:pPr>
-            <a:r>
-              <a:rPr sz="2700" b="0">
+                <a:spcPts val="900"/>
+              </a:spcAft>
+              <a:defRPr sz="2800" b="0">
+                <a:solidFill>
+                  <a:srgbClr val="222222"/>
+                </a:solidFill>
+                <a:latin typeface="Calibri"/>
+              </a:defRPr>
+            </a:pPr>
+            <a:r>
+              <a:rPr sz="2800" b="0">
                 <a:solidFill>
                   <a:srgbClr val="222222"/>
                 </a:solidFill>
@@ -18439,33 +18439,33 @@
                 <a:spcPct val="100000"/>
               </a:lnSpc>
               <a:spcAft>
-                <a:spcPts val="600"/>
-              </a:spcAft>
-              <a:defRPr sz="2700" b="0">
-                <a:solidFill>
-                  <a:srgbClr val="222222"/>
-                </a:solidFill>
-                <a:latin typeface="Calibri"/>
-              </a:defRPr>
-            </a:pPr>
-          </a:p>
-          <a:p>
-            <a:pPr algn="l">
-              <a:lnSpc>
-                <a:spcPct val="100000"/>
-              </a:lnSpc>
-              <a:spcAft>
-                <a:spcPts val="600"/>
-              </a:spcAft>
-              <a:defRPr sz="2700" b="0">
-                <a:solidFill>
-                  <a:srgbClr val="222222"/>
-                </a:solidFill>
-                <a:latin typeface="Calibri"/>
-              </a:defRPr>
-            </a:pPr>
-            <a:r>
-              <a:rPr sz="2700" b="0">
+                <a:spcPts val="900"/>
+              </a:spcAft>
+              <a:defRPr sz="1400" b="0">
+                <a:solidFill>
+                  <a:srgbClr val="222222"/>
+                </a:solidFill>
+                <a:latin typeface="Calibri"/>
+              </a:defRPr>
+            </a:pPr>
+          </a:p>
+          <a:p>
+            <a:pPr algn="l">
+              <a:lnSpc>
+                <a:spcPct val="100000"/>
+              </a:lnSpc>
+              <a:spcAft>
+                <a:spcPts val="900"/>
+              </a:spcAft>
+              <a:defRPr sz="2800" b="0">
+                <a:solidFill>
+                  <a:srgbClr val="222222"/>
+                </a:solidFill>
+                <a:latin typeface="Calibri"/>
+              </a:defRPr>
+            </a:pPr>
+            <a:r>
+              <a:rPr sz="2800" b="0">
                 <a:solidFill>
                   <a:srgbClr val="222222"/>
                 </a:solidFill>
@@ -19682,7 +19682,7 @@
               <a:spcAft>
                 <a:spcPts val="900"/>
               </a:spcAft>
-              <a:defRPr sz="1900" b="0">
+              <a:defRPr sz="950" b="0">
                 <a:solidFill>
                   <a:srgbClr val="222222"/>
                 </a:solidFill>
@@ -20016,15 +20016,15 @@
               <a:spcAft>
                 <a:spcPts val="600"/>
               </a:spcAft>
-              <a:defRPr sz="1900" b="0">
-                <a:solidFill>
-                  <a:srgbClr val="222222"/>
-                </a:solidFill>
-                <a:latin typeface="Calibri"/>
-              </a:defRPr>
-            </a:pPr>
-            <a:r>
-              <a:rPr sz="1900" b="0">
+              <a:defRPr sz="2000" b="0">
+                <a:solidFill>
+                  <a:srgbClr val="222222"/>
+                </a:solidFill>
+                <a:latin typeface="Calibri"/>
+              </a:defRPr>
+            </a:pPr>
+            <a:r>
+              <a:rPr sz="2000" b="0">
                 <a:solidFill>
                   <a:srgbClr val="222222"/>
                 </a:solidFill>
@@ -20041,7 +20041,7 @@
               <a:spcAft>
                 <a:spcPts val="600"/>
               </a:spcAft>
-              <a:defRPr sz="1900" b="0">
+              <a:defRPr sz="1000" b="0">
                 <a:solidFill>
                   <a:srgbClr val="222222"/>
                 </a:solidFill>
@@ -20057,15 +20057,15 @@
               <a:spcAft>
                 <a:spcPts val="600"/>
               </a:spcAft>
-              <a:defRPr sz="1900" b="0">
-                <a:solidFill>
-                  <a:srgbClr val="222222"/>
-                </a:solidFill>
-                <a:latin typeface="Calibri"/>
-              </a:defRPr>
-            </a:pPr>
-            <a:r>
-              <a:rPr sz="1900" b="0">
+              <a:defRPr sz="2000" b="0">
+                <a:solidFill>
+                  <a:srgbClr val="222222"/>
+                </a:solidFill>
+                <a:latin typeface="Calibri"/>
+              </a:defRPr>
+            </a:pPr>
+            <a:r>
+              <a:rPr sz="2000" b="0">
                 <a:solidFill>
                   <a:srgbClr val="222222"/>
                 </a:solidFill>
@@ -20082,15 +20082,15 @@
               <a:spcAft>
                 <a:spcPts val="600"/>
               </a:spcAft>
-              <a:defRPr sz="1900" b="0">
-                <a:solidFill>
-                  <a:srgbClr val="222222"/>
-                </a:solidFill>
-                <a:latin typeface="Calibri"/>
-              </a:defRPr>
-            </a:pPr>
-            <a:r>
-              <a:rPr sz="1900" b="0">
+              <a:defRPr sz="2000" b="0">
+                <a:solidFill>
+                  <a:srgbClr val="222222"/>
+                </a:solidFill>
+                <a:latin typeface="Calibri"/>
+              </a:defRPr>
+            </a:pPr>
+            <a:r>
+              <a:rPr sz="2000" b="0">
                 <a:solidFill>
                   <a:srgbClr val="222222"/>
                 </a:solidFill>
@@ -20107,15 +20107,15 @@
               <a:spcAft>
                 <a:spcPts val="600"/>
               </a:spcAft>
-              <a:defRPr sz="1900" b="0">
-                <a:solidFill>
-                  <a:srgbClr val="222222"/>
-                </a:solidFill>
-                <a:latin typeface="Calibri"/>
-              </a:defRPr>
-            </a:pPr>
-            <a:r>
-              <a:rPr sz="1900" b="0">
+              <a:defRPr sz="2000" b="0">
+                <a:solidFill>
+                  <a:srgbClr val="222222"/>
+                </a:solidFill>
+                <a:latin typeface="Calibri"/>
+              </a:defRPr>
+            </a:pPr>
+            <a:r>
+              <a:rPr sz="2000" b="0">
                 <a:solidFill>
                   <a:srgbClr val="222222"/>
                 </a:solidFill>
@@ -20132,15 +20132,15 @@
               <a:spcAft>
                 <a:spcPts val="600"/>
               </a:spcAft>
-              <a:defRPr sz="1900" b="0">
-                <a:solidFill>
-                  <a:srgbClr val="222222"/>
-                </a:solidFill>
-                <a:latin typeface="Calibri"/>
-              </a:defRPr>
-            </a:pPr>
-            <a:r>
-              <a:rPr sz="1900" b="0">
+              <a:defRPr sz="2000" b="0">
+                <a:solidFill>
+                  <a:srgbClr val="222222"/>
+                </a:solidFill>
+                <a:latin typeface="Calibri"/>
+              </a:defRPr>
+            </a:pPr>
+            <a:r>
+              <a:rPr sz="2000" b="0">
                 <a:solidFill>
                   <a:srgbClr val="222222"/>
                 </a:solidFill>
@@ -20157,7 +20157,7 @@
               <a:spcAft>
                 <a:spcPts val="600"/>
               </a:spcAft>
-              <a:defRPr sz="1900" b="0">
+              <a:defRPr sz="1000" b="0">
                 <a:solidFill>
                   <a:srgbClr val="222222"/>
                 </a:solidFill>
@@ -20173,15 +20173,15 @@
               <a:spcAft>
                 <a:spcPts val="600"/>
               </a:spcAft>
-              <a:defRPr sz="1900" b="0">
-                <a:solidFill>
-                  <a:srgbClr val="222222"/>
-                </a:solidFill>
-                <a:latin typeface="Calibri"/>
-              </a:defRPr>
-            </a:pPr>
-            <a:r>
-              <a:rPr sz="1900" b="0">
+              <a:defRPr sz="2000" b="0">
+                <a:solidFill>
+                  <a:srgbClr val="222222"/>
+                </a:solidFill>
+                <a:latin typeface="Calibri"/>
+              </a:defRPr>
+            </a:pPr>
+            <a:r>
+              <a:rPr sz="2000" b="0">
                 <a:solidFill>
                   <a:srgbClr val="222222"/>
                 </a:solidFill>

--- a/ground-vehicle/docs/courses/beginner-ps3/l3_controller_programming.pptx
+++ b/ground-vehicle/docs/courses/beginner-ps3/l3_controller_programming.pptx
@@ -2737,7 +2737,7 @@
               <a:rPr sz="1200">
                 <a:latin typeface="Calibri"/>
               </a:rPr>
-              <a:t>Kevin caught this in the 2026-09-05 review: the PS3 triggers are ANALOG, not digital. So are the shoulder buttons and the face buttons - a Sixaxis reports pressure on all of them. Almost every program reads them as digital anyway, which is why it is easy to get wrong.</a:t>
+              <a:t>Kevin caught this in the 2026-09-05 review: the PS3 triggers are ANALOG, not digital. So are the shoulder and face buttons - a Sixaxis reports pressure on all of them. Almost every program reads them as digital anyway, which is why it is easy to get wrong.</a:t>
             </a:r>
           </a:p>
           <a:p>
@@ -2745,7 +2745,7 @@
               <a:rPr sz="1200">
                 <a:latin typeface="Calibri"/>
               </a:rPr>
-              <a:t>A hard press on a trigger reads differently from a light one. You can still read any of them as a plain yes or no, and mostly we do, which is why it is easy to get wrong.</a:t>
+              <a:t>A press can read differently from a light one, and you can still treat any of them as a plain yes or no - which is mostly what we do, and why it is easy to get wrong.</a:t>
             </a:r>
           </a:p>
           <a:p>
@@ -22249,7 +22249,7 @@
         <p:spPr>
           <a:xfrm>
             <a:off x="502920" y="1188720"/>
-            <a:ext cx="5364327" cy="457200"/>
+            <a:ext cx="4781528" cy="457200"/>
           </a:xfrm>
           <a:prstGeom prst="rect">
             <a:avLst/>
@@ -22297,7 +22297,7 @@
         <p:spPr>
           <a:xfrm>
             <a:off x="502920" y="1700784"/>
-            <a:ext cx="5364327" cy="3474720"/>
+            <a:ext cx="4781528" cy="3474720"/>
           </a:xfrm>
           <a:prstGeom prst="rect">
             <a:avLst/>
@@ -22444,8 +22444,8 @@
         </p:nvSpPr>
         <p:spPr>
           <a:xfrm>
-            <a:off x="6324447" y="1188720"/>
-            <a:ext cx="5364327" cy="457200"/>
+            <a:off x="5741648" y="1188720"/>
+            <a:ext cx="5947127" cy="457200"/>
           </a:xfrm>
           <a:prstGeom prst="rect">
             <a:avLst/>
@@ -22492,8 +22492,8 @@
         </p:nvSpPr>
         <p:spPr>
           <a:xfrm>
-            <a:off x="6324447" y="1700784"/>
-            <a:ext cx="5364327" cy="3474720"/>
+            <a:off x="5741648" y="1700784"/>
+            <a:ext cx="5947127" cy="3474720"/>
           </a:xfrm>
           <a:prstGeom prst="rect">
             <a:avLst/>
@@ -22577,7 +22577,7 @@
                 </a:solidFill>
                 <a:latin typeface="Calibri"/>
               </a:rPr>
-              <a:t>On a PS3 pad the TRIGGERS are analog too, and so are the shoulder and face buttons.</a:t>
+              <a:t>The TRIGGERS are analog too, and so are the shoulder and face buttons - a Sixaxis reports how hard you press.</a:t>
             </a:r>
           </a:p>
           <a:p>

--- a/ground-vehicle/docs/courses/beginner-ps3/l3_controller_programming.pptx
+++ b/ground-vehicle/docs/courses/beginner-ps3/l3_controller_programming.pptx
@@ -8530,22 +8530,24 @@
       <p:grpSpPr/>
       <p:sp>
         <p:nvSpPr>
-          <p:cNvPr id="2" name="Title 1"/>
-          <p:cNvSpPr>
-            <a:spLocks noGrp="1"/>
-          </p:cNvSpPr>
-          <p:nvPr>
-            <p:ph type="title"/>
-          </p:nvPr>
-        </p:nvSpPr>
-        <p:spPr>
-          <a:xfrm>
-            <a:off x="502920" y="274320"/>
-            <a:ext cx="11185855" cy="777240"/>
-          </a:xfrm>
-        </p:spPr>
-        <p:txBody>
-          <a:bodyPr wrap="square" anchor="b"/>
+          <p:cNvPr id="2" name="TextBox 1"/>
+          <p:cNvSpPr txBox="1"/>
+          <p:nvPr/>
+        </p:nvSpPr>
+        <p:spPr>
+          <a:xfrm>
+            <a:off x="502920" y="6382512"/>
+            <a:ext cx="10545775" cy="274320"/>
+          </a:xfrm>
+          <a:prstGeom prst="rect">
+            <a:avLst/>
+          </a:prstGeom>
+          <a:noFill/>
+        </p:spPr>
+        <p:txBody>
+          <a:bodyPr wrap="square" lIns="0" tIns="0">
+            <a:spAutoFit/>
+          </a:bodyPr>
           <a:lstStyle/>
           <a:p>
             <a:pPr algn="l">
@@ -8555,41 +8557,89 @@
               <a:spcAft>
                 <a:spcPts val="0"/>
               </a:spcAft>
-              <a:defRPr sz="2800" b="1">
-                <a:solidFill>
-                  <a:srgbClr val="1F3A5F"/>
-                </a:solidFill>
-                <a:latin typeface="Calibri"/>
-              </a:defRPr>
-            </a:pPr>
-            <a:r>
-              <a:rPr sz="2800" b="1">
-                <a:solidFill>
-                  <a:srgbClr val="1F3A5F"/>
-                </a:solidFill>
-                <a:latin typeface="Calibri"/>
-              </a:rPr>
-              <a:t>Where we are</a:t>
-            </a:r>
-          </a:p>
-        </p:txBody>
-      </p:sp>
-      <p:sp>
-        <p:nvSpPr>
-          <p:cNvPr id="3" name="Rectangle 2"/>
+              <a:defRPr sz="1000" b="0">
+                <a:solidFill>
+                  <a:srgbClr val="666666"/>
+                </a:solidFill>
+                <a:latin typeface="Calibri"/>
+              </a:defRPr>
+            </a:pPr>
+            <a:r>
+              <a:rPr sz="1000" b="0">
+                <a:solidFill>
+                  <a:srgbClr val="666666"/>
+                </a:solidFill>
+                <a:latin typeface="Calibri"/>
+              </a:rPr>
+              <a:t>Pathfinder Beginner - PS3  |  Lesson 3</a:t>
+            </a:r>
+          </a:p>
+        </p:txBody>
+      </p:sp>
+      <p:sp>
+        <p:nvSpPr>
+          <p:cNvPr id="3" name="TextBox 2"/>
+          <p:cNvSpPr txBox="1"/>
+          <p:nvPr/>
+        </p:nvSpPr>
+        <p:spPr>
+          <a:xfrm>
+            <a:off x="11231575" y="6382512"/>
+            <a:ext cx="457200" cy="274320"/>
+          </a:xfrm>
+          <a:prstGeom prst="rect">
+            <a:avLst/>
+          </a:prstGeom>
+          <a:noFill/>
+        </p:spPr>
+        <p:txBody>
+          <a:bodyPr wrap="square" lIns="0" tIns="0">
+            <a:spAutoFit/>
+          </a:bodyPr>
+          <a:lstStyle/>
+          <a:p>
+            <a:pPr algn="r">
+              <a:lnSpc>
+                <a:spcPct val="100000"/>
+              </a:lnSpc>
+              <a:spcAft>
+                <a:spcPts val="0"/>
+              </a:spcAft>
+              <a:defRPr sz="1000" b="0">
+                <a:solidFill>
+                  <a:srgbClr val="666666"/>
+                </a:solidFill>
+                <a:latin typeface="Calibri"/>
+              </a:defRPr>
+            </a:pPr>
+            <a:r>
+              <a:rPr sz="1000" b="0">
+                <a:solidFill>
+                  <a:srgbClr val="666666"/>
+                </a:solidFill>
+                <a:latin typeface="Calibri"/>
+              </a:rPr>
+              <a:t>11</a:t>
+            </a:r>
+          </a:p>
+        </p:txBody>
+      </p:sp>
+      <p:sp>
+        <p:nvSpPr>
+          <p:cNvPr id="4" name="Rectangle 3"/>
           <p:cNvSpPr/>
           <p:nvPr/>
         </p:nvSpPr>
         <p:spPr>
           <a:xfrm>
-            <a:off x="502920" y="1097280"/>
-            <a:ext cx="11185855" cy="19050"/>
+            <a:off x="0" y="1234440"/>
+            <a:ext cx="256032" cy="1554480"/>
           </a:xfrm>
           <a:prstGeom prst="rect">
             <a:avLst/>
           </a:prstGeom>
           <a:solidFill>
-            <a:srgbClr val="C8D2DE"/>
+            <a:srgbClr val="0E7C86"/>
           </a:solidFill>
           <a:ln>
             <a:noFill/>
@@ -8620,14 +8670,14 @@
       </p:sp>
       <p:sp>
         <p:nvSpPr>
-          <p:cNvPr id="4" name="TextBox 3"/>
+          <p:cNvPr id="5" name="TextBox 4"/>
           <p:cNvSpPr txBox="1"/>
           <p:nvPr/>
         </p:nvSpPr>
         <p:spPr>
           <a:xfrm>
-            <a:off x="502920" y="6382512"/>
-            <a:ext cx="10545775" cy="274320"/>
+            <a:off x="777240" y="1325880"/>
+            <a:ext cx="10515600" cy="1051560"/>
           </a:xfrm>
           <a:prstGeom prst="rect">
             <a:avLst/>
@@ -8635,7 +8685,7 @@
           <a:noFill/>
         </p:spPr>
         <p:txBody>
-          <a:bodyPr wrap="square" lIns="0" tIns="0">
+          <a:bodyPr wrap="square" lIns="0" tIns="0" rIns="0" bIns="0">
             <a:spAutoFit/>
           </a:bodyPr>
           <a:lstStyle/>
@@ -8647,35 +8697,35 @@
               <a:spcAft>
                 <a:spcPts val="0"/>
               </a:spcAft>
-              <a:defRPr sz="1000" b="0">
-                <a:solidFill>
-                  <a:srgbClr val="666666"/>
-                </a:solidFill>
-                <a:latin typeface="Calibri"/>
-              </a:defRPr>
-            </a:pPr>
-            <a:r>
-              <a:rPr sz="1000" b="0">
-                <a:solidFill>
-                  <a:srgbClr val="666666"/>
-                </a:solidFill>
-                <a:latin typeface="Calibri"/>
-              </a:rPr>
-              <a:t>Pathfinder Beginner - PS3  |  Lesson 3</a:t>
-            </a:r>
-          </a:p>
-        </p:txBody>
-      </p:sp>
-      <p:sp>
-        <p:nvSpPr>
-          <p:cNvPr id="5" name="TextBox 4"/>
+              <a:defRPr sz="3600" b="1">
+                <a:solidFill>
+                  <a:srgbClr val="1F3A5F"/>
+                </a:solidFill>
+                <a:latin typeface="Calibri"/>
+              </a:defRPr>
+            </a:pPr>
+            <a:r>
+              <a:rPr sz="3600" b="1">
+                <a:solidFill>
+                  <a:srgbClr val="1F3A5F"/>
+                </a:solidFill>
+                <a:latin typeface="Calibri"/>
+              </a:rPr>
+              <a:t>What the pad sends</a:t>
+            </a:r>
+          </a:p>
+        </p:txBody>
+      </p:sp>
+      <p:sp>
+        <p:nvSpPr>
+          <p:cNvPr id="6" name="TextBox 5"/>
           <p:cNvSpPr txBox="1"/>
           <p:nvPr/>
         </p:nvSpPr>
         <p:spPr>
           <a:xfrm>
-            <a:off x="11231575" y="6382512"/>
-            <a:ext cx="457200" cy="274320"/>
+            <a:off x="777240" y="2423160"/>
+            <a:ext cx="10515600" cy="685800"/>
           </a:xfrm>
           <a:prstGeom prst="rect">
             <a:avLst/>
@@ -8683,19 +8733,19 @@
           <a:noFill/>
         </p:spPr>
         <p:txBody>
-          <a:bodyPr wrap="square" lIns="0" tIns="0">
+          <a:bodyPr wrap="square" lIns="0" tIns="0" rIns="0" bIns="0">
             <a:spAutoFit/>
           </a:bodyPr>
           <a:lstStyle/>
           <a:p>
-            <a:pPr algn="r">
-              <a:lnSpc>
-                <a:spcPct val="100000"/>
-              </a:lnSpc>
-              <a:spcAft>
-                <a:spcPts val="0"/>
-              </a:spcAft>
-              <a:defRPr sz="1000" b="0">
+            <a:pPr algn="l">
+              <a:lnSpc>
+                <a:spcPct val="100000"/>
+              </a:lnSpc>
+              <a:spcAft>
+                <a:spcPts val="400"/>
+              </a:spcAft>
+              <a:defRPr sz="1600" b="0">
                 <a:solidFill>
                   <a:srgbClr val="666666"/>
                 </a:solidFill>
@@ -8703,27 +8753,27 @@
               </a:defRPr>
             </a:pPr>
             <a:r>
-              <a:rPr sz="1000" b="0">
+              <a:rPr sz="1600" b="0">
                 <a:solidFill>
                   <a:srgbClr val="666666"/>
                 </a:solidFill>
                 <a:latin typeface="Calibri"/>
               </a:rPr>
-              <a:t>11</a:t>
-            </a:r>
-          </a:p>
-        </p:txBody>
-      </p:sp>
-      <p:sp>
-        <p:nvSpPr>
-          <p:cNvPr id="6" name="Rounded Rectangle 5"/>
+              <a:t>About 25 minutes</a:t>
+            </a:r>
+          </a:p>
+        </p:txBody>
+      </p:sp>
+      <p:sp>
+        <p:nvSpPr>
+          <p:cNvPr id="7" name="Rounded Rectangle 6"/>
           <p:cNvSpPr/>
           <p:nvPr/>
         </p:nvSpPr>
         <p:spPr>
           <a:xfrm>
-            <a:off x="502920" y="2240280"/>
-            <a:ext cx="2686735" cy="1737360"/>
+            <a:off x="502920" y="3886200"/>
+            <a:ext cx="2686735" cy="1325880"/>
           </a:xfrm>
           <a:prstGeom prst="roundRect">
             <a:avLst>
@@ -8786,14 +8836,14 @@
       </p:sp>
       <p:sp>
         <p:nvSpPr>
-          <p:cNvPr id="7" name="TextBox 6"/>
+          <p:cNvPr id="8" name="TextBox 7"/>
           <p:cNvSpPr txBox="1"/>
           <p:nvPr/>
         </p:nvSpPr>
         <p:spPr>
           <a:xfrm>
-            <a:off x="502920" y="1856232"/>
-            <a:ext cx="2686735" cy="347472"/>
+            <a:off x="502920" y="3520440"/>
+            <a:ext cx="2686735" cy="310896"/>
           </a:xfrm>
           <a:prstGeom prst="rect">
             <a:avLst/>
@@ -8811,9 +8861,9 @@
                 <a:spcPct val="100000"/>
               </a:lnSpc>
               <a:spcAft>
-                <a:spcPts val="600"/>
-              </a:spcAft>
-              <a:defRPr sz="1200" b="1">
+                <a:spcPts val="200"/>
+              </a:spcAft>
+              <a:defRPr sz="1100" b="1">
                 <a:solidFill>
                   <a:srgbClr val="0E7C86"/>
                 </a:solidFill>
@@ -8821,7 +8871,7 @@
               </a:defRPr>
             </a:pPr>
             <a:r>
-              <a:rPr sz="1200" b="1">
+              <a:rPr sz="1100" b="1">
                 <a:solidFill>
                   <a:srgbClr val="0E7C86"/>
                 </a:solidFill>
@@ -8834,14 +8884,14 @@
       </p:sp>
       <p:sp>
         <p:nvSpPr>
-          <p:cNvPr id="8" name="Rounded Rectangle 7"/>
+          <p:cNvPr id="9" name="Rounded Rectangle 8"/>
           <p:cNvSpPr/>
           <p:nvPr/>
         </p:nvSpPr>
         <p:spPr>
           <a:xfrm>
-            <a:off x="3335959" y="2240280"/>
-            <a:ext cx="2686735" cy="1737360"/>
+            <a:off x="3335959" y="3886200"/>
+            <a:ext cx="2686735" cy="1325880"/>
           </a:xfrm>
           <a:prstGeom prst="roundRect">
             <a:avLst>
@@ -8904,14 +8954,14 @@
       </p:sp>
       <p:sp>
         <p:nvSpPr>
-          <p:cNvPr id="9" name="TextBox 8"/>
+          <p:cNvPr id="10" name="TextBox 9"/>
           <p:cNvSpPr txBox="1"/>
           <p:nvPr/>
         </p:nvSpPr>
         <p:spPr>
           <a:xfrm>
-            <a:off x="3335959" y="1856232"/>
-            <a:ext cx="2686735" cy="347472"/>
+            <a:off x="3335959" y="3520440"/>
+            <a:ext cx="2686735" cy="310896"/>
           </a:xfrm>
           <a:prstGeom prst="rect">
             <a:avLst/>
@@ -8929,9 +8979,9 @@
                 <a:spcPct val="100000"/>
               </a:lnSpc>
               <a:spcAft>
-                <a:spcPts val="600"/>
-              </a:spcAft>
-              <a:defRPr sz="1200" b="1">
+                <a:spcPts val="200"/>
+              </a:spcAft>
+              <a:defRPr sz="1100" b="1">
                 <a:solidFill>
                   <a:srgbClr val="0E7C86"/>
                 </a:solidFill>
@@ -8939,7 +8989,7 @@
               </a:defRPr>
             </a:pPr>
             <a:r>
-              <a:rPr sz="1200" b="1">
+              <a:rPr sz="1100" b="1">
                 <a:solidFill>
                   <a:srgbClr val="0E7C86"/>
                 </a:solidFill>
@@ -8952,14 +9002,14 @@
       </p:sp>
       <p:sp>
         <p:nvSpPr>
-          <p:cNvPr id="10" name="Rounded Rectangle 9"/>
+          <p:cNvPr id="11" name="Rounded Rectangle 10"/>
           <p:cNvSpPr/>
           <p:nvPr/>
         </p:nvSpPr>
         <p:spPr>
           <a:xfrm>
-            <a:off x="6168998" y="2240280"/>
-            <a:ext cx="2686735" cy="1737360"/>
+            <a:off x="6168998" y="3886200"/>
+            <a:ext cx="2686735" cy="1325880"/>
           </a:xfrm>
           <a:prstGeom prst="roundRect">
             <a:avLst>
@@ -9022,14 +9072,14 @@
       </p:sp>
       <p:sp>
         <p:nvSpPr>
-          <p:cNvPr id="11" name="Rounded Rectangle 10"/>
+          <p:cNvPr id="12" name="Rounded Rectangle 11"/>
           <p:cNvSpPr/>
           <p:nvPr/>
         </p:nvSpPr>
         <p:spPr>
           <a:xfrm>
-            <a:off x="9002037" y="2240280"/>
-            <a:ext cx="2686735" cy="1737360"/>
+            <a:off x="9002037" y="3886200"/>
+            <a:ext cx="2686735" cy="1325880"/>
           </a:xfrm>
           <a:prstGeom prst="roundRect">
             <a:avLst>
@@ -12120,22 +12170,24 @@
       <p:grpSpPr/>
       <p:sp>
         <p:nvSpPr>
-          <p:cNvPr id="2" name="Title 1"/>
-          <p:cNvSpPr>
-            <a:spLocks noGrp="1"/>
-          </p:cNvSpPr>
-          <p:nvPr>
-            <p:ph type="title"/>
-          </p:nvPr>
-        </p:nvSpPr>
-        <p:spPr>
-          <a:xfrm>
-            <a:off x="502920" y="274320"/>
-            <a:ext cx="11185855" cy="777240"/>
-          </a:xfrm>
-        </p:spPr>
-        <p:txBody>
-          <a:bodyPr wrap="square" anchor="b"/>
+          <p:cNvPr id="2" name="TextBox 1"/>
+          <p:cNvSpPr txBox="1"/>
+          <p:nvPr/>
+        </p:nvSpPr>
+        <p:spPr>
+          <a:xfrm>
+            <a:off x="502920" y="6382512"/>
+            <a:ext cx="10545775" cy="274320"/>
+          </a:xfrm>
+          <a:prstGeom prst="rect">
+            <a:avLst/>
+          </a:prstGeom>
+          <a:noFill/>
+        </p:spPr>
+        <p:txBody>
+          <a:bodyPr wrap="square" lIns="0" tIns="0">
+            <a:spAutoFit/>
+          </a:bodyPr>
           <a:lstStyle/>
           <a:p>
             <a:pPr algn="l">
@@ -12145,41 +12197,89 @@
               <a:spcAft>
                 <a:spcPts val="0"/>
               </a:spcAft>
-              <a:defRPr sz="2800" b="1">
-                <a:solidFill>
-                  <a:srgbClr val="1F3A5F"/>
-                </a:solidFill>
-                <a:latin typeface="Calibri"/>
-              </a:defRPr>
-            </a:pPr>
-            <a:r>
-              <a:rPr sz="2800" b="1">
-                <a:solidFill>
-                  <a:srgbClr val="1F3A5F"/>
-                </a:solidFill>
-                <a:latin typeface="Calibri"/>
-              </a:rPr>
-              <a:t>Where we are</a:t>
-            </a:r>
-          </a:p>
-        </p:txBody>
-      </p:sp>
-      <p:sp>
-        <p:nvSpPr>
-          <p:cNvPr id="3" name="Rectangle 2"/>
+              <a:defRPr sz="1000" b="0">
+                <a:solidFill>
+                  <a:srgbClr val="666666"/>
+                </a:solidFill>
+                <a:latin typeface="Calibri"/>
+              </a:defRPr>
+            </a:pPr>
+            <a:r>
+              <a:rPr sz="1000" b="0">
+                <a:solidFill>
+                  <a:srgbClr val="666666"/>
+                </a:solidFill>
+                <a:latin typeface="Calibri"/>
+              </a:rPr>
+              <a:t>Pathfinder Beginner - PS3  |  Lesson 3</a:t>
+            </a:r>
+          </a:p>
+        </p:txBody>
+      </p:sp>
+      <p:sp>
+        <p:nvSpPr>
+          <p:cNvPr id="3" name="TextBox 2"/>
+          <p:cNvSpPr txBox="1"/>
+          <p:nvPr/>
+        </p:nvSpPr>
+        <p:spPr>
+          <a:xfrm>
+            <a:off x="11231575" y="6382512"/>
+            <a:ext cx="457200" cy="274320"/>
+          </a:xfrm>
+          <a:prstGeom prst="rect">
+            <a:avLst/>
+          </a:prstGeom>
+          <a:noFill/>
+        </p:spPr>
+        <p:txBody>
+          <a:bodyPr wrap="square" lIns="0" tIns="0">
+            <a:spAutoFit/>
+          </a:bodyPr>
+          <a:lstStyle/>
+          <a:p>
+            <a:pPr algn="r">
+              <a:lnSpc>
+                <a:spcPct val="100000"/>
+              </a:lnSpc>
+              <a:spcAft>
+                <a:spcPts val="0"/>
+              </a:spcAft>
+              <a:defRPr sz="1000" b="0">
+                <a:solidFill>
+                  <a:srgbClr val="666666"/>
+                </a:solidFill>
+                <a:latin typeface="Calibri"/>
+              </a:defRPr>
+            </a:pPr>
+            <a:r>
+              <a:rPr sz="1000" b="0">
+                <a:solidFill>
+                  <a:srgbClr val="666666"/>
+                </a:solidFill>
+                <a:latin typeface="Calibri"/>
+              </a:rPr>
+              <a:t>16</a:t>
+            </a:r>
+          </a:p>
+        </p:txBody>
+      </p:sp>
+      <p:sp>
+        <p:nvSpPr>
+          <p:cNvPr id="4" name="Rectangle 3"/>
           <p:cNvSpPr/>
           <p:nvPr/>
         </p:nvSpPr>
         <p:spPr>
           <a:xfrm>
-            <a:off x="502920" y="1097280"/>
-            <a:ext cx="11185855" cy="19050"/>
+            <a:off x="0" y="1234440"/>
+            <a:ext cx="256032" cy="1554480"/>
           </a:xfrm>
           <a:prstGeom prst="rect">
             <a:avLst/>
           </a:prstGeom>
           <a:solidFill>
-            <a:srgbClr val="C8D2DE"/>
+            <a:srgbClr val="0E7C86"/>
           </a:solidFill>
           <a:ln>
             <a:noFill/>
@@ -12210,14 +12310,14 @@
       </p:sp>
       <p:sp>
         <p:nvSpPr>
-          <p:cNvPr id="4" name="TextBox 3"/>
+          <p:cNvPr id="5" name="TextBox 4"/>
           <p:cNvSpPr txBox="1"/>
           <p:nvPr/>
         </p:nvSpPr>
         <p:spPr>
           <a:xfrm>
-            <a:off x="502920" y="6382512"/>
-            <a:ext cx="10545775" cy="274320"/>
+            <a:off x="777240" y="1325880"/>
+            <a:ext cx="10515600" cy="1051560"/>
           </a:xfrm>
           <a:prstGeom prst="rect">
             <a:avLst/>
@@ -12225,7 +12325,7 @@
           <a:noFill/>
         </p:spPr>
         <p:txBody>
-          <a:bodyPr wrap="square" lIns="0" tIns="0">
+          <a:bodyPr wrap="square" lIns="0" tIns="0" rIns="0" bIns="0">
             <a:spAutoFit/>
           </a:bodyPr>
           <a:lstStyle/>
@@ -12237,35 +12337,35 @@
               <a:spcAft>
                 <a:spcPts val="0"/>
               </a:spcAft>
-              <a:defRPr sz="1000" b="0">
-                <a:solidFill>
-                  <a:srgbClr val="666666"/>
-                </a:solidFill>
-                <a:latin typeface="Calibri"/>
-              </a:defRPr>
-            </a:pPr>
-            <a:r>
-              <a:rPr sz="1000" b="0">
-                <a:solidFill>
-                  <a:srgbClr val="666666"/>
-                </a:solidFill>
-                <a:latin typeface="Calibri"/>
-              </a:rPr>
-              <a:t>Pathfinder Beginner - PS3  |  Lesson 3</a:t>
-            </a:r>
-          </a:p>
-        </p:txBody>
-      </p:sp>
-      <p:sp>
-        <p:nvSpPr>
-          <p:cNvPr id="5" name="TextBox 4"/>
+              <a:defRPr sz="3600" b="1">
+                <a:solidFill>
+                  <a:srgbClr val="1F3A5F"/>
+                </a:solidFill>
+                <a:latin typeface="Calibri"/>
+              </a:defRPr>
+            </a:pPr>
+            <a:r>
+              <a:rPr sz="3600" b="1">
+                <a:solidFill>
+                  <a:srgbClr val="1F3A5F"/>
+                </a:solidFill>
+                <a:latin typeface="Calibri"/>
+              </a:rPr>
+              <a:t>Deadzone and map</a:t>
+            </a:r>
+          </a:p>
+        </p:txBody>
+      </p:sp>
+      <p:sp>
+        <p:nvSpPr>
+          <p:cNvPr id="6" name="TextBox 5"/>
           <p:cNvSpPr txBox="1"/>
           <p:nvPr/>
         </p:nvSpPr>
         <p:spPr>
           <a:xfrm>
-            <a:off x="11231575" y="6382512"/>
-            <a:ext cx="457200" cy="274320"/>
+            <a:off x="777240" y="2423160"/>
+            <a:ext cx="10515600" cy="685800"/>
           </a:xfrm>
           <a:prstGeom prst="rect">
             <a:avLst/>
@@ -12273,19 +12373,19 @@
           <a:noFill/>
         </p:spPr>
         <p:txBody>
-          <a:bodyPr wrap="square" lIns="0" tIns="0">
+          <a:bodyPr wrap="square" lIns="0" tIns="0" rIns="0" bIns="0">
             <a:spAutoFit/>
           </a:bodyPr>
           <a:lstStyle/>
           <a:p>
-            <a:pPr algn="r">
-              <a:lnSpc>
-                <a:spcPct val="100000"/>
-              </a:lnSpc>
-              <a:spcAft>
-                <a:spcPts val="0"/>
-              </a:spcAft>
-              <a:defRPr sz="1000" b="0">
+            <a:pPr algn="l">
+              <a:lnSpc>
+                <a:spcPct val="100000"/>
+              </a:lnSpc>
+              <a:spcAft>
+                <a:spcPts val="400"/>
+              </a:spcAft>
+              <a:defRPr sz="1600" b="0">
                 <a:solidFill>
                   <a:srgbClr val="666666"/>
                 </a:solidFill>
@@ -12293,27 +12393,27 @@
               </a:defRPr>
             </a:pPr>
             <a:r>
-              <a:rPr sz="1000" b="0">
+              <a:rPr sz="1600" b="0">
                 <a:solidFill>
                   <a:srgbClr val="666666"/>
                 </a:solidFill>
                 <a:latin typeface="Calibri"/>
               </a:rPr>
-              <a:t>16</a:t>
-            </a:r>
-          </a:p>
-        </p:txBody>
-      </p:sp>
-      <p:sp>
-        <p:nvSpPr>
-          <p:cNvPr id="6" name="Rounded Rectangle 5"/>
+              <a:t>About 20 minutes</a:t>
+            </a:r>
+          </a:p>
+        </p:txBody>
+      </p:sp>
+      <p:sp>
+        <p:nvSpPr>
+          <p:cNvPr id="7" name="Rounded Rectangle 6"/>
           <p:cNvSpPr/>
           <p:nvPr/>
         </p:nvSpPr>
         <p:spPr>
           <a:xfrm>
-            <a:off x="502920" y="2240280"/>
-            <a:ext cx="2686735" cy="1737360"/>
+            <a:off x="502920" y="3886200"/>
+            <a:ext cx="2686735" cy="1325880"/>
           </a:xfrm>
           <a:prstGeom prst="roundRect">
             <a:avLst>
@@ -12376,14 +12476,14 @@
       </p:sp>
       <p:sp>
         <p:nvSpPr>
-          <p:cNvPr id="7" name="TextBox 6"/>
+          <p:cNvPr id="8" name="TextBox 7"/>
           <p:cNvSpPr txBox="1"/>
           <p:nvPr/>
         </p:nvSpPr>
         <p:spPr>
           <a:xfrm>
-            <a:off x="502920" y="1856232"/>
-            <a:ext cx="2686735" cy="347472"/>
+            <a:off x="502920" y="3520440"/>
+            <a:ext cx="2686735" cy="310896"/>
           </a:xfrm>
           <a:prstGeom prst="rect">
             <a:avLst/>
@@ -12401,9 +12501,9 @@
                 <a:spcPct val="100000"/>
               </a:lnSpc>
               <a:spcAft>
-                <a:spcPts val="600"/>
-              </a:spcAft>
-              <a:defRPr sz="1200" b="1">
+                <a:spcPts val="200"/>
+              </a:spcAft>
+              <a:defRPr sz="1100" b="1">
                 <a:solidFill>
                   <a:srgbClr val="0E7C86"/>
                 </a:solidFill>
@@ -12411,7 +12511,7 @@
               </a:defRPr>
             </a:pPr>
             <a:r>
-              <a:rPr sz="1200" b="1">
+              <a:rPr sz="1100" b="1">
                 <a:solidFill>
                   <a:srgbClr val="0E7C86"/>
                 </a:solidFill>
@@ -12424,14 +12524,14 @@
       </p:sp>
       <p:sp>
         <p:nvSpPr>
-          <p:cNvPr id="8" name="Rounded Rectangle 7"/>
+          <p:cNvPr id="9" name="Rounded Rectangle 8"/>
           <p:cNvSpPr/>
           <p:nvPr/>
         </p:nvSpPr>
         <p:spPr>
           <a:xfrm>
-            <a:off x="3335959" y="2240280"/>
-            <a:ext cx="2686735" cy="1737360"/>
+            <a:off x="3335959" y="3886200"/>
+            <a:ext cx="2686735" cy="1325880"/>
           </a:xfrm>
           <a:prstGeom prst="roundRect">
             <a:avLst>
@@ -12494,14 +12594,14 @@
       </p:sp>
       <p:sp>
         <p:nvSpPr>
-          <p:cNvPr id="9" name="TextBox 8"/>
+          <p:cNvPr id="10" name="TextBox 9"/>
           <p:cNvSpPr txBox="1"/>
           <p:nvPr/>
         </p:nvSpPr>
         <p:spPr>
           <a:xfrm>
-            <a:off x="3335959" y="1856232"/>
-            <a:ext cx="2686735" cy="347472"/>
+            <a:off x="3335959" y="3520440"/>
+            <a:ext cx="2686735" cy="310896"/>
           </a:xfrm>
           <a:prstGeom prst="rect">
             <a:avLst/>
@@ -12519,9 +12619,9 @@
                 <a:spcPct val="100000"/>
               </a:lnSpc>
               <a:spcAft>
-                <a:spcPts val="600"/>
-              </a:spcAft>
-              <a:defRPr sz="1200" b="1">
+                <a:spcPts val="200"/>
+              </a:spcAft>
+              <a:defRPr sz="1100" b="1">
                 <a:solidFill>
                   <a:srgbClr val="0E7C86"/>
                 </a:solidFill>
@@ -12529,7 +12629,7 @@
               </a:defRPr>
             </a:pPr>
             <a:r>
-              <a:rPr sz="1200" b="1">
+              <a:rPr sz="1100" b="1">
                 <a:solidFill>
                   <a:srgbClr val="0E7C86"/>
                 </a:solidFill>
@@ -12542,14 +12642,14 @@
       </p:sp>
       <p:sp>
         <p:nvSpPr>
-          <p:cNvPr id="10" name="Rounded Rectangle 9"/>
+          <p:cNvPr id="11" name="Rounded Rectangle 10"/>
           <p:cNvSpPr/>
           <p:nvPr/>
         </p:nvSpPr>
         <p:spPr>
           <a:xfrm>
-            <a:off x="6168998" y="2240280"/>
-            <a:ext cx="2686735" cy="1737360"/>
+            <a:off x="6168998" y="3886200"/>
+            <a:ext cx="2686735" cy="1325880"/>
           </a:xfrm>
           <a:prstGeom prst="roundRect">
             <a:avLst>
@@ -12612,14 +12712,14 @@
       </p:sp>
       <p:sp>
         <p:nvSpPr>
-          <p:cNvPr id="11" name="TextBox 10"/>
+          <p:cNvPr id="12" name="TextBox 11"/>
           <p:cNvSpPr txBox="1"/>
           <p:nvPr/>
         </p:nvSpPr>
         <p:spPr>
           <a:xfrm>
-            <a:off x="6168998" y="1856232"/>
-            <a:ext cx="2686735" cy="347472"/>
+            <a:off x="6168998" y="3520440"/>
+            <a:ext cx="2686735" cy="310896"/>
           </a:xfrm>
           <a:prstGeom prst="rect">
             <a:avLst/>
@@ -12637,9 +12737,9 @@
                 <a:spcPct val="100000"/>
               </a:lnSpc>
               <a:spcAft>
-                <a:spcPts val="600"/>
-              </a:spcAft>
-              <a:defRPr sz="1200" b="1">
+                <a:spcPts val="200"/>
+              </a:spcAft>
+              <a:defRPr sz="1100" b="1">
                 <a:solidFill>
                   <a:srgbClr val="0E7C86"/>
                 </a:solidFill>
@@ -12647,7 +12747,7 @@
               </a:defRPr>
             </a:pPr>
             <a:r>
-              <a:rPr sz="1200" b="1">
+              <a:rPr sz="1100" b="1">
                 <a:solidFill>
                   <a:srgbClr val="0E7C86"/>
                 </a:solidFill>
@@ -12660,14 +12760,14 @@
       </p:sp>
       <p:sp>
         <p:nvSpPr>
-          <p:cNvPr id="12" name="Rounded Rectangle 11"/>
+          <p:cNvPr id="13" name="Rounded Rectangle 12"/>
           <p:cNvSpPr/>
           <p:nvPr/>
         </p:nvSpPr>
         <p:spPr>
           <a:xfrm>
-            <a:off x="9002037" y="2240280"/>
-            <a:ext cx="2686735" cy="1737360"/>
+            <a:off x="9002037" y="3886200"/>
+            <a:ext cx="2686735" cy="1325880"/>
           </a:xfrm>
           <a:prstGeom prst="roundRect">
             <a:avLst>
@@ -15098,22 +15198,24 @@
       <p:grpSpPr/>
       <p:sp>
         <p:nvSpPr>
-          <p:cNvPr id="2" name="Title 1"/>
-          <p:cNvSpPr>
-            <a:spLocks noGrp="1"/>
-          </p:cNvSpPr>
-          <p:nvPr>
-            <p:ph type="title"/>
-          </p:nvPr>
-        </p:nvSpPr>
-        <p:spPr>
-          <a:xfrm>
-            <a:off x="502920" y="274320"/>
-            <a:ext cx="11185855" cy="777240"/>
-          </a:xfrm>
-        </p:spPr>
-        <p:txBody>
-          <a:bodyPr wrap="square" anchor="b"/>
+          <p:cNvPr id="2" name="TextBox 1"/>
+          <p:cNvSpPr txBox="1"/>
+          <p:nvPr/>
+        </p:nvSpPr>
+        <p:spPr>
+          <a:xfrm>
+            <a:off x="502920" y="6382512"/>
+            <a:ext cx="10545775" cy="274320"/>
+          </a:xfrm>
+          <a:prstGeom prst="rect">
+            <a:avLst/>
+          </a:prstGeom>
+          <a:noFill/>
+        </p:spPr>
+        <p:txBody>
+          <a:bodyPr wrap="square" lIns="0" tIns="0">
+            <a:spAutoFit/>
+          </a:bodyPr>
           <a:lstStyle/>
           <a:p>
             <a:pPr algn="l">
@@ -15123,41 +15225,89 @@
               <a:spcAft>
                 <a:spcPts val="0"/>
               </a:spcAft>
-              <a:defRPr sz="2800" b="1">
-                <a:solidFill>
-                  <a:srgbClr val="1F3A5F"/>
-                </a:solidFill>
-                <a:latin typeface="Calibri"/>
-              </a:defRPr>
-            </a:pPr>
-            <a:r>
-              <a:rPr sz="2800" b="1">
-                <a:solidFill>
-                  <a:srgbClr val="1F3A5F"/>
-                </a:solidFill>
-                <a:latin typeface="Calibri"/>
-              </a:rPr>
-              <a:t>Where we are</a:t>
-            </a:r>
-          </a:p>
-        </p:txBody>
-      </p:sp>
-      <p:sp>
-        <p:nvSpPr>
-          <p:cNvPr id="3" name="Rectangle 2"/>
+              <a:defRPr sz="1000" b="0">
+                <a:solidFill>
+                  <a:srgbClr val="666666"/>
+                </a:solidFill>
+                <a:latin typeface="Calibri"/>
+              </a:defRPr>
+            </a:pPr>
+            <a:r>
+              <a:rPr sz="1000" b="0">
+                <a:solidFill>
+                  <a:srgbClr val="666666"/>
+                </a:solidFill>
+                <a:latin typeface="Calibri"/>
+              </a:rPr>
+              <a:t>Pathfinder Beginner - PS3  |  Lesson 3</a:t>
+            </a:r>
+          </a:p>
+        </p:txBody>
+      </p:sp>
+      <p:sp>
+        <p:nvSpPr>
+          <p:cNvPr id="3" name="TextBox 2"/>
+          <p:cNvSpPr txBox="1"/>
+          <p:nvPr/>
+        </p:nvSpPr>
+        <p:spPr>
+          <a:xfrm>
+            <a:off x="11231575" y="6382512"/>
+            <a:ext cx="457200" cy="274320"/>
+          </a:xfrm>
+          <a:prstGeom prst="rect">
+            <a:avLst/>
+          </a:prstGeom>
+          <a:noFill/>
+        </p:spPr>
+        <p:txBody>
+          <a:bodyPr wrap="square" lIns="0" tIns="0">
+            <a:spAutoFit/>
+          </a:bodyPr>
+          <a:lstStyle/>
+          <a:p>
+            <a:pPr algn="r">
+              <a:lnSpc>
+                <a:spcPct val="100000"/>
+              </a:lnSpc>
+              <a:spcAft>
+                <a:spcPts val="0"/>
+              </a:spcAft>
+              <a:defRPr sz="1000" b="0">
+                <a:solidFill>
+                  <a:srgbClr val="666666"/>
+                </a:solidFill>
+                <a:latin typeface="Calibri"/>
+              </a:defRPr>
+            </a:pPr>
+            <a:r>
+              <a:rPr sz="1000" b="0">
+                <a:solidFill>
+                  <a:srgbClr val="666666"/>
+                </a:solidFill>
+                <a:latin typeface="Calibri"/>
+              </a:rPr>
+              <a:t>20</a:t>
+            </a:r>
+          </a:p>
+        </p:txBody>
+      </p:sp>
+      <p:sp>
+        <p:nvSpPr>
+          <p:cNvPr id="4" name="Rectangle 3"/>
           <p:cNvSpPr/>
           <p:nvPr/>
         </p:nvSpPr>
         <p:spPr>
           <a:xfrm>
-            <a:off x="502920" y="1097280"/>
-            <a:ext cx="11185855" cy="19050"/>
+            <a:off x="0" y="1234440"/>
+            <a:ext cx="256032" cy="1554480"/>
           </a:xfrm>
           <a:prstGeom prst="rect">
             <a:avLst/>
           </a:prstGeom>
           <a:solidFill>
-            <a:srgbClr val="C8D2DE"/>
+            <a:srgbClr val="0E7C86"/>
           </a:solidFill>
           <a:ln>
             <a:noFill/>
@@ -15188,14 +15338,14 @@
       </p:sp>
       <p:sp>
         <p:nvSpPr>
-          <p:cNvPr id="4" name="TextBox 3"/>
+          <p:cNvPr id="5" name="TextBox 4"/>
           <p:cNvSpPr txBox="1"/>
           <p:nvPr/>
         </p:nvSpPr>
         <p:spPr>
           <a:xfrm>
-            <a:off x="502920" y="6382512"/>
-            <a:ext cx="10545775" cy="274320"/>
+            <a:off x="777240" y="1325880"/>
+            <a:ext cx="10515600" cy="1051560"/>
           </a:xfrm>
           <a:prstGeom prst="rect">
             <a:avLst/>
@@ -15203,7 +15353,7 @@
           <a:noFill/>
         </p:spPr>
         <p:txBody>
-          <a:bodyPr wrap="square" lIns="0" tIns="0">
+          <a:bodyPr wrap="square" lIns="0" tIns="0" rIns="0" bIns="0">
             <a:spAutoFit/>
           </a:bodyPr>
           <a:lstStyle/>
@@ -15215,35 +15365,35 @@
               <a:spcAft>
                 <a:spcPts val="0"/>
               </a:spcAft>
-              <a:defRPr sz="1000" b="0">
-                <a:solidFill>
-                  <a:srgbClr val="666666"/>
-                </a:solidFill>
-                <a:latin typeface="Calibri"/>
-              </a:defRPr>
-            </a:pPr>
-            <a:r>
-              <a:rPr sz="1000" b="0">
-                <a:solidFill>
-                  <a:srgbClr val="666666"/>
-                </a:solidFill>
-                <a:latin typeface="Calibri"/>
-              </a:rPr>
-              <a:t>Pathfinder Beginner - PS3  |  Lesson 3</a:t>
-            </a:r>
-          </a:p>
-        </p:txBody>
-      </p:sp>
-      <p:sp>
-        <p:nvSpPr>
-          <p:cNvPr id="5" name="TextBox 4"/>
+              <a:defRPr sz="3600" b="1">
+                <a:solidFill>
+                  <a:srgbClr val="1F3A5F"/>
+                </a:solidFill>
+                <a:latin typeface="Calibri"/>
+              </a:defRPr>
+            </a:pPr>
+            <a:r>
+              <a:rPr sz="3600" b="1">
+                <a:solidFill>
+                  <a:srgbClr val="1F3A5F"/>
+                </a:solidFill>
+                <a:latin typeface="Calibri"/>
+              </a:rPr>
+              <a:t>Driving it</a:t>
+            </a:r>
+          </a:p>
+        </p:txBody>
+      </p:sp>
+      <p:sp>
+        <p:nvSpPr>
+          <p:cNvPr id="6" name="TextBox 5"/>
           <p:cNvSpPr txBox="1"/>
           <p:nvPr/>
         </p:nvSpPr>
         <p:spPr>
           <a:xfrm>
-            <a:off x="11231575" y="6382512"/>
-            <a:ext cx="457200" cy="274320"/>
+            <a:off x="777240" y="2423160"/>
+            <a:ext cx="10515600" cy="685800"/>
           </a:xfrm>
           <a:prstGeom prst="rect">
             <a:avLst/>
@@ -15251,19 +15401,19 @@
           <a:noFill/>
         </p:spPr>
         <p:txBody>
-          <a:bodyPr wrap="square" lIns="0" tIns="0">
+          <a:bodyPr wrap="square" lIns="0" tIns="0" rIns="0" bIns="0">
             <a:spAutoFit/>
           </a:bodyPr>
           <a:lstStyle/>
           <a:p>
-            <a:pPr algn="r">
-              <a:lnSpc>
-                <a:spcPct val="100000"/>
-              </a:lnSpc>
-              <a:spcAft>
-                <a:spcPts val="0"/>
-              </a:spcAft>
-              <a:defRPr sz="1000" b="0">
+            <a:pPr algn="l">
+              <a:lnSpc>
+                <a:spcPct val="100000"/>
+              </a:lnSpc>
+              <a:spcAft>
+                <a:spcPts val="400"/>
+              </a:spcAft>
+              <a:defRPr sz="1600" b="0">
                 <a:solidFill>
                   <a:srgbClr val="666666"/>
                 </a:solidFill>
@@ -15271,27 +15421,27 @@
               </a:defRPr>
             </a:pPr>
             <a:r>
-              <a:rPr sz="1000" b="0">
+              <a:rPr sz="1600" b="0">
                 <a:solidFill>
                   <a:srgbClr val="666666"/>
                 </a:solidFill>
                 <a:latin typeface="Calibri"/>
               </a:rPr>
-              <a:t>20</a:t>
-            </a:r>
-          </a:p>
-        </p:txBody>
-      </p:sp>
-      <p:sp>
-        <p:nvSpPr>
-          <p:cNvPr id="6" name="Rounded Rectangle 5"/>
+              <a:t>About 30 minutes</a:t>
+            </a:r>
+          </a:p>
+        </p:txBody>
+      </p:sp>
+      <p:sp>
+        <p:nvSpPr>
+          <p:cNvPr id="7" name="Rounded Rectangle 6"/>
           <p:cNvSpPr/>
           <p:nvPr/>
         </p:nvSpPr>
         <p:spPr>
           <a:xfrm>
-            <a:off x="502920" y="2240280"/>
-            <a:ext cx="2686735" cy="1737360"/>
+            <a:off x="502920" y="3886200"/>
+            <a:ext cx="2686735" cy="1325880"/>
           </a:xfrm>
           <a:prstGeom prst="roundRect">
             <a:avLst>
@@ -15354,14 +15504,14 @@
       </p:sp>
       <p:sp>
         <p:nvSpPr>
-          <p:cNvPr id="7" name="TextBox 6"/>
+          <p:cNvPr id="8" name="TextBox 7"/>
           <p:cNvSpPr txBox="1"/>
           <p:nvPr/>
         </p:nvSpPr>
         <p:spPr>
           <a:xfrm>
-            <a:off x="502920" y="1856232"/>
-            <a:ext cx="2686735" cy="347472"/>
+            <a:off x="502920" y="3520440"/>
+            <a:ext cx="2686735" cy="310896"/>
           </a:xfrm>
           <a:prstGeom prst="rect">
             <a:avLst/>
@@ -15379,9 +15529,9 @@
                 <a:spcPct val="100000"/>
               </a:lnSpc>
               <a:spcAft>
-                <a:spcPts val="600"/>
-              </a:spcAft>
-              <a:defRPr sz="1200" b="1">
+                <a:spcPts val="200"/>
+              </a:spcAft>
+              <a:defRPr sz="1100" b="1">
                 <a:solidFill>
                   <a:srgbClr val="0E7C86"/>
                 </a:solidFill>
@@ -15389,7 +15539,7 @@
               </a:defRPr>
             </a:pPr>
             <a:r>
-              <a:rPr sz="1200" b="1">
+              <a:rPr sz="1100" b="1">
                 <a:solidFill>
                   <a:srgbClr val="0E7C86"/>
                 </a:solidFill>
@@ -15402,14 +15552,14 @@
       </p:sp>
       <p:sp>
         <p:nvSpPr>
-          <p:cNvPr id="8" name="Rounded Rectangle 7"/>
+          <p:cNvPr id="9" name="Rounded Rectangle 8"/>
           <p:cNvSpPr/>
           <p:nvPr/>
         </p:nvSpPr>
         <p:spPr>
           <a:xfrm>
-            <a:off x="3335959" y="2240280"/>
-            <a:ext cx="2686735" cy="1737360"/>
+            <a:off x="3335959" y="3886200"/>
+            <a:ext cx="2686735" cy="1325880"/>
           </a:xfrm>
           <a:prstGeom prst="roundRect">
             <a:avLst>
@@ -15472,14 +15622,14 @@
       </p:sp>
       <p:sp>
         <p:nvSpPr>
-          <p:cNvPr id="9" name="TextBox 8"/>
+          <p:cNvPr id="10" name="TextBox 9"/>
           <p:cNvSpPr txBox="1"/>
           <p:nvPr/>
         </p:nvSpPr>
         <p:spPr>
           <a:xfrm>
-            <a:off x="3335959" y="1856232"/>
-            <a:ext cx="2686735" cy="347472"/>
+            <a:off x="3335959" y="3520440"/>
+            <a:ext cx="2686735" cy="310896"/>
           </a:xfrm>
           <a:prstGeom prst="rect">
             <a:avLst/>
@@ -15497,9 +15647,9 @@
                 <a:spcPct val="100000"/>
               </a:lnSpc>
               <a:spcAft>
-                <a:spcPts val="600"/>
-              </a:spcAft>
-              <a:defRPr sz="1200" b="1">
+                <a:spcPts val="200"/>
+              </a:spcAft>
+              <a:defRPr sz="1100" b="1">
                 <a:solidFill>
                   <a:srgbClr val="0E7C86"/>
                 </a:solidFill>
@@ -15507,7 +15657,7 @@
               </a:defRPr>
             </a:pPr>
             <a:r>
-              <a:rPr sz="1200" b="1">
+              <a:rPr sz="1100" b="1">
                 <a:solidFill>
                   <a:srgbClr val="0E7C86"/>
                 </a:solidFill>
@@ -15520,14 +15670,14 @@
       </p:sp>
       <p:sp>
         <p:nvSpPr>
-          <p:cNvPr id="10" name="Rounded Rectangle 9"/>
+          <p:cNvPr id="11" name="Rounded Rectangle 10"/>
           <p:cNvSpPr/>
           <p:nvPr/>
         </p:nvSpPr>
         <p:spPr>
           <a:xfrm>
-            <a:off x="6168998" y="2240280"/>
-            <a:ext cx="2686735" cy="1737360"/>
+            <a:off x="6168998" y="3886200"/>
+            <a:ext cx="2686735" cy="1325880"/>
           </a:xfrm>
           <a:prstGeom prst="roundRect">
             <a:avLst>
@@ -15590,14 +15740,14 @@
       </p:sp>
       <p:sp>
         <p:nvSpPr>
-          <p:cNvPr id="11" name="TextBox 10"/>
+          <p:cNvPr id="12" name="TextBox 11"/>
           <p:cNvSpPr txBox="1"/>
           <p:nvPr/>
         </p:nvSpPr>
         <p:spPr>
           <a:xfrm>
-            <a:off x="6168998" y="1856232"/>
-            <a:ext cx="2686735" cy="347472"/>
+            <a:off x="6168998" y="3520440"/>
+            <a:ext cx="2686735" cy="310896"/>
           </a:xfrm>
           <a:prstGeom prst="rect">
             <a:avLst/>
@@ -15615,9 +15765,9 @@
                 <a:spcPct val="100000"/>
               </a:lnSpc>
               <a:spcAft>
-                <a:spcPts val="600"/>
-              </a:spcAft>
-              <a:defRPr sz="1200" b="1">
+                <a:spcPts val="200"/>
+              </a:spcAft>
+              <a:defRPr sz="1100" b="1">
                 <a:solidFill>
                   <a:srgbClr val="0E7C86"/>
                 </a:solidFill>
@@ -15625,7 +15775,7 @@
               </a:defRPr>
             </a:pPr>
             <a:r>
-              <a:rPr sz="1200" b="1">
+              <a:rPr sz="1100" b="1">
                 <a:solidFill>
                   <a:srgbClr val="0E7C86"/>
                 </a:solidFill>
@@ -15638,14 +15788,14 @@
       </p:sp>
       <p:sp>
         <p:nvSpPr>
-          <p:cNvPr id="12" name="Rounded Rectangle 11"/>
+          <p:cNvPr id="13" name="Rounded Rectangle 12"/>
           <p:cNvSpPr/>
           <p:nvPr/>
         </p:nvSpPr>
         <p:spPr>
           <a:xfrm>
-            <a:off x="9002037" y="2240280"/>
-            <a:ext cx="2686735" cy="1737360"/>
+            <a:off x="9002037" y="3886200"/>
+            <a:ext cx="2686735" cy="1325880"/>
           </a:xfrm>
           <a:prstGeom prst="roundRect">
             <a:avLst>
@@ -15708,14 +15858,14 @@
       </p:sp>
       <p:sp>
         <p:nvSpPr>
-          <p:cNvPr id="13" name="TextBox 12"/>
+          <p:cNvPr id="14" name="TextBox 13"/>
           <p:cNvSpPr txBox="1"/>
           <p:nvPr/>
         </p:nvSpPr>
         <p:spPr>
           <a:xfrm>
-            <a:off x="9002037" y="1856232"/>
-            <a:ext cx="2686735" cy="347472"/>
+            <a:off x="9002037" y="3520440"/>
+            <a:ext cx="2686735" cy="310896"/>
           </a:xfrm>
           <a:prstGeom prst="rect">
             <a:avLst/>
@@ -15733,9 +15883,9 @@
                 <a:spcPct val="100000"/>
               </a:lnSpc>
               <a:spcAft>
-                <a:spcPts val="600"/>
-              </a:spcAft>
-              <a:defRPr sz="1200" b="1">
+                <a:spcPts val="200"/>
+              </a:spcAft>
+              <a:defRPr sz="1100" b="1">
                 <a:solidFill>
                   <a:srgbClr val="0E7C86"/>
                 </a:solidFill>
@@ -15743,7 +15893,7 @@
               </a:defRPr>
             </a:pPr>
             <a:r>
-              <a:rPr sz="1200" b="1">
+              <a:rPr sz="1100" b="1">
                 <a:solidFill>
                   <a:srgbClr val="0E7C86"/>
                 </a:solidFill>

--- a/ground-vehicle/docs/courses/beginner-ps3/l3_controller_programming.pptx
+++ b/ground-vehicle/docs/courses/beginner-ps3/l3_controller_programming.pptx
@@ -982,31 +982,7 @@
               <a:rPr sz="1200">
                 <a:latin typeface="Calibri"/>
               </a:rPr>
-              <a:t>They measured the drift ten minutes ago. Ask for numbers before you explain anything.</a:t>
-            </a:r>
-          </a:p>
-          <a:p>
-            <a:r>
-              <a:rPr sz="1200">
-                <a:latin typeface="Calibri"/>
-              </a:rPr>
-              <a:t>Paint the picture: twenty vehicles creeping across a classroom floor with nobody touching a controller.</a:t>
-            </a:r>
-          </a:p>
-          <a:p>
-            <a:r>
-              <a:rPr sz="1200">
-                <a:latin typeface="Calibri"/>
-              </a:rPr>
-              <a:t>The deadzone value and percentage on this slide are read out of the sketch at build time, so they match the file they are about to edit.</a:t>
-            </a:r>
-          </a:p>
-          <a:p>
-            <a:r>
-              <a:rPr sz="1200">
-                <a:latin typeface="Calibri"/>
-              </a:rPr>
-              <a:t>The trade-off is the point: too small and it creeps, too big and you waste the stick. They will feel both in the next activity.</a:t>
+              <a:t>Twenty seconds. Two of three.</a:t>
             </a:r>
           </a:p>
         </p:txBody>
@@ -1079,7 +1055,7 @@
               <a:rPr sz="1200">
                 <a:latin typeface="Calibri"/>
               </a:rPr>
-              <a:t>The two numbers that matter are the deadzone and the top of the stick range. Everything else on the slide follows from those.</a:t>
+              <a:t>They measured the drift ten minutes ago. Ask for numbers before you explain anything.</a:t>
             </a:r>
           </a:p>
           <a:p>
@@ -1087,7 +1063,7 @@
               <a:rPr sz="1200">
                 <a:latin typeface="Calibri"/>
               </a:rPr>
-              <a:t>Ask why the line does not start at zero. The answer - a stick at rest is never exactly centerd - is worth getting from the room rather than telling them.</a:t>
+              <a:t>Paint the picture: twenty vehicles creeping across a classroom floor with nobody touching a controller.</a:t>
             </a:r>
           </a:p>
           <a:p>
@@ -1095,7 +1071,7 @@
               <a:rPr sz="1200">
                 <a:latin typeface="Calibri"/>
               </a:rPr>
-              <a:t>The jump at the deadzone edge is deliberate: below the minimum duty the motor buzzes instead of turning, so the map skips straight past it.</a:t>
+              <a:t>The deadzone value and percentage on this slide are read out of the sketch at build time, so they match the file they are about to edit.</a:t>
             </a:r>
           </a:p>
           <a:p>
@@ -1103,7 +1079,7 @@
               <a:rPr sz="1200">
                 <a:latin typeface="Calibri"/>
               </a:rPr>
-              <a:t>Come back to this diagram when somebody's vehicle creeps on its own.</a:t>
+              <a:t>The trade-off is the point: too small and it creeps, too big and you waste the stick. They will feel both in the next activity.</a:t>
             </a:r>
           </a:p>
         </p:txBody>
@@ -1176,7 +1152,7 @@
               <a:rPr sz="1200">
                 <a:latin typeface="Calibri"/>
               </a:rPr>
-              <a:t>map() is just proportion. Say that first, then show the three worked examples.</a:t>
+              <a:t>The two numbers that matter are the deadzone and the top of the stick range. Everything else on the slide follows from those.</a:t>
             </a:r>
           </a:p>
           <a:p>
@@ -1184,7 +1160,7 @@
               <a:rPr sz="1200">
                 <a:latin typeface="Calibri"/>
               </a:rPr>
-              <a:t>The important subtlety is on the last line: the low end is the DEADZONE, not zero. Without that, the leftover travel could never reach full speed.</a:t>
+              <a:t>Ask why the line does not start at zero. The answer - a stick at rest is never exactly centerd - is worth getting from the room rather than telling them.</a:t>
             </a:r>
           </a:p>
           <a:p>
@@ -1192,7 +1168,7 @@
               <a:rPr sz="1200">
                 <a:latin typeface="Calibri"/>
               </a:rPr>
-              <a:t>map() does not clamp. Feed it something outside the range and you get something outside the range - which is exactly why constrain() exists.</a:t>
+              <a:t>The jump at the deadzone edge is deliberate: below the minimum duty the motor buzzes instead of turning, so the map skips straight past it.</a:t>
             </a:r>
           </a:p>
           <a:p>
@@ -1200,7 +1176,7 @@
               <a:rPr sz="1200">
                 <a:latin typeface="Calibri"/>
               </a:rPr>
-              <a:t>Get them to work out one example on paper before the activity.</a:t>
+              <a:t>Come back to this diagram when somebody's vehicle creeps on its own.</a:t>
             </a:r>
           </a:p>
         </p:txBody>
@@ -1273,7 +1249,31 @@
               <a:rPr sz="1200">
                 <a:latin typeface="Calibri"/>
               </a:rPr>
-              <a:t>Twenty seconds. Two of three.</a:t>
+              <a:t>map() is just proportion. Say that first, then show the three worked examples.</a:t>
+            </a:r>
+          </a:p>
+          <a:p>
+            <a:r>
+              <a:rPr sz="1200">
+                <a:latin typeface="Calibri"/>
+              </a:rPr>
+              <a:t>The important subtlety is on the last line: the low end is the DEADZONE, not zero. Without that, the leftover travel could never reach full speed.</a:t>
+            </a:r>
+          </a:p>
+          <a:p>
+            <a:r>
+              <a:rPr sz="1200">
+                <a:latin typeface="Calibri"/>
+              </a:rPr>
+              <a:t>map() does not clamp. Feed it something outside the range and you get something outside the range - which is exactly why constrain() exists.</a:t>
+            </a:r>
+          </a:p>
+          <a:p>
+            <a:r>
+              <a:rPr sz="1200">
+                <a:latin typeface="Calibri"/>
+              </a:rPr>
+              <a:t>Get them to work out one example on paper before the activity.</a:t>
             </a:r>
           </a:p>
         </p:txBody>
@@ -1443,23 +1443,7 @@
               <a:rPr sz="1200">
                 <a:latin typeface="Calibri"/>
               </a:rPr>
-              <a:t>Two lines of arithmetic. Write them on the board and work an example with the room before you show the slide.</a:t>
-            </a:r>
-          </a:p>
-          <a:p>
-            <a:r>
-              <a:rPr sz="1200">
-                <a:latin typeface="Calibri"/>
-              </a:rPr>
-              <a:t>The half-power steering choice is a design decision, not a limitation. Explain the reasoning: full-power steering spins faster than anybody can correct for.</a:t>
-            </a:r>
-          </a:p>
-          <a:p>
-            <a:r>
-              <a:rPr sz="1200">
-                <a:latin typeface="Calibri"/>
-              </a:rPr>
-              <a:t>constrain() is what catches forward 200 plus turn 60. Ask what would happen without it - the number wraps past what the motor can take and the vehicle turns the wrong way.</a:t>
+              <a:t>Twenty seconds, then clear the floor.</a:t>
             </a:r>
           </a:p>
         </p:txBody>
@@ -1605,7 +1589,7 @@
               <a:rPr sz="1200">
                 <a:latin typeface="Calibri"/>
               </a:rPr>
-              <a:t>Read the first four lines twice. That is the failsafe, and it is the most important thing in the file.</a:t>
+              <a:t>Two lines of arithmetic. Write them on the board and work an example with the room before you show the slide.</a:t>
             </a:r>
           </a:p>
           <a:p>
@@ -1613,7 +1597,7 @@
               <a:rPr sz="1200">
                 <a:latin typeface="Calibri"/>
               </a:rPr>
-              <a:t>The minus sign in front of leftStickY is the up-is-negative fix from earlier. Point back at it.</a:t>
+              <a:t>The half-power steering choice is a design decision, not a limitation. Explain the reasoning: full-power steering spins faster than anybody can correct for.</a:t>
             </a:r>
           </a:p>
           <a:p>
@@ -1621,15 +1605,7 @@
               <a:rPr sz="1200">
                 <a:latin typeface="Calibri"/>
               </a:rPr>
-              <a:t>Ask which line sets speed and which sets steering, then which one limits steering to half.</a:t>
-            </a:r>
-          </a:p>
-          <a:p>
-            <a:r>
-              <a:rPr sz="1200">
-                <a:latin typeface="Calibri"/>
-              </a:rPr>
-              <a:t>This is the first program in the course they could plausibly have written themselves. Say so.</a:t>
+              <a:t>constrain() is what catches forward 200 plus turn 60. Ask what would happen without it - the number wraps past what the motor can take and the vehicle turns the wrong way.</a:t>
             </a:r>
           </a:p>
         </p:txBody>
@@ -1702,7 +1678,31 @@
               <a:rPr sz="1200">
                 <a:latin typeface="Calibri"/>
               </a:rPr>
-              <a:t>Twenty seconds, then clear the floor.</a:t>
+              <a:t>Read the first four lines twice. That is the failsafe, and it is the most important thing in the file.</a:t>
+            </a:r>
+          </a:p>
+          <a:p>
+            <a:r>
+              <a:rPr sz="1200">
+                <a:latin typeface="Calibri"/>
+              </a:rPr>
+              <a:t>The minus sign in front of leftStickY is the up-is-negative fix from earlier. Point back at it.</a:t>
+            </a:r>
+          </a:p>
+          <a:p>
+            <a:r>
+              <a:rPr sz="1200">
+                <a:latin typeface="Calibri"/>
+              </a:rPr>
+              <a:t>Ask which line sets speed and which sets steering, then which one limits steering to half.</a:t>
+            </a:r>
+          </a:p>
+          <a:p>
+            <a:r>
+              <a:rPr sz="1200">
+                <a:latin typeface="Calibri"/>
+              </a:rPr>
+              <a:t>This is the first program in the course they could plausibly have written themselves. Say so.</a:t>
             </a:r>
           </a:p>
         </p:txBody>
@@ -9852,22 +9852,24 @@
       <p:grpSpPr/>
       <p:sp>
         <p:nvSpPr>
-          <p:cNvPr id="2" name="Title 1"/>
-          <p:cNvSpPr>
-            <a:spLocks noGrp="1"/>
-          </p:cNvSpPr>
-          <p:nvPr>
-            <p:ph type="title"/>
-          </p:nvPr>
-        </p:nvSpPr>
-        <p:spPr>
-          <a:xfrm>
-            <a:off x="502920" y="274320"/>
-            <a:ext cx="11185855" cy="777240"/>
-          </a:xfrm>
-        </p:spPr>
-        <p:txBody>
-          <a:bodyPr wrap="square" anchor="b"/>
+          <p:cNvPr id="2" name="TextBox 1"/>
+          <p:cNvSpPr txBox="1"/>
+          <p:nvPr/>
+        </p:nvSpPr>
+        <p:spPr>
+          <a:xfrm>
+            <a:off x="502920" y="6382512"/>
+            <a:ext cx="10545775" cy="274320"/>
+          </a:xfrm>
+          <a:prstGeom prst="rect">
+            <a:avLst/>
+          </a:prstGeom>
+          <a:noFill/>
+        </p:spPr>
+        <p:txBody>
+          <a:bodyPr wrap="square" lIns="0" tIns="0">
+            <a:spAutoFit/>
+          </a:bodyPr>
           <a:lstStyle/>
           <a:p>
             <a:pPr algn="l">
@@ -9877,41 +9879,89 @@
               <a:spcAft>
                 <a:spcPts val="0"/>
               </a:spcAft>
-              <a:defRPr sz="2800" b="1">
-                <a:solidFill>
-                  <a:srgbClr val="1F3A5F"/>
-                </a:solidFill>
-                <a:latin typeface="Calibri"/>
-              </a:defRPr>
-            </a:pPr>
-            <a:r>
-              <a:rPr sz="2800" b="1">
-                <a:solidFill>
-                  <a:srgbClr val="1F3A5F"/>
-                </a:solidFill>
-                <a:latin typeface="Calibri"/>
-              </a:rPr>
-              <a:t>The problem with believing the stick</a:t>
-            </a:r>
-          </a:p>
-        </p:txBody>
-      </p:sp>
-      <p:sp>
-        <p:nvSpPr>
-          <p:cNvPr id="3" name="Rectangle 2"/>
+              <a:defRPr sz="1000" b="0">
+                <a:solidFill>
+                  <a:srgbClr val="666666"/>
+                </a:solidFill>
+                <a:latin typeface="Calibri"/>
+              </a:defRPr>
+            </a:pPr>
+            <a:r>
+              <a:rPr sz="1000" b="0">
+                <a:solidFill>
+                  <a:srgbClr val="666666"/>
+                </a:solidFill>
+                <a:latin typeface="Calibri"/>
+              </a:rPr>
+              <a:t>Pathfinder Beginner - PS3  |  Lesson 3</a:t>
+            </a:r>
+          </a:p>
+        </p:txBody>
+      </p:sp>
+      <p:sp>
+        <p:nvSpPr>
+          <p:cNvPr id="3" name="TextBox 2"/>
+          <p:cNvSpPr txBox="1"/>
+          <p:nvPr/>
+        </p:nvSpPr>
+        <p:spPr>
+          <a:xfrm>
+            <a:off x="11231575" y="6382512"/>
+            <a:ext cx="457200" cy="274320"/>
+          </a:xfrm>
+          <a:prstGeom prst="rect">
+            <a:avLst/>
+          </a:prstGeom>
+          <a:noFill/>
+        </p:spPr>
+        <p:txBody>
+          <a:bodyPr wrap="square" lIns="0" tIns="0">
+            <a:spAutoFit/>
+          </a:bodyPr>
+          <a:lstStyle/>
+          <a:p>
+            <a:pPr algn="r">
+              <a:lnSpc>
+                <a:spcPct val="100000"/>
+              </a:lnSpc>
+              <a:spcAft>
+                <a:spcPts val="0"/>
+              </a:spcAft>
+              <a:defRPr sz="1000" b="0">
+                <a:solidFill>
+                  <a:srgbClr val="666666"/>
+                </a:solidFill>
+                <a:latin typeface="Calibri"/>
+              </a:defRPr>
+            </a:pPr>
+            <a:r>
+              <a:rPr sz="1000" b="0">
+                <a:solidFill>
+                  <a:srgbClr val="666666"/>
+                </a:solidFill>
+                <a:latin typeface="Calibri"/>
+              </a:rPr>
+              <a:t>13</a:t>
+            </a:r>
+          </a:p>
+        </p:txBody>
+      </p:sp>
+      <p:sp>
+        <p:nvSpPr>
+          <p:cNvPr id="4" name="Rectangle 3"/>
           <p:cNvSpPr/>
           <p:nvPr/>
         </p:nvSpPr>
         <p:spPr>
           <a:xfrm>
-            <a:off x="502920" y="1097280"/>
-            <a:ext cx="11185855" cy="19050"/>
+            <a:off x="0" y="1234440"/>
+            <a:ext cx="256032" cy="1554480"/>
           </a:xfrm>
           <a:prstGeom prst="rect">
             <a:avLst/>
           </a:prstGeom>
           <a:solidFill>
-            <a:srgbClr val="C8D2DE"/>
+            <a:srgbClr val="0E7C86"/>
           </a:solidFill>
           <a:ln>
             <a:noFill/>
@@ -9942,14 +9992,14 @@
       </p:sp>
       <p:sp>
         <p:nvSpPr>
-          <p:cNvPr id="4" name="TextBox 3"/>
+          <p:cNvPr id="5" name="TextBox 4"/>
           <p:cNvSpPr txBox="1"/>
           <p:nvPr/>
         </p:nvSpPr>
         <p:spPr>
           <a:xfrm>
-            <a:off x="502920" y="6382512"/>
-            <a:ext cx="10545775" cy="274320"/>
+            <a:off x="777240" y="1325880"/>
+            <a:ext cx="10515600" cy="1051560"/>
           </a:xfrm>
           <a:prstGeom prst="rect">
             <a:avLst/>
@@ -9957,7 +10007,7 @@
           <a:noFill/>
         </p:spPr>
         <p:txBody>
-          <a:bodyPr wrap="square" lIns="0" tIns="0">
+          <a:bodyPr wrap="square" lIns="0" tIns="0" rIns="0" bIns="0">
             <a:spAutoFit/>
           </a:bodyPr>
           <a:lstStyle/>
@@ -9969,35 +10019,35 @@
               <a:spcAft>
                 <a:spcPts val="0"/>
               </a:spcAft>
-              <a:defRPr sz="1000" b="0">
-                <a:solidFill>
-                  <a:srgbClr val="666666"/>
-                </a:solidFill>
-                <a:latin typeface="Calibri"/>
-              </a:defRPr>
-            </a:pPr>
-            <a:r>
-              <a:rPr sz="1000" b="0">
-                <a:solidFill>
-                  <a:srgbClr val="666666"/>
-                </a:solidFill>
-                <a:latin typeface="Calibri"/>
-              </a:rPr>
-              <a:t>Pathfinder Beginner - PS3  |  Lesson 3</a:t>
-            </a:r>
-          </a:p>
-        </p:txBody>
-      </p:sp>
-      <p:sp>
-        <p:nvSpPr>
-          <p:cNvPr id="5" name="TextBox 4"/>
+              <a:defRPr sz="3600" b="1">
+                <a:solidFill>
+                  <a:srgbClr val="1F3A5F"/>
+                </a:solidFill>
+                <a:latin typeface="Calibri"/>
+              </a:defRPr>
+            </a:pPr>
+            <a:r>
+              <a:rPr sz="3600" b="1">
+                <a:solidFill>
+                  <a:srgbClr val="1F3A5F"/>
+                </a:solidFill>
+                <a:latin typeface="Calibri"/>
+              </a:rPr>
+              <a:t>Deadzone and map</a:t>
+            </a:r>
+          </a:p>
+        </p:txBody>
+      </p:sp>
+      <p:sp>
+        <p:nvSpPr>
+          <p:cNvPr id="6" name="TextBox 5"/>
           <p:cNvSpPr txBox="1"/>
           <p:nvPr/>
         </p:nvSpPr>
         <p:spPr>
           <a:xfrm>
-            <a:off x="11231575" y="6382512"/>
-            <a:ext cx="457200" cy="274320"/>
+            <a:off x="777240" y="2423160"/>
+            <a:ext cx="10515600" cy="685800"/>
           </a:xfrm>
           <a:prstGeom prst="rect">
             <a:avLst/>
@@ -10005,47 +10055,117 @@
           <a:noFill/>
         </p:spPr>
         <p:txBody>
-          <a:bodyPr wrap="square" lIns="0" tIns="0">
+          <a:bodyPr wrap="square" lIns="0" tIns="0" rIns="0" bIns="0">
             <a:spAutoFit/>
           </a:bodyPr>
           <a:lstStyle/>
           <a:p>
-            <a:pPr algn="r">
+            <a:pPr algn="l">
+              <a:lnSpc>
+                <a:spcPct val="100000"/>
+              </a:lnSpc>
+              <a:spcAft>
+                <a:spcPts val="400"/>
+              </a:spcAft>
+              <a:defRPr sz="1600" b="0">
+                <a:solidFill>
+                  <a:srgbClr val="666666"/>
+                </a:solidFill>
+                <a:latin typeface="Calibri"/>
+              </a:defRPr>
+            </a:pPr>
+            <a:r>
+              <a:rPr sz="1600" b="0">
+                <a:solidFill>
+                  <a:srgbClr val="666666"/>
+                </a:solidFill>
+                <a:latin typeface="Calibri"/>
+              </a:rPr>
+              <a:t>About 45 minutes</a:t>
+            </a:r>
+          </a:p>
+        </p:txBody>
+      </p:sp>
+      <p:sp>
+        <p:nvSpPr>
+          <p:cNvPr id="7" name="Rounded Rectangle 6"/>
+          <p:cNvSpPr/>
+          <p:nvPr/>
+        </p:nvSpPr>
+        <p:spPr>
+          <a:xfrm>
+            <a:off x="502920" y="3886200"/>
+            <a:ext cx="2686735" cy="1325880"/>
+          </a:xfrm>
+          <a:prstGeom prst="roundRect">
+            <a:avLst>
+              <a:gd name="adj" fmla="val 8000"/>
+            </a:avLst>
+          </a:prstGeom>
+          <a:solidFill>
+            <a:srgbClr val="EEF3F8"/>
+          </a:solidFill>
+          <a:ln w="12700">
+            <a:solidFill>
+              <a:srgbClr val="0E7C86"/>
+            </a:solidFill>
+          </a:ln>
+          <a:effectLst/>
+        </p:spPr>
+        <p:style>
+          <a:lnRef idx="1">
+            <a:schemeClr val="accent1"/>
+          </a:lnRef>
+          <a:fillRef idx="3">
+            <a:schemeClr val="accent1"/>
+          </a:fillRef>
+          <a:effectRef idx="2">
+            <a:schemeClr val="accent1"/>
+          </a:effectRef>
+          <a:fontRef idx="minor">
+            <a:schemeClr val="lt1"/>
+          </a:fontRef>
+        </p:style>
+        <p:txBody>
+          <a:bodyPr rtlCol="0" anchor="ctr" wrap="square" lIns="73152" rIns="73152"/>
+          <a:lstStyle/>
+          <a:p>
+            <a:pPr algn="ctr">
               <a:lnSpc>
                 <a:spcPct val="100000"/>
               </a:lnSpc>
               <a:spcAft>
                 <a:spcPts val="0"/>
               </a:spcAft>
-              <a:defRPr sz="1000" b="0">
-                <a:solidFill>
-                  <a:srgbClr val="666666"/>
-                </a:solidFill>
-                <a:latin typeface="Calibri"/>
-              </a:defRPr>
-            </a:pPr>
-            <a:r>
-              <a:rPr sz="1000" b="0">
-                <a:solidFill>
-                  <a:srgbClr val="666666"/>
-                </a:solidFill>
-                <a:latin typeface="Calibri"/>
-              </a:rPr>
-              <a:t>13</a:t>
-            </a:r>
-          </a:p>
-        </p:txBody>
-      </p:sp>
-      <p:sp>
-        <p:nvSpPr>
-          <p:cNvPr id="6" name="TextBox 5"/>
+              <a:defRPr sz="1700" b="0">
+                <a:solidFill>
+                  <a:srgbClr val="1F3A5F"/>
+                </a:solidFill>
+                <a:latin typeface="Calibri"/>
+              </a:defRPr>
+            </a:pPr>
+            <a:r>
+              <a:rPr sz="1700" b="0">
+                <a:solidFill>
+                  <a:srgbClr val="1F3A5F"/>
+                </a:solidFill>
+                <a:latin typeface="Calibri"/>
+              </a:rPr>
+              <a:t>Bluetooth and pairing</a:t>
+            </a:r>
+          </a:p>
+        </p:txBody>
+      </p:sp>
+      <p:sp>
+        <p:nvSpPr>
+          <p:cNvPr id="8" name="TextBox 7"/>
           <p:cNvSpPr txBox="1"/>
           <p:nvPr/>
         </p:nvSpPr>
         <p:spPr>
           <a:xfrm>
-            <a:off x="502920" y="1188720"/>
-            <a:ext cx="11185855" cy="530352"/>
+            <a:off x="502920" y="3520440"/>
+            <a:ext cx="2686735" cy="310896"/>
           </a:xfrm>
           <a:prstGeom prst="rect">
             <a:avLst/>
@@ -10058,14 +10178,14 @@
           </a:bodyPr>
           <a:lstStyle/>
           <a:p>
-            <a:pPr algn="l">
-              <a:lnSpc>
-                <a:spcPct val="100000"/>
-              </a:lnSpc>
-              <a:spcAft>
-                <a:spcPts val="600"/>
-              </a:spcAft>
-              <a:defRPr sz="1900" b="1">
+            <a:pPr algn="ctr">
+              <a:lnSpc>
+                <a:spcPct val="100000"/>
+              </a:lnSpc>
+              <a:spcAft>
+                <a:spcPts val="200"/>
+              </a:spcAft>
+              <a:defRPr sz="1100" b="1">
                 <a:solidFill>
                   <a:srgbClr val="0E7C86"/>
                 </a:solidFill>
@@ -10073,27 +10193,97 @@
               </a:defRPr>
             </a:pPr>
             <a:r>
-              <a:rPr sz="1900" b="1">
+              <a:rPr sz="1100" b="1">
                 <a:solidFill>
                   <a:srgbClr val="0E7C86"/>
                 </a:solidFill>
                 <a:latin typeface="Calibri"/>
               </a:rPr>
-              <a:t>Deadzone</a:t>
-            </a:r>
-          </a:p>
-        </p:txBody>
-      </p:sp>
-      <p:sp>
-        <p:nvSpPr>
-          <p:cNvPr id="7" name="TextBox 6"/>
+              <a:t>done</a:t>
+            </a:r>
+          </a:p>
+        </p:txBody>
+      </p:sp>
+      <p:sp>
+        <p:nvSpPr>
+          <p:cNvPr id="9" name="Rounded Rectangle 8"/>
+          <p:cNvSpPr/>
+          <p:nvPr/>
+        </p:nvSpPr>
+        <p:spPr>
+          <a:xfrm>
+            <a:off x="3335959" y="3886200"/>
+            <a:ext cx="2686735" cy="1325880"/>
+          </a:xfrm>
+          <a:prstGeom prst="roundRect">
+            <a:avLst>
+              <a:gd name="adj" fmla="val 8000"/>
+            </a:avLst>
+          </a:prstGeom>
+          <a:solidFill>
+            <a:srgbClr val="EEF3F8"/>
+          </a:solidFill>
+          <a:ln w="12700">
+            <a:solidFill>
+              <a:srgbClr val="0E7C86"/>
+            </a:solidFill>
+          </a:ln>
+          <a:effectLst/>
+        </p:spPr>
+        <p:style>
+          <a:lnRef idx="1">
+            <a:schemeClr val="accent1"/>
+          </a:lnRef>
+          <a:fillRef idx="3">
+            <a:schemeClr val="accent1"/>
+          </a:fillRef>
+          <a:effectRef idx="2">
+            <a:schemeClr val="accent1"/>
+          </a:effectRef>
+          <a:fontRef idx="minor">
+            <a:schemeClr val="lt1"/>
+          </a:fontRef>
+        </p:style>
+        <p:txBody>
+          <a:bodyPr rtlCol="0" anchor="ctr" wrap="square" lIns="73152" rIns="73152"/>
+          <a:lstStyle/>
+          <a:p>
+            <a:pPr algn="ctr">
+              <a:lnSpc>
+                <a:spcPct val="100000"/>
+              </a:lnSpc>
+              <a:spcAft>
+                <a:spcPts val="0"/>
+              </a:spcAft>
+              <a:defRPr sz="1700" b="0">
+                <a:solidFill>
+                  <a:srgbClr val="1F3A5F"/>
+                </a:solidFill>
+                <a:latin typeface="Calibri"/>
+              </a:defRPr>
+            </a:pPr>
+            <a:r>
+              <a:rPr sz="1700" b="0">
+                <a:solidFill>
+                  <a:srgbClr val="1F3A5F"/>
+                </a:solidFill>
+                <a:latin typeface="Calibri"/>
+              </a:rPr>
+              <a:t>What the pad sends</a:t>
+            </a:r>
+          </a:p>
+        </p:txBody>
+      </p:sp>
+      <p:sp>
+        <p:nvSpPr>
+          <p:cNvPr id="10" name="TextBox 9"/>
           <p:cNvSpPr txBox="1"/>
           <p:nvPr/>
         </p:nvSpPr>
         <p:spPr>
           <a:xfrm>
-            <a:off x="502920" y="1755648"/>
-            <a:ext cx="11185855" cy="4507992"/>
+            <a:off x="3335959" y="3520440"/>
+            <a:ext cx="2686735" cy="310896"/>
           </a:xfrm>
           <a:prstGeom prst="rect">
             <a:avLst/>
@@ -10106,201 +10296,216 @@
           </a:bodyPr>
           <a:lstStyle/>
           <a:p>
-            <a:pPr algn="l">
-              <a:lnSpc>
-                <a:spcPct val="100000"/>
-              </a:lnSpc>
-              <a:spcAft>
-                <a:spcPts val="600"/>
-              </a:spcAft>
-              <a:defRPr sz="1900" b="0">
-                <a:solidFill>
-                  <a:srgbClr val="222222"/>
-                </a:solidFill>
-                <a:latin typeface="Calibri"/>
-              </a:defRPr>
-            </a:pPr>
-            <a:r>
-              <a:rPr sz="1900" b="0">
-                <a:solidFill>
-                  <a:srgbClr val="222222"/>
-                </a:solidFill>
-                <a:latin typeface="Calibri"/>
-              </a:rPr>
-              <a:t>A thumbstick that has been thumbed by a hundred students does not come back to exactly zero.</a:t>
-            </a:r>
-          </a:p>
-          <a:p>
-            <a:pPr algn="l">
-              <a:lnSpc>
-                <a:spcPct val="100000"/>
-              </a:lnSpc>
-              <a:spcAft>
-                <a:spcPts val="600"/>
-              </a:spcAft>
-              <a:defRPr sz="1900" b="0">
-                <a:solidFill>
-                  <a:srgbClr val="222222"/>
-                </a:solidFill>
-                <a:latin typeface="Calibri"/>
-              </a:defRPr>
-            </a:pPr>
-            <a:r>
-              <a:rPr sz="1900" b="0">
-                <a:solidFill>
-                  <a:srgbClr val="222222"/>
-                </a:solidFill>
-                <a:latin typeface="Calibri"/>
-              </a:rPr>
-              <a:t>You just measured it. Yours probably reads a few counts either side of center when nobody is touching it.</a:t>
-            </a:r>
-          </a:p>
-          <a:p>
-            <a:pPr algn="l">
-              <a:lnSpc>
-                <a:spcPct val="100000"/>
-              </a:lnSpc>
-              <a:spcAft>
-                <a:spcPts val="600"/>
-              </a:spcAft>
-              <a:defRPr sz="950" b="0">
-                <a:solidFill>
-                  <a:srgbClr val="222222"/>
-                </a:solidFill>
-                <a:latin typeface="Calibri"/>
-              </a:defRPr>
-            </a:pPr>
-          </a:p>
-          <a:p>
-            <a:pPr algn="l">
-              <a:lnSpc>
-                <a:spcPct val="100000"/>
-              </a:lnSpc>
-              <a:spcAft>
-                <a:spcPts val="600"/>
-              </a:spcAft>
-              <a:defRPr sz="1900" b="0">
-                <a:solidFill>
-                  <a:srgbClr val="222222"/>
-                </a:solidFill>
-                <a:latin typeface="Calibri"/>
-              </a:defRPr>
-            </a:pPr>
-            <a:r>
-              <a:rPr sz="1900" b="0">
-                <a:solidFill>
-                  <a:srgbClr val="222222"/>
-                </a:solidFill>
-                <a:latin typeface="Calibri"/>
-              </a:rPr>
-              <a:t>If we fed that straight to the motors, the vehicle would creep across the room on its own while the controller sat on the desk. In a classroom with twenty vehicles, that is not a minor annoyance.</a:t>
-            </a:r>
-          </a:p>
-          <a:p>
-            <a:pPr algn="l">
-              <a:lnSpc>
-                <a:spcPct val="100000"/>
-              </a:lnSpc>
-              <a:spcAft>
-                <a:spcPts val="600"/>
-              </a:spcAft>
-              <a:defRPr sz="950" b="0">
-                <a:solidFill>
-                  <a:srgbClr val="222222"/>
-                </a:solidFill>
-                <a:latin typeface="Calibri"/>
-              </a:defRPr>
-            </a:pPr>
-          </a:p>
-          <a:p>
-            <a:pPr algn="l">
-              <a:lnSpc>
-                <a:spcPct val="100000"/>
-              </a:lnSpc>
-              <a:spcAft>
-                <a:spcPts val="600"/>
-              </a:spcAft>
-              <a:defRPr sz="1900" b="0">
-                <a:solidFill>
-                  <a:srgbClr val="222222"/>
-                </a:solidFill>
-                <a:latin typeface="Calibri"/>
-              </a:defRPr>
-            </a:pPr>
-            <a:r>
-              <a:rPr sz="1900" b="0">
-                <a:solidFill>
-                  <a:srgbClr val="222222"/>
-                </a:solidFill>
-                <a:latin typeface="Calibri"/>
-              </a:rPr>
-              <a:t>The answer is a DEADZONE: any reading smaller than a threshold is treated as a firm, deliberate zero.</a:t>
-            </a:r>
-          </a:p>
-          <a:p>
-            <a:pPr algn="l">
-              <a:lnSpc>
-                <a:spcPct val="100000"/>
-              </a:lnSpc>
-              <a:spcAft>
-                <a:spcPts val="600"/>
-              </a:spcAft>
-              <a:defRPr sz="1900" b="0">
-                <a:solidFill>
-                  <a:srgbClr val="222222"/>
-                </a:solidFill>
-                <a:latin typeface="Calibri"/>
-              </a:defRPr>
-            </a:pPr>
-            <a:r>
-              <a:rPr sz="1900" b="0">
-                <a:solidFill>
-                  <a:srgbClr val="222222"/>
-                </a:solidFill>
-                <a:latin typeface="Calibri"/>
-              </a:rPr>
-              <a:t>On this track the deadzone is 20, which is about 16% of the stick travel.</a:t>
-            </a:r>
-          </a:p>
-          <a:p>
-            <a:pPr algn="l">
-              <a:lnSpc>
-                <a:spcPct val="100000"/>
-              </a:lnSpc>
-              <a:spcAft>
-                <a:spcPts val="600"/>
-              </a:spcAft>
-              <a:defRPr sz="950" b="0">
-                <a:solidFill>
-                  <a:srgbClr val="222222"/>
-                </a:solidFill>
-                <a:latin typeface="Calibri"/>
-              </a:defRPr>
-            </a:pPr>
-          </a:p>
-          <a:p>
-            <a:pPr algn="l">
-              <a:lnSpc>
-                <a:spcPct val="100000"/>
-              </a:lnSpc>
-              <a:spcAft>
-                <a:spcPts val="600"/>
-              </a:spcAft>
-              <a:defRPr sz="1900" b="0">
-                <a:solidFill>
-                  <a:srgbClr val="222222"/>
-                </a:solidFill>
-                <a:latin typeface="Calibri"/>
-              </a:defRPr>
-            </a:pPr>
-            <a:r>
-              <a:rPr sz="1900" b="0">
-                <a:solidFill>
-                  <a:srgbClr val="222222"/>
-                </a:solidFill>
-                <a:latin typeface="Calibri"/>
-              </a:rPr>
-              <a:t>Too small and the vehicle creeps. Too big and you waste the stick.</a:t>
+            <a:pPr algn="ctr">
+              <a:lnSpc>
+                <a:spcPct val="100000"/>
+              </a:lnSpc>
+              <a:spcAft>
+                <a:spcPts val="200"/>
+              </a:spcAft>
+              <a:defRPr sz="1100" b="1">
+                <a:solidFill>
+                  <a:srgbClr val="0E7C86"/>
+                </a:solidFill>
+                <a:latin typeface="Calibri"/>
+              </a:defRPr>
+            </a:pPr>
+            <a:r>
+              <a:rPr sz="1100" b="1">
+                <a:solidFill>
+                  <a:srgbClr val="0E7C86"/>
+                </a:solidFill>
+                <a:latin typeface="Calibri"/>
+              </a:rPr>
+              <a:t>done</a:t>
+            </a:r>
+          </a:p>
+        </p:txBody>
+      </p:sp>
+      <p:sp>
+        <p:nvSpPr>
+          <p:cNvPr id="11" name="Rounded Rectangle 10"/>
+          <p:cNvSpPr/>
+          <p:nvPr/>
+        </p:nvSpPr>
+        <p:spPr>
+          <a:xfrm>
+            <a:off x="6168998" y="3886200"/>
+            <a:ext cx="2686735" cy="1325880"/>
+          </a:xfrm>
+          <a:prstGeom prst="roundRect">
+            <a:avLst>
+              <a:gd name="adj" fmla="val 8000"/>
+            </a:avLst>
+          </a:prstGeom>
+          <a:solidFill>
+            <a:srgbClr val="D6ECEE"/>
+          </a:solidFill>
+          <a:ln w="25400">
+            <a:solidFill>
+              <a:srgbClr val="0E7C86"/>
+            </a:solidFill>
+          </a:ln>
+          <a:effectLst/>
+        </p:spPr>
+        <p:style>
+          <a:lnRef idx="1">
+            <a:schemeClr val="accent1"/>
+          </a:lnRef>
+          <a:fillRef idx="3">
+            <a:schemeClr val="accent1"/>
+          </a:fillRef>
+          <a:effectRef idx="2">
+            <a:schemeClr val="accent1"/>
+          </a:effectRef>
+          <a:fontRef idx="minor">
+            <a:schemeClr val="lt1"/>
+          </a:fontRef>
+        </p:style>
+        <p:txBody>
+          <a:bodyPr rtlCol="0" anchor="ctr" wrap="square" lIns="73152" rIns="73152"/>
+          <a:lstStyle/>
+          <a:p>
+            <a:pPr algn="ctr">
+              <a:lnSpc>
+                <a:spcPct val="100000"/>
+              </a:lnSpc>
+              <a:spcAft>
+                <a:spcPts val="0"/>
+              </a:spcAft>
+              <a:defRPr sz="1700" b="1">
+                <a:solidFill>
+                  <a:srgbClr val="1F3A5F"/>
+                </a:solidFill>
+                <a:latin typeface="Calibri"/>
+              </a:defRPr>
+            </a:pPr>
+            <a:r>
+              <a:rPr sz="1700" b="1">
+                <a:solidFill>
+                  <a:srgbClr val="1F3A5F"/>
+                </a:solidFill>
+                <a:latin typeface="Calibri"/>
+              </a:rPr>
+              <a:t>Deadzone and map</a:t>
+            </a:r>
+          </a:p>
+        </p:txBody>
+      </p:sp>
+      <p:sp>
+        <p:nvSpPr>
+          <p:cNvPr id="12" name="TextBox 11"/>
+          <p:cNvSpPr txBox="1"/>
+          <p:nvPr/>
+        </p:nvSpPr>
+        <p:spPr>
+          <a:xfrm>
+            <a:off x="6168998" y="3520440"/>
+            <a:ext cx="2686735" cy="310896"/>
+          </a:xfrm>
+          <a:prstGeom prst="rect">
+            <a:avLst/>
+          </a:prstGeom>
+          <a:noFill/>
+        </p:spPr>
+        <p:txBody>
+          <a:bodyPr wrap="square" lIns="0" tIns="0" rIns="0" bIns="0">
+            <a:spAutoFit/>
+          </a:bodyPr>
+          <a:lstStyle/>
+          <a:p>
+            <a:pPr algn="ctr">
+              <a:lnSpc>
+                <a:spcPct val="100000"/>
+              </a:lnSpc>
+              <a:spcAft>
+                <a:spcPts val="200"/>
+              </a:spcAft>
+              <a:defRPr sz="1100" b="1">
+                <a:solidFill>
+                  <a:srgbClr val="0E7C86"/>
+                </a:solidFill>
+                <a:latin typeface="Calibri"/>
+              </a:defRPr>
+            </a:pPr>
+            <a:r>
+              <a:rPr sz="1100" b="1">
+                <a:solidFill>
+                  <a:srgbClr val="0E7C86"/>
+                </a:solidFill>
+                <a:latin typeface="Calibri"/>
+              </a:rPr>
+              <a:t>NOW</a:t>
+            </a:r>
+          </a:p>
+        </p:txBody>
+      </p:sp>
+      <p:sp>
+        <p:nvSpPr>
+          <p:cNvPr id="13" name="Rounded Rectangle 12"/>
+          <p:cNvSpPr/>
+          <p:nvPr/>
+        </p:nvSpPr>
+        <p:spPr>
+          <a:xfrm>
+            <a:off x="9002037" y="3886200"/>
+            <a:ext cx="2686735" cy="1325880"/>
+          </a:xfrm>
+          <a:prstGeom prst="roundRect">
+            <a:avLst>
+              <a:gd name="adj" fmla="val 8000"/>
+            </a:avLst>
+          </a:prstGeom>
+          <a:solidFill>
+            <a:srgbClr val="FFFFFF"/>
+          </a:solidFill>
+          <a:ln w="12700">
+            <a:solidFill>
+              <a:srgbClr val="C8D2DE"/>
+            </a:solidFill>
+          </a:ln>
+          <a:effectLst/>
+        </p:spPr>
+        <p:style>
+          <a:lnRef idx="1">
+            <a:schemeClr val="accent1"/>
+          </a:lnRef>
+          <a:fillRef idx="3">
+            <a:schemeClr val="accent1"/>
+          </a:fillRef>
+          <a:effectRef idx="2">
+            <a:schemeClr val="accent1"/>
+          </a:effectRef>
+          <a:fontRef idx="minor">
+            <a:schemeClr val="lt1"/>
+          </a:fontRef>
+        </p:style>
+        <p:txBody>
+          <a:bodyPr rtlCol="0" anchor="ctr" wrap="square" lIns="73152" rIns="73152"/>
+          <a:lstStyle/>
+          <a:p>
+            <a:pPr algn="ctr">
+              <a:lnSpc>
+                <a:spcPct val="100000"/>
+              </a:lnSpc>
+              <a:spcAft>
+                <a:spcPts val="0"/>
+              </a:spcAft>
+              <a:defRPr sz="1700" b="0">
+                <a:solidFill>
+                  <a:srgbClr val="666666"/>
+                </a:solidFill>
+                <a:latin typeface="Calibri"/>
+              </a:defRPr>
+            </a:pPr>
+            <a:r>
+              <a:rPr sz="1700" b="0">
+                <a:solidFill>
+                  <a:srgbClr val="666666"/>
+                </a:solidFill>
+                <a:latin typeface="Calibri"/>
+              </a:rPr>
+              <a:t>Driving it</a:t>
             </a:r>
           </a:p>
         </p:txBody>
@@ -10364,7 +10569,7 @@
                 </a:solidFill>
                 <a:latin typeface="Calibri"/>
               </a:rPr>
-              <a:t>From thumbstick to motor speed</a:t>
+              <a:t>The problem with believing the stick</a:t>
             </a:r>
           </a:p>
         </p:txBody>
@@ -10509,86 +10714,16 @@
           </a:p>
         </p:txBody>
       </p:sp>
-      <p:cxnSp>
-        <p:nvCxnSpPr>
-          <p:cNvPr id="6" name="Connector 5"/>
-          <p:cNvCxnSpPr/>
-          <p:nvPr/>
-        </p:nvCxnSpPr>
-        <p:spPr>
-          <a:xfrm>
-            <a:off x="1691640" y="4892040"/>
-            <a:ext cx="5852160" cy="0"/>
-          </a:xfrm>
-          <a:prstGeom prst="line">
-            <a:avLst/>
-          </a:prstGeom>
-          <a:ln w="22225">
-            <a:solidFill>
-              <a:srgbClr val="1F3A5F"/>
-            </a:solidFill>
-          </a:ln>
-        </p:spPr>
-        <p:style>
-          <a:lnRef idx="2">
-            <a:schemeClr val="accent1"/>
-          </a:lnRef>
-          <a:fillRef idx="0">
-            <a:schemeClr val="accent1"/>
-          </a:fillRef>
-          <a:effectRef idx="1">
-            <a:schemeClr val="accent1"/>
-          </a:effectRef>
-          <a:fontRef idx="minor">
-            <a:schemeClr val="tx1"/>
-          </a:fontRef>
-        </p:style>
-      </p:cxnSp>
-      <p:cxnSp>
-        <p:nvCxnSpPr>
-          <p:cNvPr id="7" name="Connector 6"/>
-          <p:cNvCxnSpPr/>
-          <p:nvPr/>
-        </p:nvCxnSpPr>
-        <p:spPr>
-          <a:xfrm flipV="1">
-            <a:off x="1691640" y="1600200"/>
-            <a:ext cx="0" cy="3291840"/>
-          </a:xfrm>
-          <a:prstGeom prst="line">
-            <a:avLst/>
-          </a:prstGeom>
-          <a:ln w="22225">
-            <a:solidFill>
-              <a:srgbClr val="1F3A5F"/>
-            </a:solidFill>
-          </a:ln>
-        </p:spPr>
-        <p:style>
-          <a:lnRef idx="2">
-            <a:schemeClr val="accent1"/>
-          </a:lnRef>
-          <a:fillRef idx="0">
-            <a:schemeClr val="accent1"/>
-          </a:fillRef>
-          <a:effectRef idx="1">
-            <a:schemeClr val="accent1"/>
-          </a:effectRef>
-          <a:fontRef idx="minor">
-            <a:schemeClr val="tx1"/>
-          </a:fontRef>
-        </p:style>
-      </p:cxnSp>
-      <p:sp>
-        <p:nvSpPr>
-          <p:cNvPr id="8" name="TextBox 7"/>
+      <p:sp>
+        <p:nvSpPr>
+          <p:cNvPr id="6" name="TextBox 5"/>
           <p:cNvSpPr txBox="1"/>
           <p:nvPr/>
         </p:nvSpPr>
         <p:spPr>
           <a:xfrm>
-            <a:off x="1691640" y="5001768"/>
-            <a:ext cx="5852160" cy="367792"/>
+            <a:off x="502920" y="1188720"/>
+            <a:ext cx="11185855" cy="530352"/>
           </a:xfrm>
           <a:prstGeom prst="rect">
             <a:avLst/>
@@ -10601,42 +10736,42 @@
           </a:bodyPr>
           <a:lstStyle/>
           <a:p>
-            <a:pPr algn="ctr">
-              <a:lnSpc>
-                <a:spcPct val="100000"/>
-              </a:lnSpc>
-              <a:spcAft>
-                <a:spcPts val="0"/>
-              </a:spcAft>
-              <a:defRPr sz="1800" b="0">
-                <a:solidFill>
-                  <a:srgbClr val="666666"/>
-                </a:solidFill>
-                <a:latin typeface="Calibri"/>
-              </a:defRPr>
-            </a:pPr>
-            <a:r>
-              <a:rPr sz="1800" b="0">
-                <a:solidFill>
-                  <a:srgbClr val="666666"/>
-                </a:solidFill>
-                <a:latin typeface="Calibri"/>
-              </a:rPr>
-              <a:t>stick reading   0  to  127</a:t>
-            </a:r>
-          </a:p>
-        </p:txBody>
-      </p:sp>
-      <p:sp>
-        <p:nvSpPr>
-          <p:cNvPr id="9" name="TextBox 8"/>
+            <a:pPr algn="l">
+              <a:lnSpc>
+                <a:spcPct val="100000"/>
+              </a:lnSpc>
+              <a:spcAft>
+                <a:spcPts val="600"/>
+              </a:spcAft>
+              <a:defRPr sz="1900" b="1">
+                <a:solidFill>
+                  <a:srgbClr val="0E7C86"/>
+                </a:solidFill>
+                <a:latin typeface="Calibri"/>
+              </a:defRPr>
+            </a:pPr>
+            <a:r>
+              <a:rPr sz="1900" b="1">
+                <a:solidFill>
+                  <a:srgbClr val="0E7C86"/>
+                </a:solidFill>
+                <a:latin typeface="Calibri"/>
+              </a:rPr>
+              <a:t>Deadzone</a:t>
+            </a:r>
+          </a:p>
+        </p:txBody>
+      </p:sp>
+      <p:sp>
+        <p:nvSpPr>
+          <p:cNvPr id="7" name="TextBox 6"/>
           <p:cNvSpPr txBox="1"/>
           <p:nvPr/>
         </p:nvSpPr>
         <p:spPr>
           <a:xfrm>
-            <a:off x="548640" y="1554480"/>
-            <a:ext cx="1051560" cy="950976"/>
+            <a:off x="502920" y="1755648"/>
+            <a:ext cx="11185855" cy="4507992"/>
           </a:xfrm>
           <a:prstGeom prst="rect">
             <a:avLst/>
@@ -10649,800 +10784,201 @@
           </a:bodyPr>
           <a:lstStyle/>
           <a:p>
-            <a:pPr algn="r">
-              <a:lnSpc>
-                <a:spcPct val="100000"/>
-              </a:lnSpc>
-              <a:spcAft>
-                <a:spcPts val="0"/>
-              </a:spcAft>
-              <a:defRPr sz="1800" b="0">
-                <a:solidFill>
-                  <a:srgbClr val="666666"/>
-                </a:solidFill>
-                <a:latin typeface="Calibri"/>
-              </a:defRPr>
-            </a:pPr>
-            <a:r>
-              <a:rPr sz="1800" b="0">
-                <a:solidFill>
-                  <a:srgbClr val="666666"/>
-                </a:solidFill>
-                <a:latin typeface="Calibri"/>
-              </a:rPr>
-              <a:t>motor</a:t>
-            </a:r>
-          </a:p>
-          <a:p>
-            <a:pPr algn="r">
-              <a:lnSpc>
-                <a:spcPct val="100000"/>
-              </a:lnSpc>
-              <a:spcAft>
-                <a:spcPts val="0"/>
-              </a:spcAft>
-              <a:defRPr sz="1800" b="0">
-                <a:solidFill>
-                  <a:srgbClr val="666666"/>
-                </a:solidFill>
-                <a:latin typeface="Calibri"/>
-              </a:defRPr>
-            </a:pPr>
-            <a:r>
-              <a:rPr sz="1800" b="0">
-                <a:solidFill>
-                  <a:srgbClr val="666666"/>
-                </a:solidFill>
-                <a:latin typeface="Calibri"/>
-              </a:rPr>
-              <a:t>speed</a:t>
-            </a:r>
-          </a:p>
-          <a:p>
-            <a:pPr algn="r">
-              <a:lnSpc>
-                <a:spcPct val="100000"/>
-              </a:lnSpc>
-              <a:spcAft>
-                <a:spcPts val="0"/>
-              </a:spcAft>
-              <a:defRPr sz="1800" b="0">
-                <a:solidFill>
-                  <a:srgbClr val="666666"/>
-                </a:solidFill>
-                <a:latin typeface="Calibri"/>
-              </a:defRPr>
-            </a:pPr>
-            <a:r>
-              <a:rPr sz="1800" b="0">
-                <a:solidFill>
-                  <a:srgbClr val="666666"/>
-                </a:solidFill>
-                <a:latin typeface="Calibri"/>
-              </a:rPr>
-              <a:t>0 to 255</a:t>
-            </a:r>
-          </a:p>
-        </p:txBody>
-      </p:sp>
-      <p:sp>
-        <p:nvSpPr>
-          <p:cNvPr id="10" name="Rectangle 9"/>
-          <p:cNvSpPr/>
-          <p:nvPr/>
-        </p:nvSpPr>
-        <p:spPr>
-          <a:xfrm>
-            <a:off x="1691640" y="1600200"/>
-            <a:ext cx="921600" cy="3291840"/>
-          </a:xfrm>
-          <a:prstGeom prst="rect">
-            <a:avLst/>
-          </a:prstGeom>
-          <a:solidFill>
-            <a:srgbClr val="F6D8D8"/>
-          </a:solidFill>
-          <a:ln>
-            <a:noFill/>
-          </a:ln>
-          <a:effectLst/>
-        </p:spPr>
-        <p:style>
-          <a:lnRef idx="1">
-            <a:schemeClr val="accent1"/>
-          </a:lnRef>
-          <a:fillRef idx="3">
-            <a:schemeClr val="accent1"/>
-          </a:fillRef>
-          <a:effectRef idx="2">
-            <a:schemeClr val="accent1"/>
-          </a:effectRef>
-          <a:fontRef idx="minor">
-            <a:schemeClr val="lt1"/>
-          </a:fontRef>
-        </p:style>
-        <p:txBody>
-          <a:bodyPr rtlCol="0" anchor="ctr"/>
-          <a:lstStyle/>
-          <a:p/>
-        </p:txBody>
-      </p:sp>
-      <p:cxnSp>
-        <p:nvCxnSpPr>
-          <p:cNvPr id="11" name="Connector 10"/>
-          <p:cNvCxnSpPr/>
-          <p:nvPr/>
-        </p:nvCxnSpPr>
-        <p:spPr>
-          <a:xfrm>
-            <a:off x="1691640" y="4892040"/>
-            <a:ext cx="921600" cy="0"/>
-          </a:xfrm>
-          <a:prstGeom prst="line">
-            <a:avLst/>
-          </a:prstGeom>
-          <a:ln w="38100">
-            <a:solidFill>
-              <a:srgbClr val="A32A2A"/>
-            </a:solidFill>
-          </a:ln>
-        </p:spPr>
-        <p:style>
-          <a:lnRef idx="2">
-            <a:schemeClr val="accent1"/>
-          </a:lnRef>
-          <a:fillRef idx="0">
-            <a:schemeClr val="accent1"/>
-          </a:fillRef>
-          <a:effectRef idx="1">
-            <a:schemeClr val="accent1"/>
-          </a:effectRef>
-          <a:fontRef idx="minor">
-            <a:schemeClr val="tx1"/>
-          </a:fontRef>
-        </p:style>
-      </p:cxnSp>
-      <p:cxnSp>
-        <p:nvCxnSpPr>
-          <p:cNvPr id="12" name="Connector 11"/>
-          <p:cNvCxnSpPr/>
-          <p:nvPr/>
-        </p:nvCxnSpPr>
-        <p:spPr>
-          <a:xfrm flipV="1">
-            <a:off x="2613240" y="1600200"/>
-            <a:ext cx="4930560" cy="3291840"/>
-          </a:xfrm>
-          <a:prstGeom prst="line">
-            <a:avLst/>
-          </a:prstGeom>
-          <a:ln w="38100">
-            <a:solidFill>
-              <a:srgbClr val="0E7C86"/>
-            </a:solidFill>
-          </a:ln>
-        </p:spPr>
-        <p:style>
-          <a:lnRef idx="2">
-            <a:schemeClr val="accent1"/>
-          </a:lnRef>
-          <a:fillRef idx="0">
-            <a:schemeClr val="accent1"/>
-          </a:fillRef>
-          <a:effectRef idx="1">
-            <a:schemeClr val="accent1"/>
-          </a:effectRef>
-          <a:fontRef idx="minor">
-            <a:schemeClr val="tx1"/>
-          </a:fontRef>
-        </p:style>
-      </p:cxnSp>
-      <p:sp>
-        <p:nvSpPr>
-          <p:cNvPr id="13" name="TextBox 12"/>
-          <p:cNvSpPr txBox="1"/>
-          <p:nvPr/>
-        </p:nvSpPr>
-        <p:spPr>
-          <a:xfrm>
-            <a:off x="1691640" y="1216152"/>
-            <a:ext cx="1470240" cy="646684"/>
-          </a:xfrm>
-          <a:prstGeom prst="rect">
-            <a:avLst/>
-          </a:prstGeom>
-          <a:noFill/>
-        </p:spPr>
-        <p:txBody>
-          <a:bodyPr wrap="square" lIns="0" tIns="0" rIns="0" bIns="0">
-            <a:spAutoFit/>
-          </a:bodyPr>
-          <a:lstStyle/>
-          <a:p>
-            <a:pPr algn="ctr">
-              <a:lnSpc>
-                <a:spcPct val="100000"/>
-              </a:lnSpc>
-              <a:spcAft>
-                <a:spcPts val="0"/>
-              </a:spcAft>
-              <a:defRPr sz="1800" b="1">
-                <a:solidFill>
-                  <a:srgbClr val="A32A2A"/>
-                </a:solidFill>
-                <a:latin typeface="Calibri"/>
-              </a:defRPr>
-            </a:pPr>
-            <a:r>
-              <a:rPr sz="1800" b="1">
-                <a:solidFill>
-                  <a:srgbClr val="A32A2A"/>
-                </a:solidFill>
-                <a:latin typeface="Calibri"/>
-              </a:rPr>
-              <a:t>DEADZONE</a:t>
-            </a:r>
-            <a:br/>
-            <a:r>
-              <a:rPr sz="1800" b="1">
-                <a:solidFill>
-                  <a:srgbClr val="A32A2A"/>
-                </a:solidFill>
-                <a:latin typeface="Calibri"/>
-              </a:rPr>
-              <a:t>answer is 0</a:t>
-            </a:r>
-          </a:p>
-        </p:txBody>
-      </p:sp>
-      <p:sp>
-        <p:nvSpPr>
-          <p:cNvPr id="14" name="TextBox 13"/>
-          <p:cNvSpPr txBox="1"/>
-          <p:nvPr/>
-        </p:nvSpPr>
-        <p:spPr>
-          <a:xfrm>
-            <a:off x="2887560" y="1691640"/>
-            <a:ext cx="3657600" cy="646684"/>
-          </a:xfrm>
-          <a:prstGeom prst="rect">
-            <a:avLst/>
-          </a:prstGeom>
-          <a:noFill/>
-        </p:spPr>
-        <p:txBody>
-          <a:bodyPr wrap="square" lIns="0" tIns="0" rIns="0" bIns="0">
-            <a:spAutoFit/>
-          </a:bodyPr>
-          <a:lstStyle/>
-          <a:p>
-            <a:pPr algn="l">
-              <a:lnSpc>
-                <a:spcPct val="100000"/>
-              </a:lnSpc>
-              <a:spcAft>
-                <a:spcPts val="0"/>
-              </a:spcAft>
-              <a:defRPr sz="1800" b="1">
-                <a:solidFill>
-                  <a:srgbClr val="0E7C86"/>
-                </a:solidFill>
-                <a:latin typeface="Calibri"/>
-              </a:defRPr>
-            </a:pPr>
-            <a:r>
-              <a:rPr sz="1800" b="1">
-                <a:solidFill>
-                  <a:srgbClr val="0E7C86"/>
-                </a:solidFill>
-                <a:latin typeface="Calibri"/>
-              </a:rPr>
-              <a:t>map() stretches what is left</a:t>
-            </a:r>
-            <a:br/>
-            <a:r>
-              <a:rPr sz="1800" b="1">
-                <a:solidFill>
-                  <a:srgbClr val="0E7C86"/>
-                </a:solidFill>
-                <a:latin typeface="Calibri"/>
-              </a:rPr>
-              <a:t>across the whole speed range</a:t>
-            </a:r>
-          </a:p>
-        </p:txBody>
-      </p:sp>
-      <p:sp>
-        <p:nvSpPr>
-          <p:cNvPr id="15" name="TextBox 14"/>
-          <p:cNvSpPr txBox="1"/>
-          <p:nvPr/>
-        </p:nvSpPr>
-        <p:spPr>
-          <a:xfrm>
-            <a:off x="2156040" y="5221224"/>
-            <a:ext cx="1097280" cy="367792"/>
-          </a:xfrm>
-          <a:prstGeom prst="rect">
-            <a:avLst/>
-          </a:prstGeom>
-          <a:noFill/>
-        </p:spPr>
-        <p:txBody>
-          <a:bodyPr wrap="square" lIns="0" tIns="0" rIns="0" bIns="0">
-            <a:spAutoFit/>
-          </a:bodyPr>
-          <a:lstStyle/>
-          <a:p>
-            <a:pPr algn="ctr">
-              <a:lnSpc>
-                <a:spcPct val="100000"/>
-              </a:lnSpc>
-              <a:spcAft>
-                <a:spcPts val="0"/>
-              </a:spcAft>
-              <a:defRPr sz="1800" b="0">
-                <a:solidFill>
-                  <a:srgbClr val="A32A2A"/>
-                </a:solidFill>
-                <a:latin typeface="Consolas"/>
-              </a:defRPr>
-            </a:pPr>
-            <a:r>
-              <a:rPr sz="1800" b="0">
-                <a:solidFill>
-                  <a:srgbClr val="A32A2A"/>
-                </a:solidFill>
-                <a:latin typeface="Consolas"/>
-              </a:rPr>
-              <a:t>20</a:t>
-            </a:r>
-          </a:p>
-        </p:txBody>
-      </p:sp>
-      <p:sp>
-        <p:nvSpPr>
-          <p:cNvPr id="16" name="TextBox 15"/>
-          <p:cNvSpPr txBox="1"/>
-          <p:nvPr/>
-        </p:nvSpPr>
-        <p:spPr>
-          <a:xfrm>
-            <a:off x="8595360" y="1325880"/>
-            <a:ext cx="3291840" cy="367792"/>
-          </a:xfrm>
-          <a:prstGeom prst="rect">
-            <a:avLst/>
-          </a:prstGeom>
-          <a:noFill/>
-        </p:spPr>
-        <p:txBody>
-          <a:bodyPr wrap="square" lIns="0" tIns="0" rIns="0" bIns="0">
-            <a:spAutoFit/>
-          </a:bodyPr>
-          <a:lstStyle/>
-          <a:p>
-            <a:pPr algn="l">
-              <a:lnSpc>
-                <a:spcPct val="100000"/>
-              </a:lnSpc>
-              <a:spcAft>
-                <a:spcPts val="0"/>
-              </a:spcAft>
-              <a:defRPr sz="1800" b="1">
-                <a:solidFill>
-                  <a:srgbClr val="0E7C86"/>
-                </a:solidFill>
-                <a:latin typeface="Consolas"/>
-              </a:defRPr>
-            </a:pPr>
-            <a:r>
-              <a:rPr sz="1800" b="1">
-                <a:solidFill>
-                  <a:srgbClr val="0E7C86"/>
-                </a:solidFill>
-                <a:latin typeface="Consolas"/>
-              </a:rPr>
-              <a:t>stickToSpeed()</a:t>
-            </a:r>
-          </a:p>
-        </p:txBody>
-      </p:sp>
-      <p:sp>
-        <p:nvSpPr>
-          <p:cNvPr id="17" name="Rectangle 16"/>
-          <p:cNvSpPr/>
-          <p:nvPr/>
-        </p:nvSpPr>
-        <p:spPr>
-          <a:xfrm>
-            <a:off x="8595360" y="1691640"/>
-            <a:ext cx="3291840" cy="2286000"/>
-          </a:xfrm>
-          <a:prstGeom prst="rect">
-            <a:avLst/>
-          </a:prstGeom>
-          <a:solidFill>
-            <a:srgbClr val="F4F6F8"/>
-          </a:solidFill>
-          <a:ln w="9525">
-            <a:solidFill>
-              <a:srgbClr val="C8D2DE"/>
-            </a:solidFill>
-          </a:ln>
-          <a:effectLst/>
-        </p:spPr>
-        <p:style>
-          <a:lnRef idx="1">
-            <a:schemeClr val="accent1"/>
-          </a:lnRef>
-          <a:fillRef idx="3">
-            <a:schemeClr val="accent1"/>
-          </a:fillRef>
-          <a:effectRef idx="2">
-            <a:schemeClr val="accent1"/>
-          </a:effectRef>
-          <a:fontRef idx="minor">
-            <a:schemeClr val="lt1"/>
-          </a:fontRef>
-        </p:style>
-        <p:txBody>
-          <a:bodyPr rtlCol="0" anchor="t" wrap="square" lIns="45720" rIns="45720" tIns="18288" bIns="18288"/>
-          <a:lstStyle/>
-          <a:p>
-            <a:pPr algn="l">
-              <a:lnSpc>
-                <a:spcPct val="100000"/>
-              </a:lnSpc>
-              <a:spcAft>
-                <a:spcPts val="0"/>
-              </a:spcAft>
-              <a:defRPr sz="1400" b="0">
-                <a:solidFill>
-                  <a:srgbClr val="222222"/>
-                </a:solidFill>
-                <a:latin typeface="Consolas"/>
-              </a:defRPr>
-            </a:pPr>
-            <a:r>
-              <a:rPr sz="1400" b="0">
-                <a:solidFill>
-                  <a:srgbClr val="222222"/>
-                </a:solidFill>
-                <a:latin typeface="Consolas"/>
-              </a:rPr>
-              <a:t>if (abs(v) &lt; DEADZONE)</a:t>
-            </a:r>
-          </a:p>
-          <a:p>
-            <a:pPr algn="l">
-              <a:lnSpc>
-                <a:spcPct val="100000"/>
-              </a:lnSpc>
-              <a:spcAft>
-                <a:spcPts val="0"/>
-              </a:spcAft>
-              <a:defRPr sz="1400" b="0">
-                <a:solidFill>
-                  <a:srgbClr val="222222"/>
-                </a:solidFill>
-                <a:latin typeface="Consolas"/>
-              </a:defRPr>
-            </a:pPr>
-            <a:r>
-              <a:rPr sz="1400" b="0">
-                <a:solidFill>
-                  <a:srgbClr val="222222"/>
-                </a:solidFill>
-                <a:latin typeface="Consolas"/>
-              </a:rPr>
-              <a:t>    return 0;</a:t>
-            </a:r>
-          </a:p>
-          <a:p>
-            <a:pPr algn="l">
-              <a:lnSpc>
-                <a:spcPct val="100000"/>
-              </a:lnSpc>
-              <a:spcAft>
-                <a:spcPts val="0"/>
-              </a:spcAft>
-              <a:defRPr sz="700" b="0">
-                <a:solidFill>
-                  <a:srgbClr val="222222"/>
-                </a:solidFill>
-                <a:latin typeface="Consolas"/>
-              </a:defRPr>
-            </a:pPr>
-          </a:p>
-          <a:p>
-            <a:pPr algn="l">
-              <a:lnSpc>
-                <a:spcPct val="100000"/>
-              </a:lnSpc>
-              <a:spcAft>
-                <a:spcPts val="0"/>
-              </a:spcAft>
-              <a:defRPr sz="1400" b="0">
-                <a:solidFill>
-                  <a:srgbClr val="222222"/>
-                </a:solidFill>
-                <a:latin typeface="Consolas"/>
-              </a:defRPr>
-            </a:pPr>
-            <a:r>
-              <a:rPr sz="1400" b="0">
-                <a:solidFill>
-                  <a:srgbClr val="222222"/>
-                </a:solidFill>
-                <a:latin typeface="Consolas"/>
-              </a:rPr>
-              <a:t>size = map(abs(v),</a:t>
-            </a:r>
-          </a:p>
-          <a:p>
-            <a:pPr algn="l">
-              <a:lnSpc>
-                <a:spcPct val="100000"/>
-              </a:lnSpc>
-              <a:spcAft>
-                <a:spcPts val="0"/>
-              </a:spcAft>
-              <a:defRPr sz="1400" b="0">
-                <a:solidFill>
-                  <a:srgbClr val="222222"/>
-                </a:solidFill>
-                <a:latin typeface="Consolas"/>
-              </a:defRPr>
-            </a:pPr>
-            <a:r>
-              <a:rPr sz="1400" b="0">
-                <a:solidFill>
-                  <a:srgbClr val="222222"/>
-                </a:solidFill>
-                <a:latin typeface="Consolas"/>
-              </a:rPr>
-              <a:t>           DEADZONE, 127,</a:t>
-            </a:r>
-          </a:p>
-          <a:p>
-            <a:pPr algn="l">
-              <a:lnSpc>
-                <a:spcPct val="100000"/>
-              </a:lnSpc>
-              <a:spcAft>
-                <a:spcPts val="0"/>
-              </a:spcAft>
-              <a:defRPr sz="1400" b="0">
-                <a:solidFill>
-                  <a:srgbClr val="222222"/>
-                </a:solidFill>
-                <a:latin typeface="Consolas"/>
-              </a:defRPr>
-            </a:pPr>
-            <a:r>
-              <a:rPr sz="1400" b="0">
-                <a:solidFill>
-                  <a:srgbClr val="222222"/>
-                </a:solidFill>
-                <a:latin typeface="Consolas"/>
-              </a:rPr>
-              <a:t>           MOTOR_MIN, maxSpeed);</a:t>
-            </a:r>
-          </a:p>
-          <a:p>
-            <a:pPr algn="l">
-              <a:lnSpc>
-                <a:spcPct val="100000"/>
-              </a:lnSpc>
-              <a:spcAft>
-                <a:spcPts val="0"/>
-              </a:spcAft>
-              <a:defRPr sz="700" b="0">
-                <a:solidFill>
-                  <a:srgbClr val="222222"/>
-                </a:solidFill>
-                <a:latin typeface="Consolas"/>
-              </a:defRPr>
-            </a:pPr>
-          </a:p>
-          <a:p>
-            <a:pPr algn="l">
-              <a:lnSpc>
-                <a:spcPct val="100000"/>
-              </a:lnSpc>
-              <a:spcAft>
-                <a:spcPts val="0"/>
-              </a:spcAft>
-              <a:defRPr sz="1400" b="0">
-                <a:solidFill>
-                  <a:srgbClr val="222222"/>
-                </a:solidFill>
-                <a:latin typeface="Consolas"/>
-              </a:defRPr>
-            </a:pPr>
-            <a:r>
-              <a:rPr sz="1400" b="0">
-                <a:solidFill>
-                  <a:srgbClr val="222222"/>
-                </a:solidFill>
-                <a:latin typeface="Consolas"/>
-              </a:rPr>
-              <a:t>return (v &gt; 0) ? size</a:t>
-            </a:r>
-          </a:p>
-          <a:p>
-            <a:pPr algn="l">
-              <a:lnSpc>
-                <a:spcPct val="100000"/>
-              </a:lnSpc>
-              <a:spcAft>
-                <a:spcPts val="0"/>
-              </a:spcAft>
-              <a:defRPr sz="1400" b="0">
-                <a:solidFill>
-                  <a:srgbClr val="222222"/>
-                </a:solidFill>
-                <a:latin typeface="Consolas"/>
-              </a:defRPr>
-            </a:pPr>
-            <a:r>
-              <a:rPr sz="1400" b="0">
-                <a:solidFill>
-                  <a:srgbClr val="222222"/>
-                </a:solidFill>
-                <a:latin typeface="Consolas"/>
-              </a:rPr>
-              <a:t>                : -size;</a:t>
-            </a:r>
-          </a:p>
-        </p:txBody>
-      </p:sp>
-      <p:sp>
-        <p:nvSpPr>
-          <p:cNvPr id="18" name="TextBox 17"/>
-          <p:cNvSpPr txBox="1"/>
-          <p:nvPr/>
-        </p:nvSpPr>
-        <p:spPr>
-          <a:xfrm>
-            <a:off x="8595360" y="4160520"/>
-            <a:ext cx="3291840" cy="1813052"/>
-          </a:xfrm>
-          <a:prstGeom prst="rect">
-            <a:avLst/>
-          </a:prstGeom>
-          <a:noFill/>
-        </p:spPr>
-        <p:txBody>
-          <a:bodyPr wrap="square" lIns="0" tIns="0" rIns="0" bIns="0">
-            <a:spAutoFit/>
-          </a:bodyPr>
-          <a:lstStyle/>
-          <a:p>
-            <a:pPr algn="l">
-              <a:lnSpc>
-                <a:spcPct val="100000"/>
-              </a:lnSpc>
-              <a:spcAft>
-                <a:spcPts val="0"/>
-              </a:spcAft>
-              <a:defRPr sz="1800" b="0">
-                <a:solidFill>
-                  <a:srgbClr val="222222"/>
-                </a:solidFill>
-                <a:latin typeface="Calibri"/>
-              </a:defRPr>
-            </a:pPr>
-            <a:r>
-              <a:rPr sz="1800" b="0">
-                <a:solidFill>
-                  <a:srgbClr val="222222"/>
-                </a:solidFill>
-                <a:latin typeface="Calibri"/>
-              </a:rPr>
-              <a:t>Why a deadzone at all?</a:t>
-            </a:r>
-          </a:p>
-          <a:p>
-            <a:pPr algn="l">
-              <a:lnSpc>
-                <a:spcPct val="100000"/>
-              </a:lnSpc>
-              <a:spcAft>
-                <a:spcPts val="0"/>
-              </a:spcAft>
-              <a:defRPr sz="1800" b="0">
-                <a:solidFill>
-                  <a:srgbClr val="222222"/>
-                </a:solidFill>
-                <a:latin typeface="Calibri"/>
-              </a:defRPr>
-            </a:pPr>
-            <a:r>
-              <a:rPr sz="1800" b="0">
-                <a:solidFill>
-                  <a:srgbClr val="222222"/>
-                </a:solidFill>
-                <a:latin typeface="Calibri"/>
-              </a:rPr>
-              <a:t>A worn stick does not return</a:t>
-            </a:r>
-          </a:p>
-          <a:p>
-            <a:pPr algn="l">
-              <a:lnSpc>
-                <a:spcPct val="100000"/>
-              </a:lnSpc>
-              <a:spcAft>
-                <a:spcPts val="0"/>
-              </a:spcAft>
-              <a:defRPr sz="1800" b="0">
-                <a:solidFill>
-                  <a:srgbClr val="222222"/>
-                </a:solidFill>
-                <a:latin typeface="Calibri"/>
-              </a:defRPr>
-            </a:pPr>
-            <a:r>
-              <a:rPr sz="1800" b="0">
-                <a:solidFill>
-                  <a:srgbClr val="222222"/>
-                </a:solidFill>
-                <a:latin typeface="Calibri"/>
-              </a:rPr>
-              <a:t>to exactly zero. Without this</a:t>
-            </a:r>
-          </a:p>
-          <a:p>
-            <a:pPr algn="l">
-              <a:lnSpc>
-                <a:spcPct val="100000"/>
-              </a:lnSpc>
-              <a:spcAft>
-                <a:spcPts val="0"/>
-              </a:spcAft>
-              <a:defRPr sz="1800" b="0">
-                <a:solidFill>
-                  <a:srgbClr val="222222"/>
-                </a:solidFill>
-                <a:latin typeface="Calibri"/>
-              </a:defRPr>
-            </a:pPr>
-            <a:r>
-              <a:rPr sz="1800" b="0">
-                <a:solidFill>
-                  <a:srgbClr val="222222"/>
-                </a:solidFill>
-                <a:latin typeface="Calibri"/>
-              </a:rPr>
-              <a:t>the vehicle creeps away on</a:t>
-            </a:r>
-          </a:p>
-          <a:p>
-            <a:pPr algn="l">
-              <a:lnSpc>
-                <a:spcPct val="100000"/>
-              </a:lnSpc>
-              <a:spcAft>
-                <a:spcPts val="0"/>
-              </a:spcAft>
-              <a:defRPr sz="1800" b="0">
-                <a:solidFill>
-                  <a:srgbClr val="222222"/>
-                </a:solidFill>
-                <a:latin typeface="Calibri"/>
-              </a:defRPr>
-            </a:pPr>
-            <a:r>
-              <a:rPr sz="1800" b="0">
-                <a:solidFill>
-                  <a:srgbClr val="222222"/>
-                </a:solidFill>
-                <a:latin typeface="Calibri"/>
-              </a:rPr>
-              <a:t>its own.</a:t>
+            <a:pPr algn="l">
+              <a:lnSpc>
+                <a:spcPct val="100000"/>
+              </a:lnSpc>
+              <a:spcAft>
+                <a:spcPts val="600"/>
+              </a:spcAft>
+              <a:defRPr sz="1900" b="0">
+                <a:solidFill>
+                  <a:srgbClr val="222222"/>
+                </a:solidFill>
+                <a:latin typeface="Calibri"/>
+              </a:defRPr>
+            </a:pPr>
+            <a:r>
+              <a:rPr sz="1900" b="0">
+                <a:solidFill>
+                  <a:srgbClr val="222222"/>
+                </a:solidFill>
+                <a:latin typeface="Calibri"/>
+              </a:rPr>
+              <a:t>A thumbstick that has been thumbed by a hundred students does not come back to exactly zero.</a:t>
+            </a:r>
+          </a:p>
+          <a:p>
+            <a:pPr algn="l">
+              <a:lnSpc>
+                <a:spcPct val="100000"/>
+              </a:lnSpc>
+              <a:spcAft>
+                <a:spcPts val="600"/>
+              </a:spcAft>
+              <a:defRPr sz="1900" b="0">
+                <a:solidFill>
+                  <a:srgbClr val="222222"/>
+                </a:solidFill>
+                <a:latin typeface="Calibri"/>
+              </a:defRPr>
+            </a:pPr>
+            <a:r>
+              <a:rPr sz="1900" b="0">
+                <a:solidFill>
+                  <a:srgbClr val="222222"/>
+                </a:solidFill>
+                <a:latin typeface="Calibri"/>
+              </a:rPr>
+              <a:t>You just measured it. Yours probably reads a few counts either side of center when nobody is touching it.</a:t>
+            </a:r>
+          </a:p>
+          <a:p>
+            <a:pPr algn="l">
+              <a:lnSpc>
+                <a:spcPct val="100000"/>
+              </a:lnSpc>
+              <a:spcAft>
+                <a:spcPts val="600"/>
+              </a:spcAft>
+              <a:defRPr sz="950" b="0">
+                <a:solidFill>
+                  <a:srgbClr val="222222"/>
+                </a:solidFill>
+                <a:latin typeface="Calibri"/>
+              </a:defRPr>
+            </a:pPr>
+          </a:p>
+          <a:p>
+            <a:pPr algn="l">
+              <a:lnSpc>
+                <a:spcPct val="100000"/>
+              </a:lnSpc>
+              <a:spcAft>
+                <a:spcPts val="600"/>
+              </a:spcAft>
+              <a:defRPr sz="1900" b="0">
+                <a:solidFill>
+                  <a:srgbClr val="222222"/>
+                </a:solidFill>
+                <a:latin typeface="Calibri"/>
+              </a:defRPr>
+            </a:pPr>
+            <a:r>
+              <a:rPr sz="1900" b="0">
+                <a:solidFill>
+                  <a:srgbClr val="222222"/>
+                </a:solidFill>
+                <a:latin typeface="Calibri"/>
+              </a:rPr>
+              <a:t>If we fed that straight to the motors, the vehicle would creep across the room on its own while the controller sat on the desk. In a classroom with twenty vehicles, that is not a minor annoyance.</a:t>
+            </a:r>
+          </a:p>
+          <a:p>
+            <a:pPr algn="l">
+              <a:lnSpc>
+                <a:spcPct val="100000"/>
+              </a:lnSpc>
+              <a:spcAft>
+                <a:spcPts val="600"/>
+              </a:spcAft>
+              <a:defRPr sz="950" b="0">
+                <a:solidFill>
+                  <a:srgbClr val="222222"/>
+                </a:solidFill>
+                <a:latin typeface="Calibri"/>
+              </a:defRPr>
+            </a:pPr>
+          </a:p>
+          <a:p>
+            <a:pPr algn="l">
+              <a:lnSpc>
+                <a:spcPct val="100000"/>
+              </a:lnSpc>
+              <a:spcAft>
+                <a:spcPts val="600"/>
+              </a:spcAft>
+              <a:defRPr sz="1900" b="0">
+                <a:solidFill>
+                  <a:srgbClr val="222222"/>
+                </a:solidFill>
+                <a:latin typeface="Calibri"/>
+              </a:defRPr>
+            </a:pPr>
+            <a:r>
+              <a:rPr sz="1900" b="0">
+                <a:solidFill>
+                  <a:srgbClr val="222222"/>
+                </a:solidFill>
+                <a:latin typeface="Calibri"/>
+              </a:rPr>
+              <a:t>The answer is a DEADZONE: any reading smaller than a threshold is treated as a firm, deliberate zero.</a:t>
+            </a:r>
+          </a:p>
+          <a:p>
+            <a:pPr algn="l">
+              <a:lnSpc>
+                <a:spcPct val="100000"/>
+              </a:lnSpc>
+              <a:spcAft>
+                <a:spcPts val="600"/>
+              </a:spcAft>
+              <a:defRPr sz="1900" b="0">
+                <a:solidFill>
+                  <a:srgbClr val="222222"/>
+                </a:solidFill>
+                <a:latin typeface="Calibri"/>
+              </a:defRPr>
+            </a:pPr>
+            <a:r>
+              <a:rPr sz="1900" b="0">
+                <a:solidFill>
+                  <a:srgbClr val="222222"/>
+                </a:solidFill>
+                <a:latin typeface="Calibri"/>
+              </a:rPr>
+              <a:t>On this track the deadzone is 20, which is about 16% of the stick travel.</a:t>
+            </a:r>
+          </a:p>
+          <a:p>
+            <a:pPr algn="l">
+              <a:lnSpc>
+                <a:spcPct val="100000"/>
+              </a:lnSpc>
+              <a:spcAft>
+                <a:spcPts val="600"/>
+              </a:spcAft>
+              <a:defRPr sz="950" b="0">
+                <a:solidFill>
+                  <a:srgbClr val="222222"/>
+                </a:solidFill>
+                <a:latin typeface="Calibri"/>
+              </a:defRPr>
+            </a:pPr>
+          </a:p>
+          <a:p>
+            <a:pPr algn="l">
+              <a:lnSpc>
+                <a:spcPct val="100000"/>
+              </a:lnSpc>
+              <a:spcAft>
+                <a:spcPts val="600"/>
+              </a:spcAft>
+              <a:defRPr sz="1900" b="0">
+                <a:solidFill>
+                  <a:srgbClr val="222222"/>
+                </a:solidFill>
+                <a:latin typeface="Calibri"/>
+              </a:defRPr>
+            </a:pPr>
+            <a:r>
+              <a:rPr sz="1900" b="0">
+                <a:solidFill>
+                  <a:srgbClr val="222222"/>
+                </a:solidFill>
+                <a:latin typeface="Calibri"/>
+              </a:rPr>
+              <a:t>Too small and the vehicle creeps. Too big and you waste the stick.</a:t>
             </a:r>
           </a:p>
         </p:txBody>
@@ -11506,7 +11042,7 @@
                 </a:solidFill>
                 <a:latin typeface="Calibri"/>
               </a:rPr>
-              <a:t>map()  -  the most useful function in the course</a:t>
+              <a:t>From thumbstick to motor speed</a:t>
             </a:r>
           </a:p>
         </p:txBody>
@@ -11651,16 +11187,86 @@
           </a:p>
         </p:txBody>
       </p:sp>
-      <p:sp>
-        <p:nvSpPr>
-          <p:cNvPr id="6" name="TextBox 5"/>
+      <p:cxnSp>
+        <p:nvCxnSpPr>
+          <p:cNvPr id="6" name="Connector 5"/>
+          <p:cNvCxnSpPr/>
+          <p:nvPr/>
+        </p:nvCxnSpPr>
+        <p:spPr>
+          <a:xfrm>
+            <a:off x="1691640" y="4892040"/>
+            <a:ext cx="5852160" cy="0"/>
+          </a:xfrm>
+          <a:prstGeom prst="line">
+            <a:avLst/>
+          </a:prstGeom>
+          <a:ln w="22225">
+            <a:solidFill>
+              <a:srgbClr val="1F3A5F"/>
+            </a:solidFill>
+          </a:ln>
+        </p:spPr>
+        <p:style>
+          <a:lnRef idx="2">
+            <a:schemeClr val="accent1"/>
+          </a:lnRef>
+          <a:fillRef idx="0">
+            <a:schemeClr val="accent1"/>
+          </a:fillRef>
+          <a:effectRef idx="1">
+            <a:schemeClr val="accent1"/>
+          </a:effectRef>
+          <a:fontRef idx="minor">
+            <a:schemeClr val="tx1"/>
+          </a:fontRef>
+        </p:style>
+      </p:cxnSp>
+      <p:cxnSp>
+        <p:nvCxnSpPr>
+          <p:cNvPr id="7" name="Connector 6"/>
+          <p:cNvCxnSpPr/>
+          <p:nvPr/>
+        </p:nvCxnSpPr>
+        <p:spPr>
+          <a:xfrm flipV="1">
+            <a:off x="1691640" y="1600200"/>
+            <a:ext cx="0" cy="3291840"/>
+          </a:xfrm>
+          <a:prstGeom prst="line">
+            <a:avLst/>
+          </a:prstGeom>
+          <a:ln w="22225">
+            <a:solidFill>
+              <a:srgbClr val="1F3A5F"/>
+            </a:solidFill>
+          </a:ln>
+        </p:spPr>
+        <p:style>
+          <a:lnRef idx="2">
+            <a:schemeClr val="accent1"/>
+          </a:lnRef>
+          <a:fillRef idx="0">
+            <a:schemeClr val="accent1"/>
+          </a:fillRef>
+          <a:effectRef idx="1">
+            <a:schemeClr val="accent1"/>
+          </a:effectRef>
+          <a:fontRef idx="minor">
+            <a:schemeClr val="tx1"/>
+          </a:fontRef>
+        </p:style>
+      </p:cxnSp>
+      <p:sp>
+        <p:nvSpPr>
+          <p:cNvPr id="8" name="TextBox 7"/>
           <p:cNvSpPr txBox="1"/>
           <p:nvPr/>
         </p:nvSpPr>
         <p:spPr>
           <a:xfrm>
-            <a:off x="502920" y="1188720"/>
-            <a:ext cx="7047088" cy="274320"/>
+            <a:off x="1691640" y="5001768"/>
+            <a:ext cx="5852160" cy="367792"/>
           </a:xfrm>
           <a:prstGeom prst="rect">
             <a:avLst/>
@@ -11673,52 +11279,472 @@
           </a:bodyPr>
           <a:lstStyle/>
           <a:p>
-            <a:pPr algn="l">
-              <a:lnSpc>
-                <a:spcPct val="100000"/>
-              </a:lnSpc>
-              <a:spcAft>
-                <a:spcPts val="200"/>
-              </a:spcAft>
-              <a:defRPr sz="1200" b="1">
-                <a:solidFill>
-                  <a:srgbClr val="0E7C86"/>
-                </a:solidFill>
-                <a:latin typeface="Consolas"/>
-              </a:defRPr>
-            </a:pPr>
-            <a:r>
-              <a:rPr sz="1200" b="1">
-                <a:solidFill>
-                  <a:srgbClr val="0E7C86"/>
-                </a:solidFill>
-                <a:latin typeface="Consolas"/>
-              </a:rPr>
-              <a:t>the idea, and how the program uses it</a:t>
-            </a:r>
-          </a:p>
-        </p:txBody>
-      </p:sp>
-      <p:sp>
-        <p:nvSpPr>
-          <p:cNvPr id="7" name="CODE_PANEL"/>
+            <a:pPr algn="ctr">
+              <a:lnSpc>
+                <a:spcPct val="100000"/>
+              </a:lnSpc>
+              <a:spcAft>
+                <a:spcPts val="0"/>
+              </a:spcAft>
+              <a:defRPr sz="1800" b="0">
+                <a:solidFill>
+                  <a:srgbClr val="666666"/>
+                </a:solidFill>
+                <a:latin typeface="Calibri"/>
+              </a:defRPr>
+            </a:pPr>
+            <a:r>
+              <a:rPr sz="1800" b="0">
+                <a:solidFill>
+                  <a:srgbClr val="666666"/>
+                </a:solidFill>
+                <a:latin typeface="Calibri"/>
+              </a:rPr>
+              <a:t>stick reading   0  to  127</a:t>
+            </a:r>
+          </a:p>
+        </p:txBody>
+      </p:sp>
+      <p:sp>
+        <p:nvSpPr>
+          <p:cNvPr id="9" name="TextBox 8"/>
+          <p:cNvSpPr txBox="1"/>
+          <p:nvPr/>
+        </p:nvSpPr>
+        <p:spPr>
+          <a:xfrm>
+            <a:off x="548640" y="1554480"/>
+            <a:ext cx="1051560" cy="950976"/>
+          </a:xfrm>
+          <a:prstGeom prst="rect">
+            <a:avLst/>
+          </a:prstGeom>
+          <a:noFill/>
+        </p:spPr>
+        <p:txBody>
+          <a:bodyPr wrap="square" lIns="0" tIns="0" rIns="0" bIns="0">
+            <a:spAutoFit/>
+          </a:bodyPr>
+          <a:lstStyle/>
+          <a:p>
+            <a:pPr algn="r">
+              <a:lnSpc>
+                <a:spcPct val="100000"/>
+              </a:lnSpc>
+              <a:spcAft>
+                <a:spcPts val="0"/>
+              </a:spcAft>
+              <a:defRPr sz="1800" b="0">
+                <a:solidFill>
+                  <a:srgbClr val="666666"/>
+                </a:solidFill>
+                <a:latin typeface="Calibri"/>
+              </a:defRPr>
+            </a:pPr>
+            <a:r>
+              <a:rPr sz="1800" b="0">
+                <a:solidFill>
+                  <a:srgbClr val="666666"/>
+                </a:solidFill>
+                <a:latin typeface="Calibri"/>
+              </a:rPr>
+              <a:t>motor</a:t>
+            </a:r>
+          </a:p>
+          <a:p>
+            <a:pPr algn="r">
+              <a:lnSpc>
+                <a:spcPct val="100000"/>
+              </a:lnSpc>
+              <a:spcAft>
+                <a:spcPts val="0"/>
+              </a:spcAft>
+              <a:defRPr sz="1800" b="0">
+                <a:solidFill>
+                  <a:srgbClr val="666666"/>
+                </a:solidFill>
+                <a:latin typeface="Calibri"/>
+              </a:defRPr>
+            </a:pPr>
+            <a:r>
+              <a:rPr sz="1800" b="0">
+                <a:solidFill>
+                  <a:srgbClr val="666666"/>
+                </a:solidFill>
+                <a:latin typeface="Calibri"/>
+              </a:rPr>
+              <a:t>speed</a:t>
+            </a:r>
+          </a:p>
+          <a:p>
+            <a:pPr algn="r">
+              <a:lnSpc>
+                <a:spcPct val="100000"/>
+              </a:lnSpc>
+              <a:spcAft>
+                <a:spcPts val="0"/>
+              </a:spcAft>
+              <a:defRPr sz="1800" b="0">
+                <a:solidFill>
+                  <a:srgbClr val="666666"/>
+                </a:solidFill>
+                <a:latin typeface="Calibri"/>
+              </a:defRPr>
+            </a:pPr>
+            <a:r>
+              <a:rPr sz="1800" b="0">
+                <a:solidFill>
+                  <a:srgbClr val="666666"/>
+                </a:solidFill>
+                <a:latin typeface="Calibri"/>
+              </a:rPr>
+              <a:t>0 to 255</a:t>
+            </a:r>
+          </a:p>
+        </p:txBody>
+      </p:sp>
+      <p:sp>
+        <p:nvSpPr>
+          <p:cNvPr id="10" name="Rectangle 9"/>
           <p:cNvSpPr/>
           <p:nvPr/>
         </p:nvSpPr>
         <p:spPr>
           <a:xfrm>
-            <a:off x="502920" y="1517904"/>
-            <a:ext cx="7047088" cy="4745736"/>
-          </a:xfrm>
-          <a:prstGeom prst="roundRect">
-            <a:avLst>
-              <a:gd name="adj" fmla="val 4000"/>
-            </a:avLst>
+            <a:off x="1691640" y="1600200"/>
+            <a:ext cx="921600" cy="3291840"/>
+          </a:xfrm>
+          <a:prstGeom prst="rect">
+            <a:avLst/>
+          </a:prstGeom>
+          <a:solidFill>
+            <a:srgbClr val="F6D8D8"/>
+          </a:solidFill>
+          <a:ln>
+            <a:noFill/>
+          </a:ln>
+          <a:effectLst/>
+        </p:spPr>
+        <p:style>
+          <a:lnRef idx="1">
+            <a:schemeClr val="accent1"/>
+          </a:lnRef>
+          <a:fillRef idx="3">
+            <a:schemeClr val="accent1"/>
+          </a:fillRef>
+          <a:effectRef idx="2">
+            <a:schemeClr val="accent1"/>
+          </a:effectRef>
+          <a:fontRef idx="minor">
+            <a:schemeClr val="lt1"/>
+          </a:fontRef>
+        </p:style>
+        <p:txBody>
+          <a:bodyPr rtlCol="0" anchor="ctr"/>
+          <a:lstStyle/>
+          <a:p/>
+        </p:txBody>
+      </p:sp>
+      <p:cxnSp>
+        <p:nvCxnSpPr>
+          <p:cNvPr id="11" name="Connector 10"/>
+          <p:cNvCxnSpPr/>
+          <p:nvPr/>
+        </p:nvCxnSpPr>
+        <p:spPr>
+          <a:xfrm>
+            <a:off x="1691640" y="4892040"/>
+            <a:ext cx="921600" cy="0"/>
+          </a:xfrm>
+          <a:prstGeom prst="line">
+            <a:avLst/>
+          </a:prstGeom>
+          <a:ln w="38100">
+            <a:solidFill>
+              <a:srgbClr val="A32A2A"/>
+            </a:solidFill>
+          </a:ln>
+        </p:spPr>
+        <p:style>
+          <a:lnRef idx="2">
+            <a:schemeClr val="accent1"/>
+          </a:lnRef>
+          <a:fillRef idx="0">
+            <a:schemeClr val="accent1"/>
+          </a:fillRef>
+          <a:effectRef idx="1">
+            <a:schemeClr val="accent1"/>
+          </a:effectRef>
+          <a:fontRef idx="minor">
+            <a:schemeClr val="tx1"/>
+          </a:fontRef>
+        </p:style>
+      </p:cxnSp>
+      <p:cxnSp>
+        <p:nvCxnSpPr>
+          <p:cNvPr id="12" name="Connector 11"/>
+          <p:cNvCxnSpPr/>
+          <p:nvPr/>
+        </p:nvCxnSpPr>
+        <p:spPr>
+          <a:xfrm flipV="1">
+            <a:off x="2613240" y="1600200"/>
+            <a:ext cx="4930560" cy="3291840"/>
+          </a:xfrm>
+          <a:prstGeom prst="line">
+            <a:avLst/>
+          </a:prstGeom>
+          <a:ln w="38100">
+            <a:solidFill>
+              <a:srgbClr val="0E7C86"/>
+            </a:solidFill>
+          </a:ln>
+        </p:spPr>
+        <p:style>
+          <a:lnRef idx="2">
+            <a:schemeClr val="accent1"/>
+          </a:lnRef>
+          <a:fillRef idx="0">
+            <a:schemeClr val="accent1"/>
+          </a:fillRef>
+          <a:effectRef idx="1">
+            <a:schemeClr val="accent1"/>
+          </a:effectRef>
+          <a:fontRef idx="minor">
+            <a:schemeClr val="tx1"/>
+          </a:fontRef>
+        </p:style>
+      </p:cxnSp>
+      <p:sp>
+        <p:nvSpPr>
+          <p:cNvPr id="13" name="TextBox 12"/>
+          <p:cNvSpPr txBox="1"/>
+          <p:nvPr/>
+        </p:nvSpPr>
+        <p:spPr>
+          <a:xfrm>
+            <a:off x="1691640" y="1216152"/>
+            <a:ext cx="1470240" cy="646684"/>
+          </a:xfrm>
+          <a:prstGeom prst="rect">
+            <a:avLst/>
+          </a:prstGeom>
+          <a:noFill/>
+        </p:spPr>
+        <p:txBody>
+          <a:bodyPr wrap="square" lIns="0" tIns="0" rIns="0" bIns="0">
+            <a:spAutoFit/>
+          </a:bodyPr>
+          <a:lstStyle/>
+          <a:p>
+            <a:pPr algn="ctr">
+              <a:lnSpc>
+                <a:spcPct val="100000"/>
+              </a:lnSpc>
+              <a:spcAft>
+                <a:spcPts val="0"/>
+              </a:spcAft>
+              <a:defRPr sz="1800" b="1">
+                <a:solidFill>
+                  <a:srgbClr val="A32A2A"/>
+                </a:solidFill>
+                <a:latin typeface="Calibri"/>
+              </a:defRPr>
+            </a:pPr>
+            <a:r>
+              <a:rPr sz="1800" b="1">
+                <a:solidFill>
+                  <a:srgbClr val="A32A2A"/>
+                </a:solidFill>
+                <a:latin typeface="Calibri"/>
+              </a:rPr>
+              <a:t>DEADZONE</a:t>
+            </a:r>
+            <a:br/>
+            <a:r>
+              <a:rPr sz="1800" b="1">
+                <a:solidFill>
+                  <a:srgbClr val="A32A2A"/>
+                </a:solidFill>
+                <a:latin typeface="Calibri"/>
+              </a:rPr>
+              <a:t>answer is 0</a:t>
+            </a:r>
+          </a:p>
+        </p:txBody>
+      </p:sp>
+      <p:sp>
+        <p:nvSpPr>
+          <p:cNvPr id="14" name="TextBox 13"/>
+          <p:cNvSpPr txBox="1"/>
+          <p:nvPr/>
+        </p:nvSpPr>
+        <p:spPr>
+          <a:xfrm>
+            <a:off x="2887560" y="1691640"/>
+            <a:ext cx="3657600" cy="646684"/>
+          </a:xfrm>
+          <a:prstGeom prst="rect">
+            <a:avLst/>
+          </a:prstGeom>
+          <a:noFill/>
+        </p:spPr>
+        <p:txBody>
+          <a:bodyPr wrap="square" lIns="0" tIns="0" rIns="0" bIns="0">
+            <a:spAutoFit/>
+          </a:bodyPr>
+          <a:lstStyle/>
+          <a:p>
+            <a:pPr algn="l">
+              <a:lnSpc>
+                <a:spcPct val="100000"/>
+              </a:lnSpc>
+              <a:spcAft>
+                <a:spcPts val="0"/>
+              </a:spcAft>
+              <a:defRPr sz="1800" b="1">
+                <a:solidFill>
+                  <a:srgbClr val="0E7C86"/>
+                </a:solidFill>
+                <a:latin typeface="Calibri"/>
+              </a:defRPr>
+            </a:pPr>
+            <a:r>
+              <a:rPr sz="1800" b="1">
+                <a:solidFill>
+                  <a:srgbClr val="0E7C86"/>
+                </a:solidFill>
+                <a:latin typeface="Calibri"/>
+              </a:rPr>
+              <a:t>map() stretches what is left</a:t>
+            </a:r>
+            <a:br/>
+            <a:r>
+              <a:rPr sz="1800" b="1">
+                <a:solidFill>
+                  <a:srgbClr val="0E7C86"/>
+                </a:solidFill>
+                <a:latin typeface="Calibri"/>
+              </a:rPr>
+              <a:t>across the whole speed range</a:t>
+            </a:r>
+          </a:p>
+        </p:txBody>
+      </p:sp>
+      <p:sp>
+        <p:nvSpPr>
+          <p:cNvPr id="15" name="TextBox 14"/>
+          <p:cNvSpPr txBox="1"/>
+          <p:nvPr/>
+        </p:nvSpPr>
+        <p:spPr>
+          <a:xfrm>
+            <a:off x="2156040" y="5221224"/>
+            <a:ext cx="1097280" cy="367792"/>
+          </a:xfrm>
+          <a:prstGeom prst="rect">
+            <a:avLst/>
+          </a:prstGeom>
+          <a:noFill/>
+        </p:spPr>
+        <p:txBody>
+          <a:bodyPr wrap="square" lIns="0" tIns="0" rIns="0" bIns="0">
+            <a:spAutoFit/>
+          </a:bodyPr>
+          <a:lstStyle/>
+          <a:p>
+            <a:pPr algn="ctr">
+              <a:lnSpc>
+                <a:spcPct val="100000"/>
+              </a:lnSpc>
+              <a:spcAft>
+                <a:spcPts val="0"/>
+              </a:spcAft>
+              <a:defRPr sz="1800" b="0">
+                <a:solidFill>
+                  <a:srgbClr val="A32A2A"/>
+                </a:solidFill>
+                <a:latin typeface="Consolas"/>
+              </a:defRPr>
+            </a:pPr>
+            <a:r>
+              <a:rPr sz="1800" b="0">
+                <a:solidFill>
+                  <a:srgbClr val="A32A2A"/>
+                </a:solidFill>
+                <a:latin typeface="Consolas"/>
+              </a:rPr>
+              <a:t>20</a:t>
+            </a:r>
+          </a:p>
+        </p:txBody>
+      </p:sp>
+      <p:sp>
+        <p:nvSpPr>
+          <p:cNvPr id="16" name="TextBox 15"/>
+          <p:cNvSpPr txBox="1"/>
+          <p:nvPr/>
+        </p:nvSpPr>
+        <p:spPr>
+          <a:xfrm>
+            <a:off x="8595360" y="1325880"/>
+            <a:ext cx="3291840" cy="367792"/>
+          </a:xfrm>
+          <a:prstGeom prst="rect">
+            <a:avLst/>
+          </a:prstGeom>
+          <a:noFill/>
+        </p:spPr>
+        <p:txBody>
+          <a:bodyPr wrap="square" lIns="0" tIns="0" rIns="0" bIns="0">
+            <a:spAutoFit/>
+          </a:bodyPr>
+          <a:lstStyle/>
+          <a:p>
+            <a:pPr algn="l">
+              <a:lnSpc>
+                <a:spcPct val="100000"/>
+              </a:lnSpc>
+              <a:spcAft>
+                <a:spcPts val="0"/>
+              </a:spcAft>
+              <a:defRPr sz="1800" b="1">
+                <a:solidFill>
+                  <a:srgbClr val="0E7C86"/>
+                </a:solidFill>
+                <a:latin typeface="Consolas"/>
+              </a:defRPr>
+            </a:pPr>
+            <a:r>
+              <a:rPr sz="1800" b="1">
+                <a:solidFill>
+                  <a:srgbClr val="0E7C86"/>
+                </a:solidFill>
+                <a:latin typeface="Consolas"/>
+              </a:rPr>
+              <a:t>stickToSpeed()</a:t>
+            </a:r>
+          </a:p>
+        </p:txBody>
+      </p:sp>
+      <p:sp>
+        <p:nvSpPr>
+          <p:cNvPr id="17" name="Rectangle 16"/>
+          <p:cNvSpPr/>
+          <p:nvPr/>
+        </p:nvSpPr>
+        <p:spPr>
+          <a:xfrm>
+            <a:off x="8595360" y="1691640"/>
+            <a:ext cx="3291840" cy="2286000"/>
+          </a:xfrm>
+          <a:prstGeom prst="rect">
+            <a:avLst/>
           </a:prstGeom>
           <a:solidFill>
             <a:srgbClr val="F4F6F8"/>
           </a:solidFill>
-          <a:ln w="12700">
+          <a:ln w="9525">
             <a:solidFill>
               <a:srgbClr val="C8D2DE"/>
             </a:solidFill>
@@ -11740,7 +11766,7 @@
           </a:fontRef>
         </p:style>
         <p:txBody>
-          <a:bodyPr rtlCol="0" anchor="t" wrap="square" lIns="146304" tIns="91440" bIns="73152"/>
+          <a:bodyPr rtlCol="0" anchor="t" wrap="square" lIns="45720" rIns="45720" tIns="18288" bIns="18288"/>
           <a:lstStyle/>
           <a:p>
             <a:pPr algn="l">
@@ -11750,18 +11776,21 @@
               <a:spcAft>
                 <a:spcPts val="0"/>
               </a:spcAft>
-              <a:defRPr sz="1650">
+              <a:defRPr sz="1400" b="0">
+                <a:solidFill>
+                  <a:srgbClr val="222222"/>
+                </a:solidFill>
                 <a:latin typeface="Consolas"/>
               </a:defRPr>
             </a:pPr>
             <a:r>
-              <a:rPr sz="1650">
+              <a:rPr sz="1400" b="0">
                 <a:solidFill>
                   <a:srgbClr val="222222"/>
                 </a:solidFill>
                 <a:latin typeface="Consolas"/>
               </a:rPr>
-              <a:t>map(value, fromLow, fromHigh, toLow, toHigh)</a:t>
+              <a:t>if (abs(v) &lt; DEADZONE)</a:t>
             </a:r>
           </a:p>
           <a:p>
@@ -11772,18 +11801,21 @@
               <a:spcAft>
                 <a:spcPts val="0"/>
               </a:spcAft>
-              <a:defRPr sz="1650">
+              <a:defRPr sz="1400" b="0">
+                <a:solidFill>
+                  <a:srgbClr val="222222"/>
+                </a:solidFill>
                 <a:latin typeface="Consolas"/>
               </a:defRPr>
             </a:pPr>
             <a:r>
-              <a:rPr sz="1650">
+              <a:rPr sz="1400" b="0">
                 <a:solidFill>
                   <a:srgbClr val="222222"/>
                 </a:solidFill>
                 <a:latin typeface="Consolas"/>
               </a:rPr>
-              <a:t> </a:t>
+              <a:t>    return 0;</a:t>
             </a:r>
           </a:p>
           <a:p>
@@ -11794,18 +11826,37 @@
               <a:spcAft>
                 <a:spcPts val="0"/>
               </a:spcAft>
-              <a:defRPr sz="1650">
+              <a:defRPr sz="700" b="0">
+                <a:solidFill>
+                  <a:srgbClr val="222222"/>
+                </a:solidFill>
                 <a:latin typeface="Consolas"/>
               </a:defRPr>
             </a:pPr>
-            <a:r>
-              <a:rPr sz="1650">
-                <a:solidFill>
-                  <a:srgbClr val="666666"/>
+          </a:p>
+          <a:p>
+            <a:pPr algn="l">
+              <a:lnSpc>
+                <a:spcPct val="100000"/>
+              </a:lnSpc>
+              <a:spcAft>
+                <a:spcPts val="0"/>
+              </a:spcAft>
+              <a:defRPr sz="1400" b="0">
+                <a:solidFill>
+                  <a:srgbClr val="222222"/>
                 </a:solidFill>
                 <a:latin typeface="Consolas"/>
-              </a:rPr>
-              <a:t>// "value sits somewhere between fromLow and fromHigh.</a:t>
+              </a:defRPr>
+            </a:pPr>
+            <a:r>
+              <a:rPr sz="1400" b="0">
+                <a:solidFill>
+                  <a:srgbClr val="222222"/>
+                </a:solidFill>
+                <a:latin typeface="Consolas"/>
+              </a:rPr>
+              <a:t>size = map(abs(v),</a:t>
             </a:r>
           </a:p>
           <a:p>
@@ -11816,18 +11867,21 @@
               <a:spcAft>
                 <a:spcPts val="0"/>
               </a:spcAft>
-              <a:defRPr sz="1650">
+              <a:defRPr sz="1400" b="0">
+                <a:solidFill>
+                  <a:srgbClr val="222222"/>
+                </a:solidFill>
                 <a:latin typeface="Consolas"/>
               </a:defRPr>
             </a:pPr>
             <a:r>
-              <a:rPr sz="1650">
-                <a:solidFill>
-                  <a:srgbClr val="666666"/>
+              <a:rPr sz="1400" b="0">
+                <a:solidFill>
+                  <a:srgbClr val="222222"/>
                 </a:solidFill>
                 <a:latin typeface="Consolas"/>
               </a:rPr>
-              <a:t>//  Where does it sit between toLow and toHigh?"</a:t>
+              <a:t>           DEADZONE, 127,</a:t>
             </a:r>
           </a:p>
           <a:p>
@@ -11838,18 +11892,21 @@
               <a:spcAft>
                 <a:spcPts val="0"/>
               </a:spcAft>
-              <a:defRPr sz="1650">
+              <a:defRPr sz="1400" b="0">
+                <a:solidFill>
+                  <a:srgbClr val="222222"/>
+                </a:solidFill>
                 <a:latin typeface="Consolas"/>
               </a:defRPr>
             </a:pPr>
             <a:r>
-              <a:rPr sz="1650">
+              <a:rPr sz="1400" b="0">
                 <a:solidFill>
                   <a:srgbClr val="222222"/>
                 </a:solidFill>
                 <a:latin typeface="Consolas"/>
               </a:rPr>
-              <a:t> </a:t>
+              <a:t>           MOTOR_MIN, maxSpeed);</a:t>
             </a:r>
           </a:p>
           <a:p>
@@ -11860,18 +11917,37 @@
               <a:spcAft>
                 <a:spcPts val="0"/>
               </a:spcAft>
-              <a:defRPr sz="1650">
+              <a:defRPr sz="700" b="0">
+                <a:solidFill>
+                  <a:srgbClr val="222222"/>
+                </a:solidFill>
                 <a:latin typeface="Consolas"/>
               </a:defRPr>
             </a:pPr>
-            <a:r>
-              <a:rPr sz="1650">
+          </a:p>
+          <a:p>
+            <a:pPr algn="l">
+              <a:lnSpc>
+                <a:spcPct val="100000"/>
+              </a:lnSpc>
+              <a:spcAft>
+                <a:spcPts val="0"/>
+              </a:spcAft>
+              <a:defRPr sz="1400" b="0">
                 <a:solidFill>
                   <a:srgbClr val="222222"/>
                 </a:solidFill>
                 <a:latin typeface="Consolas"/>
-              </a:rPr>
-              <a:t>map(0,   0, 127, 0, 255)   -&gt;    0</a:t>
+              </a:defRPr>
+            </a:pPr>
+            <a:r>
+              <a:rPr sz="1400" b="0">
+                <a:solidFill>
+                  <a:srgbClr val="222222"/>
+                </a:solidFill>
+                <a:latin typeface="Consolas"/>
+              </a:rPr>
+              <a:t>return (v &gt; 0) ? size</a:t>
             </a:r>
           </a:p>
           <a:p>
@@ -11882,186 +11958,35 @@
               <a:spcAft>
                 <a:spcPts val="0"/>
               </a:spcAft>
-              <a:defRPr sz="1650">
+              <a:defRPr sz="1400" b="0">
+                <a:solidFill>
+                  <a:srgbClr val="222222"/>
+                </a:solidFill>
                 <a:latin typeface="Consolas"/>
               </a:defRPr>
             </a:pPr>
             <a:r>
-              <a:rPr sz="1650">
+              <a:rPr sz="1400" b="0">
                 <a:solidFill>
                   <a:srgbClr val="222222"/>
                 </a:solidFill>
                 <a:latin typeface="Consolas"/>
               </a:rPr>
-              <a:t>map(63, 0, 63, 0, 255)   -&gt;  127</a:t>
-            </a:r>
-          </a:p>
-          <a:p>
-            <a:pPr algn="l">
-              <a:lnSpc>
-                <a:spcPct val="100000"/>
-              </a:lnSpc>
-              <a:spcAft>
-                <a:spcPts val="0"/>
-              </a:spcAft>
-              <a:defRPr sz="1650">
-                <a:latin typeface="Consolas"/>
-              </a:defRPr>
-            </a:pPr>
-            <a:r>
-              <a:rPr sz="1650">
-                <a:solidFill>
-                  <a:srgbClr val="222222"/>
-                </a:solidFill>
-                <a:latin typeface="Consolas"/>
-              </a:rPr>
-              <a:t>map(127, 0, 127, 0, 255)   -&gt;  255</a:t>
-            </a:r>
-          </a:p>
-          <a:p>
-            <a:pPr algn="l">
-              <a:lnSpc>
-                <a:spcPct val="100000"/>
-              </a:lnSpc>
-              <a:spcAft>
-                <a:spcPts val="0"/>
-              </a:spcAft>
-              <a:defRPr sz="1650">
-                <a:latin typeface="Consolas"/>
-              </a:defRPr>
-            </a:pPr>
-            <a:r>
-              <a:rPr sz="1650">
-                <a:solidFill>
-                  <a:srgbClr val="222222"/>
-                </a:solidFill>
-                <a:latin typeface="Consolas"/>
-              </a:rPr>
-              <a:t> </a:t>
-            </a:r>
-          </a:p>
-          <a:p>
-            <a:pPr algn="l">
-              <a:lnSpc>
-                <a:spcPct val="100000"/>
-              </a:lnSpc>
-              <a:spcAft>
-                <a:spcPts val="0"/>
-              </a:spcAft>
-              <a:defRPr sz="1650">
-                <a:latin typeface="Consolas"/>
-              </a:defRPr>
-            </a:pPr>
-            <a:r>
-              <a:rPr sz="1650">
-                <a:solidFill>
-                  <a:srgbClr val="666666"/>
-                </a:solidFill>
-                <a:latin typeface="Consolas"/>
-              </a:rPr>
-              <a:t>// In stickToSpeed the low end is the DEADZONE, not zero,</a:t>
-            </a:r>
-          </a:p>
-          <a:p>
-            <a:pPr algn="l">
-              <a:lnSpc>
-                <a:spcPct val="100000"/>
-              </a:lnSpc>
-              <a:spcAft>
-                <a:spcPts val="0"/>
-              </a:spcAft>
-              <a:defRPr sz="1650">
-                <a:latin typeface="Consolas"/>
-              </a:defRPr>
-            </a:pPr>
-            <a:r>
-              <a:rPr sz="1650">
-                <a:solidFill>
-                  <a:srgbClr val="666666"/>
-                </a:solidFill>
-                <a:latin typeface="Consolas"/>
-              </a:rPr>
-              <a:t>// so the leftover travel is stretched across the whole</a:t>
-            </a:r>
-          </a:p>
-          <a:p>
-            <a:pPr algn="l">
-              <a:lnSpc>
-                <a:spcPct val="100000"/>
-              </a:lnSpc>
-              <a:spcAft>
-                <a:spcPts val="0"/>
-              </a:spcAft>
-              <a:defRPr sz="1650">
-                <a:latin typeface="Consolas"/>
-              </a:defRPr>
-            </a:pPr>
-            <a:r>
-              <a:rPr sz="1650">
-                <a:solidFill>
-                  <a:srgbClr val="666666"/>
-                </a:solidFill>
-                <a:latin typeface="Consolas"/>
-              </a:rPr>
-              <a:t>// speed range. Without that you could never reach 255.</a:t>
-            </a:r>
-          </a:p>
-          <a:p>
-            <a:pPr algn="l">
-              <a:lnSpc>
-                <a:spcPct val="100000"/>
-              </a:lnSpc>
-              <a:spcAft>
-                <a:spcPts val="0"/>
-              </a:spcAft>
-              <a:defRPr sz="1650">
-                <a:latin typeface="Consolas"/>
-              </a:defRPr>
-            </a:pPr>
-            <a:r>
-              <a:rPr sz="1650">
-                <a:solidFill>
-                  <a:srgbClr val="222222"/>
-                </a:solidFill>
-                <a:latin typeface="Consolas"/>
-              </a:rPr>
-              <a:t> </a:t>
-            </a:r>
-          </a:p>
-          <a:p>
-            <a:pPr algn="l">
-              <a:lnSpc>
-                <a:spcPct val="100000"/>
-              </a:lnSpc>
-              <a:spcAft>
-                <a:spcPts val="0"/>
-              </a:spcAft>
-              <a:defRPr sz="1650">
-                <a:latin typeface="Consolas"/>
-              </a:defRPr>
-            </a:pPr>
-            <a:r>
-              <a:rPr sz="1650" b="1">
-                <a:solidFill>
-                  <a:srgbClr val="0E7C86"/>
-                </a:solidFill>
-                <a:latin typeface="Consolas"/>
-              </a:rPr>
-              <a:t>size = map(abs(v), 20, 127, MOTOR_MIN, maxSpeed);</a:t>
-            </a:r>
-          </a:p>
-        </p:txBody>
-      </p:sp>
-      <p:sp>
-        <p:nvSpPr>
-          <p:cNvPr id="8" name="TextBox 7"/>
+              <a:t>                : -size;</a:t>
+            </a:r>
+          </a:p>
+        </p:txBody>
+      </p:sp>
+      <p:sp>
+        <p:nvSpPr>
+          <p:cNvPr id="18" name="TextBox 17"/>
           <p:cNvSpPr txBox="1"/>
           <p:nvPr/>
         </p:nvSpPr>
         <p:spPr>
           <a:xfrm>
-            <a:off x="7870048" y="1517904"/>
-            <a:ext cx="3818727" cy="4745736"/>
+            <a:off x="8595360" y="4160520"/>
+            <a:ext cx="3291840" cy="1813052"/>
           </a:xfrm>
           <a:prstGeom prst="rect">
             <a:avLst/>
@@ -12079,73 +12004,123 @@
                 <a:spcPct val="100000"/>
               </a:lnSpc>
               <a:spcAft>
-                <a:spcPts val="700"/>
-              </a:spcAft>
-              <a:defRPr sz="2100" b="0">
-                <a:solidFill>
-                  <a:srgbClr val="222222"/>
-                </a:solidFill>
-                <a:latin typeface="Calibri"/>
-              </a:defRPr>
-            </a:pPr>
-            <a:r>
-              <a:rPr sz="2100" b="0">
-                <a:solidFill>
-                  <a:srgbClr val="222222"/>
-                </a:solidFill>
-                <a:latin typeface="Calibri"/>
-              </a:rPr>
-              <a:t>map() is just proportion. Nothing more.</a:t>
-            </a:r>
-          </a:p>
-          <a:p>
-            <a:pPr algn="l">
-              <a:lnSpc>
-                <a:spcPct val="100000"/>
-              </a:lnSpc>
-              <a:spcAft>
-                <a:spcPts val="700"/>
-              </a:spcAft>
-              <a:defRPr sz="2100" b="0">
-                <a:solidFill>
-                  <a:srgbClr val="222222"/>
-                </a:solidFill>
-                <a:latin typeface="Calibri"/>
-              </a:defRPr>
-            </a:pPr>
-            <a:r>
-              <a:rPr sz="2100" b="0">
-                <a:solidFill>
-                  <a:srgbClr val="222222"/>
-                </a:solidFill>
-                <a:latin typeface="Calibri"/>
-              </a:rPr>
-              <a:t>It does NOT clamp. Feed it something outside the input range and you get something outside the output range, which is why the program calls constrain() straight afterwards.</a:t>
-            </a:r>
-          </a:p>
-          <a:p>
-            <a:pPr algn="l">
-              <a:lnSpc>
-                <a:spcPct val="100000"/>
-              </a:lnSpc>
-              <a:spcAft>
-                <a:spcPts val="700"/>
-              </a:spcAft>
-              <a:defRPr sz="2100" b="0">
-                <a:solidFill>
-                  <a:srgbClr val="222222"/>
-                </a:solidFill>
-                <a:latin typeface="Calibri"/>
-              </a:defRPr>
-            </a:pPr>
-            <a:r>
-              <a:rPr sz="2100" b="0">
-                <a:solidFill>
-                  <a:srgbClr val="222222"/>
-                </a:solidFill>
-                <a:latin typeface="Calibri"/>
-              </a:rPr>
-              <a:t>abs() throws away the sign, so we map the SIZE of the push and put the direction back at the end.</a:t>
+                <a:spcPts val="0"/>
+              </a:spcAft>
+              <a:defRPr sz="1800" b="0">
+                <a:solidFill>
+                  <a:srgbClr val="222222"/>
+                </a:solidFill>
+                <a:latin typeface="Calibri"/>
+              </a:defRPr>
+            </a:pPr>
+            <a:r>
+              <a:rPr sz="1800" b="0">
+                <a:solidFill>
+                  <a:srgbClr val="222222"/>
+                </a:solidFill>
+                <a:latin typeface="Calibri"/>
+              </a:rPr>
+              <a:t>Why a deadzone at all?</a:t>
+            </a:r>
+          </a:p>
+          <a:p>
+            <a:pPr algn="l">
+              <a:lnSpc>
+                <a:spcPct val="100000"/>
+              </a:lnSpc>
+              <a:spcAft>
+                <a:spcPts val="0"/>
+              </a:spcAft>
+              <a:defRPr sz="1800" b="0">
+                <a:solidFill>
+                  <a:srgbClr val="222222"/>
+                </a:solidFill>
+                <a:latin typeface="Calibri"/>
+              </a:defRPr>
+            </a:pPr>
+            <a:r>
+              <a:rPr sz="1800" b="0">
+                <a:solidFill>
+                  <a:srgbClr val="222222"/>
+                </a:solidFill>
+                <a:latin typeface="Calibri"/>
+              </a:rPr>
+              <a:t>A worn stick does not return</a:t>
+            </a:r>
+          </a:p>
+          <a:p>
+            <a:pPr algn="l">
+              <a:lnSpc>
+                <a:spcPct val="100000"/>
+              </a:lnSpc>
+              <a:spcAft>
+                <a:spcPts val="0"/>
+              </a:spcAft>
+              <a:defRPr sz="1800" b="0">
+                <a:solidFill>
+                  <a:srgbClr val="222222"/>
+                </a:solidFill>
+                <a:latin typeface="Calibri"/>
+              </a:defRPr>
+            </a:pPr>
+            <a:r>
+              <a:rPr sz="1800" b="0">
+                <a:solidFill>
+                  <a:srgbClr val="222222"/>
+                </a:solidFill>
+                <a:latin typeface="Calibri"/>
+              </a:rPr>
+              <a:t>to exactly zero. Without this</a:t>
+            </a:r>
+          </a:p>
+          <a:p>
+            <a:pPr algn="l">
+              <a:lnSpc>
+                <a:spcPct val="100000"/>
+              </a:lnSpc>
+              <a:spcAft>
+                <a:spcPts val="0"/>
+              </a:spcAft>
+              <a:defRPr sz="1800" b="0">
+                <a:solidFill>
+                  <a:srgbClr val="222222"/>
+                </a:solidFill>
+                <a:latin typeface="Calibri"/>
+              </a:defRPr>
+            </a:pPr>
+            <a:r>
+              <a:rPr sz="1800" b="0">
+                <a:solidFill>
+                  <a:srgbClr val="222222"/>
+                </a:solidFill>
+                <a:latin typeface="Calibri"/>
+              </a:rPr>
+              <a:t>the vehicle creeps away on</a:t>
+            </a:r>
+          </a:p>
+          <a:p>
+            <a:pPr algn="l">
+              <a:lnSpc>
+                <a:spcPct val="100000"/>
+              </a:lnSpc>
+              <a:spcAft>
+                <a:spcPts val="0"/>
+              </a:spcAft>
+              <a:defRPr sz="1800" b="0">
+                <a:solidFill>
+                  <a:srgbClr val="222222"/>
+                </a:solidFill>
+                <a:latin typeface="Calibri"/>
+              </a:defRPr>
+            </a:pPr>
+            <a:r>
+              <a:rPr sz="1800" b="0">
+                <a:solidFill>
+                  <a:srgbClr val="222222"/>
+                </a:solidFill>
+                <a:latin typeface="Calibri"/>
+              </a:rPr>
+              <a:t>its own.</a:t>
             </a:r>
           </a:p>
         </p:txBody>
@@ -12170,24 +12145,22 @@
       <p:grpSpPr/>
       <p:sp>
         <p:nvSpPr>
-          <p:cNvPr id="2" name="TextBox 1"/>
-          <p:cNvSpPr txBox="1"/>
-          <p:nvPr/>
-        </p:nvSpPr>
-        <p:spPr>
-          <a:xfrm>
-            <a:off x="502920" y="6382512"/>
-            <a:ext cx="10545775" cy="274320"/>
-          </a:xfrm>
-          <a:prstGeom prst="rect">
-            <a:avLst/>
-          </a:prstGeom>
-          <a:noFill/>
-        </p:spPr>
-        <p:txBody>
-          <a:bodyPr wrap="square" lIns="0" tIns="0">
-            <a:spAutoFit/>
-          </a:bodyPr>
+          <p:cNvPr id="2" name="Title 1"/>
+          <p:cNvSpPr>
+            <a:spLocks noGrp="1"/>
+          </p:cNvSpPr>
+          <p:nvPr>
+            <p:ph type="title"/>
+          </p:nvPr>
+        </p:nvSpPr>
+        <p:spPr>
+          <a:xfrm>
+            <a:off x="502920" y="274320"/>
+            <a:ext cx="11185855" cy="777240"/>
+          </a:xfrm>
+        </p:spPr>
+        <p:txBody>
+          <a:bodyPr wrap="square" anchor="b"/>
           <a:lstStyle/>
           <a:p>
             <a:pPr algn="l">
@@ -12197,89 +12170,41 @@
               <a:spcAft>
                 <a:spcPts val="0"/>
               </a:spcAft>
-              <a:defRPr sz="1000" b="0">
-                <a:solidFill>
-                  <a:srgbClr val="666666"/>
-                </a:solidFill>
-                <a:latin typeface="Calibri"/>
-              </a:defRPr>
-            </a:pPr>
-            <a:r>
-              <a:rPr sz="1000" b="0">
-                <a:solidFill>
-                  <a:srgbClr val="666666"/>
-                </a:solidFill>
-                <a:latin typeface="Calibri"/>
-              </a:rPr>
-              <a:t>Pathfinder Beginner - PS3  |  Lesson 3</a:t>
-            </a:r>
-          </a:p>
-        </p:txBody>
-      </p:sp>
-      <p:sp>
-        <p:nvSpPr>
-          <p:cNvPr id="3" name="TextBox 2"/>
-          <p:cNvSpPr txBox="1"/>
-          <p:nvPr/>
-        </p:nvSpPr>
-        <p:spPr>
-          <a:xfrm>
-            <a:off x="11231575" y="6382512"/>
-            <a:ext cx="457200" cy="274320"/>
-          </a:xfrm>
-          <a:prstGeom prst="rect">
-            <a:avLst/>
-          </a:prstGeom>
-          <a:noFill/>
-        </p:spPr>
-        <p:txBody>
-          <a:bodyPr wrap="square" lIns="0" tIns="0">
-            <a:spAutoFit/>
-          </a:bodyPr>
-          <a:lstStyle/>
-          <a:p>
-            <a:pPr algn="r">
-              <a:lnSpc>
-                <a:spcPct val="100000"/>
-              </a:lnSpc>
-              <a:spcAft>
-                <a:spcPts val="0"/>
-              </a:spcAft>
-              <a:defRPr sz="1000" b="0">
-                <a:solidFill>
-                  <a:srgbClr val="666666"/>
-                </a:solidFill>
-                <a:latin typeface="Calibri"/>
-              </a:defRPr>
-            </a:pPr>
-            <a:r>
-              <a:rPr sz="1000" b="0">
-                <a:solidFill>
-                  <a:srgbClr val="666666"/>
-                </a:solidFill>
-                <a:latin typeface="Calibri"/>
-              </a:rPr>
-              <a:t>16</a:t>
-            </a:r>
-          </a:p>
-        </p:txBody>
-      </p:sp>
-      <p:sp>
-        <p:nvSpPr>
-          <p:cNvPr id="4" name="Rectangle 3"/>
+              <a:defRPr sz="2800" b="1">
+                <a:solidFill>
+                  <a:srgbClr val="1F3A5F"/>
+                </a:solidFill>
+                <a:latin typeface="Calibri"/>
+              </a:defRPr>
+            </a:pPr>
+            <a:r>
+              <a:rPr sz="2800" b="1">
+                <a:solidFill>
+                  <a:srgbClr val="1F3A5F"/>
+                </a:solidFill>
+                <a:latin typeface="Calibri"/>
+              </a:rPr>
+              <a:t>map()  -  the most useful function in the course</a:t>
+            </a:r>
+          </a:p>
+        </p:txBody>
+      </p:sp>
+      <p:sp>
+        <p:nvSpPr>
+          <p:cNvPr id="3" name="Rectangle 2"/>
           <p:cNvSpPr/>
           <p:nvPr/>
         </p:nvSpPr>
         <p:spPr>
           <a:xfrm>
-            <a:off x="0" y="1234440"/>
-            <a:ext cx="256032" cy="1554480"/>
+            <a:off x="502920" y="1097280"/>
+            <a:ext cx="11185855" cy="19050"/>
           </a:xfrm>
           <a:prstGeom prst="rect">
             <a:avLst/>
           </a:prstGeom>
           <a:solidFill>
-            <a:srgbClr val="0E7C86"/>
+            <a:srgbClr val="C8D2DE"/>
           </a:solidFill>
           <a:ln>
             <a:noFill/>
@@ -12310,14 +12235,14 @@
       </p:sp>
       <p:sp>
         <p:nvSpPr>
-          <p:cNvPr id="5" name="TextBox 4"/>
+          <p:cNvPr id="4" name="TextBox 3"/>
           <p:cNvSpPr txBox="1"/>
           <p:nvPr/>
         </p:nvSpPr>
         <p:spPr>
           <a:xfrm>
-            <a:off x="777240" y="1325880"/>
-            <a:ext cx="10515600" cy="1051560"/>
+            <a:off x="502920" y="6382512"/>
+            <a:ext cx="10545775" cy="274320"/>
           </a:xfrm>
           <a:prstGeom prst="rect">
             <a:avLst/>
@@ -12325,7 +12250,7 @@
           <a:noFill/>
         </p:spPr>
         <p:txBody>
-          <a:bodyPr wrap="square" lIns="0" tIns="0" rIns="0" bIns="0">
+          <a:bodyPr wrap="square" lIns="0" tIns="0">
             <a:spAutoFit/>
           </a:bodyPr>
           <a:lstStyle/>
@@ -12337,35 +12262,35 @@
               <a:spcAft>
                 <a:spcPts val="0"/>
               </a:spcAft>
-              <a:defRPr sz="3600" b="1">
-                <a:solidFill>
-                  <a:srgbClr val="1F3A5F"/>
-                </a:solidFill>
-                <a:latin typeface="Calibri"/>
-              </a:defRPr>
-            </a:pPr>
-            <a:r>
-              <a:rPr sz="3600" b="1">
-                <a:solidFill>
-                  <a:srgbClr val="1F3A5F"/>
-                </a:solidFill>
-                <a:latin typeface="Calibri"/>
-              </a:rPr>
-              <a:t>Deadzone and map</a:t>
-            </a:r>
-          </a:p>
-        </p:txBody>
-      </p:sp>
-      <p:sp>
-        <p:nvSpPr>
-          <p:cNvPr id="6" name="TextBox 5"/>
+              <a:defRPr sz="1000" b="0">
+                <a:solidFill>
+                  <a:srgbClr val="666666"/>
+                </a:solidFill>
+                <a:latin typeface="Calibri"/>
+              </a:defRPr>
+            </a:pPr>
+            <a:r>
+              <a:rPr sz="1000" b="0">
+                <a:solidFill>
+                  <a:srgbClr val="666666"/>
+                </a:solidFill>
+                <a:latin typeface="Calibri"/>
+              </a:rPr>
+              <a:t>Pathfinder Beginner - PS3  |  Lesson 3</a:t>
+            </a:r>
+          </a:p>
+        </p:txBody>
+      </p:sp>
+      <p:sp>
+        <p:nvSpPr>
+          <p:cNvPr id="5" name="TextBox 4"/>
           <p:cNvSpPr txBox="1"/>
           <p:nvPr/>
         </p:nvSpPr>
         <p:spPr>
           <a:xfrm>
-            <a:off x="777240" y="2423160"/>
-            <a:ext cx="10515600" cy="685800"/>
+            <a:off x="11231575" y="6382512"/>
+            <a:ext cx="457200" cy="274320"/>
           </a:xfrm>
           <a:prstGeom prst="rect">
             <a:avLst/>
@@ -12373,19 +12298,19 @@
           <a:noFill/>
         </p:spPr>
         <p:txBody>
-          <a:bodyPr wrap="square" lIns="0" tIns="0" rIns="0" bIns="0">
+          <a:bodyPr wrap="square" lIns="0" tIns="0">
             <a:spAutoFit/>
           </a:bodyPr>
           <a:lstStyle/>
           <a:p>
-            <a:pPr algn="l">
-              <a:lnSpc>
-                <a:spcPct val="100000"/>
-              </a:lnSpc>
-              <a:spcAft>
-                <a:spcPts val="400"/>
-              </a:spcAft>
-              <a:defRPr sz="1600" b="0">
+            <a:pPr algn="r">
+              <a:lnSpc>
+                <a:spcPct val="100000"/>
+              </a:lnSpc>
+              <a:spcAft>
+                <a:spcPts val="0"/>
+              </a:spcAft>
+              <a:defRPr sz="1000" b="0">
                 <a:solidFill>
                   <a:srgbClr val="666666"/>
                 </a:solidFill>
@@ -12393,97 +12318,27 @@
               </a:defRPr>
             </a:pPr>
             <a:r>
-              <a:rPr sz="1600" b="0">
+              <a:rPr sz="1000" b="0">
                 <a:solidFill>
                   <a:srgbClr val="666666"/>
                 </a:solidFill>
                 <a:latin typeface="Calibri"/>
               </a:rPr>
-              <a:t>About 20 minutes</a:t>
-            </a:r>
-          </a:p>
-        </p:txBody>
-      </p:sp>
-      <p:sp>
-        <p:nvSpPr>
-          <p:cNvPr id="7" name="Rounded Rectangle 6"/>
-          <p:cNvSpPr/>
-          <p:nvPr/>
-        </p:nvSpPr>
-        <p:spPr>
-          <a:xfrm>
-            <a:off x="502920" y="3886200"/>
-            <a:ext cx="2686735" cy="1325880"/>
-          </a:xfrm>
-          <a:prstGeom prst="roundRect">
-            <a:avLst>
-              <a:gd name="adj" fmla="val 8000"/>
-            </a:avLst>
-          </a:prstGeom>
-          <a:solidFill>
-            <a:srgbClr val="EEF3F8"/>
-          </a:solidFill>
-          <a:ln w="12700">
-            <a:solidFill>
-              <a:srgbClr val="0E7C86"/>
-            </a:solidFill>
-          </a:ln>
-          <a:effectLst/>
-        </p:spPr>
-        <p:style>
-          <a:lnRef idx="1">
-            <a:schemeClr val="accent1"/>
-          </a:lnRef>
-          <a:fillRef idx="3">
-            <a:schemeClr val="accent1"/>
-          </a:fillRef>
-          <a:effectRef idx="2">
-            <a:schemeClr val="accent1"/>
-          </a:effectRef>
-          <a:fontRef idx="minor">
-            <a:schemeClr val="lt1"/>
-          </a:fontRef>
-        </p:style>
-        <p:txBody>
-          <a:bodyPr rtlCol="0" anchor="ctr" wrap="square" lIns="73152" rIns="73152"/>
-          <a:lstStyle/>
-          <a:p>
-            <a:pPr algn="ctr">
-              <a:lnSpc>
-                <a:spcPct val="100000"/>
-              </a:lnSpc>
-              <a:spcAft>
-                <a:spcPts val="0"/>
-              </a:spcAft>
-              <a:defRPr sz="1700" b="0">
-                <a:solidFill>
-                  <a:srgbClr val="1F3A5F"/>
-                </a:solidFill>
-                <a:latin typeface="Calibri"/>
-              </a:defRPr>
-            </a:pPr>
-            <a:r>
-              <a:rPr sz="1700" b="0">
-                <a:solidFill>
-                  <a:srgbClr val="1F3A5F"/>
-                </a:solidFill>
-                <a:latin typeface="Calibri"/>
-              </a:rPr>
-              <a:t>Bluetooth and pairing</a:t>
-            </a:r>
-          </a:p>
-        </p:txBody>
-      </p:sp>
-      <p:sp>
-        <p:nvSpPr>
-          <p:cNvPr id="8" name="TextBox 7"/>
+              <a:t>16</a:t>
+            </a:r>
+          </a:p>
+        </p:txBody>
+      </p:sp>
+      <p:sp>
+        <p:nvSpPr>
+          <p:cNvPr id="6" name="TextBox 5"/>
           <p:cNvSpPr txBox="1"/>
           <p:nvPr/>
         </p:nvSpPr>
         <p:spPr>
           <a:xfrm>
-            <a:off x="502920" y="3520440"/>
-            <a:ext cx="2686735" cy="310896"/>
+            <a:off x="502920" y="1188720"/>
+            <a:ext cx="7047088" cy="274320"/>
           </a:xfrm>
           <a:prstGeom prst="rect">
             <a:avLst/>
@@ -12496,286 +12351,50 @@
           </a:bodyPr>
           <a:lstStyle/>
           <a:p>
-            <a:pPr algn="ctr">
+            <a:pPr algn="l">
               <a:lnSpc>
                 <a:spcPct val="100000"/>
               </a:lnSpc>
               <a:spcAft>
                 <a:spcPts val="200"/>
               </a:spcAft>
-              <a:defRPr sz="1100" b="1">
+              <a:defRPr sz="1200" b="1">
                 <a:solidFill>
                   <a:srgbClr val="0E7C86"/>
                 </a:solidFill>
-                <a:latin typeface="Calibri"/>
-              </a:defRPr>
-            </a:pPr>
-            <a:r>
-              <a:rPr sz="1100" b="1">
+                <a:latin typeface="Consolas"/>
+              </a:defRPr>
+            </a:pPr>
+            <a:r>
+              <a:rPr sz="1200" b="1">
                 <a:solidFill>
                   <a:srgbClr val="0E7C86"/>
                 </a:solidFill>
-                <a:latin typeface="Calibri"/>
-              </a:rPr>
-              <a:t>done</a:t>
-            </a:r>
-          </a:p>
-        </p:txBody>
-      </p:sp>
-      <p:sp>
-        <p:nvSpPr>
-          <p:cNvPr id="9" name="Rounded Rectangle 8"/>
+                <a:latin typeface="Consolas"/>
+              </a:rPr>
+              <a:t>the idea, and how the program uses it</a:t>
+            </a:r>
+          </a:p>
+        </p:txBody>
+      </p:sp>
+      <p:sp>
+        <p:nvSpPr>
+          <p:cNvPr id="7" name="CODE_PANEL"/>
           <p:cNvSpPr/>
           <p:nvPr/>
         </p:nvSpPr>
         <p:spPr>
           <a:xfrm>
-            <a:off x="3335959" y="3886200"/>
-            <a:ext cx="2686735" cy="1325880"/>
+            <a:off x="502920" y="1517904"/>
+            <a:ext cx="7047088" cy="4745736"/>
           </a:xfrm>
           <a:prstGeom prst="roundRect">
             <a:avLst>
-              <a:gd name="adj" fmla="val 8000"/>
+              <a:gd name="adj" fmla="val 4000"/>
             </a:avLst>
           </a:prstGeom>
           <a:solidFill>
-            <a:srgbClr val="EEF3F8"/>
-          </a:solidFill>
-          <a:ln w="12700">
-            <a:solidFill>
-              <a:srgbClr val="0E7C86"/>
-            </a:solidFill>
-          </a:ln>
-          <a:effectLst/>
-        </p:spPr>
-        <p:style>
-          <a:lnRef idx="1">
-            <a:schemeClr val="accent1"/>
-          </a:lnRef>
-          <a:fillRef idx="3">
-            <a:schemeClr val="accent1"/>
-          </a:fillRef>
-          <a:effectRef idx="2">
-            <a:schemeClr val="accent1"/>
-          </a:effectRef>
-          <a:fontRef idx="minor">
-            <a:schemeClr val="lt1"/>
-          </a:fontRef>
-        </p:style>
-        <p:txBody>
-          <a:bodyPr rtlCol="0" anchor="ctr" wrap="square" lIns="73152" rIns="73152"/>
-          <a:lstStyle/>
-          <a:p>
-            <a:pPr algn="ctr">
-              <a:lnSpc>
-                <a:spcPct val="100000"/>
-              </a:lnSpc>
-              <a:spcAft>
-                <a:spcPts val="0"/>
-              </a:spcAft>
-              <a:defRPr sz="1700" b="0">
-                <a:solidFill>
-                  <a:srgbClr val="1F3A5F"/>
-                </a:solidFill>
-                <a:latin typeface="Calibri"/>
-              </a:defRPr>
-            </a:pPr>
-            <a:r>
-              <a:rPr sz="1700" b="0">
-                <a:solidFill>
-                  <a:srgbClr val="1F3A5F"/>
-                </a:solidFill>
-                <a:latin typeface="Calibri"/>
-              </a:rPr>
-              <a:t>What the pad sends</a:t>
-            </a:r>
-          </a:p>
-        </p:txBody>
-      </p:sp>
-      <p:sp>
-        <p:nvSpPr>
-          <p:cNvPr id="10" name="TextBox 9"/>
-          <p:cNvSpPr txBox="1"/>
-          <p:nvPr/>
-        </p:nvSpPr>
-        <p:spPr>
-          <a:xfrm>
-            <a:off x="3335959" y="3520440"/>
-            <a:ext cx="2686735" cy="310896"/>
-          </a:xfrm>
-          <a:prstGeom prst="rect">
-            <a:avLst/>
-          </a:prstGeom>
-          <a:noFill/>
-        </p:spPr>
-        <p:txBody>
-          <a:bodyPr wrap="square" lIns="0" tIns="0" rIns="0" bIns="0">
-            <a:spAutoFit/>
-          </a:bodyPr>
-          <a:lstStyle/>
-          <a:p>
-            <a:pPr algn="ctr">
-              <a:lnSpc>
-                <a:spcPct val="100000"/>
-              </a:lnSpc>
-              <a:spcAft>
-                <a:spcPts val="200"/>
-              </a:spcAft>
-              <a:defRPr sz="1100" b="1">
-                <a:solidFill>
-                  <a:srgbClr val="0E7C86"/>
-                </a:solidFill>
-                <a:latin typeface="Calibri"/>
-              </a:defRPr>
-            </a:pPr>
-            <a:r>
-              <a:rPr sz="1100" b="1">
-                <a:solidFill>
-                  <a:srgbClr val="0E7C86"/>
-                </a:solidFill>
-                <a:latin typeface="Calibri"/>
-              </a:rPr>
-              <a:t>done</a:t>
-            </a:r>
-          </a:p>
-        </p:txBody>
-      </p:sp>
-      <p:sp>
-        <p:nvSpPr>
-          <p:cNvPr id="11" name="Rounded Rectangle 10"/>
-          <p:cNvSpPr/>
-          <p:nvPr/>
-        </p:nvSpPr>
-        <p:spPr>
-          <a:xfrm>
-            <a:off x="6168998" y="3886200"/>
-            <a:ext cx="2686735" cy="1325880"/>
-          </a:xfrm>
-          <a:prstGeom prst="roundRect">
-            <a:avLst>
-              <a:gd name="adj" fmla="val 8000"/>
-            </a:avLst>
-          </a:prstGeom>
-          <a:solidFill>
-            <a:srgbClr val="D6ECEE"/>
-          </a:solidFill>
-          <a:ln w="25400">
-            <a:solidFill>
-              <a:srgbClr val="0E7C86"/>
-            </a:solidFill>
-          </a:ln>
-          <a:effectLst/>
-        </p:spPr>
-        <p:style>
-          <a:lnRef idx="1">
-            <a:schemeClr val="accent1"/>
-          </a:lnRef>
-          <a:fillRef idx="3">
-            <a:schemeClr val="accent1"/>
-          </a:fillRef>
-          <a:effectRef idx="2">
-            <a:schemeClr val="accent1"/>
-          </a:effectRef>
-          <a:fontRef idx="minor">
-            <a:schemeClr val="lt1"/>
-          </a:fontRef>
-        </p:style>
-        <p:txBody>
-          <a:bodyPr rtlCol="0" anchor="ctr" wrap="square" lIns="73152" rIns="73152"/>
-          <a:lstStyle/>
-          <a:p>
-            <a:pPr algn="ctr">
-              <a:lnSpc>
-                <a:spcPct val="100000"/>
-              </a:lnSpc>
-              <a:spcAft>
-                <a:spcPts val="0"/>
-              </a:spcAft>
-              <a:defRPr sz="1700" b="1">
-                <a:solidFill>
-                  <a:srgbClr val="1F3A5F"/>
-                </a:solidFill>
-                <a:latin typeface="Calibri"/>
-              </a:defRPr>
-            </a:pPr>
-            <a:r>
-              <a:rPr sz="1700" b="1">
-                <a:solidFill>
-                  <a:srgbClr val="1F3A5F"/>
-                </a:solidFill>
-                <a:latin typeface="Calibri"/>
-              </a:rPr>
-              <a:t>Deadzone and map</a:t>
-            </a:r>
-          </a:p>
-        </p:txBody>
-      </p:sp>
-      <p:sp>
-        <p:nvSpPr>
-          <p:cNvPr id="12" name="TextBox 11"/>
-          <p:cNvSpPr txBox="1"/>
-          <p:nvPr/>
-        </p:nvSpPr>
-        <p:spPr>
-          <a:xfrm>
-            <a:off x="6168998" y="3520440"/>
-            <a:ext cx="2686735" cy="310896"/>
-          </a:xfrm>
-          <a:prstGeom prst="rect">
-            <a:avLst/>
-          </a:prstGeom>
-          <a:noFill/>
-        </p:spPr>
-        <p:txBody>
-          <a:bodyPr wrap="square" lIns="0" tIns="0" rIns="0" bIns="0">
-            <a:spAutoFit/>
-          </a:bodyPr>
-          <a:lstStyle/>
-          <a:p>
-            <a:pPr algn="ctr">
-              <a:lnSpc>
-                <a:spcPct val="100000"/>
-              </a:lnSpc>
-              <a:spcAft>
-                <a:spcPts val="200"/>
-              </a:spcAft>
-              <a:defRPr sz="1100" b="1">
-                <a:solidFill>
-                  <a:srgbClr val="0E7C86"/>
-                </a:solidFill>
-                <a:latin typeface="Calibri"/>
-              </a:defRPr>
-            </a:pPr>
-            <a:r>
-              <a:rPr sz="1100" b="1">
-                <a:solidFill>
-                  <a:srgbClr val="0E7C86"/>
-                </a:solidFill>
-                <a:latin typeface="Calibri"/>
-              </a:rPr>
-              <a:t>NOW</a:t>
-            </a:r>
-          </a:p>
-        </p:txBody>
-      </p:sp>
-      <p:sp>
-        <p:nvSpPr>
-          <p:cNvPr id="13" name="Rounded Rectangle 12"/>
-          <p:cNvSpPr/>
-          <p:nvPr/>
-        </p:nvSpPr>
-        <p:spPr>
-          <a:xfrm>
-            <a:off x="9002037" y="3886200"/>
-            <a:ext cx="2686735" cy="1325880"/>
-          </a:xfrm>
-          <a:prstGeom prst="roundRect">
-            <a:avLst>
-              <a:gd name="adj" fmla="val 8000"/>
-            </a:avLst>
-          </a:prstGeom>
-          <a:solidFill>
-            <a:srgbClr val="FFFFFF"/>
+            <a:srgbClr val="F4F6F8"/>
           </a:solidFill>
           <a:ln w="12700">
             <a:solidFill>
@@ -12799,31 +12418,412 @@
           </a:fontRef>
         </p:style>
         <p:txBody>
-          <a:bodyPr rtlCol="0" anchor="ctr" wrap="square" lIns="73152" rIns="73152"/>
-          <a:lstStyle/>
-          <a:p>
-            <a:pPr algn="ctr">
+          <a:bodyPr rtlCol="0" anchor="t" wrap="square" lIns="146304" tIns="91440" bIns="73152"/>
+          <a:lstStyle/>
+          <a:p>
+            <a:pPr algn="l">
               <a:lnSpc>
                 <a:spcPct val="100000"/>
               </a:lnSpc>
               <a:spcAft>
                 <a:spcPts val="0"/>
               </a:spcAft>
-              <a:defRPr sz="1700" b="0">
+              <a:defRPr sz="1650">
+                <a:latin typeface="Consolas"/>
+              </a:defRPr>
+            </a:pPr>
+            <a:r>
+              <a:rPr sz="1650">
+                <a:solidFill>
+                  <a:srgbClr val="222222"/>
+                </a:solidFill>
+                <a:latin typeface="Consolas"/>
+              </a:rPr>
+              <a:t>map(value, fromLow, fromHigh, toLow, toHigh)</a:t>
+            </a:r>
+          </a:p>
+          <a:p>
+            <a:pPr algn="l">
+              <a:lnSpc>
+                <a:spcPct val="100000"/>
+              </a:lnSpc>
+              <a:spcAft>
+                <a:spcPts val="0"/>
+              </a:spcAft>
+              <a:defRPr sz="1650">
+                <a:latin typeface="Consolas"/>
+              </a:defRPr>
+            </a:pPr>
+            <a:r>
+              <a:rPr sz="1650">
+                <a:solidFill>
+                  <a:srgbClr val="222222"/>
+                </a:solidFill>
+                <a:latin typeface="Consolas"/>
+              </a:rPr>
+              <a:t> </a:t>
+            </a:r>
+          </a:p>
+          <a:p>
+            <a:pPr algn="l">
+              <a:lnSpc>
+                <a:spcPct val="100000"/>
+              </a:lnSpc>
+              <a:spcAft>
+                <a:spcPts val="0"/>
+              </a:spcAft>
+              <a:defRPr sz="1650">
+                <a:latin typeface="Consolas"/>
+              </a:defRPr>
+            </a:pPr>
+            <a:r>
+              <a:rPr sz="1650">
                 <a:solidFill>
                   <a:srgbClr val="666666"/>
                 </a:solidFill>
-                <a:latin typeface="Calibri"/>
-              </a:defRPr>
-            </a:pPr>
-            <a:r>
-              <a:rPr sz="1700" b="0">
+                <a:latin typeface="Consolas"/>
+              </a:rPr>
+              <a:t>// "value sits somewhere between fromLow and fromHigh.</a:t>
+            </a:r>
+          </a:p>
+          <a:p>
+            <a:pPr algn="l">
+              <a:lnSpc>
+                <a:spcPct val="100000"/>
+              </a:lnSpc>
+              <a:spcAft>
+                <a:spcPts val="0"/>
+              </a:spcAft>
+              <a:defRPr sz="1650">
+                <a:latin typeface="Consolas"/>
+              </a:defRPr>
+            </a:pPr>
+            <a:r>
+              <a:rPr sz="1650">
                 <a:solidFill>
                   <a:srgbClr val="666666"/>
                 </a:solidFill>
-                <a:latin typeface="Calibri"/>
-              </a:rPr>
-              <a:t>Driving it</a:t>
+                <a:latin typeface="Consolas"/>
+              </a:rPr>
+              <a:t>//  Where does it sit between toLow and toHigh?"</a:t>
+            </a:r>
+          </a:p>
+          <a:p>
+            <a:pPr algn="l">
+              <a:lnSpc>
+                <a:spcPct val="100000"/>
+              </a:lnSpc>
+              <a:spcAft>
+                <a:spcPts val="0"/>
+              </a:spcAft>
+              <a:defRPr sz="1650">
+                <a:latin typeface="Consolas"/>
+              </a:defRPr>
+            </a:pPr>
+            <a:r>
+              <a:rPr sz="1650">
+                <a:solidFill>
+                  <a:srgbClr val="222222"/>
+                </a:solidFill>
+                <a:latin typeface="Consolas"/>
+              </a:rPr>
+              <a:t> </a:t>
+            </a:r>
+          </a:p>
+          <a:p>
+            <a:pPr algn="l">
+              <a:lnSpc>
+                <a:spcPct val="100000"/>
+              </a:lnSpc>
+              <a:spcAft>
+                <a:spcPts val="0"/>
+              </a:spcAft>
+              <a:defRPr sz="1650">
+                <a:latin typeface="Consolas"/>
+              </a:defRPr>
+            </a:pPr>
+            <a:r>
+              <a:rPr sz="1650">
+                <a:solidFill>
+                  <a:srgbClr val="222222"/>
+                </a:solidFill>
+                <a:latin typeface="Consolas"/>
+              </a:rPr>
+              <a:t>map(0,   0, 127, 0, 255)   -&gt;    0</a:t>
+            </a:r>
+          </a:p>
+          <a:p>
+            <a:pPr algn="l">
+              <a:lnSpc>
+                <a:spcPct val="100000"/>
+              </a:lnSpc>
+              <a:spcAft>
+                <a:spcPts val="0"/>
+              </a:spcAft>
+              <a:defRPr sz="1650">
+                <a:latin typeface="Consolas"/>
+              </a:defRPr>
+            </a:pPr>
+            <a:r>
+              <a:rPr sz="1650">
+                <a:solidFill>
+                  <a:srgbClr val="222222"/>
+                </a:solidFill>
+                <a:latin typeface="Consolas"/>
+              </a:rPr>
+              <a:t>map(63, 0, 63, 0, 255)   -&gt;  127</a:t>
+            </a:r>
+          </a:p>
+          <a:p>
+            <a:pPr algn="l">
+              <a:lnSpc>
+                <a:spcPct val="100000"/>
+              </a:lnSpc>
+              <a:spcAft>
+                <a:spcPts val="0"/>
+              </a:spcAft>
+              <a:defRPr sz="1650">
+                <a:latin typeface="Consolas"/>
+              </a:defRPr>
+            </a:pPr>
+            <a:r>
+              <a:rPr sz="1650">
+                <a:solidFill>
+                  <a:srgbClr val="222222"/>
+                </a:solidFill>
+                <a:latin typeface="Consolas"/>
+              </a:rPr>
+              <a:t>map(127, 0, 127, 0, 255)   -&gt;  255</a:t>
+            </a:r>
+          </a:p>
+          <a:p>
+            <a:pPr algn="l">
+              <a:lnSpc>
+                <a:spcPct val="100000"/>
+              </a:lnSpc>
+              <a:spcAft>
+                <a:spcPts val="0"/>
+              </a:spcAft>
+              <a:defRPr sz="1650">
+                <a:latin typeface="Consolas"/>
+              </a:defRPr>
+            </a:pPr>
+            <a:r>
+              <a:rPr sz="1650">
+                <a:solidFill>
+                  <a:srgbClr val="222222"/>
+                </a:solidFill>
+                <a:latin typeface="Consolas"/>
+              </a:rPr>
+              <a:t> </a:t>
+            </a:r>
+          </a:p>
+          <a:p>
+            <a:pPr algn="l">
+              <a:lnSpc>
+                <a:spcPct val="100000"/>
+              </a:lnSpc>
+              <a:spcAft>
+                <a:spcPts val="0"/>
+              </a:spcAft>
+              <a:defRPr sz="1650">
+                <a:latin typeface="Consolas"/>
+              </a:defRPr>
+            </a:pPr>
+            <a:r>
+              <a:rPr sz="1650">
+                <a:solidFill>
+                  <a:srgbClr val="666666"/>
+                </a:solidFill>
+                <a:latin typeface="Consolas"/>
+              </a:rPr>
+              <a:t>// In stickToSpeed the low end is the DEADZONE, not zero,</a:t>
+            </a:r>
+          </a:p>
+          <a:p>
+            <a:pPr algn="l">
+              <a:lnSpc>
+                <a:spcPct val="100000"/>
+              </a:lnSpc>
+              <a:spcAft>
+                <a:spcPts val="0"/>
+              </a:spcAft>
+              <a:defRPr sz="1650">
+                <a:latin typeface="Consolas"/>
+              </a:defRPr>
+            </a:pPr>
+            <a:r>
+              <a:rPr sz="1650">
+                <a:solidFill>
+                  <a:srgbClr val="666666"/>
+                </a:solidFill>
+                <a:latin typeface="Consolas"/>
+              </a:rPr>
+              <a:t>// so the leftover travel is stretched across the whole</a:t>
+            </a:r>
+          </a:p>
+          <a:p>
+            <a:pPr algn="l">
+              <a:lnSpc>
+                <a:spcPct val="100000"/>
+              </a:lnSpc>
+              <a:spcAft>
+                <a:spcPts val="0"/>
+              </a:spcAft>
+              <a:defRPr sz="1650">
+                <a:latin typeface="Consolas"/>
+              </a:defRPr>
+            </a:pPr>
+            <a:r>
+              <a:rPr sz="1650">
+                <a:solidFill>
+                  <a:srgbClr val="666666"/>
+                </a:solidFill>
+                <a:latin typeface="Consolas"/>
+              </a:rPr>
+              <a:t>// speed range. Without that you could never reach 255.</a:t>
+            </a:r>
+          </a:p>
+          <a:p>
+            <a:pPr algn="l">
+              <a:lnSpc>
+                <a:spcPct val="100000"/>
+              </a:lnSpc>
+              <a:spcAft>
+                <a:spcPts val="0"/>
+              </a:spcAft>
+              <a:defRPr sz="1650">
+                <a:latin typeface="Consolas"/>
+              </a:defRPr>
+            </a:pPr>
+            <a:r>
+              <a:rPr sz="1650">
+                <a:solidFill>
+                  <a:srgbClr val="222222"/>
+                </a:solidFill>
+                <a:latin typeface="Consolas"/>
+              </a:rPr>
+              <a:t> </a:t>
+            </a:r>
+          </a:p>
+          <a:p>
+            <a:pPr algn="l">
+              <a:lnSpc>
+                <a:spcPct val="100000"/>
+              </a:lnSpc>
+              <a:spcAft>
+                <a:spcPts val="0"/>
+              </a:spcAft>
+              <a:defRPr sz="1650">
+                <a:latin typeface="Consolas"/>
+              </a:defRPr>
+            </a:pPr>
+            <a:r>
+              <a:rPr sz="1650" b="1">
+                <a:solidFill>
+                  <a:srgbClr val="0E7C86"/>
+                </a:solidFill>
+                <a:latin typeface="Consolas"/>
+              </a:rPr>
+              <a:t>size = map(abs(v), 20, 127, MOTOR_MIN, maxSpeed);</a:t>
+            </a:r>
+          </a:p>
+        </p:txBody>
+      </p:sp>
+      <p:sp>
+        <p:nvSpPr>
+          <p:cNvPr id="8" name="TextBox 7"/>
+          <p:cNvSpPr txBox="1"/>
+          <p:nvPr/>
+        </p:nvSpPr>
+        <p:spPr>
+          <a:xfrm>
+            <a:off x="7870048" y="1517904"/>
+            <a:ext cx="3818727" cy="4745736"/>
+          </a:xfrm>
+          <a:prstGeom prst="rect">
+            <a:avLst/>
+          </a:prstGeom>
+          <a:noFill/>
+        </p:spPr>
+        <p:txBody>
+          <a:bodyPr wrap="square" lIns="0" tIns="0" rIns="0" bIns="0">
+            <a:spAutoFit/>
+          </a:bodyPr>
+          <a:lstStyle/>
+          <a:p>
+            <a:pPr algn="l">
+              <a:lnSpc>
+                <a:spcPct val="100000"/>
+              </a:lnSpc>
+              <a:spcAft>
+                <a:spcPts val="700"/>
+              </a:spcAft>
+              <a:defRPr sz="2100" b="0">
+                <a:solidFill>
+                  <a:srgbClr val="222222"/>
+                </a:solidFill>
+                <a:latin typeface="Calibri"/>
+              </a:defRPr>
+            </a:pPr>
+            <a:r>
+              <a:rPr sz="2100" b="0">
+                <a:solidFill>
+                  <a:srgbClr val="222222"/>
+                </a:solidFill>
+                <a:latin typeface="Calibri"/>
+              </a:rPr>
+              <a:t>map() is just proportion. Nothing more.</a:t>
+            </a:r>
+          </a:p>
+          <a:p>
+            <a:pPr algn="l">
+              <a:lnSpc>
+                <a:spcPct val="100000"/>
+              </a:lnSpc>
+              <a:spcAft>
+                <a:spcPts val="700"/>
+              </a:spcAft>
+              <a:defRPr sz="2100" b="0">
+                <a:solidFill>
+                  <a:srgbClr val="222222"/>
+                </a:solidFill>
+                <a:latin typeface="Calibri"/>
+              </a:defRPr>
+            </a:pPr>
+            <a:r>
+              <a:rPr sz="2100" b="0">
+                <a:solidFill>
+                  <a:srgbClr val="222222"/>
+                </a:solidFill>
+                <a:latin typeface="Calibri"/>
+              </a:rPr>
+              <a:t>It does NOT clamp. Feed it something outside the input range and you get something outside the output range, which is why the program calls constrain() straight afterwards.</a:t>
+            </a:r>
+          </a:p>
+          <a:p>
+            <a:pPr algn="l">
+              <a:lnSpc>
+                <a:spcPct val="100000"/>
+              </a:lnSpc>
+              <a:spcAft>
+                <a:spcPts val="700"/>
+              </a:spcAft>
+              <a:defRPr sz="2100" b="0">
+                <a:solidFill>
+                  <a:srgbClr val="222222"/>
+                </a:solidFill>
+                <a:latin typeface="Calibri"/>
+              </a:defRPr>
+            </a:pPr>
+            <a:r>
+              <a:rPr sz="2100" b="0">
+                <a:solidFill>
+                  <a:srgbClr val="222222"/>
+                </a:solidFill>
+                <a:latin typeface="Calibri"/>
+              </a:rPr>
+              <a:t>abs() throws away the sign, so we map the SIZE of the push and put the direction back at the end.</a:t>
             </a:r>
           </a:p>
         </p:txBody>
@@ -13490,22 +13490,24 @@
       <p:grpSpPr/>
       <p:sp>
         <p:nvSpPr>
-          <p:cNvPr id="2" name="Title 1"/>
-          <p:cNvSpPr>
-            <a:spLocks noGrp="1"/>
-          </p:cNvSpPr>
-          <p:nvPr>
-            <p:ph type="title"/>
-          </p:nvPr>
-        </p:nvSpPr>
-        <p:spPr>
-          <a:xfrm>
-            <a:off x="502920" y="274320"/>
-            <a:ext cx="11185855" cy="777240"/>
-          </a:xfrm>
-        </p:spPr>
-        <p:txBody>
-          <a:bodyPr wrap="square" anchor="b"/>
+          <p:cNvPr id="2" name="TextBox 1"/>
+          <p:cNvSpPr txBox="1"/>
+          <p:nvPr/>
+        </p:nvSpPr>
+        <p:spPr>
+          <a:xfrm>
+            <a:off x="502920" y="6382512"/>
+            <a:ext cx="10545775" cy="274320"/>
+          </a:xfrm>
+          <a:prstGeom prst="rect">
+            <a:avLst/>
+          </a:prstGeom>
+          <a:noFill/>
+        </p:spPr>
+        <p:txBody>
+          <a:bodyPr wrap="square" lIns="0" tIns="0">
+            <a:spAutoFit/>
+          </a:bodyPr>
           <a:lstStyle/>
           <a:p>
             <a:pPr algn="l">
@@ -13515,41 +13517,89 @@
               <a:spcAft>
                 <a:spcPts val="0"/>
               </a:spcAft>
-              <a:defRPr sz="2800" b="1">
-                <a:solidFill>
-                  <a:srgbClr val="1F3A5F"/>
-                </a:solidFill>
-                <a:latin typeface="Calibri"/>
-              </a:defRPr>
-            </a:pPr>
-            <a:r>
-              <a:rPr sz="2800" b="1">
-                <a:solidFill>
-                  <a:srgbClr val="1F3A5F"/>
-                </a:solidFill>
-                <a:latin typeface="Calibri"/>
-              </a:rPr>
-              <a:t>Mixing, and why steering has its own limit</a:t>
-            </a:r>
-          </a:p>
-        </p:txBody>
-      </p:sp>
-      <p:sp>
-        <p:nvSpPr>
-          <p:cNvPr id="3" name="Rectangle 2"/>
+              <a:defRPr sz="1000" b="0">
+                <a:solidFill>
+                  <a:srgbClr val="666666"/>
+                </a:solidFill>
+                <a:latin typeface="Calibri"/>
+              </a:defRPr>
+            </a:pPr>
+            <a:r>
+              <a:rPr sz="1000" b="0">
+                <a:solidFill>
+                  <a:srgbClr val="666666"/>
+                </a:solidFill>
+                <a:latin typeface="Calibri"/>
+              </a:rPr>
+              <a:t>Pathfinder Beginner - PS3  |  Lesson 3</a:t>
+            </a:r>
+          </a:p>
+        </p:txBody>
+      </p:sp>
+      <p:sp>
+        <p:nvSpPr>
+          <p:cNvPr id="3" name="TextBox 2"/>
+          <p:cNvSpPr txBox="1"/>
+          <p:nvPr/>
+        </p:nvSpPr>
+        <p:spPr>
+          <a:xfrm>
+            <a:off x="11231575" y="6382512"/>
+            <a:ext cx="457200" cy="274320"/>
+          </a:xfrm>
+          <a:prstGeom prst="rect">
+            <a:avLst/>
+          </a:prstGeom>
+          <a:noFill/>
+        </p:spPr>
+        <p:txBody>
+          <a:bodyPr wrap="square" lIns="0" tIns="0">
+            <a:spAutoFit/>
+          </a:bodyPr>
+          <a:lstStyle/>
+          <a:p>
+            <a:pPr algn="r">
+              <a:lnSpc>
+                <a:spcPct val="100000"/>
+              </a:lnSpc>
+              <a:spcAft>
+                <a:spcPts val="0"/>
+              </a:spcAft>
+              <a:defRPr sz="1000" b="0">
+                <a:solidFill>
+                  <a:srgbClr val="666666"/>
+                </a:solidFill>
+                <a:latin typeface="Calibri"/>
+              </a:defRPr>
+            </a:pPr>
+            <a:r>
+              <a:rPr sz="1000" b="0">
+                <a:solidFill>
+                  <a:srgbClr val="666666"/>
+                </a:solidFill>
+                <a:latin typeface="Calibri"/>
+              </a:rPr>
+              <a:t>18</a:t>
+            </a:r>
+          </a:p>
+        </p:txBody>
+      </p:sp>
+      <p:sp>
+        <p:nvSpPr>
+          <p:cNvPr id="4" name="Rectangle 3"/>
           <p:cNvSpPr/>
           <p:nvPr/>
         </p:nvSpPr>
         <p:spPr>
           <a:xfrm>
-            <a:off x="502920" y="1097280"/>
-            <a:ext cx="11185855" cy="19050"/>
+            <a:off x="0" y="1234440"/>
+            <a:ext cx="256032" cy="1554480"/>
           </a:xfrm>
           <a:prstGeom prst="rect">
             <a:avLst/>
           </a:prstGeom>
           <a:solidFill>
-            <a:srgbClr val="C8D2DE"/>
+            <a:srgbClr val="0E7C86"/>
           </a:solidFill>
           <a:ln>
             <a:noFill/>
@@ -13580,14 +13630,14 @@
       </p:sp>
       <p:sp>
         <p:nvSpPr>
-          <p:cNvPr id="4" name="TextBox 3"/>
+          <p:cNvPr id="5" name="TextBox 4"/>
           <p:cNvSpPr txBox="1"/>
           <p:nvPr/>
         </p:nvSpPr>
         <p:spPr>
           <a:xfrm>
-            <a:off x="502920" y="6382512"/>
-            <a:ext cx="10545775" cy="274320"/>
+            <a:off x="777240" y="1325880"/>
+            <a:ext cx="10515600" cy="1051560"/>
           </a:xfrm>
           <a:prstGeom prst="rect">
             <a:avLst/>
@@ -13595,7 +13645,7 @@
           <a:noFill/>
         </p:spPr>
         <p:txBody>
-          <a:bodyPr wrap="square" lIns="0" tIns="0">
+          <a:bodyPr wrap="square" lIns="0" tIns="0" rIns="0" bIns="0">
             <a:spAutoFit/>
           </a:bodyPr>
           <a:lstStyle/>
@@ -13607,35 +13657,35 @@
               <a:spcAft>
                 <a:spcPts val="0"/>
               </a:spcAft>
-              <a:defRPr sz="1000" b="0">
-                <a:solidFill>
-                  <a:srgbClr val="666666"/>
-                </a:solidFill>
-                <a:latin typeface="Calibri"/>
-              </a:defRPr>
-            </a:pPr>
-            <a:r>
-              <a:rPr sz="1000" b="0">
-                <a:solidFill>
-                  <a:srgbClr val="666666"/>
-                </a:solidFill>
-                <a:latin typeface="Calibri"/>
-              </a:rPr>
-              <a:t>Pathfinder Beginner - PS3  |  Lesson 3</a:t>
-            </a:r>
-          </a:p>
-        </p:txBody>
-      </p:sp>
-      <p:sp>
-        <p:nvSpPr>
-          <p:cNvPr id="5" name="TextBox 4"/>
+              <a:defRPr sz="3600" b="1">
+                <a:solidFill>
+                  <a:srgbClr val="1F3A5F"/>
+                </a:solidFill>
+                <a:latin typeface="Calibri"/>
+              </a:defRPr>
+            </a:pPr>
+            <a:r>
+              <a:rPr sz="3600" b="1">
+                <a:solidFill>
+                  <a:srgbClr val="1F3A5F"/>
+                </a:solidFill>
+                <a:latin typeface="Calibri"/>
+              </a:rPr>
+              <a:t>Driving it</a:t>
+            </a:r>
+          </a:p>
+        </p:txBody>
+      </p:sp>
+      <p:sp>
+        <p:nvSpPr>
+          <p:cNvPr id="6" name="TextBox 5"/>
           <p:cNvSpPr txBox="1"/>
           <p:nvPr/>
         </p:nvSpPr>
         <p:spPr>
           <a:xfrm>
-            <a:off x="11231575" y="6382512"/>
-            <a:ext cx="457200" cy="274320"/>
+            <a:off x="777240" y="2423160"/>
+            <a:ext cx="10515600" cy="685800"/>
           </a:xfrm>
           <a:prstGeom prst="rect">
             <a:avLst/>
@@ -13643,47 +13693,117 @@
           <a:noFill/>
         </p:spPr>
         <p:txBody>
-          <a:bodyPr wrap="square" lIns="0" tIns="0">
+          <a:bodyPr wrap="square" lIns="0" tIns="0" rIns="0" bIns="0">
             <a:spAutoFit/>
           </a:bodyPr>
           <a:lstStyle/>
           <a:p>
-            <a:pPr algn="r">
+            <a:pPr algn="l">
+              <a:lnSpc>
+                <a:spcPct val="100000"/>
+              </a:lnSpc>
+              <a:spcAft>
+                <a:spcPts val="400"/>
+              </a:spcAft>
+              <a:defRPr sz="1600" b="0">
+                <a:solidFill>
+                  <a:srgbClr val="666666"/>
+                </a:solidFill>
+                <a:latin typeface="Calibri"/>
+              </a:defRPr>
+            </a:pPr>
+            <a:r>
+              <a:rPr sz="1600" b="0">
+                <a:solidFill>
+                  <a:srgbClr val="666666"/>
+                </a:solidFill>
+                <a:latin typeface="Calibri"/>
+              </a:rPr>
+              <a:t>About 35 minutes</a:t>
+            </a:r>
+          </a:p>
+        </p:txBody>
+      </p:sp>
+      <p:sp>
+        <p:nvSpPr>
+          <p:cNvPr id="7" name="Rounded Rectangle 6"/>
+          <p:cNvSpPr/>
+          <p:nvPr/>
+        </p:nvSpPr>
+        <p:spPr>
+          <a:xfrm>
+            <a:off x="502920" y="3886200"/>
+            <a:ext cx="2686735" cy="1325880"/>
+          </a:xfrm>
+          <a:prstGeom prst="roundRect">
+            <a:avLst>
+              <a:gd name="adj" fmla="val 8000"/>
+            </a:avLst>
+          </a:prstGeom>
+          <a:solidFill>
+            <a:srgbClr val="EEF3F8"/>
+          </a:solidFill>
+          <a:ln w="12700">
+            <a:solidFill>
+              <a:srgbClr val="0E7C86"/>
+            </a:solidFill>
+          </a:ln>
+          <a:effectLst/>
+        </p:spPr>
+        <p:style>
+          <a:lnRef idx="1">
+            <a:schemeClr val="accent1"/>
+          </a:lnRef>
+          <a:fillRef idx="3">
+            <a:schemeClr val="accent1"/>
+          </a:fillRef>
+          <a:effectRef idx="2">
+            <a:schemeClr val="accent1"/>
+          </a:effectRef>
+          <a:fontRef idx="minor">
+            <a:schemeClr val="lt1"/>
+          </a:fontRef>
+        </p:style>
+        <p:txBody>
+          <a:bodyPr rtlCol="0" anchor="ctr" wrap="square" lIns="73152" rIns="73152"/>
+          <a:lstStyle/>
+          <a:p>
+            <a:pPr algn="ctr">
               <a:lnSpc>
                 <a:spcPct val="100000"/>
               </a:lnSpc>
               <a:spcAft>
                 <a:spcPts val="0"/>
               </a:spcAft>
-              <a:defRPr sz="1000" b="0">
-                <a:solidFill>
-                  <a:srgbClr val="666666"/>
-                </a:solidFill>
-                <a:latin typeface="Calibri"/>
-              </a:defRPr>
-            </a:pPr>
-            <a:r>
-              <a:rPr sz="1000" b="0">
-                <a:solidFill>
-                  <a:srgbClr val="666666"/>
-                </a:solidFill>
-                <a:latin typeface="Calibri"/>
-              </a:rPr>
-              <a:t>18</a:t>
-            </a:r>
-          </a:p>
-        </p:txBody>
-      </p:sp>
-      <p:sp>
-        <p:nvSpPr>
-          <p:cNvPr id="6" name="TextBox 5"/>
+              <a:defRPr sz="1700" b="0">
+                <a:solidFill>
+                  <a:srgbClr val="1F3A5F"/>
+                </a:solidFill>
+                <a:latin typeface="Calibri"/>
+              </a:defRPr>
+            </a:pPr>
+            <a:r>
+              <a:rPr sz="1700" b="0">
+                <a:solidFill>
+                  <a:srgbClr val="1F3A5F"/>
+                </a:solidFill>
+                <a:latin typeface="Calibri"/>
+              </a:rPr>
+              <a:t>Bluetooth and pairing</a:t>
+            </a:r>
+          </a:p>
+        </p:txBody>
+      </p:sp>
+      <p:sp>
+        <p:nvSpPr>
+          <p:cNvPr id="8" name="TextBox 7"/>
           <p:cNvSpPr txBox="1"/>
           <p:nvPr/>
         </p:nvSpPr>
         <p:spPr>
           <a:xfrm>
-            <a:off x="502920" y="1188720"/>
-            <a:ext cx="11185855" cy="530352"/>
+            <a:off x="502920" y="3520440"/>
+            <a:ext cx="2686735" cy="310896"/>
           </a:xfrm>
           <a:prstGeom prst="rect">
             <a:avLst/>
@@ -13696,14 +13816,14 @@
           </a:bodyPr>
           <a:lstStyle/>
           <a:p>
-            <a:pPr algn="l">
-              <a:lnSpc>
-                <a:spcPct val="100000"/>
-              </a:lnSpc>
-              <a:spcAft>
-                <a:spcPts val="600"/>
-              </a:spcAft>
-              <a:defRPr sz="1900" b="1">
+            <a:pPr algn="ctr">
+              <a:lnSpc>
+                <a:spcPct val="100000"/>
+              </a:lnSpc>
+              <a:spcAft>
+                <a:spcPts val="200"/>
+              </a:spcAft>
+              <a:defRPr sz="1100" b="1">
                 <a:solidFill>
                   <a:srgbClr val="0E7C86"/>
                 </a:solidFill>
@@ -13711,27 +13831,97 @@
               </a:defRPr>
             </a:pPr>
             <a:r>
-              <a:rPr sz="1900" b="1">
+              <a:rPr sz="1100" b="1">
                 <a:solidFill>
                   <a:srgbClr val="0E7C86"/>
                 </a:solidFill>
                 <a:latin typeface="Calibri"/>
               </a:rPr>
-              <a:t>Full speed forwards, half speed steering</a:t>
-            </a:r>
-          </a:p>
-        </p:txBody>
-      </p:sp>
-      <p:sp>
-        <p:nvSpPr>
-          <p:cNvPr id="7" name="TextBox 6"/>
+              <a:t>done</a:t>
+            </a:r>
+          </a:p>
+        </p:txBody>
+      </p:sp>
+      <p:sp>
+        <p:nvSpPr>
+          <p:cNvPr id="9" name="Rounded Rectangle 8"/>
+          <p:cNvSpPr/>
+          <p:nvPr/>
+        </p:nvSpPr>
+        <p:spPr>
+          <a:xfrm>
+            <a:off x="3335959" y="3886200"/>
+            <a:ext cx="2686735" cy="1325880"/>
+          </a:xfrm>
+          <a:prstGeom prst="roundRect">
+            <a:avLst>
+              <a:gd name="adj" fmla="val 8000"/>
+            </a:avLst>
+          </a:prstGeom>
+          <a:solidFill>
+            <a:srgbClr val="EEF3F8"/>
+          </a:solidFill>
+          <a:ln w="12700">
+            <a:solidFill>
+              <a:srgbClr val="0E7C86"/>
+            </a:solidFill>
+          </a:ln>
+          <a:effectLst/>
+        </p:spPr>
+        <p:style>
+          <a:lnRef idx="1">
+            <a:schemeClr val="accent1"/>
+          </a:lnRef>
+          <a:fillRef idx="3">
+            <a:schemeClr val="accent1"/>
+          </a:fillRef>
+          <a:effectRef idx="2">
+            <a:schemeClr val="accent1"/>
+          </a:effectRef>
+          <a:fontRef idx="minor">
+            <a:schemeClr val="lt1"/>
+          </a:fontRef>
+        </p:style>
+        <p:txBody>
+          <a:bodyPr rtlCol="0" anchor="ctr" wrap="square" lIns="73152" rIns="73152"/>
+          <a:lstStyle/>
+          <a:p>
+            <a:pPr algn="ctr">
+              <a:lnSpc>
+                <a:spcPct val="100000"/>
+              </a:lnSpc>
+              <a:spcAft>
+                <a:spcPts val="0"/>
+              </a:spcAft>
+              <a:defRPr sz="1700" b="0">
+                <a:solidFill>
+                  <a:srgbClr val="1F3A5F"/>
+                </a:solidFill>
+                <a:latin typeface="Calibri"/>
+              </a:defRPr>
+            </a:pPr>
+            <a:r>
+              <a:rPr sz="1700" b="0">
+                <a:solidFill>
+                  <a:srgbClr val="1F3A5F"/>
+                </a:solidFill>
+                <a:latin typeface="Calibri"/>
+              </a:rPr>
+              <a:t>What the pad sends</a:t>
+            </a:r>
+          </a:p>
+        </p:txBody>
+      </p:sp>
+      <p:sp>
+        <p:nvSpPr>
+          <p:cNvPr id="10" name="TextBox 9"/>
           <p:cNvSpPr txBox="1"/>
           <p:nvPr/>
         </p:nvSpPr>
         <p:spPr>
           <a:xfrm>
-            <a:off x="502920" y="1755648"/>
-            <a:ext cx="11185855" cy="4507992"/>
+            <a:off x="3335959" y="3520440"/>
+            <a:ext cx="2686735" cy="310896"/>
           </a:xfrm>
           <a:prstGeom prst="rect">
             <a:avLst/>
@@ -13744,217 +13934,264 @@
           </a:bodyPr>
           <a:lstStyle/>
           <a:p>
-            <a:pPr algn="l">
-              <a:lnSpc>
-                <a:spcPct val="100000"/>
-              </a:lnSpc>
-              <a:spcAft>
-                <a:spcPts val="600"/>
-              </a:spcAft>
-              <a:defRPr sz="1900" b="0">
-                <a:solidFill>
-                  <a:srgbClr val="222222"/>
-                </a:solidFill>
-                <a:latin typeface="Calibri"/>
-              </a:defRPr>
-            </a:pPr>
-            <a:r>
-              <a:rPr sz="1900" b="0">
-                <a:solidFill>
-                  <a:srgbClr val="222222"/>
-                </a:solidFill>
-                <a:latin typeface="Calibri"/>
-              </a:rPr>
-              <a:t>left = forward + turn        right = forward - turn</a:t>
-            </a:r>
-          </a:p>
-          <a:p>
-            <a:pPr algn="l">
-              <a:lnSpc>
-                <a:spcPct val="100000"/>
-              </a:lnSpc>
-              <a:spcAft>
-                <a:spcPts val="600"/>
-              </a:spcAft>
-              <a:defRPr sz="950" b="0">
-                <a:solidFill>
-                  <a:srgbClr val="222222"/>
-                </a:solidFill>
-                <a:latin typeface="Calibri"/>
-              </a:defRPr>
-            </a:pPr>
-          </a:p>
-          <a:p>
-            <a:pPr algn="l">
-              <a:lnSpc>
-                <a:spcPct val="100000"/>
-              </a:lnSpc>
-              <a:spcAft>
-                <a:spcPts val="600"/>
-              </a:spcAft>
-              <a:defRPr sz="1900" b="0">
-                <a:solidFill>
-                  <a:srgbClr val="222222"/>
-                </a:solidFill>
-                <a:latin typeface="Calibri"/>
-              </a:defRPr>
-            </a:pPr>
-            <a:r>
-              <a:rPr sz="1900" b="0">
-                <a:solidFill>
-                  <a:srgbClr val="222222"/>
-                </a:solidFill>
-                <a:latin typeface="Calibri"/>
-              </a:rPr>
-              <a:t>Driving gets the full MOTOR_MAX of 255.</a:t>
-            </a:r>
-          </a:p>
-          <a:p>
-            <a:pPr algn="l">
-              <a:lnSpc>
-                <a:spcPct val="100000"/>
-              </a:lnSpc>
-              <a:spcAft>
-                <a:spcPts val="600"/>
-              </a:spcAft>
-              <a:defRPr sz="1900" b="0">
-                <a:solidFill>
-                  <a:srgbClr val="222222"/>
-                </a:solidFill>
-                <a:latin typeface="Calibri"/>
-              </a:defRPr>
-            </a:pPr>
-            <a:r>
-              <a:rPr sz="1900" b="0">
-                <a:solidFill>
-                  <a:srgbClr val="222222"/>
-                </a:solidFill>
-                <a:latin typeface="Calibri"/>
-              </a:rPr>
-              <a:t>Steering gets turnMax, which is HALF of that by default.</a:t>
-            </a:r>
-          </a:p>
-          <a:p>
-            <a:pPr algn="l">
-              <a:lnSpc>
-                <a:spcPct val="100000"/>
-              </a:lnSpc>
-              <a:spcAft>
-                <a:spcPts val="600"/>
-              </a:spcAft>
-              <a:defRPr sz="950" b="0">
-                <a:solidFill>
-                  <a:srgbClr val="222222"/>
-                </a:solidFill>
-                <a:latin typeface="Calibri"/>
-              </a:defRPr>
-            </a:pPr>
-          </a:p>
-          <a:p>
-            <a:pPr algn="l">
-              <a:lnSpc>
-                <a:spcPct val="100000"/>
-              </a:lnSpc>
-              <a:spcAft>
-                <a:spcPts val="600"/>
-              </a:spcAft>
-              <a:defRPr sz="1900" b="0">
-                <a:solidFill>
-                  <a:srgbClr val="222222"/>
-                </a:solidFill>
-                <a:latin typeface="Calibri"/>
-              </a:defRPr>
-            </a:pPr>
-            <a:r>
-              <a:rPr sz="1900" b="0">
-                <a:solidFill>
-                  <a:srgbClr val="222222"/>
-                </a:solidFill>
-                <a:latin typeface="Calibri"/>
-              </a:rPr>
-              <a:t>Why? Because at full power a small nudge sideways spins the vehicle faster than anybody can correct for. Half-power steering makes it controllable without making it slow.</a:t>
-            </a:r>
-          </a:p>
-          <a:p>
-            <a:pPr algn="l">
-              <a:lnSpc>
-                <a:spcPct val="100000"/>
-              </a:lnSpc>
-              <a:spcAft>
-                <a:spcPts val="600"/>
-              </a:spcAft>
-              <a:defRPr sz="950" b="0">
-                <a:solidFill>
-                  <a:srgbClr val="222222"/>
-                </a:solidFill>
-                <a:latin typeface="Calibri"/>
-              </a:defRPr>
-            </a:pPr>
-          </a:p>
-          <a:p>
-            <a:pPr algn="l">
-              <a:lnSpc>
-                <a:spcPct val="100000"/>
-              </a:lnSpc>
-              <a:spcAft>
-                <a:spcPts val="600"/>
-              </a:spcAft>
-              <a:defRPr sz="1900" b="0">
-                <a:solidFill>
-                  <a:srgbClr val="222222"/>
-                </a:solidFill>
-                <a:latin typeface="Calibri"/>
-              </a:defRPr>
-            </a:pPr>
-            <a:r>
-              <a:rPr sz="1900" b="0">
-                <a:solidFill>
-                  <a:srgbClr val="222222"/>
-                </a:solidFill>
-                <a:latin typeface="Calibri"/>
-              </a:rPr>
-              <a:t>The full program lets you switch between the two with L3 (click the left stick in). Sharp mode is for spinning on the spot deliberately; normal mode is for actually getting somewhere.</a:t>
-            </a:r>
-          </a:p>
-          <a:p>
-            <a:pPr algn="l">
-              <a:lnSpc>
-                <a:spcPct val="100000"/>
-              </a:lnSpc>
-              <a:spcAft>
-                <a:spcPts val="600"/>
-              </a:spcAft>
-              <a:defRPr sz="950" b="0">
-                <a:solidFill>
-                  <a:srgbClr val="222222"/>
-                </a:solidFill>
-                <a:latin typeface="Calibri"/>
-              </a:defRPr>
-            </a:pPr>
-          </a:p>
-          <a:p>
-            <a:pPr algn="l">
-              <a:lnSpc>
-                <a:spcPct val="100000"/>
-              </a:lnSpc>
-              <a:spcAft>
-                <a:spcPts val="600"/>
-              </a:spcAft>
-              <a:defRPr sz="1900" b="0">
-                <a:solidFill>
-                  <a:srgbClr val="222222"/>
-                </a:solidFill>
-                <a:latin typeface="Calibri"/>
-              </a:defRPr>
-            </a:pPr>
-            <a:r>
-              <a:rPr sz="1900" b="0">
-                <a:solidFill>
-                  <a:srgbClr val="222222"/>
-                </a:solidFill>
-                <a:latin typeface="Calibri"/>
-              </a:rPr>
-              <a:t>constrain() catches the overflow. forward 200 plus turn 60 is 260, which is more than a motor can take.</a:t>
+            <a:pPr algn="ctr">
+              <a:lnSpc>
+                <a:spcPct val="100000"/>
+              </a:lnSpc>
+              <a:spcAft>
+                <a:spcPts val="200"/>
+              </a:spcAft>
+              <a:defRPr sz="1100" b="1">
+                <a:solidFill>
+                  <a:srgbClr val="0E7C86"/>
+                </a:solidFill>
+                <a:latin typeface="Calibri"/>
+              </a:defRPr>
+            </a:pPr>
+            <a:r>
+              <a:rPr sz="1100" b="1">
+                <a:solidFill>
+                  <a:srgbClr val="0E7C86"/>
+                </a:solidFill>
+                <a:latin typeface="Calibri"/>
+              </a:rPr>
+              <a:t>done</a:t>
+            </a:r>
+          </a:p>
+        </p:txBody>
+      </p:sp>
+      <p:sp>
+        <p:nvSpPr>
+          <p:cNvPr id="11" name="Rounded Rectangle 10"/>
+          <p:cNvSpPr/>
+          <p:nvPr/>
+        </p:nvSpPr>
+        <p:spPr>
+          <a:xfrm>
+            <a:off x="6168998" y="3886200"/>
+            <a:ext cx="2686735" cy="1325880"/>
+          </a:xfrm>
+          <a:prstGeom prst="roundRect">
+            <a:avLst>
+              <a:gd name="adj" fmla="val 8000"/>
+            </a:avLst>
+          </a:prstGeom>
+          <a:solidFill>
+            <a:srgbClr val="EEF3F8"/>
+          </a:solidFill>
+          <a:ln w="12700">
+            <a:solidFill>
+              <a:srgbClr val="0E7C86"/>
+            </a:solidFill>
+          </a:ln>
+          <a:effectLst/>
+        </p:spPr>
+        <p:style>
+          <a:lnRef idx="1">
+            <a:schemeClr val="accent1"/>
+          </a:lnRef>
+          <a:fillRef idx="3">
+            <a:schemeClr val="accent1"/>
+          </a:fillRef>
+          <a:effectRef idx="2">
+            <a:schemeClr val="accent1"/>
+          </a:effectRef>
+          <a:fontRef idx="minor">
+            <a:schemeClr val="lt1"/>
+          </a:fontRef>
+        </p:style>
+        <p:txBody>
+          <a:bodyPr rtlCol="0" anchor="ctr" wrap="square" lIns="73152" rIns="73152"/>
+          <a:lstStyle/>
+          <a:p>
+            <a:pPr algn="ctr">
+              <a:lnSpc>
+                <a:spcPct val="100000"/>
+              </a:lnSpc>
+              <a:spcAft>
+                <a:spcPts val="0"/>
+              </a:spcAft>
+              <a:defRPr sz="1700" b="0">
+                <a:solidFill>
+                  <a:srgbClr val="1F3A5F"/>
+                </a:solidFill>
+                <a:latin typeface="Calibri"/>
+              </a:defRPr>
+            </a:pPr>
+            <a:r>
+              <a:rPr sz="1700" b="0">
+                <a:solidFill>
+                  <a:srgbClr val="1F3A5F"/>
+                </a:solidFill>
+                <a:latin typeface="Calibri"/>
+              </a:rPr>
+              <a:t>Deadzone and map</a:t>
+            </a:r>
+          </a:p>
+        </p:txBody>
+      </p:sp>
+      <p:sp>
+        <p:nvSpPr>
+          <p:cNvPr id="12" name="TextBox 11"/>
+          <p:cNvSpPr txBox="1"/>
+          <p:nvPr/>
+        </p:nvSpPr>
+        <p:spPr>
+          <a:xfrm>
+            <a:off x="6168998" y="3520440"/>
+            <a:ext cx="2686735" cy="310896"/>
+          </a:xfrm>
+          <a:prstGeom prst="rect">
+            <a:avLst/>
+          </a:prstGeom>
+          <a:noFill/>
+        </p:spPr>
+        <p:txBody>
+          <a:bodyPr wrap="square" lIns="0" tIns="0" rIns="0" bIns="0">
+            <a:spAutoFit/>
+          </a:bodyPr>
+          <a:lstStyle/>
+          <a:p>
+            <a:pPr algn="ctr">
+              <a:lnSpc>
+                <a:spcPct val="100000"/>
+              </a:lnSpc>
+              <a:spcAft>
+                <a:spcPts val="200"/>
+              </a:spcAft>
+              <a:defRPr sz="1100" b="1">
+                <a:solidFill>
+                  <a:srgbClr val="0E7C86"/>
+                </a:solidFill>
+                <a:latin typeface="Calibri"/>
+              </a:defRPr>
+            </a:pPr>
+            <a:r>
+              <a:rPr sz="1100" b="1">
+                <a:solidFill>
+                  <a:srgbClr val="0E7C86"/>
+                </a:solidFill>
+                <a:latin typeface="Calibri"/>
+              </a:rPr>
+              <a:t>done</a:t>
+            </a:r>
+          </a:p>
+        </p:txBody>
+      </p:sp>
+      <p:sp>
+        <p:nvSpPr>
+          <p:cNvPr id="13" name="Rounded Rectangle 12"/>
+          <p:cNvSpPr/>
+          <p:nvPr/>
+        </p:nvSpPr>
+        <p:spPr>
+          <a:xfrm>
+            <a:off x="9002037" y="3886200"/>
+            <a:ext cx="2686735" cy="1325880"/>
+          </a:xfrm>
+          <a:prstGeom prst="roundRect">
+            <a:avLst>
+              <a:gd name="adj" fmla="val 8000"/>
+            </a:avLst>
+          </a:prstGeom>
+          <a:solidFill>
+            <a:srgbClr val="D6ECEE"/>
+          </a:solidFill>
+          <a:ln w="25400">
+            <a:solidFill>
+              <a:srgbClr val="0E7C86"/>
+            </a:solidFill>
+          </a:ln>
+          <a:effectLst/>
+        </p:spPr>
+        <p:style>
+          <a:lnRef idx="1">
+            <a:schemeClr val="accent1"/>
+          </a:lnRef>
+          <a:fillRef idx="3">
+            <a:schemeClr val="accent1"/>
+          </a:fillRef>
+          <a:effectRef idx="2">
+            <a:schemeClr val="accent1"/>
+          </a:effectRef>
+          <a:fontRef idx="minor">
+            <a:schemeClr val="lt1"/>
+          </a:fontRef>
+        </p:style>
+        <p:txBody>
+          <a:bodyPr rtlCol="0" anchor="ctr" wrap="square" lIns="73152" rIns="73152"/>
+          <a:lstStyle/>
+          <a:p>
+            <a:pPr algn="ctr">
+              <a:lnSpc>
+                <a:spcPct val="100000"/>
+              </a:lnSpc>
+              <a:spcAft>
+                <a:spcPts val="0"/>
+              </a:spcAft>
+              <a:defRPr sz="1700" b="1">
+                <a:solidFill>
+                  <a:srgbClr val="1F3A5F"/>
+                </a:solidFill>
+                <a:latin typeface="Calibri"/>
+              </a:defRPr>
+            </a:pPr>
+            <a:r>
+              <a:rPr sz="1700" b="1">
+                <a:solidFill>
+                  <a:srgbClr val="1F3A5F"/>
+                </a:solidFill>
+                <a:latin typeface="Calibri"/>
+              </a:rPr>
+              <a:t>Driving it</a:t>
+            </a:r>
+          </a:p>
+        </p:txBody>
+      </p:sp>
+      <p:sp>
+        <p:nvSpPr>
+          <p:cNvPr id="14" name="TextBox 13"/>
+          <p:cNvSpPr txBox="1"/>
+          <p:nvPr/>
+        </p:nvSpPr>
+        <p:spPr>
+          <a:xfrm>
+            <a:off x="9002037" y="3520440"/>
+            <a:ext cx="2686735" cy="310896"/>
+          </a:xfrm>
+          <a:prstGeom prst="rect">
+            <a:avLst/>
+          </a:prstGeom>
+          <a:noFill/>
+        </p:spPr>
+        <p:txBody>
+          <a:bodyPr wrap="square" lIns="0" tIns="0" rIns="0" bIns="0">
+            <a:spAutoFit/>
+          </a:bodyPr>
+          <a:lstStyle/>
+          <a:p>
+            <a:pPr algn="ctr">
+              <a:lnSpc>
+                <a:spcPct val="100000"/>
+              </a:lnSpc>
+              <a:spcAft>
+                <a:spcPts val="200"/>
+              </a:spcAft>
+              <a:defRPr sz="1100" b="1">
+                <a:solidFill>
+                  <a:srgbClr val="0E7C86"/>
+                </a:solidFill>
+                <a:latin typeface="Calibri"/>
+              </a:defRPr>
+            </a:pPr>
+            <a:r>
+              <a:rPr sz="1100" b="1">
+                <a:solidFill>
+                  <a:srgbClr val="0E7C86"/>
+                </a:solidFill>
+                <a:latin typeface="Calibri"/>
+              </a:rPr>
+              <a:t>NOW</a:t>
             </a:r>
           </a:p>
         </p:txBody>
@@ -14443,7 +14680,7 @@
                 </a:solidFill>
                 <a:latin typeface="Calibri"/>
               </a:rPr>
-              <a:t>l3c_tank_drive  -  the whole of loop()</a:t>
+              <a:t>Mixing, and why steering has its own limit</a:t>
             </a:r>
           </a:p>
         </p:txBody>
@@ -14597,7 +14834,7 @@
         <p:spPr>
           <a:xfrm>
             <a:off x="502920" y="1188720"/>
-            <a:ext cx="7047088" cy="274320"/>
+            <a:ext cx="11185855" cy="530352"/>
           </a:xfrm>
           <a:prstGeom prst="rect">
             <a:avLst/>
@@ -14615,456 +14852,37 @@
                 <a:spcPct val="100000"/>
               </a:lnSpc>
               <a:spcAft>
-                <a:spcPts val="200"/>
-              </a:spcAft>
-              <a:defRPr sz="1200" b="1">
+                <a:spcPts val="600"/>
+              </a:spcAft>
+              <a:defRPr sz="1900" b="1">
                 <a:solidFill>
                   <a:srgbClr val="0E7C86"/>
                 </a:solidFill>
-                <a:latin typeface="Consolas"/>
-              </a:defRPr>
-            </a:pPr>
-            <a:r>
-              <a:rPr sz="1200" b="1">
+                <a:latin typeface="Calibri"/>
+              </a:defRPr>
+            </a:pPr>
+            <a:r>
+              <a:rPr sz="1900" b="1">
                 <a:solidFill>
                   <a:srgbClr val="0E7C86"/>
                 </a:solidFill>
-                <a:latin typeface="Consolas"/>
-              </a:rPr>
-              <a:t>l3c_tank_drive.ino</a:t>
-            </a:r>
-          </a:p>
-        </p:txBody>
-      </p:sp>
-      <p:sp>
-        <p:nvSpPr>
-          <p:cNvPr id="7" name="CODE_PANEL"/>
-          <p:cNvSpPr/>
-          <p:nvPr/>
-        </p:nvSpPr>
-        <p:spPr>
-          <a:xfrm>
-            <a:off x="502920" y="1517904"/>
-            <a:ext cx="7047088" cy="4745736"/>
-          </a:xfrm>
-          <a:prstGeom prst="roundRect">
-            <a:avLst>
-              <a:gd name="adj" fmla="val 4000"/>
-            </a:avLst>
-          </a:prstGeom>
-          <a:solidFill>
-            <a:srgbClr val="F4F6F8"/>
-          </a:solidFill>
-          <a:ln w="12700">
-            <a:solidFill>
-              <a:srgbClr val="C8D2DE"/>
-            </a:solidFill>
-          </a:ln>
-          <a:effectLst/>
-        </p:spPr>
-        <p:style>
-          <a:lnRef idx="1">
-            <a:schemeClr val="accent1"/>
-          </a:lnRef>
-          <a:fillRef idx="3">
-            <a:schemeClr val="accent1"/>
-          </a:fillRef>
-          <a:effectRef idx="2">
-            <a:schemeClr val="accent1"/>
-          </a:effectRef>
-          <a:fontRef idx="minor">
-            <a:schemeClr val="lt1"/>
-          </a:fontRef>
-        </p:style>
-        <p:txBody>
-          <a:bodyPr rtlCol="0" anchor="t" wrap="square" lIns="146304" tIns="91440" bIns="73152"/>
-          <a:lstStyle/>
-          <a:p>
-            <a:pPr algn="l">
-              <a:lnSpc>
-                <a:spcPct val="100000"/>
-              </a:lnSpc>
-              <a:spcAft>
-                <a:spcPts val="0"/>
-              </a:spcAft>
-              <a:defRPr sz="1400">
-                <a:latin typeface="Consolas"/>
-              </a:defRPr>
-            </a:pPr>
-            <a:r>
-              <a:rPr sz="1400">
-                <a:solidFill>
-                  <a:srgbClr val="222222"/>
-                </a:solidFill>
-                <a:latin typeface="Consolas"/>
-              </a:rPr>
-              <a:t>void loop() {</a:t>
-            </a:r>
-          </a:p>
-          <a:p>
-            <a:pPr algn="l">
-              <a:lnSpc>
-                <a:spcPct val="100000"/>
-              </a:lnSpc>
-              <a:spcAft>
-                <a:spcPts val="0"/>
-              </a:spcAft>
-              <a:defRPr sz="1400">
-                <a:latin typeface="Consolas"/>
-              </a:defRPr>
-            </a:pPr>
-            <a:r>
-              <a:rPr sz="1400" b="1">
-                <a:solidFill>
-                  <a:srgbClr val="0E7C86"/>
-                </a:solidFill>
-                <a:latin typeface="Consolas"/>
-              </a:rPr>
-              <a:t>  if (!Ps3.isConnected()) {</a:t>
-            </a:r>
-          </a:p>
-          <a:p>
-            <a:pPr algn="l">
-              <a:lnSpc>
-                <a:spcPct val="100000"/>
-              </a:lnSpc>
-              <a:spcAft>
-                <a:spcPts val="0"/>
-              </a:spcAft>
-              <a:defRPr sz="1400">
-                <a:latin typeface="Consolas"/>
-              </a:defRPr>
-            </a:pPr>
-            <a:r>
-              <a:rPr sz="1400" b="1">
-                <a:solidFill>
-                  <a:srgbClr val="0E7C86"/>
-                </a:solidFill>
-                <a:latin typeface="Consolas"/>
-              </a:rPr>
-              <a:t>    drive(0, 0);        // never drive without a controller</a:t>
-            </a:r>
-          </a:p>
-          <a:p>
-            <a:pPr algn="l">
-              <a:lnSpc>
-                <a:spcPct val="100000"/>
-              </a:lnSpc>
-              <a:spcAft>
-                <a:spcPts val="0"/>
-              </a:spcAft>
-              <a:defRPr sz="1400">
-                <a:latin typeface="Consolas"/>
-              </a:defRPr>
-            </a:pPr>
-            <a:r>
-              <a:rPr sz="1400" b="1">
-                <a:solidFill>
-                  <a:srgbClr val="0E7C86"/>
-                </a:solidFill>
-                <a:latin typeface="Consolas"/>
-              </a:rPr>
-              <a:t>    return;</a:t>
-            </a:r>
-          </a:p>
-          <a:p>
-            <a:pPr algn="l">
-              <a:lnSpc>
-                <a:spcPct val="100000"/>
-              </a:lnSpc>
-              <a:spcAft>
-                <a:spcPts val="0"/>
-              </a:spcAft>
-              <a:defRPr sz="1400">
-                <a:latin typeface="Consolas"/>
-              </a:defRPr>
-            </a:pPr>
-            <a:r>
-              <a:rPr sz="1400">
-                <a:solidFill>
-                  <a:srgbClr val="222222"/>
-                </a:solidFill>
-                <a:latin typeface="Consolas"/>
-              </a:rPr>
-              <a:t>  }</a:t>
-            </a:r>
-          </a:p>
-          <a:p>
-            <a:pPr algn="l">
-              <a:lnSpc>
-                <a:spcPct val="100000"/>
-              </a:lnSpc>
-              <a:spcAft>
-                <a:spcPts val="0"/>
-              </a:spcAft>
-              <a:defRPr sz="1400">
-                <a:latin typeface="Consolas"/>
-              </a:defRPr>
-            </a:pPr>
-            <a:r>
-              <a:rPr sz="1400">
-                <a:solidFill>
-                  <a:srgbClr val="222222"/>
-                </a:solidFill>
-                <a:latin typeface="Consolas"/>
-              </a:rPr>
-              <a:t> </a:t>
-            </a:r>
-          </a:p>
-          <a:p>
-            <a:pPr algn="l">
-              <a:lnSpc>
-                <a:spcPct val="100000"/>
-              </a:lnSpc>
-              <a:spcAft>
-                <a:spcPts val="0"/>
-              </a:spcAft>
-              <a:defRPr sz="1400">
-                <a:latin typeface="Consolas"/>
-              </a:defRPr>
-            </a:pPr>
-            <a:r>
-              <a:rPr sz="1400">
-                <a:solidFill>
-                  <a:srgbClr val="222222"/>
-                </a:solidFill>
-                <a:latin typeface="Consolas"/>
-              </a:rPr>
-              <a:t>  int leftStickX = Ps3.data.analog.stick.lx;</a:t>
-            </a:r>
-          </a:p>
-          <a:p>
-            <a:pPr algn="l">
-              <a:lnSpc>
-                <a:spcPct val="100000"/>
-              </a:lnSpc>
-              <a:spcAft>
-                <a:spcPts val="0"/>
-              </a:spcAft>
-              <a:defRPr sz="1400">
-                <a:latin typeface="Consolas"/>
-              </a:defRPr>
-            </a:pPr>
-            <a:r>
-              <a:rPr sz="1400">
-                <a:solidFill>
-                  <a:srgbClr val="222222"/>
-                </a:solidFill>
-                <a:latin typeface="Consolas"/>
-              </a:rPr>
-              <a:t>  int leftStickY = Ps3.data.analog.stick.ly;</a:t>
-            </a:r>
-          </a:p>
-          <a:p>
-            <a:pPr algn="l">
-              <a:lnSpc>
-                <a:spcPct val="100000"/>
-              </a:lnSpc>
-              <a:spcAft>
-                <a:spcPts val="0"/>
-              </a:spcAft>
-              <a:defRPr sz="1400">
-                <a:latin typeface="Consolas"/>
-              </a:defRPr>
-            </a:pPr>
-            <a:r>
-              <a:rPr sz="1400">
-                <a:solidFill>
-                  <a:srgbClr val="222222"/>
-                </a:solidFill>
-                <a:latin typeface="Consolas"/>
-              </a:rPr>
-              <a:t> </a:t>
-            </a:r>
-          </a:p>
-          <a:p>
-            <a:pPr algn="l">
-              <a:lnSpc>
-                <a:spcPct val="100000"/>
-              </a:lnSpc>
-              <a:spcAft>
-                <a:spcPts val="0"/>
-              </a:spcAft>
-              <a:defRPr sz="1400">
-                <a:latin typeface="Consolas"/>
-              </a:defRPr>
-            </a:pPr>
-            <a:r>
-              <a:rPr sz="1400" b="1">
-                <a:solidFill>
-                  <a:srgbClr val="0E7C86"/>
-                </a:solidFill>
-                <a:latin typeface="Consolas"/>
-              </a:rPr>
-              <a:t>  int forward = stickToSpeed(-leftStickY, MOTOR_MAX);</a:t>
-            </a:r>
-          </a:p>
-          <a:p>
-            <a:pPr algn="l">
-              <a:lnSpc>
-                <a:spcPct val="100000"/>
-              </a:lnSpc>
-              <a:spcAft>
-                <a:spcPts val="0"/>
-              </a:spcAft>
-              <a:defRPr sz="1400">
-                <a:latin typeface="Consolas"/>
-              </a:defRPr>
-            </a:pPr>
-            <a:r>
-              <a:rPr sz="1400" b="1">
-                <a:solidFill>
-                  <a:srgbClr val="0E7C86"/>
-                </a:solidFill>
-                <a:latin typeface="Consolas"/>
-              </a:rPr>
-              <a:t>  int turn    = stickToSpeed(leftStickX,  turnMax);</a:t>
-            </a:r>
-          </a:p>
-          <a:p>
-            <a:pPr algn="l">
-              <a:lnSpc>
-                <a:spcPct val="100000"/>
-              </a:lnSpc>
-              <a:spcAft>
-                <a:spcPts val="0"/>
-              </a:spcAft>
-              <a:defRPr sz="1400">
-                <a:latin typeface="Consolas"/>
-              </a:defRPr>
-            </a:pPr>
-            <a:r>
-              <a:rPr sz="1400">
-                <a:solidFill>
-                  <a:srgbClr val="222222"/>
-                </a:solidFill>
-                <a:latin typeface="Consolas"/>
-              </a:rPr>
-              <a:t> </a:t>
-            </a:r>
-          </a:p>
-          <a:p>
-            <a:pPr algn="l">
-              <a:lnSpc>
-                <a:spcPct val="100000"/>
-              </a:lnSpc>
-              <a:spcAft>
-                <a:spcPts val="0"/>
-              </a:spcAft>
-              <a:defRPr sz="1400">
-                <a:latin typeface="Consolas"/>
-              </a:defRPr>
-            </a:pPr>
-            <a:r>
-              <a:rPr sz="1400">
-                <a:solidFill>
-                  <a:srgbClr val="222222"/>
-                </a:solidFill>
-                <a:latin typeface="Consolas"/>
-              </a:rPr>
-              <a:t>  int leftSpeed  = constrain(forward + turn, -MOTOR_MAX, MOTOR_MAX);</a:t>
-            </a:r>
-          </a:p>
-          <a:p>
-            <a:pPr algn="l">
-              <a:lnSpc>
-                <a:spcPct val="100000"/>
-              </a:lnSpc>
-              <a:spcAft>
-                <a:spcPts val="0"/>
-              </a:spcAft>
-              <a:defRPr sz="1400">
-                <a:latin typeface="Consolas"/>
-              </a:defRPr>
-            </a:pPr>
-            <a:r>
-              <a:rPr sz="1400">
-                <a:solidFill>
-                  <a:srgbClr val="222222"/>
-                </a:solidFill>
-                <a:latin typeface="Consolas"/>
-              </a:rPr>
-              <a:t>  int rightSpeed = constrain(forward - turn, -MOTOR_MAX, MOTOR_MAX);</a:t>
-            </a:r>
-          </a:p>
-          <a:p>
-            <a:pPr algn="l">
-              <a:lnSpc>
-                <a:spcPct val="100000"/>
-              </a:lnSpc>
-              <a:spcAft>
-                <a:spcPts val="0"/>
-              </a:spcAft>
-              <a:defRPr sz="1400">
-                <a:latin typeface="Consolas"/>
-              </a:defRPr>
-            </a:pPr>
-            <a:r>
-              <a:rPr sz="1400">
-                <a:solidFill>
-                  <a:srgbClr val="222222"/>
-                </a:solidFill>
-                <a:latin typeface="Consolas"/>
-              </a:rPr>
-              <a:t> </a:t>
-            </a:r>
-          </a:p>
-          <a:p>
-            <a:pPr algn="l">
-              <a:lnSpc>
-                <a:spcPct val="100000"/>
-              </a:lnSpc>
-              <a:spcAft>
-                <a:spcPts val="0"/>
-              </a:spcAft>
-              <a:defRPr sz="1400">
-                <a:latin typeface="Consolas"/>
-              </a:defRPr>
-            </a:pPr>
-            <a:r>
-              <a:rPr sz="1400">
-                <a:solidFill>
-                  <a:srgbClr val="222222"/>
-                </a:solidFill>
-                <a:latin typeface="Consolas"/>
-              </a:rPr>
-              <a:t>  drive(leftSpeed, rightSpeed);</a:t>
-            </a:r>
-          </a:p>
-          <a:p>
-            <a:pPr algn="l">
-              <a:lnSpc>
-                <a:spcPct val="100000"/>
-              </a:lnSpc>
-              <a:spcAft>
-                <a:spcPts val="0"/>
-              </a:spcAft>
-              <a:defRPr sz="1400">
-                <a:latin typeface="Consolas"/>
-              </a:defRPr>
-            </a:pPr>
-            <a:r>
-              <a:rPr sz="1400">
-                <a:solidFill>
-                  <a:srgbClr val="222222"/>
-                </a:solidFill>
-                <a:latin typeface="Consolas"/>
-              </a:rPr>
-              <a:t>}</a:t>
-            </a:r>
-          </a:p>
-        </p:txBody>
-      </p:sp>
-      <p:sp>
-        <p:nvSpPr>
-          <p:cNvPr id="8" name="TextBox 7"/>
+                <a:latin typeface="Calibri"/>
+              </a:rPr>
+              <a:t>Full speed forwards, half speed steering</a:t>
+            </a:r>
+          </a:p>
+        </p:txBody>
+      </p:sp>
+      <p:sp>
+        <p:nvSpPr>
+          <p:cNvPr id="7" name="TextBox 6"/>
           <p:cNvSpPr txBox="1"/>
           <p:nvPr/>
         </p:nvSpPr>
         <p:spPr>
           <a:xfrm>
-            <a:off x="7870048" y="1517904"/>
-            <a:ext cx="3818727" cy="4745736"/>
+            <a:off x="502920" y="1755648"/>
+            <a:ext cx="11185855" cy="4507992"/>
           </a:xfrm>
           <a:prstGeom prst="rect">
             <a:avLst/>
@@ -15082,98 +14900,212 @@
                 <a:spcPct val="100000"/>
               </a:lnSpc>
               <a:spcAft>
-                <a:spcPts val="700"/>
-              </a:spcAft>
-              <a:defRPr sz="2100" b="0">
-                <a:solidFill>
-                  <a:srgbClr val="222222"/>
-                </a:solidFill>
-                <a:latin typeface="Calibri"/>
-              </a:defRPr>
-            </a:pPr>
-            <a:r>
-              <a:rPr sz="2100" b="0">
-                <a:solidFill>
-                  <a:srgbClr val="222222"/>
-                </a:solidFill>
-                <a:latin typeface="Calibri"/>
-              </a:rPr>
-              <a:t>Read the first four lines again. If there is no controller, the motors stop and we go round again. That is the FAILSAFE, and it is the most important part of the program.</a:t>
-            </a:r>
-          </a:p>
-          <a:p>
-            <a:pPr algn="l">
-              <a:lnSpc>
-                <a:spcPct val="100000"/>
-              </a:lnSpc>
-              <a:spcAft>
-                <a:spcPts val="700"/>
-              </a:spcAft>
-              <a:defRPr sz="2100" b="0">
-                <a:solidFill>
-                  <a:srgbClr val="222222"/>
-                </a:solidFill>
-                <a:latin typeface="Calibri"/>
-              </a:defRPr>
-            </a:pPr>
-            <a:r>
-              <a:rPr sz="2100" b="0">
-                <a:solidFill>
-                  <a:srgbClr val="222222"/>
-                </a:solidFill>
-                <a:latin typeface="Calibri"/>
-              </a:rPr>
-              <a:t>Note the minus sign on leftStickY. Up is negative.</a:t>
-            </a:r>
-          </a:p>
-          <a:p>
-            <a:pPr algn="l">
-              <a:lnSpc>
-                <a:spcPct val="100000"/>
-              </a:lnSpc>
-              <a:spcAft>
-                <a:spcPts val="700"/>
-              </a:spcAft>
-              <a:defRPr sz="2100" b="0">
-                <a:solidFill>
-                  <a:srgbClr val="222222"/>
-                </a:solidFill>
-                <a:latin typeface="Calibri"/>
-              </a:defRPr>
-            </a:pPr>
-            <a:r>
-              <a:rPr sz="2100" b="0">
-                <a:solidFill>
-                  <a:srgbClr val="222222"/>
-                </a:solidFill>
-                <a:latin typeface="Calibri"/>
-              </a:rPr>
-              <a:t>Driving gets MOTOR_MAX; steering gets turnMax.</a:t>
-            </a:r>
-          </a:p>
-          <a:p>
-            <a:pPr algn="l">
-              <a:lnSpc>
-                <a:spcPct val="100000"/>
-              </a:lnSpc>
-              <a:spcAft>
-                <a:spcPts val="700"/>
-              </a:spcAft>
-              <a:defRPr sz="2100" b="0">
-                <a:solidFill>
-                  <a:srgbClr val="222222"/>
-                </a:solidFill>
-                <a:latin typeface="Calibri"/>
-              </a:defRPr>
-            </a:pPr>
-            <a:r>
-              <a:rPr sz="2100" b="0">
-                <a:solidFill>
-                  <a:srgbClr val="222222"/>
-                </a:solidFill>
-                <a:latin typeface="Calibri"/>
-              </a:rPr>
-              <a:t>Everything else you have already seen.</a:t>
+                <a:spcPts val="600"/>
+              </a:spcAft>
+              <a:defRPr sz="1900" b="0">
+                <a:solidFill>
+                  <a:srgbClr val="222222"/>
+                </a:solidFill>
+                <a:latin typeface="Calibri"/>
+              </a:defRPr>
+            </a:pPr>
+            <a:r>
+              <a:rPr sz="1900" b="0">
+                <a:solidFill>
+                  <a:srgbClr val="222222"/>
+                </a:solidFill>
+                <a:latin typeface="Calibri"/>
+              </a:rPr>
+              <a:t>left = forward + turn        right = forward - turn</a:t>
+            </a:r>
+          </a:p>
+          <a:p>
+            <a:pPr algn="l">
+              <a:lnSpc>
+                <a:spcPct val="100000"/>
+              </a:lnSpc>
+              <a:spcAft>
+                <a:spcPts val="600"/>
+              </a:spcAft>
+              <a:defRPr sz="950" b="0">
+                <a:solidFill>
+                  <a:srgbClr val="222222"/>
+                </a:solidFill>
+                <a:latin typeface="Calibri"/>
+              </a:defRPr>
+            </a:pPr>
+          </a:p>
+          <a:p>
+            <a:pPr algn="l">
+              <a:lnSpc>
+                <a:spcPct val="100000"/>
+              </a:lnSpc>
+              <a:spcAft>
+                <a:spcPts val="600"/>
+              </a:spcAft>
+              <a:defRPr sz="1900" b="0">
+                <a:solidFill>
+                  <a:srgbClr val="222222"/>
+                </a:solidFill>
+                <a:latin typeface="Calibri"/>
+              </a:defRPr>
+            </a:pPr>
+            <a:r>
+              <a:rPr sz="1900" b="0">
+                <a:solidFill>
+                  <a:srgbClr val="222222"/>
+                </a:solidFill>
+                <a:latin typeface="Calibri"/>
+              </a:rPr>
+              <a:t>Driving gets the full MOTOR_MAX of 255.</a:t>
+            </a:r>
+          </a:p>
+          <a:p>
+            <a:pPr algn="l">
+              <a:lnSpc>
+                <a:spcPct val="100000"/>
+              </a:lnSpc>
+              <a:spcAft>
+                <a:spcPts val="600"/>
+              </a:spcAft>
+              <a:defRPr sz="1900" b="0">
+                <a:solidFill>
+                  <a:srgbClr val="222222"/>
+                </a:solidFill>
+                <a:latin typeface="Calibri"/>
+              </a:defRPr>
+            </a:pPr>
+            <a:r>
+              <a:rPr sz="1900" b="0">
+                <a:solidFill>
+                  <a:srgbClr val="222222"/>
+                </a:solidFill>
+                <a:latin typeface="Calibri"/>
+              </a:rPr>
+              <a:t>Steering gets turnMax, which is HALF of that by default.</a:t>
+            </a:r>
+          </a:p>
+          <a:p>
+            <a:pPr algn="l">
+              <a:lnSpc>
+                <a:spcPct val="100000"/>
+              </a:lnSpc>
+              <a:spcAft>
+                <a:spcPts val="600"/>
+              </a:spcAft>
+              <a:defRPr sz="950" b="0">
+                <a:solidFill>
+                  <a:srgbClr val="222222"/>
+                </a:solidFill>
+                <a:latin typeface="Calibri"/>
+              </a:defRPr>
+            </a:pPr>
+          </a:p>
+          <a:p>
+            <a:pPr algn="l">
+              <a:lnSpc>
+                <a:spcPct val="100000"/>
+              </a:lnSpc>
+              <a:spcAft>
+                <a:spcPts val="600"/>
+              </a:spcAft>
+              <a:defRPr sz="1900" b="0">
+                <a:solidFill>
+                  <a:srgbClr val="222222"/>
+                </a:solidFill>
+                <a:latin typeface="Calibri"/>
+              </a:defRPr>
+            </a:pPr>
+            <a:r>
+              <a:rPr sz="1900" b="0">
+                <a:solidFill>
+                  <a:srgbClr val="222222"/>
+                </a:solidFill>
+                <a:latin typeface="Calibri"/>
+              </a:rPr>
+              <a:t>Why? Because at full power a small nudge sideways spins the vehicle faster than anybody can correct for. Half-power steering makes it controllable without making it slow.</a:t>
+            </a:r>
+          </a:p>
+          <a:p>
+            <a:pPr algn="l">
+              <a:lnSpc>
+                <a:spcPct val="100000"/>
+              </a:lnSpc>
+              <a:spcAft>
+                <a:spcPts val="600"/>
+              </a:spcAft>
+              <a:defRPr sz="950" b="0">
+                <a:solidFill>
+                  <a:srgbClr val="222222"/>
+                </a:solidFill>
+                <a:latin typeface="Calibri"/>
+              </a:defRPr>
+            </a:pPr>
+          </a:p>
+          <a:p>
+            <a:pPr algn="l">
+              <a:lnSpc>
+                <a:spcPct val="100000"/>
+              </a:lnSpc>
+              <a:spcAft>
+                <a:spcPts val="600"/>
+              </a:spcAft>
+              <a:defRPr sz="1900" b="0">
+                <a:solidFill>
+                  <a:srgbClr val="222222"/>
+                </a:solidFill>
+                <a:latin typeface="Calibri"/>
+              </a:defRPr>
+            </a:pPr>
+            <a:r>
+              <a:rPr sz="1900" b="0">
+                <a:solidFill>
+                  <a:srgbClr val="222222"/>
+                </a:solidFill>
+                <a:latin typeface="Calibri"/>
+              </a:rPr>
+              <a:t>The full program lets you switch between the two with L3 (click the left stick in). Sharp mode is for spinning on the spot deliberately; normal mode is for actually getting somewhere.</a:t>
+            </a:r>
+          </a:p>
+          <a:p>
+            <a:pPr algn="l">
+              <a:lnSpc>
+                <a:spcPct val="100000"/>
+              </a:lnSpc>
+              <a:spcAft>
+                <a:spcPts val="600"/>
+              </a:spcAft>
+              <a:defRPr sz="950" b="0">
+                <a:solidFill>
+                  <a:srgbClr val="222222"/>
+                </a:solidFill>
+                <a:latin typeface="Calibri"/>
+              </a:defRPr>
+            </a:pPr>
+          </a:p>
+          <a:p>
+            <a:pPr algn="l">
+              <a:lnSpc>
+                <a:spcPct val="100000"/>
+              </a:lnSpc>
+              <a:spcAft>
+                <a:spcPts val="600"/>
+              </a:spcAft>
+              <a:defRPr sz="1900" b="0">
+                <a:solidFill>
+                  <a:srgbClr val="222222"/>
+                </a:solidFill>
+                <a:latin typeface="Calibri"/>
+              </a:defRPr>
+            </a:pPr>
+            <a:r>
+              <a:rPr sz="1900" b="0">
+                <a:solidFill>
+                  <a:srgbClr val="222222"/>
+                </a:solidFill>
+                <a:latin typeface="Calibri"/>
+              </a:rPr>
+              <a:t>constrain() catches the overflow. forward 200 plus turn 60 is 260, which is more than a motor can take.</a:t>
             </a:r>
           </a:p>
         </p:txBody>
@@ -15198,24 +15130,22 @@
       <p:grpSpPr/>
       <p:sp>
         <p:nvSpPr>
-          <p:cNvPr id="2" name="TextBox 1"/>
-          <p:cNvSpPr txBox="1"/>
-          <p:nvPr/>
-        </p:nvSpPr>
-        <p:spPr>
-          <a:xfrm>
-            <a:off x="502920" y="6382512"/>
-            <a:ext cx="10545775" cy="274320"/>
-          </a:xfrm>
-          <a:prstGeom prst="rect">
-            <a:avLst/>
-          </a:prstGeom>
-          <a:noFill/>
-        </p:spPr>
-        <p:txBody>
-          <a:bodyPr wrap="square" lIns="0" tIns="0">
-            <a:spAutoFit/>
-          </a:bodyPr>
+          <p:cNvPr id="2" name="Title 1"/>
+          <p:cNvSpPr>
+            <a:spLocks noGrp="1"/>
+          </p:cNvSpPr>
+          <p:nvPr>
+            <p:ph type="title"/>
+          </p:nvPr>
+        </p:nvSpPr>
+        <p:spPr>
+          <a:xfrm>
+            <a:off x="502920" y="274320"/>
+            <a:ext cx="11185855" cy="777240"/>
+          </a:xfrm>
+        </p:spPr>
+        <p:txBody>
+          <a:bodyPr wrap="square" anchor="b"/>
           <a:lstStyle/>
           <a:p>
             <a:pPr algn="l">
@@ -15225,89 +15155,41 @@
               <a:spcAft>
                 <a:spcPts val="0"/>
               </a:spcAft>
-              <a:defRPr sz="1000" b="0">
-                <a:solidFill>
-                  <a:srgbClr val="666666"/>
-                </a:solidFill>
-                <a:latin typeface="Calibri"/>
-              </a:defRPr>
-            </a:pPr>
-            <a:r>
-              <a:rPr sz="1000" b="0">
-                <a:solidFill>
-                  <a:srgbClr val="666666"/>
-                </a:solidFill>
-                <a:latin typeface="Calibri"/>
-              </a:rPr>
-              <a:t>Pathfinder Beginner - PS3  |  Lesson 3</a:t>
-            </a:r>
-          </a:p>
-        </p:txBody>
-      </p:sp>
-      <p:sp>
-        <p:nvSpPr>
-          <p:cNvPr id="3" name="TextBox 2"/>
-          <p:cNvSpPr txBox="1"/>
-          <p:nvPr/>
-        </p:nvSpPr>
-        <p:spPr>
-          <a:xfrm>
-            <a:off x="11231575" y="6382512"/>
-            <a:ext cx="457200" cy="274320"/>
-          </a:xfrm>
-          <a:prstGeom prst="rect">
-            <a:avLst/>
-          </a:prstGeom>
-          <a:noFill/>
-        </p:spPr>
-        <p:txBody>
-          <a:bodyPr wrap="square" lIns="0" tIns="0">
-            <a:spAutoFit/>
-          </a:bodyPr>
-          <a:lstStyle/>
-          <a:p>
-            <a:pPr algn="r">
-              <a:lnSpc>
-                <a:spcPct val="100000"/>
-              </a:lnSpc>
-              <a:spcAft>
-                <a:spcPts val="0"/>
-              </a:spcAft>
-              <a:defRPr sz="1000" b="0">
-                <a:solidFill>
-                  <a:srgbClr val="666666"/>
-                </a:solidFill>
-                <a:latin typeface="Calibri"/>
-              </a:defRPr>
-            </a:pPr>
-            <a:r>
-              <a:rPr sz="1000" b="0">
-                <a:solidFill>
-                  <a:srgbClr val="666666"/>
-                </a:solidFill>
-                <a:latin typeface="Calibri"/>
-              </a:rPr>
-              <a:t>20</a:t>
-            </a:r>
-          </a:p>
-        </p:txBody>
-      </p:sp>
-      <p:sp>
-        <p:nvSpPr>
-          <p:cNvPr id="4" name="Rectangle 3"/>
+              <a:defRPr sz="2800" b="1">
+                <a:solidFill>
+                  <a:srgbClr val="1F3A5F"/>
+                </a:solidFill>
+                <a:latin typeface="Calibri"/>
+              </a:defRPr>
+            </a:pPr>
+            <a:r>
+              <a:rPr sz="2800" b="1">
+                <a:solidFill>
+                  <a:srgbClr val="1F3A5F"/>
+                </a:solidFill>
+                <a:latin typeface="Calibri"/>
+              </a:rPr>
+              <a:t>l3c_tank_drive  -  the whole of loop()</a:t>
+            </a:r>
+          </a:p>
+        </p:txBody>
+      </p:sp>
+      <p:sp>
+        <p:nvSpPr>
+          <p:cNvPr id="3" name="Rectangle 2"/>
           <p:cNvSpPr/>
           <p:nvPr/>
         </p:nvSpPr>
         <p:spPr>
           <a:xfrm>
-            <a:off x="0" y="1234440"/>
-            <a:ext cx="256032" cy="1554480"/>
+            <a:off x="502920" y="1097280"/>
+            <a:ext cx="11185855" cy="19050"/>
           </a:xfrm>
           <a:prstGeom prst="rect">
             <a:avLst/>
           </a:prstGeom>
           <a:solidFill>
-            <a:srgbClr val="0E7C86"/>
+            <a:srgbClr val="C8D2DE"/>
           </a:solidFill>
           <a:ln>
             <a:noFill/>
@@ -15338,14 +15220,14 @@
       </p:sp>
       <p:sp>
         <p:nvSpPr>
-          <p:cNvPr id="5" name="TextBox 4"/>
+          <p:cNvPr id="4" name="TextBox 3"/>
           <p:cNvSpPr txBox="1"/>
           <p:nvPr/>
         </p:nvSpPr>
         <p:spPr>
           <a:xfrm>
-            <a:off x="777240" y="1325880"/>
-            <a:ext cx="10515600" cy="1051560"/>
+            <a:off x="502920" y="6382512"/>
+            <a:ext cx="10545775" cy="274320"/>
           </a:xfrm>
           <a:prstGeom prst="rect">
             <a:avLst/>
@@ -15353,7 +15235,7 @@
           <a:noFill/>
         </p:spPr>
         <p:txBody>
-          <a:bodyPr wrap="square" lIns="0" tIns="0" rIns="0" bIns="0">
+          <a:bodyPr wrap="square" lIns="0" tIns="0">
             <a:spAutoFit/>
           </a:bodyPr>
           <a:lstStyle/>
@@ -15365,35 +15247,35 @@
               <a:spcAft>
                 <a:spcPts val="0"/>
               </a:spcAft>
-              <a:defRPr sz="3600" b="1">
-                <a:solidFill>
-                  <a:srgbClr val="1F3A5F"/>
-                </a:solidFill>
-                <a:latin typeface="Calibri"/>
-              </a:defRPr>
-            </a:pPr>
-            <a:r>
-              <a:rPr sz="3600" b="1">
-                <a:solidFill>
-                  <a:srgbClr val="1F3A5F"/>
-                </a:solidFill>
-                <a:latin typeface="Calibri"/>
-              </a:rPr>
-              <a:t>Driving it</a:t>
-            </a:r>
-          </a:p>
-        </p:txBody>
-      </p:sp>
-      <p:sp>
-        <p:nvSpPr>
-          <p:cNvPr id="6" name="TextBox 5"/>
+              <a:defRPr sz="1000" b="0">
+                <a:solidFill>
+                  <a:srgbClr val="666666"/>
+                </a:solidFill>
+                <a:latin typeface="Calibri"/>
+              </a:defRPr>
+            </a:pPr>
+            <a:r>
+              <a:rPr sz="1000" b="0">
+                <a:solidFill>
+                  <a:srgbClr val="666666"/>
+                </a:solidFill>
+                <a:latin typeface="Calibri"/>
+              </a:rPr>
+              <a:t>Pathfinder Beginner - PS3  |  Lesson 3</a:t>
+            </a:r>
+          </a:p>
+        </p:txBody>
+      </p:sp>
+      <p:sp>
+        <p:nvSpPr>
+          <p:cNvPr id="5" name="TextBox 4"/>
           <p:cNvSpPr txBox="1"/>
           <p:nvPr/>
         </p:nvSpPr>
         <p:spPr>
           <a:xfrm>
-            <a:off x="777240" y="2423160"/>
-            <a:ext cx="10515600" cy="685800"/>
+            <a:off x="11231575" y="6382512"/>
+            <a:ext cx="457200" cy="274320"/>
           </a:xfrm>
           <a:prstGeom prst="rect">
             <a:avLst/>
@@ -15401,6 +15283,54 @@
           <a:noFill/>
         </p:spPr>
         <p:txBody>
+          <a:bodyPr wrap="square" lIns="0" tIns="0">
+            <a:spAutoFit/>
+          </a:bodyPr>
+          <a:lstStyle/>
+          <a:p>
+            <a:pPr algn="r">
+              <a:lnSpc>
+                <a:spcPct val="100000"/>
+              </a:lnSpc>
+              <a:spcAft>
+                <a:spcPts val="0"/>
+              </a:spcAft>
+              <a:defRPr sz="1000" b="0">
+                <a:solidFill>
+                  <a:srgbClr val="666666"/>
+                </a:solidFill>
+                <a:latin typeface="Calibri"/>
+              </a:defRPr>
+            </a:pPr>
+            <a:r>
+              <a:rPr sz="1000" b="0">
+                <a:solidFill>
+                  <a:srgbClr val="666666"/>
+                </a:solidFill>
+                <a:latin typeface="Calibri"/>
+              </a:rPr>
+              <a:t>20</a:t>
+            </a:r>
+          </a:p>
+        </p:txBody>
+      </p:sp>
+      <p:sp>
+        <p:nvSpPr>
+          <p:cNvPr id="6" name="TextBox 5"/>
+          <p:cNvSpPr txBox="1"/>
+          <p:nvPr/>
+        </p:nvSpPr>
+        <p:spPr>
+          <a:xfrm>
+            <a:off x="502920" y="1188720"/>
+            <a:ext cx="7047088" cy="274320"/>
+          </a:xfrm>
+          <a:prstGeom prst="rect">
+            <a:avLst/>
+          </a:prstGeom>
+          <a:noFill/>
+        </p:spPr>
+        <p:txBody>
           <a:bodyPr wrap="square" lIns="0" tIns="0" rIns="0" bIns="0">
             <a:spAutoFit/>
           </a:bodyPr>
@@ -15411,49 +15341,49 @@
                 <a:spcPct val="100000"/>
               </a:lnSpc>
               <a:spcAft>
-                <a:spcPts val="400"/>
-              </a:spcAft>
-              <a:defRPr sz="1600" b="0">
-                <a:solidFill>
-                  <a:srgbClr val="666666"/>
-                </a:solidFill>
-                <a:latin typeface="Calibri"/>
-              </a:defRPr>
-            </a:pPr>
-            <a:r>
-              <a:rPr sz="1600" b="0">
-                <a:solidFill>
-                  <a:srgbClr val="666666"/>
-                </a:solidFill>
-                <a:latin typeface="Calibri"/>
-              </a:rPr>
-              <a:t>About 30 minutes</a:t>
-            </a:r>
-          </a:p>
-        </p:txBody>
-      </p:sp>
-      <p:sp>
-        <p:nvSpPr>
-          <p:cNvPr id="7" name="Rounded Rectangle 6"/>
+                <a:spcPts val="200"/>
+              </a:spcAft>
+              <a:defRPr sz="1200" b="1">
+                <a:solidFill>
+                  <a:srgbClr val="0E7C86"/>
+                </a:solidFill>
+                <a:latin typeface="Consolas"/>
+              </a:defRPr>
+            </a:pPr>
+            <a:r>
+              <a:rPr sz="1200" b="1">
+                <a:solidFill>
+                  <a:srgbClr val="0E7C86"/>
+                </a:solidFill>
+                <a:latin typeface="Consolas"/>
+              </a:rPr>
+              <a:t>l3c_tank_drive.ino</a:t>
+            </a:r>
+          </a:p>
+        </p:txBody>
+      </p:sp>
+      <p:sp>
+        <p:nvSpPr>
+          <p:cNvPr id="7" name="CODE_PANEL"/>
           <p:cNvSpPr/>
           <p:nvPr/>
         </p:nvSpPr>
         <p:spPr>
           <a:xfrm>
-            <a:off x="502920" y="3886200"/>
-            <a:ext cx="2686735" cy="1325880"/>
+            <a:off x="502920" y="1517904"/>
+            <a:ext cx="7047088" cy="4745736"/>
           </a:xfrm>
           <a:prstGeom prst="roundRect">
             <a:avLst>
-              <a:gd name="adj" fmla="val 8000"/>
+              <a:gd name="adj" fmla="val 4000"/>
             </a:avLst>
           </a:prstGeom>
           <a:solidFill>
-            <a:srgbClr val="EEF3F8"/>
+            <a:srgbClr val="F4F6F8"/>
           </a:solidFill>
           <a:ln w="12700">
             <a:solidFill>
-              <a:srgbClr val="0E7C86"/>
+              <a:srgbClr val="C8D2DE"/>
             </a:solidFill>
           </a:ln>
           <a:effectLst/>
@@ -15473,31 +15403,380 @@
           </a:fontRef>
         </p:style>
         <p:txBody>
-          <a:bodyPr rtlCol="0" anchor="ctr" wrap="square" lIns="73152" rIns="73152"/>
-          <a:lstStyle/>
-          <a:p>
-            <a:pPr algn="ctr">
+          <a:bodyPr rtlCol="0" anchor="t" wrap="square" lIns="146304" tIns="91440" bIns="73152"/>
+          <a:lstStyle/>
+          <a:p>
+            <a:pPr algn="l">
               <a:lnSpc>
                 <a:spcPct val="100000"/>
               </a:lnSpc>
               <a:spcAft>
                 <a:spcPts val="0"/>
               </a:spcAft>
-              <a:defRPr sz="1700" b="0">
-                <a:solidFill>
-                  <a:srgbClr val="1F3A5F"/>
-                </a:solidFill>
-                <a:latin typeface="Calibri"/>
-              </a:defRPr>
-            </a:pPr>
-            <a:r>
-              <a:rPr sz="1700" b="0">
-                <a:solidFill>
-                  <a:srgbClr val="1F3A5F"/>
-                </a:solidFill>
-                <a:latin typeface="Calibri"/>
-              </a:rPr>
-              <a:t>Bluetooth and pairing</a:t>
+              <a:defRPr sz="1400">
+                <a:latin typeface="Consolas"/>
+              </a:defRPr>
+            </a:pPr>
+            <a:r>
+              <a:rPr sz="1400">
+                <a:solidFill>
+                  <a:srgbClr val="222222"/>
+                </a:solidFill>
+                <a:latin typeface="Consolas"/>
+              </a:rPr>
+              <a:t>void loop() {</a:t>
+            </a:r>
+          </a:p>
+          <a:p>
+            <a:pPr algn="l">
+              <a:lnSpc>
+                <a:spcPct val="100000"/>
+              </a:lnSpc>
+              <a:spcAft>
+                <a:spcPts val="0"/>
+              </a:spcAft>
+              <a:defRPr sz="1400">
+                <a:latin typeface="Consolas"/>
+              </a:defRPr>
+            </a:pPr>
+            <a:r>
+              <a:rPr sz="1400" b="1">
+                <a:solidFill>
+                  <a:srgbClr val="0E7C86"/>
+                </a:solidFill>
+                <a:latin typeface="Consolas"/>
+              </a:rPr>
+              <a:t>  if (!Ps3.isConnected()) {</a:t>
+            </a:r>
+          </a:p>
+          <a:p>
+            <a:pPr algn="l">
+              <a:lnSpc>
+                <a:spcPct val="100000"/>
+              </a:lnSpc>
+              <a:spcAft>
+                <a:spcPts val="0"/>
+              </a:spcAft>
+              <a:defRPr sz="1400">
+                <a:latin typeface="Consolas"/>
+              </a:defRPr>
+            </a:pPr>
+            <a:r>
+              <a:rPr sz="1400" b="1">
+                <a:solidFill>
+                  <a:srgbClr val="0E7C86"/>
+                </a:solidFill>
+                <a:latin typeface="Consolas"/>
+              </a:rPr>
+              <a:t>    drive(0, 0);        // never drive without a controller</a:t>
+            </a:r>
+          </a:p>
+          <a:p>
+            <a:pPr algn="l">
+              <a:lnSpc>
+                <a:spcPct val="100000"/>
+              </a:lnSpc>
+              <a:spcAft>
+                <a:spcPts val="0"/>
+              </a:spcAft>
+              <a:defRPr sz="1400">
+                <a:latin typeface="Consolas"/>
+              </a:defRPr>
+            </a:pPr>
+            <a:r>
+              <a:rPr sz="1400" b="1">
+                <a:solidFill>
+                  <a:srgbClr val="0E7C86"/>
+                </a:solidFill>
+                <a:latin typeface="Consolas"/>
+              </a:rPr>
+              <a:t>    return;</a:t>
+            </a:r>
+          </a:p>
+          <a:p>
+            <a:pPr algn="l">
+              <a:lnSpc>
+                <a:spcPct val="100000"/>
+              </a:lnSpc>
+              <a:spcAft>
+                <a:spcPts val="0"/>
+              </a:spcAft>
+              <a:defRPr sz="1400">
+                <a:latin typeface="Consolas"/>
+              </a:defRPr>
+            </a:pPr>
+            <a:r>
+              <a:rPr sz="1400">
+                <a:solidFill>
+                  <a:srgbClr val="222222"/>
+                </a:solidFill>
+                <a:latin typeface="Consolas"/>
+              </a:rPr>
+              <a:t>  }</a:t>
+            </a:r>
+          </a:p>
+          <a:p>
+            <a:pPr algn="l">
+              <a:lnSpc>
+                <a:spcPct val="100000"/>
+              </a:lnSpc>
+              <a:spcAft>
+                <a:spcPts val="0"/>
+              </a:spcAft>
+              <a:defRPr sz="1400">
+                <a:latin typeface="Consolas"/>
+              </a:defRPr>
+            </a:pPr>
+            <a:r>
+              <a:rPr sz="1400">
+                <a:solidFill>
+                  <a:srgbClr val="222222"/>
+                </a:solidFill>
+                <a:latin typeface="Consolas"/>
+              </a:rPr>
+              <a:t> </a:t>
+            </a:r>
+          </a:p>
+          <a:p>
+            <a:pPr algn="l">
+              <a:lnSpc>
+                <a:spcPct val="100000"/>
+              </a:lnSpc>
+              <a:spcAft>
+                <a:spcPts val="0"/>
+              </a:spcAft>
+              <a:defRPr sz="1400">
+                <a:latin typeface="Consolas"/>
+              </a:defRPr>
+            </a:pPr>
+            <a:r>
+              <a:rPr sz="1400">
+                <a:solidFill>
+                  <a:srgbClr val="222222"/>
+                </a:solidFill>
+                <a:latin typeface="Consolas"/>
+              </a:rPr>
+              <a:t>  int leftStickX = Ps3.data.analog.stick.lx;</a:t>
+            </a:r>
+          </a:p>
+          <a:p>
+            <a:pPr algn="l">
+              <a:lnSpc>
+                <a:spcPct val="100000"/>
+              </a:lnSpc>
+              <a:spcAft>
+                <a:spcPts val="0"/>
+              </a:spcAft>
+              <a:defRPr sz="1400">
+                <a:latin typeface="Consolas"/>
+              </a:defRPr>
+            </a:pPr>
+            <a:r>
+              <a:rPr sz="1400">
+                <a:solidFill>
+                  <a:srgbClr val="222222"/>
+                </a:solidFill>
+                <a:latin typeface="Consolas"/>
+              </a:rPr>
+              <a:t>  int leftStickY = Ps3.data.analog.stick.ly;</a:t>
+            </a:r>
+          </a:p>
+          <a:p>
+            <a:pPr algn="l">
+              <a:lnSpc>
+                <a:spcPct val="100000"/>
+              </a:lnSpc>
+              <a:spcAft>
+                <a:spcPts val="0"/>
+              </a:spcAft>
+              <a:defRPr sz="1400">
+                <a:latin typeface="Consolas"/>
+              </a:defRPr>
+            </a:pPr>
+            <a:r>
+              <a:rPr sz="1400">
+                <a:solidFill>
+                  <a:srgbClr val="222222"/>
+                </a:solidFill>
+                <a:latin typeface="Consolas"/>
+              </a:rPr>
+              <a:t> </a:t>
+            </a:r>
+          </a:p>
+          <a:p>
+            <a:pPr algn="l">
+              <a:lnSpc>
+                <a:spcPct val="100000"/>
+              </a:lnSpc>
+              <a:spcAft>
+                <a:spcPts val="0"/>
+              </a:spcAft>
+              <a:defRPr sz="1400">
+                <a:latin typeface="Consolas"/>
+              </a:defRPr>
+            </a:pPr>
+            <a:r>
+              <a:rPr sz="1400" b="1">
+                <a:solidFill>
+                  <a:srgbClr val="0E7C86"/>
+                </a:solidFill>
+                <a:latin typeface="Consolas"/>
+              </a:rPr>
+              <a:t>  int forward = stickToSpeed(-leftStickY, MOTOR_MAX);</a:t>
+            </a:r>
+          </a:p>
+          <a:p>
+            <a:pPr algn="l">
+              <a:lnSpc>
+                <a:spcPct val="100000"/>
+              </a:lnSpc>
+              <a:spcAft>
+                <a:spcPts val="0"/>
+              </a:spcAft>
+              <a:defRPr sz="1400">
+                <a:latin typeface="Consolas"/>
+              </a:defRPr>
+            </a:pPr>
+            <a:r>
+              <a:rPr sz="1400" b="1">
+                <a:solidFill>
+                  <a:srgbClr val="0E7C86"/>
+                </a:solidFill>
+                <a:latin typeface="Consolas"/>
+              </a:rPr>
+              <a:t>  int turn    = stickToSpeed(leftStickX,  turnMax);</a:t>
+            </a:r>
+          </a:p>
+          <a:p>
+            <a:pPr algn="l">
+              <a:lnSpc>
+                <a:spcPct val="100000"/>
+              </a:lnSpc>
+              <a:spcAft>
+                <a:spcPts val="0"/>
+              </a:spcAft>
+              <a:defRPr sz="1400">
+                <a:latin typeface="Consolas"/>
+              </a:defRPr>
+            </a:pPr>
+            <a:r>
+              <a:rPr sz="1400">
+                <a:solidFill>
+                  <a:srgbClr val="222222"/>
+                </a:solidFill>
+                <a:latin typeface="Consolas"/>
+              </a:rPr>
+              <a:t> </a:t>
+            </a:r>
+          </a:p>
+          <a:p>
+            <a:pPr algn="l">
+              <a:lnSpc>
+                <a:spcPct val="100000"/>
+              </a:lnSpc>
+              <a:spcAft>
+                <a:spcPts val="0"/>
+              </a:spcAft>
+              <a:defRPr sz="1400">
+                <a:latin typeface="Consolas"/>
+              </a:defRPr>
+            </a:pPr>
+            <a:r>
+              <a:rPr sz="1400">
+                <a:solidFill>
+                  <a:srgbClr val="222222"/>
+                </a:solidFill>
+                <a:latin typeface="Consolas"/>
+              </a:rPr>
+              <a:t>  int leftSpeed  = constrain(forward + turn, -MOTOR_MAX, MOTOR_MAX);</a:t>
+            </a:r>
+          </a:p>
+          <a:p>
+            <a:pPr algn="l">
+              <a:lnSpc>
+                <a:spcPct val="100000"/>
+              </a:lnSpc>
+              <a:spcAft>
+                <a:spcPts val="0"/>
+              </a:spcAft>
+              <a:defRPr sz="1400">
+                <a:latin typeface="Consolas"/>
+              </a:defRPr>
+            </a:pPr>
+            <a:r>
+              <a:rPr sz="1400">
+                <a:solidFill>
+                  <a:srgbClr val="222222"/>
+                </a:solidFill>
+                <a:latin typeface="Consolas"/>
+              </a:rPr>
+              <a:t>  int rightSpeed = constrain(forward - turn, -MOTOR_MAX, MOTOR_MAX);</a:t>
+            </a:r>
+          </a:p>
+          <a:p>
+            <a:pPr algn="l">
+              <a:lnSpc>
+                <a:spcPct val="100000"/>
+              </a:lnSpc>
+              <a:spcAft>
+                <a:spcPts val="0"/>
+              </a:spcAft>
+              <a:defRPr sz="1400">
+                <a:latin typeface="Consolas"/>
+              </a:defRPr>
+            </a:pPr>
+            <a:r>
+              <a:rPr sz="1400">
+                <a:solidFill>
+                  <a:srgbClr val="222222"/>
+                </a:solidFill>
+                <a:latin typeface="Consolas"/>
+              </a:rPr>
+              <a:t> </a:t>
+            </a:r>
+          </a:p>
+          <a:p>
+            <a:pPr algn="l">
+              <a:lnSpc>
+                <a:spcPct val="100000"/>
+              </a:lnSpc>
+              <a:spcAft>
+                <a:spcPts val="0"/>
+              </a:spcAft>
+              <a:defRPr sz="1400">
+                <a:latin typeface="Consolas"/>
+              </a:defRPr>
+            </a:pPr>
+            <a:r>
+              <a:rPr sz="1400">
+                <a:solidFill>
+                  <a:srgbClr val="222222"/>
+                </a:solidFill>
+                <a:latin typeface="Consolas"/>
+              </a:rPr>
+              <a:t>  drive(leftSpeed, rightSpeed);</a:t>
+            </a:r>
+          </a:p>
+          <a:p>
+            <a:pPr algn="l">
+              <a:lnSpc>
+                <a:spcPct val="100000"/>
+              </a:lnSpc>
+              <a:spcAft>
+                <a:spcPts val="0"/>
+              </a:spcAft>
+              <a:defRPr sz="1400">
+                <a:latin typeface="Consolas"/>
+              </a:defRPr>
+            </a:pPr>
+            <a:r>
+              <a:rPr sz="1400">
+                <a:solidFill>
+                  <a:srgbClr val="222222"/>
+                </a:solidFill>
+                <a:latin typeface="Consolas"/>
+              </a:rPr>
+              <a:t>}</a:t>
             </a:r>
           </a:p>
         </p:txBody>
@@ -15510,8 +15789,8 @@
         </p:nvSpPr>
         <p:spPr>
           <a:xfrm>
-            <a:off x="502920" y="3520440"/>
-            <a:ext cx="2686735" cy="310896"/>
+            <a:off x="7870048" y="1517904"/>
+            <a:ext cx="3818727" cy="4745736"/>
           </a:xfrm>
           <a:prstGeom prst="rect">
             <a:avLst/>
@@ -15524,382 +15803,103 @@
           </a:bodyPr>
           <a:lstStyle/>
           <a:p>
-            <a:pPr algn="ctr">
-              <a:lnSpc>
-                <a:spcPct val="100000"/>
-              </a:lnSpc>
-              <a:spcAft>
-                <a:spcPts val="200"/>
-              </a:spcAft>
-              <a:defRPr sz="1100" b="1">
-                <a:solidFill>
-                  <a:srgbClr val="0E7C86"/>
-                </a:solidFill>
-                <a:latin typeface="Calibri"/>
-              </a:defRPr>
-            </a:pPr>
-            <a:r>
-              <a:rPr sz="1100" b="1">
-                <a:solidFill>
-                  <a:srgbClr val="0E7C86"/>
-                </a:solidFill>
-                <a:latin typeface="Calibri"/>
-              </a:rPr>
-              <a:t>done</a:t>
-            </a:r>
-          </a:p>
-        </p:txBody>
-      </p:sp>
-      <p:sp>
-        <p:nvSpPr>
-          <p:cNvPr id="9" name="Rounded Rectangle 8"/>
-          <p:cNvSpPr/>
-          <p:nvPr/>
-        </p:nvSpPr>
-        <p:spPr>
-          <a:xfrm>
-            <a:off x="3335959" y="3886200"/>
-            <a:ext cx="2686735" cy="1325880"/>
-          </a:xfrm>
-          <a:prstGeom prst="roundRect">
-            <a:avLst>
-              <a:gd name="adj" fmla="val 8000"/>
-            </a:avLst>
-          </a:prstGeom>
-          <a:solidFill>
-            <a:srgbClr val="EEF3F8"/>
-          </a:solidFill>
-          <a:ln w="12700">
-            <a:solidFill>
-              <a:srgbClr val="0E7C86"/>
-            </a:solidFill>
-          </a:ln>
-          <a:effectLst/>
-        </p:spPr>
-        <p:style>
-          <a:lnRef idx="1">
-            <a:schemeClr val="accent1"/>
-          </a:lnRef>
-          <a:fillRef idx="3">
-            <a:schemeClr val="accent1"/>
-          </a:fillRef>
-          <a:effectRef idx="2">
-            <a:schemeClr val="accent1"/>
-          </a:effectRef>
-          <a:fontRef idx="minor">
-            <a:schemeClr val="lt1"/>
-          </a:fontRef>
-        </p:style>
-        <p:txBody>
-          <a:bodyPr rtlCol="0" anchor="ctr" wrap="square" lIns="73152" rIns="73152"/>
-          <a:lstStyle/>
-          <a:p>
-            <a:pPr algn="ctr">
-              <a:lnSpc>
-                <a:spcPct val="100000"/>
-              </a:lnSpc>
-              <a:spcAft>
-                <a:spcPts val="0"/>
-              </a:spcAft>
-              <a:defRPr sz="1700" b="0">
-                <a:solidFill>
-                  <a:srgbClr val="1F3A5F"/>
-                </a:solidFill>
-                <a:latin typeface="Calibri"/>
-              </a:defRPr>
-            </a:pPr>
-            <a:r>
-              <a:rPr sz="1700" b="0">
-                <a:solidFill>
-                  <a:srgbClr val="1F3A5F"/>
-                </a:solidFill>
-                <a:latin typeface="Calibri"/>
-              </a:rPr>
-              <a:t>What the pad sends</a:t>
-            </a:r>
-          </a:p>
-        </p:txBody>
-      </p:sp>
-      <p:sp>
-        <p:nvSpPr>
-          <p:cNvPr id="10" name="TextBox 9"/>
-          <p:cNvSpPr txBox="1"/>
-          <p:nvPr/>
-        </p:nvSpPr>
-        <p:spPr>
-          <a:xfrm>
-            <a:off x="3335959" y="3520440"/>
-            <a:ext cx="2686735" cy="310896"/>
-          </a:xfrm>
-          <a:prstGeom prst="rect">
-            <a:avLst/>
-          </a:prstGeom>
-          <a:noFill/>
-        </p:spPr>
-        <p:txBody>
-          <a:bodyPr wrap="square" lIns="0" tIns="0" rIns="0" bIns="0">
-            <a:spAutoFit/>
-          </a:bodyPr>
-          <a:lstStyle/>
-          <a:p>
-            <a:pPr algn="ctr">
-              <a:lnSpc>
-                <a:spcPct val="100000"/>
-              </a:lnSpc>
-              <a:spcAft>
-                <a:spcPts val="200"/>
-              </a:spcAft>
-              <a:defRPr sz="1100" b="1">
-                <a:solidFill>
-                  <a:srgbClr val="0E7C86"/>
-                </a:solidFill>
-                <a:latin typeface="Calibri"/>
-              </a:defRPr>
-            </a:pPr>
-            <a:r>
-              <a:rPr sz="1100" b="1">
-                <a:solidFill>
-                  <a:srgbClr val="0E7C86"/>
-                </a:solidFill>
-                <a:latin typeface="Calibri"/>
-              </a:rPr>
-              <a:t>done</a:t>
-            </a:r>
-          </a:p>
-        </p:txBody>
-      </p:sp>
-      <p:sp>
-        <p:nvSpPr>
-          <p:cNvPr id="11" name="Rounded Rectangle 10"/>
-          <p:cNvSpPr/>
-          <p:nvPr/>
-        </p:nvSpPr>
-        <p:spPr>
-          <a:xfrm>
-            <a:off x="6168998" y="3886200"/>
-            <a:ext cx="2686735" cy="1325880"/>
-          </a:xfrm>
-          <a:prstGeom prst="roundRect">
-            <a:avLst>
-              <a:gd name="adj" fmla="val 8000"/>
-            </a:avLst>
-          </a:prstGeom>
-          <a:solidFill>
-            <a:srgbClr val="EEF3F8"/>
-          </a:solidFill>
-          <a:ln w="12700">
-            <a:solidFill>
-              <a:srgbClr val="0E7C86"/>
-            </a:solidFill>
-          </a:ln>
-          <a:effectLst/>
-        </p:spPr>
-        <p:style>
-          <a:lnRef idx="1">
-            <a:schemeClr val="accent1"/>
-          </a:lnRef>
-          <a:fillRef idx="3">
-            <a:schemeClr val="accent1"/>
-          </a:fillRef>
-          <a:effectRef idx="2">
-            <a:schemeClr val="accent1"/>
-          </a:effectRef>
-          <a:fontRef idx="minor">
-            <a:schemeClr val="lt1"/>
-          </a:fontRef>
-        </p:style>
-        <p:txBody>
-          <a:bodyPr rtlCol="0" anchor="ctr" wrap="square" lIns="73152" rIns="73152"/>
-          <a:lstStyle/>
-          <a:p>
-            <a:pPr algn="ctr">
-              <a:lnSpc>
-                <a:spcPct val="100000"/>
-              </a:lnSpc>
-              <a:spcAft>
-                <a:spcPts val="0"/>
-              </a:spcAft>
-              <a:defRPr sz="1700" b="0">
-                <a:solidFill>
-                  <a:srgbClr val="1F3A5F"/>
-                </a:solidFill>
-                <a:latin typeface="Calibri"/>
-              </a:defRPr>
-            </a:pPr>
-            <a:r>
-              <a:rPr sz="1700" b="0">
-                <a:solidFill>
-                  <a:srgbClr val="1F3A5F"/>
-                </a:solidFill>
-                <a:latin typeface="Calibri"/>
-              </a:rPr>
-              <a:t>Deadzone and map</a:t>
-            </a:r>
-          </a:p>
-        </p:txBody>
-      </p:sp>
-      <p:sp>
-        <p:nvSpPr>
-          <p:cNvPr id="12" name="TextBox 11"/>
-          <p:cNvSpPr txBox="1"/>
-          <p:nvPr/>
-        </p:nvSpPr>
-        <p:spPr>
-          <a:xfrm>
-            <a:off x="6168998" y="3520440"/>
-            <a:ext cx="2686735" cy="310896"/>
-          </a:xfrm>
-          <a:prstGeom prst="rect">
-            <a:avLst/>
-          </a:prstGeom>
-          <a:noFill/>
-        </p:spPr>
-        <p:txBody>
-          <a:bodyPr wrap="square" lIns="0" tIns="0" rIns="0" bIns="0">
-            <a:spAutoFit/>
-          </a:bodyPr>
-          <a:lstStyle/>
-          <a:p>
-            <a:pPr algn="ctr">
-              <a:lnSpc>
-                <a:spcPct val="100000"/>
-              </a:lnSpc>
-              <a:spcAft>
-                <a:spcPts val="200"/>
-              </a:spcAft>
-              <a:defRPr sz="1100" b="1">
-                <a:solidFill>
-                  <a:srgbClr val="0E7C86"/>
-                </a:solidFill>
-                <a:latin typeface="Calibri"/>
-              </a:defRPr>
-            </a:pPr>
-            <a:r>
-              <a:rPr sz="1100" b="1">
-                <a:solidFill>
-                  <a:srgbClr val="0E7C86"/>
-                </a:solidFill>
-                <a:latin typeface="Calibri"/>
-              </a:rPr>
-              <a:t>done</a:t>
-            </a:r>
-          </a:p>
-        </p:txBody>
-      </p:sp>
-      <p:sp>
-        <p:nvSpPr>
-          <p:cNvPr id="13" name="Rounded Rectangle 12"/>
-          <p:cNvSpPr/>
-          <p:nvPr/>
-        </p:nvSpPr>
-        <p:spPr>
-          <a:xfrm>
-            <a:off x="9002037" y="3886200"/>
-            <a:ext cx="2686735" cy="1325880"/>
-          </a:xfrm>
-          <a:prstGeom prst="roundRect">
-            <a:avLst>
-              <a:gd name="adj" fmla="val 8000"/>
-            </a:avLst>
-          </a:prstGeom>
-          <a:solidFill>
-            <a:srgbClr val="D6ECEE"/>
-          </a:solidFill>
-          <a:ln w="25400">
-            <a:solidFill>
-              <a:srgbClr val="0E7C86"/>
-            </a:solidFill>
-          </a:ln>
-          <a:effectLst/>
-        </p:spPr>
-        <p:style>
-          <a:lnRef idx="1">
-            <a:schemeClr val="accent1"/>
-          </a:lnRef>
-          <a:fillRef idx="3">
-            <a:schemeClr val="accent1"/>
-          </a:fillRef>
-          <a:effectRef idx="2">
-            <a:schemeClr val="accent1"/>
-          </a:effectRef>
-          <a:fontRef idx="minor">
-            <a:schemeClr val="lt1"/>
-          </a:fontRef>
-        </p:style>
-        <p:txBody>
-          <a:bodyPr rtlCol="0" anchor="ctr" wrap="square" lIns="73152" rIns="73152"/>
-          <a:lstStyle/>
-          <a:p>
-            <a:pPr algn="ctr">
-              <a:lnSpc>
-                <a:spcPct val="100000"/>
-              </a:lnSpc>
-              <a:spcAft>
-                <a:spcPts val="0"/>
-              </a:spcAft>
-              <a:defRPr sz="1700" b="1">
-                <a:solidFill>
-                  <a:srgbClr val="1F3A5F"/>
-                </a:solidFill>
-                <a:latin typeface="Calibri"/>
-              </a:defRPr>
-            </a:pPr>
-            <a:r>
-              <a:rPr sz="1700" b="1">
-                <a:solidFill>
-                  <a:srgbClr val="1F3A5F"/>
-                </a:solidFill>
-                <a:latin typeface="Calibri"/>
-              </a:rPr>
-              <a:t>Driving it</a:t>
-            </a:r>
-          </a:p>
-        </p:txBody>
-      </p:sp>
-      <p:sp>
-        <p:nvSpPr>
-          <p:cNvPr id="14" name="TextBox 13"/>
-          <p:cNvSpPr txBox="1"/>
-          <p:nvPr/>
-        </p:nvSpPr>
-        <p:spPr>
-          <a:xfrm>
-            <a:off x="9002037" y="3520440"/>
-            <a:ext cx="2686735" cy="310896"/>
-          </a:xfrm>
-          <a:prstGeom prst="rect">
-            <a:avLst/>
-          </a:prstGeom>
-          <a:noFill/>
-        </p:spPr>
-        <p:txBody>
-          <a:bodyPr wrap="square" lIns="0" tIns="0" rIns="0" bIns="0">
-            <a:spAutoFit/>
-          </a:bodyPr>
-          <a:lstStyle/>
-          <a:p>
-            <a:pPr algn="ctr">
-              <a:lnSpc>
-                <a:spcPct val="100000"/>
-              </a:lnSpc>
-              <a:spcAft>
-                <a:spcPts val="200"/>
-              </a:spcAft>
-              <a:defRPr sz="1100" b="1">
-                <a:solidFill>
-                  <a:srgbClr val="0E7C86"/>
-                </a:solidFill>
-                <a:latin typeface="Calibri"/>
-              </a:defRPr>
-            </a:pPr>
-            <a:r>
-              <a:rPr sz="1100" b="1">
-                <a:solidFill>
-                  <a:srgbClr val="0E7C86"/>
-                </a:solidFill>
-                <a:latin typeface="Calibri"/>
-              </a:rPr>
-              <a:t>NOW</a:t>
+            <a:pPr algn="l">
+              <a:lnSpc>
+                <a:spcPct val="100000"/>
+              </a:lnSpc>
+              <a:spcAft>
+                <a:spcPts val="700"/>
+              </a:spcAft>
+              <a:defRPr sz="2100" b="0">
+                <a:solidFill>
+                  <a:srgbClr val="222222"/>
+                </a:solidFill>
+                <a:latin typeface="Calibri"/>
+              </a:defRPr>
+            </a:pPr>
+            <a:r>
+              <a:rPr sz="2100" b="0">
+                <a:solidFill>
+                  <a:srgbClr val="222222"/>
+                </a:solidFill>
+                <a:latin typeface="Calibri"/>
+              </a:rPr>
+              <a:t>Read the first four lines again. If there is no controller, the motors stop and we go round again. That is the FAILSAFE, and it is the most important part of the program.</a:t>
+            </a:r>
+          </a:p>
+          <a:p>
+            <a:pPr algn="l">
+              <a:lnSpc>
+                <a:spcPct val="100000"/>
+              </a:lnSpc>
+              <a:spcAft>
+                <a:spcPts val="700"/>
+              </a:spcAft>
+              <a:defRPr sz="2100" b="0">
+                <a:solidFill>
+                  <a:srgbClr val="222222"/>
+                </a:solidFill>
+                <a:latin typeface="Calibri"/>
+              </a:defRPr>
+            </a:pPr>
+            <a:r>
+              <a:rPr sz="2100" b="0">
+                <a:solidFill>
+                  <a:srgbClr val="222222"/>
+                </a:solidFill>
+                <a:latin typeface="Calibri"/>
+              </a:rPr>
+              <a:t>Note the minus sign on leftStickY. Up is negative.</a:t>
+            </a:r>
+          </a:p>
+          <a:p>
+            <a:pPr algn="l">
+              <a:lnSpc>
+                <a:spcPct val="100000"/>
+              </a:lnSpc>
+              <a:spcAft>
+                <a:spcPts val="700"/>
+              </a:spcAft>
+              <a:defRPr sz="2100" b="0">
+                <a:solidFill>
+                  <a:srgbClr val="222222"/>
+                </a:solidFill>
+                <a:latin typeface="Calibri"/>
+              </a:defRPr>
+            </a:pPr>
+            <a:r>
+              <a:rPr sz="2100" b="0">
+                <a:solidFill>
+                  <a:srgbClr val="222222"/>
+                </a:solidFill>
+                <a:latin typeface="Calibri"/>
+              </a:rPr>
+              <a:t>Driving gets MOTOR_MAX; steering gets turnMax.</a:t>
+            </a:r>
+          </a:p>
+          <a:p>
+            <a:pPr algn="l">
+              <a:lnSpc>
+                <a:spcPct val="100000"/>
+              </a:lnSpc>
+              <a:spcAft>
+                <a:spcPts val="700"/>
+              </a:spcAft>
+              <a:defRPr sz="2100" b="0">
+                <a:solidFill>
+                  <a:srgbClr val="222222"/>
+                </a:solidFill>
+                <a:latin typeface="Calibri"/>
+              </a:defRPr>
+            </a:pPr>
+            <a:r>
+              <a:rPr sz="2100" b="0">
+                <a:solidFill>
+                  <a:srgbClr val="222222"/>
+                </a:solidFill>
+                <a:latin typeface="Calibri"/>
+              </a:rPr>
+              <a:t>Everything else you have already seen.</a:t>
             </a:r>
           </a:p>
         </p:txBody>

--- a/ground-vehicle/docs/courses/beginner-ps3/l3_controller_programming.pptx
+++ b/ground-vehicle/docs/courses/beginner-ps3/l3_controller_programming.pptx
@@ -6513,7 +6513,7 @@
                 </a:solidFill>
                 <a:latin typeface="Calibri"/>
               </a:rPr>
-              <a:t>9</a:t>
+              <a:t>10</a:t>
             </a:r>
           </a:p>
         </p:txBody>
@@ -7111,7 +7111,7 @@
                 </a:solidFill>
                 <a:latin typeface="Calibri"/>
               </a:rPr>
-              <a:t>10</a:t>
+              <a:t>11</a:t>
             </a:r>
           </a:p>
         </p:txBody>
@@ -8619,7 +8619,7 @@
                 </a:solidFill>
                 <a:latin typeface="Calibri"/>
               </a:rPr>
-              <a:t>11</a:t>
+              <a:t>12</a:t>
             </a:r>
           </a:p>
         </p:txBody>
@@ -9339,7 +9339,7 @@
                 </a:solidFill>
                 <a:latin typeface="Calibri"/>
               </a:rPr>
-              <a:t>12</a:t>
+              <a:t>13</a:t>
             </a:r>
           </a:p>
         </p:txBody>
@@ -9941,7 +9941,7 @@
                 </a:solidFill>
                 <a:latin typeface="Calibri"/>
               </a:rPr>
-              <a:t>13</a:t>
+              <a:t>14</a:t>
             </a:r>
           </a:p>
         </p:txBody>
@@ -10709,7 +10709,7 @@
                 </a:solidFill>
                 <a:latin typeface="Calibri"/>
               </a:rPr>
-              <a:t>14</a:t>
+              <a:t>15</a:t>
             </a:r>
           </a:p>
         </p:txBody>
@@ -11182,7 +11182,7 @@
                 </a:solidFill>
                 <a:latin typeface="Calibri"/>
               </a:rPr>
-              <a:t>15</a:t>
+              <a:t>16</a:t>
             </a:r>
           </a:p>
         </p:txBody>
@@ -12324,7 +12324,7 @@
                 </a:solidFill>
                 <a:latin typeface="Calibri"/>
               </a:rPr>
-              <a:t>16</a:t>
+              <a:t>17</a:t>
             </a:r>
           </a:p>
         </p:txBody>
@@ -13027,7 +13027,7 @@
                 </a:solidFill>
                 <a:latin typeface="Calibri"/>
               </a:rPr>
-              <a:t>17</a:t>
+              <a:t>18</a:t>
             </a:r>
           </a:p>
         </p:txBody>
@@ -13579,7 +13579,7 @@
                 </a:solidFill>
                 <a:latin typeface="Calibri"/>
               </a:rPr>
-              <a:t>18</a:t>
+              <a:t>19</a:t>
             </a:r>
           </a:p>
         </p:txBody>
@@ -14395,7 +14395,7 @@
                 </a:solidFill>
                 <a:latin typeface="Calibri"/>
               </a:rPr>
-              <a:t>1</a:t>
+              <a:t>2</a:t>
             </a:r>
           </a:p>
         </p:txBody>
@@ -14820,7 +14820,7 @@
                 </a:solidFill>
                 <a:latin typeface="Calibri"/>
               </a:rPr>
-              <a:t>19</a:t>
+              <a:t>20</a:t>
             </a:r>
           </a:p>
         </p:txBody>
@@ -15309,7 +15309,7 @@
                 </a:solidFill>
                 <a:latin typeface="Calibri"/>
               </a:rPr>
-              <a:t>20</a:t>
+              <a:t>21</a:t>
             </a:r>
           </a:p>
         </p:txBody>
@@ -16103,7 +16103,7 @@
                 </a:solidFill>
                 <a:latin typeface="Calibri"/>
               </a:rPr>
-              <a:t>21</a:t>
+              <a:t>22</a:t>
             </a:r>
           </a:p>
         </p:txBody>
@@ -16811,7 +16811,7 @@
                 </a:solidFill>
                 <a:latin typeface="Calibri"/>
               </a:rPr>
-              <a:t>22</a:t>
+              <a:t>23</a:t>
             </a:r>
           </a:p>
         </p:txBody>
@@ -17325,7 +17325,7 @@
                 </a:solidFill>
                 <a:latin typeface="Calibri"/>
               </a:rPr>
-              <a:t>23</a:t>
+              <a:t>24</a:t>
             </a:r>
           </a:p>
         </p:txBody>
@@ -18032,7 +18032,7 @@
                 </a:solidFill>
                 <a:latin typeface="Calibri"/>
               </a:rPr>
-              <a:t>24</a:t>
+              <a:t>25</a:t>
             </a:r>
           </a:p>
         </p:txBody>
@@ -18482,7 +18482,7 @@
                 </a:solidFill>
                 <a:latin typeface="Calibri"/>
               </a:rPr>
-              <a:t>2</a:t>
+              <a:t>3</a:t>
             </a:r>
           </a:p>
         </p:txBody>
@@ -18891,7 +18891,7 @@
                 </a:solidFill>
                 <a:latin typeface="Calibri"/>
               </a:rPr>
-              <a:t>3</a:t>
+              <a:t>4</a:t>
             </a:r>
           </a:p>
         </p:txBody>
@@ -19627,7 +19627,7 @@
                 </a:solidFill>
                 <a:latin typeface="Calibri"/>
               </a:rPr>
-              <a:t>4</a:t>
+              <a:t>5</a:t>
             </a:r>
           </a:p>
         </p:txBody>
@@ -20132,7 +20132,7 @@
                 </a:solidFill>
                 <a:latin typeface="Calibri"/>
               </a:rPr>
-              <a:t>5</a:t>
+              <a:t>6</a:t>
             </a:r>
           </a:p>
         </p:txBody>
@@ -20607,7 +20607,7 @@
                 </a:solidFill>
                 <a:latin typeface="Calibri"/>
               </a:rPr>
-              <a:t>6</a:t>
+              <a:t>7</a:t>
             </a:r>
           </a:p>
         </p:txBody>
@@ -20835,7 +20835,7 @@
                 </a:solidFill>
                 <a:latin typeface="Calibri"/>
               </a:rPr>
-              <a:t>7</a:t>
+              <a:t>8</a:t>
             </a:r>
           </a:p>
         </p:txBody>
@@ -22385,7 +22385,7 @@
                 </a:solidFill>
                 <a:latin typeface="Calibri"/>
               </a:rPr>
-              <a:t>8</a:t>
+              <a:t>9</a:t>
             </a:r>
           </a:p>
         </p:txBody>

--- a/ground-vehicle/docs/courses/beginner-ps3/l3_controller_programming.pptx
+++ b/ground-vehicle/docs/courses/beginner-ps3/l3_controller_programming.pptx
@@ -1160,7 +1160,7 @@
               <a:rPr sz="1200">
                 <a:latin typeface="Calibri"/>
               </a:rPr>
-              <a:t>Ask why the line does not start at zero. The answer - a stick at rest is never exactly centerd - is worth getting from the room rather than telling them.</a:t>
+              <a:t>Ask why the line does not start at zero. The answer - a stick at rest is never exactly centered - is worth getting from the room rather than telling them.</a:t>
             </a:r>
           </a:p>
           <a:p>
@@ -6901,7 +6901,7 @@
               <a:t>KEY POINT   </a:t>
             </a:r>
             <a:r>
-              <a:rPr sz="1500">
+              <a:rPr sz="1800">
                 <a:solidFill>
                   <a:srgbClr val="222222"/>
                 </a:solidFill>
@@ -8499,7 +8499,7 @@
               <a:t>KEY POINT   </a:t>
             </a:r>
             <a:r>
-              <a:rPr sz="1500">
+              <a:rPr sz="1800">
                 <a:solidFill>
                   <a:srgbClr val="222222"/>
                 </a:solidFill>
@@ -16601,7 +16601,7 @@
               <a:t>SAFETY   </a:t>
             </a:r>
             <a:r>
-              <a:rPr sz="1500">
+              <a:rPr sz="1800">
                 <a:solidFill>
                   <a:srgbClr val="222222"/>
                 </a:solidFill>
@@ -17115,7 +17115,7 @@
               <a:t>SAFETY   </a:t>
             </a:r>
             <a:r>
-              <a:rPr sz="1500">
+              <a:rPr sz="1800">
                 <a:solidFill>
                   <a:srgbClr val="222222"/>
                 </a:solidFill>
@@ -17706,7 +17706,7 @@
                           </a:solidFill>
                           <a:latin typeface="Calibri"/>
                         </a:rPr>
-                        <a:t>It creeps with the stick centerd</a:t>
+                        <a:t>It creeps with the stick centered</a:t>
                       </a:r>
                     </a:p>
                   </a:txBody>
@@ -18681,7 +18681,7 @@
               <a:t>KEY POINT   </a:t>
             </a:r>
             <a:r>
-              <a:rPr sz="1500">
+              <a:rPr sz="1800">
                 <a:solidFill>
                   <a:srgbClr val="222222"/>
                 </a:solidFill>
@@ -19922,7 +19922,7 @@
               <a:t>KEY POINT   </a:t>
             </a:r>
             <a:r>
-              <a:rPr sz="1500">
+              <a:rPr sz="1800">
                 <a:solidFill>
                   <a:srgbClr val="222222"/>
                 </a:solidFill>
@@ -20397,7 +20397,7 @@
               <a:t>WATCH OUT   </a:t>
             </a:r>
             <a:r>
-              <a:rPr sz="1500">
+              <a:rPr sz="1800">
                 <a:solidFill>
                   <a:srgbClr val="222222"/>
                 </a:solidFill>
@@ -22128,8 +22128,8 @@
         </p:nvSpPr>
         <p:spPr>
           <a:xfrm>
-            <a:off x="502920" y="5303520"/>
-            <a:ext cx="11185855" cy="960120"/>
+            <a:off x="502920" y="5198364"/>
+            <a:ext cx="11185855" cy="1065276"/>
           </a:xfrm>
           <a:prstGeom prst="roundRect">
             <a:avLst>
@@ -22175,7 +22175,7 @@
               <a:t>KEY POINT   </a:t>
             </a:r>
             <a:r>
-              <a:rPr sz="1500">
+              <a:rPr sz="1800">
                 <a:solidFill>
                   <a:srgbClr val="222222"/>
                 </a:solidFill>
@@ -22862,7 +22862,7 @@
               <a:t>WATCH OUT   </a:t>
             </a:r>
             <a:r>
-              <a:rPr sz="1500">
+              <a:rPr sz="1800">
                 <a:solidFill>
                   <a:srgbClr val="222222"/>
                 </a:solidFill>

--- a/ground-vehicle/docs/courses/beginner-ps3/l3_controller_programming.pptx
+++ b/ground-vehicle/docs/courses/beginner-ps3/l3_controller_programming.pptx
@@ -4,34 +4,37 @@
   <p:sldMasterIdLst>
     <p:sldMasterId id="2147483648" r:id="rId1"/>
   </p:sldMasterIdLst>
+  <p:notesMasterIdLst>
+    <p:notesMasterId r:id="rId27"/>
+  </p:notesMasterIdLst>
   <p:sldIdLst>
-    <p:sldId id="256" r:id="rId7"/>
-    <p:sldId id="257" r:id="rId9"/>
-    <p:sldId id="258" r:id="rId10"/>
-    <p:sldId id="259" r:id="rId11"/>
-    <p:sldId id="260" r:id="rId12"/>
-    <p:sldId id="261" r:id="rId13"/>
-    <p:sldId id="262" r:id="rId14"/>
-    <p:sldId id="263" r:id="rId15"/>
-    <p:sldId id="264" r:id="rId16"/>
-    <p:sldId id="265" r:id="rId17"/>
-    <p:sldId id="266" r:id="rId18"/>
-    <p:sldId id="267" r:id="rId19"/>
-    <p:sldId id="268" r:id="rId20"/>
-    <p:sldId id="269" r:id="rId21"/>
-    <p:sldId id="270" r:id="rId22"/>
-    <p:sldId id="271" r:id="rId23"/>
-    <p:sldId id="272" r:id="rId24"/>
-    <p:sldId id="273" r:id="rId25"/>
-    <p:sldId id="274" r:id="rId26"/>
-    <p:sldId id="275" r:id="rId27"/>
-    <p:sldId id="276" r:id="rId28"/>
-    <p:sldId id="277" r:id="rId29"/>
-    <p:sldId id="278" r:id="rId30"/>
-    <p:sldId id="279" r:id="rId31"/>
-    <p:sldId id="280" r:id="rId32"/>
+    <p:sldId id="256" r:id="rId2"/>
+    <p:sldId id="257" r:id="rId3"/>
+    <p:sldId id="258" r:id="rId4"/>
+    <p:sldId id="259" r:id="rId5"/>
+    <p:sldId id="260" r:id="rId6"/>
+    <p:sldId id="261" r:id="rId7"/>
+    <p:sldId id="262" r:id="rId8"/>
+    <p:sldId id="263" r:id="rId9"/>
+    <p:sldId id="264" r:id="rId10"/>
+    <p:sldId id="265" r:id="rId11"/>
+    <p:sldId id="266" r:id="rId12"/>
+    <p:sldId id="267" r:id="rId13"/>
+    <p:sldId id="268" r:id="rId14"/>
+    <p:sldId id="269" r:id="rId15"/>
+    <p:sldId id="270" r:id="rId16"/>
+    <p:sldId id="271" r:id="rId17"/>
+    <p:sldId id="272" r:id="rId18"/>
+    <p:sldId id="273" r:id="rId19"/>
+    <p:sldId id="274" r:id="rId20"/>
+    <p:sldId id="275" r:id="rId21"/>
+    <p:sldId id="276" r:id="rId22"/>
+    <p:sldId id="277" r:id="rId23"/>
+    <p:sldId id="278" r:id="rId24"/>
+    <p:sldId id="279" r:id="rId25"/>
+    <p:sldId id="280" r:id="rId26"/>
   </p:sldIdLst>
-  <p:sldSz cx="12191695" cy="6858000" type="screen4x3"/>
+  <p:sldSz cx="12192000" cy="6858000"/>
   <p:notesSz cx="6858000" cy="9144000"/>
   <p:defaultTextStyle>
     <a:defPPr>
@@ -128,11 +131,48 @@
       </a:defRPr>
     </a:lvl9pPr>
   </p:defaultTextStyle>
+  <p:extLst>
+    <p:ext uri="{EFAFB233-063F-42B5-8137-9DF3F51BA10A}">
+      <p15:sldGuideLst xmlns:p15="http://schemas.microsoft.com/office/powerpoint/2012/main">
+        <p15:guide id="1" orient="horz" pos="2160">
+          <p15:clr>
+            <a:srgbClr val="A4A3A4"/>
+          </p15:clr>
+        </p15:guide>
+        <p15:guide id="2" pos="2880">
+          <p15:clr>
+            <a:srgbClr val="A4A3A4"/>
+          </p15:clr>
+        </p15:guide>
+      </p15:sldGuideLst>
+    </p:ext>
+  </p:extLst>
 </p:presentation>
 </file>
 
+<file path=ppt/changesInfos/changesInfo1.xml><?xml version="1.0" encoding="utf-8"?>
+<pc:chgInfo xmlns:a="http://schemas.openxmlformats.org/drawingml/2006/main" xmlns:r="http://schemas.openxmlformats.org/officeDocument/2006/relationships" xmlns:ac="http://schemas.microsoft.com/office/drawing/2013/main/command" xmlns:pc="http://schemas.microsoft.com/office/powerpoint/2013/main/command">
+  <pc:docChgLst>
+    <pc:chgData name="Kevin Bowen" userId="ee6702fae12807e4" providerId="LiveId" clId="{5CB6C98B-5151-4E5D-BF39-3ED613ABF9A3}"/>
+    <pc:docChg chg="custSel modSld">
+      <pc:chgData name="Kevin Bowen" userId="ee6702fae12807e4" providerId="LiveId" clId="{5CB6C98B-5151-4E5D-BF39-3ED613ABF9A3}" dt="2026-09-07T17:12:38.786" v="66" actId="20577"/>
+      <pc:docMkLst>
+        <pc:docMk/>
+      </pc:docMkLst>
+      <pc:sldChg chg="modNotesTx">
+        <pc:chgData name="Kevin Bowen" userId="ee6702fae12807e4" providerId="LiveId" clId="{5CB6C98B-5151-4E5D-BF39-3ED613ABF9A3}" dt="2026-09-07T17:12:38.786" v="66" actId="20577"/>
+        <pc:sldMkLst>
+          <pc:docMk/>
+          <pc:sldMk cId="0" sldId="280"/>
+        </pc:sldMkLst>
+      </pc:sldChg>
+    </pc:docChg>
+  </pc:docChgLst>
+</pc:chgInfo>
+</file>
+
 <file path=ppt/notesMasters/notesMaster1.xml><?xml version="1.0" encoding="utf-8"?>
-<p:notesMaster xmlns:a="http://schemas.openxmlformats.org/drawingml/2006/main" xmlns:p="http://schemas.openxmlformats.org/presentationml/2006/main" xmlns:r="http://schemas.openxmlformats.org/officeDocument/2006/relationships">
+<p:notesMaster xmlns:a="http://schemas.openxmlformats.org/drawingml/2006/main" xmlns:r="http://schemas.openxmlformats.org/officeDocument/2006/relationships" xmlns:p="http://schemas.openxmlformats.org/presentationml/2006/main">
   <p:cSld>
     <p:bg>
       <p:bgRef idx="1001">
@@ -153,241 +193,16 @@
           <a:chExt cx="0" cy="0"/>
         </a:xfrm>
       </p:grpSpPr>
-      <p:sp>
-        <p:nvSpPr>
-          <p:cNvPr id="2" name="Header Placeholder 1"/>
-          <p:cNvSpPr>
-            <a:spLocks noGrp="1"/>
-          </p:cNvSpPr>
-          <p:nvPr>
-            <p:ph type="hdr" sz="quarter"/>
-          </p:nvPr>
-        </p:nvSpPr>
-        <p:spPr>
-          <a:xfrm>
-            <a:off x="0" y="0"/>
-            <a:ext cx="2971800" cy="457200"/>
-          </a:xfrm>
-          <a:prstGeom prst="rect">
-            <a:avLst/>
-          </a:prstGeom>
-        </p:spPr>
-        <p:txBody>
-          <a:bodyPr vert="horz" lIns="91440" tIns="45720" rIns="91440" bIns="45720" rtlCol="0"/>
-          <a:lstStyle>
-            <a:lvl1pPr algn="l">
-              <a:defRPr sz="1200"/>
-            </a:lvl1pPr>
-          </a:lstStyle>
-          <a:p>
-            <a:endParaRPr lang="en-US"/>
-          </a:p>
-        </p:txBody>
-      </p:sp>
-      <p:sp>
-        <p:nvSpPr>
-          <p:cNvPr id="3" name="Date Placeholder 2"/>
-          <p:cNvSpPr>
-            <a:spLocks noGrp="1"/>
-          </p:cNvSpPr>
-          <p:nvPr>
-            <p:ph type="dt" idx="1"/>
-          </p:nvPr>
-        </p:nvSpPr>
-        <p:spPr>
-          <a:xfrm>
-            <a:off x="3884613" y="0"/>
-            <a:ext cx="2971800" cy="457200"/>
-          </a:xfrm>
-          <a:prstGeom prst="rect">
-            <a:avLst/>
-          </a:prstGeom>
-        </p:spPr>
-        <p:txBody>
-          <a:bodyPr vert="horz" lIns="91440" tIns="45720" rIns="91440" bIns="45720" rtlCol="0"/>
-          <a:lstStyle>
-            <a:lvl1pPr algn="r">
-              <a:defRPr sz="1200"/>
-            </a:lvl1pPr>
-          </a:lstStyle>
-          <a:p>
-            <a:fld id="{0F89C1C7-3DCD-1040-A9CF-14679D8B5DDD}" type="datetimeFigureOut">
-              <a:rPr lang="en-US" smtClean="0"/>
-              <a:t>10/17/16</a:t>
-            </a:fld>
-            <a:endParaRPr lang="en-US"/>
-          </a:p>
-        </p:txBody>
-      </p:sp>
-      <p:sp>
-        <p:nvSpPr>
-          <p:cNvPr id="4" name="Slide Image Placeholder 3"/>
-          <p:cNvSpPr>
-            <a:spLocks noGrp="1" noRot="1" noChangeAspect="1"/>
-          </p:cNvSpPr>
-          <p:nvPr>
-            <p:ph type="sldImg" idx="2"/>
-          </p:nvPr>
-        </p:nvSpPr>
-        <p:spPr>
-          <a:xfrm>
-            <a:off x="1143000" y="685800"/>
-            <a:ext cx="4572000" cy="3429000"/>
-          </a:xfrm>
-          <a:prstGeom prst="rect">
-            <a:avLst/>
-          </a:prstGeom>
-          <a:noFill/>
-          <a:ln w="12700">
-            <a:solidFill>
-              <a:prstClr val="black"/>
-            </a:solidFill>
-          </a:ln>
-        </p:spPr>
-        <p:txBody>
-          <a:bodyPr vert="horz" lIns="91440" tIns="45720" rIns="91440" bIns="45720" rtlCol="0" anchor="ctr"/>
-          <a:lstStyle/>
-          <a:p>
-            <a:endParaRPr lang="en-US"/>
-          </a:p>
-        </p:txBody>
-      </p:sp>
-      <p:sp>
-        <p:nvSpPr>
-          <p:cNvPr id="5" name="Notes Placeholder 4"/>
-          <p:cNvSpPr>
-            <a:spLocks noGrp="1"/>
-          </p:cNvSpPr>
-          <p:nvPr>
-            <p:ph type="body" sz="quarter" idx="3"/>
-          </p:nvPr>
-        </p:nvSpPr>
-        <p:spPr>
-          <a:xfrm>
-            <a:off x="685800" y="4343400"/>
-            <a:ext cx="5486400" cy="4114800"/>
-          </a:xfrm>
-          <a:prstGeom prst="rect">
-            <a:avLst/>
-          </a:prstGeom>
-        </p:spPr>
-        <p:txBody>
-          <a:bodyPr vert="horz" lIns="91440" tIns="45720" rIns="91440" bIns="45720" rtlCol="0"/>
-          <a:lstStyle/>
-          <a:p>
-            <a:pPr lvl="0"/>
-            <a:r>
-              <a:rPr lang="en-US" smtClean="0"/>
-              <a:t>Click to edit Master text styles</a:t>
-            </a:r>
-          </a:p>
-          <a:p>
-            <a:pPr lvl="1"/>
-            <a:r>
-              <a:rPr lang="en-US" smtClean="0"/>
-              <a:t>Second level</a:t>
-            </a:r>
-          </a:p>
-          <a:p>
-            <a:pPr lvl="2"/>
-            <a:r>
-              <a:rPr lang="en-US" smtClean="0"/>
-              <a:t>Third level</a:t>
-            </a:r>
-          </a:p>
-          <a:p>
-            <a:pPr lvl="3"/>
-            <a:r>
-              <a:rPr lang="en-US" smtClean="0"/>
-              <a:t>Fourth level</a:t>
-            </a:r>
-          </a:p>
-          <a:p>
-            <a:pPr lvl="4"/>
-            <a:r>
-              <a:rPr lang="en-US" smtClean="0"/>
-              <a:t>Fifth level</a:t>
-            </a:r>
-            <a:endParaRPr lang="en-US"/>
-          </a:p>
-        </p:txBody>
-      </p:sp>
-      <p:sp>
-        <p:nvSpPr>
-          <p:cNvPr id="6" name="Footer Placeholder 5"/>
-          <p:cNvSpPr>
-            <a:spLocks noGrp="1"/>
-          </p:cNvSpPr>
-          <p:nvPr>
-            <p:ph type="ftr" sz="quarter" idx="4"/>
-          </p:nvPr>
-        </p:nvSpPr>
-        <p:spPr>
-          <a:xfrm>
-            <a:off x="0" y="8685213"/>
-            <a:ext cx="2971800" cy="457200"/>
-          </a:xfrm>
-          <a:prstGeom prst="rect">
-            <a:avLst/>
-          </a:prstGeom>
-        </p:spPr>
-        <p:txBody>
-          <a:bodyPr vert="horz" lIns="91440" tIns="45720" rIns="91440" bIns="45720" rtlCol="0" anchor="b"/>
-          <a:lstStyle>
-            <a:lvl1pPr algn="l">
-              <a:defRPr sz="1200"/>
-            </a:lvl1pPr>
-          </a:lstStyle>
-          <a:p>
-            <a:endParaRPr lang="en-US"/>
-          </a:p>
-        </p:txBody>
-      </p:sp>
-      <p:sp>
-        <p:nvSpPr>
-          <p:cNvPr id="7" name="Slide Number Placeholder 6"/>
-          <p:cNvSpPr>
-            <a:spLocks noGrp="1"/>
-          </p:cNvSpPr>
-          <p:nvPr>
-            <p:ph type="sldNum" sz="quarter" idx="5"/>
-          </p:nvPr>
-        </p:nvSpPr>
-        <p:spPr>
-          <a:xfrm>
-            <a:off x="3884613" y="8685213"/>
-            <a:ext cx="2971800" cy="457200"/>
-          </a:xfrm>
-          <a:prstGeom prst="rect">
-            <a:avLst/>
-          </a:prstGeom>
-        </p:spPr>
-        <p:txBody>
-          <a:bodyPr vert="horz" lIns="91440" tIns="45720" rIns="91440" bIns="45720" rtlCol="0" anchor="b"/>
-          <a:lstStyle>
-            <a:lvl1pPr algn="r">
-              <a:defRPr sz="1200"/>
-            </a:lvl1pPr>
-          </a:lstStyle>
-          <a:p>
-            <a:fld id="{BB5E49A5-4136-284D-997B-48E1D791AD67}" type="slidenum">
-              <a:rPr lang="en-US" smtClean="0"/>
-              <a:t>‹#›</a:t>
-            </a:fld>
-            <a:endParaRPr lang="en-US"/>
-          </a:p>
-        </p:txBody>
-      </p:sp>
     </p:spTree>
     <p:extLst>
       <p:ext uri="{BB962C8B-B14F-4D97-AF65-F5344CB8AC3E}">
-        <p14:creationId xmlns:p14="http://schemas.microsoft.com/office/powerpoint/2010/main" val="2623252185"/>
+        <p14:creationId xmlns:p14="http://schemas.microsoft.com/office/powerpoint/2010/main" val="3901631622"/>
       </p:ext>
     </p:extLst>
   </p:cSld>
   <p:clrMap bg1="lt1" tx1="dk1" bg2="lt2" tx2="dk2" accent1="accent1" accent2="accent2" accent3="accent3" accent4="accent4" accent5="accent5" accent6="accent6" hlink="hlink" folHlink="folHlink"/>
   <p:notesStyle>
-    <a:lvl1pPr marL="0" algn="l" defTabSz="457200" rtl="0" eaLnBrk="1" latinLnBrk="0" hangingPunct="1">
+    <a:lvl1pPr marL="0" algn="l" defTabSz="914400" rtl="0" eaLnBrk="1" latinLnBrk="0" hangingPunct="1">
       <a:defRPr sz="1200" kern="1200">
         <a:solidFill>
           <a:schemeClr val="tx1"/>
@@ -397,7 +212,7 @@
         <a:cs typeface="+mn-cs"/>
       </a:defRPr>
     </a:lvl1pPr>
-    <a:lvl2pPr marL="457200" algn="l" defTabSz="457200" rtl="0" eaLnBrk="1" latinLnBrk="0" hangingPunct="1">
+    <a:lvl2pPr marL="457200" algn="l" defTabSz="914400" rtl="0" eaLnBrk="1" latinLnBrk="0" hangingPunct="1">
       <a:defRPr sz="1200" kern="1200">
         <a:solidFill>
           <a:schemeClr val="tx1"/>
@@ -407,7 +222,7 @@
         <a:cs typeface="+mn-cs"/>
       </a:defRPr>
     </a:lvl2pPr>
-    <a:lvl3pPr marL="914400" algn="l" defTabSz="457200" rtl="0" eaLnBrk="1" latinLnBrk="0" hangingPunct="1">
+    <a:lvl3pPr marL="914400" algn="l" defTabSz="914400" rtl="0" eaLnBrk="1" latinLnBrk="0" hangingPunct="1">
       <a:defRPr sz="1200" kern="1200">
         <a:solidFill>
           <a:schemeClr val="tx1"/>
@@ -417,7 +232,7 @@
         <a:cs typeface="+mn-cs"/>
       </a:defRPr>
     </a:lvl3pPr>
-    <a:lvl4pPr marL="1371600" algn="l" defTabSz="457200" rtl="0" eaLnBrk="1" latinLnBrk="0" hangingPunct="1">
+    <a:lvl4pPr marL="1371600" algn="l" defTabSz="914400" rtl="0" eaLnBrk="1" latinLnBrk="0" hangingPunct="1">
       <a:defRPr sz="1200" kern="1200">
         <a:solidFill>
           <a:schemeClr val="tx1"/>
@@ -427,7 +242,7 @@
         <a:cs typeface="+mn-cs"/>
       </a:defRPr>
     </a:lvl4pPr>
-    <a:lvl5pPr marL="1828800" algn="l" defTabSz="457200" rtl="0" eaLnBrk="1" latinLnBrk="0" hangingPunct="1">
+    <a:lvl5pPr marL="1828800" algn="l" defTabSz="914400" rtl="0" eaLnBrk="1" latinLnBrk="0" hangingPunct="1">
       <a:defRPr sz="1200" kern="1200">
         <a:solidFill>
           <a:schemeClr val="tx1"/>
@@ -437,7 +252,7 @@
         <a:cs typeface="+mn-cs"/>
       </a:defRPr>
     </a:lvl5pPr>
-    <a:lvl6pPr marL="2286000" algn="l" defTabSz="457200" rtl="0" eaLnBrk="1" latinLnBrk="0" hangingPunct="1">
+    <a:lvl6pPr marL="2286000" algn="l" defTabSz="914400" rtl="0" eaLnBrk="1" latinLnBrk="0" hangingPunct="1">
       <a:defRPr sz="1200" kern="1200">
         <a:solidFill>
           <a:schemeClr val="tx1"/>
@@ -447,7 +262,7 @@
         <a:cs typeface="+mn-cs"/>
       </a:defRPr>
     </a:lvl6pPr>
-    <a:lvl7pPr marL="2743200" algn="l" defTabSz="457200" rtl="0" eaLnBrk="1" latinLnBrk="0" hangingPunct="1">
+    <a:lvl7pPr marL="2743200" algn="l" defTabSz="914400" rtl="0" eaLnBrk="1" latinLnBrk="0" hangingPunct="1">
       <a:defRPr sz="1200" kern="1200">
         <a:solidFill>
           <a:schemeClr val="tx1"/>
@@ -457,7 +272,7 @@
         <a:cs typeface="+mn-cs"/>
       </a:defRPr>
     </a:lvl7pPr>
-    <a:lvl8pPr marL="3200400" algn="l" defTabSz="457200" rtl="0" eaLnBrk="1" latinLnBrk="0" hangingPunct="1">
+    <a:lvl8pPr marL="3200400" algn="l" defTabSz="914400" rtl="0" eaLnBrk="1" latinLnBrk="0" hangingPunct="1">
       <a:defRPr sz="1200" kern="1200">
         <a:solidFill>
           <a:schemeClr val="tx1"/>
@@ -467,7 +282,7 @@
         <a:cs typeface="+mn-cs"/>
       </a:defRPr>
     </a:lvl8pPr>
-    <a:lvl9pPr marL="3657600" algn="l" defTabSz="457200" rtl="0" eaLnBrk="1" latinLnBrk="0" hangingPunct="1">
+    <a:lvl9pPr marL="3657600" algn="l" defTabSz="914400" rtl="0" eaLnBrk="1" latinLnBrk="0" hangingPunct="1">
       <a:defRPr sz="1200" kern="1200">
         <a:solidFill>
           <a:schemeClr val="tx1"/>
@@ -482,7 +297,7 @@
 </file>
 
 <file path=ppt/notesSlides/notesSlide1.xml><?xml version="1.0" encoding="utf-8"?>
-<p:notes xmlns:a="http://schemas.openxmlformats.org/drawingml/2006/main" xmlns:p="http://schemas.openxmlformats.org/presentationml/2006/main" xmlns:r="http://schemas.openxmlformats.org/officeDocument/2006/relationships">
+<p:notes xmlns:a="http://schemas.openxmlformats.org/drawingml/2006/main" xmlns:r="http://schemas.openxmlformats.org/officeDocument/2006/relationships" xmlns:p="http://schemas.openxmlformats.org/presentationml/2006/main">
   <p:cSld>
     <p:spTree>
       <p:nvGrpSpPr>
@@ -502,7 +317,7 @@
         <p:nvSpPr>
           <p:cNvPr id="2" name="Slide Image Placeholder 1"/>
           <p:cNvSpPr>
-            <a:spLocks noGrp="1"/>
+            <a:spLocks noGrp="1" noRot="1" noChangeAspect="1"/>
           </p:cNvSpPr>
           <p:nvPr>
             <p:ph type="sldImg" idx="2"/>
@@ -517,7 +332,7 @@
             <a:spLocks noGrp="1"/>
           </p:cNvSpPr>
           <p:nvPr>
-            <p:ph type="body" idx="3" sz="quarter"/>
+            <p:ph type="body" sz="quarter" idx="3"/>
           </p:nvPr>
         </p:nvSpPr>
         <p:spPr/>
@@ -549,7 +364,7 @@
             <a:spLocks noGrp="1"/>
           </p:cNvSpPr>
           <p:nvPr>
-            <p:ph type="sldNum" idx="5" sz="quarter"/>
+            <p:ph type="sldNum" sz="quarter" idx="5"/>
           </p:nvPr>
         </p:nvSpPr>
         <p:spPr/>
@@ -563,7 +378,7 @@
 </file>
 
 <file path=ppt/notesSlides/notesSlide10.xml><?xml version="1.0" encoding="utf-8"?>
-<p:notes xmlns:a="http://schemas.openxmlformats.org/drawingml/2006/main" xmlns:p="http://schemas.openxmlformats.org/presentationml/2006/main" xmlns:r="http://schemas.openxmlformats.org/officeDocument/2006/relationships">
+<p:notes xmlns:a="http://schemas.openxmlformats.org/drawingml/2006/main" xmlns:r="http://schemas.openxmlformats.org/officeDocument/2006/relationships" xmlns:p="http://schemas.openxmlformats.org/presentationml/2006/main">
   <p:cSld>
     <p:spTree>
       <p:nvGrpSpPr>
@@ -583,7 +398,7 @@
         <p:nvSpPr>
           <p:cNvPr id="2" name="Slide Image Placeholder 1"/>
           <p:cNvSpPr>
-            <a:spLocks noGrp="1"/>
+            <a:spLocks noGrp="1" noRot="1" noChangeAspect="1"/>
           </p:cNvSpPr>
           <p:nvPr>
             <p:ph type="sldImg" idx="2"/>
@@ -598,7 +413,7 @@
             <a:spLocks noGrp="1"/>
           </p:cNvSpPr>
           <p:nvPr>
-            <p:ph type="body" idx="3" sz="quarter"/>
+            <p:ph type="body" sz="quarter" idx="3"/>
           </p:nvPr>
         </p:nvSpPr>
         <p:spPr/>
@@ -646,7 +461,7 @@
             <a:spLocks noGrp="1"/>
           </p:cNvSpPr>
           <p:nvPr>
-            <p:ph type="sldNum" idx="5" sz="quarter"/>
+            <p:ph type="sldNum" sz="quarter" idx="5"/>
           </p:nvPr>
         </p:nvSpPr>
         <p:spPr/>
@@ -660,7 +475,7 @@
 </file>
 
 <file path=ppt/notesSlides/notesSlide11.xml><?xml version="1.0" encoding="utf-8"?>
-<p:notes xmlns:a="http://schemas.openxmlformats.org/drawingml/2006/main" xmlns:p="http://schemas.openxmlformats.org/presentationml/2006/main" xmlns:r="http://schemas.openxmlformats.org/officeDocument/2006/relationships">
+<p:notes xmlns:a="http://schemas.openxmlformats.org/drawingml/2006/main" xmlns:r="http://schemas.openxmlformats.org/officeDocument/2006/relationships" xmlns:p="http://schemas.openxmlformats.org/presentationml/2006/main">
   <p:cSld>
     <p:spTree>
       <p:nvGrpSpPr>
@@ -680,7 +495,7 @@
         <p:nvSpPr>
           <p:cNvPr id="2" name="Slide Image Placeholder 1"/>
           <p:cNvSpPr>
-            <a:spLocks noGrp="1"/>
+            <a:spLocks noGrp="1" noRot="1" noChangeAspect="1"/>
           </p:cNvSpPr>
           <p:nvPr>
             <p:ph type="sldImg" idx="2"/>
@@ -695,7 +510,7 @@
             <a:spLocks noGrp="1"/>
           </p:cNvSpPr>
           <p:nvPr>
-            <p:ph type="body" idx="3" sz="quarter"/>
+            <p:ph type="body" sz="quarter" idx="3"/>
           </p:nvPr>
         </p:nvSpPr>
         <p:spPr/>
@@ -751,7 +566,7 @@
             <a:spLocks noGrp="1"/>
           </p:cNvSpPr>
           <p:nvPr>
-            <p:ph type="sldNum" idx="5" sz="quarter"/>
+            <p:ph type="sldNum" sz="quarter" idx="5"/>
           </p:nvPr>
         </p:nvSpPr>
         <p:spPr/>
@@ -765,7 +580,7 @@
 </file>
 
 <file path=ppt/notesSlides/notesSlide12.xml><?xml version="1.0" encoding="utf-8"?>
-<p:notes xmlns:a="http://schemas.openxmlformats.org/drawingml/2006/main" xmlns:p="http://schemas.openxmlformats.org/presentationml/2006/main" xmlns:r="http://schemas.openxmlformats.org/officeDocument/2006/relationships">
+<p:notes xmlns:a="http://schemas.openxmlformats.org/drawingml/2006/main" xmlns:r="http://schemas.openxmlformats.org/officeDocument/2006/relationships" xmlns:p="http://schemas.openxmlformats.org/presentationml/2006/main">
   <p:cSld>
     <p:spTree>
       <p:nvGrpSpPr>
@@ -785,7 +600,7 @@
         <p:nvSpPr>
           <p:cNvPr id="2" name="Slide Image Placeholder 1"/>
           <p:cNvSpPr>
-            <a:spLocks noGrp="1"/>
+            <a:spLocks noGrp="1" noRot="1" noChangeAspect="1"/>
           </p:cNvSpPr>
           <p:nvPr>
             <p:ph type="sldImg" idx="2"/>
@@ -800,7 +615,7 @@
             <a:spLocks noGrp="1"/>
           </p:cNvSpPr>
           <p:nvPr>
-            <p:ph type="body" idx="3" sz="quarter"/>
+            <p:ph type="body" sz="quarter" idx="3"/>
           </p:nvPr>
         </p:nvSpPr>
         <p:spPr/>
@@ -824,7 +639,7 @@
             <a:spLocks noGrp="1"/>
           </p:cNvSpPr>
           <p:nvPr>
-            <p:ph type="sldNum" idx="5" sz="quarter"/>
+            <p:ph type="sldNum" sz="quarter" idx="5"/>
           </p:nvPr>
         </p:nvSpPr>
         <p:spPr/>
@@ -838,7 +653,7 @@
 </file>
 
 <file path=ppt/notesSlides/notesSlide13.xml><?xml version="1.0" encoding="utf-8"?>
-<p:notes xmlns:a="http://schemas.openxmlformats.org/drawingml/2006/main" xmlns:p="http://schemas.openxmlformats.org/presentationml/2006/main" xmlns:r="http://schemas.openxmlformats.org/officeDocument/2006/relationships">
+<p:notes xmlns:a="http://schemas.openxmlformats.org/drawingml/2006/main" xmlns:r="http://schemas.openxmlformats.org/officeDocument/2006/relationships" xmlns:p="http://schemas.openxmlformats.org/presentationml/2006/main">
   <p:cSld>
     <p:spTree>
       <p:nvGrpSpPr>
@@ -858,7 +673,7 @@
         <p:nvSpPr>
           <p:cNvPr id="2" name="Slide Image Placeholder 1"/>
           <p:cNvSpPr>
-            <a:spLocks noGrp="1"/>
+            <a:spLocks noGrp="1" noRot="1" noChangeAspect="1"/>
           </p:cNvSpPr>
           <p:nvPr>
             <p:ph type="sldImg" idx="2"/>
@@ -873,7 +688,7 @@
             <a:spLocks noGrp="1"/>
           </p:cNvSpPr>
           <p:nvPr>
-            <p:ph type="body" idx="3" sz="quarter"/>
+            <p:ph type="body" sz="quarter" idx="3"/>
           </p:nvPr>
         </p:nvSpPr>
         <p:spPr/>
@@ -921,7 +736,7 @@
             <a:spLocks noGrp="1"/>
           </p:cNvSpPr>
           <p:nvPr>
-            <p:ph type="sldNum" idx="5" sz="quarter"/>
+            <p:ph type="sldNum" sz="quarter" idx="5"/>
           </p:nvPr>
         </p:nvSpPr>
         <p:spPr/>
@@ -935,7 +750,7 @@
 </file>
 
 <file path=ppt/notesSlides/notesSlide14.xml><?xml version="1.0" encoding="utf-8"?>
-<p:notes xmlns:a="http://schemas.openxmlformats.org/drawingml/2006/main" xmlns:p="http://schemas.openxmlformats.org/presentationml/2006/main" xmlns:r="http://schemas.openxmlformats.org/officeDocument/2006/relationships">
+<p:notes xmlns:a="http://schemas.openxmlformats.org/drawingml/2006/main" xmlns:r="http://schemas.openxmlformats.org/officeDocument/2006/relationships" xmlns:p="http://schemas.openxmlformats.org/presentationml/2006/main">
   <p:cSld>
     <p:spTree>
       <p:nvGrpSpPr>
@@ -955,7 +770,7 @@
         <p:nvSpPr>
           <p:cNvPr id="2" name="Slide Image Placeholder 1"/>
           <p:cNvSpPr>
-            <a:spLocks noGrp="1"/>
+            <a:spLocks noGrp="1" noRot="1" noChangeAspect="1"/>
           </p:cNvSpPr>
           <p:nvPr>
             <p:ph type="sldImg" idx="2"/>
@@ -970,7 +785,7 @@
             <a:spLocks noGrp="1"/>
           </p:cNvSpPr>
           <p:nvPr>
-            <p:ph type="body" idx="3" sz="quarter"/>
+            <p:ph type="body" sz="quarter" idx="3"/>
           </p:nvPr>
         </p:nvSpPr>
         <p:spPr/>
@@ -994,7 +809,7 @@
             <a:spLocks noGrp="1"/>
           </p:cNvSpPr>
           <p:nvPr>
-            <p:ph type="sldNum" idx="5" sz="quarter"/>
+            <p:ph type="sldNum" sz="quarter" idx="5"/>
           </p:nvPr>
         </p:nvSpPr>
         <p:spPr/>
@@ -1008,7 +823,7 @@
 </file>
 
 <file path=ppt/notesSlides/notesSlide15.xml><?xml version="1.0" encoding="utf-8"?>
-<p:notes xmlns:a="http://schemas.openxmlformats.org/drawingml/2006/main" xmlns:p="http://schemas.openxmlformats.org/presentationml/2006/main" xmlns:r="http://schemas.openxmlformats.org/officeDocument/2006/relationships">
+<p:notes xmlns:a="http://schemas.openxmlformats.org/drawingml/2006/main" xmlns:r="http://schemas.openxmlformats.org/officeDocument/2006/relationships" xmlns:p="http://schemas.openxmlformats.org/presentationml/2006/main">
   <p:cSld>
     <p:spTree>
       <p:nvGrpSpPr>
@@ -1028,7 +843,7 @@
         <p:nvSpPr>
           <p:cNvPr id="2" name="Slide Image Placeholder 1"/>
           <p:cNvSpPr>
-            <a:spLocks noGrp="1"/>
+            <a:spLocks noGrp="1" noRot="1" noChangeAspect="1"/>
           </p:cNvSpPr>
           <p:nvPr>
             <p:ph type="sldImg" idx="2"/>
@@ -1043,7 +858,7 @@
             <a:spLocks noGrp="1"/>
           </p:cNvSpPr>
           <p:nvPr>
-            <p:ph type="body" idx="3" sz="quarter"/>
+            <p:ph type="body" sz="quarter" idx="3"/>
           </p:nvPr>
         </p:nvSpPr>
         <p:spPr/>
@@ -1091,7 +906,7 @@
             <a:spLocks noGrp="1"/>
           </p:cNvSpPr>
           <p:nvPr>
-            <p:ph type="sldNum" idx="5" sz="quarter"/>
+            <p:ph type="sldNum" sz="quarter" idx="5"/>
           </p:nvPr>
         </p:nvSpPr>
         <p:spPr/>
@@ -1105,7 +920,7 @@
 </file>
 
 <file path=ppt/notesSlides/notesSlide16.xml><?xml version="1.0" encoding="utf-8"?>
-<p:notes xmlns:a="http://schemas.openxmlformats.org/drawingml/2006/main" xmlns:p="http://schemas.openxmlformats.org/presentationml/2006/main" xmlns:r="http://schemas.openxmlformats.org/officeDocument/2006/relationships">
+<p:notes xmlns:a="http://schemas.openxmlformats.org/drawingml/2006/main" xmlns:r="http://schemas.openxmlformats.org/officeDocument/2006/relationships" xmlns:p="http://schemas.openxmlformats.org/presentationml/2006/main">
   <p:cSld>
     <p:spTree>
       <p:nvGrpSpPr>
@@ -1125,7 +940,7 @@
         <p:nvSpPr>
           <p:cNvPr id="2" name="Slide Image Placeholder 1"/>
           <p:cNvSpPr>
-            <a:spLocks noGrp="1"/>
+            <a:spLocks noGrp="1" noRot="1" noChangeAspect="1"/>
           </p:cNvSpPr>
           <p:nvPr>
             <p:ph type="sldImg" idx="2"/>
@@ -1140,7 +955,7 @@
             <a:spLocks noGrp="1"/>
           </p:cNvSpPr>
           <p:nvPr>
-            <p:ph type="body" idx="3" sz="quarter"/>
+            <p:ph type="body" sz="quarter" idx="3"/>
           </p:nvPr>
         </p:nvSpPr>
         <p:spPr/>
@@ -1188,7 +1003,7 @@
             <a:spLocks noGrp="1"/>
           </p:cNvSpPr>
           <p:nvPr>
-            <p:ph type="sldNum" idx="5" sz="quarter"/>
+            <p:ph type="sldNum" sz="quarter" idx="5"/>
           </p:nvPr>
         </p:nvSpPr>
         <p:spPr/>
@@ -1202,7 +1017,7 @@
 </file>
 
 <file path=ppt/notesSlides/notesSlide17.xml><?xml version="1.0" encoding="utf-8"?>
-<p:notes xmlns:a="http://schemas.openxmlformats.org/drawingml/2006/main" xmlns:p="http://schemas.openxmlformats.org/presentationml/2006/main" xmlns:r="http://schemas.openxmlformats.org/officeDocument/2006/relationships">
+<p:notes xmlns:a="http://schemas.openxmlformats.org/drawingml/2006/main" xmlns:r="http://schemas.openxmlformats.org/officeDocument/2006/relationships" xmlns:p="http://schemas.openxmlformats.org/presentationml/2006/main">
   <p:cSld>
     <p:spTree>
       <p:nvGrpSpPr>
@@ -1222,7 +1037,7 @@
         <p:nvSpPr>
           <p:cNvPr id="2" name="Slide Image Placeholder 1"/>
           <p:cNvSpPr>
-            <a:spLocks noGrp="1"/>
+            <a:spLocks noGrp="1" noRot="1" noChangeAspect="1"/>
           </p:cNvSpPr>
           <p:nvPr>
             <p:ph type="sldImg" idx="2"/>
@@ -1237,7 +1052,7 @@
             <a:spLocks noGrp="1"/>
           </p:cNvSpPr>
           <p:nvPr>
-            <p:ph type="body" idx="3" sz="quarter"/>
+            <p:ph type="body" sz="quarter" idx="3"/>
           </p:nvPr>
         </p:nvSpPr>
         <p:spPr/>
@@ -1285,7 +1100,7 @@
             <a:spLocks noGrp="1"/>
           </p:cNvSpPr>
           <p:nvPr>
-            <p:ph type="sldNum" idx="5" sz="quarter"/>
+            <p:ph type="sldNum" sz="quarter" idx="5"/>
           </p:nvPr>
         </p:nvSpPr>
         <p:spPr/>
@@ -1299,7 +1114,7 @@
 </file>
 
 <file path=ppt/notesSlides/notesSlide18.xml><?xml version="1.0" encoding="utf-8"?>
-<p:notes xmlns:a="http://schemas.openxmlformats.org/drawingml/2006/main" xmlns:p="http://schemas.openxmlformats.org/presentationml/2006/main" xmlns:r="http://schemas.openxmlformats.org/officeDocument/2006/relationships">
+<p:notes xmlns:a="http://schemas.openxmlformats.org/drawingml/2006/main" xmlns:r="http://schemas.openxmlformats.org/officeDocument/2006/relationships" xmlns:p="http://schemas.openxmlformats.org/presentationml/2006/main">
   <p:cSld>
     <p:spTree>
       <p:nvGrpSpPr>
@@ -1319,7 +1134,7 @@
         <p:nvSpPr>
           <p:cNvPr id="2" name="Slide Image Placeholder 1"/>
           <p:cNvSpPr>
-            <a:spLocks noGrp="1"/>
+            <a:spLocks noGrp="1" noRot="1" noChangeAspect="1"/>
           </p:cNvSpPr>
           <p:nvPr>
             <p:ph type="sldImg" idx="2"/>
@@ -1334,7 +1149,7 @@
             <a:spLocks noGrp="1"/>
           </p:cNvSpPr>
           <p:nvPr>
-            <p:ph type="body" idx="3" sz="quarter"/>
+            <p:ph type="body" sz="quarter" idx="3"/>
           </p:nvPr>
         </p:nvSpPr>
         <p:spPr/>
@@ -1382,7 +1197,7 @@
             <a:spLocks noGrp="1"/>
           </p:cNvSpPr>
           <p:nvPr>
-            <p:ph type="sldNum" idx="5" sz="quarter"/>
+            <p:ph type="sldNum" sz="quarter" idx="5"/>
           </p:nvPr>
         </p:nvSpPr>
         <p:spPr/>
@@ -1396,7 +1211,7 @@
 </file>
 
 <file path=ppt/notesSlides/notesSlide19.xml><?xml version="1.0" encoding="utf-8"?>
-<p:notes xmlns:a="http://schemas.openxmlformats.org/drawingml/2006/main" xmlns:p="http://schemas.openxmlformats.org/presentationml/2006/main" xmlns:r="http://schemas.openxmlformats.org/officeDocument/2006/relationships">
+<p:notes xmlns:a="http://schemas.openxmlformats.org/drawingml/2006/main" xmlns:r="http://schemas.openxmlformats.org/officeDocument/2006/relationships" xmlns:p="http://schemas.openxmlformats.org/presentationml/2006/main">
   <p:cSld>
     <p:spTree>
       <p:nvGrpSpPr>
@@ -1416,7 +1231,7 @@
         <p:nvSpPr>
           <p:cNvPr id="2" name="Slide Image Placeholder 1"/>
           <p:cNvSpPr>
-            <a:spLocks noGrp="1"/>
+            <a:spLocks noGrp="1" noRot="1" noChangeAspect="1"/>
           </p:cNvSpPr>
           <p:nvPr>
             <p:ph type="sldImg" idx="2"/>
@@ -1431,7 +1246,7 @@
             <a:spLocks noGrp="1"/>
           </p:cNvSpPr>
           <p:nvPr>
-            <p:ph type="body" idx="3" sz="quarter"/>
+            <p:ph type="body" sz="quarter" idx="3"/>
           </p:nvPr>
         </p:nvSpPr>
         <p:spPr/>
@@ -1455,7 +1270,7 @@
             <a:spLocks noGrp="1"/>
           </p:cNvSpPr>
           <p:nvPr>
-            <p:ph type="sldNum" idx="5" sz="quarter"/>
+            <p:ph type="sldNum" sz="quarter" idx="5"/>
           </p:nvPr>
         </p:nvSpPr>
         <p:spPr/>
@@ -1469,7 +1284,7 @@
 </file>
 
 <file path=ppt/notesSlides/notesSlide2.xml><?xml version="1.0" encoding="utf-8"?>
-<p:notes xmlns:a="http://schemas.openxmlformats.org/drawingml/2006/main" xmlns:p="http://schemas.openxmlformats.org/presentationml/2006/main" xmlns:r="http://schemas.openxmlformats.org/officeDocument/2006/relationships">
+<p:notes xmlns:a="http://schemas.openxmlformats.org/drawingml/2006/main" xmlns:r="http://schemas.openxmlformats.org/officeDocument/2006/relationships" xmlns:p="http://schemas.openxmlformats.org/presentationml/2006/main">
   <p:cSld>
     <p:spTree>
       <p:nvGrpSpPr>
@@ -1489,7 +1304,7 @@
         <p:nvSpPr>
           <p:cNvPr id="2" name="Slide Image Placeholder 1"/>
           <p:cNvSpPr>
-            <a:spLocks noGrp="1"/>
+            <a:spLocks noGrp="1" noRot="1" noChangeAspect="1"/>
           </p:cNvSpPr>
           <p:nvPr>
             <p:ph type="sldImg" idx="2"/>
@@ -1504,7 +1319,7 @@
             <a:spLocks noGrp="1"/>
           </p:cNvSpPr>
           <p:nvPr>
-            <p:ph type="body" idx="3" sz="quarter"/>
+            <p:ph type="body" sz="quarter" idx="3"/>
           </p:nvPr>
         </p:nvSpPr>
         <p:spPr/>
@@ -1528,7 +1343,7 @@
             <a:spLocks noGrp="1"/>
           </p:cNvSpPr>
           <p:nvPr>
-            <p:ph type="sldNum" idx="5" sz="quarter"/>
+            <p:ph type="sldNum" sz="quarter" idx="5"/>
           </p:nvPr>
         </p:nvSpPr>
         <p:spPr/>
@@ -1542,7 +1357,7 @@
 </file>
 
 <file path=ppt/notesSlides/notesSlide20.xml><?xml version="1.0" encoding="utf-8"?>
-<p:notes xmlns:a="http://schemas.openxmlformats.org/drawingml/2006/main" xmlns:p="http://schemas.openxmlformats.org/presentationml/2006/main" xmlns:r="http://schemas.openxmlformats.org/officeDocument/2006/relationships">
+<p:notes xmlns:a="http://schemas.openxmlformats.org/drawingml/2006/main" xmlns:r="http://schemas.openxmlformats.org/officeDocument/2006/relationships" xmlns:p="http://schemas.openxmlformats.org/presentationml/2006/main">
   <p:cSld>
     <p:spTree>
       <p:nvGrpSpPr>
@@ -1562,7 +1377,7 @@
         <p:nvSpPr>
           <p:cNvPr id="2" name="Slide Image Placeholder 1"/>
           <p:cNvSpPr>
-            <a:spLocks noGrp="1"/>
+            <a:spLocks noGrp="1" noRot="1" noChangeAspect="1"/>
           </p:cNvSpPr>
           <p:nvPr>
             <p:ph type="sldImg" idx="2"/>
@@ -1577,7 +1392,7 @@
             <a:spLocks noGrp="1"/>
           </p:cNvSpPr>
           <p:nvPr>
-            <p:ph type="body" idx="3" sz="quarter"/>
+            <p:ph type="body" sz="quarter" idx="3"/>
           </p:nvPr>
         </p:nvSpPr>
         <p:spPr/>
@@ -1617,7 +1432,7 @@
             <a:spLocks noGrp="1"/>
           </p:cNvSpPr>
           <p:nvPr>
-            <p:ph type="sldNum" idx="5" sz="quarter"/>
+            <p:ph type="sldNum" sz="quarter" idx="5"/>
           </p:nvPr>
         </p:nvSpPr>
         <p:spPr/>
@@ -1631,7 +1446,7 @@
 </file>
 
 <file path=ppt/notesSlides/notesSlide21.xml><?xml version="1.0" encoding="utf-8"?>
-<p:notes xmlns:a="http://schemas.openxmlformats.org/drawingml/2006/main" xmlns:p="http://schemas.openxmlformats.org/presentationml/2006/main" xmlns:r="http://schemas.openxmlformats.org/officeDocument/2006/relationships">
+<p:notes xmlns:a="http://schemas.openxmlformats.org/drawingml/2006/main" xmlns:r="http://schemas.openxmlformats.org/officeDocument/2006/relationships" xmlns:p="http://schemas.openxmlformats.org/presentationml/2006/main">
   <p:cSld>
     <p:spTree>
       <p:nvGrpSpPr>
@@ -1651,7 +1466,7 @@
         <p:nvSpPr>
           <p:cNvPr id="2" name="Slide Image Placeholder 1"/>
           <p:cNvSpPr>
-            <a:spLocks noGrp="1"/>
+            <a:spLocks noGrp="1" noRot="1" noChangeAspect="1"/>
           </p:cNvSpPr>
           <p:nvPr>
             <p:ph type="sldImg" idx="2"/>
@@ -1666,7 +1481,7 @@
             <a:spLocks noGrp="1"/>
           </p:cNvSpPr>
           <p:nvPr>
-            <p:ph type="body" idx="3" sz="quarter"/>
+            <p:ph type="body" sz="quarter" idx="3"/>
           </p:nvPr>
         </p:nvSpPr>
         <p:spPr/>
@@ -1714,7 +1529,7 @@
             <a:spLocks noGrp="1"/>
           </p:cNvSpPr>
           <p:nvPr>
-            <p:ph type="sldNum" idx="5" sz="quarter"/>
+            <p:ph type="sldNum" sz="quarter" idx="5"/>
           </p:nvPr>
         </p:nvSpPr>
         <p:spPr/>
@@ -1728,7 +1543,7 @@
 </file>
 
 <file path=ppt/notesSlides/notesSlide22.xml><?xml version="1.0" encoding="utf-8"?>
-<p:notes xmlns:a="http://schemas.openxmlformats.org/drawingml/2006/main" xmlns:p="http://schemas.openxmlformats.org/presentationml/2006/main" xmlns:r="http://schemas.openxmlformats.org/officeDocument/2006/relationships">
+<p:notes xmlns:a="http://schemas.openxmlformats.org/drawingml/2006/main" xmlns:r="http://schemas.openxmlformats.org/officeDocument/2006/relationships" xmlns:p="http://schemas.openxmlformats.org/presentationml/2006/main">
   <p:cSld>
     <p:spTree>
       <p:nvGrpSpPr>
@@ -1748,7 +1563,7 @@
         <p:nvSpPr>
           <p:cNvPr id="2" name="Slide Image Placeholder 1"/>
           <p:cNvSpPr>
-            <a:spLocks noGrp="1"/>
+            <a:spLocks noGrp="1" noRot="1" noChangeAspect="1"/>
           </p:cNvSpPr>
           <p:nvPr>
             <p:ph type="sldImg" idx="2"/>
@@ -1763,7 +1578,7 @@
             <a:spLocks noGrp="1"/>
           </p:cNvSpPr>
           <p:nvPr>
-            <p:ph type="body" idx="3" sz="quarter"/>
+            <p:ph type="body" sz="quarter" idx="3"/>
           </p:nvPr>
         </p:nvSpPr>
         <p:spPr/>
@@ -1827,7 +1642,7 @@
             <a:spLocks noGrp="1"/>
           </p:cNvSpPr>
           <p:nvPr>
-            <p:ph type="sldNum" idx="5" sz="quarter"/>
+            <p:ph type="sldNum" sz="quarter" idx="5"/>
           </p:nvPr>
         </p:nvSpPr>
         <p:spPr/>
@@ -1841,7 +1656,7 @@
 </file>
 
 <file path=ppt/notesSlides/notesSlide23.xml><?xml version="1.0" encoding="utf-8"?>
-<p:notes xmlns:a="http://schemas.openxmlformats.org/drawingml/2006/main" xmlns:p="http://schemas.openxmlformats.org/presentationml/2006/main" xmlns:r="http://schemas.openxmlformats.org/officeDocument/2006/relationships">
+<p:notes xmlns:a="http://schemas.openxmlformats.org/drawingml/2006/main" xmlns:r="http://schemas.openxmlformats.org/officeDocument/2006/relationships" xmlns:p="http://schemas.openxmlformats.org/presentationml/2006/main">
   <p:cSld>
     <p:spTree>
       <p:nvGrpSpPr>
@@ -1861,7 +1676,7 @@
         <p:nvSpPr>
           <p:cNvPr id="2" name="Slide Image Placeholder 1"/>
           <p:cNvSpPr>
-            <a:spLocks noGrp="1"/>
+            <a:spLocks noGrp="1" noRot="1" noChangeAspect="1"/>
           </p:cNvSpPr>
           <p:nvPr>
             <p:ph type="sldImg" idx="2"/>
@@ -1876,7 +1691,7 @@
             <a:spLocks noGrp="1"/>
           </p:cNvSpPr>
           <p:nvPr>
-            <p:ph type="body" idx="3" sz="quarter"/>
+            <p:ph type="body" sz="quarter" idx="3"/>
           </p:nvPr>
         </p:nvSpPr>
         <p:spPr/>
@@ -1924,7 +1739,7 @@
             <a:spLocks noGrp="1"/>
           </p:cNvSpPr>
           <p:nvPr>
-            <p:ph type="sldNum" idx="5" sz="quarter"/>
+            <p:ph type="sldNum" sz="quarter" idx="5"/>
           </p:nvPr>
         </p:nvSpPr>
         <p:spPr/>
@@ -1938,7 +1753,7 @@
 </file>
 
 <file path=ppt/notesSlides/notesSlide24.xml><?xml version="1.0" encoding="utf-8"?>
-<p:notes xmlns:a="http://schemas.openxmlformats.org/drawingml/2006/main" xmlns:p="http://schemas.openxmlformats.org/presentationml/2006/main" xmlns:r="http://schemas.openxmlformats.org/officeDocument/2006/relationships">
+<p:notes xmlns:a="http://schemas.openxmlformats.org/drawingml/2006/main" xmlns:r="http://schemas.openxmlformats.org/officeDocument/2006/relationships" xmlns:p="http://schemas.openxmlformats.org/presentationml/2006/main">
   <p:cSld>
     <p:spTree>
       <p:nvGrpSpPr>
@@ -1958,7 +1773,7 @@
         <p:nvSpPr>
           <p:cNvPr id="2" name="Slide Image Placeholder 1"/>
           <p:cNvSpPr>
-            <a:spLocks noGrp="1"/>
+            <a:spLocks noGrp="1" noRot="1" noChangeAspect="1"/>
           </p:cNvSpPr>
           <p:nvPr>
             <p:ph type="sldImg" idx="2"/>
@@ -1973,7 +1788,7 @@
             <a:spLocks noGrp="1"/>
           </p:cNvSpPr>
           <p:nvPr>
-            <p:ph type="body" idx="3" sz="quarter"/>
+            <p:ph type="body" sz="quarter" idx="3"/>
           </p:nvPr>
         </p:nvSpPr>
         <p:spPr/>
@@ -2013,7 +1828,7 @@
             <a:spLocks noGrp="1"/>
           </p:cNvSpPr>
           <p:nvPr>
-            <p:ph type="sldNum" idx="5" sz="quarter"/>
+            <p:ph type="sldNum" sz="quarter" idx="5"/>
           </p:nvPr>
         </p:nvSpPr>
         <p:spPr/>
@@ -2027,7 +1842,7 @@
 </file>
 
 <file path=ppt/notesSlides/notesSlide25.xml><?xml version="1.0" encoding="utf-8"?>
-<p:notes xmlns:a="http://schemas.openxmlformats.org/drawingml/2006/main" xmlns:p="http://schemas.openxmlformats.org/presentationml/2006/main" xmlns:r="http://schemas.openxmlformats.org/officeDocument/2006/relationships">
+<p:notes xmlns:a="http://schemas.openxmlformats.org/drawingml/2006/main" xmlns:r="http://schemas.openxmlformats.org/officeDocument/2006/relationships" xmlns:p="http://schemas.openxmlformats.org/presentationml/2006/main">
   <p:cSld>
     <p:spTree>
       <p:nvGrpSpPr>
@@ -2047,7 +1862,7 @@
         <p:nvSpPr>
           <p:cNvPr id="2" name="Slide Image Placeholder 1"/>
           <p:cNvSpPr>
-            <a:spLocks noGrp="1"/>
+            <a:spLocks noGrp="1" noRot="1" noChangeAspect="1"/>
           </p:cNvSpPr>
           <p:nvPr>
             <p:ph type="sldImg" idx="2"/>
@@ -2062,7 +1877,7 @@
             <a:spLocks noGrp="1"/>
           </p:cNvSpPr>
           <p:nvPr>
-            <p:ph type="body" idx="3" sz="quarter"/>
+            <p:ph type="body" sz="quarter" idx="3"/>
           </p:nvPr>
         </p:nvSpPr>
         <p:spPr/>
@@ -2071,7 +1886,7 @@
           <a:lstStyle/>
           <a:p>
             <a:r>
-              <a:rPr sz="1200">
+              <a:rPr sz="1200" dirty="0">
                 <a:latin typeface="Calibri"/>
               </a:rPr>
               <a:t>Conversation, not a test.</a:t>
@@ -2079,15 +1894,27 @@
           </a:p>
           <a:p>
             <a:r>
-              <a:rPr sz="1200">
-                <a:latin typeface="Calibri"/>
-              </a:rPr>
-              <a:t>Answers, in order: an address is the device's phone number and duplicates mean one pad drives two vehicles; the number is negative, hence the minus sign; a deadzone stops phantom creep, zero means it creeps and too big wastes the stick; map() is proportion.</a:t>
-            </a:r>
-          </a:p>
-          <a:p>
-            <a:r>
-              <a:rPr sz="1200">
+              <a:rPr sz="1200" dirty="0">
+                <a:latin typeface="Calibri"/>
+              </a:rPr>
+              <a:t>Answers, in order: an address is the device's phone number and duplicates mean one pad drives two vehicles; the number is negative, hence the minus sign; a </a:t>
+            </a:r>
+            <a:r>
+              <a:rPr sz="1200" dirty="0" err="1">
+                <a:latin typeface="Calibri"/>
+              </a:rPr>
+              <a:t>deadzone</a:t>
+            </a:r>
+            <a:r>
+              <a:rPr sz="1200" dirty="0">
+                <a:latin typeface="Calibri"/>
+              </a:rPr>
+              <a:t> stops phantom creep, zero means it creeps and too big wastes the stick; map() is proportion.</a:t>
+            </a:r>
+          </a:p>
+          <a:p>
+            <a:r>
+              <a:rPr sz="1200" dirty="0">
                 <a:latin typeface="Calibri"/>
               </a:rPr>
               <a:t>For question 5: left gets 280 and right gets 80 before constrain, then 255 and 80 after.</a:t>
@@ -2095,7 +1922,7 @@
           </a:p>
           <a:p>
             <a:r>
-              <a:rPr sz="1200">
+              <a:rPr sz="1200" dirty="0">
                 <a:latin typeface="Calibri"/>
               </a:rPr>
               <a:t>For question 6: full-power steering is faster than a person can correct for.</a:t>
@@ -2103,11 +1930,49 @@
           </a:p>
           <a:p>
             <a:r>
-              <a:rPr sz="1200">
+              <a:rPr sz="1200" dirty="0">
                 <a:latin typeface="Calibri"/>
               </a:rPr>
               <a:t>Question 7 should be written out, not said. Check a few notebooks.</a:t>
             </a:r>
+            <a:endParaRPr lang="en-US" sz="1200" dirty="0">
+              <a:latin typeface="Calibri"/>
+            </a:endParaRPr>
+          </a:p>
+          <a:p>
+            <a:r>
+              <a:rPr lang="en-US" sz="1200" dirty="0">
+                <a:latin typeface="Calibri"/>
+              </a:rPr>
+              <a:t>if (!Ps3.isConnected()) {</a:t>
+            </a:r>
+          </a:p>
+          <a:p>
+            <a:r>
+              <a:rPr lang="en-US" sz="1200" dirty="0">
+                <a:latin typeface="Calibri"/>
+              </a:rPr>
+              <a:t>drive(0,0);</a:t>
+            </a:r>
+          </a:p>
+          <a:p>
+            <a:r>
+              <a:rPr lang="en-US" sz="1200" dirty="0">
+                <a:latin typeface="Calibri"/>
+              </a:rPr>
+              <a:t>return;</a:t>
+            </a:r>
+          </a:p>
+          <a:p>
+            <a:r>
+              <a:rPr lang="en-US" sz="1200" dirty="0">
+                <a:latin typeface="Calibri"/>
+              </a:rPr>
+              <a:t>}</a:t>
+            </a:r>
+            <a:endParaRPr sz="1200" dirty="0">
+              <a:latin typeface="Calibri"/>
+            </a:endParaRPr>
           </a:p>
         </p:txBody>
       </p:sp>
@@ -2118,7 +1983,7 @@
             <a:spLocks noGrp="1"/>
           </p:cNvSpPr>
           <p:nvPr>
-            <p:ph type="sldNum" idx="5" sz="quarter"/>
+            <p:ph type="sldNum" sz="quarter" idx="5"/>
           </p:nvPr>
         </p:nvSpPr>
         <p:spPr/>
@@ -2132,7 +1997,7 @@
 </file>
 
 <file path=ppt/notesSlides/notesSlide3.xml><?xml version="1.0" encoding="utf-8"?>
-<p:notes xmlns:a="http://schemas.openxmlformats.org/drawingml/2006/main" xmlns:p="http://schemas.openxmlformats.org/presentationml/2006/main" xmlns:r="http://schemas.openxmlformats.org/officeDocument/2006/relationships">
+<p:notes xmlns:a="http://schemas.openxmlformats.org/drawingml/2006/main" xmlns:r="http://schemas.openxmlformats.org/officeDocument/2006/relationships" xmlns:p="http://schemas.openxmlformats.org/presentationml/2006/main">
   <p:cSld>
     <p:spTree>
       <p:nvGrpSpPr>
@@ -2152,7 +2017,7 @@
         <p:nvSpPr>
           <p:cNvPr id="2" name="Slide Image Placeholder 1"/>
           <p:cNvSpPr>
-            <a:spLocks noGrp="1"/>
+            <a:spLocks noGrp="1" noRot="1" noChangeAspect="1"/>
           </p:cNvSpPr>
           <p:nvPr>
             <p:ph type="sldImg" idx="2"/>
@@ -2167,7 +2032,7 @@
             <a:spLocks noGrp="1"/>
           </p:cNvSpPr>
           <p:nvPr>
-            <p:ph type="body" idx="3" sz="quarter"/>
+            <p:ph type="body" sz="quarter" idx="3"/>
           </p:nvPr>
         </p:nvSpPr>
         <p:spPr/>
@@ -2199,7 +2064,7 @@
             <a:spLocks noGrp="1"/>
           </p:cNvSpPr>
           <p:nvPr>
-            <p:ph type="sldNum" idx="5" sz="quarter"/>
+            <p:ph type="sldNum" sz="quarter" idx="5"/>
           </p:nvPr>
         </p:nvSpPr>
         <p:spPr/>
@@ -2213,7 +2078,7 @@
 </file>
 
 <file path=ppt/notesSlides/notesSlide4.xml><?xml version="1.0" encoding="utf-8"?>
-<p:notes xmlns:a="http://schemas.openxmlformats.org/drawingml/2006/main" xmlns:p="http://schemas.openxmlformats.org/presentationml/2006/main" xmlns:r="http://schemas.openxmlformats.org/officeDocument/2006/relationships">
+<p:notes xmlns:a="http://schemas.openxmlformats.org/drawingml/2006/main" xmlns:r="http://schemas.openxmlformats.org/officeDocument/2006/relationships" xmlns:p="http://schemas.openxmlformats.org/presentationml/2006/main">
   <p:cSld>
     <p:spTree>
       <p:nvGrpSpPr>
@@ -2233,7 +2098,7 @@
         <p:nvSpPr>
           <p:cNvPr id="2" name="Slide Image Placeholder 1"/>
           <p:cNvSpPr>
-            <a:spLocks noGrp="1"/>
+            <a:spLocks noGrp="1" noRot="1" noChangeAspect="1"/>
           </p:cNvSpPr>
           <p:nvPr>
             <p:ph type="sldImg" idx="2"/>
@@ -2248,7 +2113,7 @@
             <a:spLocks noGrp="1"/>
           </p:cNvSpPr>
           <p:nvPr>
-            <p:ph type="body" idx="3" sz="quarter"/>
+            <p:ph type="body" sz="quarter" idx="3"/>
           </p:nvPr>
         </p:nvSpPr>
         <p:spPr/>
@@ -2272,7 +2137,7 @@
             <a:spLocks noGrp="1"/>
           </p:cNvSpPr>
           <p:nvPr>
-            <p:ph type="sldNum" idx="5" sz="quarter"/>
+            <p:ph type="sldNum" sz="quarter" idx="5"/>
           </p:nvPr>
         </p:nvSpPr>
         <p:spPr/>
@@ -2286,7 +2151,7 @@
 </file>
 
 <file path=ppt/notesSlides/notesSlide5.xml><?xml version="1.0" encoding="utf-8"?>
-<p:notes xmlns:a="http://schemas.openxmlformats.org/drawingml/2006/main" xmlns:p="http://schemas.openxmlformats.org/presentationml/2006/main" xmlns:r="http://schemas.openxmlformats.org/officeDocument/2006/relationships">
+<p:notes xmlns:a="http://schemas.openxmlformats.org/drawingml/2006/main" xmlns:r="http://schemas.openxmlformats.org/officeDocument/2006/relationships" xmlns:p="http://schemas.openxmlformats.org/presentationml/2006/main">
   <p:cSld>
     <p:spTree>
       <p:nvGrpSpPr>
@@ -2306,7 +2171,7 @@
         <p:nvSpPr>
           <p:cNvPr id="2" name="Slide Image Placeholder 1"/>
           <p:cNvSpPr>
-            <a:spLocks noGrp="1"/>
+            <a:spLocks noGrp="1" noRot="1" noChangeAspect="1"/>
           </p:cNvSpPr>
           <p:nvPr>
             <p:ph type="sldImg" idx="2"/>
@@ -2321,7 +2186,7 @@
             <a:spLocks noGrp="1"/>
           </p:cNvSpPr>
           <p:nvPr>
-            <p:ph type="body" idx="3" sz="quarter"/>
+            <p:ph type="body" sz="quarter" idx="3"/>
           </p:nvPr>
         </p:nvSpPr>
         <p:spPr/>
@@ -2361,7 +2226,7 @@
             <a:spLocks noGrp="1"/>
           </p:cNvSpPr>
           <p:nvPr>
-            <p:ph type="sldNum" idx="5" sz="quarter"/>
+            <p:ph type="sldNum" sz="quarter" idx="5"/>
           </p:nvPr>
         </p:nvSpPr>
         <p:spPr/>
@@ -2375,7 +2240,7 @@
 </file>
 
 <file path=ppt/notesSlides/notesSlide6.xml><?xml version="1.0" encoding="utf-8"?>
-<p:notes xmlns:a="http://schemas.openxmlformats.org/drawingml/2006/main" xmlns:p="http://schemas.openxmlformats.org/presentationml/2006/main" xmlns:r="http://schemas.openxmlformats.org/officeDocument/2006/relationships">
+<p:notes xmlns:a="http://schemas.openxmlformats.org/drawingml/2006/main" xmlns:r="http://schemas.openxmlformats.org/officeDocument/2006/relationships" xmlns:p="http://schemas.openxmlformats.org/presentationml/2006/main">
   <p:cSld>
     <p:spTree>
       <p:nvGrpSpPr>
@@ -2395,7 +2260,7 @@
         <p:nvSpPr>
           <p:cNvPr id="2" name="Slide Image Placeholder 1"/>
           <p:cNvSpPr>
-            <a:spLocks noGrp="1"/>
+            <a:spLocks noGrp="1" noRot="1" noChangeAspect="1"/>
           </p:cNvSpPr>
           <p:nvPr>
             <p:ph type="sldImg" idx="2"/>
@@ -2410,7 +2275,7 @@
             <a:spLocks noGrp="1"/>
           </p:cNvSpPr>
           <p:nvPr>
-            <p:ph type="body" idx="3" sz="quarter"/>
+            <p:ph type="body" sz="quarter" idx="3"/>
           </p:nvPr>
         </p:nvSpPr>
         <p:spPr/>
@@ -2466,7 +2331,7 @@
             <a:spLocks noGrp="1"/>
           </p:cNvSpPr>
           <p:nvPr>
-            <p:ph type="sldNum" idx="5" sz="quarter"/>
+            <p:ph type="sldNum" sz="quarter" idx="5"/>
           </p:nvPr>
         </p:nvSpPr>
         <p:spPr/>
@@ -2480,7 +2345,7 @@
 </file>
 
 <file path=ppt/notesSlides/notesSlide7.xml><?xml version="1.0" encoding="utf-8"?>
-<p:notes xmlns:a="http://schemas.openxmlformats.org/drawingml/2006/main" xmlns:p="http://schemas.openxmlformats.org/presentationml/2006/main" xmlns:r="http://schemas.openxmlformats.org/officeDocument/2006/relationships">
+<p:notes xmlns:a="http://schemas.openxmlformats.org/drawingml/2006/main" xmlns:r="http://schemas.openxmlformats.org/officeDocument/2006/relationships" xmlns:p="http://schemas.openxmlformats.org/presentationml/2006/main">
   <p:cSld>
     <p:spTree>
       <p:nvGrpSpPr>
@@ -2500,7 +2365,7 @@
         <p:nvSpPr>
           <p:cNvPr id="2" name="Slide Image Placeholder 1"/>
           <p:cNvSpPr>
-            <a:spLocks noGrp="1"/>
+            <a:spLocks noGrp="1" noRot="1" noChangeAspect="1"/>
           </p:cNvSpPr>
           <p:nvPr>
             <p:ph type="sldImg" idx="2"/>
@@ -2515,7 +2380,7 @@
             <a:spLocks noGrp="1"/>
           </p:cNvSpPr>
           <p:nvPr>
-            <p:ph type="body" idx="3" sz="quarter"/>
+            <p:ph type="body" sz="quarter" idx="3"/>
           </p:nvPr>
         </p:nvSpPr>
         <p:spPr/>
@@ -2563,7 +2428,7 @@
             <a:spLocks noGrp="1"/>
           </p:cNvSpPr>
           <p:nvPr>
-            <p:ph type="sldNum" idx="5" sz="quarter"/>
+            <p:ph type="sldNum" sz="quarter" idx="5"/>
           </p:nvPr>
         </p:nvSpPr>
         <p:spPr/>
@@ -2577,7 +2442,7 @@
 </file>
 
 <file path=ppt/notesSlides/notesSlide8.xml><?xml version="1.0" encoding="utf-8"?>
-<p:notes xmlns:a="http://schemas.openxmlformats.org/drawingml/2006/main" xmlns:p="http://schemas.openxmlformats.org/presentationml/2006/main" xmlns:r="http://schemas.openxmlformats.org/officeDocument/2006/relationships">
+<p:notes xmlns:a="http://schemas.openxmlformats.org/drawingml/2006/main" xmlns:r="http://schemas.openxmlformats.org/officeDocument/2006/relationships" xmlns:p="http://schemas.openxmlformats.org/presentationml/2006/main">
   <p:cSld>
     <p:spTree>
       <p:nvGrpSpPr>
@@ -2597,7 +2462,7 @@
         <p:nvSpPr>
           <p:cNvPr id="2" name="Slide Image Placeholder 1"/>
           <p:cNvSpPr>
-            <a:spLocks noGrp="1"/>
+            <a:spLocks noGrp="1" noRot="1" noChangeAspect="1"/>
           </p:cNvSpPr>
           <p:nvPr>
             <p:ph type="sldImg" idx="2"/>
@@ -2612,7 +2477,7 @@
             <a:spLocks noGrp="1"/>
           </p:cNvSpPr>
           <p:nvPr>
-            <p:ph type="body" idx="3" sz="quarter"/>
+            <p:ph type="body" sz="quarter" idx="3"/>
           </p:nvPr>
         </p:nvSpPr>
         <p:spPr/>
@@ -2668,7 +2533,7 @@
             <a:spLocks noGrp="1"/>
           </p:cNvSpPr>
           <p:nvPr>
-            <p:ph type="sldNum" idx="5" sz="quarter"/>
+            <p:ph type="sldNum" sz="quarter" idx="5"/>
           </p:nvPr>
         </p:nvSpPr>
         <p:spPr/>
@@ -2682,7 +2547,7 @@
 </file>
 
 <file path=ppt/notesSlides/notesSlide9.xml><?xml version="1.0" encoding="utf-8"?>
-<p:notes xmlns:a="http://schemas.openxmlformats.org/drawingml/2006/main" xmlns:p="http://schemas.openxmlformats.org/presentationml/2006/main" xmlns:r="http://schemas.openxmlformats.org/officeDocument/2006/relationships">
+<p:notes xmlns:a="http://schemas.openxmlformats.org/drawingml/2006/main" xmlns:r="http://schemas.openxmlformats.org/officeDocument/2006/relationships" xmlns:p="http://schemas.openxmlformats.org/presentationml/2006/main">
   <p:cSld>
     <p:spTree>
       <p:nvGrpSpPr>
@@ -2702,7 +2567,7 @@
         <p:nvSpPr>
           <p:cNvPr id="2" name="Slide Image Placeholder 1"/>
           <p:cNvSpPr>
-            <a:spLocks noGrp="1"/>
+            <a:spLocks noGrp="1" noRot="1" noChangeAspect="1"/>
           </p:cNvSpPr>
           <p:nvPr>
             <p:ph type="sldImg" idx="2"/>
@@ -2717,7 +2582,7 @@
             <a:spLocks noGrp="1"/>
           </p:cNvSpPr>
           <p:nvPr>
-            <p:ph type="body" idx="3" sz="quarter"/>
+            <p:ph type="body" sz="quarter" idx="3"/>
           </p:nvPr>
         </p:nvSpPr>
         <p:spPr/>
@@ -2781,7 +2646,7 @@
             <a:spLocks noGrp="1"/>
           </p:cNvSpPr>
           <p:nvPr>
-            <p:ph type="sldNum" idx="5" sz="quarter"/>
+            <p:ph type="sldNum" sz="quarter" idx="5"/>
           </p:nvPr>
         </p:nvSpPr>
         <p:spPr/>
@@ -2832,10 +2697,9 @@
           <a:lstStyle/>
           <a:p>
             <a:r>
-              <a:rPr lang="en-US" smtClean="0"/>
+              <a:rPr lang="en-US"/>
               <a:t>Click to edit Master title style</a:t>
             </a:r>
-            <a:endParaRPr lang="en-US"/>
           </a:p>
         </p:txBody>
       </p:sp>
@@ -2951,10 +2815,9 @@
           </a:lstStyle>
           <a:p>
             <a:r>
-              <a:rPr lang="en-US" smtClean="0"/>
+              <a:rPr lang="en-US"/>
               <a:t>Click to edit Master subtitle style</a:t>
             </a:r>
-            <a:endParaRPr lang="en-US"/>
           </a:p>
         </p:txBody>
       </p:sp>
@@ -2975,7 +2838,7 @@
           <a:p>
             <a:fld id="{5BCAD085-E8A6-8845-BD4E-CB4CCA059FC4}" type="datetimeFigureOut">
               <a:rPr lang="en-US" smtClean="0"/>
-              <a:t>1/27/13</a:t>
+              <a:t>9/7/2026</a:t>
             </a:fld>
             <a:endParaRPr lang="en-US"/>
           </a:p>
@@ -3069,10 +2932,9 @@
           <a:lstStyle/>
           <a:p>
             <a:r>
-              <a:rPr lang="en-US" smtClean="0"/>
+              <a:rPr lang="en-US"/>
               <a:t>Click to edit Master title style</a:t>
             </a:r>
-            <a:endParaRPr lang="en-US"/>
           </a:p>
         </p:txBody>
       </p:sp>
@@ -3093,38 +2955,37 @@
           <a:p>
             <a:pPr lvl="0"/>
             <a:r>
-              <a:rPr lang="en-US" smtClean="0"/>
+              <a:rPr lang="en-US"/>
               <a:t>Click to edit Master text styles</a:t>
             </a:r>
           </a:p>
           <a:p>
             <a:pPr lvl="1"/>
             <a:r>
-              <a:rPr lang="en-US" smtClean="0"/>
+              <a:rPr lang="en-US"/>
               <a:t>Second level</a:t>
             </a:r>
           </a:p>
           <a:p>
             <a:pPr lvl="2"/>
             <a:r>
-              <a:rPr lang="en-US" smtClean="0"/>
+              <a:rPr lang="en-US"/>
               <a:t>Third level</a:t>
             </a:r>
           </a:p>
           <a:p>
             <a:pPr lvl="3"/>
             <a:r>
-              <a:rPr lang="en-US" smtClean="0"/>
+              <a:rPr lang="en-US"/>
               <a:t>Fourth level</a:t>
             </a:r>
           </a:p>
           <a:p>
             <a:pPr lvl="4"/>
             <a:r>
-              <a:rPr lang="en-US" smtClean="0"/>
+              <a:rPr lang="en-US"/>
               <a:t>Fifth level</a:t>
             </a:r>
-            <a:endParaRPr lang="en-US"/>
           </a:p>
         </p:txBody>
       </p:sp>
@@ -3145,7 +3006,7 @@
           <a:p>
             <a:fld id="{5BCAD085-E8A6-8845-BD4E-CB4CCA059FC4}" type="datetimeFigureOut">
               <a:rPr lang="en-US" smtClean="0"/>
-              <a:t>1/27/13</a:t>
+              <a:t>9/7/2026</a:t>
             </a:fld>
             <a:endParaRPr lang="en-US"/>
           </a:p>
@@ -3244,10 +3105,9 @@
           <a:lstStyle/>
           <a:p>
             <a:r>
-              <a:rPr lang="en-US" smtClean="0"/>
+              <a:rPr lang="en-US"/>
               <a:t>Click to edit Master title style</a:t>
             </a:r>
-            <a:endParaRPr lang="en-US"/>
           </a:p>
         </p:txBody>
       </p:sp>
@@ -3273,38 +3133,37 @@
           <a:p>
             <a:pPr lvl="0"/>
             <a:r>
-              <a:rPr lang="en-US" smtClean="0"/>
+              <a:rPr lang="en-US"/>
               <a:t>Click to edit Master text styles</a:t>
             </a:r>
           </a:p>
           <a:p>
             <a:pPr lvl="1"/>
             <a:r>
-              <a:rPr lang="en-US" smtClean="0"/>
+              <a:rPr lang="en-US"/>
               <a:t>Second level</a:t>
             </a:r>
           </a:p>
           <a:p>
             <a:pPr lvl="2"/>
             <a:r>
-              <a:rPr lang="en-US" smtClean="0"/>
+              <a:rPr lang="en-US"/>
               <a:t>Third level</a:t>
             </a:r>
           </a:p>
           <a:p>
             <a:pPr lvl="3"/>
             <a:r>
-              <a:rPr lang="en-US" smtClean="0"/>
+              <a:rPr lang="en-US"/>
               <a:t>Fourth level</a:t>
             </a:r>
           </a:p>
           <a:p>
             <a:pPr lvl="4"/>
             <a:r>
-              <a:rPr lang="en-US" smtClean="0"/>
+              <a:rPr lang="en-US"/>
               <a:t>Fifth level</a:t>
             </a:r>
-            <a:endParaRPr lang="en-US"/>
           </a:p>
         </p:txBody>
       </p:sp>
@@ -3325,7 +3184,7 @@
           <a:p>
             <a:fld id="{5BCAD085-E8A6-8845-BD4E-CB4CCA059FC4}" type="datetimeFigureOut">
               <a:rPr lang="en-US" smtClean="0"/>
-              <a:t>1/27/13</a:t>
+              <a:t>9/7/2026</a:t>
             </a:fld>
             <a:endParaRPr lang="en-US"/>
           </a:p>
@@ -3419,10 +3278,9 @@
           <a:lstStyle/>
           <a:p>
             <a:r>
-              <a:rPr lang="en-US" smtClean="0"/>
+              <a:rPr lang="en-US"/>
               <a:t>Click to edit Master title style</a:t>
             </a:r>
-            <a:endParaRPr lang="en-US"/>
           </a:p>
         </p:txBody>
       </p:sp>
@@ -3443,38 +3301,37 @@
           <a:p>
             <a:pPr lvl="0"/>
             <a:r>
-              <a:rPr lang="en-US" smtClean="0"/>
+              <a:rPr lang="en-US"/>
               <a:t>Click to edit Master text styles</a:t>
             </a:r>
           </a:p>
           <a:p>
             <a:pPr lvl="1"/>
             <a:r>
-              <a:rPr lang="en-US" smtClean="0"/>
+              <a:rPr lang="en-US"/>
               <a:t>Second level</a:t>
             </a:r>
           </a:p>
           <a:p>
             <a:pPr lvl="2"/>
             <a:r>
-              <a:rPr lang="en-US" smtClean="0"/>
+              <a:rPr lang="en-US"/>
               <a:t>Third level</a:t>
             </a:r>
           </a:p>
           <a:p>
             <a:pPr lvl="3"/>
             <a:r>
-              <a:rPr lang="en-US" smtClean="0"/>
+              <a:rPr lang="en-US"/>
               <a:t>Fourth level</a:t>
             </a:r>
           </a:p>
           <a:p>
             <a:pPr lvl="4"/>
             <a:r>
-              <a:rPr lang="en-US" smtClean="0"/>
+              <a:rPr lang="en-US"/>
               <a:t>Fifth level</a:t>
             </a:r>
-            <a:endParaRPr lang="en-US"/>
           </a:p>
         </p:txBody>
       </p:sp>
@@ -3495,7 +3352,7 @@
           <a:p>
             <a:fld id="{5BCAD085-E8A6-8845-BD4E-CB4CCA059FC4}" type="datetimeFigureOut">
               <a:rPr lang="en-US" smtClean="0"/>
-              <a:t>1/27/13</a:t>
+              <a:t>9/7/2026</a:t>
             </a:fld>
             <a:endParaRPr lang="en-US"/>
           </a:p>
@@ -3598,10 +3455,9 @@
           </a:lstStyle>
           <a:p>
             <a:r>
-              <a:rPr lang="en-US" smtClean="0"/>
+              <a:rPr lang="en-US"/>
               <a:t>Click to edit Master title style</a:t>
             </a:r>
-            <a:endParaRPr lang="en-US"/>
           </a:p>
         </p:txBody>
       </p:sp>
@@ -3718,7 +3574,7 @@
           <a:p>
             <a:pPr lvl="0"/>
             <a:r>
-              <a:rPr lang="en-US" smtClean="0"/>
+              <a:rPr lang="en-US"/>
               <a:t>Click to edit Master text styles</a:t>
             </a:r>
           </a:p>
@@ -3741,7 +3597,7 @@
           <a:p>
             <a:fld id="{5BCAD085-E8A6-8845-BD4E-CB4CCA059FC4}" type="datetimeFigureOut">
               <a:rPr lang="en-US" smtClean="0"/>
-              <a:t>1/27/13</a:t>
+              <a:t>9/7/2026</a:t>
             </a:fld>
             <a:endParaRPr lang="en-US"/>
           </a:p>
@@ -3835,10 +3691,9 @@
           <a:lstStyle/>
           <a:p>
             <a:r>
-              <a:rPr lang="en-US" smtClean="0"/>
+              <a:rPr lang="en-US"/>
               <a:t>Click to edit Master title style</a:t>
             </a:r>
-            <a:endParaRPr lang="en-US"/>
           </a:p>
         </p:txBody>
       </p:sp>
@@ -3892,38 +3747,37 @@
           <a:p>
             <a:pPr lvl="0"/>
             <a:r>
-              <a:rPr lang="en-US" smtClean="0"/>
+              <a:rPr lang="en-US"/>
               <a:t>Click to edit Master text styles</a:t>
             </a:r>
           </a:p>
           <a:p>
             <a:pPr lvl="1"/>
             <a:r>
-              <a:rPr lang="en-US" smtClean="0"/>
+              <a:rPr lang="en-US"/>
               <a:t>Second level</a:t>
             </a:r>
           </a:p>
           <a:p>
             <a:pPr lvl="2"/>
             <a:r>
-              <a:rPr lang="en-US" smtClean="0"/>
+              <a:rPr lang="en-US"/>
               <a:t>Third level</a:t>
             </a:r>
           </a:p>
           <a:p>
             <a:pPr lvl="3"/>
             <a:r>
-              <a:rPr lang="en-US" smtClean="0"/>
+              <a:rPr lang="en-US"/>
               <a:t>Fourth level</a:t>
             </a:r>
           </a:p>
           <a:p>
             <a:pPr lvl="4"/>
             <a:r>
-              <a:rPr lang="en-US" smtClean="0"/>
+              <a:rPr lang="en-US"/>
               <a:t>Fifth level</a:t>
             </a:r>
-            <a:endParaRPr lang="en-US"/>
           </a:p>
         </p:txBody>
       </p:sp>
@@ -3977,38 +3831,37 @@
           <a:p>
             <a:pPr lvl="0"/>
             <a:r>
-              <a:rPr lang="en-US" smtClean="0"/>
+              <a:rPr lang="en-US"/>
               <a:t>Click to edit Master text styles</a:t>
             </a:r>
           </a:p>
           <a:p>
             <a:pPr lvl="1"/>
             <a:r>
-              <a:rPr lang="en-US" smtClean="0"/>
+              <a:rPr lang="en-US"/>
               <a:t>Second level</a:t>
             </a:r>
           </a:p>
           <a:p>
             <a:pPr lvl="2"/>
             <a:r>
-              <a:rPr lang="en-US" smtClean="0"/>
+              <a:rPr lang="en-US"/>
               <a:t>Third level</a:t>
             </a:r>
           </a:p>
           <a:p>
             <a:pPr lvl="3"/>
             <a:r>
-              <a:rPr lang="en-US" smtClean="0"/>
+              <a:rPr lang="en-US"/>
               <a:t>Fourth level</a:t>
             </a:r>
           </a:p>
           <a:p>
             <a:pPr lvl="4"/>
             <a:r>
-              <a:rPr lang="en-US" smtClean="0"/>
+              <a:rPr lang="en-US"/>
               <a:t>Fifth level</a:t>
             </a:r>
-            <a:endParaRPr lang="en-US"/>
           </a:p>
         </p:txBody>
       </p:sp>
@@ -4029,7 +3882,7 @@
           <a:p>
             <a:fld id="{5BCAD085-E8A6-8845-BD4E-CB4CCA059FC4}" type="datetimeFigureOut">
               <a:rPr lang="en-US" smtClean="0"/>
-              <a:t>1/27/13</a:t>
+              <a:t>9/7/2026</a:t>
             </a:fld>
             <a:endParaRPr lang="en-US"/>
           </a:p>
@@ -4127,10 +3980,9 @@
           </a:lstStyle>
           <a:p>
             <a:r>
-              <a:rPr lang="en-US" smtClean="0"/>
+              <a:rPr lang="en-US"/>
               <a:t>Click to edit Master title style</a:t>
             </a:r>
-            <a:endParaRPr lang="en-US"/>
           </a:p>
         </p:txBody>
       </p:sp>
@@ -4193,7 +4045,7 @@
           <a:p>
             <a:pPr lvl="0"/>
             <a:r>
-              <a:rPr lang="en-US" smtClean="0"/>
+              <a:rPr lang="en-US"/>
               <a:t>Click to edit Master text styles</a:t>
             </a:r>
           </a:p>
@@ -4249,38 +4101,37 @@
           <a:p>
             <a:pPr lvl="0"/>
             <a:r>
-              <a:rPr lang="en-US" smtClean="0"/>
+              <a:rPr lang="en-US"/>
               <a:t>Click to edit Master text styles</a:t>
             </a:r>
           </a:p>
           <a:p>
             <a:pPr lvl="1"/>
             <a:r>
-              <a:rPr lang="en-US" smtClean="0"/>
+              <a:rPr lang="en-US"/>
               <a:t>Second level</a:t>
             </a:r>
           </a:p>
           <a:p>
             <a:pPr lvl="2"/>
             <a:r>
-              <a:rPr lang="en-US" smtClean="0"/>
+              <a:rPr lang="en-US"/>
               <a:t>Third level</a:t>
             </a:r>
           </a:p>
           <a:p>
             <a:pPr lvl="3"/>
             <a:r>
-              <a:rPr lang="en-US" smtClean="0"/>
+              <a:rPr lang="en-US"/>
               <a:t>Fourth level</a:t>
             </a:r>
           </a:p>
           <a:p>
             <a:pPr lvl="4"/>
             <a:r>
-              <a:rPr lang="en-US" smtClean="0"/>
+              <a:rPr lang="en-US"/>
               <a:t>Fifth level</a:t>
             </a:r>
-            <a:endParaRPr lang="en-US"/>
           </a:p>
         </p:txBody>
       </p:sp>
@@ -4343,7 +4194,7 @@
           <a:p>
             <a:pPr lvl="0"/>
             <a:r>
-              <a:rPr lang="en-US" smtClean="0"/>
+              <a:rPr lang="en-US"/>
               <a:t>Click to edit Master text styles</a:t>
             </a:r>
           </a:p>
@@ -4399,38 +4250,37 @@
           <a:p>
             <a:pPr lvl="0"/>
             <a:r>
-              <a:rPr lang="en-US" smtClean="0"/>
+              <a:rPr lang="en-US"/>
               <a:t>Click to edit Master text styles</a:t>
             </a:r>
           </a:p>
           <a:p>
             <a:pPr lvl="1"/>
             <a:r>
-              <a:rPr lang="en-US" smtClean="0"/>
+              <a:rPr lang="en-US"/>
               <a:t>Second level</a:t>
             </a:r>
           </a:p>
           <a:p>
             <a:pPr lvl="2"/>
             <a:r>
-              <a:rPr lang="en-US" smtClean="0"/>
+              <a:rPr lang="en-US"/>
               <a:t>Third level</a:t>
             </a:r>
           </a:p>
           <a:p>
             <a:pPr lvl="3"/>
             <a:r>
-              <a:rPr lang="en-US" smtClean="0"/>
+              <a:rPr lang="en-US"/>
               <a:t>Fourth level</a:t>
             </a:r>
           </a:p>
           <a:p>
             <a:pPr lvl="4"/>
             <a:r>
-              <a:rPr lang="en-US" smtClean="0"/>
+              <a:rPr lang="en-US"/>
               <a:t>Fifth level</a:t>
             </a:r>
-            <a:endParaRPr lang="en-US"/>
           </a:p>
         </p:txBody>
       </p:sp>
@@ -4451,7 +4301,7 @@
           <a:p>
             <a:fld id="{5BCAD085-E8A6-8845-BD4E-CB4CCA059FC4}" type="datetimeFigureOut">
               <a:rPr lang="en-US" smtClean="0"/>
-              <a:t>1/27/13</a:t>
+              <a:t>9/7/2026</a:t>
             </a:fld>
             <a:endParaRPr lang="en-US"/>
           </a:p>
@@ -4545,10 +4395,9 @@
           <a:lstStyle/>
           <a:p>
             <a:r>
-              <a:rPr lang="en-US" smtClean="0"/>
+              <a:rPr lang="en-US"/>
               <a:t>Click to edit Master title style</a:t>
             </a:r>
-            <a:endParaRPr lang="en-US"/>
           </a:p>
         </p:txBody>
       </p:sp>
@@ -4569,7 +4418,7 @@
           <a:p>
             <a:fld id="{5BCAD085-E8A6-8845-BD4E-CB4CCA059FC4}" type="datetimeFigureOut">
               <a:rPr lang="en-US" smtClean="0"/>
-              <a:t>1/27/13</a:t>
+              <a:t>9/7/2026</a:t>
             </a:fld>
             <a:endParaRPr lang="en-US"/>
           </a:p>
@@ -4664,7 +4513,7 @@
           <a:p>
             <a:fld id="{5BCAD085-E8A6-8845-BD4E-CB4CCA059FC4}" type="datetimeFigureOut">
               <a:rPr lang="en-US" smtClean="0"/>
-              <a:t>1/27/13</a:t>
+              <a:t>9/7/2026</a:t>
             </a:fld>
             <a:endParaRPr lang="en-US"/>
           </a:p>
@@ -4767,10 +4616,9 @@
           </a:lstStyle>
           <a:p>
             <a:r>
-              <a:rPr lang="en-US" smtClean="0"/>
+              <a:rPr lang="en-US"/>
               <a:t>Click to edit Master title style</a:t>
             </a:r>
-            <a:endParaRPr lang="en-US"/>
           </a:p>
         </p:txBody>
       </p:sp>
@@ -4824,38 +4672,37 @@
           <a:p>
             <a:pPr lvl="0"/>
             <a:r>
-              <a:rPr lang="en-US" smtClean="0"/>
+              <a:rPr lang="en-US"/>
               <a:t>Click to edit Master text styles</a:t>
             </a:r>
           </a:p>
           <a:p>
             <a:pPr lvl="1"/>
             <a:r>
-              <a:rPr lang="en-US" smtClean="0"/>
+              <a:rPr lang="en-US"/>
               <a:t>Second level</a:t>
             </a:r>
           </a:p>
           <a:p>
             <a:pPr lvl="2"/>
             <a:r>
-              <a:rPr lang="en-US" smtClean="0"/>
+              <a:rPr lang="en-US"/>
               <a:t>Third level</a:t>
             </a:r>
           </a:p>
           <a:p>
             <a:pPr lvl="3"/>
             <a:r>
-              <a:rPr lang="en-US" smtClean="0"/>
+              <a:rPr lang="en-US"/>
               <a:t>Fourth level</a:t>
             </a:r>
           </a:p>
           <a:p>
             <a:pPr lvl="4"/>
             <a:r>
-              <a:rPr lang="en-US" smtClean="0"/>
+              <a:rPr lang="en-US"/>
               <a:t>Fifth level</a:t>
             </a:r>
-            <a:endParaRPr lang="en-US"/>
           </a:p>
         </p:txBody>
       </p:sp>
@@ -4918,7 +4765,7 @@
           <a:p>
             <a:pPr lvl="0"/>
             <a:r>
-              <a:rPr lang="en-US" smtClean="0"/>
+              <a:rPr lang="en-US"/>
               <a:t>Click to edit Master text styles</a:t>
             </a:r>
           </a:p>
@@ -4941,7 +4788,7 @@
           <a:p>
             <a:fld id="{5BCAD085-E8A6-8845-BD4E-CB4CCA059FC4}" type="datetimeFigureOut">
               <a:rPr lang="en-US" smtClean="0"/>
-              <a:t>1/27/13</a:t>
+              <a:t>9/7/2026</a:t>
             </a:fld>
             <a:endParaRPr lang="en-US"/>
           </a:p>
@@ -5044,10 +4891,9 @@
           </a:lstStyle>
           <a:p>
             <a:r>
-              <a:rPr lang="en-US" smtClean="0"/>
+              <a:rPr lang="en-US"/>
               <a:t>Click to edit Master title style</a:t>
             </a:r>
-            <a:endParaRPr lang="en-US"/>
           </a:p>
         </p:txBody>
       </p:sp>
@@ -5171,7 +5017,7 @@
           <a:p>
             <a:pPr lvl="0"/>
             <a:r>
-              <a:rPr lang="en-US" smtClean="0"/>
+              <a:rPr lang="en-US"/>
               <a:t>Click to edit Master text styles</a:t>
             </a:r>
           </a:p>
@@ -5194,7 +5040,7 @@
           <a:p>
             <a:fld id="{5BCAD085-E8A6-8845-BD4E-CB4CCA059FC4}" type="datetimeFigureOut">
               <a:rPr lang="en-US" smtClean="0"/>
-              <a:t>1/27/13</a:t>
+              <a:t>9/7/2026</a:t>
             </a:fld>
             <a:endParaRPr lang="en-US"/>
           </a:p>
@@ -5303,10 +5149,9 @@
           <a:lstStyle/>
           <a:p>
             <a:r>
-              <a:rPr lang="en-US" smtClean="0"/>
+              <a:rPr lang="en-US"/>
               <a:t>Click to edit Master title style</a:t>
             </a:r>
-            <a:endParaRPr lang="en-US"/>
           </a:p>
         </p:txBody>
       </p:sp>
@@ -5337,38 +5182,37 @@
           <a:p>
             <a:pPr lvl="0"/>
             <a:r>
-              <a:rPr lang="en-US" smtClean="0"/>
+              <a:rPr lang="en-US"/>
               <a:t>Click to edit Master text styles</a:t>
             </a:r>
           </a:p>
           <a:p>
             <a:pPr lvl="1"/>
             <a:r>
-              <a:rPr lang="en-US" smtClean="0"/>
+              <a:rPr lang="en-US"/>
               <a:t>Second level</a:t>
             </a:r>
           </a:p>
           <a:p>
             <a:pPr lvl="2"/>
             <a:r>
-              <a:rPr lang="en-US" smtClean="0"/>
+              <a:rPr lang="en-US"/>
               <a:t>Third level</a:t>
             </a:r>
           </a:p>
           <a:p>
             <a:pPr lvl="3"/>
             <a:r>
-              <a:rPr lang="en-US" smtClean="0"/>
+              <a:rPr lang="en-US"/>
               <a:t>Fourth level</a:t>
             </a:r>
           </a:p>
           <a:p>
             <a:pPr lvl="4"/>
             <a:r>
-              <a:rPr lang="en-US" smtClean="0"/>
+              <a:rPr lang="en-US"/>
               <a:t>Fifth level</a:t>
             </a:r>
-            <a:endParaRPr lang="en-US"/>
           </a:p>
         </p:txBody>
       </p:sp>
@@ -5407,7 +5251,7 @@
           <a:p>
             <a:fld id="{5BCAD085-E8A6-8845-BD4E-CB4CCA059FC4}" type="datetimeFigureOut">
               <a:rPr lang="en-US" smtClean="0"/>
-              <a:t>1/27/13</a:t>
+              <a:t>9/7/2026</a:t>
             </a:fld>
             <a:endParaRPr lang="en-US"/>
           </a:p>
@@ -5766,7 +5610,7 @@
 </file>
 
 <file path=ppt/slides/slide1.xml><?xml version="1.0" encoding="utf-8"?>
-<p:sld xmlns:a="http://schemas.openxmlformats.org/drawingml/2006/main" xmlns:p="http://schemas.openxmlformats.org/presentationml/2006/main" xmlns:r="http://schemas.openxmlformats.org/officeDocument/2006/relationships">
+<p:sld xmlns:a="http://schemas.openxmlformats.org/drawingml/2006/main" xmlns:r="http://schemas.openxmlformats.org/officeDocument/2006/relationships" xmlns:p="http://schemas.openxmlformats.org/presentationml/2006/main">
   <p:cSld>
     <p:spTree>
       <p:nvGrpSpPr>
@@ -5774,7 +5618,14 @@
         <p:cNvGrpSpPr/>
         <p:nvPr/>
       </p:nvGrpSpPr>
-      <p:grpSpPr/>
+      <p:grpSpPr>
+        <a:xfrm>
+          <a:off x="0" y="0"/>
+          <a:ext cx="0" cy="0"/>
+          <a:chOff x="0" y="0"/>
+          <a:chExt cx="0" cy="0"/>
+        </a:xfrm>
+      </p:grpSpPr>
       <p:sp>
         <p:nvSpPr>
           <p:cNvPr id="2" name="Rectangle 1"/>
@@ -5816,435 +5667,13 @@
           <a:lstStyle/>
           <a:p>
             <a:pPr algn="ctr"/>
+            <a:endParaRPr/>
           </a:p>
         </p:txBody>
       </p:sp>
       <p:pic>
         <p:nvPicPr>
           <p:cNvPr id="3" name="Picture 2" descr="porpoise-logo.png"/>
-          <p:cNvPicPr>
-            <a:picLocks noChangeAspect="1"/>
-          </p:cNvPicPr>
-          <p:nvPr/>
-        </p:nvPicPr>
-        <p:blipFill>
-          <a:blip r:embed="rId2"/>
-          <a:stretch>
-            <a:fillRect/>
-          </a:stretch>
-        </p:blipFill>
-        <p:spPr>
-          <a:xfrm>
-            <a:off x="10922762" y="457200"/>
-            <a:ext cx="766013" cy="777240"/>
-          </a:xfrm>
-          <a:prstGeom prst="rect">
-            <a:avLst/>
-          </a:prstGeom>
-        </p:spPr>
-      </p:pic>
-      <p:sp>
-        <p:nvSpPr>
-          <p:cNvPr id="4" name="TextBox 3"/>
-          <p:cNvSpPr txBox="1"/>
-          <p:nvPr/>
-        </p:nvSpPr>
-        <p:spPr>
-          <a:xfrm>
-            <a:off x="502920" y="1051560"/>
-            <a:ext cx="6492240" cy="365760"/>
-          </a:xfrm>
-          <a:prstGeom prst="rect">
-            <a:avLst/>
-          </a:prstGeom>
-          <a:noFill/>
-        </p:spPr>
-        <p:txBody>
-          <a:bodyPr wrap="square" lIns="0" tIns="0" rIns="0" bIns="0">
-            <a:spAutoFit/>
-          </a:bodyPr>
-          <a:lstStyle/>
-          <a:p>
-            <a:pPr algn="l">
-              <a:lnSpc>
-                <a:spcPct val="100000"/>
-              </a:lnSpc>
-              <a:spcAft>
-                <a:spcPts val="0"/>
-              </a:spcAft>
-              <a:defRPr sz="1600" b="1">
-                <a:solidFill>
-                  <a:srgbClr val="0E7C86"/>
-                </a:solidFill>
-                <a:latin typeface="Calibri"/>
-              </a:defRPr>
-            </a:pPr>
-            <a:r>
-              <a:rPr sz="1600" b="1">
-                <a:solidFill>
-                  <a:srgbClr val="0E7C86"/>
-                </a:solidFill>
-                <a:latin typeface="Calibri"/>
-              </a:rPr>
-              <a:t>LESSON 3</a:t>
-            </a:r>
-          </a:p>
-        </p:txBody>
-      </p:sp>
-      <p:sp>
-        <p:nvSpPr>
-          <p:cNvPr id="5" name="TextBox 4"/>
-          <p:cNvSpPr txBox="1"/>
-          <p:nvPr/>
-        </p:nvSpPr>
-        <p:spPr>
-          <a:xfrm>
-            <a:off x="502920" y="1481328"/>
-            <a:ext cx="6492240" cy="1554480"/>
-          </a:xfrm>
-          <a:prstGeom prst="rect">
-            <a:avLst/>
-          </a:prstGeom>
-          <a:noFill/>
-        </p:spPr>
-        <p:txBody>
-          <a:bodyPr wrap="square" lIns="0" tIns="0" rIns="0" bIns="0">
-            <a:spAutoFit/>
-          </a:bodyPr>
-          <a:lstStyle/>
-          <a:p>
-            <a:pPr algn="l">
-              <a:lnSpc>
-                <a:spcPct val="95000"/>
-              </a:lnSpc>
-              <a:spcAft>
-                <a:spcPts val="0"/>
-              </a:spcAft>
-              <a:defRPr sz="4000" b="1">
-                <a:solidFill>
-                  <a:srgbClr val="1F3A5F"/>
-                </a:solidFill>
-                <a:latin typeface="Calibri"/>
-              </a:defRPr>
-            </a:pPr>
-            <a:r>
-              <a:rPr sz="4000" b="1">
-                <a:solidFill>
-                  <a:srgbClr val="1F3A5F"/>
-                </a:solidFill>
-                <a:latin typeface="Calibri"/>
-              </a:rPr>
-              <a:t>Controller Programming</a:t>
-            </a:r>
-          </a:p>
-        </p:txBody>
-      </p:sp>
-      <p:sp>
-        <p:nvSpPr>
-          <p:cNvPr id="6" name="TextBox 5"/>
-          <p:cNvSpPr txBox="1"/>
-          <p:nvPr/>
-        </p:nvSpPr>
-        <p:spPr>
-          <a:xfrm>
-            <a:off x="502920" y="3154680"/>
-            <a:ext cx="6492240" cy="960120"/>
-          </a:xfrm>
-          <a:prstGeom prst="rect">
-            <a:avLst/>
-          </a:prstGeom>
-          <a:noFill/>
-        </p:spPr>
-        <p:txBody>
-          <a:bodyPr wrap="square" lIns="0" tIns="0" rIns="0" bIns="0">
-            <a:spAutoFit/>
-          </a:bodyPr>
-          <a:lstStyle/>
-          <a:p>
-            <a:pPr algn="l">
-              <a:lnSpc>
-                <a:spcPct val="100000"/>
-              </a:lnSpc>
-              <a:spcAft>
-                <a:spcPts val="0"/>
-              </a:spcAft>
-              <a:defRPr sz="1700" b="0">
-                <a:solidFill>
-                  <a:srgbClr val="222222"/>
-                </a:solidFill>
-                <a:latin typeface="Calibri"/>
-              </a:defRPr>
-            </a:pPr>
-            <a:r>
-              <a:rPr sz="1700" b="0">
-                <a:solidFill>
-                  <a:srgbClr val="222222"/>
-                </a:solidFill>
-                <a:latin typeface="Calibri"/>
-              </a:rPr>
-              <a:t>Bluetooth, thumbsticks, deadzones, and turning a number from your thumb into a speed for four wheels.</a:t>
-            </a:r>
-          </a:p>
-        </p:txBody>
-      </p:sp>
-      <p:sp>
-        <p:nvSpPr>
-          <p:cNvPr id="7" name="TextBox 6"/>
-          <p:cNvSpPr txBox="1"/>
-          <p:nvPr/>
-        </p:nvSpPr>
-        <p:spPr>
-          <a:xfrm>
-            <a:off x="502920" y="3931920"/>
-            <a:ext cx="6492240" cy="2148840"/>
-          </a:xfrm>
-          <a:prstGeom prst="rect">
-            <a:avLst/>
-          </a:prstGeom>
-          <a:noFill/>
-        </p:spPr>
-        <p:txBody>
-          <a:bodyPr wrap="square" lIns="0" tIns="0" rIns="0" bIns="0">
-            <a:spAutoFit/>
-          </a:bodyPr>
-          <a:lstStyle/>
-          <a:p>
-            <a:pPr algn="l">
-              <a:lnSpc>
-                <a:spcPct val="100000"/>
-              </a:lnSpc>
-              <a:spcAft>
-                <a:spcPts val="100"/>
-              </a:spcAft>
-              <a:defRPr sz="1200" b="0">
-                <a:solidFill>
-                  <a:srgbClr val="666666"/>
-                </a:solidFill>
-                <a:latin typeface="Calibri"/>
-              </a:defRPr>
-            </a:pPr>
-            <a:r>
-              <a:rPr sz="1200" b="0">
-                <a:solidFill>
-                  <a:srgbClr val="666666"/>
-                </a:solidFill>
-                <a:latin typeface="Calibri"/>
-              </a:rPr>
-              <a:t>PORPOISE ROBOTICS  -  Precision Oceanographic Program On and In the Sea Environment</a:t>
-            </a:r>
-          </a:p>
-          <a:p>
-            <a:pPr algn="l">
-              <a:lnSpc>
-                <a:spcPct val="100000"/>
-              </a:lnSpc>
-              <a:spcAft>
-                <a:spcPts val="100"/>
-              </a:spcAft>
-              <a:defRPr sz="1200" b="0">
-                <a:solidFill>
-                  <a:srgbClr val="666666"/>
-                </a:solidFill>
-                <a:latin typeface="Calibri"/>
-              </a:defRPr>
-            </a:pPr>
-            <a:r>
-              <a:rPr sz="1200" b="0">
-                <a:solidFill>
-                  <a:srgbClr val="666666"/>
-                </a:solidFill>
-                <a:latin typeface="Calibri"/>
-              </a:rPr>
-              <a:t>porpoiserobotics.org</a:t>
-            </a:r>
-          </a:p>
-          <a:p>
-            <a:pPr algn="l">
-              <a:lnSpc>
-                <a:spcPct val="100000"/>
-              </a:lnSpc>
-              <a:spcAft>
-                <a:spcPts val="100"/>
-              </a:spcAft>
-              <a:defRPr sz="600" b="0">
-                <a:solidFill>
-                  <a:srgbClr val="666666"/>
-                </a:solidFill>
-                <a:latin typeface="Calibri"/>
-              </a:defRPr>
-            </a:pPr>
-          </a:p>
-          <a:p>
-            <a:pPr algn="l">
-              <a:lnSpc>
-                <a:spcPct val="100000"/>
-              </a:lnSpc>
-              <a:spcAft>
-                <a:spcPts val="100"/>
-              </a:spcAft>
-              <a:defRPr sz="1200" b="0">
-                <a:solidFill>
-                  <a:srgbClr val="666666"/>
-                </a:solidFill>
-                <a:latin typeface="Calibri"/>
-              </a:defRPr>
-            </a:pPr>
-            <a:r>
-              <a:rPr sz="1200" b="0">
-                <a:solidFill>
-                  <a:srgbClr val="666666"/>
-                </a:solidFill>
-                <a:latin typeface="Calibri"/>
-              </a:rPr>
-              <a:t>Kevin Bowen, President  -  kbowen6@icloud.com</a:t>
-            </a:r>
-          </a:p>
-          <a:p>
-            <a:pPr algn="l">
-              <a:lnSpc>
-                <a:spcPct val="100000"/>
-              </a:lnSpc>
-              <a:spcAft>
-                <a:spcPts val="100"/>
-              </a:spcAft>
-              <a:defRPr sz="1200" b="0">
-                <a:solidFill>
-                  <a:srgbClr val="666666"/>
-                </a:solidFill>
-                <a:latin typeface="Calibri"/>
-              </a:defRPr>
-            </a:pPr>
-            <a:r>
-              <a:rPr sz="1200" b="0">
-                <a:solidFill>
-                  <a:srgbClr val="666666"/>
-                </a:solidFill>
-                <a:latin typeface="Calibri"/>
-              </a:rPr>
-              <a:t>Malcom Graham, VP Education      Louis Parker, VP Technology</a:t>
-            </a:r>
-          </a:p>
-          <a:p>
-            <a:pPr algn="l">
-              <a:lnSpc>
-                <a:spcPct val="100000"/>
-              </a:lnSpc>
-              <a:spcAft>
-                <a:spcPts val="100"/>
-              </a:spcAft>
-              <a:defRPr sz="1200" b="0">
-                <a:solidFill>
-                  <a:srgbClr val="666666"/>
-                </a:solidFill>
-                <a:latin typeface="Calibri"/>
-              </a:defRPr>
-            </a:pPr>
-            <a:r>
-              <a:rPr sz="1200" b="0">
-                <a:solidFill>
-                  <a:srgbClr val="666666"/>
-                </a:solidFill>
-                <a:latin typeface="Calibri"/>
-              </a:rPr>
-              <a:t>Valen Farre, System Engineer      Gary Howland, Animation</a:t>
-            </a:r>
-          </a:p>
-          <a:p>
-            <a:pPr algn="l">
-              <a:lnSpc>
-                <a:spcPct val="100000"/>
-              </a:lnSpc>
-              <a:spcAft>
-                <a:spcPts val="100"/>
-              </a:spcAft>
-              <a:defRPr sz="1200" b="0">
-                <a:solidFill>
-                  <a:srgbClr val="666666"/>
-                </a:solidFill>
-                <a:latin typeface="Calibri"/>
-              </a:defRPr>
-            </a:pPr>
-            <a:r>
-              <a:rPr sz="1200" b="0">
-                <a:solidFill>
-                  <a:srgbClr val="666666"/>
-                </a:solidFill>
-                <a:latin typeface="Calibri"/>
-              </a:rPr>
-              <a:t>Eddie Revollo, Artificial Intelligence</a:t>
-            </a:r>
-          </a:p>
-          <a:p>
-            <a:pPr algn="l">
-              <a:lnSpc>
-                <a:spcPct val="100000"/>
-              </a:lnSpc>
-              <a:spcAft>
-                <a:spcPts val="100"/>
-              </a:spcAft>
-              <a:defRPr sz="1200" b="0">
-                <a:solidFill>
-                  <a:srgbClr val="666666"/>
-                </a:solidFill>
-                <a:latin typeface="Calibri"/>
-              </a:defRPr>
-            </a:pPr>
-            <a:r>
-              <a:rPr sz="1200" b="0">
-                <a:solidFill>
-                  <a:srgbClr val="666666"/>
-                </a:solidFill>
-                <a:latin typeface="Calibri"/>
-              </a:rPr>
-              <a:t>Interns: Oscar Canazales, Krishnansh Vemulapalli, Soham Gangal, Erik Olsen</a:t>
-            </a:r>
-          </a:p>
-          <a:p>
-            <a:pPr algn="l">
-              <a:lnSpc>
-                <a:spcPct val="100000"/>
-              </a:lnSpc>
-              <a:spcAft>
-                <a:spcPts val="100"/>
-              </a:spcAft>
-              <a:defRPr sz="600" b="0">
-                <a:solidFill>
-                  <a:srgbClr val="666666"/>
-                </a:solidFill>
-                <a:latin typeface="Calibri"/>
-              </a:defRPr>
-            </a:pPr>
-          </a:p>
-          <a:p>
-            <a:pPr algn="l">
-              <a:lnSpc>
-                <a:spcPct val="100000"/>
-              </a:lnSpc>
-              <a:spcAft>
-                <a:spcPts val="100"/>
-              </a:spcAft>
-              <a:defRPr sz="1200" b="0">
-                <a:solidFill>
-                  <a:srgbClr val="666666"/>
-                </a:solidFill>
-                <a:latin typeface="Calibri"/>
-              </a:defRPr>
-            </a:pPr>
-            <a:r>
-              <a:rPr sz="1200" b="0">
-                <a:solidFill>
-                  <a:srgbClr val="666666"/>
-                </a:solidFill>
-                <a:latin typeface="Calibri"/>
-              </a:rPr>
-              <a:t>Three hours.  Bring the PS3 controller paired to your vehicle.</a:t>
-            </a:r>
-          </a:p>
-        </p:txBody>
-      </p:sp>
-      <p:pic>
-        <p:nvPicPr>
-          <p:cNvPr id="8" name="Picture 7" descr="vehicle-with-ps3-controller.jpg"/>
           <p:cNvPicPr>
             <a:picLocks noChangeAspect="1"/>
           </p:cNvPicPr>
@@ -6258,6 +5687,441 @@
         </p:blipFill>
         <p:spPr>
           <a:xfrm>
+            <a:off x="10922762" y="457200"/>
+            <a:ext cx="766013" cy="777240"/>
+          </a:xfrm>
+          <a:prstGeom prst="rect">
+            <a:avLst/>
+          </a:prstGeom>
+        </p:spPr>
+      </p:pic>
+      <p:sp>
+        <p:nvSpPr>
+          <p:cNvPr id="4" name="TextBox 3"/>
+          <p:cNvSpPr txBox="1"/>
+          <p:nvPr/>
+        </p:nvSpPr>
+        <p:spPr>
+          <a:xfrm>
+            <a:off x="502920" y="1051560"/>
+            <a:ext cx="6492240" cy="365760"/>
+          </a:xfrm>
+          <a:prstGeom prst="rect">
+            <a:avLst/>
+          </a:prstGeom>
+          <a:noFill/>
+        </p:spPr>
+        <p:txBody>
+          <a:bodyPr wrap="square" lIns="0" tIns="0" rIns="0" bIns="0">
+            <a:spAutoFit/>
+          </a:bodyPr>
+          <a:lstStyle/>
+          <a:p>
+            <a:pPr algn="l">
+              <a:lnSpc>
+                <a:spcPct val="100000"/>
+              </a:lnSpc>
+              <a:spcAft>
+                <a:spcPts val="0"/>
+              </a:spcAft>
+              <a:defRPr sz="1600" b="1">
+                <a:solidFill>
+                  <a:srgbClr val="0E7C86"/>
+                </a:solidFill>
+                <a:latin typeface="Calibri"/>
+              </a:defRPr>
+            </a:pPr>
+            <a:r>
+              <a:rPr sz="1600" b="1">
+                <a:solidFill>
+                  <a:srgbClr val="0E7C86"/>
+                </a:solidFill>
+                <a:latin typeface="Calibri"/>
+              </a:rPr>
+              <a:t>LESSON 3</a:t>
+            </a:r>
+          </a:p>
+        </p:txBody>
+      </p:sp>
+      <p:sp>
+        <p:nvSpPr>
+          <p:cNvPr id="5" name="TextBox 4"/>
+          <p:cNvSpPr txBox="1"/>
+          <p:nvPr/>
+        </p:nvSpPr>
+        <p:spPr>
+          <a:xfrm>
+            <a:off x="502920" y="1481328"/>
+            <a:ext cx="6492240" cy="1554480"/>
+          </a:xfrm>
+          <a:prstGeom prst="rect">
+            <a:avLst/>
+          </a:prstGeom>
+          <a:noFill/>
+        </p:spPr>
+        <p:txBody>
+          <a:bodyPr wrap="square" lIns="0" tIns="0" rIns="0" bIns="0">
+            <a:spAutoFit/>
+          </a:bodyPr>
+          <a:lstStyle/>
+          <a:p>
+            <a:pPr algn="l">
+              <a:lnSpc>
+                <a:spcPct val="95000"/>
+              </a:lnSpc>
+              <a:spcAft>
+                <a:spcPts val="0"/>
+              </a:spcAft>
+              <a:defRPr sz="4000" b="1">
+                <a:solidFill>
+                  <a:srgbClr val="1F3A5F"/>
+                </a:solidFill>
+                <a:latin typeface="Calibri"/>
+              </a:defRPr>
+            </a:pPr>
+            <a:r>
+              <a:rPr sz="4000" b="1">
+                <a:solidFill>
+                  <a:srgbClr val="1F3A5F"/>
+                </a:solidFill>
+                <a:latin typeface="Calibri"/>
+              </a:rPr>
+              <a:t>Controller Programming</a:t>
+            </a:r>
+          </a:p>
+        </p:txBody>
+      </p:sp>
+      <p:sp>
+        <p:nvSpPr>
+          <p:cNvPr id="6" name="TextBox 5"/>
+          <p:cNvSpPr txBox="1"/>
+          <p:nvPr/>
+        </p:nvSpPr>
+        <p:spPr>
+          <a:xfrm>
+            <a:off x="502920" y="3154680"/>
+            <a:ext cx="6492240" cy="960120"/>
+          </a:xfrm>
+          <a:prstGeom prst="rect">
+            <a:avLst/>
+          </a:prstGeom>
+          <a:noFill/>
+        </p:spPr>
+        <p:txBody>
+          <a:bodyPr wrap="square" lIns="0" tIns="0" rIns="0" bIns="0">
+            <a:spAutoFit/>
+          </a:bodyPr>
+          <a:lstStyle/>
+          <a:p>
+            <a:pPr algn="l">
+              <a:lnSpc>
+                <a:spcPct val="100000"/>
+              </a:lnSpc>
+              <a:spcAft>
+                <a:spcPts val="0"/>
+              </a:spcAft>
+              <a:defRPr sz="1700" b="0">
+                <a:solidFill>
+                  <a:srgbClr val="222222"/>
+                </a:solidFill>
+                <a:latin typeface="Calibri"/>
+              </a:defRPr>
+            </a:pPr>
+            <a:r>
+              <a:rPr sz="1700" b="0">
+                <a:solidFill>
+                  <a:srgbClr val="222222"/>
+                </a:solidFill>
+                <a:latin typeface="Calibri"/>
+              </a:rPr>
+              <a:t>Bluetooth, thumbsticks, deadzones, and turning a number from your thumb into a speed for four wheels.</a:t>
+            </a:r>
+          </a:p>
+        </p:txBody>
+      </p:sp>
+      <p:sp>
+        <p:nvSpPr>
+          <p:cNvPr id="7" name="TextBox 6"/>
+          <p:cNvSpPr txBox="1"/>
+          <p:nvPr/>
+        </p:nvSpPr>
+        <p:spPr>
+          <a:xfrm>
+            <a:off x="502920" y="3931920"/>
+            <a:ext cx="6492240" cy="2148840"/>
+          </a:xfrm>
+          <a:prstGeom prst="rect">
+            <a:avLst/>
+          </a:prstGeom>
+          <a:noFill/>
+        </p:spPr>
+        <p:txBody>
+          <a:bodyPr wrap="square" lIns="0" tIns="0" rIns="0" bIns="0">
+            <a:spAutoFit/>
+          </a:bodyPr>
+          <a:lstStyle/>
+          <a:p>
+            <a:pPr algn="l">
+              <a:lnSpc>
+                <a:spcPct val="100000"/>
+              </a:lnSpc>
+              <a:spcAft>
+                <a:spcPts val="100"/>
+              </a:spcAft>
+              <a:defRPr sz="1200" b="0">
+                <a:solidFill>
+                  <a:srgbClr val="666666"/>
+                </a:solidFill>
+                <a:latin typeface="Calibri"/>
+              </a:defRPr>
+            </a:pPr>
+            <a:r>
+              <a:rPr sz="1200" b="0">
+                <a:solidFill>
+                  <a:srgbClr val="666666"/>
+                </a:solidFill>
+                <a:latin typeface="Calibri"/>
+              </a:rPr>
+              <a:t>PORPOISE ROBOTICS  -  Precision Oceanographic Program On and In the Sea Environment</a:t>
+            </a:r>
+          </a:p>
+          <a:p>
+            <a:pPr algn="l">
+              <a:lnSpc>
+                <a:spcPct val="100000"/>
+              </a:lnSpc>
+              <a:spcAft>
+                <a:spcPts val="100"/>
+              </a:spcAft>
+              <a:defRPr sz="1200" b="0">
+                <a:solidFill>
+                  <a:srgbClr val="666666"/>
+                </a:solidFill>
+                <a:latin typeface="Calibri"/>
+              </a:defRPr>
+            </a:pPr>
+            <a:r>
+              <a:rPr sz="1200" b="0">
+                <a:solidFill>
+                  <a:srgbClr val="666666"/>
+                </a:solidFill>
+                <a:latin typeface="Calibri"/>
+              </a:rPr>
+              <a:t>porpoiserobotics.org</a:t>
+            </a:r>
+          </a:p>
+          <a:p>
+            <a:pPr algn="l">
+              <a:lnSpc>
+                <a:spcPct val="100000"/>
+              </a:lnSpc>
+              <a:spcAft>
+                <a:spcPts val="100"/>
+              </a:spcAft>
+              <a:defRPr sz="600" b="0">
+                <a:solidFill>
+                  <a:srgbClr val="666666"/>
+                </a:solidFill>
+                <a:latin typeface="Calibri"/>
+              </a:defRPr>
+            </a:pPr>
+            <a:endParaRPr sz="1200" b="0">
+              <a:solidFill>
+                <a:srgbClr val="666666"/>
+              </a:solidFill>
+              <a:latin typeface="Calibri"/>
+            </a:endParaRPr>
+          </a:p>
+          <a:p>
+            <a:pPr algn="l">
+              <a:lnSpc>
+                <a:spcPct val="100000"/>
+              </a:lnSpc>
+              <a:spcAft>
+                <a:spcPts val="100"/>
+              </a:spcAft>
+              <a:defRPr sz="1200" b="0">
+                <a:solidFill>
+                  <a:srgbClr val="666666"/>
+                </a:solidFill>
+                <a:latin typeface="Calibri"/>
+              </a:defRPr>
+            </a:pPr>
+            <a:r>
+              <a:rPr sz="1200" b="0">
+                <a:solidFill>
+                  <a:srgbClr val="666666"/>
+                </a:solidFill>
+                <a:latin typeface="Calibri"/>
+              </a:rPr>
+              <a:t>Kevin Bowen, President  -  kbowen6@icloud.com</a:t>
+            </a:r>
+          </a:p>
+          <a:p>
+            <a:pPr algn="l">
+              <a:lnSpc>
+                <a:spcPct val="100000"/>
+              </a:lnSpc>
+              <a:spcAft>
+                <a:spcPts val="100"/>
+              </a:spcAft>
+              <a:defRPr sz="1200" b="0">
+                <a:solidFill>
+                  <a:srgbClr val="666666"/>
+                </a:solidFill>
+                <a:latin typeface="Calibri"/>
+              </a:defRPr>
+            </a:pPr>
+            <a:r>
+              <a:rPr sz="1200" b="0">
+                <a:solidFill>
+                  <a:srgbClr val="666666"/>
+                </a:solidFill>
+                <a:latin typeface="Calibri"/>
+              </a:rPr>
+              <a:t>Malcom Graham, VP Education      Louis Parker, VP Technology</a:t>
+            </a:r>
+          </a:p>
+          <a:p>
+            <a:pPr algn="l">
+              <a:lnSpc>
+                <a:spcPct val="100000"/>
+              </a:lnSpc>
+              <a:spcAft>
+                <a:spcPts val="100"/>
+              </a:spcAft>
+              <a:defRPr sz="1200" b="0">
+                <a:solidFill>
+                  <a:srgbClr val="666666"/>
+                </a:solidFill>
+                <a:latin typeface="Calibri"/>
+              </a:defRPr>
+            </a:pPr>
+            <a:r>
+              <a:rPr sz="1200" b="0">
+                <a:solidFill>
+                  <a:srgbClr val="666666"/>
+                </a:solidFill>
+                <a:latin typeface="Calibri"/>
+              </a:rPr>
+              <a:t>Valen Farre, System Engineer      Gary Howland, Animation</a:t>
+            </a:r>
+          </a:p>
+          <a:p>
+            <a:pPr algn="l">
+              <a:lnSpc>
+                <a:spcPct val="100000"/>
+              </a:lnSpc>
+              <a:spcAft>
+                <a:spcPts val="100"/>
+              </a:spcAft>
+              <a:defRPr sz="1200" b="0">
+                <a:solidFill>
+                  <a:srgbClr val="666666"/>
+                </a:solidFill>
+                <a:latin typeface="Calibri"/>
+              </a:defRPr>
+            </a:pPr>
+            <a:r>
+              <a:rPr sz="1200" b="0">
+                <a:solidFill>
+                  <a:srgbClr val="666666"/>
+                </a:solidFill>
+                <a:latin typeface="Calibri"/>
+              </a:rPr>
+              <a:t>Eddie Revollo, Artificial Intelligence</a:t>
+            </a:r>
+          </a:p>
+          <a:p>
+            <a:pPr algn="l">
+              <a:lnSpc>
+                <a:spcPct val="100000"/>
+              </a:lnSpc>
+              <a:spcAft>
+                <a:spcPts val="100"/>
+              </a:spcAft>
+              <a:defRPr sz="1200" b="0">
+                <a:solidFill>
+                  <a:srgbClr val="666666"/>
+                </a:solidFill>
+                <a:latin typeface="Calibri"/>
+              </a:defRPr>
+            </a:pPr>
+            <a:r>
+              <a:rPr sz="1200" b="0">
+                <a:solidFill>
+                  <a:srgbClr val="666666"/>
+                </a:solidFill>
+                <a:latin typeface="Calibri"/>
+              </a:rPr>
+              <a:t>Interns: Oscar Canazales, Krishnansh Vemulapalli, Soham Gangal, Erik Olsen</a:t>
+            </a:r>
+          </a:p>
+          <a:p>
+            <a:pPr algn="l">
+              <a:lnSpc>
+                <a:spcPct val="100000"/>
+              </a:lnSpc>
+              <a:spcAft>
+                <a:spcPts val="100"/>
+              </a:spcAft>
+              <a:defRPr sz="600" b="0">
+                <a:solidFill>
+                  <a:srgbClr val="666666"/>
+                </a:solidFill>
+                <a:latin typeface="Calibri"/>
+              </a:defRPr>
+            </a:pPr>
+            <a:endParaRPr sz="1200" b="0">
+              <a:solidFill>
+                <a:srgbClr val="666666"/>
+              </a:solidFill>
+              <a:latin typeface="Calibri"/>
+            </a:endParaRPr>
+          </a:p>
+          <a:p>
+            <a:pPr algn="l">
+              <a:lnSpc>
+                <a:spcPct val="100000"/>
+              </a:lnSpc>
+              <a:spcAft>
+                <a:spcPts val="100"/>
+              </a:spcAft>
+              <a:defRPr sz="1200" b="0">
+                <a:solidFill>
+                  <a:srgbClr val="666666"/>
+                </a:solidFill>
+                <a:latin typeface="Calibri"/>
+              </a:defRPr>
+            </a:pPr>
+            <a:r>
+              <a:rPr sz="1200" b="0">
+                <a:solidFill>
+                  <a:srgbClr val="666666"/>
+                </a:solidFill>
+                <a:latin typeface="Calibri"/>
+              </a:rPr>
+              <a:t>Three hours.  Bring the PS3 controller paired to your vehicle.</a:t>
+            </a:r>
+          </a:p>
+        </p:txBody>
+      </p:sp>
+      <p:pic>
+        <p:nvPicPr>
+          <p:cNvPr id="8" name="Picture 7" descr="vehicle-with-ps3-controller.jpg"/>
+          <p:cNvPicPr>
+            <a:picLocks noChangeAspect="1"/>
+          </p:cNvPicPr>
+          <p:nvPr/>
+        </p:nvPicPr>
+        <p:blipFill>
+          <a:blip r:embed="rId4"/>
+          <a:stretch>
+            <a:fillRect/>
+          </a:stretch>
+        </p:blipFill>
+        <p:spPr>
+          <a:xfrm>
             <a:off x="7223760" y="2023110"/>
             <a:ext cx="4480560" cy="3360420"/>
           </a:xfrm>
@@ -6323,7 +6187,7 @@
 </file>
 
 <file path=ppt/slides/slide10.xml><?xml version="1.0" encoding="utf-8"?>
-<p:sld xmlns:a="http://schemas.openxmlformats.org/drawingml/2006/main" xmlns:p="http://schemas.openxmlformats.org/presentationml/2006/main" xmlns:r="http://schemas.openxmlformats.org/officeDocument/2006/relationships">
+<p:sld xmlns:a="http://schemas.openxmlformats.org/drawingml/2006/main" xmlns:r="http://schemas.openxmlformats.org/officeDocument/2006/relationships" xmlns:p="http://schemas.openxmlformats.org/presentationml/2006/main">
   <p:cSld>
     <p:spTree>
       <p:nvGrpSpPr>
@@ -6331,7 +6195,14 @@
         <p:cNvGrpSpPr/>
         <p:nvPr/>
       </p:nvGrpSpPr>
-      <p:grpSpPr/>
+      <p:grpSpPr>
+        <a:xfrm>
+          <a:off x="0" y="0"/>
+          <a:ext cx="0" cy="0"/>
+          <a:chOff x="0" y="0"/>
+          <a:chExt cx="0" cy="0"/>
+        </a:xfrm>
+      </p:grpSpPr>
       <p:sp>
         <p:nvSpPr>
           <p:cNvPr id="2" name="Title 1"/>
@@ -6419,6 +6290,7 @@
           <a:lstStyle/>
           <a:p>
             <a:pPr algn="ctr"/>
+            <a:endParaRPr/>
           </a:p>
         </p:txBody>
       </p:sp>
@@ -6579,6 +6451,12 @@
                 <a:latin typeface="Calibri"/>
               </a:defRPr>
             </a:pPr>
+            <a:endParaRPr sz="2000" b="0">
+              <a:solidFill>
+                <a:srgbClr val="222222"/>
+              </a:solidFill>
+              <a:latin typeface="Calibri"/>
+            </a:endParaRPr>
           </a:p>
           <a:p>
             <a:pPr algn="l">
@@ -6818,6 +6696,12 @@
                 <a:latin typeface="Calibri"/>
               </a:defRPr>
             </a:pPr>
+            <a:endParaRPr sz="1900" b="0">
+              <a:solidFill>
+                <a:srgbClr val="222222"/>
+              </a:solidFill>
+              <a:latin typeface="Calibri"/>
+            </a:endParaRPr>
           </a:p>
           <a:p>
             <a:pPr algn="l">
@@ -6887,7 +6771,7 @@
           </a:fontRef>
         </p:style>
         <p:txBody>
-          <a:bodyPr rtlCol="0" anchor="ctr" wrap="square" lIns="164592" rIns="164592" tIns="73152" bIns="73152"/>
+          <a:bodyPr wrap="square" lIns="164592" tIns="73152" rIns="164592" bIns="73152" rtlCol="0" anchor="ctr"/>
           <a:lstStyle/>
           <a:p>
             <a:pPr algn="l"/>
@@ -6921,7 +6805,7 @@
 </file>
 
 <file path=ppt/slides/slide11.xml><?xml version="1.0" encoding="utf-8"?>
-<p:sld xmlns:a="http://schemas.openxmlformats.org/drawingml/2006/main" xmlns:p="http://schemas.openxmlformats.org/presentationml/2006/main" xmlns:r="http://schemas.openxmlformats.org/officeDocument/2006/relationships">
+<p:sld xmlns:a="http://schemas.openxmlformats.org/drawingml/2006/main" xmlns:r="http://schemas.openxmlformats.org/officeDocument/2006/relationships" xmlns:p="http://schemas.openxmlformats.org/presentationml/2006/main">
   <p:cSld>
     <p:spTree>
       <p:nvGrpSpPr>
@@ -6929,7 +6813,14 @@
         <p:cNvGrpSpPr/>
         <p:nvPr/>
       </p:nvGrpSpPr>
-      <p:grpSpPr/>
+      <p:grpSpPr>
+        <a:xfrm>
+          <a:off x="0" y="0"/>
+          <a:ext cx="0" cy="0"/>
+          <a:chOff x="0" y="0"/>
+          <a:chExt cx="0" cy="0"/>
+        </a:xfrm>
+      </p:grpSpPr>
       <p:sp>
         <p:nvSpPr>
           <p:cNvPr id="2" name="Title 1"/>
@@ -7017,6 +6908,7 @@
           <a:lstStyle/>
           <a:p>
             <a:pPr algn="ctr"/>
+            <a:endParaRPr/>
           </a:p>
         </p:txBody>
       </p:sp>
@@ -7253,7 +7145,7 @@
           </a:fontRef>
         </p:style>
         <p:txBody>
-          <a:bodyPr rtlCol="0" anchor="ctr" wrap="square" lIns="45720" rIns="45720" tIns="18288" bIns="18288"/>
+          <a:bodyPr wrap="square" lIns="45720" tIns="18288" rIns="45720" bIns="18288" rtlCol="0" anchor="ctr"/>
           <a:lstStyle/>
           <a:p>
             <a:pPr algn="ctr">
@@ -7467,7 +7359,7 @@
           </a:fontRef>
         </p:style>
         <p:txBody>
-          <a:bodyPr rtlCol="0" anchor="ctr" wrap="square" lIns="45720" rIns="45720" tIns="18288" bIns="18288"/>
+          <a:bodyPr wrap="square" lIns="45720" tIns="18288" rIns="45720" bIns="18288" rtlCol="0" anchor="ctr"/>
           <a:lstStyle/>
           <a:p>
             <a:pPr algn="ctr">
@@ -7633,7 +7525,7 @@
           </a:fontRef>
         </p:style>
         <p:txBody>
-          <a:bodyPr rtlCol="0" anchor="ctr" wrap="square" lIns="45720" rIns="45720" tIns="18288" bIns="18288"/>
+          <a:bodyPr wrap="square" lIns="45720" tIns="18288" rIns="45720" bIns="18288" rtlCol="0" anchor="ctr"/>
           <a:lstStyle/>
           <a:p>
             <a:pPr algn="ctr">
@@ -7799,7 +7691,7 @@
           </a:fontRef>
         </p:style>
         <p:txBody>
-          <a:bodyPr rtlCol="0" anchor="ctr" wrap="square" lIns="45720" rIns="45720" tIns="18288" bIns="18288"/>
+          <a:bodyPr wrap="square" lIns="45720" tIns="18288" rIns="45720" bIns="18288" rtlCol="0" anchor="ctr"/>
           <a:lstStyle/>
           <a:p>
             <a:pPr algn="ctr">
@@ -7965,7 +7857,7 @@
           </a:fontRef>
         </p:style>
         <p:txBody>
-          <a:bodyPr rtlCol="0" anchor="ctr" wrap="square" lIns="45720" rIns="45720" tIns="18288" bIns="18288"/>
+          <a:bodyPr wrap="square" lIns="45720" tIns="18288" rIns="45720" bIns="18288" rtlCol="0" anchor="ctr"/>
           <a:lstStyle/>
           <a:p>
             <a:pPr algn="ctr">
@@ -8131,7 +8023,7 @@
           </a:fontRef>
         </p:style>
         <p:txBody>
-          <a:bodyPr rtlCol="0" anchor="ctr" wrap="square" lIns="45720" rIns="45720" tIns="18288" bIns="18288"/>
+          <a:bodyPr wrap="square" lIns="45720" tIns="18288" rIns="45720" bIns="18288" rtlCol="0" anchor="ctr"/>
           <a:lstStyle/>
           <a:p>
             <a:pPr algn="ctr">
@@ -8345,7 +8237,7 @@
           </a:fontRef>
         </p:style>
         <p:txBody>
-          <a:bodyPr rtlCol="0" anchor="ctr" wrap="square" lIns="45720" rIns="45720" tIns="18288" bIns="18288"/>
+          <a:bodyPr wrap="square" lIns="45720" tIns="18288" rIns="45720" bIns="18288" rtlCol="0" anchor="ctr"/>
           <a:lstStyle/>
           <a:p>
             <a:pPr algn="ctr">
@@ -8415,7 +8307,7 @@
           </a:fontRef>
         </p:style>
         <p:txBody>
-          <a:bodyPr rtlCol="0" anchor="ctr" wrap="square" lIns="45720" rIns="45720" tIns="18288" bIns="18288"/>
+          <a:bodyPr wrap="square" lIns="45720" tIns="18288" rIns="45720" bIns="18288" rtlCol="0" anchor="ctr"/>
           <a:lstStyle/>
           <a:p>
             <a:pPr algn="ctr">
@@ -8485,7 +8377,7 @@
           </a:fontRef>
         </p:style>
         <p:txBody>
-          <a:bodyPr rtlCol="0" anchor="ctr" wrap="square" lIns="164592" rIns="164592" tIns="73152" bIns="73152"/>
+          <a:bodyPr wrap="square" lIns="164592" tIns="73152" rIns="164592" bIns="73152" rtlCol="0" anchor="ctr"/>
           <a:lstStyle/>
           <a:p>
             <a:pPr algn="l"/>
@@ -8519,7 +8411,7 @@
 </file>
 
 <file path=ppt/slides/slide12.xml><?xml version="1.0" encoding="utf-8"?>
-<p:sld xmlns:a="http://schemas.openxmlformats.org/drawingml/2006/main" xmlns:p="http://schemas.openxmlformats.org/presentationml/2006/main" xmlns:r="http://schemas.openxmlformats.org/officeDocument/2006/relationships">
+<p:sld xmlns:a="http://schemas.openxmlformats.org/drawingml/2006/main" xmlns:r="http://schemas.openxmlformats.org/officeDocument/2006/relationships" xmlns:p="http://schemas.openxmlformats.org/presentationml/2006/main">
   <p:cSld>
     <p:spTree>
       <p:nvGrpSpPr>
@@ -8527,7 +8419,14 @@
         <p:cNvGrpSpPr/>
         <p:nvPr/>
       </p:nvGrpSpPr>
-      <p:grpSpPr/>
+      <p:grpSpPr>
+        <a:xfrm>
+          <a:off x="0" y="0"/>
+          <a:ext cx="0" cy="0"/>
+          <a:chOff x="0" y="0"/>
+          <a:chExt cx="0" cy="0"/>
+        </a:xfrm>
+      </p:grpSpPr>
       <p:sp>
         <p:nvSpPr>
           <p:cNvPr id="2" name="TextBox 1"/>
@@ -8665,6 +8564,7 @@
           <a:lstStyle/>
           <a:p>
             <a:pPr algn="ctr"/>
+            <a:endParaRPr/>
           </a:p>
         </p:txBody>
       </p:sp>
@@ -8805,7 +8705,7 @@
           </a:fontRef>
         </p:style>
         <p:txBody>
-          <a:bodyPr rtlCol="0" anchor="ctr" wrap="square" lIns="73152" rIns="73152"/>
+          <a:bodyPr wrap="square" lIns="73152" rIns="73152" rtlCol="0" anchor="ctr"/>
           <a:lstStyle/>
           <a:p>
             <a:pPr algn="ctr">
@@ -8923,7 +8823,7 @@
           </a:fontRef>
         </p:style>
         <p:txBody>
-          <a:bodyPr rtlCol="0" anchor="ctr" wrap="square" lIns="73152" rIns="73152"/>
+          <a:bodyPr wrap="square" lIns="73152" rIns="73152" rtlCol="0" anchor="ctr"/>
           <a:lstStyle/>
           <a:p>
             <a:pPr algn="ctr">
@@ -9041,7 +8941,7 @@
           </a:fontRef>
         </p:style>
         <p:txBody>
-          <a:bodyPr rtlCol="0" anchor="ctr" wrap="square" lIns="73152" rIns="73152"/>
+          <a:bodyPr wrap="square" lIns="73152" rIns="73152" rtlCol="0" anchor="ctr"/>
           <a:lstStyle/>
           <a:p>
             <a:pPr algn="ctr">
@@ -9111,7 +9011,7 @@
           </a:fontRef>
         </p:style>
         <p:txBody>
-          <a:bodyPr rtlCol="0" anchor="ctr" wrap="square" lIns="73152" rIns="73152"/>
+          <a:bodyPr wrap="square" lIns="73152" rIns="73152" rtlCol="0" anchor="ctr"/>
           <a:lstStyle/>
           <a:p>
             <a:pPr algn="ctr">
@@ -9149,7 +9049,7 @@
 </file>
 
 <file path=ppt/slides/slide13.xml><?xml version="1.0" encoding="utf-8"?>
-<p:sld xmlns:a="http://schemas.openxmlformats.org/drawingml/2006/main" xmlns:p="http://schemas.openxmlformats.org/presentationml/2006/main" xmlns:r="http://schemas.openxmlformats.org/officeDocument/2006/relationships">
+<p:sld xmlns:a="http://schemas.openxmlformats.org/drawingml/2006/main" xmlns:r="http://schemas.openxmlformats.org/officeDocument/2006/relationships" xmlns:p="http://schemas.openxmlformats.org/presentationml/2006/main">
   <p:cSld>
     <p:spTree>
       <p:nvGrpSpPr>
@@ -9157,7 +9057,14 @@
         <p:cNvGrpSpPr/>
         <p:nvPr/>
       </p:nvGrpSpPr>
-      <p:grpSpPr/>
+      <p:grpSpPr>
+        <a:xfrm>
+          <a:off x="0" y="0"/>
+          <a:ext cx="0" cy="0"/>
+          <a:chOff x="0" y="0"/>
+          <a:chExt cx="0" cy="0"/>
+        </a:xfrm>
+      </p:grpSpPr>
       <p:sp>
         <p:nvSpPr>
           <p:cNvPr id="2" name="Title 1"/>
@@ -9245,6 +9152,7 @@
           <a:lstStyle/>
           <a:p>
             <a:pPr algn="ctr"/>
+            <a:endParaRPr/>
           </a:p>
         </p:txBody>
       </p:sp>
@@ -9383,7 +9291,7 @@
           </a:fontRef>
         </p:style>
         <p:txBody>
-          <a:bodyPr rtlCol="0" anchor="ctr" wrap="square" lIns="182880"/>
+          <a:bodyPr wrap="square" lIns="182880" rtlCol="0" anchor="ctr"/>
           <a:lstStyle/>
           <a:p>
             <a:pPr algn="l"/>
@@ -9841,7 +9749,7 @@
 </file>
 
 <file path=ppt/slides/slide14.xml><?xml version="1.0" encoding="utf-8"?>
-<p:sld xmlns:a="http://schemas.openxmlformats.org/drawingml/2006/main" xmlns:p="http://schemas.openxmlformats.org/presentationml/2006/main" xmlns:r="http://schemas.openxmlformats.org/officeDocument/2006/relationships">
+<p:sld xmlns:a="http://schemas.openxmlformats.org/drawingml/2006/main" xmlns:r="http://schemas.openxmlformats.org/officeDocument/2006/relationships" xmlns:p="http://schemas.openxmlformats.org/presentationml/2006/main">
   <p:cSld>
     <p:spTree>
       <p:nvGrpSpPr>
@@ -9849,7 +9757,14 @@
         <p:cNvGrpSpPr/>
         <p:nvPr/>
       </p:nvGrpSpPr>
-      <p:grpSpPr/>
+      <p:grpSpPr>
+        <a:xfrm>
+          <a:off x="0" y="0"/>
+          <a:ext cx="0" cy="0"/>
+          <a:chOff x="0" y="0"/>
+          <a:chExt cx="0" cy="0"/>
+        </a:xfrm>
+      </p:grpSpPr>
       <p:sp>
         <p:nvSpPr>
           <p:cNvPr id="2" name="TextBox 1"/>
@@ -9987,6 +9902,7 @@
           <a:lstStyle/>
           <a:p>
             <a:pPr algn="ctr"/>
+            <a:endParaRPr/>
           </a:p>
         </p:txBody>
       </p:sp>
@@ -10127,7 +10043,7 @@
           </a:fontRef>
         </p:style>
         <p:txBody>
-          <a:bodyPr rtlCol="0" anchor="ctr" wrap="square" lIns="73152" rIns="73152"/>
+          <a:bodyPr wrap="square" lIns="73152" rIns="73152" rtlCol="0" anchor="ctr"/>
           <a:lstStyle/>
           <a:p>
             <a:pPr algn="ctr">
@@ -10245,7 +10161,7 @@
           </a:fontRef>
         </p:style>
         <p:txBody>
-          <a:bodyPr rtlCol="0" anchor="ctr" wrap="square" lIns="73152" rIns="73152"/>
+          <a:bodyPr wrap="square" lIns="73152" rIns="73152" rtlCol="0" anchor="ctr"/>
           <a:lstStyle/>
           <a:p>
             <a:pPr algn="ctr">
@@ -10363,7 +10279,7 @@
           </a:fontRef>
         </p:style>
         <p:txBody>
-          <a:bodyPr rtlCol="0" anchor="ctr" wrap="square" lIns="73152" rIns="73152"/>
+          <a:bodyPr wrap="square" lIns="73152" rIns="73152" rtlCol="0" anchor="ctr"/>
           <a:lstStyle/>
           <a:p>
             <a:pPr algn="ctr">
@@ -10481,7 +10397,7 @@
           </a:fontRef>
         </p:style>
         <p:txBody>
-          <a:bodyPr rtlCol="0" anchor="ctr" wrap="square" lIns="73152" rIns="73152"/>
+          <a:bodyPr wrap="square" lIns="73152" rIns="73152" rtlCol="0" anchor="ctr"/>
           <a:lstStyle/>
           <a:p>
             <a:pPr algn="ctr">
@@ -10519,7 +10435,7 @@
 </file>
 
 <file path=ppt/slides/slide15.xml><?xml version="1.0" encoding="utf-8"?>
-<p:sld xmlns:a="http://schemas.openxmlformats.org/drawingml/2006/main" xmlns:p="http://schemas.openxmlformats.org/presentationml/2006/main" xmlns:r="http://schemas.openxmlformats.org/officeDocument/2006/relationships">
+<p:sld xmlns:a="http://schemas.openxmlformats.org/drawingml/2006/main" xmlns:r="http://schemas.openxmlformats.org/officeDocument/2006/relationships" xmlns:p="http://schemas.openxmlformats.org/presentationml/2006/main">
   <p:cSld>
     <p:spTree>
       <p:nvGrpSpPr>
@@ -10527,7 +10443,14 @@
         <p:cNvGrpSpPr/>
         <p:nvPr/>
       </p:nvGrpSpPr>
-      <p:grpSpPr/>
+      <p:grpSpPr>
+        <a:xfrm>
+          <a:off x="0" y="0"/>
+          <a:ext cx="0" cy="0"/>
+          <a:chOff x="0" y="0"/>
+          <a:chExt cx="0" cy="0"/>
+        </a:xfrm>
+      </p:grpSpPr>
       <p:sp>
         <p:nvSpPr>
           <p:cNvPr id="2" name="Title 1"/>
@@ -10615,6 +10538,7 @@
           <a:lstStyle/>
           <a:p>
             <a:pPr algn="ctr"/>
+            <a:endParaRPr/>
           </a:p>
         </p:txBody>
       </p:sp>
@@ -10848,6 +10772,12 @@
                 <a:latin typeface="Calibri"/>
               </a:defRPr>
             </a:pPr>
+            <a:endParaRPr sz="1900" b="0">
+              <a:solidFill>
+                <a:srgbClr val="222222"/>
+              </a:solidFill>
+              <a:latin typeface="Calibri"/>
+            </a:endParaRPr>
           </a:p>
           <a:p>
             <a:pPr algn="l">
@@ -10889,6 +10819,12 @@
                 <a:latin typeface="Calibri"/>
               </a:defRPr>
             </a:pPr>
+            <a:endParaRPr sz="1900" b="0">
+              <a:solidFill>
+                <a:srgbClr val="222222"/>
+              </a:solidFill>
+              <a:latin typeface="Calibri"/>
+            </a:endParaRPr>
           </a:p>
           <a:p>
             <a:pPr algn="l">
@@ -10955,6 +10891,12 @@
                 <a:latin typeface="Calibri"/>
               </a:defRPr>
             </a:pPr>
+            <a:endParaRPr sz="1900" b="0">
+              <a:solidFill>
+                <a:srgbClr val="222222"/>
+              </a:solidFill>
+              <a:latin typeface="Calibri"/>
+            </a:endParaRPr>
           </a:p>
           <a:p>
             <a:pPr algn="l">
@@ -10992,7 +10934,7 @@
 </file>
 
 <file path=ppt/slides/slide16.xml><?xml version="1.0" encoding="utf-8"?>
-<p:sld xmlns:a="http://schemas.openxmlformats.org/drawingml/2006/main" xmlns:p="http://schemas.openxmlformats.org/presentationml/2006/main" xmlns:r="http://schemas.openxmlformats.org/officeDocument/2006/relationships">
+<p:sld xmlns:a="http://schemas.openxmlformats.org/drawingml/2006/main" xmlns:r="http://schemas.openxmlformats.org/officeDocument/2006/relationships" xmlns:p="http://schemas.openxmlformats.org/presentationml/2006/main">
   <p:cSld>
     <p:spTree>
       <p:nvGrpSpPr>
@@ -11000,7 +10942,14 @@
         <p:cNvGrpSpPr/>
         <p:nvPr/>
       </p:nvGrpSpPr>
-      <p:grpSpPr/>
+      <p:grpSpPr>
+        <a:xfrm>
+          <a:off x="0" y="0"/>
+          <a:ext cx="0" cy="0"/>
+          <a:chOff x="0" y="0"/>
+          <a:chExt cx="0" cy="0"/>
+        </a:xfrm>
+      </p:grpSpPr>
       <p:sp>
         <p:nvSpPr>
           <p:cNvPr id="2" name="Title 1"/>
@@ -11088,6 +11037,7 @@
           <a:lstStyle/>
           <a:p>
             <a:pPr algn="ctr"/>
+            <a:endParaRPr/>
           </a:p>
         </p:txBody>
       </p:sp>
@@ -11442,7 +11392,9 @@
         <p:txBody>
           <a:bodyPr rtlCol="0" anchor="ctr"/>
           <a:lstStyle/>
-          <a:p/>
+          <a:p>
+            <a:endParaRPr/>
+          </a:p>
         </p:txBody>
       </p:sp>
       <p:cxnSp>
@@ -11766,7 +11718,7 @@
           </a:fontRef>
         </p:style>
         <p:txBody>
-          <a:bodyPr rtlCol="0" anchor="t" wrap="square" lIns="45720" rIns="45720" tIns="18288" bIns="18288"/>
+          <a:bodyPr wrap="square" lIns="45720" tIns="18288" rIns="45720" bIns="18288" rtlCol="0" anchor="t"/>
           <a:lstStyle/>
           <a:p>
             <a:pPr algn="l">
@@ -11833,6 +11785,12 @@
                 <a:latin typeface="Consolas"/>
               </a:defRPr>
             </a:pPr>
+            <a:endParaRPr sz="1400" b="0">
+              <a:solidFill>
+                <a:srgbClr val="222222"/>
+              </a:solidFill>
+              <a:latin typeface="Consolas"/>
+            </a:endParaRPr>
           </a:p>
           <a:p>
             <a:pPr algn="l">
@@ -11924,6 +11882,12 @@
                 <a:latin typeface="Consolas"/>
               </a:defRPr>
             </a:pPr>
+            <a:endParaRPr sz="1400" b="0">
+              <a:solidFill>
+                <a:srgbClr val="222222"/>
+              </a:solidFill>
+              <a:latin typeface="Consolas"/>
+            </a:endParaRPr>
           </a:p>
           <a:p>
             <a:pPr algn="l">
@@ -12134,7 +12098,7 @@
 </file>
 
 <file path=ppt/slides/slide17.xml><?xml version="1.0" encoding="utf-8"?>
-<p:sld xmlns:a="http://schemas.openxmlformats.org/drawingml/2006/main" xmlns:p="http://schemas.openxmlformats.org/presentationml/2006/main" xmlns:r="http://schemas.openxmlformats.org/officeDocument/2006/relationships">
+<p:sld xmlns:a="http://schemas.openxmlformats.org/drawingml/2006/main" xmlns:r="http://schemas.openxmlformats.org/officeDocument/2006/relationships" xmlns:p="http://schemas.openxmlformats.org/presentationml/2006/main">
   <p:cSld>
     <p:spTree>
       <p:nvGrpSpPr>
@@ -12142,7 +12106,14 @@
         <p:cNvGrpSpPr/>
         <p:nvPr/>
       </p:nvGrpSpPr>
-      <p:grpSpPr/>
+      <p:grpSpPr>
+        <a:xfrm>
+          <a:off x="0" y="0"/>
+          <a:ext cx="0" cy="0"/>
+          <a:chOff x="0" y="0"/>
+          <a:chExt cx="0" cy="0"/>
+        </a:xfrm>
+      </p:grpSpPr>
       <p:sp>
         <p:nvSpPr>
           <p:cNvPr id="2" name="Title 1"/>
@@ -12230,6 +12201,7 @@
           <a:lstStyle/>
           <a:p>
             <a:pPr algn="ctr"/>
+            <a:endParaRPr/>
           </a:p>
         </p:txBody>
       </p:sp>
@@ -12418,7 +12390,7 @@
           </a:fontRef>
         </p:style>
         <p:txBody>
-          <a:bodyPr rtlCol="0" anchor="t" wrap="square" lIns="146304" tIns="91440" bIns="73152"/>
+          <a:bodyPr wrap="square" lIns="146304" tIns="91440" bIns="73152" rtlCol="0" anchor="t"/>
           <a:lstStyle/>
           <a:p>
             <a:pPr algn="l">
@@ -12837,7 +12809,7 @@
 </file>
 
 <file path=ppt/slides/slide18.xml><?xml version="1.0" encoding="utf-8"?>
-<p:sld xmlns:a="http://schemas.openxmlformats.org/drawingml/2006/main" xmlns:p="http://schemas.openxmlformats.org/presentationml/2006/main" xmlns:r="http://schemas.openxmlformats.org/officeDocument/2006/relationships">
+<p:sld xmlns:a="http://schemas.openxmlformats.org/drawingml/2006/main" xmlns:r="http://schemas.openxmlformats.org/officeDocument/2006/relationships" xmlns:p="http://schemas.openxmlformats.org/presentationml/2006/main">
   <p:cSld>
     <p:spTree>
       <p:nvGrpSpPr>
@@ -12845,7 +12817,14 @@
         <p:cNvGrpSpPr/>
         <p:nvPr/>
       </p:nvGrpSpPr>
-      <p:grpSpPr/>
+      <p:grpSpPr>
+        <a:xfrm>
+          <a:off x="0" y="0"/>
+          <a:ext cx="0" cy="0"/>
+          <a:chOff x="0" y="0"/>
+          <a:chExt cx="0" cy="0"/>
+        </a:xfrm>
+      </p:grpSpPr>
       <p:sp>
         <p:nvSpPr>
           <p:cNvPr id="2" name="Title 1"/>
@@ -12933,6 +12912,7 @@
           <a:lstStyle/>
           <a:p>
             <a:pPr algn="ctr"/>
+            <a:endParaRPr/>
           </a:p>
         </p:txBody>
       </p:sp>
@@ -13071,7 +13051,7 @@
           </a:fontRef>
         </p:style>
         <p:txBody>
-          <a:bodyPr rtlCol="0" anchor="ctr" wrap="square" lIns="182880"/>
+          <a:bodyPr wrap="square" lIns="182880" rtlCol="0" anchor="ctr"/>
           <a:lstStyle/>
           <a:p>
             <a:pPr algn="l"/>
@@ -13479,7 +13459,7 @@
 </file>
 
 <file path=ppt/slides/slide19.xml><?xml version="1.0" encoding="utf-8"?>
-<p:sld xmlns:a="http://schemas.openxmlformats.org/drawingml/2006/main" xmlns:p="http://schemas.openxmlformats.org/presentationml/2006/main" xmlns:r="http://schemas.openxmlformats.org/officeDocument/2006/relationships">
+<p:sld xmlns:a="http://schemas.openxmlformats.org/drawingml/2006/main" xmlns:r="http://schemas.openxmlformats.org/officeDocument/2006/relationships" xmlns:p="http://schemas.openxmlformats.org/presentationml/2006/main">
   <p:cSld>
     <p:spTree>
       <p:nvGrpSpPr>
@@ -13487,7 +13467,14 @@
         <p:cNvGrpSpPr/>
         <p:nvPr/>
       </p:nvGrpSpPr>
-      <p:grpSpPr/>
+      <p:grpSpPr>
+        <a:xfrm>
+          <a:off x="0" y="0"/>
+          <a:ext cx="0" cy="0"/>
+          <a:chOff x="0" y="0"/>
+          <a:chExt cx="0" cy="0"/>
+        </a:xfrm>
+      </p:grpSpPr>
       <p:sp>
         <p:nvSpPr>
           <p:cNvPr id="2" name="TextBox 1"/>
@@ -13625,6 +13612,7 @@
           <a:lstStyle/>
           <a:p>
             <a:pPr algn="ctr"/>
+            <a:endParaRPr/>
           </a:p>
         </p:txBody>
       </p:sp>
@@ -13765,7 +13753,7 @@
           </a:fontRef>
         </p:style>
         <p:txBody>
-          <a:bodyPr rtlCol="0" anchor="ctr" wrap="square" lIns="73152" rIns="73152"/>
+          <a:bodyPr wrap="square" lIns="73152" rIns="73152" rtlCol="0" anchor="ctr"/>
           <a:lstStyle/>
           <a:p>
             <a:pPr algn="ctr">
@@ -13883,7 +13871,7 @@
           </a:fontRef>
         </p:style>
         <p:txBody>
-          <a:bodyPr rtlCol="0" anchor="ctr" wrap="square" lIns="73152" rIns="73152"/>
+          <a:bodyPr wrap="square" lIns="73152" rIns="73152" rtlCol="0" anchor="ctr"/>
           <a:lstStyle/>
           <a:p>
             <a:pPr algn="ctr">
@@ -14001,7 +13989,7 @@
           </a:fontRef>
         </p:style>
         <p:txBody>
-          <a:bodyPr rtlCol="0" anchor="ctr" wrap="square" lIns="73152" rIns="73152"/>
+          <a:bodyPr wrap="square" lIns="73152" rIns="73152" rtlCol="0" anchor="ctr"/>
           <a:lstStyle/>
           <a:p>
             <a:pPr algn="ctr">
@@ -14119,7 +14107,7 @@
           </a:fontRef>
         </p:style>
         <p:txBody>
-          <a:bodyPr rtlCol="0" anchor="ctr" wrap="square" lIns="73152" rIns="73152"/>
+          <a:bodyPr wrap="square" lIns="73152" rIns="73152" rtlCol="0" anchor="ctr"/>
           <a:lstStyle/>
           <a:p>
             <a:pPr algn="ctr">
@@ -14205,7 +14193,7 @@
 </file>
 
 <file path=ppt/slides/slide2.xml><?xml version="1.0" encoding="utf-8"?>
-<p:sld xmlns:a="http://schemas.openxmlformats.org/drawingml/2006/main" xmlns:p="http://schemas.openxmlformats.org/presentationml/2006/main" xmlns:r="http://schemas.openxmlformats.org/officeDocument/2006/relationships">
+<p:sld xmlns:a="http://schemas.openxmlformats.org/drawingml/2006/main" xmlns:r="http://schemas.openxmlformats.org/officeDocument/2006/relationships" xmlns:p="http://schemas.openxmlformats.org/presentationml/2006/main">
   <p:cSld>
     <p:spTree>
       <p:nvGrpSpPr>
@@ -14213,7 +14201,14 @@
         <p:cNvGrpSpPr/>
         <p:nvPr/>
       </p:nvGrpSpPr>
-      <p:grpSpPr/>
+      <p:grpSpPr>
+        <a:xfrm>
+          <a:off x="0" y="0"/>
+          <a:ext cx="0" cy="0"/>
+          <a:chOff x="0" y="0"/>
+          <a:chExt cx="0" cy="0"/>
+        </a:xfrm>
+      </p:grpSpPr>
       <p:sp>
         <p:nvSpPr>
           <p:cNvPr id="2" name="Title 1"/>
@@ -14301,6 +14296,7 @@
           <a:lstStyle/>
           <a:p>
             <a:pPr algn="ctr"/>
+            <a:endParaRPr/>
           </a:p>
         </p:txBody>
       </p:sp>
@@ -14630,7 +14626,7 @@
 </file>
 
 <file path=ppt/slides/slide20.xml><?xml version="1.0" encoding="utf-8"?>
-<p:sld xmlns:a="http://schemas.openxmlformats.org/drawingml/2006/main" xmlns:p="http://schemas.openxmlformats.org/presentationml/2006/main" xmlns:r="http://schemas.openxmlformats.org/officeDocument/2006/relationships">
+<p:sld xmlns:a="http://schemas.openxmlformats.org/drawingml/2006/main" xmlns:r="http://schemas.openxmlformats.org/officeDocument/2006/relationships" xmlns:p="http://schemas.openxmlformats.org/presentationml/2006/main">
   <p:cSld>
     <p:spTree>
       <p:nvGrpSpPr>
@@ -14638,7 +14634,14 @@
         <p:cNvGrpSpPr/>
         <p:nvPr/>
       </p:nvGrpSpPr>
-      <p:grpSpPr/>
+      <p:grpSpPr>
+        <a:xfrm>
+          <a:off x="0" y="0"/>
+          <a:ext cx="0" cy="0"/>
+          <a:chOff x="0" y="0"/>
+          <a:chExt cx="0" cy="0"/>
+        </a:xfrm>
+      </p:grpSpPr>
       <p:sp>
         <p:nvSpPr>
           <p:cNvPr id="2" name="Title 1"/>
@@ -14726,6 +14729,7 @@
           <a:lstStyle/>
           <a:p>
             <a:pPr algn="ctr"/>
+            <a:endParaRPr/>
           </a:p>
         </p:txBody>
       </p:sp>
@@ -14934,6 +14938,12 @@
                 <a:latin typeface="Calibri"/>
               </a:defRPr>
             </a:pPr>
+            <a:endParaRPr sz="1900" b="0">
+              <a:solidFill>
+                <a:srgbClr val="222222"/>
+              </a:solidFill>
+              <a:latin typeface="Calibri"/>
+            </a:endParaRPr>
           </a:p>
           <a:p>
             <a:pPr algn="l">
@@ -15000,6 +15010,12 @@
                 <a:latin typeface="Calibri"/>
               </a:defRPr>
             </a:pPr>
+            <a:endParaRPr sz="1900" b="0">
+              <a:solidFill>
+                <a:srgbClr val="222222"/>
+              </a:solidFill>
+              <a:latin typeface="Calibri"/>
+            </a:endParaRPr>
           </a:p>
           <a:p>
             <a:pPr algn="l">
@@ -15041,6 +15057,12 @@
                 <a:latin typeface="Calibri"/>
               </a:defRPr>
             </a:pPr>
+            <a:endParaRPr sz="1900" b="0">
+              <a:solidFill>
+                <a:srgbClr val="222222"/>
+              </a:solidFill>
+              <a:latin typeface="Calibri"/>
+            </a:endParaRPr>
           </a:p>
           <a:p>
             <a:pPr algn="l">
@@ -15082,6 +15104,12 @@
                 <a:latin typeface="Calibri"/>
               </a:defRPr>
             </a:pPr>
+            <a:endParaRPr sz="1900" b="0">
+              <a:solidFill>
+                <a:srgbClr val="222222"/>
+              </a:solidFill>
+              <a:latin typeface="Calibri"/>
+            </a:endParaRPr>
           </a:p>
           <a:p>
             <a:pPr algn="l">
@@ -15119,7 +15147,7 @@
 </file>
 
 <file path=ppt/slides/slide21.xml><?xml version="1.0" encoding="utf-8"?>
-<p:sld xmlns:a="http://schemas.openxmlformats.org/drawingml/2006/main" xmlns:p="http://schemas.openxmlformats.org/presentationml/2006/main" xmlns:r="http://schemas.openxmlformats.org/officeDocument/2006/relationships">
+<p:sld xmlns:a="http://schemas.openxmlformats.org/drawingml/2006/main" xmlns:r="http://schemas.openxmlformats.org/officeDocument/2006/relationships" xmlns:p="http://schemas.openxmlformats.org/presentationml/2006/main">
   <p:cSld>
     <p:spTree>
       <p:nvGrpSpPr>
@@ -15127,7 +15155,14 @@
         <p:cNvGrpSpPr/>
         <p:nvPr/>
       </p:nvGrpSpPr>
-      <p:grpSpPr/>
+      <p:grpSpPr>
+        <a:xfrm>
+          <a:off x="0" y="0"/>
+          <a:ext cx="0" cy="0"/>
+          <a:chOff x="0" y="0"/>
+          <a:chExt cx="0" cy="0"/>
+        </a:xfrm>
+      </p:grpSpPr>
       <p:sp>
         <p:nvSpPr>
           <p:cNvPr id="2" name="Title 1"/>
@@ -15215,6 +15250,7 @@
           <a:lstStyle/>
           <a:p>
             <a:pPr algn="ctr"/>
+            <a:endParaRPr/>
           </a:p>
         </p:txBody>
       </p:sp>
@@ -15403,7 +15439,7 @@
           </a:fontRef>
         </p:style>
         <p:txBody>
-          <a:bodyPr rtlCol="0" anchor="t" wrap="square" lIns="146304" tIns="91440" bIns="73152"/>
+          <a:bodyPr wrap="square" lIns="146304" tIns="91440" bIns="73152" rtlCol="0" anchor="t"/>
           <a:lstStyle/>
           <a:p>
             <a:pPr algn="l">
@@ -15913,7 +15949,7 @@
 </file>
 
 <file path=ppt/slides/slide22.xml><?xml version="1.0" encoding="utf-8"?>
-<p:sld xmlns:a="http://schemas.openxmlformats.org/drawingml/2006/main" xmlns:p="http://schemas.openxmlformats.org/presentationml/2006/main" xmlns:r="http://schemas.openxmlformats.org/officeDocument/2006/relationships">
+<p:sld xmlns:a="http://schemas.openxmlformats.org/drawingml/2006/main" xmlns:r="http://schemas.openxmlformats.org/officeDocument/2006/relationships" xmlns:p="http://schemas.openxmlformats.org/presentationml/2006/main">
   <p:cSld>
     <p:spTree>
       <p:nvGrpSpPr>
@@ -15921,7 +15957,14 @@
         <p:cNvGrpSpPr/>
         <p:nvPr/>
       </p:nvGrpSpPr>
-      <p:grpSpPr/>
+      <p:grpSpPr>
+        <a:xfrm>
+          <a:off x="0" y="0"/>
+          <a:ext cx="0" cy="0"/>
+          <a:chOff x="0" y="0"/>
+          <a:chExt cx="0" cy="0"/>
+        </a:xfrm>
+      </p:grpSpPr>
       <p:sp>
         <p:nvSpPr>
           <p:cNvPr id="2" name="Title 1"/>
@@ -16009,6 +16052,7 @@
           <a:lstStyle/>
           <a:p>
             <a:pPr algn="ctr"/>
+            <a:endParaRPr/>
           </a:p>
         </p:txBody>
       </p:sp>
@@ -16147,7 +16191,7 @@
           </a:fontRef>
         </p:style>
         <p:txBody>
-          <a:bodyPr rtlCol="0" anchor="ctr" wrap="square" lIns="182880"/>
+          <a:bodyPr wrap="square" lIns="182880" rtlCol="0" anchor="ctr"/>
           <a:lstStyle/>
           <a:p>
             <a:pPr algn="l"/>
@@ -16587,7 +16631,7 @@
           </a:fontRef>
         </p:style>
         <p:txBody>
-          <a:bodyPr rtlCol="0" anchor="ctr" wrap="square" lIns="164592" rIns="164592" tIns="73152" bIns="73152"/>
+          <a:bodyPr wrap="square" lIns="164592" tIns="73152" rIns="164592" bIns="73152" rtlCol="0" anchor="ctr"/>
           <a:lstStyle/>
           <a:p>
             <a:pPr algn="l"/>
@@ -16621,7 +16665,7 @@
 </file>
 
 <file path=ppt/slides/slide23.xml><?xml version="1.0" encoding="utf-8"?>
-<p:sld xmlns:a="http://schemas.openxmlformats.org/drawingml/2006/main" xmlns:p="http://schemas.openxmlformats.org/presentationml/2006/main" xmlns:r="http://schemas.openxmlformats.org/officeDocument/2006/relationships">
+<p:sld xmlns:a="http://schemas.openxmlformats.org/drawingml/2006/main" xmlns:r="http://schemas.openxmlformats.org/officeDocument/2006/relationships" xmlns:p="http://schemas.openxmlformats.org/presentationml/2006/main">
   <p:cSld>
     <p:spTree>
       <p:nvGrpSpPr>
@@ -16629,7 +16673,14 @@
         <p:cNvGrpSpPr/>
         <p:nvPr/>
       </p:nvGrpSpPr>
-      <p:grpSpPr/>
+      <p:grpSpPr>
+        <a:xfrm>
+          <a:off x="0" y="0"/>
+          <a:ext cx="0" cy="0"/>
+          <a:chOff x="0" y="0"/>
+          <a:chExt cx="0" cy="0"/>
+        </a:xfrm>
+      </p:grpSpPr>
       <p:sp>
         <p:nvSpPr>
           <p:cNvPr id="2" name="Title 1"/>
@@ -16717,6 +16768,7 @@
           <a:lstStyle/>
           <a:p>
             <a:pPr algn="ctr"/>
+            <a:endParaRPr/>
           </a:p>
         </p:txBody>
       </p:sp>
@@ -16877,6 +16929,12 @@
                 <a:latin typeface="Calibri"/>
               </a:defRPr>
             </a:pPr>
+            <a:endParaRPr sz="2000" b="0">
+              <a:solidFill>
+                <a:srgbClr val="222222"/>
+              </a:solidFill>
+              <a:latin typeface="Calibri"/>
+            </a:endParaRPr>
           </a:p>
           <a:p>
             <a:pPr algn="l">
@@ -16918,6 +16976,12 @@
                 <a:latin typeface="Calibri"/>
               </a:defRPr>
             </a:pPr>
+            <a:endParaRPr sz="2000" b="0">
+              <a:solidFill>
+                <a:srgbClr val="222222"/>
+              </a:solidFill>
+              <a:latin typeface="Calibri"/>
+            </a:endParaRPr>
           </a:p>
           <a:p>
             <a:pPr algn="l">
@@ -17032,6 +17096,12 @@
                 <a:latin typeface="Calibri"/>
               </a:defRPr>
             </a:pPr>
+            <a:endParaRPr sz="2000" b="0">
+              <a:solidFill>
+                <a:srgbClr val="222222"/>
+              </a:solidFill>
+              <a:latin typeface="Calibri"/>
+            </a:endParaRPr>
           </a:p>
           <a:p>
             <a:pPr algn="l">
@@ -17101,7 +17171,7 @@
           </a:fontRef>
         </p:style>
         <p:txBody>
-          <a:bodyPr rtlCol="0" anchor="ctr" wrap="square" lIns="164592" rIns="164592" tIns="73152" bIns="73152"/>
+          <a:bodyPr wrap="square" lIns="164592" tIns="73152" rIns="164592" bIns="73152" rtlCol="0" anchor="ctr"/>
           <a:lstStyle/>
           <a:p>
             <a:pPr algn="l"/>
@@ -17135,7 +17205,7 @@
 </file>
 
 <file path=ppt/slides/slide24.xml><?xml version="1.0" encoding="utf-8"?>
-<p:sld xmlns:a="http://schemas.openxmlformats.org/drawingml/2006/main" xmlns:p="http://schemas.openxmlformats.org/presentationml/2006/main" xmlns:r="http://schemas.openxmlformats.org/officeDocument/2006/relationships">
+<p:sld xmlns:a="http://schemas.openxmlformats.org/drawingml/2006/main" xmlns:r="http://schemas.openxmlformats.org/officeDocument/2006/relationships" xmlns:p="http://schemas.openxmlformats.org/presentationml/2006/main">
   <p:cSld>
     <p:spTree>
       <p:nvGrpSpPr>
@@ -17143,7 +17213,14 @@
         <p:cNvGrpSpPr/>
         <p:nvPr/>
       </p:nvGrpSpPr>
-      <p:grpSpPr/>
+      <p:grpSpPr>
+        <a:xfrm>
+          <a:off x="0" y="0"/>
+          <a:ext cx="0" cy="0"/>
+          <a:chOff x="0" y="0"/>
+          <a:chExt cx="0" cy="0"/>
+        </a:xfrm>
+      </p:grpSpPr>
       <p:sp>
         <p:nvSpPr>
           <p:cNvPr id="2" name="Title 1"/>
@@ -17231,6 +17308,7 @@
           <a:lstStyle/>
           <a:p>
             <a:pPr algn="ctr"/>
+            <a:endParaRPr/>
           </a:p>
         </p:txBody>
       </p:sp>
@@ -17349,9 +17427,27 @@
                 <a:tableStyleId>{5C22544A-7EE6-4342-B048-85BDC9FD1C3A}</a:tableStyleId>
               </a:tblPr>
               <a:tblGrid>
-                <a:gridCol w="3728618"/>
-                <a:gridCol w="3195958"/>
-                <a:gridCol w="4261278"/>
+                <a:gridCol w="3728618">
+                  <a:extLst>
+                    <a:ext uri="{9D8B030D-6E8A-4147-A177-3AD203B41FA5}">
+                      <a16:colId xmlns:a16="http://schemas.microsoft.com/office/drawing/2014/main" val="20000"/>
+                    </a:ext>
+                  </a:extLst>
+                </a:gridCol>
+                <a:gridCol w="3195958">
+                  <a:extLst>
+                    <a:ext uri="{9D8B030D-6E8A-4147-A177-3AD203B41FA5}">
+                      <a16:colId xmlns:a16="http://schemas.microsoft.com/office/drawing/2014/main" val="20001"/>
+                    </a:ext>
+                  </a:extLst>
+                </a:gridCol>
+                <a:gridCol w="4261278">
+                  <a:extLst>
+                    <a:ext uri="{9D8B030D-6E8A-4147-A177-3AD203B41FA5}">
+                      <a16:colId xmlns:a16="http://schemas.microsoft.com/office/drawing/2014/main" val="20002"/>
+                    </a:ext>
+                  </a:extLst>
+                </a:gridCol>
               </a:tblGrid>
               <a:tr h="724807">
                 <a:tc>
@@ -17420,6 +17516,11 @@
                     </a:solidFill>
                   </a:tcPr>
                 </a:tc>
+                <a:extLst>
+                  <a:ext uri="{0D108BD9-81ED-4DB2-BD59-A6C34878D82A}">
+                    <a16:rowId xmlns:a16="http://schemas.microsoft.com/office/drawing/2014/main" val="10000"/>
+                  </a:ext>
+                </a:extLst>
               </a:tr>
               <a:tr h="724807">
                 <a:tc>
@@ -17488,6 +17589,11 @@
                     </a:solidFill>
                   </a:tcPr>
                 </a:tc>
+                <a:extLst>
+                  <a:ext uri="{0D108BD9-81ED-4DB2-BD59-A6C34878D82A}">
+                    <a16:rowId xmlns:a16="http://schemas.microsoft.com/office/drawing/2014/main" val="10001"/>
+                  </a:ext>
+                </a:extLst>
               </a:tr>
               <a:tr h="724807">
                 <a:tc>
@@ -17556,6 +17662,11 @@
                     </a:solidFill>
                   </a:tcPr>
                 </a:tc>
+                <a:extLst>
+                  <a:ext uri="{0D108BD9-81ED-4DB2-BD59-A6C34878D82A}">
+                    <a16:rowId xmlns:a16="http://schemas.microsoft.com/office/drawing/2014/main" val="10002"/>
+                  </a:ext>
+                </a:extLst>
               </a:tr>
               <a:tr h="724807">
                 <a:tc>
@@ -17624,6 +17735,11 @@
                     </a:solidFill>
                   </a:tcPr>
                 </a:tc>
+                <a:extLst>
+                  <a:ext uri="{0D108BD9-81ED-4DB2-BD59-A6C34878D82A}">
+                    <a16:rowId xmlns:a16="http://schemas.microsoft.com/office/drawing/2014/main" val="10003"/>
+                  </a:ext>
+                </a:extLst>
               </a:tr>
               <a:tr h="724807">
                 <a:tc>
@@ -17692,6 +17808,11 @@
                     </a:solidFill>
                   </a:tcPr>
                 </a:tc>
+                <a:extLst>
+                  <a:ext uri="{0D108BD9-81ED-4DB2-BD59-A6C34878D82A}">
+                    <a16:rowId xmlns:a16="http://schemas.microsoft.com/office/drawing/2014/main" val="10004"/>
+                  </a:ext>
+                </a:extLst>
               </a:tr>
               <a:tr h="724807">
                 <a:tc>
@@ -17760,6 +17881,11 @@
                     </a:solidFill>
                   </a:tcPr>
                 </a:tc>
+                <a:extLst>
+                  <a:ext uri="{0D108BD9-81ED-4DB2-BD59-A6C34878D82A}">
+                    <a16:rowId xmlns:a16="http://schemas.microsoft.com/office/drawing/2014/main" val="10005"/>
+                  </a:ext>
+                </a:extLst>
               </a:tr>
               <a:tr h="724808">
                 <a:tc>
@@ -17828,6 +17954,11 @@
                     </a:solidFill>
                   </a:tcPr>
                 </a:tc>
+                <a:extLst>
+                  <a:ext uri="{0D108BD9-81ED-4DB2-BD59-A6C34878D82A}">
+                    <a16:rowId xmlns:a16="http://schemas.microsoft.com/office/drawing/2014/main" val="10006"/>
+                  </a:ext>
+                </a:extLst>
               </a:tr>
             </a:tbl>
           </a:graphicData>
@@ -17842,7 +17973,7 @@
 </file>
 
 <file path=ppt/slides/slide25.xml><?xml version="1.0" encoding="utf-8"?>
-<p:sld xmlns:a="http://schemas.openxmlformats.org/drawingml/2006/main" xmlns:p="http://schemas.openxmlformats.org/presentationml/2006/main" xmlns:r="http://schemas.openxmlformats.org/officeDocument/2006/relationships">
+<p:sld xmlns:a="http://schemas.openxmlformats.org/drawingml/2006/main" xmlns:r="http://schemas.openxmlformats.org/officeDocument/2006/relationships" xmlns:p="http://schemas.openxmlformats.org/presentationml/2006/main">
   <p:cSld>
     <p:spTree>
       <p:nvGrpSpPr>
@@ -17850,7 +17981,14 @@
         <p:cNvGrpSpPr/>
         <p:nvPr/>
       </p:nvGrpSpPr>
-      <p:grpSpPr/>
+      <p:grpSpPr>
+        <a:xfrm>
+          <a:off x="0" y="0"/>
+          <a:ext cx="0" cy="0"/>
+          <a:chOff x="0" y="0"/>
+          <a:chExt cx="0" cy="0"/>
+        </a:xfrm>
+      </p:grpSpPr>
       <p:sp>
         <p:nvSpPr>
           <p:cNvPr id="2" name="Title 1"/>
@@ -17938,6 +18076,7 @@
           <a:lstStyle/>
           <a:p>
             <a:pPr algn="ctr"/>
+            <a:endParaRPr/>
           </a:p>
         </p:txBody>
       </p:sp>
@@ -18292,7 +18431,7 @@
 </file>
 
 <file path=ppt/slides/slide3.xml><?xml version="1.0" encoding="utf-8"?>
-<p:sld xmlns:a="http://schemas.openxmlformats.org/drawingml/2006/main" xmlns:p="http://schemas.openxmlformats.org/presentationml/2006/main" xmlns:r="http://schemas.openxmlformats.org/officeDocument/2006/relationships">
+<p:sld xmlns:a="http://schemas.openxmlformats.org/drawingml/2006/main" xmlns:r="http://schemas.openxmlformats.org/officeDocument/2006/relationships" xmlns:p="http://schemas.openxmlformats.org/presentationml/2006/main">
   <p:cSld>
     <p:spTree>
       <p:nvGrpSpPr>
@@ -18300,7 +18439,14 @@
         <p:cNvGrpSpPr/>
         <p:nvPr/>
       </p:nvGrpSpPr>
-      <p:grpSpPr/>
+      <p:grpSpPr>
+        <a:xfrm>
+          <a:off x="0" y="0"/>
+          <a:ext cx="0" cy="0"/>
+          <a:chOff x="0" y="0"/>
+          <a:chExt cx="0" cy="0"/>
+        </a:xfrm>
+      </p:grpSpPr>
       <p:sp>
         <p:nvSpPr>
           <p:cNvPr id="2" name="Title 1"/>
@@ -18388,6 +18534,7 @@
           <a:lstStyle/>
           <a:p>
             <a:pPr algn="ctr"/>
+            <a:endParaRPr/>
           </a:p>
         </p:txBody>
       </p:sp>
@@ -18598,6 +18745,12 @@
                 <a:latin typeface="Calibri"/>
               </a:defRPr>
             </a:pPr>
+            <a:endParaRPr sz="2800" b="0">
+              <a:solidFill>
+                <a:srgbClr val="222222"/>
+              </a:solidFill>
+              <a:latin typeface="Calibri"/>
+            </a:endParaRPr>
           </a:p>
           <a:p>
             <a:pPr algn="l">
@@ -18667,7 +18820,7 @@
           </a:fontRef>
         </p:style>
         <p:txBody>
-          <a:bodyPr rtlCol="0" anchor="ctr" wrap="square" lIns="164592" rIns="164592" tIns="73152" bIns="73152"/>
+          <a:bodyPr wrap="square" lIns="164592" tIns="73152" rIns="164592" bIns="73152" rtlCol="0" anchor="ctr"/>
           <a:lstStyle/>
           <a:p>
             <a:pPr algn="l"/>
@@ -18701,7 +18854,7 @@
 </file>
 
 <file path=ppt/slides/slide4.xml><?xml version="1.0" encoding="utf-8"?>
-<p:sld xmlns:a="http://schemas.openxmlformats.org/drawingml/2006/main" xmlns:p="http://schemas.openxmlformats.org/presentationml/2006/main" xmlns:r="http://schemas.openxmlformats.org/officeDocument/2006/relationships">
+<p:sld xmlns:a="http://schemas.openxmlformats.org/drawingml/2006/main" xmlns:r="http://schemas.openxmlformats.org/officeDocument/2006/relationships" xmlns:p="http://schemas.openxmlformats.org/presentationml/2006/main">
   <p:cSld>
     <p:spTree>
       <p:nvGrpSpPr>
@@ -18709,7 +18862,14 @@
         <p:cNvGrpSpPr/>
         <p:nvPr/>
       </p:nvGrpSpPr>
-      <p:grpSpPr/>
+      <p:grpSpPr>
+        <a:xfrm>
+          <a:off x="0" y="0"/>
+          <a:ext cx="0" cy="0"/>
+          <a:chOff x="0" y="0"/>
+          <a:chExt cx="0" cy="0"/>
+        </a:xfrm>
+      </p:grpSpPr>
       <p:sp>
         <p:nvSpPr>
           <p:cNvPr id="2" name="Title 1"/>
@@ -18797,6 +18957,7 @@
           <a:lstStyle/>
           <a:p>
             <a:pPr algn="ctr"/>
+            <a:endParaRPr/>
           </a:p>
         </p:txBody>
       </p:sp>
@@ -18915,8 +19076,20 @@
                 <a:tableStyleId>{5C22544A-7EE6-4342-B048-85BDC9FD1C3A}</a:tableStyleId>
               </a:tblPr>
               <a:tblGrid>
-                <a:gridCol w="1118585"/>
-                <a:gridCol w="10067269"/>
+                <a:gridCol w="1118585">
+                  <a:extLst>
+                    <a:ext uri="{9D8B030D-6E8A-4147-A177-3AD203B41FA5}">
+                      <a16:colId xmlns:a16="http://schemas.microsoft.com/office/drawing/2014/main" val="20000"/>
+                    </a:ext>
+                  </a:extLst>
+                </a:gridCol>
+                <a:gridCol w="10067269">
+                  <a:extLst>
+                    <a:ext uri="{9D8B030D-6E8A-4147-A177-3AD203B41FA5}">
+                      <a16:colId xmlns:a16="http://schemas.microsoft.com/office/drawing/2014/main" val="20001"/>
+                    </a:ext>
+                  </a:extLst>
+                </a:gridCol>
               </a:tblGrid>
               <a:tr h="457200">
                 <a:tc>
@@ -18963,6 +19136,11 @@
                     </a:solidFill>
                   </a:tcPr>
                 </a:tc>
+                <a:extLst>
+                  <a:ext uri="{0D108BD9-81ED-4DB2-BD59-A6C34878D82A}">
+                    <a16:rowId xmlns:a16="http://schemas.microsoft.com/office/drawing/2014/main" val="10000"/>
+                  </a:ext>
+                </a:extLst>
               </a:tr>
               <a:tr h="457200">
                 <a:tc>
@@ -19009,6 +19187,11 @@
                     </a:solidFill>
                   </a:tcPr>
                 </a:tc>
+                <a:extLst>
+                  <a:ext uri="{0D108BD9-81ED-4DB2-BD59-A6C34878D82A}">
+                    <a16:rowId xmlns:a16="http://schemas.microsoft.com/office/drawing/2014/main" val="10001"/>
+                  </a:ext>
+                </a:extLst>
               </a:tr>
               <a:tr h="457200">
                 <a:tc>
@@ -19055,6 +19238,11 @@
                     </a:solidFill>
                   </a:tcPr>
                 </a:tc>
+                <a:extLst>
+                  <a:ext uri="{0D108BD9-81ED-4DB2-BD59-A6C34878D82A}">
+                    <a16:rowId xmlns:a16="http://schemas.microsoft.com/office/drawing/2014/main" val="10002"/>
+                  </a:ext>
+                </a:extLst>
               </a:tr>
               <a:tr h="457200">
                 <a:tc>
@@ -19101,6 +19289,11 @@
                     </a:solidFill>
                   </a:tcPr>
                 </a:tc>
+                <a:extLst>
+                  <a:ext uri="{0D108BD9-81ED-4DB2-BD59-A6C34878D82A}">
+                    <a16:rowId xmlns:a16="http://schemas.microsoft.com/office/drawing/2014/main" val="10003"/>
+                  </a:ext>
+                </a:extLst>
               </a:tr>
               <a:tr h="457200">
                 <a:tc>
@@ -19147,6 +19340,11 @@
                     </a:solidFill>
                   </a:tcPr>
                 </a:tc>
+                <a:extLst>
+                  <a:ext uri="{0D108BD9-81ED-4DB2-BD59-A6C34878D82A}">
+                    <a16:rowId xmlns:a16="http://schemas.microsoft.com/office/drawing/2014/main" val="10004"/>
+                  </a:ext>
+                </a:extLst>
               </a:tr>
               <a:tr h="457200">
                 <a:tc>
@@ -19193,6 +19391,11 @@
                     </a:solidFill>
                   </a:tcPr>
                 </a:tc>
+                <a:extLst>
+                  <a:ext uri="{0D108BD9-81ED-4DB2-BD59-A6C34878D82A}">
+                    <a16:rowId xmlns:a16="http://schemas.microsoft.com/office/drawing/2014/main" val="10005"/>
+                  </a:ext>
+                </a:extLst>
               </a:tr>
               <a:tr h="457200">
                 <a:tc>
@@ -19239,6 +19442,11 @@
                     </a:solidFill>
                   </a:tcPr>
                 </a:tc>
+                <a:extLst>
+                  <a:ext uri="{0D108BD9-81ED-4DB2-BD59-A6C34878D82A}">
+                    <a16:rowId xmlns:a16="http://schemas.microsoft.com/office/drawing/2014/main" val="10006"/>
+                  </a:ext>
+                </a:extLst>
               </a:tr>
               <a:tr h="457200">
                 <a:tc>
@@ -19285,6 +19493,11 @@
                     </a:solidFill>
                   </a:tcPr>
                 </a:tc>
+                <a:extLst>
+                  <a:ext uri="{0D108BD9-81ED-4DB2-BD59-A6C34878D82A}">
+                    <a16:rowId xmlns:a16="http://schemas.microsoft.com/office/drawing/2014/main" val="10007"/>
+                  </a:ext>
+                </a:extLst>
               </a:tr>
               <a:tr h="457200">
                 <a:tc>
@@ -19331,6 +19544,11 @@
                     </a:solidFill>
                   </a:tcPr>
                 </a:tc>
+                <a:extLst>
+                  <a:ext uri="{0D108BD9-81ED-4DB2-BD59-A6C34878D82A}">
+                    <a16:rowId xmlns:a16="http://schemas.microsoft.com/office/drawing/2014/main" val="10008"/>
+                  </a:ext>
+                </a:extLst>
               </a:tr>
               <a:tr h="457200">
                 <a:tc>
@@ -19377,6 +19595,11 @@
                     </a:solidFill>
                   </a:tcPr>
                 </a:tc>
+                <a:extLst>
+                  <a:ext uri="{0D108BD9-81ED-4DB2-BD59-A6C34878D82A}">
+                    <a16:rowId xmlns:a16="http://schemas.microsoft.com/office/drawing/2014/main" val="10009"/>
+                  </a:ext>
+                </a:extLst>
               </a:tr>
               <a:tr h="457200">
                 <a:tc>
@@ -19423,6 +19646,11 @@
                     </a:solidFill>
                   </a:tcPr>
                 </a:tc>
+                <a:extLst>
+                  <a:ext uri="{0D108BD9-81ED-4DB2-BD59-A6C34878D82A}">
+                    <a16:rowId xmlns:a16="http://schemas.microsoft.com/office/drawing/2014/main" val="10010"/>
+                  </a:ext>
+                </a:extLst>
               </a:tr>
             </a:tbl>
           </a:graphicData>
@@ -19437,7 +19665,7 @@
 </file>
 
 <file path=ppt/slides/slide5.xml><?xml version="1.0" encoding="utf-8"?>
-<p:sld xmlns:a="http://schemas.openxmlformats.org/drawingml/2006/main" xmlns:p="http://schemas.openxmlformats.org/presentationml/2006/main" xmlns:r="http://schemas.openxmlformats.org/officeDocument/2006/relationships">
+<p:sld xmlns:a="http://schemas.openxmlformats.org/drawingml/2006/main" xmlns:r="http://schemas.openxmlformats.org/officeDocument/2006/relationships" xmlns:p="http://schemas.openxmlformats.org/presentationml/2006/main">
   <p:cSld>
     <p:spTree>
       <p:nvGrpSpPr>
@@ -19445,7 +19673,14 @@
         <p:cNvGrpSpPr/>
         <p:nvPr/>
       </p:nvGrpSpPr>
-      <p:grpSpPr/>
+      <p:grpSpPr>
+        <a:xfrm>
+          <a:off x="0" y="0"/>
+          <a:ext cx="0" cy="0"/>
+          <a:chOff x="0" y="0"/>
+          <a:chExt cx="0" cy="0"/>
+        </a:xfrm>
+      </p:grpSpPr>
       <p:sp>
         <p:nvSpPr>
           <p:cNvPr id="2" name="Title 1"/>
@@ -19533,6 +19768,7 @@
           <a:lstStyle/>
           <a:p>
             <a:pPr algn="ctr"/>
+            <a:endParaRPr/>
           </a:p>
         </p:txBody>
       </p:sp>
@@ -19839,6 +20075,12 @@
                 <a:latin typeface="Calibri"/>
               </a:defRPr>
             </a:pPr>
+            <a:endParaRPr sz="1900" b="0">
+              <a:solidFill>
+                <a:srgbClr val="222222"/>
+              </a:solidFill>
+              <a:latin typeface="Calibri"/>
+            </a:endParaRPr>
           </a:p>
           <a:p>
             <a:pPr algn="l">
@@ -19908,7 +20150,7 @@
           </a:fontRef>
         </p:style>
         <p:txBody>
-          <a:bodyPr rtlCol="0" anchor="ctr" wrap="square" lIns="164592" rIns="164592" tIns="73152" bIns="73152"/>
+          <a:bodyPr wrap="square" lIns="164592" tIns="73152" rIns="164592" bIns="73152" rtlCol="0" anchor="ctr"/>
           <a:lstStyle/>
           <a:p>
             <a:pPr algn="l"/>
@@ -19942,7 +20184,7 @@
 </file>
 
 <file path=ppt/slides/slide6.xml><?xml version="1.0" encoding="utf-8"?>
-<p:sld xmlns:a="http://schemas.openxmlformats.org/drawingml/2006/main" xmlns:p="http://schemas.openxmlformats.org/presentationml/2006/main" xmlns:r="http://schemas.openxmlformats.org/officeDocument/2006/relationships">
+<p:sld xmlns:a="http://schemas.openxmlformats.org/drawingml/2006/main" xmlns:r="http://schemas.openxmlformats.org/officeDocument/2006/relationships" xmlns:p="http://schemas.openxmlformats.org/presentationml/2006/main">
   <p:cSld>
     <p:spTree>
       <p:nvGrpSpPr>
@@ -19950,7 +20192,14 @@
         <p:cNvGrpSpPr/>
         <p:nvPr/>
       </p:nvGrpSpPr>
-      <p:grpSpPr/>
+      <p:grpSpPr>
+        <a:xfrm>
+          <a:off x="0" y="0"/>
+          <a:ext cx="0" cy="0"/>
+          <a:chOff x="0" y="0"/>
+          <a:chExt cx="0" cy="0"/>
+        </a:xfrm>
+      </p:grpSpPr>
       <p:sp>
         <p:nvSpPr>
           <p:cNvPr id="2" name="Title 1"/>
@@ -20038,6 +20287,7 @@
           <a:lstStyle/>
           <a:p>
             <a:pPr algn="ctr"/>
+            <a:endParaRPr/>
           </a:p>
         </p:txBody>
       </p:sp>
@@ -20198,6 +20448,12 @@
                 <a:latin typeface="Calibri"/>
               </a:defRPr>
             </a:pPr>
+            <a:endParaRPr sz="2000" b="0">
+              <a:solidFill>
+                <a:srgbClr val="222222"/>
+              </a:solidFill>
+              <a:latin typeface="Calibri"/>
+            </a:endParaRPr>
           </a:p>
           <a:p>
             <a:pPr algn="l">
@@ -20314,6 +20570,12 @@
                 <a:latin typeface="Calibri"/>
               </a:defRPr>
             </a:pPr>
+            <a:endParaRPr sz="2000" b="0">
+              <a:solidFill>
+                <a:srgbClr val="222222"/>
+              </a:solidFill>
+              <a:latin typeface="Calibri"/>
+            </a:endParaRPr>
           </a:p>
           <a:p>
             <a:pPr algn="l">
@@ -20383,7 +20645,7 @@
           </a:fontRef>
         </p:style>
         <p:txBody>
-          <a:bodyPr rtlCol="0" anchor="ctr" wrap="square" lIns="164592" rIns="164592" tIns="73152" bIns="73152"/>
+          <a:bodyPr wrap="square" lIns="164592" tIns="73152" rIns="164592" bIns="73152" rtlCol="0" anchor="ctr"/>
           <a:lstStyle/>
           <a:p>
             <a:pPr algn="l"/>
@@ -20417,7 +20679,7 @@
 </file>
 
 <file path=ppt/slides/slide7.xml><?xml version="1.0" encoding="utf-8"?>
-<p:sld xmlns:a="http://schemas.openxmlformats.org/drawingml/2006/main" xmlns:p="http://schemas.openxmlformats.org/presentationml/2006/main" xmlns:r="http://schemas.openxmlformats.org/officeDocument/2006/relationships">
+<p:sld xmlns:a="http://schemas.openxmlformats.org/drawingml/2006/main" xmlns:r="http://schemas.openxmlformats.org/officeDocument/2006/relationships" xmlns:p="http://schemas.openxmlformats.org/presentationml/2006/main">
   <p:cSld>
     <p:spTree>
       <p:nvGrpSpPr>
@@ -20425,7 +20687,14 @@
         <p:cNvGrpSpPr/>
         <p:nvPr/>
       </p:nvGrpSpPr>
-      <p:grpSpPr/>
+      <p:grpSpPr>
+        <a:xfrm>
+          <a:off x="0" y="0"/>
+          <a:ext cx="0" cy="0"/>
+          <a:chOff x="0" y="0"/>
+          <a:chExt cx="0" cy="0"/>
+        </a:xfrm>
+      </p:grpSpPr>
       <p:sp>
         <p:nvSpPr>
           <p:cNvPr id="2" name="Title 1"/>
@@ -20513,6 +20782,7 @@
           <a:lstStyle/>
           <a:p>
             <a:pPr algn="ctr"/>
+            <a:endParaRPr/>
           </a:p>
         </p:txBody>
       </p:sp>
@@ -20621,7 +20891,7 @@
           <p:nvPr/>
         </p:nvPicPr>
         <p:blipFill>
-          <a:blip r:embed="rId2"/>
+          <a:blip r:embed="rId3"/>
           <a:stretch>
             <a:fillRect/>
           </a:stretch>
@@ -20645,7 +20915,7 @@
 </file>
 
 <file path=ppt/slides/slide8.xml><?xml version="1.0" encoding="utf-8"?>
-<p:sld xmlns:a="http://schemas.openxmlformats.org/drawingml/2006/main" xmlns:p="http://schemas.openxmlformats.org/presentationml/2006/main" xmlns:r="http://schemas.openxmlformats.org/officeDocument/2006/relationships">
+<p:sld xmlns:a="http://schemas.openxmlformats.org/drawingml/2006/main" xmlns:r="http://schemas.openxmlformats.org/officeDocument/2006/relationships" xmlns:p="http://schemas.openxmlformats.org/presentationml/2006/main">
   <p:cSld>
     <p:spTree>
       <p:nvGrpSpPr>
@@ -20653,7 +20923,14 @@
         <p:cNvGrpSpPr/>
         <p:nvPr/>
       </p:nvGrpSpPr>
-      <p:grpSpPr/>
+      <p:grpSpPr>
+        <a:xfrm>
+          <a:off x="0" y="0"/>
+          <a:ext cx="0" cy="0"/>
+          <a:chOff x="0" y="0"/>
+          <a:chExt cx="0" cy="0"/>
+        </a:xfrm>
+      </p:grpSpPr>
       <p:sp>
         <p:nvSpPr>
           <p:cNvPr id="2" name="Title 1"/>
@@ -20741,6 +21018,7 @@
           <a:lstStyle/>
           <a:p>
             <a:pPr algn="ctr"/>
+            <a:endParaRPr/>
           </a:p>
         </p:txBody>
       </p:sp>
@@ -21025,7 +21303,7 @@
           </a:fontRef>
         </p:style>
         <p:txBody>
-          <a:bodyPr rtlCol="0" anchor="ctr" wrap="square" lIns="45720" rIns="45720" tIns="18288" bIns="18288"/>
+          <a:bodyPr wrap="square" lIns="45720" tIns="18288" rIns="45720" bIns="18288" rtlCol="0" anchor="ctr"/>
           <a:lstStyle/>
           <a:p>
             <a:pPr algn="ctr">
@@ -21132,7 +21410,7 @@
           </a:fontRef>
         </p:style>
         <p:txBody>
-          <a:bodyPr rtlCol="0" anchor="ctr" wrap="square" lIns="45720" rIns="45720" tIns="18288" bIns="18288"/>
+          <a:bodyPr wrap="square" lIns="45720" tIns="18288" rIns="45720" bIns="18288" rtlCol="0" anchor="ctr"/>
           <a:lstStyle/>
           <a:p>
             <a:pPr algn="ctr">
@@ -21239,7 +21517,7 @@
           </a:fontRef>
         </p:style>
         <p:txBody>
-          <a:bodyPr rtlCol="0" anchor="ctr" wrap="square" lIns="45720" rIns="45720" tIns="18288" bIns="18288"/>
+          <a:bodyPr wrap="square" lIns="45720" tIns="18288" rIns="45720" bIns="18288" rtlCol="0" anchor="ctr"/>
           <a:lstStyle/>
           <a:p>
             <a:pPr algn="ctr">
@@ -21309,7 +21587,7 @@
           </a:fontRef>
         </p:style>
         <p:txBody>
-          <a:bodyPr rtlCol="0" anchor="ctr" wrap="square" lIns="45720" rIns="45720" tIns="18288" bIns="18288"/>
+          <a:bodyPr wrap="square" lIns="45720" tIns="18288" rIns="45720" bIns="18288" rtlCol="0" anchor="ctr"/>
           <a:lstStyle/>
           <a:p>
             <a:pPr algn="ctr">
@@ -21416,7 +21694,7 @@
           </a:fontRef>
         </p:style>
         <p:txBody>
-          <a:bodyPr rtlCol="0" anchor="ctr" wrap="square" lIns="45720" rIns="45720" tIns="18288" bIns="18288"/>
+          <a:bodyPr wrap="square" lIns="45720" tIns="18288" rIns="45720" bIns="18288" rtlCol="0" anchor="ctr"/>
           <a:lstStyle/>
           <a:p>
             <a:pPr algn="ctr">
@@ -21523,7 +21801,7 @@
           </a:fontRef>
         </p:style>
         <p:txBody>
-          <a:bodyPr rtlCol="0" anchor="ctr" wrap="square" lIns="45720" rIns="45720" tIns="18288" bIns="18288"/>
+          <a:bodyPr wrap="square" lIns="45720" tIns="18288" rIns="45720" bIns="18288" rtlCol="0" anchor="ctr"/>
           <a:lstStyle/>
           <a:p>
             <a:pPr algn="ctr">
@@ -21593,7 +21871,7 @@
           </a:fontRef>
         </p:style>
         <p:txBody>
-          <a:bodyPr rtlCol="0" anchor="ctr" wrap="square" lIns="45720" rIns="45720" tIns="18288" bIns="18288"/>
+          <a:bodyPr wrap="square" lIns="45720" tIns="18288" rIns="45720" bIns="18288" rtlCol="0" anchor="ctr"/>
           <a:lstStyle/>
           <a:p>
             <a:pPr algn="ctr">
@@ -21700,7 +21978,7 @@
           </a:fontRef>
         </p:style>
         <p:txBody>
-          <a:bodyPr rtlCol="0" anchor="ctr" wrap="square" lIns="45720" rIns="45720" tIns="18288" bIns="18288"/>
+          <a:bodyPr wrap="square" lIns="45720" tIns="18288" rIns="45720" bIns="18288" rtlCol="0" anchor="ctr"/>
           <a:lstStyle/>
           <a:p>
             <a:pPr algn="ctr">
@@ -21807,7 +22085,7 @@
           </a:fontRef>
         </p:style>
         <p:txBody>
-          <a:bodyPr rtlCol="0" anchor="ctr" wrap="square" lIns="45720" rIns="45720" tIns="18288" bIns="18288"/>
+          <a:bodyPr wrap="square" lIns="45720" tIns="18288" rIns="45720" bIns="18288" rtlCol="0" anchor="ctr"/>
           <a:lstStyle/>
           <a:p>
             <a:pPr algn="ctr">
@@ -21877,7 +22155,7 @@
           </a:fontRef>
         </p:style>
         <p:txBody>
-          <a:bodyPr rtlCol="0" anchor="ctr" wrap="square" lIns="45720" rIns="45720" tIns="18288" bIns="18288"/>
+          <a:bodyPr wrap="square" lIns="45720" tIns="18288" rIns="45720" bIns="18288" rtlCol="0" anchor="ctr"/>
           <a:lstStyle/>
           <a:p>
             <a:pPr algn="ctr">
@@ -21984,7 +22262,7 @@
           </a:fontRef>
         </p:style>
         <p:txBody>
-          <a:bodyPr rtlCol="0" anchor="ctr" wrap="square" lIns="45720" rIns="45720" tIns="18288" bIns="18288"/>
+          <a:bodyPr wrap="square" lIns="45720" tIns="18288" rIns="45720" bIns="18288" rtlCol="0" anchor="ctr"/>
           <a:lstStyle/>
           <a:p>
             <a:pPr algn="ctr">
@@ -22091,7 +22369,7 @@
           </a:fontRef>
         </p:style>
         <p:txBody>
-          <a:bodyPr rtlCol="0" anchor="ctr" wrap="square" lIns="45720" rIns="45720" tIns="18288" bIns="18288"/>
+          <a:bodyPr wrap="square" lIns="45720" tIns="18288" rIns="45720" bIns="18288" rtlCol="0" anchor="ctr"/>
           <a:lstStyle/>
           <a:p>
             <a:pPr algn="ctr">
@@ -22161,7 +22439,7 @@
           </a:fontRef>
         </p:style>
         <p:txBody>
-          <a:bodyPr rtlCol="0" anchor="ctr" wrap="square" lIns="164592" rIns="164592" tIns="73152" bIns="73152"/>
+          <a:bodyPr wrap="square" lIns="164592" tIns="73152" rIns="164592" bIns="73152" rtlCol="0" anchor="ctr"/>
           <a:lstStyle/>
           <a:p>
             <a:pPr algn="l"/>
@@ -22195,7 +22473,7 @@
 </file>
 
 <file path=ppt/slides/slide9.xml><?xml version="1.0" encoding="utf-8"?>
-<p:sld xmlns:a="http://schemas.openxmlformats.org/drawingml/2006/main" xmlns:p="http://schemas.openxmlformats.org/presentationml/2006/main" xmlns:r="http://schemas.openxmlformats.org/officeDocument/2006/relationships">
+<p:sld xmlns:a="http://schemas.openxmlformats.org/drawingml/2006/main" xmlns:r="http://schemas.openxmlformats.org/officeDocument/2006/relationships" xmlns:p="http://schemas.openxmlformats.org/presentationml/2006/main">
   <p:cSld>
     <p:spTree>
       <p:nvGrpSpPr>
@@ -22203,7 +22481,14 @@
         <p:cNvGrpSpPr/>
         <p:nvPr/>
       </p:nvGrpSpPr>
-      <p:grpSpPr/>
+      <p:grpSpPr>
+        <a:xfrm>
+          <a:off x="0" y="0"/>
+          <a:ext cx="0" cy="0"/>
+          <a:chOff x="0" y="0"/>
+          <a:chExt cx="0" cy="0"/>
+        </a:xfrm>
+      </p:grpSpPr>
       <p:sp>
         <p:nvSpPr>
           <p:cNvPr id="2" name="Title 1"/>
@@ -22291,6 +22576,7 @@
           <a:lstStyle/>
           <a:p>
             <a:pPr algn="ctr"/>
+            <a:endParaRPr/>
           </a:p>
         </p:txBody>
       </p:sp>
@@ -22848,7 +23134,7 @@
           </a:fontRef>
         </p:style>
         <p:txBody>
-          <a:bodyPr rtlCol="0" anchor="ctr" wrap="square" lIns="164592" rIns="164592" tIns="73152" bIns="73152"/>
+          <a:bodyPr wrap="square" lIns="164592" tIns="73152" rIns="164592" bIns="73152" rtlCol="0" anchor="ctr"/>
           <a:lstStyle/>
           <a:p>
             <a:pPr algn="l"/>
@@ -23212,44 +23498,44 @@
         <a:sysClr val="window" lastClr="FFFFFF"/>
       </a:lt1>
       <a:dk2>
-        <a:srgbClr val="1F497D"/>
+        <a:srgbClr val="0E2841"/>
       </a:dk2>
       <a:lt2>
-        <a:srgbClr val="EEECE1"/>
+        <a:srgbClr val="E8E8E8"/>
       </a:lt2>
       <a:accent1>
-        <a:srgbClr val="4F81BD"/>
+        <a:srgbClr val="156082"/>
       </a:accent1>
       <a:accent2>
-        <a:srgbClr val="C0504D"/>
+        <a:srgbClr val="E97132"/>
       </a:accent2>
       <a:accent3>
-        <a:srgbClr val="9BBB59"/>
+        <a:srgbClr val="196B24"/>
       </a:accent3>
       <a:accent4>
-        <a:srgbClr val="8064A2"/>
+        <a:srgbClr val="0F9ED5"/>
       </a:accent4>
       <a:accent5>
-        <a:srgbClr val="4BACC6"/>
+        <a:srgbClr val="A02B93"/>
       </a:accent5>
       <a:accent6>
-        <a:srgbClr val="F79646"/>
+        <a:srgbClr val="4EA72E"/>
       </a:accent6>
       <a:hlink>
-        <a:srgbClr val="0000FF"/>
+        <a:srgbClr val="467886"/>
       </a:hlink>
       <a:folHlink>
-        <a:srgbClr val="800080"/>
+        <a:srgbClr val="96607D"/>
       </a:folHlink>
     </a:clrScheme>
     <a:fontScheme name="Office">
       <a:majorFont>
-        <a:latin typeface="Calibri"/>
+        <a:latin typeface="Aptos Display" panose="02110004020202020204"/>
         <a:ea typeface=""/>
         <a:cs typeface=""/>
-        <a:font script="Jpan" typeface="ＭＳ Ｐゴシック"/>
+        <a:font script="Jpan" typeface="游ゴシック Light"/>
         <a:font script="Hang" typeface="맑은 고딕"/>
-        <a:font script="Hans" typeface="宋体"/>
+        <a:font script="Hans" typeface="等线 Light"/>
         <a:font script="Hant" typeface="新細明體"/>
         <a:font script="Arab" typeface="Times New Roman"/>
         <a:font script="Hebr" typeface="Times New Roman"/>
@@ -23277,14 +23563,31 @@
         <a:font script="Viet" typeface="Times New Roman"/>
         <a:font script="Uigh" typeface="Microsoft Uighur"/>
         <a:font script="Geor" typeface="Sylfaen"/>
+        <a:font script="Armn" typeface="Arial"/>
+        <a:font script="Bugi" typeface="Leelawadee UI"/>
+        <a:font script="Bopo" typeface="Microsoft JhengHei"/>
+        <a:font script="Java" typeface="Javanese Text"/>
+        <a:font script="Lisu" typeface="Segoe UI"/>
+        <a:font script="Mymr" typeface="Myanmar Text"/>
+        <a:font script="Nkoo" typeface="Ebrima"/>
+        <a:font script="Olck" typeface="Nirmala UI"/>
+        <a:font script="Osma" typeface="Ebrima"/>
+        <a:font script="Phag" typeface="Phagspa"/>
+        <a:font script="Syrn" typeface="Estrangelo Edessa"/>
+        <a:font script="Syrj" typeface="Estrangelo Edessa"/>
+        <a:font script="Syre" typeface="Estrangelo Edessa"/>
+        <a:font script="Sora" typeface="Nirmala UI"/>
+        <a:font script="Tale" typeface="Microsoft Tai Le"/>
+        <a:font script="Talu" typeface="Microsoft New Tai Lue"/>
+        <a:font script="Tfng" typeface="Ebrima"/>
       </a:majorFont>
       <a:minorFont>
-        <a:latin typeface="Calibri"/>
+        <a:latin typeface="Aptos" panose="02110004020202020204"/>
         <a:ea typeface=""/>
         <a:cs typeface=""/>
-        <a:font script="Jpan" typeface="ＭＳ Ｐゴシック"/>
+        <a:font script="Jpan" typeface="游ゴシック"/>
         <a:font script="Hang" typeface="맑은 고딕"/>
-        <a:font script="Hans" typeface="宋体"/>
+        <a:font script="Hans" typeface="等线"/>
         <a:font script="Hant" typeface="新細明體"/>
         <a:font script="Arab" typeface="Arial"/>
         <a:font script="Hebr" typeface="Arial"/>
@@ -23312,6 +23615,23 @@
         <a:font script="Viet" typeface="Arial"/>
         <a:font script="Uigh" typeface="Microsoft Uighur"/>
         <a:font script="Geor" typeface="Sylfaen"/>
+        <a:font script="Armn" typeface="Arial"/>
+        <a:font script="Bugi" typeface="Leelawadee UI"/>
+        <a:font script="Bopo" typeface="Microsoft JhengHei"/>
+        <a:font script="Java" typeface="Javanese Text"/>
+        <a:font script="Lisu" typeface="Segoe UI"/>
+        <a:font script="Mymr" typeface="Myanmar Text"/>
+        <a:font script="Nkoo" typeface="Ebrima"/>
+        <a:font script="Olck" typeface="Nirmala UI"/>
+        <a:font script="Osma" typeface="Ebrima"/>
+        <a:font script="Phag" typeface="Phagspa"/>
+        <a:font script="Syrn" typeface="Estrangelo Edessa"/>
+        <a:font script="Syrj" typeface="Estrangelo Edessa"/>
+        <a:font script="Syre" typeface="Estrangelo Edessa"/>
+        <a:font script="Sora" typeface="Nirmala UI"/>
+        <a:font script="Tale" typeface="Microsoft Tai Le"/>
+        <a:font script="Talu" typeface="Microsoft New Tai Lue"/>
+        <a:font script="Tfng" typeface="Ebrima"/>
       </a:minorFont>
     </a:fontScheme>
     <a:fmtScheme name="Office">
@@ -23323,180 +23643,136 @@
           <a:gsLst>
             <a:gs pos="0">
               <a:schemeClr val="phClr">
-                <a:tint val="50000"/>
-                <a:satMod val="300000"/>
+                <a:lumMod val="110000"/>
+                <a:satMod val="105000"/>
+                <a:tint val="67000"/>
               </a:schemeClr>
             </a:gs>
-            <a:gs pos="35000">
+            <a:gs pos="50000">
               <a:schemeClr val="phClr">
-                <a:tint val="37000"/>
-                <a:satMod val="300000"/>
+                <a:lumMod val="105000"/>
+                <a:satMod val="103000"/>
+                <a:tint val="73000"/>
               </a:schemeClr>
             </a:gs>
             <a:gs pos="100000">
               <a:schemeClr val="phClr">
-                <a:tint val="15000"/>
-                <a:satMod val="350000"/>
+                <a:lumMod val="105000"/>
+                <a:satMod val="109000"/>
+                <a:tint val="81000"/>
               </a:schemeClr>
             </a:gs>
           </a:gsLst>
-          <a:lin ang="16200000" scaled="1"/>
+          <a:lin ang="5400000" scaled="0"/>
         </a:gradFill>
         <a:gradFill rotWithShape="1">
           <a:gsLst>
             <a:gs pos="0">
               <a:schemeClr val="phClr">
-                <a:tint val="100000"/>
+                <a:satMod val="103000"/>
+                <a:lumMod val="102000"/>
+                <a:tint val="94000"/>
+              </a:schemeClr>
+            </a:gs>
+            <a:gs pos="50000">
+              <a:schemeClr val="phClr">
+                <a:satMod val="110000"/>
+                <a:lumMod val="100000"/>
                 <a:shade val="100000"/>
-                <a:satMod val="130000"/>
               </a:schemeClr>
             </a:gs>
             <a:gs pos="100000">
               <a:schemeClr val="phClr">
-                <a:tint val="50000"/>
-                <a:shade val="100000"/>
-                <a:satMod val="350000"/>
+                <a:lumMod val="99000"/>
+                <a:satMod val="120000"/>
+                <a:shade val="78000"/>
               </a:schemeClr>
             </a:gs>
           </a:gsLst>
-          <a:lin ang="16200000" scaled="0"/>
+          <a:lin ang="5400000" scaled="0"/>
         </a:gradFill>
       </a:fillStyleLst>
       <a:lnStyleLst>
-        <a:ln w="9525" cap="flat" cmpd="sng" algn="ctr">
+        <a:ln w="12700" cap="flat" cmpd="sng" algn="ctr">
           <a:solidFill>
-            <a:schemeClr val="phClr">
-              <a:shade val="95000"/>
-              <a:satMod val="105000"/>
-            </a:schemeClr>
+            <a:schemeClr val="phClr"/>
           </a:solidFill>
           <a:prstDash val="solid"/>
+          <a:miter lim="800000"/>
+        </a:ln>
+        <a:ln w="19050" cap="flat" cmpd="sng" algn="ctr">
+          <a:solidFill>
+            <a:schemeClr val="phClr"/>
+          </a:solidFill>
+          <a:prstDash val="solid"/>
+          <a:miter lim="800000"/>
         </a:ln>
         <a:ln w="25400" cap="flat" cmpd="sng" algn="ctr">
           <a:solidFill>
             <a:schemeClr val="phClr"/>
           </a:solidFill>
           <a:prstDash val="solid"/>
-        </a:ln>
-        <a:ln w="38100" cap="flat" cmpd="sng" algn="ctr">
-          <a:solidFill>
-            <a:schemeClr val="phClr"/>
-          </a:solidFill>
-          <a:prstDash val="solid"/>
+          <a:miter lim="800000"/>
         </a:ln>
       </a:lnStyleLst>
       <a:effectStyleLst>
         <a:effectStyle>
+          <a:effectLst/>
+        </a:effectStyle>
+        <a:effectStyle>
+          <a:effectLst/>
+        </a:effectStyle>
+        <a:effectStyle>
           <a:effectLst>
-            <a:outerShdw blurRad="40000" dist="20000" dir="5400000" rotWithShape="0">
+            <a:outerShdw blurRad="57150" dist="19050" dir="5400000" algn="ctr" rotWithShape="0">
               <a:srgbClr val="000000">
-                <a:alpha val="38000"/>
+                <a:alpha val="63000"/>
               </a:srgbClr>
             </a:outerShdw>
           </a:effectLst>
-        </a:effectStyle>
-        <a:effectStyle>
-          <a:effectLst>
-            <a:outerShdw blurRad="40000" dist="23000" dir="5400000" rotWithShape="0">
-              <a:srgbClr val="000000">
-                <a:alpha val="35000"/>
-              </a:srgbClr>
-            </a:outerShdw>
-          </a:effectLst>
-        </a:effectStyle>
-        <a:effectStyle>
-          <a:effectLst>
-            <a:outerShdw blurRad="40000" dist="23000" dir="5400000" rotWithShape="0">
-              <a:srgbClr val="000000">
-                <a:alpha val="35000"/>
-              </a:srgbClr>
-            </a:outerShdw>
-          </a:effectLst>
-          <a:scene3d>
-            <a:camera prst="orthographicFront">
-              <a:rot lat="0" lon="0" rev="0"/>
-            </a:camera>
-            <a:lightRig rig="threePt" dir="t">
-              <a:rot lat="0" lon="0" rev="1200000"/>
-            </a:lightRig>
-          </a:scene3d>
-          <a:sp3d>
-            <a:bevelT w="63500" h="25400"/>
-          </a:sp3d>
         </a:effectStyle>
       </a:effectStyleLst>
       <a:bgFillStyleLst>
         <a:solidFill>
           <a:schemeClr val="phClr"/>
         </a:solidFill>
+        <a:solidFill>
+          <a:schemeClr val="phClr">
+            <a:tint val="95000"/>
+            <a:satMod val="170000"/>
+          </a:schemeClr>
+        </a:solidFill>
         <a:gradFill rotWithShape="1">
           <a:gsLst>
             <a:gs pos="0">
               <a:schemeClr val="phClr">
-                <a:tint val="40000"/>
-                <a:satMod val="350000"/>
+                <a:tint val="93000"/>
+                <a:satMod val="150000"/>
+                <a:shade val="98000"/>
+                <a:lumMod val="102000"/>
               </a:schemeClr>
             </a:gs>
-            <a:gs pos="40000">
+            <a:gs pos="50000">
               <a:schemeClr val="phClr">
-                <a:tint val="45000"/>
-                <a:shade val="99000"/>
-                <a:satMod val="350000"/>
+                <a:tint val="98000"/>
+                <a:satMod val="130000"/>
+                <a:shade val="90000"/>
+                <a:lumMod val="103000"/>
               </a:schemeClr>
             </a:gs>
             <a:gs pos="100000">
               <a:schemeClr val="phClr">
-                <a:shade val="20000"/>
-                <a:satMod val="255000"/>
+                <a:shade val="63000"/>
+                <a:satMod val="120000"/>
               </a:schemeClr>
             </a:gs>
           </a:gsLst>
-          <a:path path="circle">
-            <a:fillToRect l="50000" t="-80000" r="50000" b="180000"/>
-          </a:path>
-        </a:gradFill>
-        <a:gradFill rotWithShape="1">
-          <a:gsLst>
-            <a:gs pos="0">
-              <a:schemeClr val="phClr">
-                <a:tint val="80000"/>
-                <a:satMod val="300000"/>
-              </a:schemeClr>
-            </a:gs>
-            <a:gs pos="100000">
-              <a:schemeClr val="phClr">
-                <a:shade val="30000"/>
-                <a:satMod val="200000"/>
-              </a:schemeClr>
-            </a:gs>
-          </a:gsLst>
-          <a:path path="circle">
-            <a:fillToRect l="50000" t="50000" r="50000" b="50000"/>
-          </a:path>
+          <a:lin ang="5400000" scaled="0"/>
         </a:gradFill>
       </a:bgFillStyleLst>
     </a:fmtScheme>
   </a:themeElements>
   <a:objectDefaults>
-    <a:spDef>
-      <a:spPr/>
-      <a:bodyPr/>
-      <a:lstStyle/>
-      <a:style>
-        <a:lnRef idx="1">
-          <a:schemeClr val="accent1"/>
-        </a:lnRef>
-        <a:fillRef idx="3">
-          <a:schemeClr val="accent1"/>
-        </a:fillRef>
-        <a:effectRef idx="2">
-          <a:schemeClr val="accent1"/>
-        </a:effectRef>
-        <a:fontRef idx="minor">
-          <a:schemeClr val="lt1"/>
-        </a:fontRef>
-      </a:style>
-    </a:spDef>
     <a:lnDef>
       <a:spPr/>
       <a:bodyPr/>
@@ -23518,5 +23794,10 @@
     </a:lnDef>
   </a:objectDefaults>
   <a:extraClrSchemeLst/>
+  <a:extLst>
+    <a:ext uri="{05A4C25C-085E-4340-85A3-A5531E510DB2}">
+      <thm15:themeFamily xmlns:thm15="http://schemas.microsoft.com/office/thememl/2012/main" name="Office Theme" id="{2E142A2C-CD16-42D6-873A-C26D2A0506FA}" vid="{1BDDFF52-6CD6-40A5-AB3C-68EB2F1E4D0A}"/>
+    </a:ext>
+  </a:extLst>
 </a:theme>
 </file>
--- a/ground-vehicle/docs/courses/beginner-ps3/l3_controller_programming.pptx
+++ b/ground-vehicle/docs/courses/beginner-ps3/l3_controller_programming.pptx
@@ -4,37 +4,36 @@
   <p:sldMasterIdLst>
     <p:sldMasterId id="2147483648" r:id="rId1"/>
   </p:sldMasterIdLst>
-  <p:notesMasterIdLst>
-    <p:notesMasterId r:id="rId27"/>
-  </p:notesMasterIdLst>
   <p:sldIdLst>
-    <p:sldId id="256" r:id="rId2"/>
-    <p:sldId id="257" r:id="rId3"/>
-    <p:sldId id="258" r:id="rId4"/>
-    <p:sldId id="259" r:id="rId5"/>
-    <p:sldId id="260" r:id="rId6"/>
-    <p:sldId id="261" r:id="rId7"/>
-    <p:sldId id="262" r:id="rId8"/>
-    <p:sldId id="263" r:id="rId9"/>
-    <p:sldId id="264" r:id="rId10"/>
-    <p:sldId id="265" r:id="rId11"/>
-    <p:sldId id="266" r:id="rId12"/>
-    <p:sldId id="267" r:id="rId13"/>
-    <p:sldId id="268" r:id="rId14"/>
-    <p:sldId id="269" r:id="rId15"/>
-    <p:sldId id="270" r:id="rId16"/>
-    <p:sldId id="271" r:id="rId17"/>
-    <p:sldId id="272" r:id="rId18"/>
-    <p:sldId id="273" r:id="rId19"/>
-    <p:sldId id="274" r:id="rId20"/>
-    <p:sldId id="275" r:id="rId21"/>
-    <p:sldId id="276" r:id="rId22"/>
-    <p:sldId id="277" r:id="rId23"/>
-    <p:sldId id="278" r:id="rId24"/>
-    <p:sldId id="279" r:id="rId25"/>
-    <p:sldId id="280" r:id="rId26"/>
+    <p:sldId id="256" r:id="rId7"/>
+    <p:sldId id="257" r:id="rId9"/>
+    <p:sldId id="258" r:id="rId10"/>
+    <p:sldId id="259" r:id="rId11"/>
+    <p:sldId id="260" r:id="rId12"/>
+    <p:sldId id="261" r:id="rId13"/>
+    <p:sldId id="262" r:id="rId14"/>
+    <p:sldId id="263" r:id="rId15"/>
+    <p:sldId id="264" r:id="rId16"/>
+    <p:sldId id="265" r:id="rId17"/>
+    <p:sldId id="266" r:id="rId18"/>
+    <p:sldId id="267" r:id="rId19"/>
+    <p:sldId id="268" r:id="rId20"/>
+    <p:sldId id="269" r:id="rId21"/>
+    <p:sldId id="270" r:id="rId22"/>
+    <p:sldId id="271" r:id="rId23"/>
+    <p:sldId id="272" r:id="rId24"/>
+    <p:sldId id="273" r:id="rId25"/>
+    <p:sldId id="274" r:id="rId26"/>
+    <p:sldId id="275" r:id="rId27"/>
+    <p:sldId id="276" r:id="rId28"/>
+    <p:sldId id="277" r:id="rId29"/>
+    <p:sldId id="278" r:id="rId30"/>
+    <p:sldId id="279" r:id="rId31"/>
+    <p:sldId id="280" r:id="rId32"/>
+    <p:sldId id="281" r:id="rId33"/>
+    <p:sldId id="282" r:id="rId34"/>
   </p:sldIdLst>
-  <p:sldSz cx="12192000" cy="6858000"/>
+  <p:sldSz cx="12191695" cy="6858000" type="screen4x3"/>
   <p:notesSz cx="6858000" cy="9144000"/>
   <p:defaultTextStyle>
     <a:defPPr>
@@ -131,48 +130,11 @@
       </a:defRPr>
     </a:lvl9pPr>
   </p:defaultTextStyle>
-  <p:extLst>
-    <p:ext uri="{EFAFB233-063F-42B5-8137-9DF3F51BA10A}">
-      <p15:sldGuideLst xmlns:p15="http://schemas.microsoft.com/office/powerpoint/2012/main">
-        <p15:guide id="1" orient="horz" pos="2160">
-          <p15:clr>
-            <a:srgbClr val="A4A3A4"/>
-          </p15:clr>
-        </p15:guide>
-        <p15:guide id="2" pos="2880">
-          <p15:clr>
-            <a:srgbClr val="A4A3A4"/>
-          </p15:clr>
-        </p15:guide>
-      </p15:sldGuideLst>
-    </p:ext>
-  </p:extLst>
 </p:presentation>
 </file>
 
-<file path=ppt/changesInfos/changesInfo1.xml><?xml version="1.0" encoding="utf-8"?>
-<pc:chgInfo xmlns:a="http://schemas.openxmlformats.org/drawingml/2006/main" xmlns:r="http://schemas.openxmlformats.org/officeDocument/2006/relationships" xmlns:ac="http://schemas.microsoft.com/office/drawing/2013/main/command" xmlns:pc="http://schemas.microsoft.com/office/powerpoint/2013/main/command">
-  <pc:docChgLst>
-    <pc:chgData name="Kevin Bowen" userId="ee6702fae12807e4" providerId="LiveId" clId="{5CB6C98B-5151-4E5D-BF39-3ED613ABF9A3}"/>
-    <pc:docChg chg="custSel modSld">
-      <pc:chgData name="Kevin Bowen" userId="ee6702fae12807e4" providerId="LiveId" clId="{5CB6C98B-5151-4E5D-BF39-3ED613ABF9A3}" dt="2026-09-07T17:12:38.786" v="66" actId="20577"/>
-      <pc:docMkLst>
-        <pc:docMk/>
-      </pc:docMkLst>
-      <pc:sldChg chg="modNotesTx">
-        <pc:chgData name="Kevin Bowen" userId="ee6702fae12807e4" providerId="LiveId" clId="{5CB6C98B-5151-4E5D-BF39-3ED613ABF9A3}" dt="2026-09-07T17:12:38.786" v="66" actId="20577"/>
-        <pc:sldMkLst>
-          <pc:docMk/>
-          <pc:sldMk cId="0" sldId="280"/>
-        </pc:sldMkLst>
-      </pc:sldChg>
-    </pc:docChg>
-  </pc:docChgLst>
-</pc:chgInfo>
-</file>
-
 <file path=ppt/notesMasters/notesMaster1.xml><?xml version="1.0" encoding="utf-8"?>
-<p:notesMaster xmlns:a="http://schemas.openxmlformats.org/drawingml/2006/main" xmlns:r="http://schemas.openxmlformats.org/officeDocument/2006/relationships" xmlns:p="http://schemas.openxmlformats.org/presentationml/2006/main">
+<p:notesMaster xmlns:a="http://schemas.openxmlformats.org/drawingml/2006/main" xmlns:p="http://schemas.openxmlformats.org/presentationml/2006/main" xmlns:r="http://schemas.openxmlformats.org/officeDocument/2006/relationships">
   <p:cSld>
     <p:bg>
       <p:bgRef idx="1001">
@@ -193,16 +155,241 @@
           <a:chExt cx="0" cy="0"/>
         </a:xfrm>
       </p:grpSpPr>
+      <p:sp>
+        <p:nvSpPr>
+          <p:cNvPr id="2" name="Header Placeholder 1"/>
+          <p:cNvSpPr>
+            <a:spLocks noGrp="1"/>
+          </p:cNvSpPr>
+          <p:nvPr>
+            <p:ph type="hdr" sz="quarter"/>
+          </p:nvPr>
+        </p:nvSpPr>
+        <p:spPr>
+          <a:xfrm>
+            <a:off x="0" y="0"/>
+            <a:ext cx="2971800" cy="457200"/>
+          </a:xfrm>
+          <a:prstGeom prst="rect">
+            <a:avLst/>
+          </a:prstGeom>
+        </p:spPr>
+        <p:txBody>
+          <a:bodyPr vert="horz" lIns="91440" tIns="45720" rIns="91440" bIns="45720" rtlCol="0"/>
+          <a:lstStyle>
+            <a:lvl1pPr algn="l">
+              <a:defRPr sz="1200"/>
+            </a:lvl1pPr>
+          </a:lstStyle>
+          <a:p>
+            <a:endParaRPr lang="en-US"/>
+          </a:p>
+        </p:txBody>
+      </p:sp>
+      <p:sp>
+        <p:nvSpPr>
+          <p:cNvPr id="3" name="Date Placeholder 2"/>
+          <p:cNvSpPr>
+            <a:spLocks noGrp="1"/>
+          </p:cNvSpPr>
+          <p:nvPr>
+            <p:ph type="dt" idx="1"/>
+          </p:nvPr>
+        </p:nvSpPr>
+        <p:spPr>
+          <a:xfrm>
+            <a:off x="3884613" y="0"/>
+            <a:ext cx="2971800" cy="457200"/>
+          </a:xfrm>
+          <a:prstGeom prst="rect">
+            <a:avLst/>
+          </a:prstGeom>
+        </p:spPr>
+        <p:txBody>
+          <a:bodyPr vert="horz" lIns="91440" tIns="45720" rIns="91440" bIns="45720" rtlCol="0"/>
+          <a:lstStyle>
+            <a:lvl1pPr algn="r">
+              <a:defRPr sz="1200"/>
+            </a:lvl1pPr>
+          </a:lstStyle>
+          <a:p>
+            <a:fld id="{0F89C1C7-3DCD-1040-A9CF-14679D8B5DDD}" type="datetimeFigureOut">
+              <a:rPr lang="en-US" smtClean="0"/>
+              <a:t>10/17/16</a:t>
+            </a:fld>
+            <a:endParaRPr lang="en-US"/>
+          </a:p>
+        </p:txBody>
+      </p:sp>
+      <p:sp>
+        <p:nvSpPr>
+          <p:cNvPr id="4" name="Slide Image Placeholder 3"/>
+          <p:cNvSpPr>
+            <a:spLocks noGrp="1" noRot="1" noChangeAspect="1"/>
+          </p:cNvSpPr>
+          <p:nvPr>
+            <p:ph type="sldImg" idx="2"/>
+          </p:nvPr>
+        </p:nvSpPr>
+        <p:spPr>
+          <a:xfrm>
+            <a:off x="1143000" y="685800"/>
+            <a:ext cx="4572000" cy="3429000"/>
+          </a:xfrm>
+          <a:prstGeom prst="rect">
+            <a:avLst/>
+          </a:prstGeom>
+          <a:noFill/>
+          <a:ln w="12700">
+            <a:solidFill>
+              <a:prstClr val="black"/>
+            </a:solidFill>
+          </a:ln>
+        </p:spPr>
+        <p:txBody>
+          <a:bodyPr vert="horz" lIns="91440" tIns="45720" rIns="91440" bIns="45720" rtlCol="0" anchor="ctr"/>
+          <a:lstStyle/>
+          <a:p>
+            <a:endParaRPr lang="en-US"/>
+          </a:p>
+        </p:txBody>
+      </p:sp>
+      <p:sp>
+        <p:nvSpPr>
+          <p:cNvPr id="5" name="Notes Placeholder 4"/>
+          <p:cNvSpPr>
+            <a:spLocks noGrp="1"/>
+          </p:cNvSpPr>
+          <p:nvPr>
+            <p:ph type="body" sz="quarter" idx="3"/>
+          </p:nvPr>
+        </p:nvSpPr>
+        <p:spPr>
+          <a:xfrm>
+            <a:off x="685800" y="4343400"/>
+            <a:ext cx="5486400" cy="4114800"/>
+          </a:xfrm>
+          <a:prstGeom prst="rect">
+            <a:avLst/>
+          </a:prstGeom>
+        </p:spPr>
+        <p:txBody>
+          <a:bodyPr vert="horz" lIns="91440" tIns="45720" rIns="91440" bIns="45720" rtlCol="0"/>
+          <a:lstStyle/>
+          <a:p>
+            <a:pPr lvl="0"/>
+            <a:r>
+              <a:rPr lang="en-US" smtClean="0"/>
+              <a:t>Click to edit Master text styles</a:t>
+            </a:r>
+          </a:p>
+          <a:p>
+            <a:pPr lvl="1"/>
+            <a:r>
+              <a:rPr lang="en-US" smtClean="0"/>
+              <a:t>Second level</a:t>
+            </a:r>
+          </a:p>
+          <a:p>
+            <a:pPr lvl="2"/>
+            <a:r>
+              <a:rPr lang="en-US" smtClean="0"/>
+              <a:t>Third level</a:t>
+            </a:r>
+          </a:p>
+          <a:p>
+            <a:pPr lvl="3"/>
+            <a:r>
+              <a:rPr lang="en-US" smtClean="0"/>
+              <a:t>Fourth level</a:t>
+            </a:r>
+          </a:p>
+          <a:p>
+            <a:pPr lvl="4"/>
+            <a:r>
+              <a:rPr lang="en-US" smtClean="0"/>
+              <a:t>Fifth level</a:t>
+            </a:r>
+            <a:endParaRPr lang="en-US"/>
+          </a:p>
+        </p:txBody>
+      </p:sp>
+      <p:sp>
+        <p:nvSpPr>
+          <p:cNvPr id="6" name="Footer Placeholder 5"/>
+          <p:cNvSpPr>
+            <a:spLocks noGrp="1"/>
+          </p:cNvSpPr>
+          <p:nvPr>
+            <p:ph type="ftr" sz="quarter" idx="4"/>
+          </p:nvPr>
+        </p:nvSpPr>
+        <p:spPr>
+          <a:xfrm>
+            <a:off x="0" y="8685213"/>
+            <a:ext cx="2971800" cy="457200"/>
+          </a:xfrm>
+          <a:prstGeom prst="rect">
+            <a:avLst/>
+          </a:prstGeom>
+        </p:spPr>
+        <p:txBody>
+          <a:bodyPr vert="horz" lIns="91440" tIns="45720" rIns="91440" bIns="45720" rtlCol="0" anchor="b"/>
+          <a:lstStyle>
+            <a:lvl1pPr algn="l">
+              <a:defRPr sz="1200"/>
+            </a:lvl1pPr>
+          </a:lstStyle>
+          <a:p>
+            <a:endParaRPr lang="en-US"/>
+          </a:p>
+        </p:txBody>
+      </p:sp>
+      <p:sp>
+        <p:nvSpPr>
+          <p:cNvPr id="7" name="Slide Number Placeholder 6"/>
+          <p:cNvSpPr>
+            <a:spLocks noGrp="1"/>
+          </p:cNvSpPr>
+          <p:nvPr>
+            <p:ph type="sldNum" sz="quarter" idx="5"/>
+          </p:nvPr>
+        </p:nvSpPr>
+        <p:spPr>
+          <a:xfrm>
+            <a:off x="3884613" y="8685213"/>
+            <a:ext cx="2971800" cy="457200"/>
+          </a:xfrm>
+          <a:prstGeom prst="rect">
+            <a:avLst/>
+          </a:prstGeom>
+        </p:spPr>
+        <p:txBody>
+          <a:bodyPr vert="horz" lIns="91440" tIns="45720" rIns="91440" bIns="45720" rtlCol="0" anchor="b"/>
+          <a:lstStyle>
+            <a:lvl1pPr algn="r">
+              <a:defRPr sz="1200"/>
+            </a:lvl1pPr>
+          </a:lstStyle>
+          <a:p>
+            <a:fld id="{BB5E49A5-4136-284D-997B-48E1D791AD67}" type="slidenum">
+              <a:rPr lang="en-US" smtClean="0"/>
+              <a:t>‹#›</a:t>
+            </a:fld>
+            <a:endParaRPr lang="en-US"/>
+          </a:p>
+        </p:txBody>
+      </p:sp>
     </p:spTree>
     <p:extLst>
       <p:ext uri="{BB962C8B-B14F-4D97-AF65-F5344CB8AC3E}">
-        <p14:creationId xmlns:p14="http://schemas.microsoft.com/office/powerpoint/2010/main" val="3901631622"/>
+        <p14:creationId xmlns:p14="http://schemas.microsoft.com/office/powerpoint/2010/main" val="2623252185"/>
       </p:ext>
     </p:extLst>
   </p:cSld>
   <p:clrMap bg1="lt1" tx1="dk1" bg2="lt2" tx2="dk2" accent1="accent1" accent2="accent2" accent3="accent3" accent4="accent4" accent5="accent5" accent6="accent6" hlink="hlink" folHlink="folHlink"/>
   <p:notesStyle>
-    <a:lvl1pPr marL="0" algn="l" defTabSz="914400" rtl="0" eaLnBrk="1" latinLnBrk="0" hangingPunct="1">
+    <a:lvl1pPr marL="0" algn="l" defTabSz="457200" rtl="0" eaLnBrk="1" latinLnBrk="0" hangingPunct="1">
       <a:defRPr sz="1200" kern="1200">
         <a:solidFill>
           <a:schemeClr val="tx1"/>
@@ -212,7 +399,7 @@
         <a:cs typeface="+mn-cs"/>
       </a:defRPr>
     </a:lvl1pPr>
-    <a:lvl2pPr marL="457200" algn="l" defTabSz="914400" rtl="0" eaLnBrk="1" latinLnBrk="0" hangingPunct="1">
+    <a:lvl2pPr marL="457200" algn="l" defTabSz="457200" rtl="0" eaLnBrk="1" latinLnBrk="0" hangingPunct="1">
       <a:defRPr sz="1200" kern="1200">
         <a:solidFill>
           <a:schemeClr val="tx1"/>
@@ -222,7 +409,7 @@
         <a:cs typeface="+mn-cs"/>
       </a:defRPr>
     </a:lvl2pPr>
-    <a:lvl3pPr marL="914400" algn="l" defTabSz="914400" rtl="0" eaLnBrk="1" latinLnBrk="0" hangingPunct="1">
+    <a:lvl3pPr marL="914400" algn="l" defTabSz="457200" rtl="0" eaLnBrk="1" latinLnBrk="0" hangingPunct="1">
       <a:defRPr sz="1200" kern="1200">
         <a:solidFill>
           <a:schemeClr val="tx1"/>
@@ -232,7 +419,7 @@
         <a:cs typeface="+mn-cs"/>
       </a:defRPr>
     </a:lvl3pPr>
-    <a:lvl4pPr marL="1371600" algn="l" defTabSz="914400" rtl="0" eaLnBrk="1" latinLnBrk="0" hangingPunct="1">
+    <a:lvl4pPr marL="1371600" algn="l" defTabSz="457200" rtl="0" eaLnBrk="1" latinLnBrk="0" hangingPunct="1">
       <a:defRPr sz="1200" kern="1200">
         <a:solidFill>
           <a:schemeClr val="tx1"/>
@@ -242,7 +429,7 @@
         <a:cs typeface="+mn-cs"/>
       </a:defRPr>
     </a:lvl4pPr>
-    <a:lvl5pPr marL="1828800" algn="l" defTabSz="914400" rtl="0" eaLnBrk="1" latinLnBrk="0" hangingPunct="1">
+    <a:lvl5pPr marL="1828800" algn="l" defTabSz="457200" rtl="0" eaLnBrk="1" latinLnBrk="0" hangingPunct="1">
       <a:defRPr sz="1200" kern="1200">
         <a:solidFill>
           <a:schemeClr val="tx1"/>
@@ -252,7 +439,7 @@
         <a:cs typeface="+mn-cs"/>
       </a:defRPr>
     </a:lvl5pPr>
-    <a:lvl6pPr marL="2286000" algn="l" defTabSz="914400" rtl="0" eaLnBrk="1" latinLnBrk="0" hangingPunct="1">
+    <a:lvl6pPr marL="2286000" algn="l" defTabSz="457200" rtl="0" eaLnBrk="1" latinLnBrk="0" hangingPunct="1">
       <a:defRPr sz="1200" kern="1200">
         <a:solidFill>
           <a:schemeClr val="tx1"/>
@@ -262,7 +449,7 @@
         <a:cs typeface="+mn-cs"/>
       </a:defRPr>
     </a:lvl6pPr>
-    <a:lvl7pPr marL="2743200" algn="l" defTabSz="914400" rtl="0" eaLnBrk="1" latinLnBrk="0" hangingPunct="1">
+    <a:lvl7pPr marL="2743200" algn="l" defTabSz="457200" rtl="0" eaLnBrk="1" latinLnBrk="0" hangingPunct="1">
       <a:defRPr sz="1200" kern="1200">
         <a:solidFill>
           <a:schemeClr val="tx1"/>
@@ -272,7 +459,7 @@
         <a:cs typeface="+mn-cs"/>
       </a:defRPr>
     </a:lvl7pPr>
-    <a:lvl8pPr marL="3200400" algn="l" defTabSz="914400" rtl="0" eaLnBrk="1" latinLnBrk="0" hangingPunct="1">
+    <a:lvl8pPr marL="3200400" algn="l" defTabSz="457200" rtl="0" eaLnBrk="1" latinLnBrk="0" hangingPunct="1">
       <a:defRPr sz="1200" kern="1200">
         <a:solidFill>
           <a:schemeClr val="tx1"/>
@@ -282,7 +469,7 @@
         <a:cs typeface="+mn-cs"/>
       </a:defRPr>
     </a:lvl8pPr>
-    <a:lvl9pPr marL="3657600" algn="l" defTabSz="914400" rtl="0" eaLnBrk="1" latinLnBrk="0" hangingPunct="1">
+    <a:lvl9pPr marL="3657600" algn="l" defTabSz="457200" rtl="0" eaLnBrk="1" latinLnBrk="0" hangingPunct="1">
       <a:defRPr sz="1200" kern="1200">
         <a:solidFill>
           <a:schemeClr val="tx1"/>
@@ -297,7 +484,7 @@
 </file>
 
 <file path=ppt/notesSlides/notesSlide1.xml><?xml version="1.0" encoding="utf-8"?>
-<p:notes xmlns:a="http://schemas.openxmlformats.org/drawingml/2006/main" xmlns:r="http://schemas.openxmlformats.org/officeDocument/2006/relationships" xmlns:p="http://schemas.openxmlformats.org/presentationml/2006/main">
+<p:notes xmlns:a="http://schemas.openxmlformats.org/drawingml/2006/main" xmlns:p="http://schemas.openxmlformats.org/presentationml/2006/main" xmlns:r="http://schemas.openxmlformats.org/officeDocument/2006/relationships">
   <p:cSld>
     <p:spTree>
       <p:nvGrpSpPr>
@@ -317,7 +504,7 @@
         <p:nvSpPr>
           <p:cNvPr id="2" name="Slide Image Placeholder 1"/>
           <p:cNvSpPr>
-            <a:spLocks noGrp="1" noRot="1" noChangeAspect="1"/>
+            <a:spLocks noGrp="1"/>
           </p:cNvSpPr>
           <p:nvPr>
             <p:ph type="sldImg" idx="2"/>
@@ -332,7 +519,7 @@
             <a:spLocks noGrp="1"/>
           </p:cNvSpPr>
           <p:nvPr>
-            <p:ph type="body" sz="quarter" idx="3"/>
+            <p:ph type="body" idx="3" sz="quarter"/>
           </p:nvPr>
         </p:nvSpPr>
         <p:spPr/>
@@ -364,7 +551,7 @@
             <a:spLocks noGrp="1"/>
           </p:cNvSpPr>
           <p:nvPr>
-            <p:ph type="sldNum" sz="quarter" idx="5"/>
+            <p:ph type="sldNum" idx="5" sz="quarter"/>
           </p:nvPr>
         </p:nvSpPr>
         <p:spPr/>
@@ -378,7 +565,7 @@
 </file>
 
 <file path=ppt/notesSlides/notesSlide10.xml><?xml version="1.0" encoding="utf-8"?>
-<p:notes xmlns:a="http://schemas.openxmlformats.org/drawingml/2006/main" xmlns:r="http://schemas.openxmlformats.org/officeDocument/2006/relationships" xmlns:p="http://schemas.openxmlformats.org/presentationml/2006/main">
+<p:notes xmlns:a="http://schemas.openxmlformats.org/drawingml/2006/main" xmlns:p="http://schemas.openxmlformats.org/presentationml/2006/main" xmlns:r="http://schemas.openxmlformats.org/officeDocument/2006/relationships">
   <p:cSld>
     <p:spTree>
       <p:nvGrpSpPr>
@@ -398,7 +585,7 @@
         <p:nvSpPr>
           <p:cNvPr id="2" name="Slide Image Placeholder 1"/>
           <p:cNvSpPr>
-            <a:spLocks noGrp="1" noRot="1" noChangeAspect="1"/>
+            <a:spLocks noGrp="1"/>
           </p:cNvSpPr>
           <p:nvPr>
             <p:ph type="sldImg" idx="2"/>
@@ -413,7 +600,7 @@
             <a:spLocks noGrp="1"/>
           </p:cNvSpPr>
           <p:nvPr>
-            <p:ph type="body" sz="quarter" idx="3"/>
+            <p:ph type="body" idx="3" sz="quarter"/>
           </p:nvPr>
         </p:nvSpPr>
         <p:spPr/>
@@ -461,7 +648,7 @@
             <a:spLocks noGrp="1"/>
           </p:cNvSpPr>
           <p:nvPr>
-            <p:ph type="sldNum" sz="quarter" idx="5"/>
+            <p:ph type="sldNum" idx="5" sz="quarter"/>
           </p:nvPr>
         </p:nvSpPr>
         <p:spPr/>
@@ -475,7 +662,7 @@
 </file>
 
 <file path=ppt/notesSlides/notesSlide11.xml><?xml version="1.0" encoding="utf-8"?>
-<p:notes xmlns:a="http://schemas.openxmlformats.org/drawingml/2006/main" xmlns:r="http://schemas.openxmlformats.org/officeDocument/2006/relationships" xmlns:p="http://schemas.openxmlformats.org/presentationml/2006/main">
+<p:notes xmlns:a="http://schemas.openxmlformats.org/drawingml/2006/main" xmlns:p="http://schemas.openxmlformats.org/presentationml/2006/main" xmlns:r="http://schemas.openxmlformats.org/officeDocument/2006/relationships">
   <p:cSld>
     <p:spTree>
       <p:nvGrpSpPr>
@@ -495,7 +682,7 @@
         <p:nvSpPr>
           <p:cNvPr id="2" name="Slide Image Placeholder 1"/>
           <p:cNvSpPr>
-            <a:spLocks noGrp="1" noRot="1" noChangeAspect="1"/>
+            <a:spLocks noGrp="1"/>
           </p:cNvSpPr>
           <p:nvPr>
             <p:ph type="sldImg" idx="2"/>
@@ -510,7 +697,7 @@
             <a:spLocks noGrp="1"/>
           </p:cNvSpPr>
           <p:nvPr>
-            <p:ph type="body" sz="quarter" idx="3"/>
+            <p:ph type="body" idx="3" sz="quarter"/>
           </p:nvPr>
         </p:nvSpPr>
         <p:spPr/>
@@ -566,7 +753,7 @@
             <a:spLocks noGrp="1"/>
           </p:cNvSpPr>
           <p:nvPr>
-            <p:ph type="sldNum" sz="quarter" idx="5"/>
+            <p:ph type="sldNum" idx="5" sz="quarter"/>
           </p:nvPr>
         </p:nvSpPr>
         <p:spPr/>
@@ -580,7 +767,7 @@
 </file>
 
 <file path=ppt/notesSlides/notesSlide12.xml><?xml version="1.0" encoding="utf-8"?>
-<p:notes xmlns:a="http://schemas.openxmlformats.org/drawingml/2006/main" xmlns:r="http://schemas.openxmlformats.org/officeDocument/2006/relationships" xmlns:p="http://schemas.openxmlformats.org/presentationml/2006/main">
+<p:notes xmlns:a="http://schemas.openxmlformats.org/drawingml/2006/main" xmlns:p="http://schemas.openxmlformats.org/presentationml/2006/main" xmlns:r="http://schemas.openxmlformats.org/officeDocument/2006/relationships">
   <p:cSld>
     <p:spTree>
       <p:nvGrpSpPr>
@@ -600,7 +787,7 @@
         <p:nvSpPr>
           <p:cNvPr id="2" name="Slide Image Placeholder 1"/>
           <p:cNvSpPr>
-            <a:spLocks noGrp="1" noRot="1" noChangeAspect="1"/>
+            <a:spLocks noGrp="1"/>
           </p:cNvSpPr>
           <p:nvPr>
             <p:ph type="sldImg" idx="2"/>
@@ -615,7 +802,7 @@
             <a:spLocks noGrp="1"/>
           </p:cNvSpPr>
           <p:nvPr>
-            <p:ph type="body" sz="quarter" idx="3"/>
+            <p:ph type="body" idx="3" sz="quarter"/>
           </p:nvPr>
         </p:nvSpPr>
         <p:spPr/>
@@ -639,7 +826,7 @@
             <a:spLocks noGrp="1"/>
           </p:cNvSpPr>
           <p:nvPr>
-            <p:ph type="sldNum" sz="quarter" idx="5"/>
+            <p:ph type="sldNum" idx="5" sz="quarter"/>
           </p:nvPr>
         </p:nvSpPr>
         <p:spPr/>
@@ -653,7 +840,7 @@
 </file>
 
 <file path=ppt/notesSlides/notesSlide13.xml><?xml version="1.0" encoding="utf-8"?>
-<p:notes xmlns:a="http://schemas.openxmlformats.org/drawingml/2006/main" xmlns:r="http://schemas.openxmlformats.org/officeDocument/2006/relationships" xmlns:p="http://schemas.openxmlformats.org/presentationml/2006/main">
+<p:notes xmlns:a="http://schemas.openxmlformats.org/drawingml/2006/main" xmlns:p="http://schemas.openxmlformats.org/presentationml/2006/main" xmlns:r="http://schemas.openxmlformats.org/officeDocument/2006/relationships">
   <p:cSld>
     <p:spTree>
       <p:nvGrpSpPr>
@@ -673,7 +860,7 @@
         <p:nvSpPr>
           <p:cNvPr id="2" name="Slide Image Placeholder 1"/>
           <p:cNvSpPr>
-            <a:spLocks noGrp="1" noRot="1" noChangeAspect="1"/>
+            <a:spLocks noGrp="1"/>
           </p:cNvSpPr>
           <p:nvPr>
             <p:ph type="sldImg" idx="2"/>
@@ -688,7 +875,7 @@
             <a:spLocks noGrp="1"/>
           </p:cNvSpPr>
           <p:nvPr>
-            <p:ph type="body" sz="quarter" idx="3"/>
+            <p:ph type="body" idx="3" sz="quarter"/>
           </p:nvPr>
         </p:nvSpPr>
         <p:spPr/>
@@ -736,7 +923,7 @@
             <a:spLocks noGrp="1"/>
           </p:cNvSpPr>
           <p:nvPr>
-            <p:ph type="sldNum" sz="quarter" idx="5"/>
+            <p:ph type="sldNum" idx="5" sz="quarter"/>
           </p:nvPr>
         </p:nvSpPr>
         <p:spPr/>
@@ -750,7 +937,7 @@
 </file>
 
 <file path=ppt/notesSlides/notesSlide14.xml><?xml version="1.0" encoding="utf-8"?>
-<p:notes xmlns:a="http://schemas.openxmlformats.org/drawingml/2006/main" xmlns:r="http://schemas.openxmlformats.org/officeDocument/2006/relationships" xmlns:p="http://schemas.openxmlformats.org/presentationml/2006/main">
+<p:notes xmlns:a="http://schemas.openxmlformats.org/drawingml/2006/main" xmlns:p="http://schemas.openxmlformats.org/presentationml/2006/main" xmlns:r="http://schemas.openxmlformats.org/officeDocument/2006/relationships">
   <p:cSld>
     <p:spTree>
       <p:nvGrpSpPr>
@@ -770,7 +957,7 @@
         <p:nvSpPr>
           <p:cNvPr id="2" name="Slide Image Placeholder 1"/>
           <p:cNvSpPr>
-            <a:spLocks noGrp="1" noRot="1" noChangeAspect="1"/>
+            <a:spLocks noGrp="1"/>
           </p:cNvSpPr>
           <p:nvPr>
             <p:ph type="sldImg" idx="2"/>
@@ -785,7 +972,7 @@
             <a:spLocks noGrp="1"/>
           </p:cNvSpPr>
           <p:nvPr>
-            <p:ph type="body" sz="quarter" idx="3"/>
+            <p:ph type="body" idx="3" sz="quarter"/>
           </p:nvPr>
         </p:nvSpPr>
         <p:spPr/>
@@ -809,7 +996,7 @@
             <a:spLocks noGrp="1"/>
           </p:cNvSpPr>
           <p:nvPr>
-            <p:ph type="sldNum" sz="quarter" idx="5"/>
+            <p:ph type="sldNum" idx="5" sz="quarter"/>
           </p:nvPr>
         </p:nvSpPr>
         <p:spPr/>
@@ -823,7 +1010,7 @@
 </file>
 
 <file path=ppt/notesSlides/notesSlide15.xml><?xml version="1.0" encoding="utf-8"?>
-<p:notes xmlns:a="http://schemas.openxmlformats.org/drawingml/2006/main" xmlns:r="http://schemas.openxmlformats.org/officeDocument/2006/relationships" xmlns:p="http://schemas.openxmlformats.org/presentationml/2006/main">
+<p:notes xmlns:a="http://schemas.openxmlformats.org/drawingml/2006/main" xmlns:p="http://schemas.openxmlformats.org/presentationml/2006/main" xmlns:r="http://schemas.openxmlformats.org/officeDocument/2006/relationships">
   <p:cSld>
     <p:spTree>
       <p:nvGrpSpPr>
@@ -843,7 +1030,7 @@
         <p:nvSpPr>
           <p:cNvPr id="2" name="Slide Image Placeholder 1"/>
           <p:cNvSpPr>
-            <a:spLocks noGrp="1" noRot="1" noChangeAspect="1"/>
+            <a:spLocks noGrp="1"/>
           </p:cNvSpPr>
           <p:nvPr>
             <p:ph type="sldImg" idx="2"/>
@@ -858,7 +1045,7 @@
             <a:spLocks noGrp="1"/>
           </p:cNvSpPr>
           <p:nvPr>
-            <p:ph type="body" sz="quarter" idx="3"/>
+            <p:ph type="body" idx="3" sz="quarter"/>
           </p:nvPr>
         </p:nvSpPr>
         <p:spPr/>
@@ -906,7 +1093,7 @@
             <a:spLocks noGrp="1"/>
           </p:cNvSpPr>
           <p:nvPr>
-            <p:ph type="sldNum" sz="quarter" idx="5"/>
+            <p:ph type="sldNum" idx="5" sz="quarter"/>
           </p:nvPr>
         </p:nvSpPr>
         <p:spPr/>
@@ -920,7 +1107,7 @@
 </file>
 
 <file path=ppt/notesSlides/notesSlide16.xml><?xml version="1.0" encoding="utf-8"?>
-<p:notes xmlns:a="http://schemas.openxmlformats.org/drawingml/2006/main" xmlns:r="http://schemas.openxmlformats.org/officeDocument/2006/relationships" xmlns:p="http://schemas.openxmlformats.org/presentationml/2006/main">
+<p:notes xmlns:a="http://schemas.openxmlformats.org/drawingml/2006/main" xmlns:p="http://schemas.openxmlformats.org/presentationml/2006/main" xmlns:r="http://schemas.openxmlformats.org/officeDocument/2006/relationships">
   <p:cSld>
     <p:spTree>
       <p:nvGrpSpPr>
@@ -940,7 +1127,7 @@
         <p:nvSpPr>
           <p:cNvPr id="2" name="Slide Image Placeholder 1"/>
           <p:cNvSpPr>
-            <a:spLocks noGrp="1" noRot="1" noChangeAspect="1"/>
+            <a:spLocks noGrp="1"/>
           </p:cNvSpPr>
           <p:nvPr>
             <p:ph type="sldImg" idx="2"/>
@@ -955,7 +1142,7 @@
             <a:spLocks noGrp="1"/>
           </p:cNvSpPr>
           <p:nvPr>
-            <p:ph type="body" sz="quarter" idx="3"/>
+            <p:ph type="body" idx="3" sz="quarter"/>
           </p:nvPr>
         </p:nvSpPr>
         <p:spPr/>
@@ -1003,7 +1190,7 @@
             <a:spLocks noGrp="1"/>
           </p:cNvSpPr>
           <p:nvPr>
-            <p:ph type="sldNum" sz="quarter" idx="5"/>
+            <p:ph type="sldNum" idx="5" sz="quarter"/>
           </p:nvPr>
         </p:nvSpPr>
         <p:spPr/>
@@ -1017,7 +1204,7 @@
 </file>
 
 <file path=ppt/notesSlides/notesSlide17.xml><?xml version="1.0" encoding="utf-8"?>
-<p:notes xmlns:a="http://schemas.openxmlformats.org/drawingml/2006/main" xmlns:r="http://schemas.openxmlformats.org/officeDocument/2006/relationships" xmlns:p="http://schemas.openxmlformats.org/presentationml/2006/main">
+<p:notes xmlns:a="http://schemas.openxmlformats.org/drawingml/2006/main" xmlns:p="http://schemas.openxmlformats.org/presentationml/2006/main" xmlns:r="http://schemas.openxmlformats.org/officeDocument/2006/relationships">
   <p:cSld>
     <p:spTree>
       <p:nvGrpSpPr>
@@ -1037,7 +1224,7 @@
         <p:nvSpPr>
           <p:cNvPr id="2" name="Slide Image Placeholder 1"/>
           <p:cNvSpPr>
-            <a:spLocks noGrp="1" noRot="1" noChangeAspect="1"/>
+            <a:spLocks noGrp="1"/>
           </p:cNvSpPr>
           <p:nvPr>
             <p:ph type="sldImg" idx="2"/>
@@ -1052,7 +1239,7 @@
             <a:spLocks noGrp="1"/>
           </p:cNvSpPr>
           <p:nvPr>
-            <p:ph type="body" sz="quarter" idx="3"/>
+            <p:ph type="body" idx="3" sz="quarter"/>
           </p:nvPr>
         </p:nvSpPr>
         <p:spPr/>
@@ -1100,7 +1287,7 @@
             <a:spLocks noGrp="1"/>
           </p:cNvSpPr>
           <p:nvPr>
-            <p:ph type="sldNum" sz="quarter" idx="5"/>
+            <p:ph type="sldNum" idx="5" sz="quarter"/>
           </p:nvPr>
         </p:nvSpPr>
         <p:spPr/>
@@ -1114,7 +1301,7 @@
 </file>
 
 <file path=ppt/notesSlides/notesSlide18.xml><?xml version="1.0" encoding="utf-8"?>
-<p:notes xmlns:a="http://schemas.openxmlformats.org/drawingml/2006/main" xmlns:r="http://schemas.openxmlformats.org/officeDocument/2006/relationships" xmlns:p="http://schemas.openxmlformats.org/presentationml/2006/main">
+<p:notes xmlns:a="http://schemas.openxmlformats.org/drawingml/2006/main" xmlns:p="http://schemas.openxmlformats.org/presentationml/2006/main" xmlns:r="http://schemas.openxmlformats.org/officeDocument/2006/relationships">
   <p:cSld>
     <p:spTree>
       <p:nvGrpSpPr>
@@ -1134,7 +1321,7 @@
         <p:nvSpPr>
           <p:cNvPr id="2" name="Slide Image Placeholder 1"/>
           <p:cNvSpPr>
-            <a:spLocks noGrp="1" noRot="1" noChangeAspect="1"/>
+            <a:spLocks noGrp="1"/>
           </p:cNvSpPr>
           <p:nvPr>
             <p:ph type="sldImg" idx="2"/>
@@ -1149,7 +1336,7 @@
             <a:spLocks noGrp="1"/>
           </p:cNvSpPr>
           <p:nvPr>
-            <p:ph type="body" sz="quarter" idx="3"/>
+            <p:ph type="body" idx="3" sz="quarter"/>
           </p:nvPr>
         </p:nvSpPr>
         <p:spPr/>
@@ -1197,7 +1384,7 @@
             <a:spLocks noGrp="1"/>
           </p:cNvSpPr>
           <p:nvPr>
-            <p:ph type="sldNum" sz="quarter" idx="5"/>
+            <p:ph type="sldNum" idx="5" sz="quarter"/>
           </p:nvPr>
         </p:nvSpPr>
         <p:spPr/>
@@ -1211,7 +1398,7 @@
 </file>
 
 <file path=ppt/notesSlides/notesSlide19.xml><?xml version="1.0" encoding="utf-8"?>
-<p:notes xmlns:a="http://schemas.openxmlformats.org/drawingml/2006/main" xmlns:r="http://schemas.openxmlformats.org/officeDocument/2006/relationships" xmlns:p="http://schemas.openxmlformats.org/presentationml/2006/main">
+<p:notes xmlns:a="http://schemas.openxmlformats.org/drawingml/2006/main" xmlns:p="http://schemas.openxmlformats.org/presentationml/2006/main" xmlns:r="http://schemas.openxmlformats.org/officeDocument/2006/relationships">
   <p:cSld>
     <p:spTree>
       <p:nvGrpSpPr>
@@ -1231,7 +1418,7 @@
         <p:nvSpPr>
           <p:cNvPr id="2" name="Slide Image Placeholder 1"/>
           <p:cNvSpPr>
-            <a:spLocks noGrp="1" noRot="1" noChangeAspect="1"/>
+            <a:spLocks noGrp="1"/>
           </p:cNvSpPr>
           <p:nvPr>
             <p:ph type="sldImg" idx="2"/>
@@ -1246,7 +1433,7 @@
             <a:spLocks noGrp="1"/>
           </p:cNvSpPr>
           <p:nvPr>
-            <p:ph type="body" sz="quarter" idx="3"/>
+            <p:ph type="body" idx="3" sz="quarter"/>
           </p:nvPr>
         </p:nvSpPr>
         <p:spPr/>
@@ -1270,7 +1457,7 @@
             <a:spLocks noGrp="1"/>
           </p:cNvSpPr>
           <p:nvPr>
-            <p:ph type="sldNum" sz="quarter" idx="5"/>
+            <p:ph type="sldNum" idx="5" sz="quarter"/>
           </p:nvPr>
         </p:nvSpPr>
         <p:spPr/>
@@ -1284,7 +1471,7 @@
 </file>
 
 <file path=ppt/notesSlides/notesSlide2.xml><?xml version="1.0" encoding="utf-8"?>
-<p:notes xmlns:a="http://schemas.openxmlformats.org/drawingml/2006/main" xmlns:r="http://schemas.openxmlformats.org/officeDocument/2006/relationships" xmlns:p="http://schemas.openxmlformats.org/presentationml/2006/main">
+<p:notes xmlns:a="http://schemas.openxmlformats.org/drawingml/2006/main" xmlns:p="http://schemas.openxmlformats.org/presentationml/2006/main" xmlns:r="http://schemas.openxmlformats.org/officeDocument/2006/relationships">
   <p:cSld>
     <p:spTree>
       <p:nvGrpSpPr>
@@ -1304,7 +1491,7 @@
         <p:nvSpPr>
           <p:cNvPr id="2" name="Slide Image Placeholder 1"/>
           <p:cNvSpPr>
-            <a:spLocks noGrp="1" noRot="1" noChangeAspect="1"/>
+            <a:spLocks noGrp="1"/>
           </p:cNvSpPr>
           <p:nvPr>
             <p:ph type="sldImg" idx="2"/>
@@ -1319,7 +1506,7 @@
             <a:spLocks noGrp="1"/>
           </p:cNvSpPr>
           <p:nvPr>
-            <p:ph type="body" sz="quarter" idx="3"/>
+            <p:ph type="body" idx="3" sz="quarter"/>
           </p:nvPr>
         </p:nvSpPr>
         <p:spPr/>
@@ -1343,7 +1530,7 @@
             <a:spLocks noGrp="1"/>
           </p:cNvSpPr>
           <p:nvPr>
-            <p:ph type="sldNum" sz="quarter" idx="5"/>
+            <p:ph type="sldNum" idx="5" sz="quarter"/>
           </p:nvPr>
         </p:nvSpPr>
         <p:spPr/>
@@ -1357,7 +1544,7 @@
 </file>
 
 <file path=ppt/notesSlides/notesSlide20.xml><?xml version="1.0" encoding="utf-8"?>
-<p:notes xmlns:a="http://schemas.openxmlformats.org/drawingml/2006/main" xmlns:r="http://schemas.openxmlformats.org/officeDocument/2006/relationships" xmlns:p="http://schemas.openxmlformats.org/presentationml/2006/main">
+<p:notes xmlns:a="http://schemas.openxmlformats.org/drawingml/2006/main" xmlns:p="http://schemas.openxmlformats.org/presentationml/2006/main" xmlns:r="http://schemas.openxmlformats.org/officeDocument/2006/relationships">
   <p:cSld>
     <p:spTree>
       <p:nvGrpSpPr>
@@ -1377,7 +1564,7 @@
         <p:nvSpPr>
           <p:cNvPr id="2" name="Slide Image Placeholder 1"/>
           <p:cNvSpPr>
-            <a:spLocks noGrp="1" noRot="1" noChangeAspect="1"/>
+            <a:spLocks noGrp="1"/>
           </p:cNvSpPr>
           <p:nvPr>
             <p:ph type="sldImg" idx="2"/>
@@ -1392,7 +1579,7 @@
             <a:spLocks noGrp="1"/>
           </p:cNvSpPr>
           <p:nvPr>
-            <p:ph type="body" sz="quarter" idx="3"/>
+            <p:ph type="body" idx="3" sz="quarter"/>
           </p:nvPr>
         </p:nvSpPr>
         <p:spPr/>
@@ -1432,7 +1619,7 @@
             <a:spLocks noGrp="1"/>
           </p:cNvSpPr>
           <p:nvPr>
-            <p:ph type="sldNum" sz="quarter" idx="5"/>
+            <p:ph type="sldNum" idx="5" sz="quarter"/>
           </p:nvPr>
         </p:nvSpPr>
         <p:spPr/>
@@ -1446,7 +1633,7 @@
 </file>
 
 <file path=ppt/notesSlides/notesSlide21.xml><?xml version="1.0" encoding="utf-8"?>
-<p:notes xmlns:a="http://schemas.openxmlformats.org/drawingml/2006/main" xmlns:r="http://schemas.openxmlformats.org/officeDocument/2006/relationships" xmlns:p="http://schemas.openxmlformats.org/presentationml/2006/main">
+<p:notes xmlns:a="http://schemas.openxmlformats.org/drawingml/2006/main" xmlns:p="http://schemas.openxmlformats.org/presentationml/2006/main" xmlns:r="http://schemas.openxmlformats.org/officeDocument/2006/relationships">
   <p:cSld>
     <p:spTree>
       <p:nvGrpSpPr>
@@ -1466,7 +1653,7 @@
         <p:nvSpPr>
           <p:cNvPr id="2" name="Slide Image Placeholder 1"/>
           <p:cNvSpPr>
-            <a:spLocks noGrp="1" noRot="1" noChangeAspect="1"/>
+            <a:spLocks noGrp="1"/>
           </p:cNvSpPr>
           <p:nvPr>
             <p:ph type="sldImg" idx="2"/>
@@ -1481,7 +1668,7 @@
             <a:spLocks noGrp="1"/>
           </p:cNvSpPr>
           <p:nvPr>
-            <p:ph type="body" sz="quarter" idx="3"/>
+            <p:ph type="body" idx="3" sz="quarter"/>
           </p:nvPr>
         </p:nvSpPr>
         <p:spPr/>
@@ -1509,7 +1696,7 @@
               <a:rPr sz="1200">
                 <a:latin typeface="Calibri"/>
               </a:rPr>
-              <a:t>Ask which line sets speed and which sets steering, then which one limits steering to half.</a:t>
+              <a:t>Ask which line sets speed and which sets steering, then which one limits steering to 75%.</a:t>
             </a:r>
           </a:p>
           <a:p>
@@ -1529,7 +1716,7 @@
             <a:spLocks noGrp="1"/>
           </p:cNvSpPr>
           <p:nvPr>
-            <p:ph type="sldNum" sz="quarter" idx="5"/>
+            <p:ph type="sldNum" idx="5" sz="quarter"/>
           </p:nvPr>
         </p:nvSpPr>
         <p:spPr/>
@@ -1543,7 +1730,7 @@
 </file>
 
 <file path=ppt/notesSlides/notesSlide22.xml><?xml version="1.0" encoding="utf-8"?>
-<p:notes xmlns:a="http://schemas.openxmlformats.org/drawingml/2006/main" xmlns:r="http://schemas.openxmlformats.org/officeDocument/2006/relationships" xmlns:p="http://schemas.openxmlformats.org/presentationml/2006/main">
+<p:notes xmlns:a="http://schemas.openxmlformats.org/drawingml/2006/main" xmlns:p="http://schemas.openxmlformats.org/presentationml/2006/main" xmlns:r="http://schemas.openxmlformats.org/officeDocument/2006/relationships">
   <p:cSld>
     <p:spTree>
       <p:nvGrpSpPr>
@@ -1563,7 +1750,7 @@
         <p:nvSpPr>
           <p:cNvPr id="2" name="Slide Image Placeholder 1"/>
           <p:cNvSpPr>
-            <a:spLocks noGrp="1" noRot="1" noChangeAspect="1"/>
+            <a:spLocks noGrp="1"/>
           </p:cNvSpPr>
           <p:nvPr>
             <p:ph type="sldImg" idx="2"/>
@@ -1578,7 +1765,7 @@
             <a:spLocks noGrp="1"/>
           </p:cNvSpPr>
           <p:nvPr>
-            <p:ph type="body" sz="quarter" idx="3"/>
+            <p:ph type="body" idx="3" sz="quarter"/>
           </p:nvPr>
         </p:nvSpPr>
         <p:spPr/>
@@ -1598,7 +1785,15 @@
               <a:rPr sz="1200">
                 <a:latin typeface="Calibri"/>
               </a:rPr>
-              <a:t>Step 3 is the failsafe demonstration. Have them do it deliberately, somewhere safe, and watch the vehicle stop dead.</a:t>
+              <a:t>Step 3 is the failsafe demonstration, and it needs setting up. Kevin caught this in the 2026-09-08 review: the slide used to say switch the pad off, and neither of these controllers CAN be switched off by hand. Walking out of range is the demonstration that actually works.</a:t>
+            </a:r>
+          </a:p>
+          <a:p>
+            <a:r>
+              <a:rPr sz="1200">
+                <a:latin typeface="Calibri"/>
+              </a:rPr>
+              <a:t>Send one person down the corridor with the pad while the rest of the group watches the wheels. Thirty feet, or one wall, is usually enough. If the room is small, power-cycle the vehicle instead and push the stick while it is disconnected - same guard, seen from the other side.</a:t>
             </a:r>
           </a:p>
           <a:p>
@@ -1642,7 +1837,7 @@
             <a:spLocks noGrp="1"/>
           </p:cNvSpPr>
           <p:nvPr>
-            <p:ph type="sldNum" sz="quarter" idx="5"/>
+            <p:ph type="sldNum" idx="5" sz="quarter"/>
           </p:nvPr>
         </p:nvSpPr>
         <p:spPr/>
@@ -1656,7 +1851,7 @@
 </file>
 
 <file path=ppt/notesSlides/notesSlide23.xml><?xml version="1.0" encoding="utf-8"?>
-<p:notes xmlns:a="http://schemas.openxmlformats.org/drawingml/2006/main" xmlns:r="http://schemas.openxmlformats.org/officeDocument/2006/relationships" xmlns:p="http://schemas.openxmlformats.org/presentationml/2006/main">
+<p:notes xmlns:a="http://schemas.openxmlformats.org/drawingml/2006/main" xmlns:p="http://schemas.openxmlformats.org/presentationml/2006/main" xmlns:r="http://schemas.openxmlformats.org/officeDocument/2006/relationships">
   <p:cSld>
     <p:spTree>
       <p:nvGrpSpPr>
@@ -1676,7 +1871,7 @@
         <p:nvSpPr>
           <p:cNvPr id="2" name="Slide Image Placeholder 1"/>
           <p:cNvSpPr>
-            <a:spLocks noGrp="1" noRot="1" noChangeAspect="1"/>
+            <a:spLocks noGrp="1"/>
           </p:cNvSpPr>
           <p:nvPr>
             <p:ph type="sldImg" idx="2"/>
@@ -1691,7 +1886,7 @@
             <a:spLocks noGrp="1"/>
           </p:cNvSpPr>
           <p:nvPr>
-            <p:ph type="body" sz="quarter" idx="3"/>
+            <p:ph type="body" idx="3" sz="quarter"/>
           </p:nvPr>
         </p:nvSpPr>
         <p:spPr/>
@@ -1703,15 +1898,16 @@
               <a:rPr sz="1200">
                 <a:latin typeface="Calibri"/>
               </a:rPr>
-              <a:t>Slow down. This is the most transferable idea in the whole course.</a:t>
-            </a:r>
-          </a:p>
+              <a:t>(Continued from the previous slide - the same notes apply.)</a:t>
+            </a:r>
+          </a:p>
+          <a:p/>
           <a:p>
             <a:r>
               <a:rPr sz="1200">
                 <a:latin typeface="Calibri"/>
               </a:rPr>
-              <a:t>The only safe behavior is to stop. Not to carry on with the last command, and not to be clever.</a:t>
+              <a:t>Step 1 is not optional. Wheels off the ground, check up is forward and right is right, every single upload.</a:t>
             </a:r>
           </a:p>
           <a:p>
@@ -1719,7 +1915,7 @@
               <a:rPr sz="1200">
                 <a:latin typeface="Calibri"/>
               </a:rPr>
-              <a:t>Go round the examples: a drone hovers or returns home, a submersible surfaces, a ground vehicle stops. Ask why each is right for that vehicle.</a:t>
+              <a:t>Step 3 is the failsafe demonstration, and it needs setting up. Kevin caught this in the 2026-09-08 review: the slide used to say switch the pad off, and neither of these controllers CAN be switched off by hand. Walking out of range is the demonstration that actually works.</a:t>
             </a:r>
           </a:p>
           <a:p>
@@ -1727,7 +1923,39 @@
               <a:rPr sz="1200">
                 <a:latin typeface="Calibri"/>
               </a:rPr>
-              <a:t>End with the question on the slide and let it sit: on anything you ever build, what happens when the operator disappears?</a:t>
+              <a:t>Send one person down the corridor with the pad while the rest of the group watches the wheels. Thirty feet, or one wall, is usually enough. If the room is small, power-cycle the vehicle instead and push the stick while it is disconnected - same guard, seen from the other side.</a:t>
+            </a:r>
+          </a:p>
+          <a:p>
+            <a:r>
+              <a:rPr sz="1200">
+                <a:latin typeface="Calibri"/>
+              </a:rPr>
+              <a:t>Steps 5 and 6 are deliberate breakages, and the line numbers on the slide are read out of the sketch when the deck is built, so they are right for the track in front of you.</a:t>
+            </a:r>
+          </a:p>
+          <a:p>
+            <a:r>
+              <a:rPr sz="1200">
+                <a:latin typeface="Calibri"/>
+              </a:rPr>
+              <a:t>Swapped signs give a vehicle that steers backwards. Dropping the turn term from the right side only gives something that swings wide one way and barely turns the other - the left wheels still get forward + turn while the right ones get forward alone.</a:t>
+            </a:r>
+          </a:p>
+          <a:p>
+            <a:r>
+              <a:rPr sz="1200">
+                <a:latin typeface="Calibri"/>
+              </a:rPr>
+              <a:t>Make them put both back before they leave.</a:t>
+            </a:r>
+          </a:p>
+          <a:p>
+            <a:r>
+              <a:rPr sz="1200">
+                <a:latin typeface="Calibri"/>
+              </a:rPr>
+              <a:t>Give this the full thirty minutes. It is the payoff for three lessons of groundwork.</a:t>
             </a:r>
           </a:p>
         </p:txBody>
@@ -1739,7 +1967,7 @@
             <a:spLocks noGrp="1"/>
           </p:cNvSpPr>
           <p:nvPr>
-            <p:ph type="sldNum" sz="quarter" idx="5"/>
+            <p:ph type="sldNum" idx="5" sz="quarter"/>
           </p:nvPr>
         </p:nvSpPr>
         <p:spPr/>
@@ -1753,7 +1981,7 @@
 </file>
 
 <file path=ppt/notesSlides/notesSlide24.xml><?xml version="1.0" encoding="utf-8"?>
-<p:notes xmlns:a="http://schemas.openxmlformats.org/drawingml/2006/main" xmlns:r="http://schemas.openxmlformats.org/officeDocument/2006/relationships" xmlns:p="http://schemas.openxmlformats.org/presentationml/2006/main">
+<p:notes xmlns:a="http://schemas.openxmlformats.org/drawingml/2006/main" xmlns:p="http://schemas.openxmlformats.org/presentationml/2006/main" xmlns:r="http://schemas.openxmlformats.org/officeDocument/2006/relationships">
   <p:cSld>
     <p:spTree>
       <p:nvGrpSpPr>
@@ -1773,7 +2001,7 @@
         <p:nvSpPr>
           <p:cNvPr id="2" name="Slide Image Placeholder 1"/>
           <p:cNvSpPr>
-            <a:spLocks noGrp="1" noRot="1" noChangeAspect="1"/>
+            <a:spLocks noGrp="1"/>
           </p:cNvSpPr>
           <p:nvPr>
             <p:ph type="sldImg" idx="2"/>
@@ -1788,7 +2016,7 @@
             <a:spLocks noGrp="1"/>
           </p:cNvSpPr>
           <p:nvPr>
-            <p:ph type="body" sz="quarter" idx="3"/>
+            <p:ph type="body" idx="3" sz="quarter"/>
           </p:nvPr>
         </p:nvSpPr>
         <p:spPr/>
@@ -1800,15 +2028,16 @@
               <a:rPr sz="1200">
                 <a:latin typeface="Calibri"/>
               </a:rPr>
-              <a:t>Do not read this table out. Point at it and tell them to use it during the activity.</a:t>
-            </a:r>
-          </a:p>
+              <a:t>(Continued from the previous slide - the same notes apply.)</a:t>
+            </a:r>
+          </a:p>
+          <a:p/>
           <a:p>
             <a:r>
               <a:rPr sz="1200">
                 <a:latin typeface="Calibri"/>
               </a:rPr>
-              <a:t>Worth printing and taping to the wall for the rest of the course.</a:t>
+              <a:t>Step 1 is not optional. Wheels off the ground, check up is forward and right is right, every single upload.</a:t>
             </a:r>
           </a:p>
           <a:p>
@@ -1816,7 +2045,47 @@
               <a:rPr sz="1200">
                 <a:latin typeface="Calibri"/>
               </a:rPr>
-              <a:t>Row three - somebody else's vehicle moving - is the funny one and the one that will actually happen.</a:t>
+              <a:t>Step 3 is the failsafe demonstration, and it needs setting up. Kevin caught this in the 2026-09-08 review: the slide used to say switch the pad off, and neither of these controllers CAN be switched off by hand. Walking out of range is the demonstration that actually works.</a:t>
+            </a:r>
+          </a:p>
+          <a:p>
+            <a:r>
+              <a:rPr sz="1200">
+                <a:latin typeface="Calibri"/>
+              </a:rPr>
+              <a:t>Send one person down the corridor with the pad while the rest of the group watches the wheels. Thirty feet, or one wall, is usually enough. If the room is small, power-cycle the vehicle instead and push the stick while it is disconnected - same guard, seen from the other side.</a:t>
+            </a:r>
+          </a:p>
+          <a:p>
+            <a:r>
+              <a:rPr sz="1200">
+                <a:latin typeface="Calibri"/>
+              </a:rPr>
+              <a:t>Steps 5 and 6 are deliberate breakages, and the line numbers on the slide are read out of the sketch when the deck is built, so they are right for the track in front of you.</a:t>
+            </a:r>
+          </a:p>
+          <a:p>
+            <a:r>
+              <a:rPr sz="1200">
+                <a:latin typeface="Calibri"/>
+              </a:rPr>
+              <a:t>Swapped signs give a vehicle that steers backwards. Dropping the turn term from the right side only gives something that swings wide one way and barely turns the other - the left wheels still get forward + turn while the right ones get forward alone.</a:t>
+            </a:r>
+          </a:p>
+          <a:p>
+            <a:r>
+              <a:rPr sz="1200">
+                <a:latin typeface="Calibri"/>
+              </a:rPr>
+              <a:t>Make them put both back before they leave.</a:t>
+            </a:r>
+          </a:p>
+          <a:p>
+            <a:r>
+              <a:rPr sz="1200">
+                <a:latin typeface="Calibri"/>
+              </a:rPr>
+              <a:t>Give this the full thirty minutes. It is the payoff for three lessons of groundwork.</a:t>
             </a:r>
           </a:p>
         </p:txBody>
@@ -1828,7 +2097,7 @@
             <a:spLocks noGrp="1"/>
           </p:cNvSpPr>
           <p:nvPr>
-            <p:ph type="sldNum" sz="quarter" idx="5"/>
+            <p:ph type="sldNum" idx="5" sz="quarter"/>
           </p:nvPr>
         </p:nvSpPr>
         <p:spPr/>
@@ -1842,7 +2111,7 @@
 </file>
 
 <file path=ppt/notesSlides/notesSlide25.xml><?xml version="1.0" encoding="utf-8"?>
-<p:notes xmlns:a="http://schemas.openxmlformats.org/drawingml/2006/main" xmlns:r="http://schemas.openxmlformats.org/officeDocument/2006/relationships" xmlns:p="http://schemas.openxmlformats.org/presentationml/2006/main">
+<p:notes xmlns:a="http://schemas.openxmlformats.org/drawingml/2006/main" xmlns:p="http://schemas.openxmlformats.org/presentationml/2006/main" xmlns:r="http://schemas.openxmlformats.org/officeDocument/2006/relationships">
   <p:cSld>
     <p:spTree>
       <p:nvGrpSpPr>
@@ -1862,7 +2131,7 @@
         <p:nvSpPr>
           <p:cNvPr id="2" name="Slide Image Placeholder 1"/>
           <p:cNvSpPr>
-            <a:spLocks noGrp="1" noRot="1" noChangeAspect="1"/>
+            <a:spLocks noGrp="1"/>
           </p:cNvSpPr>
           <p:nvPr>
             <p:ph type="sldImg" idx="2"/>
@@ -1877,7 +2146,7 @@
             <a:spLocks noGrp="1"/>
           </p:cNvSpPr>
           <p:nvPr>
-            <p:ph type="body" sz="quarter" idx="3"/>
+            <p:ph type="body" idx="3" sz="quarter"/>
           </p:nvPr>
         </p:nvSpPr>
         <p:spPr/>
@@ -1886,93 +2155,35 @@
           <a:lstStyle/>
           <a:p>
             <a:r>
-              <a:rPr sz="1200" dirty="0">
-                <a:latin typeface="Calibri"/>
-              </a:rPr>
-              <a:t>Conversation, not a test.</a:t>
-            </a:r>
-          </a:p>
-          <a:p>
-            <a:r>
-              <a:rPr sz="1200" dirty="0">
-                <a:latin typeface="Calibri"/>
-              </a:rPr>
-              <a:t>Answers, in order: an address is the device's phone number and duplicates mean one pad drives two vehicles; the number is negative, hence the minus sign; a </a:t>
-            </a:r>
-            <a:r>
-              <a:rPr sz="1200" dirty="0" err="1">
-                <a:latin typeface="Calibri"/>
-              </a:rPr>
-              <a:t>deadzone</a:t>
-            </a:r>
-            <a:r>
-              <a:rPr sz="1200" dirty="0">
-                <a:latin typeface="Calibri"/>
-              </a:rPr>
-              <a:t> stops phantom creep, zero means it creeps and too big wastes the stick; map() is proportion.</a:t>
-            </a:r>
-          </a:p>
-          <a:p>
-            <a:r>
-              <a:rPr sz="1200" dirty="0">
-                <a:latin typeface="Calibri"/>
-              </a:rPr>
-              <a:t>For question 5: left gets 280 and right gets 80 before constrain, then 255 and 80 after.</a:t>
-            </a:r>
-          </a:p>
-          <a:p>
-            <a:r>
-              <a:rPr sz="1200" dirty="0">
-                <a:latin typeface="Calibri"/>
-              </a:rPr>
-              <a:t>For question 6: full-power steering is faster than a person can correct for.</a:t>
-            </a:r>
-          </a:p>
-          <a:p>
-            <a:r>
-              <a:rPr sz="1200" dirty="0">
-                <a:latin typeface="Calibri"/>
-              </a:rPr>
-              <a:t>Question 7 should be written out, not said. Check a few notebooks.</a:t>
-            </a:r>
-            <a:endParaRPr lang="en-US" sz="1200" dirty="0">
-              <a:latin typeface="Calibri"/>
-            </a:endParaRPr>
-          </a:p>
-          <a:p>
-            <a:r>
-              <a:rPr lang="en-US" sz="1200" dirty="0">
-                <a:latin typeface="Calibri"/>
-              </a:rPr>
-              <a:t>if (!Ps3.isConnected()) {</a:t>
-            </a:r>
-          </a:p>
-          <a:p>
-            <a:r>
-              <a:rPr lang="en-US" sz="1200" dirty="0">
-                <a:latin typeface="Calibri"/>
-              </a:rPr>
-              <a:t>drive(0,0);</a:t>
-            </a:r>
-          </a:p>
-          <a:p>
-            <a:r>
-              <a:rPr lang="en-US" sz="1200" dirty="0">
-                <a:latin typeface="Calibri"/>
-              </a:rPr>
-              <a:t>return;</a:t>
-            </a:r>
-          </a:p>
-          <a:p>
-            <a:r>
-              <a:rPr lang="en-US" sz="1200" dirty="0">
-                <a:latin typeface="Calibri"/>
-              </a:rPr>
-              <a:t>}</a:t>
-            </a:r>
-            <a:endParaRPr sz="1200" dirty="0">
-              <a:latin typeface="Calibri"/>
-            </a:endParaRPr>
+              <a:rPr sz="1200">
+                <a:latin typeface="Calibri"/>
+              </a:rPr>
+              <a:t>Slow down. This is the most transferable idea in the whole course.</a:t>
+            </a:r>
+          </a:p>
+          <a:p>
+            <a:r>
+              <a:rPr sz="1200">
+                <a:latin typeface="Calibri"/>
+              </a:rPr>
+              <a:t>The only safe behavior is to stop. Not to carry on with the last command, and not to be clever.</a:t>
+            </a:r>
+          </a:p>
+          <a:p>
+            <a:r>
+              <a:rPr sz="1200">
+                <a:latin typeface="Calibri"/>
+              </a:rPr>
+              <a:t>Go round the examples: a drone hovers or returns home, a submersible surfaces, a ground vehicle stops. Ask why each is right for that vehicle.</a:t>
+            </a:r>
+          </a:p>
+          <a:p>
+            <a:r>
+              <a:rPr sz="1200">
+                <a:latin typeface="Calibri"/>
+              </a:rPr>
+              <a:t>End with the question on the slide and let it sit: on anything you ever build, what happens when the operator disappears?</a:t>
+            </a:r>
           </a:p>
         </p:txBody>
       </p:sp>
@@ -1983,7 +2194,7 @@
             <a:spLocks noGrp="1"/>
           </p:cNvSpPr>
           <p:nvPr>
-            <p:ph type="sldNum" sz="quarter" idx="5"/>
+            <p:ph type="sldNum" idx="5" sz="quarter"/>
           </p:nvPr>
         </p:nvSpPr>
         <p:spPr/>
@@ -1996,8 +2207,8 @@
 </p:notes>
 </file>
 
-<file path=ppt/notesSlides/notesSlide3.xml><?xml version="1.0" encoding="utf-8"?>
-<p:notes xmlns:a="http://schemas.openxmlformats.org/drawingml/2006/main" xmlns:r="http://schemas.openxmlformats.org/officeDocument/2006/relationships" xmlns:p="http://schemas.openxmlformats.org/presentationml/2006/main">
+<file path=ppt/notesSlides/notesSlide26.xml><?xml version="1.0" encoding="utf-8"?>
+<p:notes xmlns:a="http://schemas.openxmlformats.org/drawingml/2006/main" xmlns:p="http://schemas.openxmlformats.org/presentationml/2006/main" xmlns:r="http://schemas.openxmlformats.org/officeDocument/2006/relationships">
   <p:cSld>
     <p:spTree>
       <p:nvGrpSpPr>
@@ -2017,7 +2228,7 @@
         <p:nvSpPr>
           <p:cNvPr id="2" name="Slide Image Placeholder 1"/>
           <p:cNvSpPr>
-            <a:spLocks noGrp="1" noRot="1" noChangeAspect="1"/>
+            <a:spLocks noGrp="1"/>
           </p:cNvSpPr>
           <p:nvPr>
             <p:ph type="sldImg" idx="2"/>
@@ -2032,7 +2243,7 @@
             <a:spLocks noGrp="1"/>
           </p:cNvSpPr>
           <p:nvPr>
-            <p:ph type="body" sz="quarter" idx="3"/>
+            <p:ph type="body" idx="3" sz="quarter"/>
           </p:nvPr>
         </p:nvSpPr>
         <p:spPr/>
@@ -2044,7 +2255,7 @@
               <a:rPr sz="1200">
                 <a:latin typeface="Calibri"/>
               </a:rPr>
-              <a:t>Sixty seconds, then straight on.</a:t>
+              <a:t>Do not read this table out. Point at it and tell them to use it during the activity.</a:t>
             </a:r>
           </a:p>
           <a:p>
@@ -2052,7 +2263,15 @@
               <a:rPr sz="1200">
                 <a:latin typeface="Calibri"/>
               </a:rPr>
-              <a:t>The note is the discipline for the day: see the numbers first, drive second. It stops a room full of vehicles bolting during the first upload.</a:t>
+              <a:t>Worth printing and taping to the wall for the rest of the course.</a:t>
+            </a:r>
+          </a:p>
+          <a:p>
+            <a:r>
+              <a:rPr sz="1200">
+                <a:latin typeface="Calibri"/>
+              </a:rPr>
+              <a:t>Row three - somebody else's vehicle moving - is the funny one and the one that will actually happen.</a:t>
             </a:r>
           </a:p>
         </p:txBody>
@@ -2064,7 +2283,7 @@
             <a:spLocks noGrp="1"/>
           </p:cNvSpPr>
           <p:nvPr>
-            <p:ph type="sldNum" sz="quarter" idx="5"/>
+            <p:ph type="sldNum" idx="5" sz="quarter"/>
           </p:nvPr>
         </p:nvSpPr>
         <p:spPr/>
@@ -2077,8 +2296,8 @@
 </p:notes>
 </file>
 
-<file path=ppt/notesSlides/notesSlide4.xml><?xml version="1.0" encoding="utf-8"?>
-<p:notes xmlns:a="http://schemas.openxmlformats.org/drawingml/2006/main" xmlns:r="http://schemas.openxmlformats.org/officeDocument/2006/relationships" xmlns:p="http://schemas.openxmlformats.org/presentationml/2006/main">
+<file path=ppt/notesSlides/notesSlide27.xml><?xml version="1.0" encoding="utf-8"?>
+<p:notes xmlns:a="http://schemas.openxmlformats.org/drawingml/2006/main" xmlns:p="http://schemas.openxmlformats.org/presentationml/2006/main" xmlns:r="http://schemas.openxmlformats.org/officeDocument/2006/relationships">
   <p:cSld>
     <p:spTree>
       <p:nvGrpSpPr>
@@ -2098,7 +2317,7 @@
         <p:nvSpPr>
           <p:cNvPr id="2" name="Slide Image Placeholder 1"/>
           <p:cNvSpPr>
-            <a:spLocks noGrp="1" noRot="1" noChangeAspect="1"/>
+            <a:spLocks noGrp="1"/>
           </p:cNvSpPr>
           <p:nvPr>
             <p:ph type="sldImg" idx="2"/>
@@ -2113,7 +2332,7 @@
             <a:spLocks noGrp="1"/>
           </p:cNvSpPr>
           <p:nvPr>
-            <p:ph type="body" sz="quarter" idx="3"/>
+            <p:ph type="body" idx="3" sz="quarter"/>
           </p:nvPr>
         </p:nvSpPr>
         <p:spPr/>
@@ -2125,7 +2344,47 @@
               <a:rPr sz="1200">
                 <a:latin typeface="Calibri"/>
               </a:rPr>
-              <a:t>Point out that the vehicle does not move until 2:35. Manage the disappointment early rather than fighting it all lesson.</a:t>
+              <a:t>Conversation, not a test.</a:t>
+            </a:r>
+          </a:p>
+          <a:p>
+            <a:r>
+              <a:rPr sz="1200">
+                <a:latin typeface="Calibri"/>
+              </a:rPr>
+              <a:t>Answers, in order: an address is the device's phone number and duplicates mean one pad drives two vehicles; the number is negative, hence the minus sign; a deadzone stops phantom creep, zero means it creeps and too big wastes the stick; map() is proportion.</a:t>
+            </a:r>
+          </a:p>
+          <a:p>
+            <a:r>
+              <a:rPr sz="1200">
+                <a:latin typeface="Calibri"/>
+              </a:rPr>
+              <a:t>For question 5: left gets 280 and right gets 80 before constrain, then 255 and 80 after.</a:t>
+            </a:r>
+          </a:p>
+          <a:p>
+            <a:r>
+              <a:rPr sz="1200">
+                <a:latin typeface="Calibri"/>
+              </a:rPr>
+              <a:t>For question 6: full-power steering is faster than a person can correct for.</a:t>
+            </a:r>
+          </a:p>
+          <a:p>
+            <a:r>
+              <a:rPr sz="1200">
+                <a:latin typeface="Calibri"/>
+              </a:rPr>
+              <a:t>The answer to question 7, in full:  if (!Ps3.isConnected()) { drive(0, 0); return; }  - four lines if you count the closing brace, and they go at the very top of loop().</a:t>
+            </a:r>
+          </a:p>
+          <a:p>
+            <a:r>
+              <a:rPr sz="1200">
+                <a:latin typeface="Calibri"/>
+              </a:rPr>
+              <a:t>Question 7 should be written out, not said. Check a few notebooks.</a:t>
             </a:r>
           </a:p>
         </p:txBody>
@@ -2137,7 +2396,7 @@
             <a:spLocks noGrp="1"/>
           </p:cNvSpPr>
           <p:nvPr>
-            <p:ph type="sldNum" sz="quarter" idx="5"/>
+            <p:ph type="sldNum" idx="5" sz="quarter"/>
           </p:nvPr>
         </p:nvSpPr>
         <p:spPr/>
@@ -2150,8 +2409,8 @@
 </p:notes>
 </file>
 
-<file path=ppt/notesSlides/notesSlide5.xml><?xml version="1.0" encoding="utf-8"?>
-<p:notes xmlns:a="http://schemas.openxmlformats.org/drawingml/2006/main" xmlns:r="http://schemas.openxmlformats.org/officeDocument/2006/relationships" xmlns:p="http://schemas.openxmlformats.org/presentationml/2006/main">
+<file path=ppt/notesSlides/notesSlide3.xml><?xml version="1.0" encoding="utf-8"?>
+<p:notes xmlns:a="http://schemas.openxmlformats.org/drawingml/2006/main" xmlns:p="http://schemas.openxmlformats.org/presentationml/2006/main" xmlns:r="http://schemas.openxmlformats.org/officeDocument/2006/relationships">
   <p:cSld>
     <p:spTree>
       <p:nvGrpSpPr>
@@ -2171,7 +2430,7 @@
         <p:nvSpPr>
           <p:cNvPr id="2" name="Slide Image Placeholder 1"/>
           <p:cNvSpPr>
-            <a:spLocks noGrp="1" noRot="1" noChangeAspect="1"/>
+            <a:spLocks noGrp="1"/>
           </p:cNvSpPr>
           <p:nvPr>
             <p:ph type="sldImg" idx="2"/>
@@ -2186,7 +2445,7 @@
             <a:spLocks noGrp="1"/>
           </p:cNvSpPr>
           <p:nvPr>
-            <p:ph type="body" sz="quarter" idx="3"/>
+            <p:ph type="body" idx="3" sz="quarter"/>
           </p:nvPr>
         </p:nvSpPr>
         <p:spPr/>
@@ -2198,7 +2457,7 @@
               <a:rPr sz="1200">
                 <a:latin typeface="Calibri"/>
               </a:rPr>
-              <a:t>Keep the radio theory to two minutes. The one thing that must land is that every device has an address, and an address is like a phone number.</a:t>
+              <a:t>Sixty seconds, then straight on.</a:t>
             </a:r>
           </a:p>
           <a:p>
@@ -2206,15 +2465,7 @@
               <a:rPr sz="1200">
                 <a:latin typeface="Calibri"/>
               </a:rPr>
-              <a:t>The channel-hopping detail answers the question they are about to ask: why twenty vehicles in one room actually works.</a:t>
-            </a:r>
-          </a:p>
-          <a:p>
-            <a:r>
-              <a:rPr sz="1200">
-                <a:latin typeface="Calibri"/>
-              </a:rPr>
-              <a:t>The 85% storage note is worth mentioning. It explains why a Bluetooth sketch takes so long to upload and why some boards run out of room.</a:t>
+              <a:t>The note is the discipline for the day: see the numbers first, drive second. It stops a room full of vehicles bolting during the first upload.</a:t>
             </a:r>
           </a:p>
         </p:txBody>
@@ -2226,7 +2477,7 @@
             <a:spLocks noGrp="1"/>
           </p:cNvSpPr>
           <p:nvPr>
-            <p:ph type="sldNum" sz="quarter" idx="5"/>
+            <p:ph type="sldNum" idx="5" sz="quarter"/>
           </p:nvPr>
         </p:nvSpPr>
         <p:spPr/>
@@ -2239,8 +2490,8 @@
 </p:notes>
 </file>
 
-<file path=ppt/notesSlides/notesSlide6.xml><?xml version="1.0" encoding="utf-8"?>
-<p:notes xmlns:a="http://schemas.openxmlformats.org/drawingml/2006/main" xmlns:r="http://schemas.openxmlformats.org/officeDocument/2006/relationships" xmlns:p="http://schemas.openxmlformats.org/presentationml/2006/main">
+<file path=ppt/notesSlides/notesSlide4.xml><?xml version="1.0" encoding="utf-8"?>
+<p:notes xmlns:a="http://schemas.openxmlformats.org/drawingml/2006/main" xmlns:p="http://schemas.openxmlformats.org/presentationml/2006/main" xmlns:r="http://schemas.openxmlformats.org/officeDocument/2006/relationships">
   <p:cSld>
     <p:spTree>
       <p:nvGrpSpPr>
@@ -2260,7 +2511,7 @@
         <p:nvSpPr>
           <p:cNvPr id="2" name="Slide Image Placeholder 1"/>
           <p:cNvSpPr>
-            <a:spLocks noGrp="1" noRot="1" noChangeAspect="1"/>
+            <a:spLocks noGrp="1"/>
           </p:cNvSpPr>
           <p:nvPr>
             <p:ph type="sldImg" idx="2"/>
@@ -2275,7 +2526,7 @@
             <a:spLocks noGrp="1"/>
           </p:cNvSpPr>
           <p:nvPr>
-            <p:ph type="body" sz="quarter" idx="3"/>
+            <p:ph type="body" idx="3" sz="quarter"/>
           </p:nvPr>
         </p:nvSpPr>
         <p:spPr/>
@@ -2287,39 +2538,7 @@
               <a:rPr sz="1200">
                 <a:latin typeface="Calibri"/>
               </a:rPr>
-              <a:t>Kevin's instruction, 2026-09-05: we program and label the controllers, so do not make students worry about how. Tell them what the sticker means and move on.</a:t>
-            </a:r>
-          </a:p>
-          <a:p>
-            <a:r>
-              <a:rPr sz="1200">
-                <a:latin typeface="Calibri"/>
-              </a:rPr>
-              <a:t>Say the odd part plainly all the same: on a PS3 pad it is the CONTROLLER that is told which vehicle to talk to, not the vehicle that chooses a controller.</a:t>
-            </a:r>
-          </a:p>
-          <a:p>
-            <a:r>
-              <a:rPr sz="1200">
-                <a:latin typeface="Calibri"/>
-              </a:rPr>
-              <a:t>FOR YOU, NOT FOR THE SLIDE - how the labelling is done. Plug the pad into a Windows PC over USB, open SixaxisPairTool, type the address in and click Update, then put the same address into PS3_MAC_ADDRESS in the sketch. The scheme is 02:02:03:04:05:NN, where NN is the vehicle number.</a:t>
-            </a:r>
-          </a:p>
-          <a:p>
-            <a:r>
-              <a:rPr sz="1200">
-                <a:latin typeface="Calibri"/>
-              </a:rPr>
-              <a:t>Also for you: the first pair of digits must be EVEN. An odd one silently fails to connect, which is a very confusing way to spend an afternoon.</a:t>
-            </a:r>
-          </a:p>
-          <a:p>
-            <a:r>
-              <a:rPr sz="1200">
-                <a:latin typeface="Calibri"/>
-              </a:rPr>
-              <a:t>Check the stickers around the room now, before anybody uploads. Every term somebody loses a morning to a pad that was picked up off the wrong table.</a:t>
+              <a:t>Point out that the vehicle does not move until 2:35. Manage the disappointment early rather than fighting it all lesson.</a:t>
             </a:r>
           </a:p>
         </p:txBody>
@@ -2331,7 +2550,7 @@
             <a:spLocks noGrp="1"/>
           </p:cNvSpPr>
           <p:nvPr>
-            <p:ph type="sldNum" sz="quarter" idx="5"/>
+            <p:ph type="sldNum" idx="5" sz="quarter"/>
           </p:nvPr>
         </p:nvSpPr>
         <p:spPr/>
@@ -2344,8 +2563,8 @@
 </p:notes>
 </file>
 
-<file path=ppt/notesSlides/notesSlide7.xml><?xml version="1.0" encoding="utf-8"?>
-<p:notes xmlns:a="http://schemas.openxmlformats.org/drawingml/2006/main" xmlns:r="http://schemas.openxmlformats.org/officeDocument/2006/relationships" xmlns:p="http://schemas.openxmlformats.org/presentationml/2006/main">
+<file path=ppt/notesSlides/notesSlide5.xml><?xml version="1.0" encoding="utf-8"?>
+<p:notes xmlns:a="http://schemas.openxmlformats.org/drawingml/2006/main" xmlns:p="http://schemas.openxmlformats.org/presentationml/2006/main" xmlns:r="http://schemas.openxmlformats.org/officeDocument/2006/relationships">
   <p:cSld>
     <p:spTree>
       <p:nvGrpSpPr>
@@ -2365,7 +2584,7 @@
         <p:nvSpPr>
           <p:cNvPr id="2" name="Slide Image Placeholder 1"/>
           <p:cNvSpPr>
-            <a:spLocks noGrp="1" noRot="1" noChangeAspect="1"/>
+            <a:spLocks noGrp="1"/>
           </p:cNvSpPr>
           <p:nvPr>
             <p:ph type="sldImg" idx="2"/>
@@ -2380,7 +2599,7 @@
             <a:spLocks noGrp="1"/>
           </p:cNvSpPr>
           <p:nvPr>
-            <p:ph type="body" sz="quarter" idx="3"/>
+            <p:ph type="body" idx="3" sz="quarter"/>
           </p:nvPr>
         </p:nvSpPr>
         <p:spPr/>
@@ -2392,7 +2611,7 @@
               <a:rPr sz="1200">
                 <a:latin typeface="Calibri"/>
               </a:rPr>
-              <a:t>This is a reference page and it is deliberately nothing but the picture. Leave it up while they work.</a:t>
+              <a:t>Keep the radio theory to two minutes. The one thing that must land is that every device has an address, and an address is like a phone number.</a:t>
             </a:r>
           </a:p>
           <a:p>
@@ -2400,7 +2619,7 @@
               <a:rPr sz="1200">
                 <a:latin typeface="Calibri"/>
               </a:rPr>
-              <a:t>Hold a real controller alongside it and name the parts. Two analog sticks, a D-pad, four face buttons, four shoulder buttons, two triggers, and three in the middle.</a:t>
+              <a:t>The channel-hopping detail answers the question they are about to ask: why twenty vehicles in one room actually works.</a:t>
             </a:r>
           </a:p>
           <a:p>
@@ -2408,15 +2627,7 @@
               <a:rPr sz="1200">
                 <a:latin typeface="Calibri"/>
               </a:rPr>
-              <a:t>Every one of those has a name in the program, and they are about to press all of them and see what each is called.</a:t>
-            </a:r>
-          </a:p>
-          <a:p>
-            <a:r>
-              <a:rPr sz="1200">
-                <a:latin typeface="Calibri"/>
-              </a:rPr>
-              <a:t>Tell them to photograph this slide. They will want it again in Lessons 4 and 5.</a:t>
+              <a:t>The 85% storage note is worth mentioning. It explains why a Bluetooth sketch takes so long to upload and why some boards run out of room.</a:t>
             </a:r>
           </a:p>
         </p:txBody>
@@ -2428,7 +2639,7 @@
             <a:spLocks noGrp="1"/>
           </p:cNvSpPr>
           <p:nvPr>
-            <p:ph type="sldNum" sz="quarter" idx="5"/>
+            <p:ph type="sldNum" idx="5" sz="quarter"/>
           </p:nvPr>
         </p:nvSpPr>
         <p:spPr/>
@@ -2441,8 +2652,8 @@
 </p:notes>
 </file>
 
-<file path=ppt/notesSlides/notesSlide8.xml><?xml version="1.0" encoding="utf-8"?>
-<p:notes xmlns:a="http://schemas.openxmlformats.org/drawingml/2006/main" xmlns:r="http://schemas.openxmlformats.org/officeDocument/2006/relationships" xmlns:p="http://schemas.openxmlformats.org/presentationml/2006/main">
+<file path=ppt/notesSlides/notesSlide6.xml><?xml version="1.0" encoding="utf-8"?>
+<p:notes xmlns:a="http://schemas.openxmlformats.org/drawingml/2006/main" xmlns:p="http://schemas.openxmlformats.org/presentationml/2006/main" xmlns:r="http://schemas.openxmlformats.org/officeDocument/2006/relationships">
   <p:cSld>
     <p:spTree>
       <p:nvGrpSpPr>
@@ -2462,7 +2673,7 @@
         <p:nvSpPr>
           <p:cNvPr id="2" name="Slide Image Placeholder 1"/>
           <p:cNvSpPr>
-            <a:spLocks noGrp="1" noRot="1" noChangeAspect="1"/>
+            <a:spLocks noGrp="1"/>
           </p:cNvSpPr>
           <p:nvPr>
             <p:ph type="sldImg" idx="2"/>
@@ -2477,7 +2688,7 @@
             <a:spLocks noGrp="1"/>
           </p:cNvSpPr>
           <p:nvPr>
-            <p:ph type="body" sz="quarter" idx="3"/>
+            <p:ph type="body" idx="3" sz="quarter"/>
           </p:nvPr>
         </p:nvSpPr>
         <p:spPr/>
@@ -2489,7 +2700,7 @@
               <a:rPr sz="1200">
                 <a:latin typeface="Calibri"/>
               </a:rPr>
-              <a:t>Read one row left to right and the whole thing is obvious: two pins, a driver chip, a motor.</a:t>
+              <a:t>Kevin's instruction, 2026-09-05: we program and label the controllers, so do not make students worry about how. Tell them what the sticker means and move on.</a:t>
             </a:r>
           </a:p>
           <a:p>
@@ -2497,7 +2708,7 @@
               <a:rPr sz="1200">
                 <a:latin typeface="Calibri"/>
               </a:rPr>
-              <a:t>The driver is the part worth naming. The ESP32 pin can supply about 20 milliamps at 3.3 volts. A motor wants amps at battery voltage. The DRV8871 is what stands between them.</a:t>
+              <a:t>Say the odd part plainly all the same: on a PS3 pad it is the CONTROLLER that is told which vehicle to talk to, not the vehicle that chooses a controller.</a:t>
             </a:r>
           </a:p>
           <a:p>
@@ -2505,7 +2716,7 @@
               <a:rPr sz="1200">
                 <a:latin typeface="Calibri"/>
               </a:rPr>
-              <a:t>Two pins per motor, not one. Which of the two you drive is what decides the direction - that is the H-bridge from Lesson 2.</a:t>
+              <a:t>FOR YOU, NOT FOR THE SLIDE - how the labelling is done. Plug the pad into a Windows PC over USB, open SixaxisPairTool, type the address in and click Update, then put the same address into PS3_MAC_ADDRESS in the sketch. The scheme is 02:02:03:04:05:NN, where NN is the vehicle number.</a:t>
             </a:r>
           </a:p>
           <a:p>
@@ -2513,7 +2724,7 @@
               <a:rPr sz="1200">
                 <a:latin typeface="Calibri"/>
               </a:rPr>
-              <a:t>Point out that the pin numbers on this slide are read out of the sketch when the deck is built, so if they look at the file they will find the same ones.</a:t>
+              <a:t>Also for you: the first pair of digits must be EVEN. An odd one silently fails to connect, which is a very confusing way to spend an afternoon.</a:t>
             </a:r>
           </a:p>
           <a:p>
@@ -2521,7 +2732,7 @@
               <a:rPr sz="1200">
                 <a:latin typeface="Calibri"/>
               </a:rPr>
-              <a:t>Worth pausing on the fact that all four rows are identical. Four motors is not four times the thinking - it is the same thinking, four times.</a:t>
+              <a:t>Check the stickers around the room now, before anybody uploads. Every term somebody loses a morning to a pad that was picked up off the wrong table.</a:t>
             </a:r>
           </a:p>
         </p:txBody>
@@ -2533,7 +2744,7 @@
             <a:spLocks noGrp="1"/>
           </p:cNvSpPr>
           <p:nvPr>
-            <p:ph type="sldNum" sz="quarter" idx="5"/>
+            <p:ph type="sldNum" idx="5" sz="quarter"/>
           </p:nvPr>
         </p:nvSpPr>
         <p:spPr/>
@@ -2546,8 +2757,8 @@
 </p:notes>
 </file>
 
-<file path=ppt/notesSlides/notesSlide9.xml><?xml version="1.0" encoding="utf-8"?>
-<p:notes xmlns:a="http://schemas.openxmlformats.org/drawingml/2006/main" xmlns:r="http://schemas.openxmlformats.org/officeDocument/2006/relationships" xmlns:p="http://schemas.openxmlformats.org/presentationml/2006/main">
+<file path=ppt/notesSlides/notesSlide7.xml><?xml version="1.0" encoding="utf-8"?>
+<p:notes xmlns:a="http://schemas.openxmlformats.org/drawingml/2006/main" xmlns:p="http://schemas.openxmlformats.org/presentationml/2006/main" xmlns:r="http://schemas.openxmlformats.org/officeDocument/2006/relationships">
   <p:cSld>
     <p:spTree>
       <p:nvGrpSpPr>
@@ -2567,7 +2778,7 @@
         <p:nvSpPr>
           <p:cNvPr id="2" name="Slide Image Placeholder 1"/>
           <p:cNvSpPr>
-            <a:spLocks noGrp="1" noRot="1" noChangeAspect="1"/>
+            <a:spLocks noGrp="1"/>
           </p:cNvSpPr>
           <p:nvPr>
             <p:ph type="sldImg" idx="2"/>
@@ -2582,7 +2793,7 @@
             <a:spLocks noGrp="1"/>
           </p:cNvSpPr>
           <p:nvPr>
-            <p:ph type="body" sz="quarter" idx="3"/>
+            <p:ph type="body" idx="3" sz="quarter"/>
           </p:nvPr>
         </p:nvSpPr>
         <p:spPr/>
@@ -2594,7 +2805,7 @@
               <a:rPr sz="1200">
                 <a:latin typeface="Calibri"/>
               </a:rPr>
-              <a:t>Digital and analog is a distinction they will use for the rest of their lives. Two minutes, properly.</a:t>
+              <a:t>This is a reference page and it is deliberately nothing but the picture. Leave it up while they work.</a:t>
             </a:r>
           </a:p>
           <a:p>
@@ -2602,7 +2813,7 @@
               <a:rPr sz="1200">
                 <a:latin typeface="Calibri"/>
               </a:rPr>
-              <a:t>Kevin caught this in the 2026-09-05 review: the PS3 triggers are ANALOG, not digital. So are the shoulder and face buttons - a Sixaxis reports pressure on all of them. Almost every program reads them as digital anyway, which is why it is easy to get wrong.</a:t>
+              <a:t>Hold a real controller alongside it and name the parts. Two analog sticks, a D-pad, four face buttons, four shoulder buttons, two triggers, and three in the middle.</a:t>
             </a:r>
           </a:p>
           <a:p>
@@ -2610,7 +2821,7 @@
               <a:rPr sz="1200">
                 <a:latin typeface="Calibri"/>
               </a:rPr>
-              <a:t>A press can read differently from a light one, and you can still treat any of them as a plain yes or no - which is mostly what we do, and why it is easy to get wrong.</a:t>
+              <a:t>Every one of those has a name in the program, and they are about to press all of them and see what each is called.</a:t>
             </a:r>
           </a:p>
           <a:p>
@@ -2618,23 +2829,7 @@
               <a:rPr sz="1200">
                 <a:latin typeface="Calibri"/>
               </a:rPr>
-              <a:t>If you have five spare minutes, have them squeeze a trigger slowly in l3a_controller_check and watch the number climb.</a:t>
-            </a:r>
-          </a:p>
-          <a:p>
-            <a:r>
-              <a:rPr sz="1200">
-                <a:latin typeface="Calibri"/>
-              </a:rPr>
-              <a:t>The warning panel is the one to read out. Push a stick up and the number goes negative - it catches everybody, and it is why there is a minus sign in the driving code.</a:t>
-            </a:r>
-          </a:p>
-          <a:p>
-            <a:r>
-              <a:rPr sz="1200">
-                <a:latin typeface="Calibri"/>
-              </a:rPr>
-              <a:t>Have a controller in your hand and press the things as you name them.</a:t>
+              <a:t>Tell them to photograph this slide. They will want it again in Lessons 4 and 5.</a:t>
             </a:r>
           </a:p>
         </p:txBody>
@@ -2646,7 +2841,225 @@
             <a:spLocks noGrp="1"/>
           </p:cNvSpPr>
           <p:nvPr>
-            <p:ph type="sldNum" sz="quarter" idx="5"/>
+            <p:ph type="sldNum" idx="5" sz="quarter"/>
+          </p:nvPr>
+        </p:nvSpPr>
+        <p:spPr/>
+      </p:sp>
+    </p:spTree>
+  </p:cSld>
+  <p:clrMapOvr>
+    <a:masterClrMapping/>
+  </p:clrMapOvr>
+</p:notes>
+</file>
+
+<file path=ppt/notesSlides/notesSlide8.xml><?xml version="1.0" encoding="utf-8"?>
+<p:notes xmlns:a="http://schemas.openxmlformats.org/drawingml/2006/main" xmlns:p="http://schemas.openxmlformats.org/presentationml/2006/main" xmlns:r="http://schemas.openxmlformats.org/officeDocument/2006/relationships">
+  <p:cSld>
+    <p:spTree>
+      <p:nvGrpSpPr>
+        <p:cNvPr id="1" name=""/>
+        <p:cNvGrpSpPr/>
+        <p:nvPr/>
+      </p:nvGrpSpPr>
+      <p:grpSpPr>
+        <a:xfrm>
+          <a:off x="0" y="0"/>
+          <a:ext cx="0" cy="0"/>
+          <a:chOff x="0" y="0"/>
+          <a:chExt cx="0" cy="0"/>
+        </a:xfrm>
+      </p:grpSpPr>
+      <p:sp>
+        <p:nvSpPr>
+          <p:cNvPr id="2" name="Slide Image Placeholder 1"/>
+          <p:cNvSpPr>
+            <a:spLocks noGrp="1"/>
+          </p:cNvSpPr>
+          <p:nvPr>
+            <p:ph type="sldImg" idx="2"/>
+          </p:nvPr>
+        </p:nvSpPr>
+        <p:spPr/>
+      </p:sp>
+      <p:sp>
+        <p:nvSpPr>
+          <p:cNvPr id="3" name="Notes Placeholder 2"/>
+          <p:cNvSpPr>
+            <a:spLocks noGrp="1"/>
+          </p:cNvSpPr>
+          <p:nvPr>
+            <p:ph type="body" idx="3" sz="quarter"/>
+          </p:nvPr>
+        </p:nvSpPr>
+        <p:spPr/>
+        <p:txBody>
+          <a:bodyPr/>
+          <a:lstStyle/>
+          <a:p>
+            <a:r>
+              <a:rPr sz="1200">
+                <a:latin typeface="Calibri"/>
+              </a:rPr>
+              <a:t>Read one row left to right and the whole thing is obvious: two pins, a driver chip, a motor.</a:t>
+            </a:r>
+          </a:p>
+          <a:p>
+            <a:r>
+              <a:rPr sz="1200">
+                <a:latin typeface="Calibri"/>
+              </a:rPr>
+              <a:t>The driver is the part worth naming. The ESP32 pin can supply about 20 milliamps at 3.3 volts. A motor wants amps at battery voltage. The DRV8871 is what stands between them.</a:t>
+            </a:r>
+          </a:p>
+          <a:p>
+            <a:r>
+              <a:rPr sz="1200">
+                <a:latin typeface="Calibri"/>
+              </a:rPr>
+              <a:t>Two pins per motor, not one. Which of the two you drive is what decides the direction - that is the H-bridge from Lesson 2.</a:t>
+            </a:r>
+          </a:p>
+          <a:p>
+            <a:r>
+              <a:rPr sz="1200">
+                <a:latin typeface="Calibri"/>
+              </a:rPr>
+              <a:t>Point out that the pin numbers on this slide are read out of the sketch when the deck is built, so if they look at the file they will find the same ones.</a:t>
+            </a:r>
+          </a:p>
+          <a:p>
+            <a:r>
+              <a:rPr sz="1200">
+                <a:latin typeface="Calibri"/>
+              </a:rPr>
+              <a:t>Worth pausing on the fact that all four rows are identical. Four motors is not four times the thinking - it is the same thinking, four times.</a:t>
+            </a:r>
+          </a:p>
+        </p:txBody>
+      </p:sp>
+      <p:sp>
+        <p:nvSpPr>
+          <p:cNvPr id="4" name="Slide Number Placeholder 3"/>
+          <p:cNvSpPr>
+            <a:spLocks noGrp="1"/>
+          </p:cNvSpPr>
+          <p:nvPr>
+            <p:ph type="sldNum" idx="5" sz="quarter"/>
+          </p:nvPr>
+        </p:nvSpPr>
+        <p:spPr/>
+      </p:sp>
+    </p:spTree>
+  </p:cSld>
+  <p:clrMapOvr>
+    <a:masterClrMapping/>
+  </p:clrMapOvr>
+</p:notes>
+</file>
+
+<file path=ppt/notesSlides/notesSlide9.xml><?xml version="1.0" encoding="utf-8"?>
+<p:notes xmlns:a="http://schemas.openxmlformats.org/drawingml/2006/main" xmlns:p="http://schemas.openxmlformats.org/presentationml/2006/main" xmlns:r="http://schemas.openxmlformats.org/officeDocument/2006/relationships">
+  <p:cSld>
+    <p:spTree>
+      <p:nvGrpSpPr>
+        <p:cNvPr id="1" name=""/>
+        <p:cNvGrpSpPr/>
+        <p:nvPr/>
+      </p:nvGrpSpPr>
+      <p:grpSpPr>
+        <a:xfrm>
+          <a:off x="0" y="0"/>
+          <a:ext cx="0" cy="0"/>
+          <a:chOff x="0" y="0"/>
+          <a:chExt cx="0" cy="0"/>
+        </a:xfrm>
+      </p:grpSpPr>
+      <p:sp>
+        <p:nvSpPr>
+          <p:cNvPr id="2" name="Slide Image Placeholder 1"/>
+          <p:cNvSpPr>
+            <a:spLocks noGrp="1"/>
+          </p:cNvSpPr>
+          <p:nvPr>
+            <p:ph type="sldImg" idx="2"/>
+          </p:nvPr>
+        </p:nvSpPr>
+        <p:spPr/>
+      </p:sp>
+      <p:sp>
+        <p:nvSpPr>
+          <p:cNvPr id="3" name="Notes Placeholder 2"/>
+          <p:cNvSpPr>
+            <a:spLocks noGrp="1"/>
+          </p:cNvSpPr>
+          <p:nvPr>
+            <p:ph type="body" idx="3" sz="quarter"/>
+          </p:nvPr>
+        </p:nvSpPr>
+        <p:spPr/>
+        <p:txBody>
+          <a:bodyPr/>
+          <a:lstStyle/>
+          <a:p>
+            <a:r>
+              <a:rPr sz="1200">
+                <a:latin typeface="Calibri"/>
+              </a:rPr>
+              <a:t>Digital and analog is a distinction they will use for the rest of their lives. Two minutes, properly.</a:t>
+            </a:r>
+          </a:p>
+          <a:p>
+            <a:r>
+              <a:rPr sz="1200">
+                <a:latin typeface="Calibri"/>
+              </a:rPr>
+              <a:t>Kevin caught this in the 2026-09-05 review: the PS3 triggers are ANALOG, not digital. So are the shoulder and face buttons - a Sixaxis reports pressure on all of them. Almost every program reads them as digital anyway, which is why it is easy to get wrong.</a:t>
+            </a:r>
+          </a:p>
+          <a:p>
+            <a:r>
+              <a:rPr sz="1200">
+                <a:latin typeface="Calibri"/>
+              </a:rPr>
+              <a:t>A press can read differently from a light one, and you can still treat any of them as a plain yes or no - which is mostly what we do, and why it is easy to get wrong.</a:t>
+            </a:r>
+          </a:p>
+          <a:p>
+            <a:r>
+              <a:rPr sz="1200">
+                <a:latin typeface="Calibri"/>
+              </a:rPr>
+              <a:t>If you have five spare minutes, have them squeeze a trigger slowly in l3a_controller_check and watch the number climb.</a:t>
+            </a:r>
+          </a:p>
+          <a:p>
+            <a:r>
+              <a:rPr sz="1200">
+                <a:latin typeface="Calibri"/>
+              </a:rPr>
+              <a:t>The warning panel is the one to read out. Push a stick up and the number goes negative - it catches everybody, and it is why there is a minus sign in the driving code.</a:t>
+            </a:r>
+          </a:p>
+          <a:p>
+            <a:r>
+              <a:rPr sz="1200">
+                <a:latin typeface="Calibri"/>
+              </a:rPr>
+              <a:t>Have a controller in your hand and press the things as you name them.</a:t>
+            </a:r>
+          </a:p>
+        </p:txBody>
+      </p:sp>
+      <p:sp>
+        <p:nvSpPr>
+          <p:cNvPr id="4" name="Slide Number Placeholder 3"/>
+          <p:cNvSpPr>
+            <a:spLocks noGrp="1"/>
+          </p:cNvSpPr>
+          <p:nvPr>
+            <p:ph type="sldNum" idx="5" sz="quarter"/>
           </p:nvPr>
         </p:nvSpPr>
         <p:spPr/>
@@ -2697,9 +3110,10 @@
           <a:lstStyle/>
           <a:p>
             <a:r>
-              <a:rPr lang="en-US"/>
+              <a:rPr lang="en-US" smtClean="0"/>
               <a:t>Click to edit Master title style</a:t>
             </a:r>
+            <a:endParaRPr lang="en-US"/>
           </a:p>
         </p:txBody>
       </p:sp>
@@ -2815,9 +3229,10 @@
           </a:lstStyle>
           <a:p>
             <a:r>
-              <a:rPr lang="en-US"/>
+              <a:rPr lang="en-US" smtClean="0"/>
               <a:t>Click to edit Master subtitle style</a:t>
             </a:r>
+            <a:endParaRPr lang="en-US"/>
           </a:p>
         </p:txBody>
       </p:sp>
@@ -2838,7 +3253,7 @@
           <a:p>
             <a:fld id="{5BCAD085-E8A6-8845-BD4E-CB4CCA059FC4}" type="datetimeFigureOut">
               <a:rPr lang="en-US" smtClean="0"/>
-              <a:t>9/7/2026</a:t>
+              <a:t>1/27/13</a:t>
             </a:fld>
             <a:endParaRPr lang="en-US"/>
           </a:p>
@@ -2932,9 +3347,10 @@
           <a:lstStyle/>
           <a:p>
             <a:r>
-              <a:rPr lang="en-US"/>
+              <a:rPr lang="en-US" smtClean="0"/>
               <a:t>Click to edit Master title style</a:t>
             </a:r>
+            <a:endParaRPr lang="en-US"/>
           </a:p>
         </p:txBody>
       </p:sp>
@@ -2955,37 +3371,38 @@
           <a:p>
             <a:pPr lvl="0"/>
             <a:r>
-              <a:rPr lang="en-US"/>
+              <a:rPr lang="en-US" smtClean="0"/>
               <a:t>Click to edit Master text styles</a:t>
             </a:r>
           </a:p>
           <a:p>
             <a:pPr lvl="1"/>
             <a:r>
-              <a:rPr lang="en-US"/>
+              <a:rPr lang="en-US" smtClean="0"/>
               <a:t>Second level</a:t>
             </a:r>
           </a:p>
           <a:p>
             <a:pPr lvl="2"/>
             <a:r>
-              <a:rPr lang="en-US"/>
+              <a:rPr lang="en-US" smtClean="0"/>
               <a:t>Third level</a:t>
             </a:r>
           </a:p>
           <a:p>
             <a:pPr lvl="3"/>
             <a:r>
-              <a:rPr lang="en-US"/>
+              <a:rPr lang="en-US" smtClean="0"/>
               <a:t>Fourth level</a:t>
             </a:r>
           </a:p>
           <a:p>
             <a:pPr lvl="4"/>
             <a:r>
-              <a:rPr lang="en-US"/>
+              <a:rPr lang="en-US" smtClean="0"/>
               <a:t>Fifth level</a:t>
             </a:r>
+            <a:endParaRPr lang="en-US"/>
           </a:p>
         </p:txBody>
       </p:sp>
@@ -3006,7 +3423,7 @@
           <a:p>
             <a:fld id="{5BCAD085-E8A6-8845-BD4E-CB4CCA059FC4}" type="datetimeFigureOut">
               <a:rPr lang="en-US" smtClean="0"/>
-              <a:t>9/7/2026</a:t>
+              <a:t>1/27/13</a:t>
             </a:fld>
             <a:endParaRPr lang="en-US"/>
           </a:p>
@@ -3105,9 +3522,10 @@
           <a:lstStyle/>
           <a:p>
             <a:r>
-              <a:rPr lang="en-US"/>
+              <a:rPr lang="en-US" smtClean="0"/>
               <a:t>Click to edit Master title style</a:t>
             </a:r>
+            <a:endParaRPr lang="en-US"/>
           </a:p>
         </p:txBody>
       </p:sp>
@@ -3133,37 +3551,38 @@
           <a:p>
             <a:pPr lvl="0"/>
             <a:r>
-              <a:rPr lang="en-US"/>
+              <a:rPr lang="en-US" smtClean="0"/>
               <a:t>Click to edit Master text styles</a:t>
             </a:r>
           </a:p>
           <a:p>
             <a:pPr lvl="1"/>
             <a:r>
-              <a:rPr lang="en-US"/>
+              <a:rPr lang="en-US" smtClean="0"/>
               <a:t>Second level</a:t>
             </a:r>
           </a:p>
           <a:p>
             <a:pPr lvl="2"/>
             <a:r>
-              <a:rPr lang="en-US"/>
+              <a:rPr lang="en-US" smtClean="0"/>
               <a:t>Third level</a:t>
             </a:r>
           </a:p>
           <a:p>
             <a:pPr lvl="3"/>
             <a:r>
-              <a:rPr lang="en-US"/>
+              <a:rPr lang="en-US" smtClean="0"/>
               <a:t>Fourth level</a:t>
             </a:r>
           </a:p>
           <a:p>
             <a:pPr lvl="4"/>
             <a:r>
-              <a:rPr lang="en-US"/>
+              <a:rPr lang="en-US" smtClean="0"/>
               <a:t>Fifth level</a:t>
             </a:r>
+            <a:endParaRPr lang="en-US"/>
           </a:p>
         </p:txBody>
       </p:sp>
@@ -3184,7 +3603,7 @@
           <a:p>
             <a:fld id="{5BCAD085-E8A6-8845-BD4E-CB4CCA059FC4}" type="datetimeFigureOut">
               <a:rPr lang="en-US" smtClean="0"/>
-              <a:t>9/7/2026</a:t>
+              <a:t>1/27/13</a:t>
             </a:fld>
             <a:endParaRPr lang="en-US"/>
           </a:p>
@@ -3278,9 +3697,10 @@
           <a:lstStyle/>
           <a:p>
             <a:r>
-              <a:rPr lang="en-US"/>
+              <a:rPr lang="en-US" smtClean="0"/>
               <a:t>Click to edit Master title style</a:t>
             </a:r>
+            <a:endParaRPr lang="en-US"/>
           </a:p>
         </p:txBody>
       </p:sp>
@@ -3301,37 +3721,38 @@
           <a:p>
             <a:pPr lvl="0"/>
             <a:r>
-              <a:rPr lang="en-US"/>
+              <a:rPr lang="en-US" smtClean="0"/>
               <a:t>Click to edit Master text styles</a:t>
             </a:r>
           </a:p>
           <a:p>
             <a:pPr lvl="1"/>
             <a:r>
-              <a:rPr lang="en-US"/>
+              <a:rPr lang="en-US" smtClean="0"/>
               <a:t>Second level</a:t>
             </a:r>
           </a:p>
           <a:p>
             <a:pPr lvl="2"/>
             <a:r>
-              <a:rPr lang="en-US"/>
+              <a:rPr lang="en-US" smtClean="0"/>
               <a:t>Third level</a:t>
             </a:r>
           </a:p>
           <a:p>
             <a:pPr lvl="3"/>
             <a:r>
-              <a:rPr lang="en-US"/>
+              <a:rPr lang="en-US" smtClean="0"/>
               <a:t>Fourth level</a:t>
             </a:r>
           </a:p>
           <a:p>
             <a:pPr lvl="4"/>
             <a:r>
-              <a:rPr lang="en-US"/>
+              <a:rPr lang="en-US" smtClean="0"/>
               <a:t>Fifth level</a:t>
             </a:r>
+            <a:endParaRPr lang="en-US"/>
           </a:p>
         </p:txBody>
       </p:sp>
@@ -3352,7 +3773,7 @@
           <a:p>
             <a:fld id="{5BCAD085-E8A6-8845-BD4E-CB4CCA059FC4}" type="datetimeFigureOut">
               <a:rPr lang="en-US" smtClean="0"/>
-              <a:t>9/7/2026</a:t>
+              <a:t>1/27/13</a:t>
             </a:fld>
             <a:endParaRPr lang="en-US"/>
           </a:p>
@@ -3455,9 +3876,10 @@
           </a:lstStyle>
           <a:p>
             <a:r>
-              <a:rPr lang="en-US"/>
+              <a:rPr lang="en-US" smtClean="0"/>
               <a:t>Click to edit Master title style</a:t>
             </a:r>
+            <a:endParaRPr lang="en-US"/>
           </a:p>
         </p:txBody>
       </p:sp>
@@ -3574,7 +3996,7 @@
           <a:p>
             <a:pPr lvl="0"/>
             <a:r>
-              <a:rPr lang="en-US"/>
+              <a:rPr lang="en-US" smtClean="0"/>
               <a:t>Click to edit Master text styles</a:t>
             </a:r>
           </a:p>
@@ -3597,7 +4019,7 @@
           <a:p>
             <a:fld id="{5BCAD085-E8A6-8845-BD4E-CB4CCA059FC4}" type="datetimeFigureOut">
               <a:rPr lang="en-US" smtClean="0"/>
-              <a:t>9/7/2026</a:t>
+              <a:t>1/27/13</a:t>
             </a:fld>
             <a:endParaRPr lang="en-US"/>
           </a:p>
@@ -3691,9 +4113,10 @@
           <a:lstStyle/>
           <a:p>
             <a:r>
-              <a:rPr lang="en-US"/>
+              <a:rPr lang="en-US" smtClean="0"/>
               <a:t>Click to edit Master title style</a:t>
             </a:r>
+            <a:endParaRPr lang="en-US"/>
           </a:p>
         </p:txBody>
       </p:sp>
@@ -3747,37 +4170,38 @@
           <a:p>
             <a:pPr lvl="0"/>
             <a:r>
-              <a:rPr lang="en-US"/>
+              <a:rPr lang="en-US" smtClean="0"/>
               <a:t>Click to edit Master text styles</a:t>
             </a:r>
           </a:p>
           <a:p>
             <a:pPr lvl="1"/>
             <a:r>
-              <a:rPr lang="en-US"/>
+              <a:rPr lang="en-US" smtClean="0"/>
               <a:t>Second level</a:t>
             </a:r>
           </a:p>
           <a:p>
             <a:pPr lvl="2"/>
             <a:r>
-              <a:rPr lang="en-US"/>
+              <a:rPr lang="en-US" smtClean="0"/>
               <a:t>Third level</a:t>
             </a:r>
           </a:p>
           <a:p>
             <a:pPr lvl="3"/>
             <a:r>
-              <a:rPr lang="en-US"/>
+              <a:rPr lang="en-US" smtClean="0"/>
               <a:t>Fourth level</a:t>
             </a:r>
           </a:p>
           <a:p>
             <a:pPr lvl="4"/>
             <a:r>
-              <a:rPr lang="en-US"/>
+              <a:rPr lang="en-US" smtClean="0"/>
               <a:t>Fifth level</a:t>
             </a:r>
+            <a:endParaRPr lang="en-US"/>
           </a:p>
         </p:txBody>
       </p:sp>
@@ -3831,37 +4255,38 @@
           <a:p>
             <a:pPr lvl="0"/>
             <a:r>
-              <a:rPr lang="en-US"/>
+              <a:rPr lang="en-US" smtClean="0"/>
               <a:t>Click to edit Master text styles</a:t>
             </a:r>
           </a:p>
           <a:p>
             <a:pPr lvl="1"/>
             <a:r>
-              <a:rPr lang="en-US"/>
+              <a:rPr lang="en-US" smtClean="0"/>
               <a:t>Second level</a:t>
             </a:r>
           </a:p>
           <a:p>
             <a:pPr lvl="2"/>
             <a:r>
-              <a:rPr lang="en-US"/>
+              <a:rPr lang="en-US" smtClean="0"/>
               <a:t>Third level</a:t>
             </a:r>
           </a:p>
           <a:p>
             <a:pPr lvl="3"/>
             <a:r>
-              <a:rPr lang="en-US"/>
+              <a:rPr lang="en-US" smtClean="0"/>
               <a:t>Fourth level</a:t>
             </a:r>
           </a:p>
           <a:p>
             <a:pPr lvl="4"/>
             <a:r>
-              <a:rPr lang="en-US"/>
+              <a:rPr lang="en-US" smtClean="0"/>
               <a:t>Fifth level</a:t>
             </a:r>
+            <a:endParaRPr lang="en-US"/>
           </a:p>
         </p:txBody>
       </p:sp>
@@ -3882,7 +4307,7 @@
           <a:p>
             <a:fld id="{5BCAD085-E8A6-8845-BD4E-CB4CCA059FC4}" type="datetimeFigureOut">
               <a:rPr lang="en-US" smtClean="0"/>
-              <a:t>9/7/2026</a:t>
+              <a:t>1/27/13</a:t>
             </a:fld>
             <a:endParaRPr lang="en-US"/>
           </a:p>
@@ -3980,9 +4405,10 @@
           </a:lstStyle>
           <a:p>
             <a:r>
-              <a:rPr lang="en-US"/>
+              <a:rPr lang="en-US" smtClean="0"/>
               <a:t>Click to edit Master title style</a:t>
             </a:r>
+            <a:endParaRPr lang="en-US"/>
           </a:p>
         </p:txBody>
       </p:sp>
@@ -4045,7 +4471,7 @@
           <a:p>
             <a:pPr lvl="0"/>
             <a:r>
-              <a:rPr lang="en-US"/>
+              <a:rPr lang="en-US" smtClean="0"/>
               <a:t>Click to edit Master text styles</a:t>
             </a:r>
           </a:p>
@@ -4101,37 +4527,38 @@
           <a:p>
             <a:pPr lvl="0"/>
             <a:r>
-              <a:rPr lang="en-US"/>
+              <a:rPr lang="en-US" smtClean="0"/>
               <a:t>Click to edit Master text styles</a:t>
             </a:r>
           </a:p>
           <a:p>
             <a:pPr lvl="1"/>
             <a:r>
-              <a:rPr lang="en-US"/>
+              <a:rPr lang="en-US" smtClean="0"/>
               <a:t>Second level</a:t>
             </a:r>
           </a:p>
           <a:p>
             <a:pPr lvl="2"/>
             <a:r>
-              <a:rPr lang="en-US"/>
+              <a:rPr lang="en-US" smtClean="0"/>
               <a:t>Third level</a:t>
             </a:r>
           </a:p>
           <a:p>
             <a:pPr lvl="3"/>
             <a:r>
-              <a:rPr lang="en-US"/>
+              <a:rPr lang="en-US" smtClean="0"/>
               <a:t>Fourth level</a:t>
             </a:r>
           </a:p>
           <a:p>
             <a:pPr lvl="4"/>
             <a:r>
-              <a:rPr lang="en-US"/>
+              <a:rPr lang="en-US" smtClean="0"/>
               <a:t>Fifth level</a:t>
             </a:r>
+            <a:endParaRPr lang="en-US"/>
           </a:p>
         </p:txBody>
       </p:sp>
@@ -4194,7 +4621,7 @@
           <a:p>
             <a:pPr lvl="0"/>
             <a:r>
-              <a:rPr lang="en-US"/>
+              <a:rPr lang="en-US" smtClean="0"/>
               <a:t>Click to edit Master text styles</a:t>
             </a:r>
           </a:p>
@@ -4250,37 +4677,38 @@
           <a:p>
             <a:pPr lvl="0"/>
             <a:r>
-              <a:rPr lang="en-US"/>
+              <a:rPr lang="en-US" smtClean="0"/>
               <a:t>Click to edit Master text styles</a:t>
             </a:r>
           </a:p>
           <a:p>
             <a:pPr lvl="1"/>
             <a:r>
-              <a:rPr lang="en-US"/>
+              <a:rPr lang="en-US" smtClean="0"/>
               <a:t>Second level</a:t>
             </a:r>
           </a:p>
           <a:p>
             <a:pPr lvl="2"/>
             <a:r>
-              <a:rPr lang="en-US"/>
+              <a:rPr lang="en-US" smtClean="0"/>
               <a:t>Third level</a:t>
             </a:r>
           </a:p>
           <a:p>
             <a:pPr lvl="3"/>
             <a:r>
-              <a:rPr lang="en-US"/>
+              <a:rPr lang="en-US" smtClean="0"/>
               <a:t>Fourth level</a:t>
             </a:r>
           </a:p>
           <a:p>
             <a:pPr lvl="4"/>
             <a:r>
-              <a:rPr lang="en-US"/>
+              <a:rPr lang="en-US" smtClean="0"/>
               <a:t>Fifth level</a:t>
             </a:r>
+            <a:endParaRPr lang="en-US"/>
           </a:p>
         </p:txBody>
       </p:sp>
@@ -4301,7 +4729,7 @@
           <a:p>
             <a:fld id="{5BCAD085-E8A6-8845-BD4E-CB4CCA059FC4}" type="datetimeFigureOut">
               <a:rPr lang="en-US" smtClean="0"/>
-              <a:t>9/7/2026</a:t>
+              <a:t>1/27/13</a:t>
             </a:fld>
             <a:endParaRPr lang="en-US"/>
           </a:p>
@@ -4395,9 +4823,10 @@
           <a:lstStyle/>
           <a:p>
             <a:r>
-              <a:rPr lang="en-US"/>
+              <a:rPr lang="en-US" smtClean="0"/>
               <a:t>Click to edit Master title style</a:t>
             </a:r>
+            <a:endParaRPr lang="en-US"/>
           </a:p>
         </p:txBody>
       </p:sp>
@@ -4418,7 +4847,7 @@
           <a:p>
             <a:fld id="{5BCAD085-E8A6-8845-BD4E-CB4CCA059FC4}" type="datetimeFigureOut">
               <a:rPr lang="en-US" smtClean="0"/>
-              <a:t>9/7/2026</a:t>
+              <a:t>1/27/13</a:t>
             </a:fld>
             <a:endParaRPr lang="en-US"/>
           </a:p>
@@ -4513,7 +4942,7 @@
           <a:p>
             <a:fld id="{5BCAD085-E8A6-8845-BD4E-CB4CCA059FC4}" type="datetimeFigureOut">
               <a:rPr lang="en-US" smtClean="0"/>
-              <a:t>9/7/2026</a:t>
+              <a:t>1/27/13</a:t>
             </a:fld>
             <a:endParaRPr lang="en-US"/>
           </a:p>
@@ -4616,9 +5045,10 @@
           </a:lstStyle>
           <a:p>
             <a:r>
-              <a:rPr lang="en-US"/>
+              <a:rPr lang="en-US" smtClean="0"/>
               <a:t>Click to edit Master title style</a:t>
             </a:r>
+            <a:endParaRPr lang="en-US"/>
           </a:p>
         </p:txBody>
       </p:sp>
@@ -4672,37 +5102,38 @@
           <a:p>
             <a:pPr lvl="0"/>
             <a:r>
-              <a:rPr lang="en-US"/>
+              <a:rPr lang="en-US" smtClean="0"/>
               <a:t>Click to edit Master text styles</a:t>
             </a:r>
           </a:p>
           <a:p>
             <a:pPr lvl="1"/>
             <a:r>
-              <a:rPr lang="en-US"/>
+              <a:rPr lang="en-US" smtClean="0"/>
               <a:t>Second level</a:t>
             </a:r>
           </a:p>
           <a:p>
             <a:pPr lvl="2"/>
             <a:r>
-              <a:rPr lang="en-US"/>
+              <a:rPr lang="en-US" smtClean="0"/>
               <a:t>Third level</a:t>
             </a:r>
           </a:p>
           <a:p>
             <a:pPr lvl="3"/>
             <a:r>
-              <a:rPr lang="en-US"/>
+              <a:rPr lang="en-US" smtClean="0"/>
               <a:t>Fourth level</a:t>
             </a:r>
           </a:p>
           <a:p>
             <a:pPr lvl="4"/>
             <a:r>
-              <a:rPr lang="en-US"/>
+              <a:rPr lang="en-US" smtClean="0"/>
               <a:t>Fifth level</a:t>
             </a:r>
+            <a:endParaRPr lang="en-US"/>
           </a:p>
         </p:txBody>
       </p:sp>
@@ -4765,7 +5196,7 @@
           <a:p>
             <a:pPr lvl="0"/>
             <a:r>
-              <a:rPr lang="en-US"/>
+              <a:rPr lang="en-US" smtClean="0"/>
               <a:t>Click to edit Master text styles</a:t>
             </a:r>
           </a:p>
@@ -4788,7 +5219,7 @@
           <a:p>
             <a:fld id="{5BCAD085-E8A6-8845-BD4E-CB4CCA059FC4}" type="datetimeFigureOut">
               <a:rPr lang="en-US" smtClean="0"/>
-              <a:t>9/7/2026</a:t>
+              <a:t>1/27/13</a:t>
             </a:fld>
             <a:endParaRPr lang="en-US"/>
           </a:p>
@@ -4891,9 +5322,10 @@
           </a:lstStyle>
           <a:p>
             <a:r>
-              <a:rPr lang="en-US"/>
+              <a:rPr lang="en-US" smtClean="0"/>
               <a:t>Click to edit Master title style</a:t>
             </a:r>
+            <a:endParaRPr lang="en-US"/>
           </a:p>
         </p:txBody>
       </p:sp>
@@ -5017,7 +5449,7 @@
           <a:p>
             <a:pPr lvl="0"/>
             <a:r>
-              <a:rPr lang="en-US"/>
+              <a:rPr lang="en-US" smtClean="0"/>
               <a:t>Click to edit Master text styles</a:t>
             </a:r>
           </a:p>
@@ -5040,7 +5472,7 @@
           <a:p>
             <a:fld id="{5BCAD085-E8A6-8845-BD4E-CB4CCA059FC4}" type="datetimeFigureOut">
               <a:rPr lang="en-US" smtClean="0"/>
-              <a:t>9/7/2026</a:t>
+              <a:t>1/27/13</a:t>
             </a:fld>
             <a:endParaRPr lang="en-US"/>
           </a:p>
@@ -5149,9 +5581,10 @@
           <a:lstStyle/>
           <a:p>
             <a:r>
-              <a:rPr lang="en-US"/>
+              <a:rPr lang="en-US" smtClean="0"/>
               <a:t>Click to edit Master title style</a:t>
             </a:r>
+            <a:endParaRPr lang="en-US"/>
           </a:p>
         </p:txBody>
       </p:sp>
@@ -5182,37 +5615,38 @@
           <a:p>
             <a:pPr lvl="0"/>
             <a:r>
-              <a:rPr lang="en-US"/>
+              <a:rPr lang="en-US" smtClean="0"/>
               <a:t>Click to edit Master text styles</a:t>
             </a:r>
           </a:p>
           <a:p>
             <a:pPr lvl="1"/>
             <a:r>
-              <a:rPr lang="en-US"/>
+              <a:rPr lang="en-US" smtClean="0"/>
               <a:t>Second level</a:t>
             </a:r>
           </a:p>
           <a:p>
             <a:pPr lvl="2"/>
             <a:r>
-              <a:rPr lang="en-US"/>
+              <a:rPr lang="en-US" smtClean="0"/>
               <a:t>Third level</a:t>
             </a:r>
           </a:p>
           <a:p>
             <a:pPr lvl="3"/>
             <a:r>
-              <a:rPr lang="en-US"/>
+              <a:rPr lang="en-US" smtClean="0"/>
               <a:t>Fourth level</a:t>
             </a:r>
           </a:p>
           <a:p>
             <a:pPr lvl="4"/>
             <a:r>
-              <a:rPr lang="en-US"/>
+              <a:rPr lang="en-US" smtClean="0"/>
               <a:t>Fifth level</a:t>
             </a:r>
+            <a:endParaRPr lang="en-US"/>
           </a:p>
         </p:txBody>
       </p:sp>
@@ -5251,7 +5685,7 @@
           <a:p>
             <a:fld id="{5BCAD085-E8A6-8845-BD4E-CB4CCA059FC4}" type="datetimeFigureOut">
               <a:rPr lang="en-US" smtClean="0"/>
-              <a:t>9/7/2026</a:t>
+              <a:t>1/27/13</a:t>
             </a:fld>
             <a:endParaRPr lang="en-US"/>
           </a:p>
@@ -5610,7 +6044,7 @@
 </file>
 
 <file path=ppt/slides/slide1.xml><?xml version="1.0" encoding="utf-8"?>
-<p:sld xmlns:a="http://schemas.openxmlformats.org/drawingml/2006/main" xmlns:r="http://schemas.openxmlformats.org/officeDocument/2006/relationships" xmlns:p="http://schemas.openxmlformats.org/presentationml/2006/main">
+<p:sld xmlns:a="http://schemas.openxmlformats.org/drawingml/2006/main" xmlns:p="http://schemas.openxmlformats.org/presentationml/2006/main" xmlns:r="http://schemas.openxmlformats.org/officeDocument/2006/relationships">
   <p:cSld>
     <p:spTree>
       <p:nvGrpSpPr>
@@ -5618,14 +6052,7 @@
         <p:cNvGrpSpPr/>
         <p:nvPr/>
       </p:nvGrpSpPr>
-      <p:grpSpPr>
-        <a:xfrm>
-          <a:off x="0" y="0"/>
-          <a:ext cx="0" cy="0"/>
-          <a:chOff x="0" y="0"/>
-          <a:chExt cx="0" cy="0"/>
-        </a:xfrm>
-      </p:grpSpPr>
+      <p:grpSpPr/>
       <p:sp>
         <p:nvSpPr>
           <p:cNvPr id="2" name="Rectangle 1"/>
@@ -5667,13 +6094,435 @@
           <a:lstStyle/>
           <a:p>
             <a:pPr algn="ctr"/>
-            <a:endParaRPr/>
           </a:p>
         </p:txBody>
       </p:sp>
       <p:pic>
         <p:nvPicPr>
           <p:cNvPr id="3" name="Picture 2" descr="porpoise-logo.png"/>
+          <p:cNvPicPr>
+            <a:picLocks noChangeAspect="1"/>
+          </p:cNvPicPr>
+          <p:nvPr/>
+        </p:nvPicPr>
+        <p:blipFill>
+          <a:blip r:embed="rId2"/>
+          <a:stretch>
+            <a:fillRect/>
+          </a:stretch>
+        </p:blipFill>
+        <p:spPr>
+          <a:xfrm>
+            <a:off x="10922762" y="457200"/>
+            <a:ext cx="766013" cy="777240"/>
+          </a:xfrm>
+          <a:prstGeom prst="rect">
+            <a:avLst/>
+          </a:prstGeom>
+        </p:spPr>
+      </p:pic>
+      <p:sp>
+        <p:nvSpPr>
+          <p:cNvPr id="4" name="TextBox 3"/>
+          <p:cNvSpPr txBox="1"/>
+          <p:nvPr/>
+        </p:nvSpPr>
+        <p:spPr>
+          <a:xfrm>
+            <a:off x="502920" y="1051560"/>
+            <a:ext cx="6492240" cy="365760"/>
+          </a:xfrm>
+          <a:prstGeom prst="rect">
+            <a:avLst/>
+          </a:prstGeom>
+          <a:noFill/>
+        </p:spPr>
+        <p:txBody>
+          <a:bodyPr wrap="square" lIns="0" tIns="0" rIns="0" bIns="0">
+            <a:spAutoFit/>
+          </a:bodyPr>
+          <a:lstStyle/>
+          <a:p>
+            <a:pPr algn="l">
+              <a:lnSpc>
+                <a:spcPct val="100000"/>
+              </a:lnSpc>
+              <a:spcAft>
+                <a:spcPts val="0"/>
+              </a:spcAft>
+              <a:defRPr sz="1600" b="1">
+                <a:solidFill>
+                  <a:srgbClr val="0E7C86"/>
+                </a:solidFill>
+                <a:latin typeface="Calibri"/>
+              </a:defRPr>
+            </a:pPr>
+            <a:r>
+              <a:rPr sz="1600" b="1">
+                <a:solidFill>
+                  <a:srgbClr val="0E7C86"/>
+                </a:solidFill>
+                <a:latin typeface="Calibri"/>
+              </a:rPr>
+              <a:t>LESSON 3</a:t>
+            </a:r>
+          </a:p>
+        </p:txBody>
+      </p:sp>
+      <p:sp>
+        <p:nvSpPr>
+          <p:cNvPr id="5" name="TextBox 4"/>
+          <p:cNvSpPr txBox="1"/>
+          <p:nvPr/>
+        </p:nvSpPr>
+        <p:spPr>
+          <a:xfrm>
+            <a:off x="502920" y="1481328"/>
+            <a:ext cx="6492240" cy="1554480"/>
+          </a:xfrm>
+          <a:prstGeom prst="rect">
+            <a:avLst/>
+          </a:prstGeom>
+          <a:noFill/>
+        </p:spPr>
+        <p:txBody>
+          <a:bodyPr wrap="square" lIns="0" tIns="0" rIns="0" bIns="0">
+            <a:spAutoFit/>
+          </a:bodyPr>
+          <a:lstStyle/>
+          <a:p>
+            <a:pPr algn="l">
+              <a:lnSpc>
+                <a:spcPct val="95000"/>
+              </a:lnSpc>
+              <a:spcAft>
+                <a:spcPts val="0"/>
+              </a:spcAft>
+              <a:defRPr sz="4000" b="1">
+                <a:solidFill>
+                  <a:srgbClr val="1F3A5F"/>
+                </a:solidFill>
+                <a:latin typeface="Calibri"/>
+              </a:defRPr>
+            </a:pPr>
+            <a:r>
+              <a:rPr sz="4000" b="1">
+                <a:solidFill>
+                  <a:srgbClr val="1F3A5F"/>
+                </a:solidFill>
+                <a:latin typeface="Calibri"/>
+              </a:rPr>
+              <a:t>Controller Programming</a:t>
+            </a:r>
+          </a:p>
+        </p:txBody>
+      </p:sp>
+      <p:sp>
+        <p:nvSpPr>
+          <p:cNvPr id="6" name="TextBox 5"/>
+          <p:cNvSpPr txBox="1"/>
+          <p:nvPr/>
+        </p:nvSpPr>
+        <p:spPr>
+          <a:xfrm>
+            <a:off x="502920" y="3154680"/>
+            <a:ext cx="6492240" cy="960120"/>
+          </a:xfrm>
+          <a:prstGeom prst="rect">
+            <a:avLst/>
+          </a:prstGeom>
+          <a:noFill/>
+        </p:spPr>
+        <p:txBody>
+          <a:bodyPr wrap="square" lIns="0" tIns="0" rIns="0" bIns="0">
+            <a:spAutoFit/>
+          </a:bodyPr>
+          <a:lstStyle/>
+          <a:p>
+            <a:pPr algn="l">
+              <a:lnSpc>
+                <a:spcPct val="100000"/>
+              </a:lnSpc>
+              <a:spcAft>
+                <a:spcPts val="0"/>
+              </a:spcAft>
+              <a:defRPr sz="1700" b="0">
+                <a:solidFill>
+                  <a:srgbClr val="222222"/>
+                </a:solidFill>
+                <a:latin typeface="Calibri"/>
+              </a:defRPr>
+            </a:pPr>
+            <a:r>
+              <a:rPr sz="1700" b="0">
+                <a:solidFill>
+                  <a:srgbClr val="222222"/>
+                </a:solidFill>
+                <a:latin typeface="Calibri"/>
+              </a:rPr>
+              <a:t>Bluetooth, thumbsticks, deadzones, and turning a number from your thumb into a speed for four wheels.</a:t>
+            </a:r>
+          </a:p>
+        </p:txBody>
+      </p:sp>
+      <p:sp>
+        <p:nvSpPr>
+          <p:cNvPr id="7" name="TextBox 6"/>
+          <p:cNvSpPr txBox="1"/>
+          <p:nvPr/>
+        </p:nvSpPr>
+        <p:spPr>
+          <a:xfrm>
+            <a:off x="502920" y="3931920"/>
+            <a:ext cx="6492240" cy="2148840"/>
+          </a:xfrm>
+          <a:prstGeom prst="rect">
+            <a:avLst/>
+          </a:prstGeom>
+          <a:noFill/>
+        </p:spPr>
+        <p:txBody>
+          <a:bodyPr wrap="square" lIns="0" tIns="0" rIns="0" bIns="0">
+            <a:spAutoFit/>
+          </a:bodyPr>
+          <a:lstStyle/>
+          <a:p>
+            <a:pPr algn="l">
+              <a:lnSpc>
+                <a:spcPct val="100000"/>
+              </a:lnSpc>
+              <a:spcAft>
+                <a:spcPts val="100"/>
+              </a:spcAft>
+              <a:defRPr sz="1200" b="0">
+                <a:solidFill>
+                  <a:srgbClr val="666666"/>
+                </a:solidFill>
+                <a:latin typeface="Calibri"/>
+              </a:defRPr>
+            </a:pPr>
+            <a:r>
+              <a:rPr sz="1200" b="0">
+                <a:solidFill>
+                  <a:srgbClr val="666666"/>
+                </a:solidFill>
+                <a:latin typeface="Calibri"/>
+              </a:rPr>
+              <a:t>PORPOISE ROBOTICS  -  Precision Oceanographic Program On and In the Sea Environment</a:t>
+            </a:r>
+          </a:p>
+          <a:p>
+            <a:pPr algn="l">
+              <a:lnSpc>
+                <a:spcPct val="100000"/>
+              </a:lnSpc>
+              <a:spcAft>
+                <a:spcPts val="100"/>
+              </a:spcAft>
+              <a:defRPr sz="1200" b="0">
+                <a:solidFill>
+                  <a:srgbClr val="666666"/>
+                </a:solidFill>
+                <a:latin typeface="Calibri"/>
+              </a:defRPr>
+            </a:pPr>
+            <a:r>
+              <a:rPr sz="1200" b="0">
+                <a:solidFill>
+                  <a:srgbClr val="666666"/>
+                </a:solidFill>
+                <a:latin typeface="Calibri"/>
+              </a:rPr>
+              <a:t>porpoiserobotics.org</a:t>
+            </a:r>
+          </a:p>
+          <a:p>
+            <a:pPr algn="l">
+              <a:lnSpc>
+                <a:spcPct val="100000"/>
+              </a:lnSpc>
+              <a:spcAft>
+                <a:spcPts val="100"/>
+              </a:spcAft>
+              <a:defRPr sz="600" b="0">
+                <a:solidFill>
+                  <a:srgbClr val="666666"/>
+                </a:solidFill>
+                <a:latin typeface="Calibri"/>
+              </a:defRPr>
+            </a:pPr>
+          </a:p>
+          <a:p>
+            <a:pPr algn="l">
+              <a:lnSpc>
+                <a:spcPct val="100000"/>
+              </a:lnSpc>
+              <a:spcAft>
+                <a:spcPts val="100"/>
+              </a:spcAft>
+              <a:defRPr sz="1200" b="0">
+                <a:solidFill>
+                  <a:srgbClr val="666666"/>
+                </a:solidFill>
+                <a:latin typeface="Calibri"/>
+              </a:defRPr>
+            </a:pPr>
+            <a:r>
+              <a:rPr sz="1200" b="0">
+                <a:solidFill>
+                  <a:srgbClr val="666666"/>
+                </a:solidFill>
+                <a:latin typeface="Calibri"/>
+              </a:rPr>
+              <a:t>Kevin Bowen, President  -  kbowen6@icloud.com</a:t>
+            </a:r>
+          </a:p>
+          <a:p>
+            <a:pPr algn="l">
+              <a:lnSpc>
+                <a:spcPct val="100000"/>
+              </a:lnSpc>
+              <a:spcAft>
+                <a:spcPts val="100"/>
+              </a:spcAft>
+              <a:defRPr sz="1200" b="0">
+                <a:solidFill>
+                  <a:srgbClr val="666666"/>
+                </a:solidFill>
+                <a:latin typeface="Calibri"/>
+              </a:defRPr>
+            </a:pPr>
+            <a:r>
+              <a:rPr sz="1200" b="0">
+                <a:solidFill>
+                  <a:srgbClr val="666666"/>
+                </a:solidFill>
+                <a:latin typeface="Calibri"/>
+              </a:rPr>
+              <a:t>Malcom Graham, VP Education      Louis Parker, VP Technology</a:t>
+            </a:r>
+          </a:p>
+          <a:p>
+            <a:pPr algn="l">
+              <a:lnSpc>
+                <a:spcPct val="100000"/>
+              </a:lnSpc>
+              <a:spcAft>
+                <a:spcPts val="100"/>
+              </a:spcAft>
+              <a:defRPr sz="1200" b="0">
+                <a:solidFill>
+                  <a:srgbClr val="666666"/>
+                </a:solidFill>
+                <a:latin typeface="Calibri"/>
+              </a:defRPr>
+            </a:pPr>
+            <a:r>
+              <a:rPr sz="1200" b="0">
+                <a:solidFill>
+                  <a:srgbClr val="666666"/>
+                </a:solidFill>
+                <a:latin typeface="Calibri"/>
+              </a:rPr>
+              <a:t>Valen Farre, System Engineer      Gary Howland, Animation</a:t>
+            </a:r>
+          </a:p>
+          <a:p>
+            <a:pPr algn="l">
+              <a:lnSpc>
+                <a:spcPct val="100000"/>
+              </a:lnSpc>
+              <a:spcAft>
+                <a:spcPts val="100"/>
+              </a:spcAft>
+              <a:defRPr sz="1200" b="0">
+                <a:solidFill>
+                  <a:srgbClr val="666666"/>
+                </a:solidFill>
+                <a:latin typeface="Calibri"/>
+              </a:defRPr>
+            </a:pPr>
+            <a:r>
+              <a:rPr sz="1200" b="0">
+                <a:solidFill>
+                  <a:srgbClr val="666666"/>
+                </a:solidFill>
+                <a:latin typeface="Calibri"/>
+              </a:rPr>
+              <a:t>Eddie Revollo, Artificial Intelligence</a:t>
+            </a:r>
+          </a:p>
+          <a:p>
+            <a:pPr algn="l">
+              <a:lnSpc>
+                <a:spcPct val="100000"/>
+              </a:lnSpc>
+              <a:spcAft>
+                <a:spcPts val="100"/>
+              </a:spcAft>
+              <a:defRPr sz="1200" b="0">
+                <a:solidFill>
+                  <a:srgbClr val="666666"/>
+                </a:solidFill>
+                <a:latin typeface="Calibri"/>
+              </a:defRPr>
+            </a:pPr>
+            <a:r>
+              <a:rPr sz="1200" b="0">
+                <a:solidFill>
+                  <a:srgbClr val="666666"/>
+                </a:solidFill>
+                <a:latin typeface="Calibri"/>
+              </a:rPr>
+              <a:t>Interns: Oscar Canazales, Krishnansh Vemulapalli, Soham Gangal, Erik Olsen</a:t>
+            </a:r>
+          </a:p>
+          <a:p>
+            <a:pPr algn="l">
+              <a:lnSpc>
+                <a:spcPct val="100000"/>
+              </a:lnSpc>
+              <a:spcAft>
+                <a:spcPts val="100"/>
+              </a:spcAft>
+              <a:defRPr sz="600" b="0">
+                <a:solidFill>
+                  <a:srgbClr val="666666"/>
+                </a:solidFill>
+                <a:latin typeface="Calibri"/>
+              </a:defRPr>
+            </a:pPr>
+          </a:p>
+          <a:p>
+            <a:pPr algn="l">
+              <a:lnSpc>
+                <a:spcPct val="100000"/>
+              </a:lnSpc>
+              <a:spcAft>
+                <a:spcPts val="100"/>
+              </a:spcAft>
+              <a:defRPr sz="1200" b="0">
+                <a:solidFill>
+                  <a:srgbClr val="666666"/>
+                </a:solidFill>
+                <a:latin typeface="Calibri"/>
+              </a:defRPr>
+            </a:pPr>
+            <a:r>
+              <a:rPr sz="1200" b="0">
+                <a:solidFill>
+                  <a:srgbClr val="666666"/>
+                </a:solidFill>
+                <a:latin typeface="Calibri"/>
+              </a:rPr>
+              <a:t>Three hours.  Bring the PS3 controller paired to your vehicle.</a:t>
+            </a:r>
+          </a:p>
+        </p:txBody>
+      </p:sp>
+      <p:pic>
+        <p:nvPicPr>
+          <p:cNvPr id="8" name="Picture 7" descr="vehicle-with-ps3-controller.jpg"/>
           <p:cNvPicPr>
             <a:picLocks noChangeAspect="1"/>
           </p:cNvPicPr>
@@ -5687,441 +6536,6 @@
         </p:blipFill>
         <p:spPr>
           <a:xfrm>
-            <a:off x="10922762" y="457200"/>
-            <a:ext cx="766013" cy="777240"/>
-          </a:xfrm>
-          <a:prstGeom prst="rect">
-            <a:avLst/>
-          </a:prstGeom>
-        </p:spPr>
-      </p:pic>
-      <p:sp>
-        <p:nvSpPr>
-          <p:cNvPr id="4" name="TextBox 3"/>
-          <p:cNvSpPr txBox="1"/>
-          <p:nvPr/>
-        </p:nvSpPr>
-        <p:spPr>
-          <a:xfrm>
-            <a:off x="502920" y="1051560"/>
-            <a:ext cx="6492240" cy="365760"/>
-          </a:xfrm>
-          <a:prstGeom prst="rect">
-            <a:avLst/>
-          </a:prstGeom>
-          <a:noFill/>
-        </p:spPr>
-        <p:txBody>
-          <a:bodyPr wrap="square" lIns="0" tIns="0" rIns="0" bIns="0">
-            <a:spAutoFit/>
-          </a:bodyPr>
-          <a:lstStyle/>
-          <a:p>
-            <a:pPr algn="l">
-              <a:lnSpc>
-                <a:spcPct val="100000"/>
-              </a:lnSpc>
-              <a:spcAft>
-                <a:spcPts val="0"/>
-              </a:spcAft>
-              <a:defRPr sz="1600" b="1">
-                <a:solidFill>
-                  <a:srgbClr val="0E7C86"/>
-                </a:solidFill>
-                <a:latin typeface="Calibri"/>
-              </a:defRPr>
-            </a:pPr>
-            <a:r>
-              <a:rPr sz="1600" b="1">
-                <a:solidFill>
-                  <a:srgbClr val="0E7C86"/>
-                </a:solidFill>
-                <a:latin typeface="Calibri"/>
-              </a:rPr>
-              <a:t>LESSON 3</a:t>
-            </a:r>
-          </a:p>
-        </p:txBody>
-      </p:sp>
-      <p:sp>
-        <p:nvSpPr>
-          <p:cNvPr id="5" name="TextBox 4"/>
-          <p:cNvSpPr txBox="1"/>
-          <p:nvPr/>
-        </p:nvSpPr>
-        <p:spPr>
-          <a:xfrm>
-            <a:off x="502920" y="1481328"/>
-            <a:ext cx="6492240" cy="1554480"/>
-          </a:xfrm>
-          <a:prstGeom prst="rect">
-            <a:avLst/>
-          </a:prstGeom>
-          <a:noFill/>
-        </p:spPr>
-        <p:txBody>
-          <a:bodyPr wrap="square" lIns="0" tIns="0" rIns="0" bIns="0">
-            <a:spAutoFit/>
-          </a:bodyPr>
-          <a:lstStyle/>
-          <a:p>
-            <a:pPr algn="l">
-              <a:lnSpc>
-                <a:spcPct val="95000"/>
-              </a:lnSpc>
-              <a:spcAft>
-                <a:spcPts val="0"/>
-              </a:spcAft>
-              <a:defRPr sz="4000" b="1">
-                <a:solidFill>
-                  <a:srgbClr val="1F3A5F"/>
-                </a:solidFill>
-                <a:latin typeface="Calibri"/>
-              </a:defRPr>
-            </a:pPr>
-            <a:r>
-              <a:rPr sz="4000" b="1">
-                <a:solidFill>
-                  <a:srgbClr val="1F3A5F"/>
-                </a:solidFill>
-                <a:latin typeface="Calibri"/>
-              </a:rPr>
-              <a:t>Controller Programming</a:t>
-            </a:r>
-          </a:p>
-        </p:txBody>
-      </p:sp>
-      <p:sp>
-        <p:nvSpPr>
-          <p:cNvPr id="6" name="TextBox 5"/>
-          <p:cNvSpPr txBox="1"/>
-          <p:nvPr/>
-        </p:nvSpPr>
-        <p:spPr>
-          <a:xfrm>
-            <a:off x="502920" y="3154680"/>
-            <a:ext cx="6492240" cy="960120"/>
-          </a:xfrm>
-          <a:prstGeom prst="rect">
-            <a:avLst/>
-          </a:prstGeom>
-          <a:noFill/>
-        </p:spPr>
-        <p:txBody>
-          <a:bodyPr wrap="square" lIns="0" tIns="0" rIns="0" bIns="0">
-            <a:spAutoFit/>
-          </a:bodyPr>
-          <a:lstStyle/>
-          <a:p>
-            <a:pPr algn="l">
-              <a:lnSpc>
-                <a:spcPct val="100000"/>
-              </a:lnSpc>
-              <a:spcAft>
-                <a:spcPts val="0"/>
-              </a:spcAft>
-              <a:defRPr sz="1700" b="0">
-                <a:solidFill>
-                  <a:srgbClr val="222222"/>
-                </a:solidFill>
-                <a:latin typeface="Calibri"/>
-              </a:defRPr>
-            </a:pPr>
-            <a:r>
-              <a:rPr sz="1700" b="0">
-                <a:solidFill>
-                  <a:srgbClr val="222222"/>
-                </a:solidFill>
-                <a:latin typeface="Calibri"/>
-              </a:rPr>
-              <a:t>Bluetooth, thumbsticks, deadzones, and turning a number from your thumb into a speed for four wheels.</a:t>
-            </a:r>
-          </a:p>
-        </p:txBody>
-      </p:sp>
-      <p:sp>
-        <p:nvSpPr>
-          <p:cNvPr id="7" name="TextBox 6"/>
-          <p:cNvSpPr txBox="1"/>
-          <p:nvPr/>
-        </p:nvSpPr>
-        <p:spPr>
-          <a:xfrm>
-            <a:off x="502920" y="3931920"/>
-            <a:ext cx="6492240" cy="2148840"/>
-          </a:xfrm>
-          <a:prstGeom prst="rect">
-            <a:avLst/>
-          </a:prstGeom>
-          <a:noFill/>
-        </p:spPr>
-        <p:txBody>
-          <a:bodyPr wrap="square" lIns="0" tIns="0" rIns="0" bIns="0">
-            <a:spAutoFit/>
-          </a:bodyPr>
-          <a:lstStyle/>
-          <a:p>
-            <a:pPr algn="l">
-              <a:lnSpc>
-                <a:spcPct val="100000"/>
-              </a:lnSpc>
-              <a:spcAft>
-                <a:spcPts val="100"/>
-              </a:spcAft>
-              <a:defRPr sz="1200" b="0">
-                <a:solidFill>
-                  <a:srgbClr val="666666"/>
-                </a:solidFill>
-                <a:latin typeface="Calibri"/>
-              </a:defRPr>
-            </a:pPr>
-            <a:r>
-              <a:rPr sz="1200" b="0">
-                <a:solidFill>
-                  <a:srgbClr val="666666"/>
-                </a:solidFill>
-                <a:latin typeface="Calibri"/>
-              </a:rPr>
-              <a:t>PORPOISE ROBOTICS  -  Precision Oceanographic Program On and In the Sea Environment</a:t>
-            </a:r>
-          </a:p>
-          <a:p>
-            <a:pPr algn="l">
-              <a:lnSpc>
-                <a:spcPct val="100000"/>
-              </a:lnSpc>
-              <a:spcAft>
-                <a:spcPts val="100"/>
-              </a:spcAft>
-              <a:defRPr sz="1200" b="0">
-                <a:solidFill>
-                  <a:srgbClr val="666666"/>
-                </a:solidFill>
-                <a:latin typeface="Calibri"/>
-              </a:defRPr>
-            </a:pPr>
-            <a:r>
-              <a:rPr sz="1200" b="0">
-                <a:solidFill>
-                  <a:srgbClr val="666666"/>
-                </a:solidFill>
-                <a:latin typeface="Calibri"/>
-              </a:rPr>
-              <a:t>porpoiserobotics.org</a:t>
-            </a:r>
-          </a:p>
-          <a:p>
-            <a:pPr algn="l">
-              <a:lnSpc>
-                <a:spcPct val="100000"/>
-              </a:lnSpc>
-              <a:spcAft>
-                <a:spcPts val="100"/>
-              </a:spcAft>
-              <a:defRPr sz="600" b="0">
-                <a:solidFill>
-                  <a:srgbClr val="666666"/>
-                </a:solidFill>
-                <a:latin typeface="Calibri"/>
-              </a:defRPr>
-            </a:pPr>
-            <a:endParaRPr sz="1200" b="0">
-              <a:solidFill>
-                <a:srgbClr val="666666"/>
-              </a:solidFill>
-              <a:latin typeface="Calibri"/>
-            </a:endParaRPr>
-          </a:p>
-          <a:p>
-            <a:pPr algn="l">
-              <a:lnSpc>
-                <a:spcPct val="100000"/>
-              </a:lnSpc>
-              <a:spcAft>
-                <a:spcPts val="100"/>
-              </a:spcAft>
-              <a:defRPr sz="1200" b="0">
-                <a:solidFill>
-                  <a:srgbClr val="666666"/>
-                </a:solidFill>
-                <a:latin typeface="Calibri"/>
-              </a:defRPr>
-            </a:pPr>
-            <a:r>
-              <a:rPr sz="1200" b="0">
-                <a:solidFill>
-                  <a:srgbClr val="666666"/>
-                </a:solidFill>
-                <a:latin typeface="Calibri"/>
-              </a:rPr>
-              <a:t>Kevin Bowen, President  -  kbowen6@icloud.com</a:t>
-            </a:r>
-          </a:p>
-          <a:p>
-            <a:pPr algn="l">
-              <a:lnSpc>
-                <a:spcPct val="100000"/>
-              </a:lnSpc>
-              <a:spcAft>
-                <a:spcPts val="100"/>
-              </a:spcAft>
-              <a:defRPr sz="1200" b="0">
-                <a:solidFill>
-                  <a:srgbClr val="666666"/>
-                </a:solidFill>
-                <a:latin typeface="Calibri"/>
-              </a:defRPr>
-            </a:pPr>
-            <a:r>
-              <a:rPr sz="1200" b="0">
-                <a:solidFill>
-                  <a:srgbClr val="666666"/>
-                </a:solidFill>
-                <a:latin typeface="Calibri"/>
-              </a:rPr>
-              <a:t>Malcom Graham, VP Education      Louis Parker, VP Technology</a:t>
-            </a:r>
-          </a:p>
-          <a:p>
-            <a:pPr algn="l">
-              <a:lnSpc>
-                <a:spcPct val="100000"/>
-              </a:lnSpc>
-              <a:spcAft>
-                <a:spcPts val="100"/>
-              </a:spcAft>
-              <a:defRPr sz="1200" b="0">
-                <a:solidFill>
-                  <a:srgbClr val="666666"/>
-                </a:solidFill>
-                <a:latin typeface="Calibri"/>
-              </a:defRPr>
-            </a:pPr>
-            <a:r>
-              <a:rPr sz="1200" b="0">
-                <a:solidFill>
-                  <a:srgbClr val="666666"/>
-                </a:solidFill>
-                <a:latin typeface="Calibri"/>
-              </a:rPr>
-              <a:t>Valen Farre, System Engineer      Gary Howland, Animation</a:t>
-            </a:r>
-          </a:p>
-          <a:p>
-            <a:pPr algn="l">
-              <a:lnSpc>
-                <a:spcPct val="100000"/>
-              </a:lnSpc>
-              <a:spcAft>
-                <a:spcPts val="100"/>
-              </a:spcAft>
-              <a:defRPr sz="1200" b="0">
-                <a:solidFill>
-                  <a:srgbClr val="666666"/>
-                </a:solidFill>
-                <a:latin typeface="Calibri"/>
-              </a:defRPr>
-            </a:pPr>
-            <a:r>
-              <a:rPr sz="1200" b="0">
-                <a:solidFill>
-                  <a:srgbClr val="666666"/>
-                </a:solidFill>
-                <a:latin typeface="Calibri"/>
-              </a:rPr>
-              <a:t>Eddie Revollo, Artificial Intelligence</a:t>
-            </a:r>
-          </a:p>
-          <a:p>
-            <a:pPr algn="l">
-              <a:lnSpc>
-                <a:spcPct val="100000"/>
-              </a:lnSpc>
-              <a:spcAft>
-                <a:spcPts val="100"/>
-              </a:spcAft>
-              <a:defRPr sz="1200" b="0">
-                <a:solidFill>
-                  <a:srgbClr val="666666"/>
-                </a:solidFill>
-                <a:latin typeface="Calibri"/>
-              </a:defRPr>
-            </a:pPr>
-            <a:r>
-              <a:rPr sz="1200" b="0">
-                <a:solidFill>
-                  <a:srgbClr val="666666"/>
-                </a:solidFill>
-                <a:latin typeface="Calibri"/>
-              </a:rPr>
-              <a:t>Interns: Oscar Canazales, Krishnansh Vemulapalli, Soham Gangal, Erik Olsen</a:t>
-            </a:r>
-          </a:p>
-          <a:p>
-            <a:pPr algn="l">
-              <a:lnSpc>
-                <a:spcPct val="100000"/>
-              </a:lnSpc>
-              <a:spcAft>
-                <a:spcPts val="100"/>
-              </a:spcAft>
-              <a:defRPr sz="600" b="0">
-                <a:solidFill>
-                  <a:srgbClr val="666666"/>
-                </a:solidFill>
-                <a:latin typeface="Calibri"/>
-              </a:defRPr>
-            </a:pPr>
-            <a:endParaRPr sz="1200" b="0">
-              <a:solidFill>
-                <a:srgbClr val="666666"/>
-              </a:solidFill>
-              <a:latin typeface="Calibri"/>
-            </a:endParaRPr>
-          </a:p>
-          <a:p>
-            <a:pPr algn="l">
-              <a:lnSpc>
-                <a:spcPct val="100000"/>
-              </a:lnSpc>
-              <a:spcAft>
-                <a:spcPts val="100"/>
-              </a:spcAft>
-              <a:defRPr sz="1200" b="0">
-                <a:solidFill>
-                  <a:srgbClr val="666666"/>
-                </a:solidFill>
-                <a:latin typeface="Calibri"/>
-              </a:defRPr>
-            </a:pPr>
-            <a:r>
-              <a:rPr sz="1200" b="0">
-                <a:solidFill>
-                  <a:srgbClr val="666666"/>
-                </a:solidFill>
-                <a:latin typeface="Calibri"/>
-              </a:rPr>
-              <a:t>Three hours.  Bring the PS3 controller paired to your vehicle.</a:t>
-            </a:r>
-          </a:p>
-        </p:txBody>
-      </p:sp>
-      <p:pic>
-        <p:nvPicPr>
-          <p:cNvPr id="8" name="Picture 7" descr="vehicle-with-ps3-controller.jpg"/>
-          <p:cNvPicPr>
-            <a:picLocks noChangeAspect="1"/>
-          </p:cNvPicPr>
-          <p:nvPr/>
-        </p:nvPicPr>
-        <p:blipFill>
-          <a:blip r:embed="rId4"/>
-          <a:stretch>
-            <a:fillRect/>
-          </a:stretch>
-        </p:blipFill>
-        <p:spPr>
-          <a:xfrm>
             <a:off x="7223760" y="2023110"/>
             <a:ext cx="4480560" cy="3360420"/>
           </a:xfrm>
@@ -6187,7 +6601,7 @@
 </file>
 
 <file path=ppt/slides/slide10.xml><?xml version="1.0" encoding="utf-8"?>
-<p:sld xmlns:a="http://schemas.openxmlformats.org/drawingml/2006/main" xmlns:r="http://schemas.openxmlformats.org/officeDocument/2006/relationships" xmlns:p="http://schemas.openxmlformats.org/presentationml/2006/main">
+<p:sld xmlns:a="http://schemas.openxmlformats.org/drawingml/2006/main" xmlns:p="http://schemas.openxmlformats.org/presentationml/2006/main" xmlns:r="http://schemas.openxmlformats.org/officeDocument/2006/relationships">
   <p:cSld>
     <p:spTree>
       <p:nvGrpSpPr>
@@ -6195,14 +6609,7 @@
         <p:cNvGrpSpPr/>
         <p:nvPr/>
       </p:nvGrpSpPr>
-      <p:grpSpPr>
-        <a:xfrm>
-          <a:off x="0" y="0"/>
-          <a:ext cx="0" cy="0"/>
-          <a:chOff x="0" y="0"/>
-          <a:chExt cx="0" cy="0"/>
-        </a:xfrm>
-      </p:grpSpPr>
+      <p:grpSpPr/>
       <p:sp>
         <p:nvSpPr>
           <p:cNvPr id="2" name="Title 1"/>
@@ -6290,7 +6697,6 @@
           <a:lstStyle/>
           <a:p>
             <a:pPr algn="ctr"/>
-            <a:endParaRPr/>
           </a:p>
         </p:txBody>
       </p:sp>
@@ -6451,12 +6857,6 @@
                 <a:latin typeface="Calibri"/>
               </a:defRPr>
             </a:pPr>
-            <a:endParaRPr sz="2000" b="0">
-              <a:solidFill>
-                <a:srgbClr val="222222"/>
-              </a:solidFill>
-              <a:latin typeface="Calibri"/>
-            </a:endParaRPr>
           </a:p>
           <a:p>
             <a:pPr algn="l">
@@ -6696,12 +7096,6 @@
                 <a:latin typeface="Calibri"/>
               </a:defRPr>
             </a:pPr>
-            <a:endParaRPr sz="1900" b="0">
-              <a:solidFill>
-                <a:srgbClr val="222222"/>
-              </a:solidFill>
-              <a:latin typeface="Calibri"/>
-            </a:endParaRPr>
           </a:p>
           <a:p>
             <a:pPr algn="l">
@@ -6771,7 +7165,7 @@
           </a:fontRef>
         </p:style>
         <p:txBody>
-          <a:bodyPr wrap="square" lIns="164592" tIns="73152" rIns="164592" bIns="73152" rtlCol="0" anchor="ctr"/>
+          <a:bodyPr rtlCol="0" anchor="ctr" wrap="square" lIns="164592" rIns="164592" tIns="73152" bIns="73152"/>
           <a:lstStyle/>
           <a:p>
             <a:pPr algn="l"/>
@@ -6805,7 +7199,7 @@
 </file>
 
 <file path=ppt/slides/slide11.xml><?xml version="1.0" encoding="utf-8"?>
-<p:sld xmlns:a="http://schemas.openxmlformats.org/drawingml/2006/main" xmlns:r="http://schemas.openxmlformats.org/officeDocument/2006/relationships" xmlns:p="http://schemas.openxmlformats.org/presentationml/2006/main">
+<p:sld xmlns:a="http://schemas.openxmlformats.org/drawingml/2006/main" xmlns:p="http://schemas.openxmlformats.org/presentationml/2006/main" xmlns:r="http://schemas.openxmlformats.org/officeDocument/2006/relationships">
   <p:cSld>
     <p:spTree>
       <p:nvGrpSpPr>
@@ -6813,14 +7207,7 @@
         <p:cNvGrpSpPr/>
         <p:nvPr/>
       </p:nvGrpSpPr>
-      <p:grpSpPr>
-        <a:xfrm>
-          <a:off x="0" y="0"/>
-          <a:ext cx="0" cy="0"/>
-          <a:chOff x="0" y="0"/>
-          <a:chExt cx="0" cy="0"/>
-        </a:xfrm>
-      </p:grpSpPr>
+      <p:grpSpPr/>
       <p:sp>
         <p:nvSpPr>
           <p:cNvPr id="2" name="Title 1"/>
@@ -6908,7 +7295,6 @@
           <a:lstStyle/>
           <a:p>
             <a:pPr algn="ctr"/>
-            <a:endParaRPr/>
           </a:p>
         </p:txBody>
       </p:sp>
@@ -7145,7 +7531,7 @@
           </a:fontRef>
         </p:style>
         <p:txBody>
-          <a:bodyPr wrap="square" lIns="45720" tIns="18288" rIns="45720" bIns="18288" rtlCol="0" anchor="ctr"/>
+          <a:bodyPr rtlCol="0" anchor="ctr" wrap="square" lIns="45720" rIns="45720" tIns="18288" bIns="18288"/>
           <a:lstStyle/>
           <a:p>
             <a:pPr algn="ctr">
@@ -7359,7 +7745,7 @@
           </a:fontRef>
         </p:style>
         <p:txBody>
-          <a:bodyPr wrap="square" lIns="45720" tIns="18288" rIns="45720" bIns="18288" rtlCol="0" anchor="ctr"/>
+          <a:bodyPr rtlCol="0" anchor="ctr" wrap="square" lIns="45720" rIns="45720" tIns="18288" bIns="18288"/>
           <a:lstStyle/>
           <a:p>
             <a:pPr algn="ctr">
@@ -7525,7 +7911,7 @@
           </a:fontRef>
         </p:style>
         <p:txBody>
-          <a:bodyPr wrap="square" lIns="45720" tIns="18288" rIns="45720" bIns="18288" rtlCol="0" anchor="ctr"/>
+          <a:bodyPr rtlCol="0" anchor="ctr" wrap="square" lIns="45720" rIns="45720" tIns="18288" bIns="18288"/>
           <a:lstStyle/>
           <a:p>
             <a:pPr algn="ctr">
@@ -7691,7 +8077,7 @@
           </a:fontRef>
         </p:style>
         <p:txBody>
-          <a:bodyPr wrap="square" lIns="45720" tIns="18288" rIns="45720" bIns="18288" rtlCol="0" anchor="ctr"/>
+          <a:bodyPr rtlCol="0" anchor="ctr" wrap="square" lIns="45720" rIns="45720" tIns="18288" bIns="18288"/>
           <a:lstStyle/>
           <a:p>
             <a:pPr algn="ctr">
@@ -7857,7 +8243,7 @@
           </a:fontRef>
         </p:style>
         <p:txBody>
-          <a:bodyPr wrap="square" lIns="45720" tIns="18288" rIns="45720" bIns="18288" rtlCol="0" anchor="ctr"/>
+          <a:bodyPr rtlCol="0" anchor="ctr" wrap="square" lIns="45720" rIns="45720" tIns="18288" bIns="18288"/>
           <a:lstStyle/>
           <a:p>
             <a:pPr algn="ctr">
@@ -8023,7 +8409,7 @@
           </a:fontRef>
         </p:style>
         <p:txBody>
-          <a:bodyPr wrap="square" lIns="45720" tIns="18288" rIns="45720" bIns="18288" rtlCol="0" anchor="ctr"/>
+          <a:bodyPr rtlCol="0" anchor="ctr" wrap="square" lIns="45720" rIns="45720" tIns="18288" bIns="18288"/>
           <a:lstStyle/>
           <a:p>
             <a:pPr algn="ctr">
@@ -8237,7 +8623,7 @@
           </a:fontRef>
         </p:style>
         <p:txBody>
-          <a:bodyPr wrap="square" lIns="45720" tIns="18288" rIns="45720" bIns="18288" rtlCol="0" anchor="ctr"/>
+          <a:bodyPr rtlCol="0" anchor="ctr" wrap="square" lIns="45720" rIns="45720" tIns="18288" bIns="18288"/>
           <a:lstStyle/>
           <a:p>
             <a:pPr algn="ctr">
@@ -8307,7 +8693,7 @@
           </a:fontRef>
         </p:style>
         <p:txBody>
-          <a:bodyPr wrap="square" lIns="45720" tIns="18288" rIns="45720" bIns="18288" rtlCol="0" anchor="ctr"/>
+          <a:bodyPr rtlCol="0" anchor="ctr" wrap="square" lIns="45720" rIns="45720" tIns="18288" bIns="18288"/>
           <a:lstStyle/>
           <a:p>
             <a:pPr algn="ctr">
@@ -8377,7 +8763,7 @@
           </a:fontRef>
         </p:style>
         <p:txBody>
-          <a:bodyPr wrap="square" lIns="164592" tIns="73152" rIns="164592" bIns="73152" rtlCol="0" anchor="ctr"/>
+          <a:bodyPr rtlCol="0" anchor="ctr" wrap="square" lIns="164592" rIns="164592" tIns="73152" bIns="73152"/>
           <a:lstStyle/>
           <a:p>
             <a:pPr algn="l"/>
@@ -8411,7 +8797,7 @@
 </file>
 
 <file path=ppt/slides/slide12.xml><?xml version="1.0" encoding="utf-8"?>
-<p:sld xmlns:a="http://schemas.openxmlformats.org/drawingml/2006/main" xmlns:r="http://schemas.openxmlformats.org/officeDocument/2006/relationships" xmlns:p="http://schemas.openxmlformats.org/presentationml/2006/main">
+<p:sld xmlns:a="http://schemas.openxmlformats.org/drawingml/2006/main" xmlns:p="http://schemas.openxmlformats.org/presentationml/2006/main" xmlns:r="http://schemas.openxmlformats.org/officeDocument/2006/relationships">
   <p:cSld>
     <p:spTree>
       <p:nvGrpSpPr>
@@ -8419,14 +8805,7 @@
         <p:cNvGrpSpPr/>
         <p:nvPr/>
       </p:nvGrpSpPr>
-      <p:grpSpPr>
-        <a:xfrm>
-          <a:off x="0" y="0"/>
-          <a:ext cx="0" cy="0"/>
-          <a:chOff x="0" y="0"/>
-          <a:chExt cx="0" cy="0"/>
-        </a:xfrm>
-      </p:grpSpPr>
+      <p:grpSpPr/>
       <p:sp>
         <p:nvSpPr>
           <p:cNvPr id="2" name="TextBox 1"/>
@@ -8564,7 +8943,6 @@
           <a:lstStyle/>
           <a:p>
             <a:pPr algn="ctr"/>
-            <a:endParaRPr/>
           </a:p>
         </p:txBody>
       </p:sp>
@@ -8705,7 +9083,7 @@
           </a:fontRef>
         </p:style>
         <p:txBody>
-          <a:bodyPr wrap="square" lIns="73152" rIns="73152" rtlCol="0" anchor="ctr"/>
+          <a:bodyPr rtlCol="0" anchor="ctr" wrap="square" lIns="73152" rIns="73152"/>
           <a:lstStyle/>
           <a:p>
             <a:pPr algn="ctr">
@@ -8823,7 +9201,7 @@
           </a:fontRef>
         </p:style>
         <p:txBody>
-          <a:bodyPr wrap="square" lIns="73152" rIns="73152" rtlCol="0" anchor="ctr"/>
+          <a:bodyPr rtlCol="0" anchor="ctr" wrap="square" lIns="73152" rIns="73152"/>
           <a:lstStyle/>
           <a:p>
             <a:pPr algn="ctr">
@@ -8941,7 +9319,7 @@
           </a:fontRef>
         </p:style>
         <p:txBody>
-          <a:bodyPr wrap="square" lIns="73152" rIns="73152" rtlCol="0" anchor="ctr"/>
+          <a:bodyPr rtlCol="0" anchor="ctr" wrap="square" lIns="73152" rIns="73152"/>
           <a:lstStyle/>
           <a:p>
             <a:pPr algn="ctr">
@@ -9011,7 +9389,7 @@
           </a:fontRef>
         </p:style>
         <p:txBody>
-          <a:bodyPr wrap="square" lIns="73152" rIns="73152" rtlCol="0" anchor="ctr"/>
+          <a:bodyPr rtlCol="0" anchor="ctr" wrap="square" lIns="73152" rIns="73152"/>
           <a:lstStyle/>
           <a:p>
             <a:pPr algn="ctr">
@@ -9049,7 +9427,7 @@
 </file>
 
 <file path=ppt/slides/slide13.xml><?xml version="1.0" encoding="utf-8"?>
-<p:sld xmlns:a="http://schemas.openxmlformats.org/drawingml/2006/main" xmlns:r="http://schemas.openxmlformats.org/officeDocument/2006/relationships" xmlns:p="http://schemas.openxmlformats.org/presentationml/2006/main">
+<p:sld xmlns:a="http://schemas.openxmlformats.org/drawingml/2006/main" xmlns:p="http://schemas.openxmlformats.org/presentationml/2006/main" xmlns:r="http://schemas.openxmlformats.org/officeDocument/2006/relationships">
   <p:cSld>
     <p:spTree>
       <p:nvGrpSpPr>
@@ -9057,14 +9435,7 @@
         <p:cNvGrpSpPr/>
         <p:nvPr/>
       </p:nvGrpSpPr>
-      <p:grpSpPr>
-        <a:xfrm>
-          <a:off x="0" y="0"/>
-          <a:ext cx="0" cy="0"/>
-          <a:chOff x="0" y="0"/>
-          <a:chExt cx="0" cy="0"/>
-        </a:xfrm>
-      </p:grpSpPr>
+      <p:grpSpPr/>
       <p:sp>
         <p:nvSpPr>
           <p:cNvPr id="2" name="Title 1"/>
@@ -9152,7 +9523,6 @@
           <a:lstStyle/>
           <a:p>
             <a:pPr algn="ctr"/>
-            <a:endParaRPr/>
           </a:p>
         </p:txBody>
       </p:sp>
@@ -9291,7 +9661,7 @@
           </a:fontRef>
         </p:style>
         <p:txBody>
-          <a:bodyPr wrap="square" lIns="182880" rtlCol="0" anchor="ctr"/>
+          <a:bodyPr rtlCol="0" anchor="ctr" wrap="square" lIns="182880"/>
           <a:lstStyle/>
           <a:p>
             <a:pPr algn="l"/>
@@ -9749,7 +10119,7 @@
 </file>
 
 <file path=ppt/slides/slide14.xml><?xml version="1.0" encoding="utf-8"?>
-<p:sld xmlns:a="http://schemas.openxmlformats.org/drawingml/2006/main" xmlns:r="http://schemas.openxmlformats.org/officeDocument/2006/relationships" xmlns:p="http://schemas.openxmlformats.org/presentationml/2006/main">
+<p:sld xmlns:a="http://schemas.openxmlformats.org/drawingml/2006/main" xmlns:p="http://schemas.openxmlformats.org/presentationml/2006/main" xmlns:r="http://schemas.openxmlformats.org/officeDocument/2006/relationships">
   <p:cSld>
     <p:spTree>
       <p:nvGrpSpPr>
@@ -9757,14 +10127,7 @@
         <p:cNvGrpSpPr/>
         <p:nvPr/>
       </p:nvGrpSpPr>
-      <p:grpSpPr>
-        <a:xfrm>
-          <a:off x="0" y="0"/>
-          <a:ext cx="0" cy="0"/>
-          <a:chOff x="0" y="0"/>
-          <a:chExt cx="0" cy="0"/>
-        </a:xfrm>
-      </p:grpSpPr>
+      <p:grpSpPr/>
       <p:sp>
         <p:nvSpPr>
           <p:cNvPr id="2" name="TextBox 1"/>
@@ -9902,7 +10265,6 @@
           <a:lstStyle/>
           <a:p>
             <a:pPr algn="ctr"/>
-            <a:endParaRPr/>
           </a:p>
         </p:txBody>
       </p:sp>
@@ -10043,7 +10405,7 @@
           </a:fontRef>
         </p:style>
         <p:txBody>
-          <a:bodyPr wrap="square" lIns="73152" rIns="73152" rtlCol="0" anchor="ctr"/>
+          <a:bodyPr rtlCol="0" anchor="ctr" wrap="square" lIns="73152" rIns="73152"/>
           <a:lstStyle/>
           <a:p>
             <a:pPr algn="ctr">
@@ -10161,7 +10523,7 @@
           </a:fontRef>
         </p:style>
         <p:txBody>
-          <a:bodyPr wrap="square" lIns="73152" rIns="73152" rtlCol="0" anchor="ctr"/>
+          <a:bodyPr rtlCol="0" anchor="ctr" wrap="square" lIns="73152" rIns="73152"/>
           <a:lstStyle/>
           <a:p>
             <a:pPr algn="ctr">
@@ -10279,7 +10641,7 @@
           </a:fontRef>
         </p:style>
         <p:txBody>
-          <a:bodyPr wrap="square" lIns="73152" rIns="73152" rtlCol="0" anchor="ctr"/>
+          <a:bodyPr rtlCol="0" anchor="ctr" wrap="square" lIns="73152" rIns="73152"/>
           <a:lstStyle/>
           <a:p>
             <a:pPr algn="ctr">
@@ -10397,7 +10759,7 @@
           </a:fontRef>
         </p:style>
         <p:txBody>
-          <a:bodyPr wrap="square" lIns="73152" rIns="73152" rtlCol="0" anchor="ctr"/>
+          <a:bodyPr rtlCol="0" anchor="ctr" wrap="square" lIns="73152" rIns="73152"/>
           <a:lstStyle/>
           <a:p>
             <a:pPr algn="ctr">
@@ -10435,7 +10797,7 @@
 </file>
 
 <file path=ppt/slides/slide15.xml><?xml version="1.0" encoding="utf-8"?>
-<p:sld xmlns:a="http://schemas.openxmlformats.org/drawingml/2006/main" xmlns:r="http://schemas.openxmlformats.org/officeDocument/2006/relationships" xmlns:p="http://schemas.openxmlformats.org/presentationml/2006/main">
+<p:sld xmlns:a="http://schemas.openxmlformats.org/drawingml/2006/main" xmlns:p="http://schemas.openxmlformats.org/presentationml/2006/main" xmlns:r="http://schemas.openxmlformats.org/officeDocument/2006/relationships">
   <p:cSld>
     <p:spTree>
       <p:nvGrpSpPr>
@@ -10443,14 +10805,7 @@
         <p:cNvGrpSpPr/>
         <p:nvPr/>
       </p:nvGrpSpPr>
-      <p:grpSpPr>
-        <a:xfrm>
-          <a:off x="0" y="0"/>
-          <a:ext cx="0" cy="0"/>
-          <a:chOff x="0" y="0"/>
-          <a:chExt cx="0" cy="0"/>
-        </a:xfrm>
-      </p:grpSpPr>
+      <p:grpSpPr/>
       <p:sp>
         <p:nvSpPr>
           <p:cNvPr id="2" name="Title 1"/>
@@ -10538,7 +10893,6 @@
           <a:lstStyle/>
           <a:p>
             <a:pPr algn="ctr"/>
-            <a:endParaRPr/>
           </a:p>
         </p:txBody>
       </p:sp>
@@ -10772,12 +11126,6 @@
                 <a:latin typeface="Calibri"/>
               </a:defRPr>
             </a:pPr>
-            <a:endParaRPr sz="1900" b="0">
-              <a:solidFill>
-                <a:srgbClr val="222222"/>
-              </a:solidFill>
-              <a:latin typeface="Calibri"/>
-            </a:endParaRPr>
           </a:p>
           <a:p>
             <a:pPr algn="l">
@@ -10819,12 +11167,6 @@
                 <a:latin typeface="Calibri"/>
               </a:defRPr>
             </a:pPr>
-            <a:endParaRPr sz="1900" b="0">
-              <a:solidFill>
-                <a:srgbClr val="222222"/>
-              </a:solidFill>
-              <a:latin typeface="Calibri"/>
-            </a:endParaRPr>
           </a:p>
           <a:p>
             <a:pPr algn="l">
@@ -10891,12 +11233,6 @@
                 <a:latin typeface="Calibri"/>
               </a:defRPr>
             </a:pPr>
-            <a:endParaRPr sz="1900" b="0">
-              <a:solidFill>
-                <a:srgbClr val="222222"/>
-              </a:solidFill>
-              <a:latin typeface="Calibri"/>
-            </a:endParaRPr>
           </a:p>
           <a:p>
             <a:pPr algn="l">
@@ -10934,7 +11270,7 @@
 </file>
 
 <file path=ppt/slides/slide16.xml><?xml version="1.0" encoding="utf-8"?>
-<p:sld xmlns:a="http://schemas.openxmlformats.org/drawingml/2006/main" xmlns:r="http://schemas.openxmlformats.org/officeDocument/2006/relationships" xmlns:p="http://schemas.openxmlformats.org/presentationml/2006/main">
+<p:sld xmlns:a="http://schemas.openxmlformats.org/drawingml/2006/main" xmlns:p="http://schemas.openxmlformats.org/presentationml/2006/main" xmlns:r="http://schemas.openxmlformats.org/officeDocument/2006/relationships">
   <p:cSld>
     <p:spTree>
       <p:nvGrpSpPr>
@@ -10942,14 +11278,7 @@
         <p:cNvGrpSpPr/>
         <p:nvPr/>
       </p:nvGrpSpPr>
-      <p:grpSpPr>
-        <a:xfrm>
-          <a:off x="0" y="0"/>
-          <a:ext cx="0" cy="0"/>
-          <a:chOff x="0" y="0"/>
-          <a:chExt cx="0" cy="0"/>
-        </a:xfrm>
-      </p:grpSpPr>
+      <p:grpSpPr/>
       <p:sp>
         <p:nvSpPr>
           <p:cNvPr id="2" name="Title 1"/>
@@ -11037,7 +11366,6 @@
           <a:lstStyle/>
           <a:p>
             <a:pPr algn="ctr"/>
-            <a:endParaRPr/>
           </a:p>
         </p:txBody>
       </p:sp>
@@ -11392,9 +11720,7 @@
         <p:txBody>
           <a:bodyPr rtlCol="0" anchor="ctr"/>
           <a:lstStyle/>
-          <a:p>
-            <a:endParaRPr/>
-          </a:p>
+          <a:p/>
         </p:txBody>
       </p:sp>
       <p:cxnSp>
@@ -11718,7 +12044,7 @@
           </a:fontRef>
         </p:style>
         <p:txBody>
-          <a:bodyPr wrap="square" lIns="45720" tIns="18288" rIns="45720" bIns="18288" rtlCol="0" anchor="t"/>
+          <a:bodyPr rtlCol="0" anchor="t" wrap="square" lIns="45720" rIns="45720" tIns="18288" bIns="18288"/>
           <a:lstStyle/>
           <a:p>
             <a:pPr algn="l">
@@ -11785,12 +12111,6 @@
                 <a:latin typeface="Consolas"/>
               </a:defRPr>
             </a:pPr>
-            <a:endParaRPr sz="1400" b="0">
-              <a:solidFill>
-                <a:srgbClr val="222222"/>
-              </a:solidFill>
-              <a:latin typeface="Consolas"/>
-            </a:endParaRPr>
           </a:p>
           <a:p>
             <a:pPr algn="l">
@@ -11882,12 +12202,6 @@
                 <a:latin typeface="Consolas"/>
               </a:defRPr>
             </a:pPr>
-            <a:endParaRPr sz="1400" b="0">
-              <a:solidFill>
-                <a:srgbClr val="222222"/>
-              </a:solidFill>
-              <a:latin typeface="Consolas"/>
-            </a:endParaRPr>
           </a:p>
           <a:p>
             <a:pPr algn="l">
@@ -12098,7 +12412,7 @@
 </file>
 
 <file path=ppt/slides/slide17.xml><?xml version="1.0" encoding="utf-8"?>
-<p:sld xmlns:a="http://schemas.openxmlformats.org/drawingml/2006/main" xmlns:r="http://schemas.openxmlformats.org/officeDocument/2006/relationships" xmlns:p="http://schemas.openxmlformats.org/presentationml/2006/main">
+<p:sld xmlns:a="http://schemas.openxmlformats.org/drawingml/2006/main" xmlns:p="http://schemas.openxmlformats.org/presentationml/2006/main" xmlns:r="http://schemas.openxmlformats.org/officeDocument/2006/relationships">
   <p:cSld>
     <p:spTree>
       <p:nvGrpSpPr>
@@ -12106,14 +12420,7 @@
         <p:cNvGrpSpPr/>
         <p:nvPr/>
       </p:nvGrpSpPr>
-      <p:grpSpPr>
-        <a:xfrm>
-          <a:off x="0" y="0"/>
-          <a:ext cx="0" cy="0"/>
-          <a:chOff x="0" y="0"/>
-          <a:chExt cx="0" cy="0"/>
-        </a:xfrm>
-      </p:grpSpPr>
+      <p:grpSpPr/>
       <p:sp>
         <p:nvSpPr>
           <p:cNvPr id="2" name="Title 1"/>
@@ -12201,7 +12508,6 @@
           <a:lstStyle/>
           <a:p>
             <a:pPr algn="ctr"/>
-            <a:endParaRPr/>
           </a:p>
         </p:txBody>
       </p:sp>
@@ -12390,7 +12696,7 @@
           </a:fontRef>
         </p:style>
         <p:txBody>
-          <a:bodyPr wrap="square" lIns="146304" tIns="91440" bIns="73152" rtlCol="0" anchor="t"/>
+          <a:bodyPr rtlCol="0" anchor="t" wrap="square" lIns="146304" tIns="91440" bIns="73152"/>
           <a:lstStyle/>
           <a:p>
             <a:pPr algn="l">
@@ -12809,7 +13115,7 @@
 </file>
 
 <file path=ppt/slides/slide18.xml><?xml version="1.0" encoding="utf-8"?>
-<p:sld xmlns:a="http://schemas.openxmlformats.org/drawingml/2006/main" xmlns:r="http://schemas.openxmlformats.org/officeDocument/2006/relationships" xmlns:p="http://schemas.openxmlformats.org/presentationml/2006/main">
+<p:sld xmlns:a="http://schemas.openxmlformats.org/drawingml/2006/main" xmlns:p="http://schemas.openxmlformats.org/presentationml/2006/main" xmlns:r="http://schemas.openxmlformats.org/officeDocument/2006/relationships">
   <p:cSld>
     <p:spTree>
       <p:nvGrpSpPr>
@@ -12817,14 +13123,7 @@
         <p:cNvGrpSpPr/>
         <p:nvPr/>
       </p:nvGrpSpPr>
-      <p:grpSpPr>
-        <a:xfrm>
-          <a:off x="0" y="0"/>
-          <a:ext cx="0" cy="0"/>
-          <a:chOff x="0" y="0"/>
-          <a:chExt cx="0" cy="0"/>
-        </a:xfrm>
-      </p:grpSpPr>
+      <p:grpSpPr/>
       <p:sp>
         <p:nvSpPr>
           <p:cNvPr id="2" name="Title 1"/>
@@ -12912,7 +13211,6 @@
           <a:lstStyle/>
           <a:p>
             <a:pPr algn="ctr"/>
-            <a:endParaRPr/>
           </a:p>
         </p:txBody>
       </p:sp>
@@ -13051,7 +13349,7 @@
           </a:fontRef>
         </p:style>
         <p:txBody>
-          <a:bodyPr wrap="square" lIns="182880" rtlCol="0" anchor="ctr"/>
+          <a:bodyPr rtlCol="0" anchor="ctr" wrap="square" lIns="182880"/>
           <a:lstStyle/>
           <a:p>
             <a:pPr algn="l"/>
@@ -13459,7 +13757,7 @@
 </file>
 
 <file path=ppt/slides/slide19.xml><?xml version="1.0" encoding="utf-8"?>
-<p:sld xmlns:a="http://schemas.openxmlformats.org/drawingml/2006/main" xmlns:r="http://schemas.openxmlformats.org/officeDocument/2006/relationships" xmlns:p="http://schemas.openxmlformats.org/presentationml/2006/main">
+<p:sld xmlns:a="http://schemas.openxmlformats.org/drawingml/2006/main" xmlns:p="http://schemas.openxmlformats.org/presentationml/2006/main" xmlns:r="http://schemas.openxmlformats.org/officeDocument/2006/relationships">
   <p:cSld>
     <p:spTree>
       <p:nvGrpSpPr>
@@ -13467,14 +13765,7 @@
         <p:cNvGrpSpPr/>
         <p:nvPr/>
       </p:nvGrpSpPr>
-      <p:grpSpPr>
-        <a:xfrm>
-          <a:off x="0" y="0"/>
-          <a:ext cx="0" cy="0"/>
-          <a:chOff x="0" y="0"/>
-          <a:chExt cx="0" cy="0"/>
-        </a:xfrm>
-      </p:grpSpPr>
+      <p:grpSpPr/>
       <p:sp>
         <p:nvSpPr>
           <p:cNvPr id="2" name="TextBox 1"/>
@@ -13612,7 +13903,6 @@
           <a:lstStyle/>
           <a:p>
             <a:pPr algn="ctr"/>
-            <a:endParaRPr/>
           </a:p>
         </p:txBody>
       </p:sp>
@@ -13753,7 +14043,7 @@
           </a:fontRef>
         </p:style>
         <p:txBody>
-          <a:bodyPr wrap="square" lIns="73152" rIns="73152" rtlCol="0" anchor="ctr"/>
+          <a:bodyPr rtlCol="0" anchor="ctr" wrap="square" lIns="73152" rIns="73152"/>
           <a:lstStyle/>
           <a:p>
             <a:pPr algn="ctr">
@@ -13871,7 +14161,7 @@
           </a:fontRef>
         </p:style>
         <p:txBody>
-          <a:bodyPr wrap="square" lIns="73152" rIns="73152" rtlCol="0" anchor="ctr"/>
+          <a:bodyPr rtlCol="0" anchor="ctr" wrap="square" lIns="73152" rIns="73152"/>
           <a:lstStyle/>
           <a:p>
             <a:pPr algn="ctr">
@@ -13989,7 +14279,7 @@
           </a:fontRef>
         </p:style>
         <p:txBody>
-          <a:bodyPr wrap="square" lIns="73152" rIns="73152" rtlCol="0" anchor="ctr"/>
+          <a:bodyPr rtlCol="0" anchor="ctr" wrap="square" lIns="73152" rIns="73152"/>
           <a:lstStyle/>
           <a:p>
             <a:pPr algn="ctr">
@@ -14107,7 +14397,7 @@
           </a:fontRef>
         </p:style>
         <p:txBody>
-          <a:bodyPr wrap="square" lIns="73152" rIns="73152" rtlCol="0" anchor="ctr"/>
+          <a:bodyPr rtlCol="0" anchor="ctr" wrap="square" lIns="73152" rIns="73152"/>
           <a:lstStyle/>
           <a:p>
             <a:pPr algn="ctr">
@@ -14193,7 +14483,7 @@
 </file>
 
 <file path=ppt/slides/slide2.xml><?xml version="1.0" encoding="utf-8"?>
-<p:sld xmlns:a="http://schemas.openxmlformats.org/drawingml/2006/main" xmlns:r="http://schemas.openxmlformats.org/officeDocument/2006/relationships" xmlns:p="http://schemas.openxmlformats.org/presentationml/2006/main">
+<p:sld xmlns:a="http://schemas.openxmlformats.org/drawingml/2006/main" xmlns:p="http://schemas.openxmlformats.org/presentationml/2006/main" xmlns:r="http://schemas.openxmlformats.org/officeDocument/2006/relationships">
   <p:cSld>
     <p:spTree>
       <p:nvGrpSpPr>
@@ -14201,14 +14491,7 @@
         <p:cNvGrpSpPr/>
         <p:nvPr/>
       </p:nvGrpSpPr>
-      <p:grpSpPr>
-        <a:xfrm>
-          <a:off x="0" y="0"/>
-          <a:ext cx="0" cy="0"/>
-          <a:chOff x="0" y="0"/>
-          <a:chExt cx="0" cy="0"/>
-        </a:xfrm>
-      </p:grpSpPr>
+      <p:grpSpPr/>
       <p:sp>
         <p:nvSpPr>
           <p:cNvPr id="2" name="Title 1"/>
@@ -14296,7 +14579,6 @@
           <a:lstStyle/>
           <a:p>
             <a:pPr algn="ctr"/>
-            <a:endParaRPr/>
           </a:p>
         </p:txBody>
       </p:sp>
@@ -14626,7 +14908,7 @@
 </file>
 
 <file path=ppt/slides/slide20.xml><?xml version="1.0" encoding="utf-8"?>
-<p:sld xmlns:a="http://schemas.openxmlformats.org/drawingml/2006/main" xmlns:r="http://schemas.openxmlformats.org/officeDocument/2006/relationships" xmlns:p="http://schemas.openxmlformats.org/presentationml/2006/main">
+<p:sld xmlns:a="http://schemas.openxmlformats.org/drawingml/2006/main" xmlns:p="http://schemas.openxmlformats.org/presentationml/2006/main" xmlns:r="http://schemas.openxmlformats.org/officeDocument/2006/relationships">
   <p:cSld>
     <p:spTree>
       <p:nvGrpSpPr>
@@ -14634,14 +14916,7 @@
         <p:cNvGrpSpPr/>
         <p:nvPr/>
       </p:nvGrpSpPr>
-      <p:grpSpPr>
-        <a:xfrm>
-          <a:off x="0" y="0"/>
-          <a:ext cx="0" cy="0"/>
-          <a:chOff x="0" y="0"/>
-          <a:chExt cx="0" cy="0"/>
-        </a:xfrm>
-      </p:grpSpPr>
+      <p:grpSpPr/>
       <p:sp>
         <p:nvSpPr>
           <p:cNvPr id="2" name="Title 1"/>
@@ -14729,7 +15004,6 @@
           <a:lstStyle/>
           <a:p>
             <a:pPr algn="ctr"/>
-            <a:endParaRPr/>
           </a:p>
         </p:txBody>
       </p:sp>
@@ -14872,7 +15146,7 @@
                 </a:solidFill>
                 <a:latin typeface="Calibri"/>
               </a:rPr>
-              <a:t>Full speed forwards, half speed steering</a:t>
+              <a:t>Full speed forwards, 75% steering</a:t>
             </a:r>
           </a:p>
         </p:txBody>
@@ -14938,12 +15212,6 @@
                 <a:latin typeface="Calibri"/>
               </a:defRPr>
             </a:pPr>
-            <a:endParaRPr sz="1900" b="0">
-              <a:solidFill>
-                <a:srgbClr val="222222"/>
-              </a:solidFill>
-              <a:latin typeface="Calibri"/>
-            </a:endParaRPr>
           </a:p>
           <a:p>
             <a:pPr algn="l">
@@ -14992,7 +15260,7 @@
                 </a:solidFill>
                 <a:latin typeface="Calibri"/>
               </a:rPr>
-              <a:t>Steering gets turnMax, which is HALF of that by default.</a:t>
+              <a:t>Steering gets turnMax, which is 75% of that by default - 191.</a:t>
             </a:r>
           </a:p>
           <a:p>
@@ -15010,12 +15278,6 @@
                 <a:latin typeface="Calibri"/>
               </a:defRPr>
             </a:pPr>
-            <a:endParaRPr sz="1900" b="0">
-              <a:solidFill>
-                <a:srgbClr val="222222"/>
-              </a:solidFill>
-              <a:latin typeface="Calibri"/>
-            </a:endParaRPr>
           </a:p>
           <a:p>
             <a:pPr algn="l">
@@ -15039,7 +15301,7 @@
                 </a:solidFill>
                 <a:latin typeface="Calibri"/>
               </a:rPr>
-              <a:t>Why? Because at full power a small nudge sideways spins the vehicle faster than anybody can correct for. Half-power steering makes it controllable without making it slow.</a:t>
+              <a:t>Why? Because at full power a small nudge sideways spins the vehicle faster than anybody can correct for. Holding steering to 75% makes it controllable without making it slow.</a:t>
             </a:r>
           </a:p>
           <a:p>
@@ -15057,12 +15319,6 @@
                 <a:latin typeface="Calibri"/>
               </a:defRPr>
             </a:pPr>
-            <a:endParaRPr sz="1900" b="0">
-              <a:solidFill>
-                <a:srgbClr val="222222"/>
-              </a:solidFill>
-              <a:latin typeface="Calibri"/>
-            </a:endParaRPr>
           </a:p>
           <a:p>
             <a:pPr algn="l">
@@ -15104,12 +15360,6 @@
                 <a:latin typeface="Calibri"/>
               </a:defRPr>
             </a:pPr>
-            <a:endParaRPr sz="1900" b="0">
-              <a:solidFill>
-                <a:srgbClr val="222222"/>
-              </a:solidFill>
-              <a:latin typeface="Calibri"/>
-            </a:endParaRPr>
           </a:p>
           <a:p>
             <a:pPr algn="l">
@@ -15147,7 +15397,7 @@
 </file>
 
 <file path=ppt/slides/slide21.xml><?xml version="1.0" encoding="utf-8"?>
-<p:sld xmlns:a="http://schemas.openxmlformats.org/drawingml/2006/main" xmlns:r="http://schemas.openxmlformats.org/officeDocument/2006/relationships" xmlns:p="http://schemas.openxmlformats.org/presentationml/2006/main">
+<p:sld xmlns:a="http://schemas.openxmlformats.org/drawingml/2006/main" xmlns:p="http://schemas.openxmlformats.org/presentationml/2006/main" xmlns:r="http://schemas.openxmlformats.org/officeDocument/2006/relationships">
   <p:cSld>
     <p:spTree>
       <p:nvGrpSpPr>
@@ -15155,14 +15405,7 @@
         <p:cNvGrpSpPr/>
         <p:nvPr/>
       </p:nvGrpSpPr>
-      <p:grpSpPr>
-        <a:xfrm>
-          <a:off x="0" y="0"/>
-          <a:ext cx="0" cy="0"/>
-          <a:chOff x="0" y="0"/>
-          <a:chExt cx="0" cy="0"/>
-        </a:xfrm>
-      </p:grpSpPr>
+      <p:grpSpPr/>
       <p:sp>
         <p:nvSpPr>
           <p:cNvPr id="2" name="Title 1"/>
@@ -15250,7 +15493,6 @@
           <a:lstStyle/>
           <a:p>
             <a:pPr algn="ctr"/>
-            <a:endParaRPr/>
           </a:p>
         </p:txBody>
       </p:sp>
@@ -15439,7 +15681,7 @@
           </a:fontRef>
         </p:style>
         <p:txBody>
-          <a:bodyPr wrap="square" lIns="146304" tIns="91440" bIns="73152" rtlCol="0" anchor="t"/>
+          <a:bodyPr rtlCol="0" anchor="t" wrap="square" lIns="146304" tIns="91440" bIns="73152"/>
           <a:lstStyle/>
           <a:p>
             <a:pPr algn="l">
@@ -15949,7 +16191,7 @@
 </file>
 
 <file path=ppt/slides/slide22.xml><?xml version="1.0" encoding="utf-8"?>
-<p:sld xmlns:a="http://schemas.openxmlformats.org/drawingml/2006/main" xmlns:r="http://schemas.openxmlformats.org/officeDocument/2006/relationships" xmlns:p="http://schemas.openxmlformats.org/presentationml/2006/main">
+<p:sld xmlns:a="http://schemas.openxmlformats.org/drawingml/2006/main" xmlns:p="http://schemas.openxmlformats.org/presentationml/2006/main" xmlns:r="http://schemas.openxmlformats.org/officeDocument/2006/relationships">
   <p:cSld>
     <p:spTree>
       <p:nvGrpSpPr>
@@ -15957,14 +16199,7 @@
         <p:cNvGrpSpPr/>
         <p:nvPr/>
       </p:nvGrpSpPr>
-      <p:grpSpPr>
-        <a:xfrm>
-          <a:off x="0" y="0"/>
-          <a:ext cx="0" cy="0"/>
-          <a:chOff x="0" y="0"/>
-          <a:chExt cx="0" cy="0"/>
-        </a:xfrm>
-      </p:grpSpPr>
+      <p:grpSpPr/>
       <p:sp>
         <p:nvSpPr>
           <p:cNvPr id="2" name="Title 1"/>
@@ -16052,7 +16287,6 @@
           <a:lstStyle/>
           <a:p>
             <a:pPr algn="ctr"/>
-            <a:endParaRPr/>
           </a:p>
         </p:txBody>
       </p:sp>
@@ -16191,7 +16425,7 @@
           </a:fontRef>
         </p:style>
         <p:txBody>
-          <a:bodyPr wrap="square" lIns="182880" rtlCol="0" anchor="ctr"/>
+          <a:bodyPr rtlCol="0" anchor="ctr" wrap="square" lIns="182880"/>
           <a:lstStyle/>
           <a:p>
             <a:pPr algn="l"/>
@@ -16234,7 +16468,7 @@
         <p:spPr>
           <a:xfrm>
             <a:off x="502920" y="1901952"/>
-            <a:ext cx="6249137" cy="3273552"/>
+            <a:ext cx="6249137" cy="4361688"/>
           </a:xfrm>
           <a:prstGeom prst="rect">
             <a:avLst/>
@@ -16296,106 +16530,6 @@
               <a:t>2.  Put it on the floor in a clear space and drive.</a:t>
             </a:r>
           </a:p>
-          <a:p>
-            <a:pPr algn="l">
-              <a:lnSpc>
-                <a:spcPct val="100000"/>
-              </a:lnSpc>
-              <a:spcAft>
-                <a:spcPts val="800"/>
-              </a:spcAft>
-              <a:defRPr sz="1800" b="0">
-                <a:solidFill>
-                  <a:srgbClr val="222222"/>
-                </a:solidFill>
-                <a:latin typeface="Calibri"/>
-              </a:defRPr>
-            </a:pPr>
-            <a:r>
-              <a:rPr sz="1800" b="0">
-                <a:solidFill>
-                  <a:srgbClr val="222222"/>
-                </a:solidFill>
-                <a:latin typeface="Calibri"/>
-              </a:rPr>
-              <a:t>3.  While driving, switch the pad off. What happens?</a:t>
-            </a:r>
-          </a:p>
-          <a:p>
-            <a:pPr algn="l">
-              <a:lnSpc>
-                <a:spcPct val="100000"/>
-              </a:lnSpc>
-              <a:spcAft>
-                <a:spcPts val="800"/>
-              </a:spcAft>
-              <a:defRPr sz="1800" b="0">
-                <a:solidFill>
-                  <a:srgbClr val="222222"/>
-                </a:solidFill>
-                <a:latin typeface="Calibri"/>
-              </a:defRPr>
-            </a:pPr>
-            <a:r>
-              <a:rPr sz="1800" b="0">
-                <a:solidFill>
-                  <a:srgbClr val="222222"/>
-                </a:solidFill>
-                <a:latin typeface="Calibri"/>
-              </a:rPr>
-              <a:t>4.  Set turnMax to MOTOR_MAX. Which is easier to aim?</a:t>
-            </a:r>
-          </a:p>
-          <a:p>
-            <a:pPr algn="l">
-              <a:lnSpc>
-                <a:spcPct val="100000"/>
-              </a:lnSpc>
-              <a:spcAft>
-                <a:spcPts val="800"/>
-              </a:spcAft>
-              <a:defRPr sz="1800" b="0">
-                <a:solidFill>
-                  <a:srgbClr val="222222"/>
-                </a:solidFill>
-                <a:latin typeface="Calibri"/>
-              </a:defRPr>
-            </a:pPr>
-            <a:r>
-              <a:rPr sz="1800" b="0">
-                <a:solidFill>
-                  <a:srgbClr val="222222"/>
-                </a:solidFill>
-                <a:latin typeface="Calibri"/>
-              </a:rPr>
-              <a:t>5.  Lines 150 and 151: swap the + and the - and drive. What is wrong now?</a:t>
-            </a:r>
-          </a:p>
-          <a:p>
-            <a:pPr algn="l">
-              <a:lnSpc>
-                <a:spcPct val="100000"/>
-              </a:lnSpc>
-              <a:spcAft>
-                <a:spcPts val="800"/>
-              </a:spcAft>
-              <a:defRPr sz="1800" b="0">
-                <a:solidFill>
-                  <a:srgbClr val="222222"/>
-                </a:solidFill>
-                <a:latin typeface="Calibri"/>
-              </a:defRPr>
-            </a:pPr>
-            <a:r>
-              <a:rPr sz="1800" b="0">
-                <a:solidFill>
-                  <a:srgbClr val="222222"/>
-                </a:solidFill>
-                <a:latin typeface="Calibri"/>
-              </a:rPr>
-              <a:t>6.  Line 151: make it  rightSpeed = forward;  with no turn term. Why is that worse steering?</a:t>
-            </a:r>
-          </a:p>
         </p:txBody>
       </p:sp>
       <p:sp>
@@ -16455,7 +16589,7 @@
         <p:spPr>
           <a:xfrm>
             <a:off x="7163537" y="2304288"/>
-            <a:ext cx="4525238" cy="670919"/>
+            <a:ext cx="4525238" cy="975649"/>
           </a:xfrm>
           <a:prstGeom prst="rect">
             <a:avLst/>
@@ -16475,15 +16609,15 @@
               <a:spcAft>
                 <a:spcPts val="300"/>
               </a:spcAft>
-              <a:defRPr sz="1800" b="0">
-                <a:solidFill>
-                  <a:srgbClr val="222222"/>
-                </a:solidFill>
-                <a:latin typeface="Calibri"/>
-              </a:defRPr>
-            </a:pPr>
-            <a:r>
-              <a:rPr sz="1800" b="0">
+              <a:defRPr sz="2700" b="0">
+                <a:solidFill>
+                  <a:srgbClr val="222222"/>
+                </a:solidFill>
+                <a:latin typeface="Calibri"/>
+              </a:defRPr>
+            </a:pPr>
+            <a:r>
+              <a:rPr sz="2700" b="0">
                 <a:solidFill>
                   <a:srgbClr val="222222"/>
                 </a:solidFill>
@@ -16502,7 +16636,7 @@
         </p:nvSpPr>
         <p:spPr>
           <a:xfrm>
-            <a:off x="7163537" y="3048359"/>
+            <a:off x="7163537" y="3353089"/>
             <a:ext cx="4525238" cy="365760"/>
           </a:xfrm>
           <a:prstGeom prst="rect">
@@ -16550,8 +16684,8 @@
         </p:nvSpPr>
         <p:spPr>
           <a:xfrm>
-            <a:off x="7163537" y="3450695"/>
-            <a:ext cx="4525238" cy="1724808"/>
+            <a:off x="7163537" y="3755425"/>
+            <a:ext cx="4525238" cy="2508214"/>
           </a:xfrm>
           <a:prstGeom prst="rect">
             <a:avLst/>
@@ -16569,30 +16703,737 @@
                 <a:spcPct val="100000"/>
               </a:lnSpc>
               <a:spcAft>
-                <a:spcPts val="300"/>
-              </a:spcAft>
-              <a:defRPr sz="2500" b="0">
-                <a:solidFill>
-                  <a:srgbClr val="222222"/>
-                </a:solidFill>
-                <a:latin typeface="Calibri"/>
-              </a:defRPr>
-            </a:pPr>
-            <a:r>
-              <a:rPr sz="2500" b="0">
-                <a:solidFill>
-                  <a:srgbClr val="222222"/>
-                </a:solidFill>
-                <a:latin typeface="Calibri"/>
-              </a:rPr>
-              <a:t>What happened when the controller switched off, and which four lines made that happen?</a:t>
-            </a:r>
-          </a:p>
-        </p:txBody>
-      </p:sp>
-      <p:sp>
-        <p:nvSpPr>
-          <p:cNvPr id="12" name="Rounded Rectangle 11"/>
+                <a:spcPts val="600"/>
+              </a:spcAft>
+              <a:defRPr sz="3000" b="0">
+                <a:solidFill>
+                  <a:srgbClr val="222222"/>
+                </a:solidFill>
+                <a:latin typeface="Calibri"/>
+              </a:defRPr>
+            </a:pPr>
+            <a:r>
+              <a:rPr sz="3000" b="0">
+                <a:solidFill>
+                  <a:srgbClr val="222222"/>
+                </a:solidFill>
+                <a:latin typeface="Calibri"/>
+              </a:rPr>
+              <a:t>What happened when the pad went out of range, and which four lines made that happen?</a:t>
+            </a:r>
+          </a:p>
+        </p:txBody>
+      </p:sp>
+    </p:spTree>
+  </p:cSld>
+  <p:clrMapOvr>
+    <a:masterClrMapping/>
+  </p:clrMapOvr>
+</p:sld>
+</file>
+
+<file path=ppt/slides/slide23.xml><?xml version="1.0" encoding="utf-8"?>
+<p:sld xmlns:a="http://schemas.openxmlformats.org/drawingml/2006/main" xmlns:p="http://schemas.openxmlformats.org/presentationml/2006/main" xmlns:r="http://schemas.openxmlformats.org/officeDocument/2006/relationships">
+  <p:cSld>
+    <p:spTree>
+      <p:nvGrpSpPr>
+        <p:cNvPr id="1" name=""/>
+        <p:cNvGrpSpPr/>
+        <p:nvPr/>
+      </p:nvGrpSpPr>
+      <p:grpSpPr/>
+      <p:sp>
+        <p:nvSpPr>
+          <p:cNvPr id="2" name="Title 1"/>
+          <p:cNvSpPr>
+            <a:spLocks noGrp="1"/>
+          </p:cNvSpPr>
+          <p:nvPr>
+            <p:ph type="title"/>
+          </p:nvPr>
+        </p:nvSpPr>
+        <p:spPr>
+          <a:xfrm>
+            <a:off x="502920" y="274320"/>
+            <a:ext cx="11185855" cy="777240"/>
+          </a:xfrm>
+        </p:spPr>
+        <p:txBody>
+          <a:bodyPr wrap="square" anchor="b"/>
+          <a:lstStyle/>
+          <a:p>
+            <a:pPr algn="l">
+              <a:lnSpc>
+                <a:spcPct val="100000"/>
+              </a:lnSpc>
+              <a:spcAft>
+                <a:spcPts val="0"/>
+              </a:spcAft>
+              <a:defRPr sz="2800" b="1">
+                <a:solidFill>
+                  <a:srgbClr val="1F3A5F"/>
+                </a:solidFill>
+                <a:latin typeface="Calibri"/>
+              </a:defRPr>
+            </a:pPr>
+            <a:r>
+              <a:rPr sz="2800" b="1">
+                <a:solidFill>
+                  <a:srgbClr val="1F3A5F"/>
+                </a:solidFill>
+                <a:latin typeface="Calibri"/>
+              </a:rPr>
+              <a:t>Do it now  -  drive it  (continued)</a:t>
+            </a:r>
+          </a:p>
+        </p:txBody>
+      </p:sp>
+      <p:sp>
+        <p:nvSpPr>
+          <p:cNvPr id="3" name="Rectangle 2"/>
+          <p:cNvSpPr/>
+          <p:nvPr/>
+        </p:nvSpPr>
+        <p:spPr>
+          <a:xfrm>
+            <a:off x="502920" y="1097280"/>
+            <a:ext cx="11185855" cy="19050"/>
+          </a:xfrm>
+          <a:prstGeom prst="rect">
+            <a:avLst/>
+          </a:prstGeom>
+          <a:solidFill>
+            <a:srgbClr val="C8D2DE"/>
+          </a:solidFill>
+          <a:ln>
+            <a:noFill/>
+          </a:ln>
+          <a:effectLst/>
+        </p:spPr>
+        <p:style>
+          <a:lnRef idx="1">
+            <a:schemeClr val="accent1"/>
+          </a:lnRef>
+          <a:fillRef idx="3">
+            <a:schemeClr val="accent1"/>
+          </a:fillRef>
+          <a:effectRef idx="2">
+            <a:schemeClr val="accent1"/>
+          </a:effectRef>
+          <a:fontRef idx="minor">
+            <a:schemeClr val="lt1"/>
+          </a:fontRef>
+        </p:style>
+        <p:txBody>
+          <a:bodyPr rtlCol="0" anchor="ctr"/>
+          <a:lstStyle/>
+          <a:p>
+            <a:pPr algn="ctr"/>
+          </a:p>
+        </p:txBody>
+      </p:sp>
+      <p:sp>
+        <p:nvSpPr>
+          <p:cNvPr id="4" name="TextBox 3"/>
+          <p:cNvSpPr txBox="1"/>
+          <p:nvPr/>
+        </p:nvSpPr>
+        <p:spPr>
+          <a:xfrm>
+            <a:off x="502920" y="6382512"/>
+            <a:ext cx="10545775" cy="274320"/>
+          </a:xfrm>
+          <a:prstGeom prst="rect">
+            <a:avLst/>
+          </a:prstGeom>
+          <a:noFill/>
+        </p:spPr>
+        <p:txBody>
+          <a:bodyPr wrap="square" lIns="0" tIns="0">
+            <a:spAutoFit/>
+          </a:bodyPr>
+          <a:lstStyle/>
+          <a:p>
+            <a:pPr algn="l">
+              <a:lnSpc>
+                <a:spcPct val="100000"/>
+              </a:lnSpc>
+              <a:spcAft>
+                <a:spcPts val="0"/>
+              </a:spcAft>
+              <a:defRPr sz="1000" b="0">
+                <a:solidFill>
+                  <a:srgbClr val="666666"/>
+                </a:solidFill>
+                <a:latin typeface="Calibri"/>
+              </a:defRPr>
+            </a:pPr>
+            <a:r>
+              <a:rPr sz="1000" b="0">
+                <a:solidFill>
+                  <a:srgbClr val="666666"/>
+                </a:solidFill>
+                <a:latin typeface="Calibri"/>
+              </a:rPr>
+              <a:t>Pathfinder Beginner - PS3  |  Lesson 3</a:t>
+            </a:r>
+          </a:p>
+        </p:txBody>
+      </p:sp>
+      <p:sp>
+        <p:nvSpPr>
+          <p:cNvPr id="5" name="TextBox 4"/>
+          <p:cNvSpPr txBox="1"/>
+          <p:nvPr/>
+        </p:nvSpPr>
+        <p:spPr>
+          <a:xfrm>
+            <a:off x="11231575" y="6382512"/>
+            <a:ext cx="457200" cy="274320"/>
+          </a:xfrm>
+          <a:prstGeom prst="rect">
+            <a:avLst/>
+          </a:prstGeom>
+          <a:noFill/>
+        </p:spPr>
+        <p:txBody>
+          <a:bodyPr wrap="square" lIns="0" tIns="0">
+            <a:spAutoFit/>
+          </a:bodyPr>
+          <a:lstStyle/>
+          <a:p>
+            <a:pPr algn="r">
+              <a:lnSpc>
+                <a:spcPct val="100000"/>
+              </a:lnSpc>
+              <a:spcAft>
+                <a:spcPts val="0"/>
+              </a:spcAft>
+              <a:defRPr sz="1000" b="0">
+                <a:solidFill>
+                  <a:srgbClr val="666666"/>
+                </a:solidFill>
+                <a:latin typeface="Calibri"/>
+              </a:defRPr>
+            </a:pPr>
+            <a:r>
+              <a:rPr sz="1000" b="0">
+                <a:solidFill>
+                  <a:srgbClr val="666666"/>
+                </a:solidFill>
+                <a:latin typeface="Calibri"/>
+              </a:rPr>
+              <a:t>23</a:t>
+            </a:r>
+          </a:p>
+        </p:txBody>
+      </p:sp>
+      <p:sp>
+        <p:nvSpPr>
+          <p:cNvPr id="6" name="Rounded Rectangle 5"/>
+          <p:cNvSpPr/>
+          <p:nvPr/>
+        </p:nvSpPr>
+        <p:spPr>
+          <a:xfrm>
+            <a:off x="502920" y="1188720"/>
+            <a:ext cx="11185855" cy="530352"/>
+          </a:xfrm>
+          <a:prstGeom prst="roundRect">
+            <a:avLst>
+              <a:gd name="adj" fmla="val 4000"/>
+            </a:avLst>
+          </a:prstGeom>
+          <a:solidFill>
+            <a:srgbClr val="0E7C86"/>
+          </a:solidFill>
+          <a:ln>
+            <a:noFill/>
+          </a:ln>
+          <a:effectLst/>
+        </p:spPr>
+        <p:style>
+          <a:lnRef idx="1">
+            <a:schemeClr val="accent1"/>
+          </a:lnRef>
+          <a:fillRef idx="3">
+            <a:schemeClr val="accent1"/>
+          </a:fillRef>
+          <a:effectRef idx="2">
+            <a:schemeClr val="accent1"/>
+          </a:effectRef>
+          <a:fontRef idx="minor">
+            <a:schemeClr val="lt1"/>
+          </a:fontRef>
+        </p:style>
+        <p:txBody>
+          <a:bodyPr rtlCol="0" anchor="ctr" wrap="square" lIns="182880"/>
+          <a:lstStyle/>
+          <a:p>
+            <a:pPr algn="l"/>
+            <a:r>
+              <a:rPr sz="1300" b="1">
+                <a:solidFill>
+                  <a:srgbClr val="FFFFFF"/>
+                </a:solidFill>
+                <a:latin typeface="Calibri"/>
+              </a:rPr>
+              <a:t>UPLOAD AND RUN:   </a:t>
+            </a:r>
+            <a:r>
+              <a:rPr sz="1500" b="1">
+                <a:solidFill>
+                  <a:srgbClr val="FFFFFF"/>
+                </a:solidFill>
+                <a:latin typeface="Consolas"/>
+              </a:rPr>
+              <a:t>l3c_tank_drive</a:t>
+            </a:r>
+          </a:p>
+        </p:txBody>
+      </p:sp>
+      <p:sp>
+        <p:nvSpPr>
+          <p:cNvPr id="7" name="TextBox 6"/>
+          <p:cNvSpPr txBox="1"/>
+          <p:nvPr/>
+        </p:nvSpPr>
+        <p:spPr>
+          <a:xfrm>
+            <a:off x="502920" y="1901952"/>
+            <a:ext cx="11185855" cy="4361688"/>
+          </a:xfrm>
+          <a:prstGeom prst="rect">
+            <a:avLst/>
+          </a:prstGeom>
+          <a:noFill/>
+        </p:spPr>
+        <p:txBody>
+          <a:bodyPr wrap="square" lIns="0" tIns="0" rIns="0" bIns="0">
+            <a:spAutoFit/>
+          </a:bodyPr>
+          <a:lstStyle/>
+          <a:p>
+            <a:pPr algn="l">
+              <a:lnSpc>
+                <a:spcPct val="100000"/>
+              </a:lnSpc>
+              <a:spcAft>
+                <a:spcPts val="800"/>
+              </a:spcAft>
+              <a:defRPr sz="1800" b="0">
+                <a:solidFill>
+                  <a:srgbClr val="222222"/>
+                </a:solidFill>
+                <a:latin typeface="Calibri"/>
+              </a:defRPr>
+            </a:pPr>
+            <a:r>
+              <a:rPr sz="1800" b="0">
+                <a:solidFill>
+                  <a:srgbClr val="222222"/>
+                </a:solidFill>
+                <a:latin typeface="Calibri"/>
+              </a:rPr>
+              <a:t>3.  Wheels off the ground, motors running. Carry the pad out of range - round a corner, or thirty feet down the corridor - and watch the wheels stop. Walk back and it picks up again.</a:t>
+            </a:r>
+          </a:p>
+          <a:p>
+            <a:pPr lvl="1" algn="l">
+              <a:lnSpc>
+                <a:spcPct val="100000"/>
+              </a:lnSpc>
+              <a:spcAft>
+                <a:spcPts val="800"/>
+              </a:spcAft>
+              <a:defRPr sz="1800" b="0">
+                <a:solidFill>
+                  <a:srgbClr val="222222"/>
+                </a:solidFill>
+                <a:latin typeface="Calibri"/>
+              </a:defRPr>
+            </a:pPr>
+            <a:r>
+              <a:rPr sz="1800" b="0">
+                <a:solidFill>
+                  <a:srgbClr val="222222"/>
+                </a:solidFill>
+                <a:latin typeface="Calibri"/>
+              </a:rPr>
+              <a:t>Neither of these pads has an off switch, so out of range is how you prove the failsafe. Power-cycling the VEHICLE shows the same guard from the other side: the pad is on, the sticks work, and nothing moves until it reconnects.</a:t>
+            </a:r>
+          </a:p>
+        </p:txBody>
+      </p:sp>
+    </p:spTree>
+  </p:cSld>
+  <p:clrMapOvr>
+    <a:masterClrMapping/>
+  </p:clrMapOvr>
+</p:sld>
+</file>
+
+<file path=ppt/slides/slide24.xml><?xml version="1.0" encoding="utf-8"?>
+<p:sld xmlns:a="http://schemas.openxmlformats.org/drawingml/2006/main" xmlns:p="http://schemas.openxmlformats.org/presentationml/2006/main" xmlns:r="http://schemas.openxmlformats.org/officeDocument/2006/relationships">
+  <p:cSld>
+    <p:spTree>
+      <p:nvGrpSpPr>
+        <p:cNvPr id="1" name=""/>
+        <p:cNvGrpSpPr/>
+        <p:nvPr/>
+      </p:nvGrpSpPr>
+      <p:grpSpPr/>
+      <p:sp>
+        <p:nvSpPr>
+          <p:cNvPr id="2" name="Title 1"/>
+          <p:cNvSpPr>
+            <a:spLocks noGrp="1"/>
+          </p:cNvSpPr>
+          <p:nvPr>
+            <p:ph type="title"/>
+          </p:nvPr>
+        </p:nvSpPr>
+        <p:spPr>
+          <a:xfrm>
+            <a:off x="502920" y="274320"/>
+            <a:ext cx="11185855" cy="777240"/>
+          </a:xfrm>
+        </p:spPr>
+        <p:txBody>
+          <a:bodyPr wrap="square" anchor="b"/>
+          <a:lstStyle/>
+          <a:p>
+            <a:pPr algn="l">
+              <a:lnSpc>
+                <a:spcPct val="100000"/>
+              </a:lnSpc>
+              <a:spcAft>
+                <a:spcPts val="0"/>
+              </a:spcAft>
+              <a:defRPr sz="2800" b="1">
+                <a:solidFill>
+                  <a:srgbClr val="1F3A5F"/>
+                </a:solidFill>
+                <a:latin typeface="Calibri"/>
+              </a:defRPr>
+            </a:pPr>
+            <a:r>
+              <a:rPr sz="2800" b="1">
+                <a:solidFill>
+                  <a:srgbClr val="1F3A5F"/>
+                </a:solidFill>
+                <a:latin typeface="Calibri"/>
+              </a:rPr>
+              <a:t>Do it now  -  drive it  (continued)</a:t>
+            </a:r>
+          </a:p>
+        </p:txBody>
+      </p:sp>
+      <p:sp>
+        <p:nvSpPr>
+          <p:cNvPr id="3" name="Rectangle 2"/>
+          <p:cNvSpPr/>
+          <p:nvPr/>
+        </p:nvSpPr>
+        <p:spPr>
+          <a:xfrm>
+            <a:off x="502920" y="1097280"/>
+            <a:ext cx="11185855" cy="19050"/>
+          </a:xfrm>
+          <a:prstGeom prst="rect">
+            <a:avLst/>
+          </a:prstGeom>
+          <a:solidFill>
+            <a:srgbClr val="C8D2DE"/>
+          </a:solidFill>
+          <a:ln>
+            <a:noFill/>
+          </a:ln>
+          <a:effectLst/>
+        </p:spPr>
+        <p:style>
+          <a:lnRef idx="1">
+            <a:schemeClr val="accent1"/>
+          </a:lnRef>
+          <a:fillRef idx="3">
+            <a:schemeClr val="accent1"/>
+          </a:fillRef>
+          <a:effectRef idx="2">
+            <a:schemeClr val="accent1"/>
+          </a:effectRef>
+          <a:fontRef idx="minor">
+            <a:schemeClr val="lt1"/>
+          </a:fontRef>
+        </p:style>
+        <p:txBody>
+          <a:bodyPr rtlCol="0" anchor="ctr"/>
+          <a:lstStyle/>
+          <a:p>
+            <a:pPr algn="ctr"/>
+          </a:p>
+        </p:txBody>
+      </p:sp>
+      <p:sp>
+        <p:nvSpPr>
+          <p:cNvPr id="4" name="TextBox 3"/>
+          <p:cNvSpPr txBox="1"/>
+          <p:nvPr/>
+        </p:nvSpPr>
+        <p:spPr>
+          <a:xfrm>
+            <a:off x="502920" y="6382512"/>
+            <a:ext cx="10545775" cy="274320"/>
+          </a:xfrm>
+          <a:prstGeom prst="rect">
+            <a:avLst/>
+          </a:prstGeom>
+          <a:noFill/>
+        </p:spPr>
+        <p:txBody>
+          <a:bodyPr wrap="square" lIns="0" tIns="0">
+            <a:spAutoFit/>
+          </a:bodyPr>
+          <a:lstStyle/>
+          <a:p>
+            <a:pPr algn="l">
+              <a:lnSpc>
+                <a:spcPct val="100000"/>
+              </a:lnSpc>
+              <a:spcAft>
+                <a:spcPts val="0"/>
+              </a:spcAft>
+              <a:defRPr sz="1000" b="0">
+                <a:solidFill>
+                  <a:srgbClr val="666666"/>
+                </a:solidFill>
+                <a:latin typeface="Calibri"/>
+              </a:defRPr>
+            </a:pPr>
+            <a:r>
+              <a:rPr sz="1000" b="0">
+                <a:solidFill>
+                  <a:srgbClr val="666666"/>
+                </a:solidFill>
+                <a:latin typeface="Calibri"/>
+              </a:rPr>
+              <a:t>Pathfinder Beginner - PS3  |  Lesson 3</a:t>
+            </a:r>
+          </a:p>
+        </p:txBody>
+      </p:sp>
+      <p:sp>
+        <p:nvSpPr>
+          <p:cNvPr id="5" name="TextBox 4"/>
+          <p:cNvSpPr txBox="1"/>
+          <p:nvPr/>
+        </p:nvSpPr>
+        <p:spPr>
+          <a:xfrm>
+            <a:off x="11231575" y="6382512"/>
+            <a:ext cx="457200" cy="274320"/>
+          </a:xfrm>
+          <a:prstGeom prst="rect">
+            <a:avLst/>
+          </a:prstGeom>
+          <a:noFill/>
+        </p:spPr>
+        <p:txBody>
+          <a:bodyPr wrap="square" lIns="0" tIns="0">
+            <a:spAutoFit/>
+          </a:bodyPr>
+          <a:lstStyle/>
+          <a:p>
+            <a:pPr algn="r">
+              <a:lnSpc>
+                <a:spcPct val="100000"/>
+              </a:lnSpc>
+              <a:spcAft>
+                <a:spcPts val="0"/>
+              </a:spcAft>
+              <a:defRPr sz="1000" b="0">
+                <a:solidFill>
+                  <a:srgbClr val="666666"/>
+                </a:solidFill>
+                <a:latin typeface="Calibri"/>
+              </a:defRPr>
+            </a:pPr>
+            <a:r>
+              <a:rPr sz="1000" b="0">
+                <a:solidFill>
+                  <a:srgbClr val="666666"/>
+                </a:solidFill>
+                <a:latin typeface="Calibri"/>
+              </a:rPr>
+              <a:t>24</a:t>
+            </a:r>
+          </a:p>
+        </p:txBody>
+      </p:sp>
+      <p:sp>
+        <p:nvSpPr>
+          <p:cNvPr id="6" name="Rounded Rectangle 5"/>
+          <p:cNvSpPr/>
+          <p:nvPr/>
+        </p:nvSpPr>
+        <p:spPr>
+          <a:xfrm>
+            <a:off x="502920" y="1188720"/>
+            <a:ext cx="11185855" cy="530352"/>
+          </a:xfrm>
+          <a:prstGeom prst="roundRect">
+            <a:avLst>
+              <a:gd name="adj" fmla="val 4000"/>
+            </a:avLst>
+          </a:prstGeom>
+          <a:solidFill>
+            <a:srgbClr val="0E7C86"/>
+          </a:solidFill>
+          <a:ln>
+            <a:noFill/>
+          </a:ln>
+          <a:effectLst/>
+        </p:spPr>
+        <p:style>
+          <a:lnRef idx="1">
+            <a:schemeClr val="accent1"/>
+          </a:lnRef>
+          <a:fillRef idx="3">
+            <a:schemeClr val="accent1"/>
+          </a:fillRef>
+          <a:effectRef idx="2">
+            <a:schemeClr val="accent1"/>
+          </a:effectRef>
+          <a:fontRef idx="minor">
+            <a:schemeClr val="lt1"/>
+          </a:fontRef>
+        </p:style>
+        <p:txBody>
+          <a:bodyPr rtlCol="0" anchor="ctr" wrap="square" lIns="182880"/>
+          <a:lstStyle/>
+          <a:p>
+            <a:pPr algn="l"/>
+            <a:r>
+              <a:rPr sz="1300" b="1">
+                <a:solidFill>
+                  <a:srgbClr val="FFFFFF"/>
+                </a:solidFill>
+                <a:latin typeface="Calibri"/>
+              </a:rPr>
+              <a:t>UPLOAD AND RUN:   </a:t>
+            </a:r>
+            <a:r>
+              <a:rPr sz="1500" b="1">
+                <a:solidFill>
+                  <a:srgbClr val="FFFFFF"/>
+                </a:solidFill>
+                <a:latin typeface="Consolas"/>
+              </a:rPr>
+              <a:t>l3c_tank_drive</a:t>
+            </a:r>
+          </a:p>
+        </p:txBody>
+      </p:sp>
+      <p:sp>
+        <p:nvSpPr>
+          <p:cNvPr id="7" name="TextBox 6"/>
+          <p:cNvSpPr txBox="1"/>
+          <p:nvPr/>
+        </p:nvSpPr>
+        <p:spPr>
+          <a:xfrm>
+            <a:off x="502920" y="1901952"/>
+            <a:ext cx="11185855" cy="3273552"/>
+          </a:xfrm>
+          <a:prstGeom prst="rect">
+            <a:avLst/>
+          </a:prstGeom>
+          <a:noFill/>
+        </p:spPr>
+        <p:txBody>
+          <a:bodyPr wrap="square" lIns="0" tIns="0" rIns="0" bIns="0">
+            <a:spAutoFit/>
+          </a:bodyPr>
+          <a:lstStyle/>
+          <a:p>
+            <a:pPr algn="l">
+              <a:lnSpc>
+                <a:spcPct val="100000"/>
+              </a:lnSpc>
+              <a:spcAft>
+                <a:spcPts val="800"/>
+              </a:spcAft>
+              <a:defRPr sz="1800" b="0">
+                <a:solidFill>
+                  <a:srgbClr val="222222"/>
+                </a:solidFill>
+                <a:latin typeface="Calibri"/>
+              </a:defRPr>
+            </a:pPr>
+            <a:r>
+              <a:rPr sz="1800" b="0">
+                <a:solidFill>
+                  <a:srgbClr val="222222"/>
+                </a:solidFill>
+                <a:latin typeface="Calibri"/>
+              </a:rPr>
+              <a:t>4.  Set turnMax to MOTOR_MAX. Which is easier to aim?</a:t>
+            </a:r>
+          </a:p>
+          <a:p>
+            <a:pPr algn="l">
+              <a:lnSpc>
+                <a:spcPct val="100000"/>
+              </a:lnSpc>
+              <a:spcAft>
+                <a:spcPts val="800"/>
+              </a:spcAft>
+              <a:defRPr sz="1800" b="0">
+                <a:solidFill>
+                  <a:srgbClr val="222222"/>
+                </a:solidFill>
+                <a:latin typeface="Calibri"/>
+              </a:defRPr>
+            </a:pPr>
+            <a:r>
+              <a:rPr sz="1800" b="0">
+                <a:solidFill>
+                  <a:srgbClr val="222222"/>
+                </a:solidFill>
+                <a:latin typeface="Calibri"/>
+              </a:rPr>
+              <a:t>5.  Lines 151 and 152: swap the + and the - and drive. What is wrong now?</a:t>
+            </a:r>
+          </a:p>
+          <a:p>
+            <a:pPr algn="l">
+              <a:lnSpc>
+                <a:spcPct val="100000"/>
+              </a:lnSpc>
+              <a:spcAft>
+                <a:spcPts val="800"/>
+              </a:spcAft>
+              <a:defRPr sz="1800" b="0">
+                <a:solidFill>
+                  <a:srgbClr val="222222"/>
+                </a:solidFill>
+                <a:latin typeface="Calibri"/>
+              </a:defRPr>
+            </a:pPr>
+            <a:r>
+              <a:rPr sz="1800" b="0">
+                <a:solidFill>
+                  <a:srgbClr val="222222"/>
+                </a:solidFill>
+                <a:latin typeface="Calibri"/>
+              </a:rPr>
+              <a:t>6.  Line 152: make it  rightSpeed = forward;  with no turn term. Why is that worse steering?</a:t>
+            </a:r>
+          </a:p>
+        </p:txBody>
+      </p:sp>
+      <p:sp>
+        <p:nvSpPr>
+          <p:cNvPr id="8" name="Rounded Rectangle 7"/>
           <p:cNvSpPr/>
           <p:nvPr/>
         </p:nvSpPr>
@@ -16631,7 +17472,7 @@
           </a:fontRef>
         </p:style>
         <p:txBody>
-          <a:bodyPr wrap="square" lIns="164592" tIns="73152" rIns="164592" bIns="73152" rtlCol="0" anchor="ctr"/>
+          <a:bodyPr rtlCol="0" anchor="ctr" wrap="square" lIns="164592" rIns="164592" tIns="73152" bIns="73152"/>
           <a:lstStyle/>
           <a:p>
             <a:pPr algn="l"/>
@@ -16664,8 +17505,8 @@
 </p:sld>
 </file>
 
-<file path=ppt/slides/slide23.xml><?xml version="1.0" encoding="utf-8"?>
-<p:sld xmlns:a="http://schemas.openxmlformats.org/drawingml/2006/main" xmlns:r="http://schemas.openxmlformats.org/officeDocument/2006/relationships" xmlns:p="http://schemas.openxmlformats.org/presentationml/2006/main">
+<file path=ppt/slides/slide25.xml><?xml version="1.0" encoding="utf-8"?>
+<p:sld xmlns:a="http://schemas.openxmlformats.org/drawingml/2006/main" xmlns:p="http://schemas.openxmlformats.org/presentationml/2006/main" xmlns:r="http://schemas.openxmlformats.org/officeDocument/2006/relationships">
   <p:cSld>
     <p:spTree>
       <p:nvGrpSpPr>
@@ -16673,14 +17514,7 @@
         <p:cNvGrpSpPr/>
         <p:nvPr/>
       </p:nvGrpSpPr>
-      <p:grpSpPr>
-        <a:xfrm>
-          <a:off x="0" y="0"/>
-          <a:ext cx="0" cy="0"/>
-          <a:chOff x="0" y="0"/>
-          <a:chExt cx="0" cy="0"/>
-        </a:xfrm>
-      </p:grpSpPr>
+      <p:grpSpPr/>
       <p:sp>
         <p:nvSpPr>
           <p:cNvPr id="2" name="Title 1"/>
@@ -16768,7 +17602,6 @@
           <a:lstStyle/>
           <a:p>
             <a:pPr algn="ctr"/>
-            <a:endParaRPr/>
           </a:p>
         </p:txBody>
       </p:sp>
@@ -16863,7 +17696,7 @@
                 </a:solidFill>
                 <a:latin typeface="Calibri"/>
               </a:rPr>
-              <a:t>23</a:t>
+              <a:t>25</a:t>
             </a:r>
           </a:p>
         </p:txBody>
@@ -16911,7 +17744,7 @@
                 </a:solidFill>
                 <a:latin typeface="Calibri"/>
               </a:rPr>
-              <a:t>A radio link is not reliable. Batteries go flat, people walk between the pad and the vehicle, controllers get switched off.</a:t>
+              <a:t>A radio link is not reliable. Batteries go flat, people walk between the pad and the vehicle, and an operator walks further than the radio reaches.</a:t>
             </a:r>
           </a:p>
           <a:p>
@@ -16929,12 +17762,6 @@
                 <a:latin typeface="Calibri"/>
               </a:defRPr>
             </a:pPr>
-            <a:endParaRPr sz="2000" b="0">
-              <a:solidFill>
-                <a:srgbClr val="222222"/>
-              </a:solidFill>
-              <a:latin typeface="Calibri"/>
-            </a:endParaRPr>
           </a:p>
           <a:p>
             <a:pPr algn="l">
@@ -16959,78 +17786,6 @@
                 <a:latin typeface="Calibri"/>
               </a:rPr>
               <a:t>The only safe behavior is to STOP. Not carry on with the last command, and not do something clever.</a:t>
-            </a:r>
-          </a:p>
-          <a:p>
-            <a:pPr algn="l">
-              <a:lnSpc>
-                <a:spcPct val="100000"/>
-              </a:lnSpc>
-              <a:spcAft>
-                <a:spcPts val="900"/>
-              </a:spcAft>
-              <a:defRPr sz="1000" b="0">
-                <a:solidFill>
-                  <a:srgbClr val="222222"/>
-                </a:solidFill>
-                <a:latin typeface="Calibri"/>
-              </a:defRPr>
-            </a:pPr>
-            <a:endParaRPr sz="2000" b="0">
-              <a:solidFill>
-                <a:srgbClr val="222222"/>
-              </a:solidFill>
-              <a:latin typeface="Calibri"/>
-            </a:endParaRPr>
-          </a:p>
-          <a:p>
-            <a:pPr algn="l">
-              <a:lnSpc>
-                <a:spcPct val="100000"/>
-              </a:lnSpc>
-              <a:spcAft>
-                <a:spcPts val="900"/>
-              </a:spcAft>
-              <a:defRPr sz="2000" b="0">
-                <a:solidFill>
-                  <a:srgbClr val="222222"/>
-                </a:solidFill>
-                <a:latin typeface="Calibri"/>
-              </a:defRPr>
-            </a:pPr>
-            <a:r>
-              <a:rPr sz="2000" b="0">
-                <a:solidFill>
-                  <a:srgbClr val="222222"/>
-                </a:solidFill>
-                <a:latin typeface="Calibri"/>
-              </a:rPr>
-              <a:t>Three lines at the top of loop() do it:</a:t>
-            </a:r>
-          </a:p>
-          <a:p>
-            <a:pPr lvl="1" algn="l">
-              <a:lnSpc>
-                <a:spcPct val="100000"/>
-              </a:lnSpc>
-              <a:spcAft>
-                <a:spcPts val="900"/>
-              </a:spcAft>
-              <a:defRPr sz="2000" b="0">
-                <a:solidFill>
-                  <a:srgbClr val="222222"/>
-                </a:solidFill>
-                <a:latin typeface="Calibri"/>
-              </a:defRPr>
-            </a:pPr>
-            <a:r>
-              <a:rPr sz="2000" b="0">
-                <a:solidFill>
-                  <a:srgbClr val="222222"/>
-                </a:solidFill>
-                <a:latin typeface="Calibri"/>
-              </a:rPr>
-              <a:t>if (!connected) { drive(0, 0); return; }</a:t>
             </a:r>
           </a:p>
         </p:txBody>
@@ -17064,15 +17819,81 @@
               <a:spcAft>
                 <a:spcPts val="900"/>
               </a:spcAft>
-              <a:defRPr sz="2000" b="0">
-                <a:solidFill>
-                  <a:srgbClr val="222222"/>
-                </a:solidFill>
-                <a:latin typeface="Calibri"/>
-              </a:defRPr>
-            </a:pPr>
-            <a:r>
-              <a:rPr sz="2000" b="0">
+              <a:defRPr sz="1800" b="0">
+                <a:solidFill>
+                  <a:srgbClr val="222222"/>
+                </a:solidFill>
+                <a:latin typeface="Calibri"/>
+              </a:defRPr>
+            </a:pPr>
+            <a:r>
+              <a:rPr sz="1800" b="0">
+                <a:solidFill>
+                  <a:srgbClr val="222222"/>
+                </a:solidFill>
+                <a:latin typeface="Calibri"/>
+              </a:rPr>
+              <a:t>Three lines at the top of loop() do it:</a:t>
+            </a:r>
+          </a:p>
+          <a:p>
+            <a:pPr lvl="1" algn="l">
+              <a:lnSpc>
+                <a:spcPct val="100000"/>
+              </a:lnSpc>
+              <a:spcAft>
+                <a:spcPts val="900"/>
+              </a:spcAft>
+              <a:defRPr sz="1800" b="0">
+                <a:solidFill>
+                  <a:srgbClr val="222222"/>
+                </a:solidFill>
+                <a:latin typeface="Calibri"/>
+              </a:defRPr>
+            </a:pPr>
+            <a:r>
+              <a:rPr sz="1800" b="0">
+                <a:solidFill>
+                  <a:srgbClr val="222222"/>
+                </a:solidFill>
+                <a:latin typeface="Calibri"/>
+              </a:rPr>
+              <a:t>if (!connected) { drive(0, 0); return; }</a:t>
+            </a:r>
+          </a:p>
+          <a:p>
+            <a:pPr algn="l">
+              <a:lnSpc>
+                <a:spcPct val="100000"/>
+              </a:lnSpc>
+              <a:spcAft>
+                <a:spcPts val="900"/>
+              </a:spcAft>
+              <a:defRPr sz="900" b="0">
+                <a:solidFill>
+                  <a:srgbClr val="222222"/>
+                </a:solidFill>
+                <a:latin typeface="Calibri"/>
+              </a:defRPr>
+            </a:pPr>
+          </a:p>
+          <a:p>
+            <a:pPr algn="l">
+              <a:lnSpc>
+                <a:spcPct val="100000"/>
+              </a:lnSpc>
+              <a:spcAft>
+                <a:spcPts val="900"/>
+              </a:spcAft>
+              <a:defRPr sz="1800" b="0">
+                <a:solidFill>
+                  <a:srgbClr val="222222"/>
+                </a:solidFill>
+                <a:latin typeface="Calibri"/>
+              </a:defRPr>
+            </a:pPr>
+            <a:r>
+              <a:rPr sz="1800" b="0">
                 <a:solidFill>
                   <a:srgbClr val="222222"/>
                 </a:solidFill>
@@ -17089,19 +17910,13 @@
               <a:spcAft>
                 <a:spcPts val="900"/>
               </a:spcAft>
-              <a:defRPr sz="1000" b="0">
-                <a:solidFill>
-                  <a:srgbClr val="222222"/>
-                </a:solidFill>
-                <a:latin typeface="Calibri"/>
-              </a:defRPr>
-            </a:pPr>
-            <a:endParaRPr sz="2000" b="0">
-              <a:solidFill>
-                <a:srgbClr val="222222"/>
-              </a:solidFill>
-              <a:latin typeface="Calibri"/>
-            </a:endParaRPr>
+              <a:defRPr sz="900" b="0">
+                <a:solidFill>
+                  <a:srgbClr val="222222"/>
+                </a:solidFill>
+                <a:latin typeface="Calibri"/>
+              </a:defRPr>
+            </a:pPr>
           </a:p>
           <a:p>
             <a:pPr algn="l">
@@ -17111,15 +17926,15 @@
               <a:spcAft>
                 <a:spcPts val="900"/>
               </a:spcAft>
-              <a:defRPr sz="2000" b="0">
-                <a:solidFill>
-                  <a:srgbClr val="222222"/>
-                </a:solidFill>
-                <a:latin typeface="Calibri"/>
-              </a:defRPr>
-            </a:pPr>
-            <a:r>
-              <a:rPr sz="2000" b="0">
+              <a:defRPr sz="1800" b="0">
+                <a:solidFill>
+                  <a:srgbClr val="222222"/>
+                </a:solidFill>
+                <a:latin typeface="Calibri"/>
+              </a:defRPr>
+            </a:pPr>
+            <a:r>
+              <a:rPr sz="1800" b="0">
                 <a:solidFill>
                   <a:srgbClr val="222222"/>
                 </a:solidFill>
@@ -17171,7 +17986,7 @@
           </a:fontRef>
         </p:style>
         <p:txBody>
-          <a:bodyPr wrap="square" lIns="164592" tIns="73152" rIns="164592" bIns="73152" rtlCol="0" anchor="ctr"/>
+          <a:bodyPr rtlCol="0" anchor="ctr" wrap="square" lIns="164592" rIns="164592" tIns="73152" bIns="73152"/>
           <a:lstStyle/>
           <a:p>
             <a:pPr algn="l"/>
@@ -17204,8 +18019,8 @@
 </p:sld>
 </file>
 
-<file path=ppt/slides/slide24.xml><?xml version="1.0" encoding="utf-8"?>
-<p:sld xmlns:a="http://schemas.openxmlformats.org/drawingml/2006/main" xmlns:r="http://schemas.openxmlformats.org/officeDocument/2006/relationships" xmlns:p="http://schemas.openxmlformats.org/presentationml/2006/main">
+<file path=ppt/slides/slide26.xml><?xml version="1.0" encoding="utf-8"?>
+<p:sld xmlns:a="http://schemas.openxmlformats.org/drawingml/2006/main" xmlns:p="http://schemas.openxmlformats.org/presentationml/2006/main" xmlns:r="http://schemas.openxmlformats.org/officeDocument/2006/relationships">
   <p:cSld>
     <p:spTree>
       <p:nvGrpSpPr>
@@ -17213,14 +18028,7 @@
         <p:cNvGrpSpPr/>
         <p:nvPr/>
       </p:nvGrpSpPr>
-      <p:grpSpPr>
-        <a:xfrm>
-          <a:off x="0" y="0"/>
-          <a:ext cx="0" cy="0"/>
-          <a:chOff x="0" y="0"/>
-          <a:chExt cx="0" cy="0"/>
-        </a:xfrm>
-      </p:grpSpPr>
+      <p:grpSpPr/>
       <p:sp>
         <p:nvSpPr>
           <p:cNvPr id="2" name="Title 1"/>
@@ -17308,7 +18116,6 @@
           <a:lstStyle/>
           <a:p>
             <a:pPr algn="ctr"/>
-            <a:endParaRPr/>
           </a:p>
         </p:txBody>
       </p:sp>
@@ -17403,7 +18210,7 @@
                 </a:solidFill>
                 <a:latin typeface="Calibri"/>
               </a:rPr>
-              <a:t>24</a:t>
+              <a:t>26</a:t>
             </a:r>
           </a:p>
         </p:txBody>
@@ -17427,27 +18234,9 @@
                 <a:tableStyleId>{5C22544A-7EE6-4342-B048-85BDC9FD1C3A}</a:tableStyleId>
               </a:tblPr>
               <a:tblGrid>
-                <a:gridCol w="3728618">
-                  <a:extLst>
-                    <a:ext uri="{9D8B030D-6E8A-4147-A177-3AD203B41FA5}">
-                      <a16:colId xmlns:a16="http://schemas.microsoft.com/office/drawing/2014/main" val="20000"/>
-                    </a:ext>
-                  </a:extLst>
-                </a:gridCol>
-                <a:gridCol w="3195958">
-                  <a:extLst>
-                    <a:ext uri="{9D8B030D-6E8A-4147-A177-3AD203B41FA5}">
-                      <a16:colId xmlns:a16="http://schemas.microsoft.com/office/drawing/2014/main" val="20001"/>
-                    </a:ext>
-                  </a:extLst>
-                </a:gridCol>
-                <a:gridCol w="4261278">
-                  <a:extLst>
-                    <a:ext uri="{9D8B030D-6E8A-4147-A177-3AD203B41FA5}">
-                      <a16:colId xmlns:a16="http://schemas.microsoft.com/office/drawing/2014/main" val="20002"/>
-                    </a:ext>
-                  </a:extLst>
-                </a:gridCol>
+                <a:gridCol w="3728618"/>
+                <a:gridCol w="3195958"/>
+                <a:gridCol w="4261278"/>
               </a:tblGrid>
               <a:tr h="724807">
                 <a:tc>
@@ -17516,11 +18305,6 @@
                     </a:solidFill>
                   </a:tcPr>
                 </a:tc>
-                <a:extLst>
-                  <a:ext uri="{0D108BD9-81ED-4DB2-BD59-A6C34878D82A}">
-                    <a16:rowId xmlns:a16="http://schemas.microsoft.com/office/drawing/2014/main" val="10000"/>
-                  </a:ext>
-                </a:extLst>
               </a:tr>
               <a:tr h="724807">
                 <a:tc>
@@ -17589,11 +18373,6 @@
                     </a:solidFill>
                   </a:tcPr>
                 </a:tc>
-                <a:extLst>
-                  <a:ext uri="{0D108BD9-81ED-4DB2-BD59-A6C34878D82A}">
-                    <a16:rowId xmlns:a16="http://schemas.microsoft.com/office/drawing/2014/main" val="10001"/>
-                  </a:ext>
-                </a:extLst>
               </a:tr>
               <a:tr h="724807">
                 <a:tc>
@@ -17662,11 +18441,6 @@
                     </a:solidFill>
                   </a:tcPr>
                 </a:tc>
-                <a:extLst>
-                  <a:ext uri="{0D108BD9-81ED-4DB2-BD59-A6C34878D82A}">
-                    <a16:rowId xmlns:a16="http://schemas.microsoft.com/office/drawing/2014/main" val="10002"/>
-                  </a:ext>
-                </a:extLst>
               </a:tr>
               <a:tr h="724807">
                 <a:tc>
@@ -17735,11 +18509,6 @@
                     </a:solidFill>
                   </a:tcPr>
                 </a:tc>
-                <a:extLst>
-                  <a:ext uri="{0D108BD9-81ED-4DB2-BD59-A6C34878D82A}">
-                    <a16:rowId xmlns:a16="http://schemas.microsoft.com/office/drawing/2014/main" val="10003"/>
-                  </a:ext>
-                </a:extLst>
               </a:tr>
               <a:tr h="724807">
                 <a:tc>
@@ -17808,11 +18577,6 @@
                     </a:solidFill>
                   </a:tcPr>
                 </a:tc>
-                <a:extLst>
-                  <a:ext uri="{0D108BD9-81ED-4DB2-BD59-A6C34878D82A}">
-                    <a16:rowId xmlns:a16="http://schemas.microsoft.com/office/drawing/2014/main" val="10004"/>
-                  </a:ext>
-                </a:extLst>
               </a:tr>
               <a:tr h="724807">
                 <a:tc>
@@ -17881,11 +18645,6 @@
                     </a:solidFill>
                   </a:tcPr>
                 </a:tc>
-                <a:extLst>
-                  <a:ext uri="{0D108BD9-81ED-4DB2-BD59-A6C34878D82A}">
-                    <a16:rowId xmlns:a16="http://schemas.microsoft.com/office/drawing/2014/main" val="10005"/>
-                  </a:ext>
-                </a:extLst>
               </a:tr>
               <a:tr h="724808">
                 <a:tc>
@@ -17954,11 +18713,6 @@
                     </a:solidFill>
                   </a:tcPr>
                 </a:tc>
-                <a:extLst>
-                  <a:ext uri="{0D108BD9-81ED-4DB2-BD59-A6C34878D82A}">
-                    <a16:rowId xmlns:a16="http://schemas.microsoft.com/office/drawing/2014/main" val="10006"/>
-                  </a:ext>
-                </a:extLst>
               </a:tr>
             </a:tbl>
           </a:graphicData>
@@ -17972,8 +18726,8 @@
 </p:sld>
 </file>
 
-<file path=ppt/slides/slide25.xml><?xml version="1.0" encoding="utf-8"?>
-<p:sld xmlns:a="http://schemas.openxmlformats.org/drawingml/2006/main" xmlns:r="http://schemas.openxmlformats.org/officeDocument/2006/relationships" xmlns:p="http://schemas.openxmlformats.org/presentationml/2006/main">
+<file path=ppt/slides/slide27.xml><?xml version="1.0" encoding="utf-8"?>
+<p:sld xmlns:a="http://schemas.openxmlformats.org/drawingml/2006/main" xmlns:p="http://schemas.openxmlformats.org/presentationml/2006/main" xmlns:r="http://schemas.openxmlformats.org/officeDocument/2006/relationships">
   <p:cSld>
     <p:spTree>
       <p:nvGrpSpPr>
@@ -17981,14 +18735,7 @@
         <p:cNvGrpSpPr/>
         <p:nvPr/>
       </p:nvGrpSpPr>
-      <p:grpSpPr>
-        <a:xfrm>
-          <a:off x="0" y="0"/>
-          <a:ext cx="0" cy="0"/>
-          <a:chOff x="0" y="0"/>
-          <a:chExt cx="0" cy="0"/>
-        </a:xfrm>
-      </p:grpSpPr>
+      <p:grpSpPr/>
       <p:sp>
         <p:nvSpPr>
           <p:cNvPr id="2" name="Title 1"/>
@@ -18076,7 +18823,6 @@
           <a:lstStyle/>
           <a:p>
             <a:pPr algn="ctr"/>
-            <a:endParaRPr/>
           </a:p>
         </p:txBody>
       </p:sp>
@@ -18171,7 +18917,7 @@
                 </a:solidFill>
                 <a:latin typeface="Calibri"/>
               </a:rPr>
-              <a:t>25</a:t>
+              <a:t>27</a:t>
             </a:r>
           </a:p>
         </p:txBody>
@@ -18392,7 +19138,7 @@
                 </a:solidFill>
                 <a:latin typeface="Calibri"/>
               </a:rPr>
-              <a:t>6.  Why is steering limited to half power by default?</a:t>
+              <a:t>6.  Why is steering limited to 75% of full power by default?</a:t>
             </a:r>
           </a:p>
           <a:p>
@@ -18431,7 +19177,7 @@
 </file>
 
 <file path=ppt/slides/slide3.xml><?xml version="1.0" encoding="utf-8"?>
-<p:sld xmlns:a="http://schemas.openxmlformats.org/drawingml/2006/main" xmlns:r="http://schemas.openxmlformats.org/officeDocument/2006/relationships" xmlns:p="http://schemas.openxmlformats.org/presentationml/2006/main">
+<p:sld xmlns:a="http://schemas.openxmlformats.org/drawingml/2006/main" xmlns:p="http://schemas.openxmlformats.org/presentationml/2006/main" xmlns:r="http://schemas.openxmlformats.org/officeDocument/2006/relationships">
   <p:cSld>
     <p:spTree>
       <p:nvGrpSpPr>
@@ -18439,14 +19185,7 @@
         <p:cNvGrpSpPr/>
         <p:nvPr/>
       </p:nvGrpSpPr>
-      <p:grpSpPr>
-        <a:xfrm>
-          <a:off x="0" y="0"/>
-          <a:ext cx="0" cy="0"/>
-          <a:chOff x="0" y="0"/>
-          <a:chExt cx="0" cy="0"/>
-        </a:xfrm>
-      </p:grpSpPr>
+      <p:grpSpPr/>
       <p:sp>
         <p:nvSpPr>
           <p:cNvPr id="2" name="Title 1"/>
@@ -18534,7 +19273,6 @@
           <a:lstStyle/>
           <a:p>
             <a:pPr algn="ctr"/>
-            <a:endParaRPr/>
           </a:p>
         </p:txBody>
       </p:sp>
@@ -18745,12 +19483,6 @@
                 <a:latin typeface="Calibri"/>
               </a:defRPr>
             </a:pPr>
-            <a:endParaRPr sz="2800" b="0">
-              <a:solidFill>
-                <a:srgbClr val="222222"/>
-              </a:solidFill>
-              <a:latin typeface="Calibri"/>
-            </a:endParaRPr>
           </a:p>
           <a:p>
             <a:pPr algn="l">
@@ -18820,7 +19552,7 @@
           </a:fontRef>
         </p:style>
         <p:txBody>
-          <a:bodyPr wrap="square" lIns="164592" tIns="73152" rIns="164592" bIns="73152" rtlCol="0" anchor="ctr"/>
+          <a:bodyPr rtlCol="0" anchor="ctr" wrap="square" lIns="164592" rIns="164592" tIns="73152" bIns="73152"/>
           <a:lstStyle/>
           <a:p>
             <a:pPr algn="l"/>
@@ -18854,7 +19586,7 @@
 </file>
 
 <file path=ppt/slides/slide4.xml><?xml version="1.0" encoding="utf-8"?>
-<p:sld xmlns:a="http://schemas.openxmlformats.org/drawingml/2006/main" xmlns:r="http://schemas.openxmlformats.org/officeDocument/2006/relationships" xmlns:p="http://schemas.openxmlformats.org/presentationml/2006/main">
+<p:sld xmlns:a="http://schemas.openxmlformats.org/drawingml/2006/main" xmlns:p="http://schemas.openxmlformats.org/presentationml/2006/main" xmlns:r="http://schemas.openxmlformats.org/officeDocument/2006/relationships">
   <p:cSld>
     <p:spTree>
       <p:nvGrpSpPr>
@@ -18862,14 +19594,7 @@
         <p:cNvGrpSpPr/>
         <p:nvPr/>
       </p:nvGrpSpPr>
-      <p:grpSpPr>
-        <a:xfrm>
-          <a:off x="0" y="0"/>
-          <a:ext cx="0" cy="0"/>
-          <a:chOff x="0" y="0"/>
-          <a:chExt cx="0" cy="0"/>
-        </a:xfrm>
-      </p:grpSpPr>
+      <p:grpSpPr/>
       <p:sp>
         <p:nvSpPr>
           <p:cNvPr id="2" name="Title 1"/>
@@ -18957,7 +19682,6 @@
           <a:lstStyle/>
           <a:p>
             <a:pPr algn="ctr"/>
-            <a:endParaRPr/>
           </a:p>
         </p:txBody>
       </p:sp>
@@ -19076,20 +19800,8 @@
                 <a:tableStyleId>{5C22544A-7EE6-4342-B048-85BDC9FD1C3A}</a:tableStyleId>
               </a:tblPr>
               <a:tblGrid>
-                <a:gridCol w="1118585">
-                  <a:extLst>
-                    <a:ext uri="{9D8B030D-6E8A-4147-A177-3AD203B41FA5}">
-                      <a16:colId xmlns:a16="http://schemas.microsoft.com/office/drawing/2014/main" val="20000"/>
-                    </a:ext>
-                  </a:extLst>
-                </a:gridCol>
-                <a:gridCol w="10067269">
-                  <a:extLst>
-                    <a:ext uri="{9D8B030D-6E8A-4147-A177-3AD203B41FA5}">
-                      <a16:colId xmlns:a16="http://schemas.microsoft.com/office/drawing/2014/main" val="20001"/>
-                    </a:ext>
-                  </a:extLst>
-                </a:gridCol>
+                <a:gridCol w="1118585"/>
+                <a:gridCol w="10067269"/>
               </a:tblGrid>
               <a:tr h="457200">
                 <a:tc>
@@ -19136,11 +19848,6 @@
                     </a:solidFill>
                   </a:tcPr>
                 </a:tc>
-                <a:extLst>
-                  <a:ext uri="{0D108BD9-81ED-4DB2-BD59-A6C34878D82A}">
-                    <a16:rowId xmlns:a16="http://schemas.microsoft.com/office/drawing/2014/main" val="10000"/>
-                  </a:ext>
-                </a:extLst>
               </a:tr>
               <a:tr h="457200">
                 <a:tc>
@@ -19187,11 +19894,6 @@
                     </a:solidFill>
                   </a:tcPr>
                 </a:tc>
-                <a:extLst>
-                  <a:ext uri="{0D108BD9-81ED-4DB2-BD59-A6C34878D82A}">
-                    <a16:rowId xmlns:a16="http://schemas.microsoft.com/office/drawing/2014/main" val="10001"/>
-                  </a:ext>
-                </a:extLst>
               </a:tr>
               <a:tr h="457200">
                 <a:tc>
@@ -19238,11 +19940,6 @@
                     </a:solidFill>
                   </a:tcPr>
                 </a:tc>
-                <a:extLst>
-                  <a:ext uri="{0D108BD9-81ED-4DB2-BD59-A6C34878D82A}">
-                    <a16:rowId xmlns:a16="http://schemas.microsoft.com/office/drawing/2014/main" val="10002"/>
-                  </a:ext>
-                </a:extLst>
               </a:tr>
               <a:tr h="457200">
                 <a:tc>
@@ -19289,11 +19986,6 @@
                     </a:solidFill>
                   </a:tcPr>
                 </a:tc>
-                <a:extLst>
-                  <a:ext uri="{0D108BD9-81ED-4DB2-BD59-A6C34878D82A}">
-                    <a16:rowId xmlns:a16="http://schemas.microsoft.com/office/drawing/2014/main" val="10003"/>
-                  </a:ext>
-                </a:extLst>
               </a:tr>
               <a:tr h="457200">
                 <a:tc>
@@ -19340,11 +20032,6 @@
                     </a:solidFill>
                   </a:tcPr>
                 </a:tc>
-                <a:extLst>
-                  <a:ext uri="{0D108BD9-81ED-4DB2-BD59-A6C34878D82A}">
-                    <a16:rowId xmlns:a16="http://schemas.microsoft.com/office/drawing/2014/main" val="10004"/>
-                  </a:ext>
-                </a:extLst>
               </a:tr>
               <a:tr h="457200">
                 <a:tc>
@@ -19391,11 +20078,6 @@
                     </a:solidFill>
                   </a:tcPr>
                 </a:tc>
-                <a:extLst>
-                  <a:ext uri="{0D108BD9-81ED-4DB2-BD59-A6C34878D82A}">
-                    <a16:rowId xmlns:a16="http://schemas.microsoft.com/office/drawing/2014/main" val="10005"/>
-                  </a:ext>
-                </a:extLst>
               </a:tr>
               <a:tr h="457200">
                 <a:tc>
@@ -19442,11 +20124,6 @@
                     </a:solidFill>
                   </a:tcPr>
                 </a:tc>
-                <a:extLst>
-                  <a:ext uri="{0D108BD9-81ED-4DB2-BD59-A6C34878D82A}">
-                    <a16:rowId xmlns:a16="http://schemas.microsoft.com/office/drawing/2014/main" val="10006"/>
-                  </a:ext>
-                </a:extLst>
               </a:tr>
               <a:tr h="457200">
                 <a:tc>
@@ -19493,11 +20170,6 @@
                     </a:solidFill>
                   </a:tcPr>
                 </a:tc>
-                <a:extLst>
-                  <a:ext uri="{0D108BD9-81ED-4DB2-BD59-A6C34878D82A}">
-                    <a16:rowId xmlns:a16="http://schemas.microsoft.com/office/drawing/2014/main" val="10007"/>
-                  </a:ext>
-                </a:extLst>
               </a:tr>
               <a:tr h="457200">
                 <a:tc>
@@ -19544,11 +20216,6 @@
                     </a:solidFill>
                   </a:tcPr>
                 </a:tc>
-                <a:extLst>
-                  <a:ext uri="{0D108BD9-81ED-4DB2-BD59-A6C34878D82A}">
-                    <a16:rowId xmlns:a16="http://schemas.microsoft.com/office/drawing/2014/main" val="10008"/>
-                  </a:ext>
-                </a:extLst>
               </a:tr>
               <a:tr h="457200">
                 <a:tc>
@@ -19595,11 +20262,6 @@
                     </a:solidFill>
                   </a:tcPr>
                 </a:tc>
-                <a:extLst>
-                  <a:ext uri="{0D108BD9-81ED-4DB2-BD59-A6C34878D82A}">
-                    <a16:rowId xmlns:a16="http://schemas.microsoft.com/office/drawing/2014/main" val="10009"/>
-                  </a:ext>
-                </a:extLst>
               </a:tr>
               <a:tr h="457200">
                 <a:tc>
@@ -19646,11 +20308,6 @@
                     </a:solidFill>
                   </a:tcPr>
                 </a:tc>
-                <a:extLst>
-                  <a:ext uri="{0D108BD9-81ED-4DB2-BD59-A6C34878D82A}">
-                    <a16:rowId xmlns:a16="http://schemas.microsoft.com/office/drawing/2014/main" val="10010"/>
-                  </a:ext>
-                </a:extLst>
               </a:tr>
             </a:tbl>
           </a:graphicData>
@@ -19665,7 +20322,7 @@
 </file>
 
 <file path=ppt/slides/slide5.xml><?xml version="1.0" encoding="utf-8"?>
-<p:sld xmlns:a="http://schemas.openxmlformats.org/drawingml/2006/main" xmlns:r="http://schemas.openxmlformats.org/officeDocument/2006/relationships" xmlns:p="http://schemas.openxmlformats.org/presentationml/2006/main">
+<p:sld xmlns:a="http://schemas.openxmlformats.org/drawingml/2006/main" xmlns:p="http://schemas.openxmlformats.org/presentationml/2006/main" xmlns:r="http://schemas.openxmlformats.org/officeDocument/2006/relationships">
   <p:cSld>
     <p:spTree>
       <p:nvGrpSpPr>
@@ -19673,14 +20330,7 @@
         <p:cNvGrpSpPr/>
         <p:nvPr/>
       </p:nvGrpSpPr>
-      <p:grpSpPr>
-        <a:xfrm>
-          <a:off x="0" y="0"/>
-          <a:ext cx="0" cy="0"/>
-          <a:chOff x="0" y="0"/>
-          <a:chExt cx="0" cy="0"/>
-        </a:xfrm>
-      </p:grpSpPr>
+      <p:grpSpPr/>
       <p:sp>
         <p:nvSpPr>
           <p:cNvPr id="2" name="Title 1"/>
@@ -19768,7 +20418,6 @@
           <a:lstStyle/>
           <a:p>
             <a:pPr algn="ctr"/>
-            <a:endParaRPr/>
           </a:p>
         </p:txBody>
       </p:sp>
@@ -20075,12 +20724,6 @@
                 <a:latin typeface="Calibri"/>
               </a:defRPr>
             </a:pPr>
-            <a:endParaRPr sz="1900" b="0">
-              <a:solidFill>
-                <a:srgbClr val="222222"/>
-              </a:solidFill>
-              <a:latin typeface="Calibri"/>
-            </a:endParaRPr>
           </a:p>
           <a:p>
             <a:pPr algn="l">
@@ -20150,7 +20793,7 @@
           </a:fontRef>
         </p:style>
         <p:txBody>
-          <a:bodyPr wrap="square" lIns="164592" tIns="73152" rIns="164592" bIns="73152" rtlCol="0" anchor="ctr"/>
+          <a:bodyPr rtlCol="0" anchor="ctr" wrap="square" lIns="164592" rIns="164592" tIns="73152" bIns="73152"/>
           <a:lstStyle/>
           <a:p>
             <a:pPr algn="l"/>
@@ -20184,7 +20827,7 @@
 </file>
 
 <file path=ppt/slides/slide6.xml><?xml version="1.0" encoding="utf-8"?>
-<p:sld xmlns:a="http://schemas.openxmlformats.org/drawingml/2006/main" xmlns:r="http://schemas.openxmlformats.org/officeDocument/2006/relationships" xmlns:p="http://schemas.openxmlformats.org/presentationml/2006/main">
+<p:sld xmlns:a="http://schemas.openxmlformats.org/drawingml/2006/main" xmlns:p="http://schemas.openxmlformats.org/presentationml/2006/main" xmlns:r="http://schemas.openxmlformats.org/officeDocument/2006/relationships">
   <p:cSld>
     <p:spTree>
       <p:nvGrpSpPr>
@@ -20192,14 +20835,7 @@
         <p:cNvGrpSpPr/>
         <p:nvPr/>
       </p:nvGrpSpPr>
-      <p:grpSpPr>
-        <a:xfrm>
-          <a:off x="0" y="0"/>
-          <a:ext cx="0" cy="0"/>
-          <a:chOff x="0" y="0"/>
-          <a:chExt cx="0" cy="0"/>
-        </a:xfrm>
-      </p:grpSpPr>
+      <p:grpSpPr/>
       <p:sp>
         <p:nvSpPr>
           <p:cNvPr id="2" name="Title 1"/>
@@ -20287,7 +20923,6 @@
           <a:lstStyle/>
           <a:p>
             <a:pPr algn="ctr"/>
-            <a:endParaRPr/>
           </a:p>
         </p:txBody>
       </p:sp>
@@ -20448,12 +21083,6 @@
                 <a:latin typeface="Calibri"/>
               </a:defRPr>
             </a:pPr>
-            <a:endParaRPr sz="2000" b="0">
-              <a:solidFill>
-                <a:srgbClr val="222222"/>
-              </a:solidFill>
-              <a:latin typeface="Calibri"/>
-            </a:endParaRPr>
           </a:p>
           <a:p>
             <a:pPr algn="l">
@@ -20570,12 +21199,6 @@
                 <a:latin typeface="Calibri"/>
               </a:defRPr>
             </a:pPr>
-            <a:endParaRPr sz="2000" b="0">
-              <a:solidFill>
-                <a:srgbClr val="222222"/>
-              </a:solidFill>
-              <a:latin typeface="Calibri"/>
-            </a:endParaRPr>
           </a:p>
           <a:p>
             <a:pPr algn="l">
@@ -20645,7 +21268,7 @@
           </a:fontRef>
         </p:style>
         <p:txBody>
-          <a:bodyPr wrap="square" lIns="164592" tIns="73152" rIns="164592" bIns="73152" rtlCol="0" anchor="ctr"/>
+          <a:bodyPr rtlCol="0" anchor="ctr" wrap="square" lIns="164592" rIns="164592" tIns="73152" bIns="73152"/>
           <a:lstStyle/>
           <a:p>
             <a:pPr algn="l"/>
@@ -20679,7 +21302,7 @@
 </file>
 
 <file path=ppt/slides/slide7.xml><?xml version="1.0" encoding="utf-8"?>
-<p:sld xmlns:a="http://schemas.openxmlformats.org/drawingml/2006/main" xmlns:r="http://schemas.openxmlformats.org/officeDocument/2006/relationships" xmlns:p="http://schemas.openxmlformats.org/presentationml/2006/main">
+<p:sld xmlns:a="http://schemas.openxmlformats.org/drawingml/2006/main" xmlns:p="http://schemas.openxmlformats.org/presentationml/2006/main" xmlns:r="http://schemas.openxmlformats.org/officeDocument/2006/relationships">
   <p:cSld>
     <p:spTree>
       <p:nvGrpSpPr>
@@ -20687,14 +21310,7 @@
         <p:cNvGrpSpPr/>
         <p:nvPr/>
       </p:nvGrpSpPr>
-      <p:grpSpPr>
-        <a:xfrm>
-          <a:off x="0" y="0"/>
-          <a:ext cx="0" cy="0"/>
-          <a:chOff x="0" y="0"/>
-          <a:chExt cx="0" cy="0"/>
-        </a:xfrm>
-      </p:grpSpPr>
+      <p:grpSpPr/>
       <p:sp>
         <p:nvSpPr>
           <p:cNvPr id="2" name="Title 1"/>
@@ -20782,7 +21398,6 @@
           <a:lstStyle/>
           <a:p>
             <a:pPr algn="ctr"/>
-            <a:endParaRPr/>
           </a:p>
         </p:txBody>
       </p:sp>
@@ -20891,7 +21506,7 @@
           <p:nvPr/>
         </p:nvPicPr>
         <p:blipFill>
-          <a:blip r:embed="rId3"/>
+          <a:blip r:embed="rId2"/>
           <a:stretch>
             <a:fillRect/>
           </a:stretch>
@@ -20915,7 +21530,7 @@
 </file>
 
 <file path=ppt/slides/slide8.xml><?xml version="1.0" encoding="utf-8"?>
-<p:sld xmlns:a="http://schemas.openxmlformats.org/drawingml/2006/main" xmlns:r="http://schemas.openxmlformats.org/officeDocument/2006/relationships" xmlns:p="http://schemas.openxmlformats.org/presentationml/2006/main">
+<p:sld xmlns:a="http://schemas.openxmlformats.org/drawingml/2006/main" xmlns:p="http://schemas.openxmlformats.org/presentationml/2006/main" xmlns:r="http://schemas.openxmlformats.org/officeDocument/2006/relationships">
   <p:cSld>
     <p:spTree>
       <p:nvGrpSpPr>
@@ -20923,14 +21538,7 @@
         <p:cNvGrpSpPr/>
         <p:nvPr/>
       </p:nvGrpSpPr>
-      <p:grpSpPr>
-        <a:xfrm>
-          <a:off x="0" y="0"/>
-          <a:ext cx="0" cy="0"/>
-          <a:chOff x="0" y="0"/>
-          <a:chExt cx="0" cy="0"/>
-        </a:xfrm>
-      </p:grpSpPr>
+      <p:grpSpPr/>
       <p:sp>
         <p:nvSpPr>
           <p:cNvPr id="2" name="Title 1"/>
@@ -21018,7 +21626,6 @@
           <a:lstStyle/>
           <a:p>
             <a:pPr algn="ctr"/>
-            <a:endParaRPr/>
           </a:p>
         </p:txBody>
       </p:sp>
@@ -21303,7 +21910,7 @@
           </a:fontRef>
         </p:style>
         <p:txBody>
-          <a:bodyPr wrap="square" lIns="45720" tIns="18288" rIns="45720" bIns="18288" rtlCol="0" anchor="ctr"/>
+          <a:bodyPr rtlCol="0" anchor="ctr" wrap="square" lIns="45720" rIns="45720" tIns="18288" bIns="18288"/>
           <a:lstStyle/>
           <a:p>
             <a:pPr algn="ctr">
@@ -21410,7 +22017,7 @@
           </a:fontRef>
         </p:style>
         <p:txBody>
-          <a:bodyPr wrap="square" lIns="45720" tIns="18288" rIns="45720" bIns="18288" rtlCol="0" anchor="ctr"/>
+          <a:bodyPr rtlCol="0" anchor="ctr" wrap="square" lIns="45720" rIns="45720" tIns="18288" bIns="18288"/>
           <a:lstStyle/>
           <a:p>
             <a:pPr algn="ctr">
@@ -21517,7 +22124,7 @@
           </a:fontRef>
         </p:style>
         <p:txBody>
-          <a:bodyPr wrap="square" lIns="45720" tIns="18288" rIns="45720" bIns="18288" rtlCol="0" anchor="ctr"/>
+          <a:bodyPr rtlCol="0" anchor="ctr" wrap="square" lIns="45720" rIns="45720" tIns="18288" bIns="18288"/>
           <a:lstStyle/>
           <a:p>
             <a:pPr algn="ctr">
@@ -21587,7 +22194,7 @@
           </a:fontRef>
         </p:style>
         <p:txBody>
-          <a:bodyPr wrap="square" lIns="45720" tIns="18288" rIns="45720" bIns="18288" rtlCol="0" anchor="ctr"/>
+          <a:bodyPr rtlCol="0" anchor="ctr" wrap="square" lIns="45720" rIns="45720" tIns="18288" bIns="18288"/>
           <a:lstStyle/>
           <a:p>
             <a:pPr algn="ctr">
@@ -21694,7 +22301,7 @@
           </a:fontRef>
         </p:style>
         <p:txBody>
-          <a:bodyPr wrap="square" lIns="45720" tIns="18288" rIns="45720" bIns="18288" rtlCol="0" anchor="ctr"/>
+          <a:bodyPr rtlCol="0" anchor="ctr" wrap="square" lIns="45720" rIns="45720" tIns="18288" bIns="18288"/>
           <a:lstStyle/>
           <a:p>
             <a:pPr algn="ctr">
@@ -21801,7 +22408,7 @@
           </a:fontRef>
         </p:style>
         <p:txBody>
-          <a:bodyPr wrap="square" lIns="45720" tIns="18288" rIns="45720" bIns="18288" rtlCol="0" anchor="ctr"/>
+          <a:bodyPr rtlCol="0" anchor="ctr" wrap="square" lIns="45720" rIns="45720" tIns="18288" bIns="18288"/>
           <a:lstStyle/>
           <a:p>
             <a:pPr algn="ctr">
@@ -21871,7 +22478,7 @@
           </a:fontRef>
         </p:style>
         <p:txBody>
-          <a:bodyPr wrap="square" lIns="45720" tIns="18288" rIns="45720" bIns="18288" rtlCol="0" anchor="ctr"/>
+          <a:bodyPr rtlCol="0" anchor="ctr" wrap="square" lIns="45720" rIns="45720" tIns="18288" bIns="18288"/>
           <a:lstStyle/>
           <a:p>
             <a:pPr algn="ctr">
@@ -21978,7 +22585,7 @@
           </a:fontRef>
         </p:style>
         <p:txBody>
-          <a:bodyPr wrap="square" lIns="45720" tIns="18288" rIns="45720" bIns="18288" rtlCol="0" anchor="ctr"/>
+          <a:bodyPr rtlCol="0" anchor="ctr" wrap="square" lIns="45720" rIns="45720" tIns="18288" bIns="18288"/>
           <a:lstStyle/>
           <a:p>
             <a:pPr algn="ctr">
@@ -22085,7 +22692,7 @@
           </a:fontRef>
         </p:style>
         <p:txBody>
-          <a:bodyPr wrap="square" lIns="45720" tIns="18288" rIns="45720" bIns="18288" rtlCol="0" anchor="ctr"/>
+          <a:bodyPr rtlCol="0" anchor="ctr" wrap="square" lIns="45720" rIns="45720" tIns="18288" bIns="18288"/>
           <a:lstStyle/>
           <a:p>
             <a:pPr algn="ctr">
@@ -22155,7 +22762,7 @@
           </a:fontRef>
         </p:style>
         <p:txBody>
-          <a:bodyPr wrap="square" lIns="45720" tIns="18288" rIns="45720" bIns="18288" rtlCol="0" anchor="ctr"/>
+          <a:bodyPr rtlCol="0" anchor="ctr" wrap="square" lIns="45720" rIns="45720" tIns="18288" bIns="18288"/>
           <a:lstStyle/>
           <a:p>
             <a:pPr algn="ctr">
@@ -22262,7 +22869,7 @@
           </a:fontRef>
         </p:style>
         <p:txBody>
-          <a:bodyPr wrap="square" lIns="45720" tIns="18288" rIns="45720" bIns="18288" rtlCol="0" anchor="ctr"/>
+          <a:bodyPr rtlCol="0" anchor="ctr" wrap="square" lIns="45720" rIns="45720" tIns="18288" bIns="18288"/>
           <a:lstStyle/>
           <a:p>
             <a:pPr algn="ctr">
@@ -22369,7 +22976,7 @@
           </a:fontRef>
         </p:style>
         <p:txBody>
-          <a:bodyPr wrap="square" lIns="45720" tIns="18288" rIns="45720" bIns="18288" rtlCol="0" anchor="ctr"/>
+          <a:bodyPr rtlCol="0" anchor="ctr" wrap="square" lIns="45720" rIns="45720" tIns="18288" bIns="18288"/>
           <a:lstStyle/>
           <a:p>
             <a:pPr algn="ctr">
@@ -22439,7 +23046,7 @@
           </a:fontRef>
         </p:style>
         <p:txBody>
-          <a:bodyPr wrap="square" lIns="164592" tIns="73152" rIns="164592" bIns="73152" rtlCol="0" anchor="ctr"/>
+          <a:bodyPr rtlCol="0" anchor="ctr" wrap="square" lIns="164592" rIns="164592" tIns="73152" bIns="73152"/>
           <a:lstStyle/>
           <a:p>
             <a:pPr algn="l"/>
@@ -22473,7 +23080,7 @@
 </file>
 
 <file path=ppt/slides/slide9.xml><?xml version="1.0" encoding="utf-8"?>
-<p:sld xmlns:a="http://schemas.openxmlformats.org/drawingml/2006/main" xmlns:r="http://schemas.openxmlformats.org/officeDocument/2006/relationships" xmlns:p="http://schemas.openxmlformats.org/presentationml/2006/main">
+<p:sld xmlns:a="http://schemas.openxmlformats.org/drawingml/2006/main" xmlns:p="http://schemas.openxmlformats.org/presentationml/2006/main" xmlns:r="http://schemas.openxmlformats.org/officeDocument/2006/relationships">
   <p:cSld>
     <p:spTree>
       <p:nvGrpSpPr>
@@ -22481,14 +23088,7 @@
         <p:cNvGrpSpPr/>
         <p:nvPr/>
       </p:nvGrpSpPr>
-      <p:grpSpPr>
-        <a:xfrm>
-          <a:off x="0" y="0"/>
-          <a:ext cx="0" cy="0"/>
-          <a:chOff x="0" y="0"/>
-          <a:chExt cx="0" cy="0"/>
-        </a:xfrm>
-      </p:grpSpPr>
+      <p:grpSpPr/>
       <p:sp>
         <p:nvSpPr>
           <p:cNvPr id="2" name="Title 1"/>
@@ -22576,7 +23176,6 @@
           <a:lstStyle/>
           <a:p>
             <a:pPr algn="ctr"/>
-            <a:endParaRPr/>
           </a:p>
         </p:txBody>
       </p:sp>
@@ -23134,7 +23733,7 @@
           </a:fontRef>
         </p:style>
         <p:txBody>
-          <a:bodyPr wrap="square" lIns="164592" tIns="73152" rIns="164592" bIns="73152" rtlCol="0" anchor="ctr"/>
+          <a:bodyPr rtlCol="0" anchor="ctr" wrap="square" lIns="164592" rIns="164592" tIns="73152" bIns="73152"/>
           <a:lstStyle/>
           <a:p>
             <a:pPr algn="l"/>
@@ -23498,44 +24097,44 @@
         <a:sysClr val="window" lastClr="FFFFFF"/>
       </a:lt1>
       <a:dk2>
-        <a:srgbClr val="0E2841"/>
+        <a:srgbClr val="1F497D"/>
       </a:dk2>
       <a:lt2>
-        <a:srgbClr val="E8E8E8"/>
+        <a:srgbClr val="EEECE1"/>
       </a:lt2>
       <a:accent1>
-        <a:srgbClr val="156082"/>
+        <a:srgbClr val="4F81BD"/>
       </a:accent1>
       <a:accent2>
-        <a:srgbClr val="E97132"/>
+        <a:srgbClr val="C0504D"/>
       </a:accent2>
       <a:accent3>
-        <a:srgbClr val="196B24"/>
+        <a:srgbClr val="9BBB59"/>
       </a:accent3>
       <a:accent4>
-        <a:srgbClr val="0F9ED5"/>
+        <a:srgbClr val="8064A2"/>
       </a:accent4>
       <a:accent5>
-        <a:srgbClr val="A02B93"/>
+        <a:srgbClr val="4BACC6"/>
       </a:accent5>
       <a:accent6>
-        <a:srgbClr val="4EA72E"/>
+        <a:srgbClr val="F79646"/>
       </a:accent6>
       <a:hlink>
-        <a:srgbClr val="467886"/>
+        <a:srgbClr val="0000FF"/>
       </a:hlink>
       <a:folHlink>
-        <a:srgbClr val="96607D"/>
+        <a:srgbClr val="800080"/>
       </a:folHlink>
     </a:clrScheme>
     <a:fontScheme name="Office">
       <a:majorFont>
-        <a:latin typeface="Aptos Display" panose="02110004020202020204"/>
+        <a:latin typeface="Calibri"/>
         <a:ea typeface=""/>
         <a:cs typeface=""/>
-        <a:font script="Jpan" typeface="游ゴシック Light"/>
+        <a:font script="Jpan" typeface="ＭＳ Ｐゴシック"/>
         <a:font script="Hang" typeface="맑은 고딕"/>
-        <a:font script="Hans" typeface="等线 Light"/>
+        <a:font script="Hans" typeface="宋体"/>
         <a:font script="Hant" typeface="新細明體"/>
         <a:font script="Arab" typeface="Times New Roman"/>
         <a:font script="Hebr" typeface="Times New Roman"/>
@@ -23563,31 +24162,14 @@
         <a:font script="Viet" typeface="Times New Roman"/>
         <a:font script="Uigh" typeface="Microsoft Uighur"/>
         <a:font script="Geor" typeface="Sylfaen"/>
-        <a:font script="Armn" typeface="Arial"/>
-        <a:font script="Bugi" typeface="Leelawadee UI"/>
-        <a:font script="Bopo" typeface="Microsoft JhengHei"/>
-        <a:font script="Java" typeface="Javanese Text"/>
-        <a:font script="Lisu" typeface="Segoe UI"/>
-        <a:font script="Mymr" typeface="Myanmar Text"/>
-        <a:font script="Nkoo" typeface="Ebrima"/>
-        <a:font script="Olck" typeface="Nirmala UI"/>
-        <a:font script="Osma" typeface="Ebrima"/>
-        <a:font script="Phag" typeface="Phagspa"/>
-        <a:font script="Syrn" typeface="Estrangelo Edessa"/>
-        <a:font script="Syrj" typeface="Estrangelo Edessa"/>
-        <a:font script="Syre" typeface="Estrangelo Edessa"/>
-        <a:font script="Sora" typeface="Nirmala UI"/>
-        <a:font script="Tale" typeface="Microsoft Tai Le"/>
-        <a:font script="Talu" typeface="Microsoft New Tai Lue"/>
-        <a:font script="Tfng" typeface="Ebrima"/>
       </a:majorFont>
       <a:minorFont>
-        <a:latin typeface="Aptos" panose="02110004020202020204"/>
+        <a:latin typeface="Calibri"/>
         <a:ea typeface=""/>
         <a:cs typeface=""/>
-        <a:font script="Jpan" typeface="游ゴシック"/>
+        <a:font script="Jpan" typeface="ＭＳ Ｐゴシック"/>
         <a:font script="Hang" typeface="맑은 고딕"/>
-        <a:font script="Hans" typeface="等线"/>
+        <a:font script="Hans" typeface="宋体"/>
         <a:font script="Hant" typeface="新細明體"/>
         <a:font script="Arab" typeface="Arial"/>
         <a:font script="Hebr" typeface="Arial"/>
@@ -23615,23 +24197,6 @@
         <a:font script="Viet" typeface="Arial"/>
         <a:font script="Uigh" typeface="Microsoft Uighur"/>
         <a:font script="Geor" typeface="Sylfaen"/>
-        <a:font script="Armn" typeface="Arial"/>
-        <a:font script="Bugi" typeface="Leelawadee UI"/>
-        <a:font script="Bopo" typeface="Microsoft JhengHei"/>
-        <a:font script="Java" typeface="Javanese Text"/>
-        <a:font script="Lisu" typeface="Segoe UI"/>
-        <a:font script="Mymr" typeface="Myanmar Text"/>
-        <a:font script="Nkoo" typeface="Ebrima"/>
-        <a:font script="Olck" typeface="Nirmala UI"/>
-        <a:font script="Osma" typeface="Ebrima"/>
-        <a:font script="Phag" typeface="Phagspa"/>
-        <a:font script="Syrn" typeface="Estrangelo Edessa"/>
-        <a:font script="Syrj" typeface="Estrangelo Edessa"/>
-        <a:font script="Syre" typeface="Estrangelo Edessa"/>
-        <a:font script="Sora" typeface="Nirmala UI"/>
-        <a:font script="Tale" typeface="Microsoft Tai Le"/>
-        <a:font script="Talu" typeface="Microsoft New Tai Lue"/>
-        <a:font script="Tfng" typeface="Ebrima"/>
       </a:minorFont>
     </a:fontScheme>
     <a:fmtScheme name="Office">
@@ -23643,136 +24208,180 @@
           <a:gsLst>
             <a:gs pos="0">
               <a:schemeClr val="phClr">
-                <a:lumMod val="110000"/>
-                <a:satMod val="105000"/>
-                <a:tint val="67000"/>
+                <a:tint val="50000"/>
+                <a:satMod val="300000"/>
               </a:schemeClr>
             </a:gs>
-            <a:gs pos="50000">
+            <a:gs pos="35000">
               <a:schemeClr val="phClr">
-                <a:lumMod val="105000"/>
-                <a:satMod val="103000"/>
-                <a:tint val="73000"/>
+                <a:tint val="37000"/>
+                <a:satMod val="300000"/>
               </a:schemeClr>
             </a:gs>
             <a:gs pos="100000">
               <a:schemeClr val="phClr">
-                <a:lumMod val="105000"/>
-                <a:satMod val="109000"/>
-                <a:tint val="81000"/>
+                <a:tint val="15000"/>
+                <a:satMod val="350000"/>
               </a:schemeClr>
             </a:gs>
           </a:gsLst>
-          <a:lin ang="5400000" scaled="0"/>
+          <a:lin ang="16200000" scaled="1"/>
         </a:gradFill>
         <a:gradFill rotWithShape="1">
           <a:gsLst>
             <a:gs pos="0">
               <a:schemeClr val="phClr">
-                <a:satMod val="103000"/>
-                <a:lumMod val="102000"/>
-                <a:tint val="94000"/>
-              </a:schemeClr>
-            </a:gs>
-            <a:gs pos="50000">
-              <a:schemeClr val="phClr">
-                <a:satMod val="110000"/>
-                <a:lumMod val="100000"/>
+                <a:tint val="100000"/>
                 <a:shade val="100000"/>
+                <a:satMod val="130000"/>
               </a:schemeClr>
             </a:gs>
             <a:gs pos="100000">
               <a:schemeClr val="phClr">
-                <a:lumMod val="99000"/>
-                <a:satMod val="120000"/>
-                <a:shade val="78000"/>
+                <a:tint val="50000"/>
+                <a:shade val="100000"/>
+                <a:satMod val="350000"/>
               </a:schemeClr>
             </a:gs>
           </a:gsLst>
-          <a:lin ang="5400000" scaled="0"/>
+          <a:lin ang="16200000" scaled="0"/>
         </a:gradFill>
       </a:fillStyleLst>
       <a:lnStyleLst>
-        <a:ln w="12700" cap="flat" cmpd="sng" algn="ctr">
+        <a:ln w="9525" cap="flat" cmpd="sng" algn="ctr">
           <a:solidFill>
-            <a:schemeClr val="phClr"/>
+            <a:schemeClr val="phClr">
+              <a:shade val="95000"/>
+              <a:satMod val="105000"/>
+            </a:schemeClr>
           </a:solidFill>
           <a:prstDash val="solid"/>
-          <a:miter lim="800000"/>
-        </a:ln>
-        <a:ln w="19050" cap="flat" cmpd="sng" algn="ctr">
-          <a:solidFill>
-            <a:schemeClr val="phClr"/>
-          </a:solidFill>
-          <a:prstDash val="solid"/>
-          <a:miter lim="800000"/>
         </a:ln>
         <a:ln w="25400" cap="flat" cmpd="sng" algn="ctr">
           <a:solidFill>
             <a:schemeClr val="phClr"/>
           </a:solidFill>
           <a:prstDash val="solid"/>
-          <a:miter lim="800000"/>
+        </a:ln>
+        <a:ln w="38100" cap="flat" cmpd="sng" algn="ctr">
+          <a:solidFill>
+            <a:schemeClr val="phClr"/>
+          </a:solidFill>
+          <a:prstDash val="solid"/>
         </a:ln>
       </a:lnStyleLst>
       <a:effectStyleLst>
         <a:effectStyle>
-          <a:effectLst/>
-        </a:effectStyle>
-        <a:effectStyle>
-          <a:effectLst/>
+          <a:effectLst>
+            <a:outerShdw blurRad="40000" dist="20000" dir="5400000" rotWithShape="0">
+              <a:srgbClr val="000000">
+                <a:alpha val="38000"/>
+              </a:srgbClr>
+            </a:outerShdw>
+          </a:effectLst>
         </a:effectStyle>
         <a:effectStyle>
           <a:effectLst>
-            <a:outerShdw blurRad="57150" dist="19050" dir="5400000" algn="ctr" rotWithShape="0">
+            <a:outerShdw blurRad="40000" dist="23000" dir="5400000" rotWithShape="0">
               <a:srgbClr val="000000">
-                <a:alpha val="63000"/>
+                <a:alpha val="35000"/>
               </a:srgbClr>
             </a:outerShdw>
           </a:effectLst>
+        </a:effectStyle>
+        <a:effectStyle>
+          <a:effectLst>
+            <a:outerShdw blurRad="40000" dist="23000" dir="5400000" rotWithShape="0">
+              <a:srgbClr val="000000">
+                <a:alpha val="35000"/>
+              </a:srgbClr>
+            </a:outerShdw>
+          </a:effectLst>
+          <a:scene3d>
+            <a:camera prst="orthographicFront">
+              <a:rot lat="0" lon="0" rev="0"/>
+            </a:camera>
+            <a:lightRig rig="threePt" dir="t">
+              <a:rot lat="0" lon="0" rev="1200000"/>
+            </a:lightRig>
+          </a:scene3d>
+          <a:sp3d>
+            <a:bevelT w="63500" h="25400"/>
+          </a:sp3d>
         </a:effectStyle>
       </a:effectStyleLst>
       <a:bgFillStyleLst>
         <a:solidFill>
           <a:schemeClr val="phClr"/>
         </a:solidFill>
-        <a:solidFill>
-          <a:schemeClr val="phClr">
-            <a:tint val="95000"/>
-            <a:satMod val="170000"/>
-          </a:schemeClr>
-        </a:solidFill>
         <a:gradFill rotWithShape="1">
           <a:gsLst>
             <a:gs pos="0">
               <a:schemeClr val="phClr">
-                <a:tint val="93000"/>
-                <a:satMod val="150000"/>
-                <a:shade val="98000"/>
-                <a:lumMod val="102000"/>
+                <a:tint val="40000"/>
+                <a:satMod val="350000"/>
               </a:schemeClr>
             </a:gs>
-            <a:gs pos="50000">
+            <a:gs pos="40000">
               <a:schemeClr val="phClr">
-                <a:tint val="98000"/>
-                <a:satMod val="130000"/>
-                <a:shade val="90000"/>
-                <a:lumMod val="103000"/>
+                <a:tint val="45000"/>
+                <a:shade val="99000"/>
+                <a:satMod val="350000"/>
               </a:schemeClr>
             </a:gs>
             <a:gs pos="100000">
               <a:schemeClr val="phClr">
-                <a:shade val="63000"/>
-                <a:satMod val="120000"/>
+                <a:shade val="20000"/>
+                <a:satMod val="255000"/>
               </a:schemeClr>
             </a:gs>
           </a:gsLst>
-          <a:lin ang="5400000" scaled="0"/>
+          <a:path path="circle">
+            <a:fillToRect l="50000" t="-80000" r="50000" b="180000"/>
+          </a:path>
+        </a:gradFill>
+        <a:gradFill rotWithShape="1">
+          <a:gsLst>
+            <a:gs pos="0">
+              <a:schemeClr val="phClr">
+                <a:tint val="80000"/>
+                <a:satMod val="300000"/>
+              </a:schemeClr>
+            </a:gs>
+            <a:gs pos="100000">
+              <a:schemeClr val="phClr">
+                <a:shade val="30000"/>
+                <a:satMod val="200000"/>
+              </a:schemeClr>
+            </a:gs>
+          </a:gsLst>
+          <a:path path="circle">
+            <a:fillToRect l="50000" t="50000" r="50000" b="50000"/>
+          </a:path>
         </a:gradFill>
       </a:bgFillStyleLst>
     </a:fmtScheme>
   </a:themeElements>
   <a:objectDefaults>
+    <a:spDef>
+      <a:spPr/>
+      <a:bodyPr/>
+      <a:lstStyle/>
+      <a:style>
+        <a:lnRef idx="1">
+          <a:schemeClr val="accent1"/>
+        </a:lnRef>
+        <a:fillRef idx="3">
+          <a:schemeClr val="accent1"/>
+        </a:fillRef>
+        <a:effectRef idx="2">
+          <a:schemeClr val="accent1"/>
+        </a:effectRef>
+        <a:fontRef idx="minor">
+          <a:schemeClr val="lt1"/>
+        </a:fontRef>
+      </a:style>
+    </a:spDef>
     <a:lnDef>
       <a:spPr/>
       <a:bodyPr/>
@@ -23794,10 +24403,5 @@
     </a:lnDef>
   </a:objectDefaults>
   <a:extraClrSchemeLst/>
-  <a:extLst>
-    <a:ext uri="{05A4C25C-085E-4340-85A3-A5531E510DB2}">
-      <thm15:themeFamily xmlns:thm15="http://schemas.microsoft.com/office/thememl/2012/main" name="Office Theme" id="{2E142A2C-CD16-42D6-873A-C26D2A0506FA}" vid="{1BDDFF52-6CD6-40A5-AB3C-68EB2F1E4D0A}"/>
-    </a:ext>
-  </a:extLst>
 </a:theme>
 </file>